--- a/Diploma_presentation.pptx
+++ b/Diploma_presentation.pptx
@@ -12,12 +12,12 @@
     <p:sldId id="302" r:id="rId6"/>
     <p:sldId id="306" r:id="rId7"/>
     <p:sldId id="316" r:id="rId8"/>
-    <p:sldId id="317" r:id="rId9"/>
+    <p:sldId id="331" r:id="rId9"/>
     <p:sldId id="318" r:id="rId10"/>
-    <p:sldId id="319" r:id="rId11"/>
-    <p:sldId id="320" r:id="rId12"/>
-    <p:sldId id="321" r:id="rId13"/>
-    <p:sldId id="322" r:id="rId14"/>
+    <p:sldId id="321" r:id="rId11"/>
+    <p:sldId id="322" r:id="rId12"/>
+    <p:sldId id="319" r:id="rId13"/>
+    <p:sldId id="320" r:id="rId14"/>
     <p:sldId id="323" r:id="rId15"/>
     <p:sldId id="324" r:id="rId16"/>
     <p:sldId id="327" r:id="rId17"/>
@@ -14808,7 +14808,7 @@
           <a:p>
             <a:r>
               <a:rPr lang="ru-RU" b="1" dirty="0"/>
-              <a:t>Выбор видео-модели</a:t>
+              <a:t>Бимодальная голова: позднее слияние</a:t>
             </a:r>
           </a:p>
         </p:txBody>
@@ -15496,7 +15496,7 @@
           <p:cNvPr id="2" name="TextBox 1">
             <a:extLst>
               <a:ext uri="{FF2B5EF4-FFF2-40B4-BE49-F238E27FC236}">
-                <a16:creationId xmlns:a16="http://schemas.microsoft.com/office/drawing/2014/main" id="{897608D0-359F-3E40-BF29-3346EA0AFAC1}"/>
+                <a16:creationId xmlns:a16="http://schemas.microsoft.com/office/drawing/2014/main" id="{53CE62E5-4DEE-3849-A1F9-FADA7378860B}"/>
               </a:ext>
             </a:extLst>
           </p:cNvPr>
@@ -15505,8 +15505,8 @@
         </p:nvSpPr>
         <p:spPr>
           <a:xfrm>
-            <a:off x="457200" y="2006600"/>
-            <a:ext cx="11328400" cy="762000"/>
+            <a:off x="660400" y="1905000"/>
+            <a:ext cx="10871200" cy="635000"/>
           </a:xfrm>
           <a:prstGeom prst="rect">
             <a:avLst/>
@@ -15521,69 +15521,51 @@
           <a:p>
             <a:pPr algn="l"/>
             <a:r>
-              <a:rPr lang="ru-RU" sz="1400">
+              <a:rPr lang="en-US" sz="1500">
                 <a:solidFill>
                   <a:srgbClr val="1A1A1A"/>
                 </a:solidFill>
-                <a:latin typeface="HSE Sans" panose="02000000000000000000" pitchFamily="2" charset="0"/>
-              </a:rPr>
-              <a:t>6 конфигураций «бэкбон × агрегатор» на </a:t>
-            </a:r>
-            <a:r>
-              <a:rPr lang="en-US" sz="1400">
+                <a:latin typeface="HSE Sans"/>
+              </a:rPr>
+              <a:t>Late fusion: </a:t>
+            </a:r>
+            <a:r>
+              <a:rPr lang="ru-RU" sz="1500">
                 <a:solidFill>
                   <a:srgbClr val="1A1A1A"/>
                 </a:solidFill>
+                <a:latin typeface="HSE Sans" panose="02000000000000000000" pitchFamily="2" charset="0"/>
+              </a:rPr>
+              <a:t>аудио- и видео-признаки извлекаются раздельно, конкатенируются в общий вектор (512) и подаются в линейный классификатор на 4 класса. Аудио-ветка повторяет </a:t>
+            </a:r>
+            <a:r>
+              <a:rPr lang="en-US" sz="1500">
+                <a:solidFill>
+                  <a:srgbClr val="1A1A1A"/>
+                </a:solidFill>
                 <a:latin typeface="HSE Sans"/>
               </a:rPr>
-              <a:t>RAVDESS (8 </a:t>
-            </a:r>
-            <a:r>
-              <a:rPr lang="ru-RU" sz="1400">
+              <a:t>MelCNN, </a:t>
+            </a:r>
+            <a:r>
+              <a:rPr lang="ru-RU" sz="1500">
                 <a:solidFill>
                   <a:srgbClr val="1A1A1A"/>
                 </a:solidFill>
                 <a:latin typeface="HSE Sans" panose="02000000000000000000" pitchFamily="2" charset="0"/>
               </a:rPr>
-              <a:t>эмоций). Выбран </a:t>
-            </a:r>
-            <a:r>
-              <a:rPr lang="en-US" sz="1400">
+              <a:t>видео-ветка — </a:t>
+            </a:r>
+            <a:r>
+              <a:rPr lang="en-US" sz="1500">
                 <a:solidFill>
                   <a:srgbClr val="1A1A1A"/>
                 </a:solidFill>
                 <a:latin typeface="HSE Sans"/>
               </a:rPr>
-              <a:t>EmotiEffNet + BiLSTM (0,683 acc / 0,671 F1): EmotiEffNet </a:t>
-            </a:r>
-            <a:r>
-              <a:rPr lang="ru-RU" sz="1400">
-                <a:solidFill>
-                  <a:srgbClr val="1A1A1A"/>
-                </a:solidFill>
-                <a:latin typeface="HSE Sans" panose="02000000000000000000" pitchFamily="2" charset="0"/>
-              </a:rPr>
-              <a:t>существенно превосходит </a:t>
-            </a:r>
-            <a:r>
-              <a:rPr lang="en-US" sz="1400">
-                <a:solidFill>
-                  <a:srgbClr val="1A1A1A"/>
-                </a:solidFill>
-                <a:latin typeface="HSE Sans"/>
-              </a:rPr>
-              <a:t>MobileNetV3-Small </a:t>
-            </a:r>
-            <a:r>
-              <a:rPr lang="ru-RU" sz="1400">
-                <a:solidFill>
-                  <a:srgbClr val="1A1A1A"/>
-                </a:solidFill>
-                <a:latin typeface="HSE Sans" panose="02000000000000000000" pitchFamily="2" charset="0"/>
-              </a:rPr>
-              <a:t>по качеству при сопоставимом времени инференса (~247–276 мс).</a:t>
-            </a:r>
-            <a:endParaRPr lang="en-US" sz="1400" dirty="0">
+              <a:t>EmotiEffNet + BiLSTM.</a:t>
+            </a:r>
+            <a:endParaRPr lang="en-US" sz="1500" dirty="0">
               <a:solidFill>
                 <a:srgbClr val="1A1A1A"/>
               </a:solidFill>
@@ -15597,7 +15579,7 @@
           <p:cNvPr id="3" name="Picture 2">
             <a:extLst>
               <a:ext uri="{FF2B5EF4-FFF2-40B4-BE49-F238E27FC236}">
-                <a16:creationId xmlns:a16="http://schemas.microsoft.com/office/drawing/2014/main" id="{7678BCCA-8FC4-B26E-AF90-18FCA4A1AEC6}"/>
+                <a16:creationId xmlns:a16="http://schemas.microsoft.com/office/drawing/2014/main" id="{5233D80E-1855-91F9-8069-073B57C8CE3A}"/>
               </a:ext>
             </a:extLst>
           </p:cNvPr>
@@ -15614,8 +15596,8 @@
         </p:blipFill>
         <p:spPr>
           <a:xfrm>
-            <a:off x="508000" y="3048000"/>
-            <a:ext cx="11176000" cy="3336963"/>
+            <a:off x="1847710" y="2692400"/>
+            <a:ext cx="8496578" cy="3810000"/>
           </a:xfrm>
           <a:prstGeom prst="rect">
             <a:avLst/>
@@ -15625,7 +15607,7 @@
     </p:spTree>
     <p:extLst>
       <p:ext uri="{BB962C8B-B14F-4D97-AF65-F5344CB8AC3E}">
-        <p14:creationId xmlns:p14="http://schemas.microsoft.com/office/powerpoint/2010/main" val="2748530575"/>
+        <p14:creationId xmlns:p14="http://schemas.microsoft.com/office/powerpoint/2010/main" val="2838057669"/>
       </p:ext>
     </p:extLst>
   </p:cSld>
@@ -18350,8 +18332,10 @@
           <a:solidFill>
             <a:srgbClr val="1F4E9B"/>
           </a:solidFill>
-          <a:ln w="12700" cap="flat" cmpd="sng" algn="ctr">
-            <a:noFill/>
+          <a:ln w="19050" cap="flat" cmpd="sng" algn="ctr">
+            <a:solidFill>
+              <a:srgbClr val="1E4D9B"/>
+            </a:solidFill>
             <a:prstDash val="solid"/>
             <a:miter lim="800000"/>
           </a:ln>
@@ -18373,21 +18357,21 @@
           </a:fontRef>
         </p:style>
         <p:txBody>
-          <a:bodyPr vertOverflow="clip" horzOverflow="clip" wrap="none" rtlCol="0" anchor="ctr" anchorCtr="0">
+          <a:bodyPr vertOverflow="clip" horzOverflow="clip" wrap="square" lIns="101600" tIns="25400" rIns="101600" bIns="25400" rtlCol="0" anchor="ctr" anchorCtr="0">
             <a:noAutofit/>
           </a:bodyPr>
           <a:lstStyle/>
           <a:p>
-            <a:pPr algn="l"/>
-            <a:r>
-              <a:rPr lang="ru-RU" sz="1500" b="1">
+            <a:pPr algn="ctr"/>
+            <a:r>
+              <a:rPr lang="ru-RU" sz="1600" b="1">
                 <a:solidFill>
                   <a:srgbClr val="FFFFFF"/>
                 </a:solidFill>
               </a:rPr>
               <a:t>Аудио-поток</a:t>
             </a:r>
-            <a:endParaRPr lang="en-US" sz="1500" b="1">
+            <a:endParaRPr lang="en-US" sz="1600" b="1">
               <a:solidFill>
                 <a:srgbClr val="FFFFFF"/>
               </a:solidFill>
@@ -18540,10 +18524,12 @@
             <a:avLst/>
           </a:prstGeom>
           <a:solidFill>
-            <a:srgbClr val="2E7D5B"/>
+            <a:srgbClr val="2F7D5B"/>
           </a:solidFill>
-          <a:ln w="12700" cap="flat" cmpd="sng" algn="ctr">
-            <a:noFill/>
+          <a:ln w="19050" cap="flat" cmpd="sng" algn="ctr">
+            <a:solidFill>
+              <a:srgbClr val="2F7D5B"/>
+            </a:solidFill>
             <a:prstDash val="solid"/>
             <a:miter lim="800000"/>
           </a:ln>
@@ -18565,21 +18551,21 @@
           </a:fontRef>
         </p:style>
         <p:txBody>
-          <a:bodyPr vertOverflow="clip" horzOverflow="clip" wrap="none" rtlCol="0" anchor="ctr" anchorCtr="0">
+          <a:bodyPr vertOverflow="clip" horzOverflow="clip" wrap="square" lIns="101600" tIns="25400" rIns="101600" bIns="25400" rtlCol="0" anchor="ctr" anchorCtr="0">
             <a:noAutofit/>
           </a:bodyPr>
           <a:lstStyle/>
           <a:p>
-            <a:pPr algn="l"/>
-            <a:r>
-              <a:rPr lang="ru-RU" sz="1500" b="1">
+            <a:pPr algn="ctr"/>
+            <a:r>
+              <a:rPr lang="ru-RU" sz="1600" b="1">
                 <a:solidFill>
                   <a:srgbClr val="FFFFFF"/>
                 </a:solidFill>
               </a:rPr>
               <a:t>Видео-поток</a:t>
             </a:r>
-            <a:endParaRPr lang="en-US" sz="1500" b="1">
+            <a:endParaRPr lang="en-US" sz="1600" b="1">
               <a:solidFill>
                 <a:srgbClr val="FFFFFF"/>
               </a:solidFill>
@@ -18714,10 +18700,12 @@
             <a:avLst/>
           </a:prstGeom>
           <a:solidFill>
-            <a:srgbClr val="102E5A"/>
+            <a:schemeClr val="tx1"/>
           </a:solidFill>
-          <a:ln w="12700" cap="flat" cmpd="sng" algn="ctr">
-            <a:noFill/>
+          <a:ln w="19050" cap="flat" cmpd="sng" algn="ctr">
+            <a:solidFill>
+              <a:schemeClr val="tx1"/>
+            </a:solidFill>
             <a:prstDash val="solid"/>
             <a:miter lim="800000"/>
           </a:ln>
@@ -18739,21 +18727,21 @@
           </a:fontRef>
         </p:style>
         <p:txBody>
-          <a:bodyPr vertOverflow="clip" horzOverflow="clip" wrap="none" rtlCol="0" anchor="ctr" anchorCtr="0">
+          <a:bodyPr vertOverflow="clip" horzOverflow="clip" wrap="square" lIns="101600" tIns="25400" rIns="101600" bIns="25400" rtlCol="0" anchor="ctr" anchorCtr="0">
             <a:noAutofit/>
           </a:bodyPr>
           <a:lstStyle/>
           <a:p>
-            <a:pPr algn="l"/>
-            <a:r>
-              <a:rPr lang="ru-RU" sz="1500" b="1">
+            <a:pPr algn="ctr"/>
+            <a:r>
+              <a:rPr lang="ru-RU" sz="1600" b="1">
                 <a:solidFill>
                   <a:srgbClr val="FFFFFF"/>
                 </a:solidFill>
               </a:rPr>
               <a:t>Поток инференса</a:t>
             </a:r>
-            <a:endParaRPr lang="en-US" sz="1500" b="1">
+            <a:endParaRPr lang="en-US" sz="1600" b="1">
               <a:solidFill>
                 <a:srgbClr val="FFFFFF"/>
               </a:solidFill>
@@ -22784,7 +22772,7 @@
         <p:spPr>
           <a:xfrm>
             <a:off x="666489" y="1160924"/>
-            <a:ext cx="5094599" cy="802343"/>
+            <a:ext cx="6100071" cy="802343"/>
           </a:xfrm>
           <a:prstGeom prst="rect">
             <a:avLst/>
@@ -22792,7 +22780,7 @@
         </p:spPr>
         <p:txBody>
           <a:bodyPr vert="horz" lIns="0" tIns="0" rIns="0" bIns="0" rtlCol="0" anchor="t">
-            <a:normAutofit/>
+            <a:normAutofit fontScale="92500"/>
           </a:bodyPr>
           <a:lstStyle>
             <a:lvl1pPr algn="l" defTabSz="914400" rtl="0" eaLnBrk="1" latinLnBrk="0" hangingPunct="1">
@@ -22818,6 +22806,54 @@
               <a:rPr lang="ru-RU" b="1" dirty="0"/>
               <a:t>Исследование предметной области</a:t>
             </a:r>
+            <a:endParaRPr lang="en-US" b="1" dirty="0"/>
+          </a:p>
+          <a:p>
+            <a:pPr marL="0" marR="0" lvl="0" indent="0" algn="l" defTabSz="914400" rtl="0" eaLnBrk="1" fontAlgn="auto" latinLnBrk="0" hangingPunct="1">
+              <a:lnSpc>
+                <a:spcPct val="100000"/>
+              </a:lnSpc>
+              <a:spcBef>
+                <a:spcPts val="0"/>
+              </a:spcBef>
+              <a:spcAft>
+                <a:spcPts val="0"/>
+              </a:spcAft>
+              <a:buClrTx/>
+              <a:buSzTx/>
+              <a:buFontTx/>
+              <a:buNone/>
+              <a:tabLst/>
+              <a:defRPr/>
+            </a:pPr>
+            <a:r>
+              <a:rPr lang="ru-RU" sz="2000" dirty="0">
+                <a:solidFill>
+                  <a:srgbClr val="0F2C68"/>
+                </a:solidFill>
+                <a:latin typeface="Calibri" panose="020F0502020204030204"/>
+                <a:ea typeface="+mn-ea"/>
+                <a:cs typeface="+mn-cs"/>
+              </a:rPr>
+              <a:t>Виды определения эмоций по различным модальностям</a:t>
+            </a:r>
+            <a:endParaRPr kumimoji="0" lang="ru-RU" sz="2000" b="0" i="0" u="none" strike="noStrike" kern="1200" cap="none" spc="0" normalizeH="0" baseline="0" noProof="0" dirty="0">
+              <a:ln>
+                <a:noFill/>
+              </a:ln>
+              <a:solidFill>
+                <a:srgbClr val="0F2C68"/>
+              </a:solidFill>
+              <a:effectLst/>
+              <a:uLnTx/>
+              <a:uFillTx/>
+              <a:latin typeface="Calibri" panose="020F0502020204030204"/>
+              <a:ea typeface="+mn-ea"/>
+              <a:cs typeface="+mn-cs"/>
+            </a:endParaRPr>
+          </a:p>
+          <a:p>
+            <a:endParaRPr lang="ru-RU" b="1" dirty="0"/>
           </a:p>
         </p:txBody>
       </p:sp>
@@ -23578,8 +23614,10 @@
           <a:solidFill>
             <a:srgbClr val="1F4E9B"/>
           </a:solidFill>
-          <a:ln w="12700" cap="flat" cmpd="sng" algn="ctr">
-            <a:noFill/>
+          <a:ln w="19050" cap="flat" cmpd="sng" algn="ctr">
+            <a:solidFill>
+              <a:srgbClr val="1E4D9B"/>
+            </a:solidFill>
             <a:prstDash val="solid"/>
             <a:miter lim="800000"/>
           </a:ln>
@@ -23606,30 +23644,16 @@
           </a:bodyPr>
           <a:lstStyle/>
           <a:p>
-            <a:pPr algn="l"/>
-            <a:r>
-              <a:rPr lang="en-US" sz="1600" b="1">
+            <a:pPr algn="ctr"/>
+            <a:r>
+              <a:rPr lang="en-US" sz="1600" b="1" dirty="0">
                 <a:solidFill>
                   <a:srgbClr val="FFFFFF"/>
                 </a:solidFill>
                 <a:latin typeface="HSE Sans"/>
               </a:rPr>
-              <a:t>SER — </a:t>
-            </a:r>
-            <a:r>
-              <a:rPr lang="ru-RU" sz="1600" b="1">
-                <a:solidFill>
-                  <a:srgbClr val="FFFFFF"/>
-                </a:solidFill>
-              </a:rPr>
-              <a:t>по речи</a:t>
-            </a:r>
-            <a:endParaRPr lang="en-US" sz="1600" b="1">
-              <a:solidFill>
-                <a:srgbClr val="FFFFFF"/>
-              </a:solidFill>
-              <a:latin typeface="HSE Sans"/>
-            </a:endParaRPr>
+              <a:t>Speech Emotion Recognition (SER)</a:t>
+            </a:r>
           </a:p>
         </p:txBody>
       </p:sp>
@@ -23647,7 +23671,7 @@
         </p:nvSpPr>
         <p:spPr>
           <a:xfrm>
-            <a:off x="685800" y="2971800"/>
+            <a:off x="724487" y="3094125"/>
             <a:ext cx="3327400" cy="304800"/>
           </a:xfrm>
           <a:prstGeom prst="rect">
@@ -23663,19 +23687,18 @@
           <a:p>
             <a:pPr algn="l"/>
             <a:r>
-              <a:rPr lang="en-US" sz="1100" i="1">
-                <a:solidFill>
-                  <a:srgbClr val="1F4E9B"/>
-                </a:solidFill>
-                <a:latin typeface="HSE Sans"/>
-              </a:rPr>
-              <a:t>Speech Emotion Recognition</a:t>
-            </a:r>
-            <a:endParaRPr lang="en-US" sz="1100" i="1" dirty="0">
+              <a:rPr lang="ru-RU" sz="1400" dirty="0">
+                <a:solidFill>
+                  <a:srgbClr val="1A1A1A"/>
+                </a:solidFill>
+              </a:rPr>
+              <a:t>Определение эмоций по речи</a:t>
+            </a:r>
+            <a:endParaRPr lang="en-US" sz="1400" dirty="0">
               <a:solidFill>
-                <a:srgbClr val="1F4E9B"/>
+                <a:srgbClr val="1A1A1A"/>
               </a:solidFill>
-              <a:latin typeface="HSE Sans"/>
+              <a:latin typeface="HSE Sans" panose="02000000000000000000" pitchFamily="2" charset="0"/>
             </a:endParaRPr>
           </a:p>
         </p:txBody>
@@ -23694,7 +23717,7 @@
         </p:nvSpPr>
         <p:spPr>
           <a:xfrm>
-            <a:off x="736600" y="3378200"/>
+            <a:off x="736600" y="3561076"/>
             <a:ext cx="3225800" cy="2540000"/>
           </a:xfrm>
           <a:prstGeom prst="rect">
@@ -23710,7 +23733,7 @@
           <a:p>
             <a:pPr algn="l"/>
             <a:r>
-              <a:rPr lang="en-US" sz="1400">
+              <a:rPr lang="en-US" sz="1400" dirty="0">
                 <a:solidFill>
                   <a:srgbClr val="1A1A1A"/>
                 </a:solidFill>
@@ -23719,7 +23742,7 @@
               <a:t>•  MFCC + SVM, </a:t>
             </a:r>
             <a:r>
-              <a:rPr lang="ru-RU" sz="1400">
+              <a:rPr lang="ru-RU" sz="1400" dirty="0">
                 <a:solidFill>
                   <a:srgbClr val="1A1A1A"/>
                 </a:solidFill>
@@ -23729,7 +23752,7 @@
 •  Трансформеры: </a:t>
             </a:r>
             <a:r>
-              <a:rPr lang="en-US" sz="1400">
+              <a:rPr lang="en-US" sz="1400" dirty="0">
                 <a:solidFill>
                   <a:srgbClr val="1A1A1A"/>
                 </a:solidFill>
@@ -23739,7 +23762,7 @@
 •  CNN </a:t>
             </a:r>
             <a:r>
-              <a:rPr lang="ru-RU" sz="1400">
+              <a:rPr lang="ru-RU" sz="1400" dirty="0">
                 <a:solidFill>
                   <a:srgbClr val="1A1A1A"/>
                 </a:solidFill>
@@ -23833,10 +23856,12 @@
             <a:avLst/>
           </a:prstGeom>
           <a:solidFill>
-            <a:srgbClr val="2E7D5B"/>
+            <a:srgbClr val="2F7D5B"/>
           </a:solidFill>
-          <a:ln w="12700" cap="flat" cmpd="sng" algn="ctr">
-            <a:noFill/>
+          <a:ln w="19050" cap="flat" cmpd="sng" algn="ctr">
+            <a:solidFill>
+              <a:srgbClr val="2F7D5B"/>
+            </a:solidFill>
             <a:prstDash val="solid"/>
             <a:miter lim="800000"/>
           </a:ln>
@@ -23863,30 +23888,16 @@
           </a:bodyPr>
           <a:lstStyle/>
           <a:p>
-            <a:pPr algn="l"/>
-            <a:r>
-              <a:rPr lang="en-US" sz="1600" b="1">
+            <a:pPr algn="ctr"/>
+            <a:r>
+              <a:rPr lang="en-US" sz="1600" b="1" dirty="0">
                 <a:solidFill>
                   <a:srgbClr val="FFFFFF"/>
                 </a:solidFill>
                 <a:latin typeface="HSE Sans"/>
               </a:rPr>
-              <a:t>FER — </a:t>
-            </a:r>
-            <a:r>
-              <a:rPr lang="ru-RU" sz="1600" b="1">
-                <a:solidFill>
-                  <a:srgbClr val="FFFFFF"/>
-                </a:solidFill>
-              </a:rPr>
-              <a:t>по лицу</a:t>
-            </a:r>
-            <a:endParaRPr lang="en-US" sz="1600" b="1">
-              <a:solidFill>
-                <a:srgbClr val="FFFFFF"/>
-              </a:solidFill>
-              <a:latin typeface="HSE Sans"/>
-            </a:endParaRPr>
+              <a:t>Facial expression Emotion Recognition (FER)</a:t>
+            </a:r>
           </a:p>
         </p:txBody>
       </p:sp>
@@ -23904,7 +23915,7 @@
         </p:nvSpPr>
         <p:spPr>
           <a:xfrm>
-            <a:off x="4432300" y="2971800"/>
+            <a:off x="4432300" y="3066896"/>
             <a:ext cx="3327400" cy="304800"/>
           </a:xfrm>
           <a:prstGeom prst="rect">
@@ -23916,24 +23927,24 @@
           <a:bodyPr vertOverflow="overflow" vert="horz" wrap="square" lIns="25400" tIns="0" rIns="25400" bIns="0" rtlCol="0" anchor="t">
             <a:noAutofit/>
           </a:bodyPr>
-          <a:lstStyle/>
+          <a:lstStyle>
+            <a:defPPr>
+              <a:defRPr lang="en-RU"/>
+            </a:defPPr>
+            <a:lvl1pPr>
+              <a:defRPr sz="1400">
+                <a:solidFill>
+                  <a:srgbClr val="1A1A1A"/>
+                </a:solidFill>
+              </a:defRPr>
+            </a:lvl1pPr>
+          </a:lstStyle>
           <a:p>
-            <a:pPr algn="l"/>
-            <a:r>
-              <a:rPr lang="en-US" sz="1100" i="1">
-                <a:solidFill>
-                  <a:srgbClr val="2E7D5B"/>
-                </a:solidFill>
-                <a:latin typeface="HSE Sans"/>
-              </a:rPr>
-              <a:t>Facial Expression Recognition</a:t>
-            </a:r>
-            <a:endParaRPr lang="en-US" sz="1100" i="1" dirty="0">
-              <a:solidFill>
-                <a:srgbClr val="2E7D5B"/>
-              </a:solidFill>
-              <a:latin typeface="HSE Sans"/>
-            </a:endParaRPr>
+            <a:r>
+              <a:rPr lang="ru-RU" dirty="0"/>
+              <a:t>Определение эмоций по выражению лиц</a:t>
+            </a:r>
+            <a:endParaRPr lang="en-US" dirty="0"/>
           </a:p>
         </p:txBody>
       </p:sp>
@@ -23951,7 +23962,7 @@
         </p:nvSpPr>
         <p:spPr>
           <a:xfrm>
-            <a:off x="4483100" y="3378200"/>
+            <a:off x="4483100" y="3561076"/>
             <a:ext cx="3225800" cy="2540000"/>
           </a:xfrm>
           <a:prstGeom prst="rect">
@@ -23967,7 +23978,7 @@
           <a:p>
             <a:pPr algn="l"/>
             <a:r>
-              <a:rPr lang="ru-RU" sz="1400">
+              <a:rPr lang="ru-RU" sz="1400" dirty="0">
                 <a:solidFill>
                   <a:srgbClr val="1A1A1A"/>
                 </a:solidFill>
@@ -23976,26 +23987,71 @@
               <a:t>•  Детекция лиц: </a:t>
             </a:r>
             <a:r>
-              <a:rPr lang="en-US" sz="1400">
+              <a:rPr lang="en-US" sz="1400" dirty="0" err="1">
                 <a:solidFill>
                   <a:srgbClr val="1A1A1A"/>
                 </a:solidFill>
                 <a:latin typeface="HSE Sans"/>
               </a:rPr>
-              <a:t>MediaPipe BlazeFace
+              <a:t>MediaPipe</a:t>
+            </a:r>
+            <a:r>
+              <a:rPr lang="en-US" sz="1400" dirty="0">
+                <a:solidFill>
+                  <a:srgbClr val="1A1A1A"/>
+                </a:solidFill>
+                <a:latin typeface="HSE Sans"/>
+              </a:rPr>
+              <a:t> </a:t>
+            </a:r>
+            <a:r>
+              <a:rPr lang="en-US" sz="1400" dirty="0" err="1">
+                <a:solidFill>
+                  <a:srgbClr val="1A1A1A"/>
+                </a:solidFill>
+                <a:latin typeface="HSE Sans"/>
+              </a:rPr>
+              <a:t>BlazeFace</a:t>
+            </a:r>
+            <a:r>
+              <a:rPr lang="en-US" sz="1400" dirty="0">
+                <a:solidFill>
+                  <a:srgbClr val="1A1A1A"/>
+                </a:solidFill>
+                <a:latin typeface="HSE Sans"/>
+              </a:rPr>
+              <a:t>
 •  </a:t>
             </a:r>
             <a:r>
-              <a:rPr lang="ru-RU" sz="1400">
+              <a:rPr lang="ru-RU" sz="1400" dirty="0">
                 <a:solidFill>
                   <a:srgbClr val="1A1A1A"/>
                 </a:solidFill>
                 <a:latin typeface="HSE Sans" panose="02000000000000000000" pitchFamily="2" charset="0"/>
               </a:rPr>
-              <a:t>Лёгкие бэкбоны: </a:t>
-            </a:r>
-            <a:r>
-              <a:rPr lang="en-US" sz="1400">
+              <a:t>Лёгкие </a:t>
+            </a:r>
+            <a:r>
+              <a:rPr lang="ru-RU" sz="1400" dirty="0" err="1">
+                <a:solidFill>
+                  <a:srgbClr val="1A1A1A"/>
+                </a:solidFill>
+                <a:latin typeface="HSE Sans" panose="02000000000000000000" pitchFamily="2" charset="0"/>
+              </a:rPr>
+              <a:t>бэкбоны</a:t>
+            </a:r>
+            <a:r>
+              <a:rPr lang="ru-RU" sz="1400" dirty="0">
+                <a:solidFill>
+                  <a:srgbClr val="1A1A1A"/>
+                </a:solidFill>
+                <a:latin typeface="HSE Sans" panose="02000000000000000000" pitchFamily="2" charset="0"/>
+              </a:rPr>
+              <a:t>: </a:t>
+            </a:r>
+            <a:r>
+              <a:rPr lang="en-US" sz="1400" dirty="0">
                 <a:solidFill>
                   <a:srgbClr val="1A1A1A"/>
                 </a:solidFill>
@@ -24005,7 +24061,7 @@
 •  </a:t>
             </a:r>
             <a:r>
-              <a:rPr lang="ru-RU" sz="1400">
+              <a:rPr lang="ru-RU" sz="1400" dirty="0">
                 <a:solidFill>
                   <a:srgbClr val="1A1A1A"/>
                 </a:solidFill>
@@ -24014,7 +24070,7 @@
               <a:t>Темпоральные агрегаторы: </a:t>
             </a:r>
             <a:r>
-              <a:rPr lang="en-US" sz="1400">
+              <a:rPr lang="en-US" sz="1400" dirty="0">
                 <a:solidFill>
                   <a:srgbClr val="1A1A1A"/>
                 </a:solidFill>
@@ -24022,12 +24078,6 @@
               </a:rPr>
               <a:t>BiGRU, BiLSTM, TCN</a:t>
             </a:r>
-            <a:endParaRPr lang="en-US" sz="1400" dirty="0">
-              <a:solidFill>
-                <a:srgbClr val="1A1A1A"/>
-              </a:solidFill>
-              <a:latin typeface="HSE Sans"/>
-            </a:endParaRPr>
           </a:p>
         </p:txBody>
       </p:sp>
@@ -24108,10 +24158,12 @@
             <a:avLst/>
           </a:prstGeom>
           <a:solidFill>
-            <a:srgbClr val="102E5A"/>
+            <a:schemeClr val="tx1"/>
           </a:solidFill>
-          <a:ln w="12700" cap="flat" cmpd="sng" algn="ctr">
-            <a:noFill/>
+          <a:ln w="19050" cap="flat" cmpd="sng" algn="ctr">
+            <a:solidFill>
+              <a:schemeClr val="tx1"/>
+            </a:solidFill>
             <a:prstDash val="solid"/>
             <a:miter lim="800000"/>
           </a:ln>
@@ -24138,30 +24190,16 @@
           </a:bodyPr>
           <a:lstStyle/>
           <a:p>
-            <a:pPr algn="l"/>
-            <a:r>
-              <a:rPr lang="en-US" sz="1600" b="1">
+            <a:pPr algn="ctr"/>
+            <a:r>
+              <a:rPr lang="en-US" sz="1600" b="1" dirty="0">
                 <a:solidFill>
                   <a:srgbClr val="FFFFFF"/>
                 </a:solidFill>
                 <a:latin typeface="HSE Sans"/>
               </a:rPr>
-              <a:t>MER — </a:t>
-            </a:r>
-            <a:r>
-              <a:rPr lang="ru-RU" sz="1600" b="1">
-                <a:solidFill>
-                  <a:srgbClr val="FFFFFF"/>
-                </a:solidFill>
-              </a:rPr>
-              <a:t>мультимодально</a:t>
-            </a:r>
-            <a:endParaRPr lang="en-US" sz="1600" b="1">
-              <a:solidFill>
-                <a:srgbClr val="FFFFFF"/>
-              </a:solidFill>
-              <a:latin typeface="HSE Sans"/>
-            </a:endParaRPr>
+              <a:t>Multimodal Emotion Recognition (MER)</a:t>
+            </a:r>
           </a:p>
         </p:txBody>
       </p:sp>
@@ -24179,7 +24217,7 @@
         </p:nvSpPr>
         <p:spPr>
           <a:xfrm>
-            <a:off x="8178800" y="2971800"/>
+            <a:off x="8178800" y="3066896"/>
             <a:ext cx="3327400" cy="304800"/>
           </a:xfrm>
           <a:prstGeom prst="rect">
@@ -24191,24 +24229,32 @@
           <a:bodyPr vertOverflow="overflow" vert="horz" wrap="square" lIns="25400" tIns="0" rIns="25400" bIns="0" rtlCol="0" anchor="t">
             <a:noAutofit/>
           </a:bodyPr>
-          <a:lstStyle/>
+          <a:lstStyle>
+            <a:defPPr>
+              <a:defRPr lang="en-RU"/>
+            </a:defPPr>
+            <a:lvl1pPr>
+              <a:defRPr sz="1400">
+                <a:solidFill>
+                  <a:srgbClr val="1A1A1A"/>
+                </a:solidFill>
+              </a:defRPr>
+            </a:lvl1pPr>
+          </a:lstStyle>
           <a:p>
-            <a:pPr algn="l"/>
-            <a:r>
-              <a:rPr lang="en-US" sz="1100" i="1">
-                <a:solidFill>
-                  <a:srgbClr val="102E5A"/>
-                </a:solidFill>
-                <a:latin typeface="HSE Sans"/>
-              </a:rPr>
-              <a:t>Multimodal Emotion Recognition</a:t>
-            </a:r>
-            <a:endParaRPr lang="en-US" sz="1100" i="1" dirty="0">
-              <a:solidFill>
-                <a:srgbClr val="102E5A"/>
-              </a:solidFill>
-              <a:latin typeface="HSE Sans"/>
-            </a:endParaRPr>
+            <a:r>
+              <a:rPr lang="ru-RU" dirty="0"/>
+              <a:t>Определение эмоций</a:t>
+            </a:r>
+            <a:r>
+              <a:rPr lang="en-US" dirty="0"/>
+              <a:t> </a:t>
+            </a:r>
+            <a:r>
+              <a:rPr lang="ru-RU" dirty="0"/>
+              <a:t>по двум и более модальностям </a:t>
+            </a:r>
+            <a:endParaRPr lang="en-US" dirty="0"/>
           </a:p>
         </p:txBody>
       </p:sp>
@@ -24226,7 +24272,7 @@
         </p:nvSpPr>
         <p:spPr>
           <a:xfrm>
-            <a:off x="8229600" y="3378200"/>
+            <a:off x="8229600" y="3561076"/>
             <a:ext cx="3225800" cy="2540000"/>
           </a:xfrm>
           <a:prstGeom prst="rect">
@@ -24242,7 +24288,7 @@
           <a:p>
             <a:pPr algn="l"/>
             <a:r>
-              <a:rPr lang="ru-RU" sz="1400">
+              <a:rPr lang="ru-RU" sz="1400" dirty="0">
                 <a:solidFill>
                   <a:srgbClr val="1A1A1A"/>
                 </a:solidFill>
@@ -24252,7 +24298,7 @@
 •  Современные архитектуры для </a:t>
             </a:r>
             <a:r>
-              <a:rPr lang="en-US" sz="1400">
+              <a:rPr lang="en-US" sz="1400" dirty="0">
                 <a:solidFill>
                   <a:srgbClr val="1A1A1A"/>
                 </a:solidFill>
@@ -24262,7 +24308,7 @@
 •  </a:t>
             </a:r>
             <a:r>
-              <a:rPr lang="ru-RU" sz="1400">
+              <a:rPr lang="ru-RU" sz="1400" dirty="0">
                 <a:solidFill>
                   <a:srgbClr val="1A1A1A"/>
                 </a:solidFill>
@@ -24761,7 +24807,11 @@
           </a:lstStyle>
           <a:p>
             <a:r>
-              <a:rPr lang="ru-RU" dirty="0"/>
+              <a:rPr lang="ru-RU" dirty="0">
+                <a:solidFill>
+                  <a:schemeClr val="tx1"/>
+                </a:solidFill>
+              </a:rPr>
               <a:t>Классификация выражений лиц с детектированием эмоций в речи</a:t>
             </a:r>
           </a:p>
@@ -24960,13 +25010,21 @@
           </a:lstStyle>
           <a:p>
             <a:r>
-              <a:rPr lang="ru-RU" dirty="0"/>
+              <a:rPr lang="ru-RU" dirty="0">
+                <a:solidFill>
+                  <a:schemeClr val="tx1"/>
+                </a:solidFill>
+              </a:rPr>
               <a:t>Канделов Дамир Русланович </a:t>
             </a:r>
           </a:p>
           <a:p>
             <a:r>
-              <a:rPr lang="ru-RU" dirty="0"/>
+              <a:rPr lang="ru-RU" dirty="0">
+                <a:solidFill>
+                  <a:schemeClr val="tx1"/>
+                </a:solidFill>
+              </a:rPr>
               <a:t>Группа: 22ПИ-1</a:t>
             </a:r>
           </a:p>
@@ -24988,8 +25046,8 @@
         </p:nvSpPr>
         <p:spPr bwMode="auto">
           <a:xfrm>
-            <a:off x="0" y="0"/>
-            <a:ext cx="12192000" cy="457200"/>
+            <a:off x="0" y="43934"/>
+            <a:ext cx="184731" cy="369332"/>
           </a:xfrm>
           <a:prstGeom prst="rect">
             <a:avLst/>
@@ -25043,10 +25101,207 @@
       </p:sp>
       <p:sp>
         <p:nvSpPr>
-          <p:cNvPr id="3" name="Rounded Rectangle 2">
-            <a:extLst>
-              <a:ext uri="{FF2B5EF4-FFF2-40B4-BE49-F238E27FC236}">
-                <a16:creationId xmlns:a16="http://schemas.microsoft.com/office/drawing/2014/main" id="{2D52C5B9-425E-564E-A7D8-1F16578CBAA9}"/>
+          <p:cNvPr id="20" name="TextBox 19">
+            <a:extLst>
+              <a:ext uri="{FF2B5EF4-FFF2-40B4-BE49-F238E27FC236}">
+                <a16:creationId xmlns:a16="http://schemas.microsoft.com/office/drawing/2014/main" id="{76D6BDA7-65B8-7248-A4BC-256B35919C76}"/>
+              </a:ext>
+            </a:extLst>
+          </p:cNvPr>
+          <p:cNvSpPr txBox="1"/>
+          <p:nvPr/>
+        </p:nvSpPr>
+        <p:spPr>
+          <a:xfrm>
+            <a:off x="896620" y="2514564"/>
+            <a:ext cx="3741217" cy="835783"/>
+          </a:xfrm>
+          <a:prstGeom prst="rect">
+            <a:avLst/>
+          </a:prstGeom>
+          <a:noFill/>
+        </p:spPr>
+        <p:txBody>
+          <a:bodyPr vertOverflow="overflow" vert="horz" wrap="square" lIns="0" tIns="0" rIns="0" bIns="0" rtlCol="0" anchor="t">
+            <a:noAutofit/>
+          </a:bodyPr>
+          <a:lstStyle/>
+          <a:p>
+            <a:pPr marL="285750" indent="-285750" algn="l">
+              <a:buFont typeface="Arial" panose="020B0604020202020204" pitchFamily="34" charset="0"/>
+              <a:buChar char="•"/>
+            </a:pPr>
+            <a:r>
+              <a:rPr lang="en-US" sz="1400" dirty="0">
+                <a:latin typeface="HSE Sans" panose="02000000000000000000" pitchFamily="2" charset="0"/>
+              </a:rPr>
+              <a:t>7356 </a:t>
+            </a:r>
+            <a:r>
+              <a:rPr lang="ru-RU" sz="1400" dirty="0">
+                <a:latin typeface="HSE Sans" panose="02000000000000000000" pitchFamily="2" charset="0"/>
+              </a:rPr>
+              <a:t>аудиовизуальных записей</a:t>
+            </a:r>
+            <a:endParaRPr lang="en-US" sz="1400" dirty="0">
+              <a:latin typeface="HSE Sans" panose="02000000000000000000" pitchFamily="2" charset="0"/>
+            </a:endParaRPr>
+          </a:p>
+          <a:p>
+            <a:pPr marL="285750" indent="-285750" algn="l">
+              <a:buFont typeface="Arial" panose="020B0604020202020204" pitchFamily="34" charset="0"/>
+              <a:buChar char="•"/>
+            </a:pPr>
+            <a:r>
+              <a:rPr lang="ru-RU" sz="1400" dirty="0">
+                <a:latin typeface="HSE Sans" panose="02000000000000000000" pitchFamily="2" charset="0"/>
+              </a:rPr>
+              <a:t>24 актёра, профессиональные актеры
+8 эмоций
+Источник для видео-модели и гейта</a:t>
+            </a:r>
+            <a:endParaRPr lang="en-US" sz="1400" dirty="0">
+              <a:latin typeface="HSE Sans"/>
+            </a:endParaRPr>
+          </a:p>
+        </p:txBody>
+      </p:sp>
+      <p:sp>
+        <p:nvSpPr>
+          <p:cNvPr id="26" name="TextBox 25">
+            <a:extLst>
+              <a:ext uri="{FF2B5EF4-FFF2-40B4-BE49-F238E27FC236}">
+                <a16:creationId xmlns:a16="http://schemas.microsoft.com/office/drawing/2014/main" id="{32E1C880-6384-B443-89F8-97AD2D2BE2EA}"/>
+              </a:ext>
+            </a:extLst>
+          </p:cNvPr>
+          <p:cNvSpPr txBox="1"/>
+          <p:nvPr/>
+        </p:nvSpPr>
+        <p:spPr>
+          <a:xfrm>
+            <a:off x="896620" y="3865981"/>
+            <a:ext cx="4684878" cy="786538"/>
+          </a:xfrm>
+          <a:prstGeom prst="rect">
+            <a:avLst/>
+          </a:prstGeom>
+          <a:noFill/>
+        </p:spPr>
+        <p:txBody>
+          <a:bodyPr vertOverflow="overflow" vert="horz" wrap="square" lIns="0" tIns="0" rIns="0" bIns="0" rtlCol="0" anchor="t">
+            <a:noAutofit/>
+          </a:bodyPr>
+          <a:lstStyle/>
+          <a:p>
+            <a:pPr marL="285750" indent="-285750" algn="l">
+              <a:buFont typeface="Arial" panose="020B0604020202020204" pitchFamily="34" charset="0"/>
+              <a:buChar char="•"/>
+            </a:pPr>
+            <a:r>
+              <a:rPr lang="ru-RU" sz="1300" dirty="0">
+                <a:latin typeface="HSE Sans" panose="02000000000000000000" pitchFamily="2" charset="0"/>
+              </a:rPr>
+              <a:t>7442 видео</a:t>
+            </a:r>
+          </a:p>
+          <a:p>
+            <a:pPr marL="285750" indent="-285750" algn="l">
+              <a:buFont typeface="Arial" panose="020B0604020202020204" pitchFamily="34" charset="0"/>
+              <a:buChar char="•"/>
+            </a:pPr>
+            <a:r>
+              <a:rPr lang="ru-RU" sz="1300" dirty="0">
+                <a:latin typeface="HSE Sans" panose="02000000000000000000" pitchFamily="2" charset="0"/>
+              </a:rPr>
+              <a:t>91 актёр, 48 мужчин и 43 женщины, добровольцы
+6 эмоций
+Расширяет аудио-данные для гейта</a:t>
+            </a:r>
+            <a:endParaRPr lang="en-US" sz="1300" dirty="0">
+              <a:latin typeface="HSE Sans"/>
+            </a:endParaRPr>
+          </a:p>
+        </p:txBody>
+      </p:sp>
+      <p:sp>
+        <p:nvSpPr>
+          <p:cNvPr id="30" name="TextBox 29">
+            <a:extLst>
+              <a:ext uri="{FF2B5EF4-FFF2-40B4-BE49-F238E27FC236}">
+                <a16:creationId xmlns:a16="http://schemas.microsoft.com/office/drawing/2014/main" id="{20EE0CBB-FAB3-6E47-A61F-20AA1A910F62}"/>
+              </a:ext>
+            </a:extLst>
+          </p:cNvPr>
+          <p:cNvSpPr txBox="1"/>
+          <p:nvPr/>
+        </p:nvSpPr>
+        <p:spPr>
+          <a:xfrm>
+            <a:off x="896620" y="5213503"/>
+            <a:ext cx="7003943" cy="887374"/>
+          </a:xfrm>
+          <a:prstGeom prst="rect">
+            <a:avLst/>
+          </a:prstGeom>
+          <a:noFill/>
+        </p:spPr>
+        <p:txBody>
+          <a:bodyPr vertOverflow="overflow" vert="horz" wrap="square" lIns="0" tIns="0" rIns="0" bIns="0" rtlCol="0" anchor="t">
+            <a:noAutofit/>
+          </a:bodyPr>
+          <a:lstStyle/>
+          <a:p>
+            <a:pPr marL="285750" indent="-285750" algn="l">
+              <a:buFont typeface="Arial" panose="020B0604020202020204" pitchFamily="34" charset="0"/>
+              <a:buChar char="•"/>
+            </a:pPr>
+            <a:r>
+              <a:rPr lang="ru-RU" sz="1300" dirty="0">
+                <a:latin typeface="HSE Sans" panose="02000000000000000000" pitchFamily="2" charset="0"/>
+              </a:rPr>
+              <a:t>12 часов записанных диалогов (5 сессий)</a:t>
+            </a:r>
+          </a:p>
+          <a:p>
+            <a:pPr marL="285750" indent="-285750" algn="l">
+              <a:buFont typeface="Arial" panose="020B0604020202020204" pitchFamily="34" charset="0"/>
+              <a:buChar char="•"/>
+            </a:pPr>
+            <a:r>
+              <a:rPr lang="ru-RU" sz="1300" dirty="0">
+                <a:latin typeface="HSE Sans" panose="02000000000000000000" pitchFamily="2" charset="0"/>
+              </a:rPr>
+              <a:t>Спонтанные импровизации и диалоги по заранее написанному сценарию</a:t>
+            </a:r>
+          </a:p>
+          <a:p>
+            <a:pPr marL="285750" indent="-285750" algn="l">
+              <a:buFont typeface="Arial" panose="020B0604020202020204" pitchFamily="34" charset="0"/>
+              <a:buChar char="•"/>
+            </a:pPr>
+            <a:r>
+              <a:rPr lang="ru-RU" sz="1300" dirty="0">
+                <a:latin typeface="HSE Sans" panose="02000000000000000000" pitchFamily="2" charset="0"/>
+              </a:rPr>
+              <a:t>10 актеров: 5 мужчин и 5 женщин
+4 класса: </a:t>
+            </a:r>
+            <a:r>
+              <a:rPr lang="en-US" sz="1300" dirty="0">
+                <a:latin typeface="HSE Sans"/>
+              </a:rPr>
+              <a:t>neutral, happy, sad, angry</a:t>
+            </a:r>
+          </a:p>
+        </p:txBody>
+      </p:sp>
+      <p:sp>
+        <p:nvSpPr>
+          <p:cNvPr id="31" name="Rounded Rectangle 30">
+            <a:extLst>
+              <a:ext uri="{FF2B5EF4-FFF2-40B4-BE49-F238E27FC236}">
+                <a16:creationId xmlns:a16="http://schemas.microsoft.com/office/drawing/2014/main" id="{DF8336E1-E670-3446-A244-8019EAFEEE85}"/>
               </a:ext>
             </a:extLst>
           </p:cNvPr>
@@ -25055,18 +25310,18 @@
         </p:nvSpPr>
         <p:spPr>
           <a:xfrm>
-            <a:off x="660400" y="2159000"/>
-            <a:ext cx="3471333" cy="2946400"/>
+            <a:off x="7975600" y="1905000"/>
+            <a:ext cx="3810000" cy="4546600"/>
           </a:xfrm>
           <a:prstGeom prst="roundRect">
             <a:avLst/>
           </a:prstGeom>
           <a:solidFill>
-            <a:srgbClr val="E8EEF7"/>
+            <a:srgbClr val="F4F7FC"/>
           </a:solidFill>
-          <a:ln w="19050" cap="flat" cmpd="sng" algn="ctr">
+          <a:ln w="12700" cap="flat" cmpd="sng" algn="ctr">
             <a:solidFill>
-              <a:srgbClr val="1F4E9B"/>
+              <a:srgbClr val="2E7D5B"/>
             </a:solidFill>
             <a:prstDash val="solid"/>
             <a:miter lim="800000"/>
@@ -25093,80 +25348,64 @@
           <a:lstStyle/>
           <a:p>
             <a:pPr algn="l"/>
-            <a:endParaRPr lang="en-US"/>
+            <a:endParaRPr lang="en-US">
+              <a:solidFill>
+                <a:schemeClr val="tx1"/>
+              </a:solidFill>
+            </a:endParaRPr>
           </a:p>
         </p:txBody>
       </p:sp>
       <p:sp>
         <p:nvSpPr>
-          <p:cNvPr id="5" name="Rectangle 4">
-            <a:extLst>
-              <a:ext uri="{FF2B5EF4-FFF2-40B4-BE49-F238E27FC236}">
-                <a16:creationId xmlns:a16="http://schemas.microsoft.com/office/drawing/2014/main" id="{88903C94-5607-AC46-9473-1E131FC5F127}"/>
-              </a:ext>
-            </a:extLst>
-          </p:cNvPr>
-          <p:cNvSpPr/>
+          <p:cNvPr id="32" name="TextBox 31">
+            <a:extLst>
+              <a:ext uri="{FF2B5EF4-FFF2-40B4-BE49-F238E27FC236}">
+                <a16:creationId xmlns:a16="http://schemas.microsoft.com/office/drawing/2014/main" id="{7281090A-D17C-A74C-A759-4648FBD0CA8F}"/>
+              </a:ext>
+            </a:extLst>
+          </p:cNvPr>
+          <p:cNvSpPr txBox="1"/>
           <p:nvPr/>
         </p:nvSpPr>
         <p:spPr>
           <a:xfrm>
-            <a:off x="660400" y="2159000"/>
-            <a:ext cx="3471333" cy="482600"/>
+            <a:off x="8077200" y="1981200"/>
+            <a:ext cx="3606800" cy="635000"/>
           </a:xfrm>
           <a:prstGeom prst="rect">
             <a:avLst/>
           </a:prstGeom>
-          <a:solidFill>
-            <a:srgbClr val="1F4E9B"/>
-          </a:solidFill>
-          <a:ln w="12700" cap="flat" cmpd="sng" algn="ctr">
-            <a:noFill/>
-            <a:prstDash val="solid"/>
-            <a:miter lim="800000"/>
-          </a:ln>
-        </p:spPr>
-        <p:style>
-          <a:lnRef idx="2">
-            <a:schemeClr val="accent1">
-              <a:shade val="15000"/>
-            </a:schemeClr>
-          </a:lnRef>
-          <a:fillRef idx="1">
-            <a:schemeClr val="accent1"/>
-          </a:fillRef>
-          <a:effectRef idx="0">
-            <a:schemeClr val="accent1"/>
-          </a:effectRef>
-          <a:fontRef idx="minor">
-            <a:schemeClr val="lt1"/>
-          </a:fontRef>
-        </p:style>
+          <a:noFill/>
+        </p:spPr>
         <p:txBody>
-          <a:bodyPr vertOverflow="clip" horzOverflow="clip" wrap="square" lIns="50800" tIns="25400" rIns="50800" bIns="25400" rtlCol="0" anchor="ctr" anchorCtr="0">
+          <a:bodyPr vertOverflow="overflow" vert="horz" wrap="square" lIns="0" tIns="0" rIns="0" bIns="0" rtlCol="0" anchor="ctr" anchorCtr="0">
             <a:noAutofit/>
           </a:bodyPr>
           <a:lstStyle/>
           <a:p>
-            <a:pPr algn="l"/>
-            <a:r>
-              <a:rPr lang="en-US" sz="1500" b="1">
-                <a:solidFill>
-                  <a:srgbClr val="FFFFFF"/>
-                </a:solidFill>
+            <a:pPr algn="ctr"/>
+            <a:r>
+              <a:rPr lang="ru-RU" sz="1300" b="1" dirty="0">
+                <a:latin typeface="HSE Sans" panose="02000000000000000000" pitchFamily="2" charset="0"/>
+              </a:rPr>
+              <a:t>Офлайн-аугментации (</a:t>
+            </a:r>
+            <a:r>
+              <a:rPr lang="en-US" sz="1300" b="1" dirty="0">
                 <a:latin typeface="HSE Sans"/>
               </a:rPr>
-              <a:t>RAVDESS</a:t>
+              <a:t>K=3)</a:t>
             </a:r>
           </a:p>
         </p:txBody>
       </p:sp>
       <p:sp>
         <p:nvSpPr>
-          <p:cNvPr id="11" name="TextBox 10">
-            <a:extLst>
-              <a:ext uri="{FF2B5EF4-FFF2-40B4-BE49-F238E27FC236}">
-                <a16:creationId xmlns:a16="http://schemas.microsoft.com/office/drawing/2014/main" id="{7B10F808-389E-7944-B9C7-92B698609773}"/>
+          <p:cNvPr id="33" name="TextBox 32">
+            <a:extLst>
+              <a:ext uri="{FF2B5EF4-FFF2-40B4-BE49-F238E27FC236}">
+                <a16:creationId xmlns:a16="http://schemas.microsoft.com/office/drawing/2014/main" id="{66CF86BB-2374-3B46-91C8-DD23FE574D02}"/>
               </a:ext>
             </a:extLst>
           </p:cNvPr>
@@ -25175,8 +25414,8 @@
         </p:nvSpPr>
         <p:spPr>
           <a:xfrm>
-            <a:off x="787400" y="2717800"/>
-            <a:ext cx="3217333" cy="304800"/>
+            <a:off x="8140700" y="2579625"/>
+            <a:ext cx="3479800" cy="1498600"/>
           </a:xfrm>
           <a:prstGeom prst="rect">
             <a:avLst/>
@@ -25189,31 +25428,543 @@
           </a:bodyPr>
           <a:lstStyle/>
           <a:p>
-            <a:pPr algn="l"/>
-            <a:r>
-              <a:rPr lang="ru-RU" sz="1100" i="1">
+            <a:pPr marL="0" indent="0">
+              <a:buNone/>
+            </a:pPr>
+            <a:r>
+              <a:rPr lang="ru-RU" sz="1300" b="1" dirty="0">
                 <a:solidFill>
                   <a:srgbClr val="1F4E9B"/>
                 </a:solidFill>
                 <a:latin typeface="HSE Sans" panose="02000000000000000000" pitchFamily="2" charset="0"/>
               </a:rPr>
-              <a:t>Предобучение · аудио + видео</a:t>
-            </a:r>
-            <a:endParaRPr lang="en-US" sz="1100" i="1" dirty="0">
+              <a:t>Аудио:</a:t>
+            </a:r>
+          </a:p>
+          <a:p>
+            <a:pPr marL="0" indent="0">
+              <a:buNone/>
+            </a:pPr>
+            <a:endParaRPr lang="ru-RU" sz="800" b="1" dirty="0">
               <a:solidFill>
                 <a:srgbClr val="1F4E9B"/>
               </a:solidFill>
-              <a:latin typeface="HSE Sans"/>
+              <a:latin typeface="HSE Sans" panose="02000000000000000000" pitchFamily="2" charset="0"/>
+            </a:endParaRPr>
+          </a:p>
+          <a:p>
+            <a:pPr marL="171450" indent="-171450">
+              <a:lnSpc>
+                <a:spcPts val="1250"/>
+              </a:lnSpc>
+              <a:spcAft>
+                <a:spcPts val="300"/>
+              </a:spcAft>
+              <a:buFont typeface="Arial"/>
+              <a:buChar char="•"/>
+            </a:pPr>
+            <a:r>
+              <a:rPr lang="en-US" sz="1100" b="1" dirty="0">
+                <a:solidFill>
+                  <a:srgbClr val="1A1A1A"/>
+                </a:solidFill>
+                <a:latin typeface="HSE Sans" panose="02000000000000000000" pitchFamily="2" charset="0"/>
+              </a:rPr>
+              <a:t>AddGaussianSNR</a:t>
+            </a:r>
+            <a:r>
+              <a:rPr lang="ru-RU" sz="1100" dirty="0">
+                <a:solidFill>
+                  <a:srgbClr val="1A1A1A"/>
+                </a:solidFill>
+                <a:latin typeface="HSE Sans" panose="02000000000000000000" pitchFamily="2" charset="0"/>
+              </a:rPr>
+              <a:t> — гауссовский шум, SNR 5–25 дБ</a:t>
+            </a:r>
+          </a:p>
+          <a:p>
+            <a:pPr marL="171450" indent="-171450">
+              <a:lnSpc>
+                <a:spcPts val="1250"/>
+              </a:lnSpc>
+              <a:spcAft>
+                <a:spcPts val="300"/>
+              </a:spcAft>
+              <a:buFont typeface="Arial"/>
+              <a:buChar char="•"/>
+            </a:pPr>
+            <a:r>
+              <a:rPr lang="en-US" sz="1100" b="1" dirty="0">
+                <a:solidFill>
+                  <a:srgbClr val="1A1A1A"/>
+                </a:solidFill>
+                <a:latin typeface="HSE Sans" panose="02000000000000000000" pitchFamily="2" charset="0"/>
+              </a:rPr>
+              <a:t>Shift</a:t>
+            </a:r>
+            <a:r>
+              <a:rPr lang="ru-RU" sz="1100" dirty="0">
+                <a:solidFill>
+                  <a:srgbClr val="1A1A1A"/>
+                </a:solidFill>
+                <a:latin typeface="HSE Sans" panose="02000000000000000000" pitchFamily="2" charset="0"/>
+              </a:rPr>
+              <a:t> — временной сдвиг ±1 с</a:t>
+            </a:r>
+          </a:p>
+          <a:p>
+            <a:pPr marL="171450" indent="-171450">
+              <a:lnSpc>
+                <a:spcPts val="1250"/>
+              </a:lnSpc>
+              <a:spcAft>
+                <a:spcPts val="300"/>
+              </a:spcAft>
+              <a:buFont typeface="Arial"/>
+              <a:buChar char="•"/>
+            </a:pPr>
+            <a:r>
+              <a:rPr lang="en-US" sz="1100" b="1" dirty="0">
+                <a:solidFill>
+                  <a:srgbClr val="1A1A1A"/>
+                </a:solidFill>
+                <a:latin typeface="HSE Sans" panose="02000000000000000000" pitchFamily="2" charset="0"/>
+              </a:rPr>
+              <a:t>Gain</a:t>
+            </a:r>
+            <a:r>
+              <a:rPr lang="ru-RU" sz="1100" dirty="0">
+                <a:solidFill>
+                  <a:srgbClr val="1A1A1A"/>
+                </a:solidFill>
+                <a:latin typeface="HSE Sans" panose="02000000000000000000" pitchFamily="2" charset="0"/>
+              </a:rPr>
+              <a:t> — громкость −9…+6 дБ</a:t>
+            </a:r>
+          </a:p>
+          <a:p>
+            <a:pPr marL="171450" indent="-171450">
+              <a:lnSpc>
+                <a:spcPts val="1250"/>
+              </a:lnSpc>
+              <a:spcAft>
+                <a:spcPts val="300"/>
+              </a:spcAft>
+              <a:buFont typeface="Arial"/>
+              <a:buChar char="•"/>
+            </a:pPr>
+            <a:r>
+              <a:rPr lang="en-US" sz="1100" b="1" dirty="0">
+                <a:solidFill>
+                  <a:srgbClr val="1A1A1A"/>
+                </a:solidFill>
+                <a:latin typeface="HSE Sans" panose="02000000000000000000" pitchFamily="2" charset="0"/>
+              </a:rPr>
+              <a:t>TimeStretch</a:t>
+            </a:r>
+            <a:r>
+              <a:rPr lang="ru-RU" sz="1100" dirty="0">
+                <a:solidFill>
+                  <a:srgbClr val="1A1A1A"/>
+                </a:solidFill>
+                <a:latin typeface="HSE Sans" panose="02000000000000000000" pitchFamily="2" charset="0"/>
+              </a:rPr>
+              <a:t> — растяжение/сжатие ×0,9–1,1</a:t>
+            </a:r>
+          </a:p>
+          <a:p>
+            <a:pPr marL="171450" indent="-171450">
+              <a:lnSpc>
+                <a:spcPts val="1250"/>
+              </a:lnSpc>
+              <a:spcAft>
+                <a:spcPts val="300"/>
+              </a:spcAft>
+              <a:buFont typeface="Arial"/>
+              <a:buChar char="•"/>
+            </a:pPr>
+            <a:r>
+              <a:rPr lang="en-US" sz="1100" b="1" dirty="0">
+                <a:solidFill>
+                  <a:srgbClr val="1A1A1A"/>
+                </a:solidFill>
+                <a:latin typeface="HSE Sans" panose="02000000000000000000" pitchFamily="2" charset="0"/>
+              </a:rPr>
+              <a:t>PitchShift</a:t>
+            </a:r>
+            <a:r>
+              <a:rPr lang="ru-RU" sz="1100" dirty="0">
+                <a:solidFill>
+                  <a:srgbClr val="1A1A1A"/>
+                </a:solidFill>
+                <a:latin typeface="HSE Sans" panose="02000000000000000000" pitchFamily="2" charset="0"/>
+              </a:rPr>
+              <a:t> — сдвиг тона ±2 полутона</a:t>
+            </a:r>
+          </a:p>
+        </p:txBody>
+      </p:sp>
+      <p:sp>
+        <p:nvSpPr>
+          <p:cNvPr id="34" name="TextBox 33">
+            <a:extLst>
+              <a:ext uri="{FF2B5EF4-FFF2-40B4-BE49-F238E27FC236}">
+                <a16:creationId xmlns:a16="http://schemas.microsoft.com/office/drawing/2014/main" id="{A6AB03B8-4D23-2041-9F3A-FAD9A5663AF5}"/>
+              </a:ext>
+            </a:extLst>
+          </p:cNvPr>
+          <p:cNvSpPr txBox="1"/>
+          <p:nvPr/>
+        </p:nvSpPr>
+        <p:spPr>
+          <a:xfrm>
+            <a:off x="8153400" y="4279925"/>
+            <a:ext cx="3479800" cy="1905000"/>
+          </a:xfrm>
+          <a:prstGeom prst="rect">
+            <a:avLst/>
+          </a:prstGeom>
+          <a:noFill/>
+        </p:spPr>
+        <p:txBody>
+          <a:bodyPr vertOverflow="overflow" vert="horz" wrap="square" lIns="0" tIns="0" rIns="0" bIns="0" rtlCol="0" anchor="t">
+            <a:noAutofit/>
+          </a:bodyPr>
+          <a:lstStyle/>
+          <a:p>
+            <a:pPr marL="0" indent="0">
+              <a:buNone/>
+            </a:pPr>
+            <a:r>
+              <a:rPr lang="ru-RU" sz="1300" b="1" dirty="0">
+                <a:solidFill>
+                  <a:srgbClr val="2E7D5B"/>
+                </a:solidFill>
+                <a:latin typeface="HSE Sans" panose="02000000000000000000" pitchFamily="2" charset="0"/>
+              </a:rPr>
+              <a:t>Видео:</a:t>
+            </a:r>
+          </a:p>
+          <a:p>
+            <a:pPr marL="0" indent="0">
+              <a:buNone/>
+            </a:pPr>
+            <a:endParaRPr lang="ru-RU" sz="800" b="1" dirty="0">
+              <a:solidFill>
+                <a:srgbClr val="2E7D5B"/>
+              </a:solidFill>
+              <a:latin typeface="HSE Sans" panose="02000000000000000000" pitchFamily="2" charset="0"/>
+            </a:endParaRPr>
+          </a:p>
+          <a:p>
+            <a:pPr marL="171450" indent="-171450">
+              <a:lnSpc>
+                <a:spcPts val="1250"/>
+              </a:lnSpc>
+              <a:spcAft>
+                <a:spcPts val="300"/>
+              </a:spcAft>
+              <a:buFont typeface="Arial"/>
+              <a:buChar char="•"/>
+            </a:pPr>
+            <a:r>
+              <a:rPr lang="en-US" sz="1100" b="1" dirty="0">
+                <a:solidFill>
+                  <a:srgbClr val="1A1A1A"/>
+                </a:solidFill>
+                <a:latin typeface="HSE Sans" panose="02000000000000000000" pitchFamily="2" charset="0"/>
+              </a:rPr>
+              <a:t>RandomResizedCrop</a:t>
+            </a:r>
+            <a:r>
+              <a:rPr lang="ru-RU" sz="1100" dirty="0">
+                <a:solidFill>
+                  <a:srgbClr val="1A1A1A"/>
+                </a:solidFill>
+                <a:latin typeface="HSE Sans" panose="02000000000000000000" pitchFamily="2" charset="0"/>
+              </a:rPr>
+              <a:t> — случайная обрезка, масштаб 0,85–1,0</a:t>
+            </a:r>
+          </a:p>
+          <a:p>
+            <a:pPr marL="171450" indent="-171450">
+              <a:lnSpc>
+                <a:spcPts val="1250"/>
+              </a:lnSpc>
+              <a:spcAft>
+                <a:spcPts val="300"/>
+              </a:spcAft>
+              <a:buFont typeface="Arial"/>
+              <a:buChar char="•"/>
+            </a:pPr>
+            <a:r>
+              <a:rPr lang="en-US" sz="1100" b="1" dirty="0">
+                <a:solidFill>
+                  <a:srgbClr val="1A1A1A"/>
+                </a:solidFill>
+                <a:latin typeface="HSE Sans" panose="02000000000000000000" pitchFamily="2" charset="0"/>
+              </a:rPr>
+              <a:t>HFlip</a:t>
+            </a:r>
+            <a:r>
+              <a:rPr lang="ru-RU" sz="1100" dirty="0">
+                <a:solidFill>
+                  <a:srgbClr val="1A1A1A"/>
+                </a:solidFill>
+                <a:latin typeface="HSE Sans" panose="02000000000000000000" pitchFamily="2" charset="0"/>
+              </a:rPr>
+              <a:t> — зеркальное отражение</a:t>
+            </a:r>
+          </a:p>
+          <a:p>
+            <a:pPr marL="171450" indent="-171450">
+              <a:lnSpc>
+                <a:spcPts val="1250"/>
+              </a:lnSpc>
+              <a:spcAft>
+                <a:spcPts val="300"/>
+              </a:spcAft>
+              <a:buFont typeface="Arial"/>
+              <a:buChar char="•"/>
+            </a:pPr>
+            <a:r>
+              <a:rPr lang="en-US" sz="1100" b="1" dirty="0">
+                <a:solidFill>
+                  <a:srgbClr val="1A1A1A"/>
+                </a:solidFill>
+                <a:latin typeface="HSE Sans" panose="02000000000000000000" pitchFamily="2" charset="0"/>
+              </a:rPr>
+              <a:t>ColorJitter</a:t>
+            </a:r>
+            <a:r>
+              <a:rPr lang="ru-RU" sz="1100" dirty="0">
+                <a:solidFill>
+                  <a:srgbClr val="1A1A1A"/>
+                </a:solidFill>
+                <a:latin typeface="HSE Sans" panose="02000000000000000000" pitchFamily="2" charset="0"/>
+              </a:rPr>
+              <a:t> — яркость / контраст / насыщенность</a:t>
+            </a:r>
+          </a:p>
+          <a:p>
+            <a:pPr marL="171450" indent="-171450">
+              <a:lnSpc>
+                <a:spcPts val="1250"/>
+              </a:lnSpc>
+              <a:spcAft>
+                <a:spcPts val="300"/>
+              </a:spcAft>
+              <a:buFont typeface="Arial"/>
+              <a:buChar char="•"/>
+            </a:pPr>
+            <a:r>
+              <a:rPr lang="en-US" sz="1100" b="1" dirty="0">
+                <a:solidFill>
+                  <a:srgbClr val="1A1A1A"/>
+                </a:solidFill>
+                <a:latin typeface="HSE Sans" panose="02000000000000000000" pitchFamily="2" charset="0"/>
+              </a:rPr>
+              <a:t>GaussianBlur</a:t>
+            </a:r>
+            <a:r>
+              <a:rPr lang="ru-RU" sz="1100" dirty="0">
+                <a:solidFill>
+                  <a:srgbClr val="1A1A1A"/>
+                </a:solidFill>
+                <a:latin typeface="HSE Sans" panose="02000000000000000000" pitchFamily="2" charset="0"/>
+              </a:rPr>
+              <a:t> — размытие по Гауссу</a:t>
+            </a:r>
+          </a:p>
+          <a:p>
+            <a:pPr marL="171450" indent="-171450">
+              <a:lnSpc>
+                <a:spcPts val="1250"/>
+              </a:lnSpc>
+              <a:spcAft>
+                <a:spcPts val="300"/>
+              </a:spcAft>
+              <a:buFont typeface="Arial"/>
+              <a:buChar char="•"/>
+            </a:pPr>
+            <a:r>
+              <a:rPr lang="en-US" sz="1100" b="1" dirty="0">
+                <a:solidFill>
+                  <a:srgbClr val="1A1A1A"/>
+                </a:solidFill>
+                <a:latin typeface="HSE Sans" panose="02000000000000000000" pitchFamily="2" charset="0"/>
+              </a:rPr>
+              <a:t>RandomErasing</a:t>
+            </a:r>
+            <a:r>
+              <a:rPr lang="ru-RU" sz="1100" dirty="0">
+                <a:solidFill>
+                  <a:srgbClr val="1A1A1A"/>
+                </a:solidFill>
+                <a:latin typeface="HSE Sans" panose="02000000000000000000" pitchFamily="2" charset="0"/>
+              </a:rPr>
+              <a:t> — случайное стирание (cutout)</a:t>
+            </a:r>
+          </a:p>
+        </p:txBody>
+      </p:sp>
+      <p:sp>
+        <p:nvSpPr>
+          <p:cNvPr id="6" name="Заголовок 2">
+            <a:extLst>
+              <a:ext uri="{FF2B5EF4-FFF2-40B4-BE49-F238E27FC236}">
+                <a16:creationId xmlns:a16="http://schemas.microsoft.com/office/drawing/2014/main" id="{5D016CD5-829C-2010-254B-20D6B882D503}"/>
+              </a:ext>
+            </a:extLst>
+          </p:cNvPr>
+          <p:cNvSpPr txBox="1">
+            <a:spLocks/>
+          </p:cNvSpPr>
+          <p:nvPr/>
+        </p:nvSpPr>
+        <p:spPr>
+          <a:xfrm>
+            <a:off x="666489" y="1861070"/>
+            <a:ext cx="3525887" cy="415926"/>
+          </a:xfrm>
+          <a:prstGeom prst="rect">
+            <a:avLst/>
+          </a:prstGeom>
+        </p:spPr>
+        <p:txBody>
+          <a:bodyPr vert="horz" lIns="0" tIns="0" rIns="0" bIns="0" rtlCol="0" anchor="t">
+            <a:normAutofit/>
+          </a:bodyPr>
+          <a:lstStyle>
+            <a:lvl1pPr algn="l" defTabSz="914400" rtl="0" eaLnBrk="1" latinLnBrk="0" hangingPunct="1">
+              <a:lnSpc>
+                <a:spcPct val="100000"/>
+              </a:lnSpc>
+              <a:spcBef>
+                <a:spcPct val="0"/>
+              </a:spcBef>
+              <a:buNone/>
+              <a:defRPr sz="2400" b="0" i="0" kern="1200">
+                <a:solidFill>
+                  <a:schemeClr val="tx1"/>
+                </a:solidFill>
+                <a:latin typeface="HSE Sans" panose="02000000000000000000" pitchFamily="2" charset="0"/>
+                <a:ea typeface="+mj-ea"/>
+                <a:cs typeface="+mj-cs"/>
+              </a:defRPr>
+            </a:lvl1pPr>
+          </a:lstStyle>
+          <a:p>
+            <a:r>
+              <a:rPr lang="ru-RU" sz="1800" b="1" dirty="0"/>
+              <a:t>Используемые датасеты </a:t>
+            </a:r>
+          </a:p>
+        </p:txBody>
+      </p:sp>
+      <p:sp>
+        <p:nvSpPr>
+          <p:cNvPr id="7" name="TextBox 6">
+            <a:extLst>
+              <a:ext uri="{FF2B5EF4-FFF2-40B4-BE49-F238E27FC236}">
+                <a16:creationId xmlns:a16="http://schemas.microsoft.com/office/drawing/2014/main" id="{6503B039-D87C-7B4E-3028-369F683F91C0}"/>
+              </a:ext>
+            </a:extLst>
+          </p:cNvPr>
+          <p:cNvSpPr txBox="1"/>
+          <p:nvPr/>
+        </p:nvSpPr>
+        <p:spPr>
+          <a:xfrm>
+            <a:off x="604520" y="2145233"/>
+            <a:ext cx="7272866" cy="369332"/>
+          </a:xfrm>
+          <a:prstGeom prst="rect">
+            <a:avLst/>
+          </a:prstGeom>
+          <a:noFill/>
+        </p:spPr>
+        <p:txBody>
+          <a:bodyPr wrap="square" rtlCol="0">
+            <a:spAutoFit/>
+          </a:bodyPr>
+          <a:lstStyle/>
+          <a:p>
+            <a:pPr marL="228600" indent="-228600" algn="just">
+              <a:buAutoNum type="arabicPeriod"/>
+            </a:pPr>
+            <a:r>
+              <a:rPr lang="ru-RU" dirty="0" err="1"/>
+              <a:t>Ryerson</a:t>
+            </a:r>
+            <a:r>
+              <a:rPr lang="ru-RU" dirty="0"/>
+              <a:t> Audio-Visual Database </a:t>
+            </a:r>
+            <a:r>
+              <a:rPr lang="ru-RU" dirty="0" err="1"/>
+              <a:t>of</a:t>
+            </a:r>
+            <a:r>
+              <a:rPr lang="ru-RU" dirty="0"/>
+              <a:t> </a:t>
+            </a:r>
+            <a:r>
+              <a:rPr lang="ru-RU" dirty="0" err="1"/>
+              <a:t>Emotional</a:t>
+            </a:r>
+            <a:r>
+              <a:rPr lang="ru-RU" dirty="0"/>
+              <a:t> </a:t>
+            </a:r>
+            <a:r>
+              <a:rPr lang="ru-RU" dirty="0" err="1"/>
+              <a:t>Speech</a:t>
+            </a:r>
+            <a:r>
+              <a:rPr lang="ru-RU" dirty="0"/>
+              <a:t> </a:t>
+            </a:r>
+            <a:r>
+              <a:rPr lang="ru-RU" dirty="0" err="1"/>
+              <a:t>and</a:t>
+            </a:r>
+            <a:r>
+              <a:rPr lang="ru-RU" dirty="0"/>
+              <a:t> </a:t>
+            </a:r>
+            <a:r>
+              <a:rPr lang="ru-RU" dirty="0" err="1"/>
+              <a:t>Song</a:t>
+            </a:r>
+            <a:r>
+              <a:rPr lang="en-US" dirty="0"/>
+              <a:t> (</a:t>
+            </a:r>
+            <a:r>
+              <a:rPr lang="en-US" b="1" dirty="0">
+                <a:latin typeface="HSE Sans" panose="02000000000000000000" pitchFamily="2" charset="0"/>
+              </a:rPr>
+              <a:t>RAVDESS</a:t>
+            </a:r>
+            <a:r>
+              <a:rPr lang="en-US" dirty="0">
+                <a:latin typeface="HSE Sans" panose="02000000000000000000" pitchFamily="2" charset="0"/>
+              </a:rPr>
+              <a:t>)</a:t>
+            </a:r>
+            <a:endParaRPr lang="ru-RU" dirty="0">
+              <a:latin typeface="HSE Sans" panose="02000000000000000000" pitchFamily="2" charset="0"/>
             </a:endParaRPr>
           </a:p>
         </p:txBody>
       </p:sp>
       <p:sp>
         <p:nvSpPr>
-          <p:cNvPr id="20" name="TextBox 19">
-            <a:extLst>
-              <a:ext uri="{FF2B5EF4-FFF2-40B4-BE49-F238E27FC236}">
-                <a16:creationId xmlns:a16="http://schemas.microsoft.com/office/drawing/2014/main" id="{76D6BDA7-65B8-7248-A4BC-256B35919C76}"/>
+          <p:cNvPr id="8" name="TextBox 7">
+            <a:extLst>
+              <a:ext uri="{FF2B5EF4-FFF2-40B4-BE49-F238E27FC236}">
+                <a16:creationId xmlns:a16="http://schemas.microsoft.com/office/drawing/2014/main" id="{877EEC3B-7375-400B-F2B7-467E7DE6809A}"/>
               </a:ext>
             </a:extLst>
           </p:cNvPr>
@@ -25222,8 +25973,8 @@
         </p:nvSpPr>
         <p:spPr>
           <a:xfrm>
-            <a:off x="812800" y="3073400"/>
-            <a:ext cx="3166533" cy="1905000"/>
+            <a:off x="604520" y="3496649"/>
+            <a:ext cx="7272866" cy="369332"/>
           </a:xfrm>
           <a:prstGeom prst="rect">
             <a:avLst/>
@@ -25231,158 +25982,84 @@
           <a:noFill/>
         </p:spPr>
         <p:txBody>
-          <a:bodyPr vertOverflow="overflow" vert="horz" wrap="square" lIns="0" tIns="0" rIns="0" bIns="0" rtlCol="0" anchor="t">
-            <a:noAutofit/>
+          <a:bodyPr wrap="square" rtlCol="0">
+            <a:spAutoFit/>
           </a:bodyPr>
           <a:lstStyle/>
           <a:p>
-            <a:pPr algn="l"/>
-            <a:r>
-              <a:rPr lang="ru-RU" sz="1300">
-                <a:solidFill>
-                  <a:srgbClr val="1A1A1A"/>
-                </a:solidFill>
-                <a:latin typeface="HSE Sans" panose="02000000000000000000" pitchFamily="2" charset="0"/>
-              </a:rPr>
-              <a:t>•  24 актёра, студийная запись
-•  8 эмоций
-•  Источник для видео-модели и гейта</a:t>
-            </a:r>
-            <a:endParaRPr lang="en-US" sz="1300" dirty="0">
-              <a:solidFill>
-                <a:srgbClr val="1A1A1A"/>
-              </a:solidFill>
-              <a:latin typeface="HSE Sans"/>
+            <a:pPr algn="just"/>
+            <a:r>
+              <a:rPr lang="en-US" dirty="0"/>
+              <a:t>2. </a:t>
+            </a:r>
+            <a:r>
+              <a:rPr lang="ru-RU" dirty="0"/>
+              <a:t>Crowd-</a:t>
+            </a:r>
+            <a:r>
+              <a:rPr lang="ru-RU" dirty="0" err="1"/>
+              <a:t>sourced</a:t>
+            </a:r>
+            <a:r>
+              <a:rPr lang="ru-RU" dirty="0"/>
+              <a:t> </a:t>
+            </a:r>
+            <a:r>
+              <a:rPr lang="ru-RU" dirty="0" err="1"/>
+              <a:t>Emotional</a:t>
+            </a:r>
+            <a:r>
+              <a:rPr lang="ru-RU" dirty="0"/>
+              <a:t> </a:t>
+            </a:r>
+            <a:r>
+              <a:rPr lang="ru-RU" dirty="0" err="1"/>
+              <a:t>Multimodal</a:t>
+            </a:r>
+            <a:r>
+              <a:rPr lang="ru-RU" dirty="0"/>
+              <a:t> </a:t>
+            </a:r>
+            <a:r>
+              <a:rPr lang="ru-RU" dirty="0" err="1"/>
+              <a:t>Actors</a:t>
+            </a:r>
+            <a:r>
+              <a:rPr lang="ru-RU" dirty="0"/>
+              <a:t> </a:t>
+            </a:r>
+            <a:r>
+              <a:rPr lang="ru-RU" dirty="0" err="1"/>
+              <a:t>Dataset</a:t>
+            </a:r>
+            <a:r>
+              <a:rPr lang="en-US" dirty="0"/>
+              <a:t> (</a:t>
+            </a:r>
+            <a:r>
+              <a:rPr lang="en-US" b="1" dirty="0">
+                <a:latin typeface="HSE Sans" panose="02000000000000000000" pitchFamily="2" charset="0"/>
+              </a:rPr>
+              <a:t>CREMA-D</a:t>
+            </a:r>
+            <a:r>
+              <a:rPr lang="en-US" dirty="0">
+                <a:latin typeface="HSE Sans" panose="02000000000000000000" pitchFamily="2" charset="0"/>
+              </a:rPr>
+              <a:t>)</a:t>
+            </a:r>
+            <a:endParaRPr lang="ru-RU" dirty="0">
+              <a:latin typeface="HSE Sans" panose="02000000000000000000" pitchFamily="2" charset="0"/>
             </a:endParaRPr>
           </a:p>
         </p:txBody>
       </p:sp>
       <p:sp>
         <p:nvSpPr>
-          <p:cNvPr id="21" name="Rounded Rectangle 20">
-            <a:extLst>
-              <a:ext uri="{FF2B5EF4-FFF2-40B4-BE49-F238E27FC236}">
-                <a16:creationId xmlns:a16="http://schemas.microsoft.com/office/drawing/2014/main" id="{57106966-61A0-7948-A9A8-FE7C21720005}"/>
-              </a:ext>
-            </a:extLst>
-          </p:cNvPr>
-          <p:cNvSpPr/>
-          <p:nvPr/>
-        </p:nvSpPr>
-        <p:spPr>
-          <a:xfrm>
-            <a:off x="4360333" y="2159000"/>
-            <a:ext cx="3471333" cy="2946400"/>
-          </a:xfrm>
-          <a:prstGeom prst="roundRect">
-            <a:avLst/>
-          </a:prstGeom>
-          <a:solidFill>
-            <a:srgbClr val="E8EEF7"/>
-          </a:solidFill>
-          <a:ln w="19050" cap="flat" cmpd="sng" algn="ctr">
-            <a:solidFill>
-              <a:srgbClr val="2E7D5B"/>
-            </a:solidFill>
-            <a:prstDash val="solid"/>
-            <a:miter lim="800000"/>
-          </a:ln>
-        </p:spPr>
-        <p:style>
-          <a:lnRef idx="2">
-            <a:schemeClr val="accent1">
-              <a:shade val="15000"/>
-            </a:schemeClr>
-          </a:lnRef>
-          <a:fillRef idx="1">
-            <a:schemeClr val="accent1"/>
-          </a:fillRef>
-          <a:effectRef idx="0">
-            <a:schemeClr val="accent1"/>
-          </a:effectRef>
-          <a:fontRef idx="minor">
-            <a:schemeClr val="lt1"/>
-          </a:fontRef>
-        </p:style>
-        <p:txBody>
-          <a:bodyPr vertOverflow="clip" horzOverflow="clip" rtlCol="0" anchor="t"/>
-          <a:lstStyle/>
-          <a:p>
-            <a:pPr algn="l"/>
-            <a:endParaRPr lang="en-US"/>
-          </a:p>
-        </p:txBody>
-      </p:sp>
-      <p:sp>
-        <p:nvSpPr>
-          <p:cNvPr id="24" name="Rectangle 23">
-            <a:extLst>
-              <a:ext uri="{FF2B5EF4-FFF2-40B4-BE49-F238E27FC236}">
-                <a16:creationId xmlns:a16="http://schemas.microsoft.com/office/drawing/2014/main" id="{7EF5F947-4622-9A46-90A7-E8B46547B22A}"/>
-              </a:ext>
-            </a:extLst>
-          </p:cNvPr>
-          <p:cNvSpPr/>
-          <p:nvPr/>
-        </p:nvSpPr>
-        <p:spPr>
-          <a:xfrm>
-            <a:off x="4360333" y="2159000"/>
-            <a:ext cx="3471333" cy="482600"/>
-          </a:xfrm>
-          <a:prstGeom prst="rect">
-            <a:avLst/>
-          </a:prstGeom>
-          <a:solidFill>
-            <a:srgbClr val="2E7D5B"/>
-          </a:solidFill>
-          <a:ln w="12700" cap="flat" cmpd="sng" algn="ctr">
-            <a:noFill/>
-            <a:prstDash val="solid"/>
-            <a:miter lim="800000"/>
-          </a:ln>
-        </p:spPr>
-        <p:style>
-          <a:lnRef idx="2">
-            <a:schemeClr val="accent1">
-              <a:shade val="15000"/>
-            </a:schemeClr>
-          </a:lnRef>
-          <a:fillRef idx="1">
-            <a:schemeClr val="accent1"/>
-          </a:fillRef>
-          <a:effectRef idx="0">
-            <a:schemeClr val="accent1"/>
-          </a:effectRef>
-          <a:fontRef idx="minor">
-            <a:schemeClr val="lt1"/>
-          </a:fontRef>
-        </p:style>
-        <p:txBody>
-          <a:bodyPr vertOverflow="clip" horzOverflow="clip" wrap="square" lIns="50800" tIns="25400" rIns="50800" bIns="25400" rtlCol="0" anchor="ctr" anchorCtr="0">
-            <a:noAutofit/>
-          </a:bodyPr>
-          <a:lstStyle/>
-          <a:p>
-            <a:pPr algn="l"/>
-            <a:r>
-              <a:rPr lang="en-US" sz="1500" b="1">
-                <a:solidFill>
-                  <a:srgbClr val="FFFFFF"/>
-                </a:solidFill>
-                <a:latin typeface="HSE Sans"/>
-              </a:rPr>
-              <a:t>CREMA-D</a:t>
-            </a:r>
-          </a:p>
-        </p:txBody>
-      </p:sp>
-      <p:sp>
-        <p:nvSpPr>
-          <p:cNvPr id="25" name="TextBox 24">
-            <a:extLst>
-              <a:ext uri="{FF2B5EF4-FFF2-40B4-BE49-F238E27FC236}">
-                <a16:creationId xmlns:a16="http://schemas.microsoft.com/office/drawing/2014/main" id="{383B7345-FBD2-C040-A7F8-FE8B6FD0531E}"/>
+          <p:cNvPr id="9" name="TextBox 8">
+            <a:extLst>
+              <a:ext uri="{FF2B5EF4-FFF2-40B4-BE49-F238E27FC236}">
+                <a16:creationId xmlns:a16="http://schemas.microsoft.com/office/drawing/2014/main" id="{D01EEC80-1DB7-4790-AFD5-235F3FC86D11}"/>
               </a:ext>
             </a:extLst>
           </p:cNvPr>
@@ -25391,8 +26068,8 @@
         </p:nvSpPr>
         <p:spPr>
           <a:xfrm>
-            <a:off x="4487333" y="2717800"/>
-            <a:ext cx="3217333" cy="304800"/>
+            <a:off x="669537" y="4840557"/>
+            <a:ext cx="7272866" cy="369332"/>
           </a:xfrm>
           <a:prstGeom prst="rect">
             <a:avLst/>
@@ -25400,551 +26077,78 @@
           <a:noFill/>
         </p:spPr>
         <p:txBody>
-          <a:bodyPr vertOverflow="overflow" vert="horz" wrap="square" lIns="0" tIns="0" rIns="0" bIns="0" rtlCol="0" anchor="t">
-            <a:noAutofit/>
+          <a:bodyPr wrap="square" rtlCol="0">
+            <a:spAutoFit/>
           </a:bodyPr>
           <a:lstStyle/>
           <a:p>
-            <a:pPr algn="l"/>
-            <a:r>
-              <a:rPr lang="ru-RU" sz="1100" i="1">
-                <a:solidFill>
-                  <a:srgbClr val="2E7D5B"/>
-                </a:solidFill>
-                <a:latin typeface="HSE Sans" panose="02000000000000000000" pitchFamily="2" charset="0"/>
-              </a:rPr>
-              <a:t>Предобучение · аудио</a:t>
-            </a:r>
-            <a:endParaRPr lang="en-US" sz="1100" i="1" dirty="0">
-              <a:solidFill>
-                <a:srgbClr val="2E7D5B"/>
-              </a:solidFill>
-              <a:latin typeface="HSE Sans"/>
-            </a:endParaRPr>
-          </a:p>
-        </p:txBody>
-      </p:sp>
-      <p:sp>
-        <p:nvSpPr>
-          <p:cNvPr id="26" name="TextBox 25">
-            <a:extLst>
-              <a:ext uri="{FF2B5EF4-FFF2-40B4-BE49-F238E27FC236}">
-                <a16:creationId xmlns:a16="http://schemas.microsoft.com/office/drawing/2014/main" id="{32E1C880-6384-B443-89F8-97AD2D2BE2EA}"/>
-              </a:ext>
-            </a:extLst>
-          </p:cNvPr>
-          <p:cNvSpPr txBox="1"/>
-          <p:nvPr/>
-        </p:nvSpPr>
-        <p:spPr>
-          <a:xfrm>
-            <a:off x="4512733" y="3073400"/>
-            <a:ext cx="3166533" cy="1905000"/>
-          </a:xfrm>
-          <a:prstGeom prst="rect">
-            <a:avLst/>
-          </a:prstGeom>
-          <a:noFill/>
-        </p:spPr>
-        <p:txBody>
-          <a:bodyPr vertOverflow="overflow" vert="horz" wrap="square" lIns="0" tIns="0" rIns="0" bIns="0" rtlCol="0" anchor="t">
-            <a:noAutofit/>
-          </a:bodyPr>
-          <a:lstStyle/>
-          <a:p>
-            <a:pPr algn="l"/>
-            <a:r>
-              <a:rPr lang="ru-RU" sz="1300">
-                <a:solidFill>
-                  <a:srgbClr val="1A1A1A"/>
-                </a:solidFill>
-                <a:latin typeface="HSE Sans" panose="02000000000000000000" pitchFamily="2" charset="0"/>
-              </a:rPr>
-              <a:t>•  91 актёр, краудсорсинг
-•  6 эмоций
-•  Расширяет аудио-данные для гейта</a:t>
-            </a:r>
-            <a:endParaRPr lang="en-US" sz="1300" dirty="0">
-              <a:solidFill>
-                <a:srgbClr val="1A1A1A"/>
-              </a:solidFill>
-              <a:latin typeface="HSE Sans"/>
-            </a:endParaRPr>
-          </a:p>
-        </p:txBody>
-      </p:sp>
-      <p:sp>
-        <p:nvSpPr>
-          <p:cNvPr id="27" name="Rounded Rectangle 26">
-            <a:extLst>
-              <a:ext uri="{FF2B5EF4-FFF2-40B4-BE49-F238E27FC236}">
-                <a16:creationId xmlns:a16="http://schemas.microsoft.com/office/drawing/2014/main" id="{CA89C3BF-237A-464D-B46F-92EBA5B90046}"/>
-              </a:ext>
-            </a:extLst>
-          </p:cNvPr>
-          <p:cNvSpPr/>
-          <p:nvPr/>
-        </p:nvSpPr>
-        <p:spPr>
-          <a:xfrm>
-            <a:off x="8060266" y="2159000"/>
-            <a:ext cx="3471333" cy="2946400"/>
-          </a:xfrm>
-          <a:prstGeom prst="roundRect">
-            <a:avLst/>
-          </a:prstGeom>
-          <a:solidFill>
-            <a:srgbClr val="E8EEF7"/>
-          </a:solidFill>
-          <a:ln w="19050" cap="flat" cmpd="sng" algn="ctr">
-            <a:solidFill>
-              <a:srgbClr val="102E5A"/>
-            </a:solidFill>
-            <a:prstDash val="solid"/>
-            <a:miter lim="800000"/>
-          </a:ln>
-        </p:spPr>
-        <p:style>
-          <a:lnRef idx="2">
-            <a:schemeClr val="accent1">
-              <a:shade val="15000"/>
-            </a:schemeClr>
-          </a:lnRef>
-          <a:fillRef idx="1">
-            <a:schemeClr val="accent1"/>
-          </a:fillRef>
-          <a:effectRef idx="0">
-            <a:schemeClr val="accent1"/>
-          </a:effectRef>
-          <a:fontRef idx="minor">
-            <a:schemeClr val="lt1"/>
-          </a:fontRef>
-        </p:style>
-        <p:txBody>
-          <a:bodyPr vertOverflow="clip" horzOverflow="clip" rtlCol="0" anchor="t"/>
-          <a:lstStyle/>
-          <a:p>
-            <a:pPr algn="l"/>
-            <a:endParaRPr lang="en-US"/>
-          </a:p>
-        </p:txBody>
-      </p:sp>
-      <p:sp>
-        <p:nvSpPr>
-          <p:cNvPr id="28" name="Rectangle 27">
-            <a:extLst>
-              <a:ext uri="{FF2B5EF4-FFF2-40B4-BE49-F238E27FC236}">
-                <a16:creationId xmlns:a16="http://schemas.microsoft.com/office/drawing/2014/main" id="{49C1F1F7-DC40-7F40-8A2B-B11AFEEF9E60}"/>
-              </a:ext>
-            </a:extLst>
-          </p:cNvPr>
-          <p:cNvSpPr/>
-          <p:nvPr/>
-        </p:nvSpPr>
-        <p:spPr>
-          <a:xfrm>
-            <a:off x="8060266" y="2159000"/>
-            <a:ext cx="3471333" cy="482600"/>
-          </a:xfrm>
-          <a:prstGeom prst="rect">
-            <a:avLst/>
-          </a:prstGeom>
-          <a:solidFill>
-            <a:srgbClr val="102E5A"/>
-          </a:solidFill>
-          <a:ln w="12700" cap="flat" cmpd="sng" algn="ctr">
-            <a:noFill/>
-            <a:prstDash val="solid"/>
-            <a:miter lim="800000"/>
-          </a:ln>
-        </p:spPr>
-        <p:style>
-          <a:lnRef idx="2">
-            <a:schemeClr val="accent1">
-              <a:shade val="15000"/>
-            </a:schemeClr>
-          </a:lnRef>
-          <a:fillRef idx="1">
-            <a:schemeClr val="accent1"/>
-          </a:fillRef>
-          <a:effectRef idx="0">
-            <a:schemeClr val="accent1"/>
-          </a:effectRef>
-          <a:fontRef idx="minor">
-            <a:schemeClr val="lt1"/>
-          </a:fontRef>
-        </p:style>
-        <p:txBody>
-          <a:bodyPr vertOverflow="clip" horzOverflow="clip" wrap="square" lIns="50800" tIns="25400" rIns="50800" bIns="25400" rtlCol="0" anchor="ctr" anchorCtr="0">
-            <a:noAutofit/>
-          </a:bodyPr>
-          <a:lstStyle/>
-          <a:p>
-            <a:pPr algn="l"/>
-            <a:r>
-              <a:rPr lang="en-US" sz="1500" b="1">
-                <a:solidFill>
-                  <a:srgbClr val="FFFFFF"/>
-                </a:solidFill>
-                <a:latin typeface="HSE Sans"/>
+            <a:pPr algn="just"/>
+            <a:r>
+              <a:rPr lang="ru-RU" dirty="0"/>
+              <a:t>3</a:t>
+            </a:r>
+            <a:r>
+              <a:rPr lang="en-US" dirty="0"/>
+              <a:t>. </a:t>
+            </a:r>
+            <a:r>
+              <a:rPr lang="ru-RU" dirty="0"/>
+              <a:t>Interactive </a:t>
+            </a:r>
+            <a:r>
+              <a:rPr lang="ru-RU" dirty="0" err="1"/>
+              <a:t>emotional</a:t>
+            </a:r>
+            <a:r>
+              <a:rPr lang="ru-RU" dirty="0"/>
+              <a:t> </a:t>
+            </a:r>
+            <a:r>
+              <a:rPr lang="ru-RU" dirty="0" err="1"/>
+              <a:t>dyadic</a:t>
+            </a:r>
+            <a:r>
+              <a:rPr lang="ru-RU" dirty="0"/>
+              <a:t> </a:t>
+            </a:r>
+            <a:r>
+              <a:rPr lang="ru-RU" dirty="0" err="1"/>
+              <a:t>motion</a:t>
+            </a:r>
+            <a:r>
+              <a:rPr lang="ru-RU" dirty="0"/>
+              <a:t> </a:t>
+            </a:r>
+            <a:r>
+              <a:rPr lang="ru-RU" dirty="0" err="1"/>
+              <a:t>capture</a:t>
+            </a:r>
+            <a:r>
+              <a:rPr lang="ru-RU" dirty="0"/>
+              <a:t> </a:t>
+            </a:r>
+            <a:r>
+              <a:rPr lang="ru-RU" dirty="0" err="1"/>
+              <a:t>database</a:t>
+            </a:r>
+            <a:r>
+              <a:rPr lang="en-US" dirty="0"/>
+              <a:t> (</a:t>
+            </a:r>
+            <a:r>
+              <a:rPr lang="en-US" b="1" dirty="0">
+                <a:latin typeface="HSE Sans" panose="02000000000000000000" pitchFamily="2" charset="0"/>
               </a:rPr>
               <a:t>IEMOCAP</a:t>
             </a:r>
-          </a:p>
-        </p:txBody>
-      </p:sp>
-      <p:sp>
-        <p:nvSpPr>
-          <p:cNvPr id="29" name="TextBox 28">
-            <a:extLst>
-              <a:ext uri="{FF2B5EF4-FFF2-40B4-BE49-F238E27FC236}">
-                <a16:creationId xmlns:a16="http://schemas.microsoft.com/office/drawing/2014/main" id="{A5E07095-3415-9B4B-B9BF-0ED0FC44B132}"/>
-              </a:ext>
-            </a:extLst>
-          </p:cNvPr>
-          <p:cNvSpPr txBox="1"/>
-          <p:nvPr/>
-        </p:nvSpPr>
-        <p:spPr>
-          <a:xfrm>
-            <a:off x="8187266" y="2717800"/>
-            <a:ext cx="3217333" cy="304800"/>
-          </a:xfrm>
-          <a:prstGeom prst="rect">
-            <a:avLst/>
-          </a:prstGeom>
-          <a:noFill/>
-        </p:spPr>
-        <p:txBody>
-          <a:bodyPr vertOverflow="overflow" vert="horz" wrap="square" lIns="0" tIns="0" rIns="0" bIns="0" rtlCol="0" anchor="t">
-            <a:noAutofit/>
-          </a:bodyPr>
-          <a:lstStyle/>
-          <a:p>
-            <a:pPr algn="l"/>
-            <a:r>
-              <a:rPr lang="ru-RU" sz="1100" i="1">
-                <a:solidFill>
-                  <a:srgbClr val="102E5A"/>
-                </a:solidFill>
-                <a:latin typeface="HSE Sans" panose="02000000000000000000" pitchFamily="2" charset="0"/>
-              </a:rPr>
-              <a:t>Целевой бенчмарк</a:t>
-            </a:r>
-            <a:endParaRPr lang="en-US" sz="1100" i="1" dirty="0">
-              <a:solidFill>
-                <a:srgbClr val="102E5A"/>
-              </a:solidFill>
-              <a:latin typeface="HSE Sans"/>
-            </a:endParaRPr>
-          </a:p>
-        </p:txBody>
-      </p:sp>
-      <p:sp>
-        <p:nvSpPr>
-          <p:cNvPr id="30" name="TextBox 29">
-            <a:extLst>
-              <a:ext uri="{FF2B5EF4-FFF2-40B4-BE49-F238E27FC236}">
-                <a16:creationId xmlns:a16="http://schemas.microsoft.com/office/drawing/2014/main" id="{20EE0CBB-FAB3-6E47-A61F-20AA1A910F62}"/>
-              </a:ext>
-            </a:extLst>
-          </p:cNvPr>
-          <p:cNvSpPr txBox="1"/>
-          <p:nvPr/>
-        </p:nvSpPr>
-        <p:spPr>
-          <a:xfrm>
-            <a:off x="8212666" y="3073400"/>
-            <a:ext cx="3166533" cy="1905000"/>
-          </a:xfrm>
-          <a:prstGeom prst="rect">
-            <a:avLst/>
-          </a:prstGeom>
-          <a:noFill/>
-        </p:spPr>
-        <p:txBody>
-          <a:bodyPr vertOverflow="overflow" vert="horz" wrap="square" lIns="0" tIns="0" rIns="0" bIns="0" rtlCol="0" anchor="t">
-            <a:noAutofit/>
-          </a:bodyPr>
-          <a:lstStyle/>
-          <a:p>
-            <a:pPr algn="l"/>
-            <a:r>
-              <a:rPr lang="ru-RU" sz="1300">
-                <a:solidFill>
-                  <a:srgbClr val="1A1A1A"/>
-                </a:solidFill>
-                <a:latin typeface="HSE Sans" panose="02000000000000000000" pitchFamily="2" charset="0"/>
-              </a:rPr>
-              <a:t>•  Диадические диалоги
-•  4 класса: </a:t>
-            </a:r>
-            <a:r>
-              <a:rPr lang="en-US" sz="1300">
-                <a:solidFill>
-                  <a:srgbClr val="1A1A1A"/>
-                </a:solidFill>
-                <a:latin typeface="HSE Sans"/>
-              </a:rPr>
-              <a:t>neutral, happy, sad, angry
-•  </a:t>
-            </a:r>
-            <a:r>
-              <a:rPr lang="ru-RU" sz="1300">
-                <a:solidFill>
-                  <a:srgbClr val="1A1A1A"/>
-                </a:solidFill>
-                <a:latin typeface="HSE Sans" panose="02000000000000000000" pitchFamily="2" charset="0"/>
-              </a:rPr>
-              <a:t>Протокол </a:t>
-            </a:r>
-            <a:r>
-              <a:rPr lang="en-US" sz="1300">
-                <a:solidFill>
-                  <a:srgbClr val="1A1A1A"/>
-                </a:solidFill>
-                <a:latin typeface="HSE Sans"/>
-              </a:rPr>
-              <a:t>LOSO (5 </a:t>
-            </a:r>
-            <a:r>
-              <a:rPr lang="ru-RU" sz="1300">
-                <a:solidFill>
-                  <a:srgbClr val="1A1A1A"/>
-                </a:solidFill>
-                <a:latin typeface="HSE Sans" panose="02000000000000000000" pitchFamily="2" charset="0"/>
-              </a:rPr>
-              <a:t>фолдов)</a:t>
-            </a:r>
-            <a:endParaRPr lang="en-US" sz="1300" dirty="0">
-              <a:solidFill>
-                <a:srgbClr val="1A1A1A"/>
-              </a:solidFill>
-              <a:latin typeface="HSE Sans"/>
-            </a:endParaRPr>
-          </a:p>
-        </p:txBody>
-      </p:sp>
-      <p:sp>
-        <p:nvSpPr>
-          <p:cNvPr id="31" name="Rounded Rectangle 30">
-            <a:extLst>
-              <a:ext uri="{FF2B5EF4-FFF2-40B4-BE49-F238E27FC236}">
-                <a16:creationId xmlns:a16="http://schemas.microsoft.com/office/drawing/2014/main" id="{DF8336E1-E670-3446-A244-8019EAFEEE85}"/>
-              </a:ext>
-            </a:extLst>
-          </p:cNvPr>
-          <p:cNvSpPr/>
-          <p:nvPr/>
-        </p:nvSpPr>
-        <p:spPr>
-          <a:xfrm>
-            <a:off x="660400" y="5257800"/>
-            <a:ext cx="10871200" cy="787400"/>
-          </a:xfrm>
-          <a:prstGeom prst="roundRect">
-            <a:avLst/>
-          </a:prstGeom>
-          <a:solidFill>
-            <a:srgbClr val="F4F7FC"/>
-          </a:solidFill>
-          <a:ln w="12700" cap="flat" cmpd="sng" algn="ctr">
-            <a:solidFill>
-              <a:srgbClr val="2E7D5B"/>
-            </a:solidFill>
-            <a:prstDash val="solid"/>
-            <a:miter lim="800000"/>
-          </a:ln>
-        </p:spPr>
-        <p:style>
-          <a:lnRef idx="2">
-            <a:schemeClr val="accent1">
-              <a:shade val="15000"/>
-            </a:schemeClr>
-          </a:lnRef>
-          <a:fillRef idx="1">
-            <a:schemeClr val="accent1"/>
-          </a:fillRef>
-          <a:effectRef idx="0">
-            <a:schemeClr val="accent1"/>
-          </a:effectRef>
-          <a:fontRef idx="minor">
-            <a:schemeClr val="lt1"/>
-          </a:fontRef>
-        </p:style>
-        <p:txBody>
-          <a:bodyPr vertOverflow="clip" horzOverflow="clip" rtlCol="0" anchor="t"/>
-          <a:lstStyle/>
-          <a:p>
-            <a:pPr algn="l"/>
-            <a:endParaRPr lang="en-US"/>
-          </a:p>
-        </p:txBody>
-      </p:sp>
-      <p:sp>
-        <p:nvSpPr>
-          <p:cNvPr id="32" name="TextBox 31">
-            <a:extLst>
-              <a:ext uri="{FF2B5EF4-FFF2-40B4-BE49-F238E27FC236}">
-                <a16:creationId xmlns:a16="http://schemas.microsoft.com/office/drawing/2014/main" id="{7281090A-D17C-A74C-A759-4648FBD0CA8F}"/>
-              </a:ext>
-            </a:extLst>
-          </p:cNvPr>
-          <p:cNvSpPr txBox="1"/>
-          <p:nvPr/>
-        </p:nvSpPr>
-        <p:spPr>
-          <a:xfrm>
-            <a:off x="812800" y="5334000"/>
-            <a:ext cx="2921000" cy="635000"/>
-          </a:xfrm>
-          <a:prstGeom prst="rect">
-            <a:avLst/>
-          </a:prstGeom>
-          <a:noFill/>
-        </p:spPr>
-        <p:txBody>
-          <a:bodyPr vertOverflow="overflow" vert="horz" wrap="square" lIns="0" tIns="0" rIns="0" bIns="0" rtlCol="0" anchor="ctr" anchorCtr="0">
-            <a:noAutofit/>
-          </a:bodyPr>
-          <a:lstStyle/>
-          <a:p>
-            <a:pPr algn="l"/>
-            <a:r>
-              <a:rPr lang="ru-RU" sz="1300" b="1">
-                <a:solidFill>
-                  <a:srgbClr val="2E7D5B"/>
-                </a:solidFill>
-                <a:latin typeface="HSE Sans" panose="02000000000000000000" pitchFamily="2" charset="0"/>
-              </a:rPr>
-              <a:t>Офлайн-аугментация (</a:t>
-            </a:r>
-            <a:r>
-              <a:rPr lang="en-US" sz="1300" b="1">
-                <a:solidFill>
-                  <a:srgbClr val="2E7D5B"/>
-                </a:solidFill>
-                <a:latin typeface="HSE Sans"/>
-              </a:rPr>
-              <a:t>K=3)</a:t>
-            </a:r>
-            <a:endParaRPr lang="en-US" sz="1300" b="1" dirty="0">
-              <a:solidFill>
-                <a:srgbClr val="2E7D5B"/>
-              </a:solidFill>
-              <a:latin typeface="HSE Sans"/>
-            </a:endParaRPr>
-          </a:p>
-        </p:txBody>
-      </p:sp>
-      <p:sp>
-        <p:nvSpPr>
-          <p:cNvPr id="33" name="TextBox 32">
-            <a:extLst>
-              <a:ext uri="{FF2B5EF4-FFF2-40B4-BE49-F238E27FC236}">
-                <a16:creationId xmlns:a16="http://schemas.microsoft.com/office/drawing/2014/main" id="{66CF86BB-2374-3B46-91C8-DD23FE574D02}"/>
-              </a:ext>
-            </a:extLst>
-          </p:cNvPr>
-          <p:cNvSpPr txBox="1"/>
-          <p:nvPr/>
-        </p:nvSpPr>
-        <p:spPr>
-          <a:xfrm>
-            <a:off x="3810000" y="5334000"/>
-            <a:ext cx="7620000" cy="304800"/>
-          </a:xfrm>
-          <a:prstGeom prst="rect">
-            <a:avLst/>
-          </a:prstGeom>
-          <a:noFill/>
-        </p:spPr>
-        <p:txBody>
-          <a:bodyPr vertOverflow="overflow" vert="horz" wrap="square" lIns="0" tIns="0" rIns="0" bIns="0" rtlCol="0" anchor="t">
-            <a:noAutofit/>
-          </a:bodyPr>
-          <a:lstStyle/>
-          <a:p>
-            <a:pPr algn="l"/>
-            <a:r>
-              <a:rPr lang="ru-RU" sz="1200">
-                <a:solidFill>
-                  <a:srgbClr val="1A1A1A"/>
-                </a:solidFill>
-                <a:latin typeface="HSE Sans" panose="02000000000000000000" pitchFamily="2" charset="0"/>
-              </a:rPr>
-              <a:t>Аудио:  </a:t>
-            </a:r>
-            <a:r>
-              <a:rPr lang="en-US" sz="1200">
-                <a:solidFill>
-                  <a:srgbClr val="1A1A1A"/>
-                </a:solidFill>
-                <a:latin typeface="HSE Sans"/>
-              </a:rPr>
-              <a:t>AddGaussianSNR · Shift · Gain · TimeStretch · PitchShift</a:t>
-            </a:r>
-            <a:endParaRPr lang="en-US" sz="1200" dirty="0">
-              <a:solidFill>
-                <a:srgbClr val="1A1A1A"/>
-              </a:solidFill>
-              <a:latin typeface="HSE Sans"/>
-            </a:endParaRPr>
-          </a:p>
-        </p:txBody>
-      </p:sp>
-      <p:sp>
-        <p:nvSpPr>
-          <p:cNvPr id="34" name="TextBox 33">
-            <a:extLst>
-              <a:ext uri="{FF2B5EF4-FFF2-40B4-BE49-F238E27FC236}">
-                <a16:creationId xmlns:a16="http://schemas.microsoft.com/office/drawing/2014/main" id="{A6AB03B8-4D23-2041-9F3A-FAD9A5663AF5}"/>
-              </a:ext>
-            </a:extLst>
-          </p:cNvPr>
-          <p:cNvSpPr txBox="1"/>
-          <p:nvPr/>
-        </p:nvSpPr>
-        <p:spPr>
-          <a:xfrm>
-            <a:off x="3810000" y="5664200"/>
-            <a:ext cx="7620000" cy="304800"/>
-          </a:xfrm>
-          <a:prstGeom prst="rect">
-            <a:avLst/>
-          </a:prstGeom>
-          <a:noFill/>
-        </p:spPr>
-        <p:txBody>
-          <a:bodyPr vertOverflow="overflow" vert="horz" wrap="square" lIns="0" tIns="0" rIns="0" bIns="0" rtlCol="0" anchor="t">
-            <a:noAutofit/>
-          </a:bodyPr>
-          <a:lstStyle/>
-          <a:p>
-            <a:pPr algn="l"/>
-            <a:r>
-              <a:rPr lang="ru-RU" sz="1200">
-                <a:solidFill>
-                  <a:srgbClr val="1A1A1A"/>
-                </a:solidFill>
-                <a:latin typeface="HSE Sans" panose="02000000000000000000" pitchFamily="2" charset="0"/>
-              </a:rPr>
-              <a:t>Видео:  </a:t>
-            </a:r>
-            <a:r>
-              <a:rPr lang="en-US" sz="1200">
-                <a:solidFill>
-                  <a:srgbClr val="1A1A1A"/>
-                </a:solidFill>
-                <a:latin typeface="HSE Sans"/>
-              </a:rPr>
-              <a:t>RandomResizedCrop · HFlip · ColorJitter · GaussianBlur · RandomErasing</a:t>
-            </a:r>
-            <a:endParaRPr lang="en-US" sz="1200" dirty="0">
-              <a:solidFill>
-                <a:srgbClr val="1A1A1A"/>
-              </a:solidFill>
-              <a:latin typeface="HSE Sans"/>
+            <a:r>
+              <a:rPr lang="en-US" dirty="0">
+                <a:latin typeface="HSE Sans" panose="02000000000000000000" pitchFamily="2" charset="0"/>
+              </a:rPr>
+              <a:t>)</a:t>
+            </a:r>
+            <a:endParaRPr lang="ru-RU" dirty="0">
+              <a:latin typeface="HSE Sans" panose="02000000000000000000" pitchFamily="2" charset="0"/>
             </a:endParaRPr>
           </a:p>
         </p:txBody>
@@ -25952,7 +26156,7 @@
     </p:spTree>
     <p:extLst>
       <p:ext uri="{BB962C8B-B14F-4D97-AF65-F5344CB8AC3E}">
-        <p14:creationId xmlns:p14="http://schemas.microsoft.com/office/powerpoint/2010/main" val="774535354"/>
+        <p14:creationId xmlns:p14="http://schemas.microsoft.com/office/powerpoint/2010/main" val="89580110"/>
       </p:ext>
     </p:extLst>
   </p:cSld>
@@ -26726,7 +26930,7 @@
         <p:spPr>
           <a:xfrm>
             <a:off x="660400" y="2159000"/>
-            <a:ext cx="4191000" cy="3810000"/>
+            <a:ext cx="4299306" cy="3810000"/>
           </a:xfrm>
           <a:prstGeom prst="rect">
             <a:avLst/>
@@ -26739,17 +26943,17 @@
           </a:bodyPr>
           <a:lstStyle/>
           <a:p>
-            <a:pPr algn="l"/>
-            <a:r>
-              <a:rPr lang="ru-RU" sz="1500">
+            <a:pPr algn="just"/>
+            <a:r>
+              <a:rPr lang="ru-RU" sz="1500" dirty="0">
                 <a:solidFill>
                   <a:srgbClr val="1A1A1A"/>
                 </a:solidFill>
                 <a:latin typeface="HSE Sans" panose="02000000000000000000" pitchFamily="2" charset="0"/>
               </a:rPr>
-              <a:t>•  Жёсткий двухстадийный каскад с ранним решением об активации тяжёлой ветви
+              <a:t>•  Жёсткий двухстадийный каскад с ранним решением об активации видео ветви
 •  Лёгкий бинарный классификатор на входе фильтрует нейтральную речь
-•  Видео и бимодальный классификатор запускаются только для эмоциональной речи
+•  Обработка видео и бимодальный классификатор запускаются только для эмоциональной речи
 •  Возврат метки «нейтрально» без запуска детектора лиц и видео-ветви</a:t>
             </a:r>
             <a:endParaRPr lang="en-US" sz="1500" dirty="0">
@@ -26870,7 +27074,7 @@
           <a:p>
             <a:r>
               <a:rPr lang="ru-RU" b="1" dirty="0"/>
-              <a:t>Итоговая архитектура системы</a:t>
+              <a:t>Выбор аудиогейта</a:t>
             </a:r>
           </a:p>
         </p:txBody>
@@ -27555,10 +27759,10 @@
       </p:sp>
       <p:sp>
         <p:nvSpPr>
-          <p:cNvPr id="2" name="Intro7">
-            <a:extLst>
-              <a:ext uri="{FF2B5EF4-FFF2-40B4-BE49-F238E27FC236}">
-                <a16:creationId xmlns:a16="http://schemas.microsoft.com/office/drawing/2014/main" id="{186E8000-AD89-7442-A431-F1FCCEFC7CC5}"/>
+          <p:cNvPr id="2" name="TextBox 1">
+            <a:extLst>
+              <a:ext uri="{FF2B5EF4-FFF2-40B4-BE49-F238E27FC236}">
+                <a16:creationId xmlns:a16="http://schemas.microsoft.com/office/drawing/2014/main" id="{076A876C-057E-374C-819B-5ADA3745C017}"/>
               </a:ext>
             </a:extLst>
           </p:cNvPr>
@@ -27567,8 +27771,8 @@
         </p:nvSpPr>
         <p:spPr>
           <a:xfrm>
-            <a:off x="660400" y="1905000"/>
-            <a:ext cx="10871200" cy="635000"/>
+            <a:off x="666489" y="2006600"/>
+            <a:ext cx="10708648" cy="762000"/>
           </a:xfrm>
           <a:prstGeom prst="rect">
             <a:avLst/>
@@ -27576,47 +27780,119 @@
           <a:noFill/>
         </p:spPr>
         <p:txBody>
-          <a:bodyPr vertOverflow="overflow" vert="horz" wrap="square" lIns="50800" tIns="25400" rIns="50800" bIns="25400" rtlCol="0" anchor="t">
+          <a:bodyPr vertOverflow="overflow" vert="horz" wrap="square" lIns="50800" tIns="50800" rIns="50800" bIns="50800" rtlCol="0" anchor="t">
             <a:noAutofit/>
           </a:bodyPr>
           <a:lstStyle/>
           <a:p>
             <a:pPr algn="l"/>
             <a:r>
-              <a:rPr lang="en-US" sz="1400">
+              <a:rPr lang="ru-RU" sz="1400" dirty="0">
                 <a:solidFill>
                   <a:srgbClr val="1A1A1A"/>
                 </a:solidFill>
+                <a:latin typeface="HSE Sans" panose="02000000000000000000" pitchFamily="2" charset="0"/>
+              </a:rPr>
+              <a:t>Сравнивались 4 модели. Аудиогейтом выбран </a:t>
+            </a:r>
+            <a:r>
+              <a:rPr lang="en-US" sz="1400" dirty="0" err="1">
+                <a:solidFill>
+                  <a:srgbClr val="1A1A1A"/>
+                </a:solidFill>
                 <a:latin typeface="HSE Sans"/>
               </a:rPr>
-              <a:t>MelCNN-</a:t>
-            </a:r>
-            <a:r>
-              <a:rPr lang="ru-RU" sz="1400">
+              <a:t>MelCNN</a:t>
+            </a:r>
+            <a:r>
+              <a:rPr lang="en-US" sz="1400" dirty="0">
                 <a:solidFill>
                   <a:srgbClr val="1A1A1A"/>
                 </a:solidFill>
-                <a:latin typeface="HSE Sans" panose="02000000000000000000" pitchFamily="2" charset="0"/>
-              </a:rPr>
-              <a:t>гейт отсеивает нейтральные реплики; при эмоциональной речи активируется бимодальная голова </a:t>
-            </a:r>
-            <a:r>
-              <a:rPr lang="en-US" sz="1400">
+                <a:latin typeface="HSE Sans"/>
+              </a:rPr>
+              <a:t> (Log-Mel + CNN): </a:t>
+            </a:r>
+            <a:r>
+              <a:rPr lang="ru-RU" sz="1400" dirty="0">
                 <a:solidFill>
                   <a:srgbClr val="1A1A1A"/>
                 </a:solidFill>
+                <a:latin typeface="HSE Sans" panose="02000000000000000000" pitchFamily="2" charset="0"/>
+              </a:rPr>
+              <a:t>лучший баланс качества и стоимости — 0,827 </a:t>
+            </a:r>
+            <a:r>
+              <a:rPr lang="en-US" sz="1400" dirty="0">
+                <a:solidFill>
+                  <a:srgbClr val="1A1A1A"/>
+                </a:solidFill>
                 <a:latin typeface="HSE Sans"/>
               </a:rPr>
-              <a:t>BiLSTMBimodal. </a:t>
-            </a:r>
-            <a:r>
-              <a:rPr lang="ru-RU" sz="1400">
+              <a:t>acc / 0,734 macro F1 </a:t>
+            </a:r>
+            <a:r>
+              <a:rPr lang="ru-RU" sz="1400" dirty="0">
                 <a:solidFill>
                   <a:srgbClr val="1A1A1A"/>
                 </a:solidFill>
                 <a:latin typeface="HSE Sans" panose="02000000000000000000" pitchFamily="2" charset="0"/>
               </a:rPr>
-              <a:t>Лог-мел спектрограмма переиспользуется гейтом и аудио-веткой.</a:t>
+              <a:t>при 3,4 мс и 8,1 МБ. </a:t>
+            </a:r>
+            <a:r>
+              <a:rPr lang="en-US" sz="1400" dirty="0">
+                <a:solidFill>
+                  <a:srgbClr val="1A1A1A"/>
+                </a:solidFill>
+                <a:latin typeface="HSE Sans"/>
+              </a:rPr>
+              <a:t>DistilHuBERT </a:t>
+            </a:r>
+            <a:r>
+              <a:rPr lang="ru-RU" sz="1400" dirty="0">
+                <a:solidFill>
+                  <a:srgbClr val="1A1A1A"/>
+                </a:solidFill>
+                <a:latin typeface="HSE Sans" panose="02000000000000000000" pitchFamily="2" charset="0"/>
+              </a:rPr>
+              <a:t>точнее (0,904), но 89,6 МБ и 15 мс; </a:t>
+            </a:r>
+            <a:r>
+              <a:rPr lang="en-US" sz="1400" dirty="0">
+                <a:solidFill>
+                  <a:srgbClr val="1A1A1A"/>
+                </a:solidFill>
+                <a:latin typeface="HSE Sans"/>
+              </a:rPr>
+              <a:t>Wav2Vec2 — 360 </a:t>
+            </a:r>
+            <a:r>
+              <a:rPr lang="ru-RU" sz="1400" dirty="0">
+                <a:solidFill>
+                  <a:srgbClr val="1A1A1A"/>
+                </a:solidFill>
+                <a:latin typeface="HSE Sans" panose="02000000000000000000" pitchFamily="2" charset="0"/>
+              </a:rPr>
+              <a:t>МБ; </a:t>
+            </a:r>
+            <a:r>
+              <a:rPr lang="en-US" sz="1400" dirty="0">
+                <a:solidFill>
+                  <a:srgbClr val="1A1A1A"/>
+                </a:solidFill>
+                <a:latin typeface="HSE Sans"/>
+              </a:rPr>
+              <a:t>MFCC + SVM </a:t>
+            </a:r>
+            <a:r>
+              <a:rPr lang="ru-RU" sz="1400" dirty="0">
+                <a:solidFill>
+                  <a:srgbClr val="1A1A1A"/>
+                </a:solidFill>
+                <a:latin typeface="HSE Sans" panose="02000000000000000000" pitchFamily="2" charset="0"/>
+              </a:rPr>
+              <a:t>заметно слабее.</a:t>
             </a:r>
             <a:endParaRPr lang="en-US" sz="1400" dirty="0">
               <a:solidFill>
@@ -27632,7 +27908,7 @@
           <p:cNvPr id="3" name="Picture 2">
             <a:extLst>
               <a:ext uri="{FF2B5EF4-FFF2-40B4-BE49-F238E27FC236}">
-                <a16:creationId xmlns:a16="http://schemas.microsoft.com/office/drawing/2014/main" id="{D4ACC085-AFBB-EDC2-67B8-EF7CE5FFD458}"/>
+                <a16:creationId xmlns:a16="http://schemas.microsoft.com/office/drawing/2014/main" id="{CF1C56F9-CF95-0B15-9D06-0F2DFDED7283}"/>
               </a:ext>
             </a:extLst>
           </p:cNvPr>
@@ -27649,8 +27925,8 @@
         </p:blipFill>
         <p:spPr>
           <a:xfrm>
-            <a:off x="1524000" y="2794000"/>
-            <a:ext cx="9144000" cy="3940957"/>
+            <a:off x="432813" y="2932312"/>
+            <a:ext cx="10942324" cy="2713430"/>
           </a:xfrm>
           <a:prstGeom prst="rect">
             <a:avLst/>
@@ -27660,7 +27936,7 @@
     </p:spTree>
     <p:extLst>
       <p:ext uri="{BB962C8B-B14F-4D97-AF65-F5344CB8AC3E}">
-        <p14:creationId xmlns:p14="http://schemas.microsoft.com/office/powerpoint/2010/main" val="997165844"/>
+        <p14:creationId xmlns:p14="http://schemas.microsoft.com/office/powerpoint/2010/main" val="1169861596"/>
       </p:ext>
     </p:extLst>
   </p:cSld>
@@ -27736,7 +28012,7 @@
           <a:p>
             <a:r>
               <a:rPr lang="ru-RU" b="1" dirty="0"/>
-              <a:t>Бимодальная голова: позднее слияние</a:t>
+              <a:t>Выбор видео-модели</a:t>
             </a:r>
           </a:p>
         </p:txBody>
@@ -28424,7 +28700,7 @@
           <p:cNvPr id="2" name="TextBox 1">
             <a:extLst>
               <a:ext uri="{FF2B5EF4-FFF2-40B4-BE49-F238E27FC236}">
-                <a16:creationId xmlns:a16="http://schemas.microsoft.com/office/drawing/2014/main" id="{53CE62E5-4DEE-3849-A1F9-FADA7378860B}"/>
+                <a16:creationId xmlns:a16="http://schemas.microsoft.com/office/drawing/2014/main" id="{897608D0-359F-3E40-BF29-3346EA0AFAC1}"/>
               </a:ext>
             </a:extLst>
           </p:cNvPr>
@@ -28433,8 +28709,8 @@
         </p:nvSpPr>
         <p:spPr>
           <a:xfrm>
-            <a:off x="660400" y="1905000"/>
-            <a:ext cx="10871200" cy="635000"/>
+            <a:off x="457200" y="2006600"/>
+            <a:ext cx="11328400" cy="762000"/>
           </a:xfrm>
           <a:prstGeom prst="rect">
             <a:avLst/>
@@ -28449,51 +28725,69 @@
           <a:p>
             <a:pPr algn="l"/>
             <a:r>
-              <a:rPr lang="en-US" sz="1500">
+              <a:rPr lang="ru-RU" sz="1400">
                 <a:solidFill>
                   <a:srgbClr val="1A1A1A"/>
                 </a:solidFill>
+                <a:latin typeface="HSE Sans" panose="02000000000000000000" pitchFamily="2" charset="0"/>
+              </a:rPr>
+              <a:t>6 конфигураций «бэкбон × агрегатор» на </a:t>
+            </a:r>
+            <a:r>
+              <a:rPr lang="en-US" sz="1400">
+                <a:solidFill>
+                  <a:srgbClr val="1A1A1A"/>
+                </a:solidFill>
                 <a:latin typeface="HSE Sans"/>
               </a:rPr>
-              <a:t>Late fusion: </a:t>
-            </a:r>
-            <a:r>
-              <a:rPr lang="ru-RU" sz="1500">
+              <a:t>RAVDESS (8 </a:t>
+            </a:r>
+            <a:r>
+              <a:rPr lang="ru-RU" sz="1400">
                 <a:solidFill>
                   <a:srgbClr val="1A1A1A"/>
                 </a:solidFill>
                 <a:latin typeface="HSE Sans" panose="02000000000000000000" pitchFamily="2" charset="0"/>
               </a:rPr>
-              <a:t>аудио- и видео-признаки извлекаются раздельно, конкатенируются в общий вектор (512) и подаются в линейный классификатор на 4 класса. Аудио-ветка повторяет </a:t>
-            </a:r>
-            <a:r>
-              <a:rPr lang="en-US" sz="1500">
+              <a:t>эмоций). Выбран </a:t>
+            </a:r>
+            <a:r>
+              <a:rPr lang="en-US" sz="1400">
                 <a:solidFill>
                   <a:srgbClr val="1A1A1A"/>
                 </a:solidFill>
                 <a:latin typeface="HSE Sans"/>
               </a:rPr>
-              <a:t>MelCNN, </a:t>
-            </a:r>
-            <a:r>
-              <a:rPr lang="ru-RU" sz="1500">
+              <a:t>EmotiEffNet + BiLSTM (0,683 acc / 0,671 F1): EmotiEffNet </a:t>
+            </a:r>
+            <a:r>
+              <a:rPr lang="ru-RU" sz="1400">
                 <a:solidFill>
                   <a:srgbClr val="1A1A1A"/>
                 </a:solidFill>
                 <a:latin typeface="HSE Sans" panose="02000000000000000000" pitchFamily="2" charset="0"/>
               </a:rPr>
-              <a:t>видео-ветка — </a:t>
-            </a:r>
-            <a:r>
-              <a:rPr lang="en-US" sz="1500">
+              <a:t>существенно превосходит </a:t>
+            </a:r>
+            <a:r>
+              <a:rPr lang="en-US" sz="1400">
                 <a:solidFill>
                   <a:srgbClr val="1A1A1A"/>
                 </a:solidFill>
                 <a:latin typeface="HSE Sans"/>
               </a:rPr>
-              <a:t>EmotiEffNet + BiLSTM.</a:t>
-            </a:r>
-            <a:endParaRPr lang="en-US" sz="1500" dirty="0">
+              <a:t>MobileNetV3-Small </a:t>
+            </a:r>
+            <a:r>
+              <a:rPr lang="ru-RU" sz="1400">
+                <a:solidFill>
+                  <a:srgbClr val="1A1A1A"/>
+                </a:solidFill>
+                <a:latin typeface="HSE Sans" panose="02000000000000000000" pitchFamily="2" charset="0"/>
+              </a:rPr>
+              <a:t>по качеству при сопоставимом времени инференса (~247–276 мс).</a:t>
+            </a:r>
+            <a:endParaRPr lang="en-US" sz="1400" dirty="0">
               <a:solidFill>
                 <a:srgbClr val="1A1A1A"/>
               </a:solidFill>
@@ -28507,7 +28801,7 @@
           <p:cNvPr id="3" name="Picture 2">
             <a:extLst>
               <a:ext uri="{FF2B5EF4-FFF2-40B4-BE49-F238E27FC236}">
-                <a16:creationId xmlns:a16="http://schemas.microsoft.com/office/drawing/2014/main" id="{5233D80E-1855-91F9-8069-073B57C8CE3A}"/>
+                <a16:creationId xmlns:a16="http://schemas.microsoft.com/office/drawing/2014/main" id="{7678BCCA-8FC4-B26E-AF90-18FCA4A1AEC6}"/>
               </a:ext>
             </a:extLst>
           </p:cNvPr>
@@ -28524,8 +28818,8 @@
         </p:blipFill>
         <p:spPr>
           <a:xfrm>
-            <a:off x="1847710" y="2692400"/>
-            <a:ext cx="8496578" cy="3810000"/>
+            <a:off x="508000" y="3048000"/>
+            <a:ext cx="11176000" cy="3336963"/>
           </a:xfrm>
           <a:prstGeom prst="rect">
             <a:avLst/>
@@ -28535,7 +28829,7 @@
     </p:spTree>
     <p:extLst>
       <p:ext uri="{BB962C8B-B14F-4D97-AF65-F5344CB8AC3E}">
-        <p14:creationId xmlns:p14="http://schemas.microsoft.com/office/powerpoint/2010/main" val="2838057669"/>
+        <p14:creationId xmlns:p14="http://schemas.microsoft.com/office/powerpoint/2010/main" val="2748530575"/>
       </p:ext>
     </p:extLst>
   </p:cSld>
@@ -28611,7 +28905,7 @@
           <a:p>
             <a:r>
               <a:rPr lang="ru-RU" b="1" dirty="0"/>
-              <a:t>Выбор аудиогейта</a:t>
+              <a:t>Итоговая архитектура системы</a:t>
             </a:r>
           </a:p>
         </p:txBody>
@@ -29296,10 +29590,10 @@
       </p:sp>
       <p:sp>
         <p:nvSpPr>
-          <p:cNvPr id="2" name="TextBox 1">
-            <a:extLst>
-              <a:ext uri="{FF2B5EF4-FFF2-40B4-BE49-F238E27FC236}">
-                <a16:creationId xmlns:a16="http://schemas.microsoft.com/office/drawing/2014/main" id="{076A876C-057E-374C-819B-5ADA3745C017}"/>
+          <p:cNvPr id="2" name="Intro7">
+            <a:extLst>
+              <a:ext uri="{FF2B5EF4-FFF2-40B4-BE49-F238E27FC236}">
+                <a16:creationId xmlns:a16="http://schemas.microsoft.com/office/drawing/2014/main" id="{186E8000-AD89-7442-A431-F1FCCEFC7CC5}"/>
               </a:ext>
             </a:extLst>
           </p:cNvPr>
@@ -29308,8 +29602,8 @@
         </p:nvSpPr>
         <p:spPr>
           <a:xfrm>
-            <a:off x="431800" y="2006600"/>
-            <a:ext cx="11328400" cy="762000"/>
+            <a:off x="666489" y="5165396"/>
+            <a:ext cx="10871200" cy="635000"/>
           </a:xfrm>
           <a:prstGeom prst="rect">
             <a:avLst/>
@@ -29317,110 +29611,65 @@
           <a:noFill/>
         </p:spPr>
         <p:txBody>
-          <a:bodyPr vertOverflow="overflow" vert="horz" wrap="square" lIns="50800" tIns="50800" rIns="50800" bIns="50800" rtlCol="0" anchor="t">
+          <a:bodyPr vertOverflow="overflow" vert="horz" wrap="square" lIns="50800" tIns="25400" rIns="50800" bIns="25400" rtlCol="0" anchor="t">
             <a:noAutofit/>
           </a:bodyPr>
           <a:lstStyle/>
           <a:p>
             <a:pPr algn="l"/>
             <a:r>
-              <a:rPr lang="ru-RU" sz="1400">
+              <a:rPr lang="en-US" sz="1400" dirty="0" err="1">
                 <a:solidFill>
                   <a:srgbClr val="1A1A1A"/>
                 </a:solidFill>
-                <a:latin typeface="HSE Sans" panose="02000000000000000000" pitchFamily="2" charset="0"/>
-              </a:rPr>
-              <a:t>Сравнивались 4 модели. Аудиогейтом выбран </a:t>
-            </a:r>
-            <a:r>
-              <a:rPr lang="en-US" sz="1400">
+                <a:latin typeface="HSE Sans"/>
+              </a:rPr>
+              <a:t>MelCNN</a:t>
+            </a:r>
+            <a:r>
+              <a:rPr lang="en-US" sz="1400" dirty="0">
                 <a:solidFill>
                   <a:srgbClr val="1A1A1A"/>
                 </a:solidFill>
                 <a:latin typeface="HSE Sans"/>
               </a:rPr>
-              <a:t>MelCNN (Log-Mel + CNN): </a:t>
-            </a:r>
-            <a:r>
-              <a:rPr lang="ru-RU" sz="1400">
+              <a:t>-</a:t>
+            </a:r>
+            <a:r>
+              <a:rPr lang="ru-RU" sz="1400" dirty="0">
                 <a:solidFill>
                   <a:srgbClr val="1A1A1A"/>
                 </a:solidFill>
                 <a:latin typeface="HSE Sans" panose="02000000000000000000" pitchFamily="2" charset="0"/>
               </a:rPr>
-              <a:t>лучший баланс качества и стоимости — 0,827 </a:t>
-            </a:r>
-            <a:r>
-              <a:rPr lang="en-US" sz="1400">
+              <a:t>гейт отсеивает нейтральные реплики; при эмоциональной речи активируется бимодальная голова </a:t>
+            </a:r>
+            <a:r>
+              <a:rPr lang="en-US" sz="1400" dirty="0" err="1">
                 <a:solidFill>
                   <a:srgbClr val="1A1A1A"/>
                 </a:solidFill>
                 <a:latin typeface="HSE Sans"/>
               </a:rPr>
-              <a:t>acc / 0,734 macro F1 </a:t>
-            </a:r>
-            <a:r>
-              <a:rPr lang="ru-RU" sz="1400">
+              <a:t>BiLSTMBimodal</a:t>
+            </a:r>
+            <a:r>
+              <a:rPr lang="en-US" sz="1400" dirty="0">
                 <a:solidFill>
                   <a:srgbClr val="1A1A1A"/>
                 </a:solidFill>
-                <a:latin typeface="HSE Sans" panose="02000000000000000000" pitchFamily="2" charset="0"/>
-              </a:rPr>
-              <a:t>при 3,4 мс и 8,1 МБ. </a:t>
-            </a:r>
-            <a:r>
-              <a:rPr lang="en-US" sz="1400">
+                <a:latin typeface="HSE Sans"/>
+              </a:rPr>
+              <a:t>. </a:t>
+            </a:r>
+            <a:r>
+              <a:rPr lang="ru-RU" sz="1400" dirty="0">
                 <a:solidFill>
                   <a:srgbClr val="1A1A1A"/>
                 </a:solidFill>
-                <a:latin typeface="HSE Sans"/>
-              </a:rPr>
-              <a:t>DistilHuBERT </a:t>
-            </a:r>
-            <a:r>
-              <a:rPr lang="ru-RU" sz="1400">
-                <a:solidFill>
-                  <a:srgbClr val="1A1A1A"/>
-                </a:solidFill>
-                <a:latin typeface="HSE Sans" panose="02000000000000000000" pitchFamily="2" charset="0"/>
-              </a:rPr>
-              <a:t>точнее (0,904), но 89,6 МБ и 15 мс; </a:t>
-            </a:r>
-            <a:r>
-              <a:rPr lang="en-US" sz="1400">
-                <a:solidFill>
-                  <a:srgbClr val="1A1A1A"/>
-                </a:solidFill>
-                <a:latin typeface="HSE Sans"/>
-              </a:rPr>
-              <a:t>Wav2Vec2 — 360 </a:t>
-            </a:r>
-            <a:r>
-              <a:rPr lang="ru-RU" sz="1400">
-                <a:solidFill>
-                  <a:srgbClr val="1A1A1A"/>
-                </a:solidFill>
-                <a:latin typeface="HSE Sans" panose="02000000000000000000" pitchFamily="2" charset="0"/>
-              </a:rPr>
-              <a:t>МБ; </a:t>
-            </a:r>
-            <a:r>
-              <a:rPr lang="en-US" sz="1400">
-                <a:solidFill>
-                  <a:srgbClr val="1A1A1A"/>
-                </a:solidFill>
-                <a:latin typeface="HSE Sans"/>
-              </a:rPr>
-              <a:t>MFCC + SVM </a:t>
-            </a:r>
-            <a:r>
-              <a:rPr lang="ru-RU" sz="1400">
-                <a:solidFill>
-                  <a:srgbClr val="1A1A1A"/>
-                </a:solidFill>
-                <a:latin typeface="HSE Sans" panose="02000000000000000000" pitchFamily="2" charset="0"/>
-              </a:rPr>
-              <a:t>заметно слабее.</a:t>
+                <a:latin typeface="HSE Sans" panose="02000000000000000000" pitchFamily="2" charset="0"/>
+              </a:rPr>
+              <a:t>Лог-мел спектрограмма переиспользуется гейтом и аудио-веткой.</a:t>
             </a:r>
             <a:endParaRPr lang="en-US" sz="1400" dirty="0">
               <a:solidFill>
@@ -29436,7 +29685,7 @@
           <p:cNvPr id="3" name="Picture 2">
             <a:extLst>
               <a:ext uri="{FF2B5EF4-FFF2-40B4-BE49-F238E27FC236}">
-                <a16:creationId xmlns:a16="http://schemas.microsoft.com/office/drawing/2014/main" id="{CF1C56F9-CF95-0B15-9D06-0F2DFDED7283}"/>
+                <a16:creationId xmlns:a16="http://schemas.microsoft.com/office/drawing/2014/main" id="{D4ACC085-AFBB-EDC2-67B8-EF7CE5FFD458}"/>
               </a:ext>
             </a:extLst>
           </p:cNvPr>
@@ -29447,14 +29696,15 @@
         </p:nvPicPr>
         <p:blipFill>
           <a:blip r:embed="rId2"/>
+          <a:srcRect l="649" t="2880" r="6791" b="28790"/>
           <a:stretch>
             <a:fillRect/>
           </a:stretch>
         </p:blipFill>
         <p:spPr>
           <a:xfrm>
-            <a:off x="508000" y="2984500"/>
-            <a:ext cx="11176000" cy="2771376"/>
+            <a:off x="1864156" y="2179928"/>
+            <a:ext cx="8463687" cy="2692847"/>
           </a:xfrm>
           <a:prstGeom prst="rect">
             <a:avLst/>
@@ -29464,7 +29714,7 @@
     </p:spTree>
     <p:extLst>
       <p:ext uri="{BB962C8B-B14F-4D97-AF65-F5344CB8AC3E}">
-        <p14:creationId xmlns:p14="http://schemas.microsoft.com/office/powerpoint/2010/main" val="1169861596"/>
+        <p14:creationId xmlns:p14="http://schemas.microsoft.com/office/powerpoint/2010/main" val="997165844"/>
       </p:ext>
     </p:extLst>
   </p:cSld>

--- a/Diploma_presentation.pptx
+++ b/Diploma_presentation.pptx
@@ -5,25 +5,26 @@
     <p:sldMasterId id="2147483648" r:id="rId4"/>
   </p:sldMasterIdLst>
   <p:notesMasterIdLst>
-    <p:notesMasterId r:id="rId21"/>
+    <p:notesMasterId r:id="rId22"/>
   </p:notesMasterIdLst>
   <p:sldIdLst>
     <p:sldId id="271" r:id="rId5"/>
     <p:sldId id="302" r:id="rId6"/>
     <p:sldId id="306" r:id="rId7"/>
-    <p:sldId id="316" r:id="rId8"/>
-    <p:sldId id="331" r:id="rId9"/>
-    <p:sldId id="318" r:id="rId10"/>
-    <p:sldId id="321" r:id="rId11"/>
-    <p:sldId id="322" r:id="rId12"/>
-    <p:sldId id="319" r:id="rId13"/>
-    <p:sldId id="320" r:id="rId14"/>
-    <p:sldId id="323" r:id="rId15"/>
-    <p:sldId id="324" r:id="rId16"/>
-    <p:sldId id="327" r:id="rId17"/>
-    <p:sldId id="329" r:id="rId18"/>
-    <p:sldId id="330" r:id="rId19"/>
-    <p:sldId id="285" r:id="rId20"/>
+    <p:sldId id="335" r:id="rId8"/>
+    <p:sldId id="332" r:id="rId9"/>
+    <p:sldId id="331" r:id="rId10"/>
+    <p:sldId id="318" r:id="rId11"/>
+    <p:sldId id="341" r:id="rId12"/>
+    <p:sldId id="339" r:id="rId13"/>
+    <p:sldId id="319" r:id="rId14"/>
+    <p:sldId id="320" r:id="rId15"/>
+    <p:sldId id="323" r:id="rId16"/>
+    <p:sldId id="324" r:id="rId17"/>
+    <p:sldId id="327" r:id="rId18"/>
+    <p:sldId id="329" r:id="rId19"/>
+    <p:sldId id="330" r:id="rId20"/>
+    <p:sldId id="285" r:id="rId21"/>
   </p:sldIdLst>
   <p:sldSz cx="12192000" cy="6858000"/>
   <p:notesSz cx="6858000" cy="9144000"/>
@@ -294,7 +295,7 @@
           <a:p>
             <a:fld id="{73261BF4-8B2C-784B-9959-B59A059012C3}" type="datetimeFigureOut">
               <a:rPr lang="en-RU" smtClean="0"/>
-              <a:t>5/28/26</a:t>
+              <a:t>5/30/26</a:t>
             </a:fld>
             <a:endParaRPr lang="en-RU"/>
           </a:p>
@@ -13698,7 +13699,7 @@
           <a:p>
             <a:fld id="{53063DFB-8595-A44B-9F09-A50FA310E559}" type="datetimeFigureOut">
               <a:rPr lang="en-RU" smtClean="0"/>
-              <a:t>5/28/26</a:t>
+              <a:t>5/30/26</a:t>
             </a:fld>
             <a:endParaRPr lang="en-RU"/>
           </a:p>
@@ -14808,7 +14809,7 @@
           <a:p>
             <a:r>
               <a:rPr lang="ru-RU" b="1" dirty="0"/>
-              <a:t>Бимодальная голова: позднее слияние</a:t>
+              <a:t>Итоговая архитектура системы</a:t>
             </a:r>
           </a:p>
         </p:txBody>
@@ -15493,10 +15494,10 @@
       </p:sp>
       <p:sp>
         <p:nvSpPr>
-          <p:cNvPr id="2" name="TextBox 1">
+          <p:cNvPr id="2" name="Intro7">
             <a:extLst>
               <a:ext uri="{FF2B5EF4-FFF2-40B4-BE49-F238E27FC236}">
-                <a16:creationId xmlns:a16="http://schemas.microsoft.com/office/drawing/2014/main" id="{53CE62E5-4DEE-3849-A1F9-FADA7378860B}"/>
+                <a16:creationId xmlns:a16="http://schemas.microsoft.com/office/drawing/2014/main" id="{186E8000-AD89-7442-A431-F1FCCEFC7CC5}"/>
               </a:ext>
             </a:extLst>
           </p:cNvPr>
@@ -15505,7 +15506,7 @@
         </p:nvSpPr>
         <p:spPr>
           <a:xfrm>
-            <a:off x="660400" y="1905000"/>
+            <a:off x="666489" y="5460874"/>
             <a:ext cx="10871200" cy="635000"/>
           </a:xfrm>
           <a:prstGeom prst="rect">
@@ -15514,61 +15515,49 @@
           <a:noFill/>
         </p:spPr>
         <p:txBody>
-          <a:bodyPr vertOverflow="overflow" vert="horz" wrap="square" lIns="50800" tIns="50800" rIns="50800" bIns="50800" rtlCol="0" anchor="t">
+          <a:bodyPr vertOverflow="overflow" vert="horz" wrap="square" lIns="50800" tIns="25400" rIns="50800" bIns="25400" rtlCol="0" anchor="t">
             <a:noAutofit/>
           </a:bodyPr>
           <a:lstStyle/>
           <a:p>
             <a:pPr algn="l"/>
             <a:r>
-              <a:rPr lang="en-US" sz="1500">
-                <a:solidFill>
-                  <a:srgbClr val="1A1A1A"/>
-                </a:solidFill>
+              <a:rPr lang="en-US" sz="1600" dirty="0" err="1">
                 <a:latin typeface="HSE Sans"/>
               </a:rPr>
-              <a:t>Late fusion: </a:t>
-            </a:r>
-            <a:r>
-              <a:rPr lang="ru-RU" sz="1500">
-                <a:solidFill>
-                  <a:srgbClr val="1A1A1A"/>
-                </a:solidFill>
-                <a:latin typeface="HSE Sans" panose="02000000000000000000" pitchFamily="2" charset="0"/>
-              </a:rPr>
-              <a:t>аудио- и видео-признаки извлекаются раздельно, конкатенируются в общий вектор (512) и подаются в линейный классификатор на 4 класса. Аудио-ветка повторяет </a:t>
-            </a:r>
-            <a:r>
-              <a:rPr lang="en-US" sz="1500">
-                <a:solidFill>
-                  <a:srgbClr val="1A1A1A"/>
-                </a:solidFill>
+              <a:t>MelCNN</a:t>
+            </a:r>
+            <a:r>
+              <a:rPr lang="en-US" sz="1600" dirty="0">
                 <a:latin typeface="HSE Sans"/>
               </a:rPr>
-              <a:t>MelCNN, </a:t>
-            </a:r>
-            <a:r>
-              <a:rPr lang="ru-RU" sz="1500">
-                <a:solidFill>
-                  <a:srgbClr val="1A1A1A"/>
-                </a:solidFill>
-                <a:latin typeface="HSE Sans" panose="02000000000000000000" pitchFamily="2" charset="0"/>
-              </a:rPr>
-              <a:t>видео-ветка — </a:t>
-            </a:r>
-            <a:r>
-              <a:rPr lang="en-US" sz="1500">
-                <a:solidFill>
-                  <a:srgbClr val="1A1A1A"/>
-                </a:solidFill>
+              <a:t>-</a:t>
+            </a:r>
+            <a:r>
+              <a:rPr lang="ru-RU" sz="1600" dirty="0">
+                <a:latin typeface="HSE Sans" panose="02000000000000000000" pitchFamily="2" charset="0"/>
+              </a:rPr>
+              <a:t>гейт отсеивает нейтральные реплики; при эмоциональной речи активируется бимодальная голова </a:t>
+            </a:r>
+            <a:r>
+              <a:rPr lang="en-US" sz="1600" dirty="0" err="1">
                 <a:latin typeface="HSE Sans"/>
               </a:rPr>
-              <a:t>EmotiEffNet + BiLSTM.</a:t>
-            </a:r>
-            <a:endParaRPr lang="en-US" sz="1500" dirty="0">
-              <a:solidFill>
-                <a:srgbClr val="1A1A1A"/>
-              </a:solidFill>
+              <a:t>BiLSTMBimodal</a:t>
+            </a:r>
+            <a:r>
+              <a:rPr lang="en-US" sz="1600" dirty="0">
+                <a:latin typeface="HSE Sans"/>
+              </a:rPr>
+              <a:t>. </a:t>
+            </a:r>
+            <a:r>
+              <a:rPr lang="ru-RU" sz="1600" dirty="0">
+                <a:latin typeface="HSE Sans" panose="02000000000000000000" pitchFamily="2" charset="0"/>
+              </a:rPr>
+              <a:t>Лог-мел спектрограмма переиспользуется гейтом и аудио-веткой.</a:t>
+            </a:r>
+            <a:endParaRPr lang="en-US" sz="1600" dirty="0">
               <a:latin typeface="HSE Sans"/>
             </a:endParaRPr>
           </a:p>
@@ -15579,7 +15568,7 @@
           <p:cNvPr id="3" name="Picture 2">
             <a:extLst>
               <a:ext uri="{FF2B5EF4-FFF2-40B4-BE49-F238E27FC236}">
-                <a16:creationId xmlns:a16="http://schemas.microsoft.com/office/drawing/2014/main" id="{5233D80E-1855-91F9-8069-073B57C8CE3A}"/>
+                <a16:creationId xmlns:a16="http://schemas.microsoft.com/office/drawing/2014/main" id="{D4ACC085-AFBB-EDC2-67B8-EF7CE5FFD458}"/>
               </a:ext>
             </a:extLst>
           </p:cNvPr>
@@ -15590,24 +15579,66 @@
         </p:nvPicPr>
         <p:blipFill>
           <a:blip r:embed="rId2"/>
+          <a:srcRect l="649" t="2880" r="6791" b="28790"/>
           <a:stretch>
             <a:fillRect/>
           </a:stretch>
         </p:blipFill>
         <p:spPr>
           <a:xfrm>
-            <a:off x="1847710" y="2692400"/>
-            <a:ext cx="8496578" cy="3810000"/>
+            <a:off x="1523671" y="1974246"/>
+            <a:ext cx="9144658" cy="2909508"/>
           </a:xfrm>
           <a:prstGeom prst="rect">
             <a:avLst/>
           </a:prstGeom>
         </p:spPr>
       </p:pic>
+      <p:sp>
+        <p:nvSpPr>
+          <p:cNvPr id="5" name="TextBox 4">
+            <a:extLst>
+              <a:ext uri="{FF2B5EF4-FFF2-40B4-BE49-F238E27FC236}">
+                <a16:creationId xmlns:a16="http://schemas.microsoft.com/office/drawing/2014/main" id="{C213FC0E-B3D7-0636-A3F8-5A3D1DF12920}"/>
+              </a:ext>
+            </a:extLst>
+          </p:cNvPr>
+          <p:cNvSpPr txBox="1"/>
+          <p:nvPr/>
+        </p:nvSpPr>
+        <p:spPr>
+          <a:xfrm>
+            <a:off x="4778781" y="4826714"/>
+            <a:ext cx="2962221" cy="307777"/>
+          </a:xfrm>
+          <a:prstGeom prst="rect">
+            <a:avLst/>
+          </a:prstGeom>
+          <a:noFill/>
+        </p:spPr>
+        <p:txBody>
+          <a:bodyPr wrap="none" rtlCol="0">
+            <a:spAutoFit/>
+          </a:bodyPr>
+          <a:lstStyle/>
+          <a:p>
+            <a:pPr algn="l"/>
+            <a:r>
+              <a:rPr lang="ru-RU" sz="1400" dirty="0">
+                <a:latin typeface="HSE Sans" panose="02000000000000000000" pitchFamily="2" charset="0"/>
+              </a:rPr>
+              <a:t>Архитектура предлагаемой системы</a:t>
+            </a:r>
+            <a:endParaRPr lang="en-US" sz="1400" dirty="0">
+              <a:latin typeface="HSE Sans" panose="02000000000000000000" pitchFamily="2" charset="0"/>
+            </a:endParaRPr>
+          </a:p>
+        </p:txBody>
+      </p:sp>
     </p:spTree>
     <p:extLst>
       <p:ext uri="{BB962C8B-B14F-4D97-AF65-F5344CB8AC3E}">
-        <p14:creationId xmlns:p14="http://schemas.microsoft.com/office/powerpoint/2010/main" val="2838057669"/>
+        <p14:creationId xmlns:p14="http://schemas.microsoft.com/office/powerpoint/2010/main" val="997165844"/>
       </p:ext>
     </p:extLst>
   </p:cSld>
@@ -15651,7 +15682,7 @@
         <p:spPr>
           <a:xfrm>
             <a:off x="666489" y="1160924"/>
-            <a:ext cx="5094599" cy="802343"/>
+            <a:ext cx="7159699" cy="802343"/>
           </a:xfrm>
           <a:prstGeom prst="rect">
             <a:avLst/>
@@ -15683,7 +15714,7 @@
           <a:p>
             <a:r>
               <a:rPr lang="ru-RU" b="1" dirty="0"/>
-              <a:t>Матрицы ошибок на IEMOCAP</a:t>
+              <a:t>Бимодальная голова</a:t>
             </a:r>
           </a:p>
         </p:txBody>
@@ -16371,7 +16402,7 @@
           <p:cNvPr id="2" name="TextBox 1">
             <a:extLst>
               <a:ext uri="{FF2B5EF4-FFF2-40B4-BE49-F238E27FC236}">
-                <a16:creationId xmlns:a16="http://schemas.microsoft.com/office/drawing/2014/main" id="{A45EDBD0-F632-E64C-85B2-1998AD022AC5}"/>
+                <a16:creationId xmlns:a16="http://schemas.microsoft.com/office/drawing/2014/main" id="{53CE62E5-4DEE-3849-A1F9-FADA7378860B}"/>
               </a:ext>
             </a:extLst>
           </p:cNvPr>
@@ -16380,8 +16411,8 @@
         </p:nvSpPr>
         <p:spPr>
           <a:xfrm>
-            <a:off x="508000" y="1905000"/>
-            <a:ext cx="11176000" cy="609600"/>
+            <a:off x="660400" y="1622613"/>
+            <a:ext cx="10871200" cy="635000"/>
           </a:xfrm>
           <a:prstGeom prst="rect">
             <a:avLst/>
@@ -16396,128 +16427,41 @@
           <a:p>
             <a:pPr algn="l"/>
             <a:r>
-              <a:rPr lang="en-US" sz="1400">
-                <a:solidFill>
-                  <a:srgbClr val="1A1A1A"/>
-                </a:solidFill>
+              <a:rPr lang="ru-RU" sz="1500" dirty="0">
                 <a:latin typeface="HSE Sans"/>
               </a:rPr>
-              <a:t>Ours </a:t>
-            </a:r>
-            <a:r>
-              <a:rPr lang="ru-RU" sz="1400">
-                <a:solidFill>
-                  <a:srgbClr val="1A1A1A"/>
-                </a:solidFill>
-                <a:latin typeface="HSE Sans" panose="02000000000000000000" pitchFamily="2" charset="0"/>
-              </a:rPr>
-              <a:t>уверенно распознаёт </a:t>
-            </a:r>
-            <a:r>
-              <a:rPr lang="en-US" sz="1400">
-                <a:solidFill>
-                  <a:srgbClr val="1A1A1A"/>
-                </a:solidFill>
+              <a:t>А</a:t>
+            </a:r>
+            <a:r>
+              <a:rPr lang="ru-RU" sz="1500" dirty="0">
+                <a:latin typeface="HSE Sans" panose="02000000000000000000" pitchFamily="2" charset="0"/>
+              </a:rPr>
+              <a:t>удио- и видео-признаки извлекаются раздельно, конкатенируются в общий вектор и подаются в линейный классификатор на 4 класса. Аудио-ветка повторяет </a:t>
+            </a:r>
+            <a:r>
+              <a:rPr lang="en-US" sz="1500" dirty="0" err="1">
                 <a:latin typeface="HSE Sans"/>
               </a:rPr>
-              <a:t>neutral (0,71) </a:t>
-            </a:r>
-            <a:r>
-              <a:rPr lang="ru-RU" sz="1400">
-                <a:solidFill>
-                  <a:srgbClr val="1A1A1A"/>
-                </a:solidFill>
-                <a:latin typeface="HSE Sans" panose="02000000000000000000" pitchFamily="2" charset="0"/>
-              </a:rPr>
-              <a:t>и </a:t>
-            </a:r>
-            <a:r>
-              <a:rPr lang="en-US" sz="1400">
-                <a:solidFill>
-                  <a:srgbClr val="1A1A1A"/>
-                </a:solidFill>
+              <a:t>MelCNN</a:t>
+            </a:r>
+            <a:r>
+              <a:rPr lang="en-US" sz="1500" dirty="0">
                 <a:latin typeface="HSE Sans"/>
               </a:rPr>
-              <a:t>angry (0,62); </a:t>
-            </a:r>
-            <a:r>
-              <a:rPr lang="ru-RU" sz="1400">
-                <a:solidFill>
-                  <a:srgbClr val="1A1A1A"/>
-                </a:solidFill>
-                <a:latin typeface="HSE Sans" panose="02000000000000000000" pitchFamily="2" charset="0"/>
-              </a:rPr>
-              <a:t>основная ошибка — путаница </a:t>
-            </a:r>
-            <a:r>
-              <a:rPr lang="en-US" sz="1400">
-                <a:solidFill>
-                  <a:srgbClr val="1A1A1A"/>
-                </a:solidFill>
+              <a:t>, </a:t>
+            </a:r>
+            <a:r>
+              <a:rPr lang="ru-RU" sz="1500" dirty="0">
+                <a:latin typeface="HSE Sans" panose="02000000000000000000" pitchFamily="2" charset="0"/>
+              </a:rPr>
+              <a:t>видео-ветка — </a:t>
+            </a:r>
+            <a:r>
+              <a:rPr lang="en-US" sz="1500" dirty="0">
                 <a:latin typeface="HSE Sans"/>
               </a:rPr>
-              <a:t>happy ↔ angry (excited </a:t>
-            </a:r>
-            <a:r>
-              <a:rPr lang="ru-RU" sz="1400">
-                <a:solidFill>
-                  <a:srgbClr val="1A1A1A"/>
-                </a:solidFill>
-                <a:latin typeface="HSE Sans" panose="02000000000000000000" pitchFamily="2" charset="0"/>
-              </a:rPr>
-              <a:t>объединён с </a:t>
-            </a:r>
-            <a:r>
-              <a:rPr lang="en-US" sz="1400">
-                <a:solidFill>
-                  <a:srgbClr val="1A1A1A"/>
-                </a:solidFill>
-                <a:latin typeface="HSE Sans"/>
-              </a:rPr>
-              <a:t>happy). </a:t>
-            </a:r>
-            <a:r>
-              <a:rPr lang="ru-RU" sz="1400">
-                <a:solidFill>
-                  <a:srgbClr val="1A1A1A"/>
-                </a:solidFill>
-                <a:latin typeface="HSE Sans" panose="02000000000000000000" pitchFamily="2" charset="0"/>
-              </a:rPr>
-              <a:t>Трансформерные конкуренты лучше на </a:t>
-            </a:r>
-            <a:r>
-              <a:rPr lang="en-US" sz="1400">
-                <a:solidFill>
-                  <a:srgbClr val="1A1A1A"/>
-                </a:solidFill>
-                <a:latin typeface="HSE Sans"/>
-              </a:rPr>
-              <a:t>happy, </a:t>
-            </a:r>
-            <a:r>
-              <a:rPr lang="ru-RU" sz="1400">
-                <a:solidFill>
-                  <a:srgbClr val="1A1A1A"/>
-                </a:solidFill>
-                <a:latin typeface="HSE Sans" panose="02000000000000000000" pitchFamily="2" charset="0"/>
-              </a:rPr>
-              <a:t>но слабее на </a:t>
-            </a:r>
-            <a:r>
-              <a:rPr lang="en-US" sz="1400">
-                <a:solidFill>
-                  <a:srgbClr val="1A1A1A"/>
-                </a:solidFill>
-                <a:latin typeface="HSE Sans"/>
-              </a:rPr>
-              <a:t>neutral.</a:t>
-            </a:r>
-            <a:endParaRPr lang="en-US" sz="1400" dirty="0">
-              <a:solidFill>
-                <a:srgbClr val="1A1A1A"/>
-              </a:solidFill>
-              <a:latin typeface="HSE Sans"/>
-            </a:endParaRPr>
+              <a:t>EmotiEffNet + BiLSTM.</a:t>
+            </a:r>
           </a:p>
         </p:txBody>
       </p:sp>
@@ -16526,7 +16470,7 @@
           <p:cNvPr id="3" name="Picture 2">
             <a:extLst>
               <a:ext uri="{FF2B5EF4-FFF2-40B4-BE49-F238E27FC236}">
-                <a16:creationId xmlns:a16="http://schemas.microsoft.com/office/drawing/2014/main" id="{CB89C21F-85A1-8BB7-F623-BC11DDBF6235}"/>
+                <a16:creationId xmlns:a16="http://schemas.microsoft.com/office/drawing/2014/main" id="{5233D80E-1855-91F9-8069-073B57C8CE3A}"/>
               </a:ext>
             </a:extLst>
           </p:cNvPr>
@@ -16543,18 +16487,59 @@
         </p:blipFill>
         <p:spPr>
           <a:xfrm>
-            <a:off x="2794000" y="2438400"/>
-            <a:ext cx="6604000" cy="3975607"/>
+            <a:off x="1847710" y="2302437"/>
+            <a:ext cx="8496578" cy="3810000"/>
           </a:xfrm>
           <a:prstGeom prst="rect">
             <a:avLst/>
           </a:prstGeom>
         </p:spPr>
       </p:pic>
+      <p:sp>
+        <p:nvSpPr>
+          <p:cNvPr id="5" name="TextBox 4">
+            <a:extLst>
+              <a:ext uri="{FF2B5EF4-FFF2-40B4-BE49-F238E27FC236}">
+                <a16:creationId xmlns:a16="http://schemas.microsoft.com/office/drawing/2014/main" id="{068F8DE0-57F4-E6AE-A81C-D30A7CDA32DF}"/>
+              </a:ext>
+            </a:extLst>
+          </p:cNvPr>
+          <p:cNvSpPr txBox="1"/>
+          <p:nvPr/>
+        </p:nvSpPr>
+        <p:spPr>
+          <a:xfrm>
+            <a:off x="5415171" y="6112437"/>
+            <a:ext cx="1361655" cy="307777"/>
+          </a:xfrm>
+          <a:prstGeom prst="rect">
+            <a:avLst/>
+          </a:prstGeom>
+          <a:noFill/>
+        </p:spPr>
+        <p:txBody>
+          <a:bodyPr wrap="none" rtlCol="0">
+            <a:spAutoFit/>
+          </a:bodyPr>
+          <a:lstStyle/>
+          <a:p>
+            <a:pPr algn="ctr"/>
+            <a:r>
+              <a:rPr lang="en-US" sz="1400" dirty="0" err="1">
+                <a:latin typeface="HSE Sans" panose="02000000000000000000" pitchFamily="2" charset="0"/>
+              </a:rPr>
+              <a:t>BiLSTMBimodal</a:t>
+            </a:r>
+            <a:endParaRPr lang="en-US" sz="1400" dirty="0">
+              <a:latin typeface="HSE Sans" panose="02000000000000000000" pitchFamily="2" charset="0"/>
+            </a:endParaRPr>
+          </a:p>
+        </p:txBody>
+      </p:sp>
     </p:spTree>
     <p:extLst>
       <p:ext uri="{BB962C8B-B14F-4D97-AF65-F5344CB8AC3E}">
-        <p14:creationId xmlns:p14="http://schemas.microsoft.com/office/powerpoint/2010/main" val="3851004434"/>
+        <p14:creationId xmlns:p14="http://schemas.microsoft.com/office/powerpoint/2010/main" val="2838057669"/>
       </p:ext>
     </p:extLst>
   </p:cSld>
@@ -16630,7 +16615,7 @@
           <a:p>
             <a:r>
               <a:rPr lang="ru-RU" b="1" dirty="0"/>
-              <a:t>Эффективность и итоговое сравнение</a:t>
+              <a:t>Матрицы ошибок на IEMOCAP</a:t>
             </a:r>
           </a:p>
         </p:txBody>
@@ -17318,7 +17303,7 @@
           <p:cNvPr id="2" name="TextBox 1">
             <a:extLst>
               <a:ext uri="{FF2B5EF4-FFF2-40B4-BE49-F238E27FC236}">
-                <a16:creationId xmlns:a16="http://schemas.microsoft.com/office/drawing/2014/main" id="{B8C6D35F-A3FA-F94B-8683-2A75781DC1B1}"/>
+                <a16:creationId xmlns:a16="http://schemas.microsoft.com/office/drawing/2014/main" id="{A45EDBD0-F632-E64C-85B2-1998AD022AC5}"/>
               </a:ext>
             </a:extLst>
           </p:cNvPr>
@@ -17327,8 +17312,8 @@
         </p:nvSpPr>
         <p:spPr>
           <a:xfrm>
-            <a:off x="508000" y="1905000"/>
-            <a:ext cx="11176000" cy="584200"/>
+            <a:off x="671892" y="1660553"/>
+            <a:ext cx="11176000" cy="609600"/>
           </a:xfrm>
           <a:prstGeom prst="rect">
             <a:avLst/>
@@ -17343,74 +17328,95 @@
           <a:p>
             <a:pPr algn="l"/>
             <a:r>
-              <a:rPr lang="ru-RU" sz="1400">
-                <a:solidFill>
-                  <a:srgbClr val="1A1A1A"/>
-                </a:solidFill>
-                <a:latin typeface="HSE Sans" panose="02000000000000000000" pitchFamily="2" charset="0"/>
-              </a:rPr>
-              <a:t>Предложенная модель достигает парето-оптимума: </a:t>
-            </a:r>
-            <a:r>
-              <a:rPr lang="en-US" sz="1400">
-                <a:solidFill>
-                  <a:srgbClr val="1A1A1A"/>
-                </a:solidFill>
+              <a:rPr lang="ru-RU" sz="1400" dirty="0">
                 <a:latin typeface="HSE Sans"/>
               </a:rPr>
-              <a:t>UAR 0,509 </a:t>
-            </a:r>
-            <a:r>
-              <a:rPr lang="ru-RU" sz="1400">
-                <a:solidFill>
-                  <a:srgbClr val="1A1A1A"/>
-                </a:solidFill>
+              <a:t>Наша модель</a:t>
+            </a:r>
+            <a:r>
+              <a:rPr lang="en-US" sz="1400" dirty="0">
+                <a:latin typeface="HSE Sans"/>
+              </a:rPr>
+              <a:t> </a:t>
+            </a:r>
+            <a:r>
+              <a:rPr lang="ru-RU" sz="1400" dirty="0">
+                <a:latin typeface="HSE Sans" panose="02000000000000000000" pitchFamily="2" charset="0"/>
+              </a:rPr>
+              <a:t>уверенно распознаёт </a:t>
+            </a:r>
+            <a:r>
+              <a:rPr lang="en-US" sz="1400" dirty="0">
+                <a:latin typeface="HSE Sans"/>
+              </a:rPr>
+              <a:t>neutral (0,71) </a:t>
+            </a:r>
+            <a:r>
+              <a:rPr lang="ru-RU" sz="1400" dirty="0">
                 <a:latin typeface="HSE Sans" panose="02000000000000000000" pitchFamily="2" charset="0"/>
               </a:rPr>
               <a:t>и </a:t>
             </a:r>
             <a:r>
-              <a:rPr lang="en-US" sz="1400">
-                <a:solidFill>
-                  <a:srgbClr val="1A1A1A"/>
-                </a:solidFill>
+              <a:rPr lang="en-US" sz="1400" dirty="0">
                 <a:latin typeface="HSE Sans"/>
               </a:rPr>
-              <a:t>Macro-F1 0,494 </a:t>
-            </a:r>
-            <a:r>
-              <a:rPr lang="ru-RU" sz="1400">
-                <a:solidFill>
-                  <a:srgbClr val="1A1A1A"/>
-                </a:solidFill>
-                <a:latin typeface="HSE Sans" panose="02000000000000000000" pitchFamily="2" charset="0"/>
-              </a:rPr>
-              <a:t>при размере всего 37,3 МБ и времени 216 мс. Конкуренты на </a:t>
-            </a:r>
-            <a:r>
-              <a:rPr lang="en-US" sz="1400">
-                <a:solidFill>
-                  <a:srgbClr val="1A1A1A"/>
-                </a:solidFill>
+              <a:t>angry (0,62); </a:t>
+            </a:r>
+            <a:r>
+              <a:rPr lang="ru-RU" sz="1400" dirty="0">
+                <a:latin typeface="HSE Sans" panose="02000000000000000000" pitchFamily="2" charset="0"/>
+              </a:rPr>
+              <a:t>основная ошибка — путаница </a:t>
+            </a:r>
+            <a:r>
+              <a:rPr lang="en-US" sz="1400" dirty="0">
                 <a:latin typeface="HSE Sans"/>
               </a:rPr>
-              <a:t>Wav2Vec2 — ~379 </a:t>
-            </a:r>
-            <a:r>
-              <a:rPr lang="ru-RU" sz="1400">
-                <a:solidFill>
-                  <a:srgbClr val="1A1A1A"/>
-                </a:solidFill>
-                <a:latin typeface="HSE Sans" panose="02000000000000000000" pitchFamily="2" charset="0"/>
-              </a:rPr>
-              <a:t>МБ и ~610 мс при более низком качестве.</a:t>
-            </a:r>
-            <a:endParaRPr lang="en-US" sz="1400" dirty="0">
-              <a:solidFill>
-                <a:srgbClr val="1A1A1A"/>
-              </a:solidFill>
-              <a:latin typeface="HSE Sans"/>
-            </a:endParaRPr>
+              <a:t>happy ↔ angry (excited </a:t>
+            </a:r>
+            <a:r>
+              <a:rPr lang="ru-RU" sz="1400" dirty="0">
+                <a:latin typeface="HSE Sans" panose="02000000000000000000" pitchFamily="2" charset="0"/>
+              </a:rPr>
+              <a:t>объединён с </a:t>
+            </a:r>
+            <a:r>
+              <a:rPr lang="en-US" sz="1400" dirty="0">
+                <a:latin typeface="HSE Sans"/>
+              </a:rPr>
+              <a:t>happy). </a:t>
+            </a:r>
+            <a:r>
+              <a:rPr lang="ru-RU" sz="1400" dirty="0" err="1">
+                <a:latin typeface="HSE Sans" panose="02000000000000000000" pitchFamily="2" charset="0"/>
+              </a:rPr>
+              <a:t>Трансформерные</a:t>
+            </a:r>
+            <a:r>
+              <a:rPr lang="ru-RU" sz="1400" dirty="0">
+                <a:latin typeface="HSE Sans" panose="02000000000000000000" pitchFamily="2" charset="0"/>
+              </a:rPr>
+              <a:t> конкуренты лучше на </a:t>
+            </a:r>
+            <a:r>
+              <a:rPr lang="en-US" sz="1400" dirty="0">
+                <a:latin typeface="HSE Sans"/>
+              </a:rPr>
+              <a:t>happy, </a:t>
+            </a:r>
+            <a:r>
+              <a:rPr lang="ru-RU" sz="1400" dirty="0">
+                <a:latin typeface="HSE Sans" panose="02000000000000000000" pitchFamily="2" charset="0"/>
+              </a:rPr>
+              <a:t>но слабее на </a:t>
+            </a:r>
+            <a:r>
+              <a:rPr lang="en-US" sz="1400" dirty="0">
+                <a:latin typeface="HSE Sans"/>
+              </a:rPr>
+              <a:t>neutral.</a:t>
+            </a:r>
           </a:p>
         </p:txBody>
       </p:sp>
@@ -17419,7 +17425,7 @@
           <p:cNvPr id="3" name="Picture 2">
             <a:extLst>
               <a:ext uri="{FF2B5EF4-FFF2-40B4-BE49-F238E27FC236}">
-                <a16:creationId xmlns:a16="http://schemas.microsoft.com/office/drawing/2014/main" id="{A01CBF05-3900-DF2B-9B8C-22D06B85B48E}"/>
+                <a16:creationId xmlns:a16="http://schemas.microsoft.com/office/drawing/2014/main" id="{CB89C21F-85A1-8BB7-F623-BC11DDBF6235}"/>
               </a:ext>
             </a:extLst>
           </p:cNvPr>
@@ -17436,18 +17442,62 @@
         </p:blipFill>
         <p:spPr>
           <a:xfrm>
-            <a:off x="2131420" y="2540000"/>
-            <a:ext cx="7929158" cy="3911600"/>
+            <a:off x="2794000" y="2333673"/>
+            <a:ext cx="6604000" cy="3975607"/>
           </a:xfrm>
           <a:prstGeom prst="rect">
             <a:avLst/>
           </a:prstGeom>
         </p:spPr>
       </p:pic>
+      <p:sp>
+        <p:nvSpPr>
+          <p:cNvPr id="5" name="TextBox 4">
+            <a:extLst>
+              <a:ext uri="{FF2B5EF4-FFF2-40B4-BE49-F238E27FC236}">
+                <a16:creationId xmlns:a16="http://schemas.microsoft.com/office/drawing/2014/main" id="{3CB0CA6F-3692-B30C-4DE3-FBBE458CD0D6}"/>
+              </a:ext>
+            </a:extLst>
+          </p:cNvPr>
+          <p:cNvSpPr txBox="1"/>
+          <p:nvPr/>
+        </p:nvSpPr>
+        <p:spPr>
+          <a:xfrm>
+            <a:off x="4146116" y="6271548"/>
+            <a:ext cx="3899786" cy="307777"/>
+          </a:xfrm>
+          <a:prstGeom prst="rect">
+            <a:avLst/>
+          </a:prstGeom>
+          <a:noFill/>
+        </p:spPr>
+        <p:txBody>
+          <a:bodyPr wrap="none" rtlCol="0">
+            <a:spAutoFit/>
+          </a:bodyPr>
+          <a:lstStyle/>
+          <a:p>
+            <a:pPr algn="ctr"/>
+            <a:r>
+              <a:rPr lang="ru-RU" sz="1400" dirty="0">
+                <a:latin typeface="HSE Sans" panose="02000000000000000000" pitchFamily="2" charset="0"/>
+              </a:rPr>
+              <a:t>Матрица ошибок нашей архитектуры (</a:t>
+            </a:r>
+            <a:r>
+              <a:rPr lang="en-US" sz="1400" dirty="0">
+                <a:latin typeface="HSE Sans" panose="02000000000000000000" pitchFamily="2" charset="0"/>
+              </a:rPr>
+              <a:t>IEMOCAP)</a:t>
+            </a:r>
+          </a:p>
+        </p:txBody>
+      </p:sp>
     </p:spTree>
     <p:extLst>
       <p:ext uri="{BB962C8B-B14F-4D97-AF65-F5344CB8AC3E}">
-        <p14:creationId xmlns:p14="http://schemas.microsoft.com/office/powerpoint/2010/main" val="3927182499"/>
+        <p14:creationId xmlns:p14="http://schemas.microsoft.com/office/powerpoint/2010/main" val="3851004434"/>
       </p:ext>
     </p:extLst>
   </p:cSld>
@@ -17523,7 +17573,7 @@
           <a:p>
             <a:r>
               <a:rPr lang="ru-RU" b="1" dirty="0"/>
-              <a:t>Прототип реального времени</a:t>
+              <a:t>Эффективность и итоговое сравнение</a:t>
             </a:r>
           </a:p>
         </p:txBody>
@@ -18211,7 +18261,7 @@
           <p:cNvPr id="2" name="TextBox 1">
             <a:extLst>
               <a:ext uri="{FF2B5EF4-FFF2-40B4-BE49-F238E27FC236}">
-                <a16:creationId xmlns:a16="http://schemas.microsoft.com/office/drawing/2014/main" id="{1D142098-D07C-234B-AD57-80716B005A0E}"/>
+                <a16:creationId xmlns:a16="http://schemas.microsoft.com/office/drawing/2014/main" id="{B8C6D35F-A3FA-F94B-8683-2A75781DC1B1}"/>
               </a:ext>
             </a:extLst>
           </p:cNvPr>
@@ -18220,8 +18270,8 @@
         </p:nvSpPr>
         <p:spPr>
           <a:xfrm>
-            <a:off x="660400" y="1905000"/>
-            <a:ext cx="10871200" cy="381000"/>
+            <a:off x="666489" y="1620209"/>
+            <a:ext cx="10561805" cy="584200"/>
           </a:xfrm>
           <a:prstGeom prst="rect">
             <a:avLst/>
@@ -18229,163 +18279,96 @@
           <a:noFill/>
         </p:spPr>
         <p:txBody>
-          <a:bodyPr vertOverflow="overflow" vert="horz" wrap="square" rtlCol="0" anchor="t">
+          <a:bodyPr vertOverflow="overflow" vert="horz" wrap="square" lIns="50800" tIns="50800" rIns="50800" bIns="50800" rtlCol="0" anchor="t">
             <a:noAutofit/>
           </a:bodyPr>
           <a:lstStyle/>
           <a:p>
-            <a:pPr algn="l"/>
-            <a:r>
-              <a:rPr lang="ru-RU" sz="1500">
-                <a:solidFill>
-                  <a:srgbClr val="1A1A1A"/>
-                </a:solidFill>
-                <a:latin typeface="HSE Sans" panose="02000000000000000000" pitchFamily="2" charset="0"/>
-              </a:rPr>
-              <a:t>Прототип повторяет логику финальной модели и работает в три параллельных потока:</a:t>
-            </a:r>
-            <a:endParaRPr lang="en-US" sz="1500" dirty="0">
-              <a:solidFill>
-                <a:srgbClr val="1A1A1A"/>
-              </a:solidFill>
+            <a:pPr algn="just"/>
+            <a:r>
+              <a:rPr lang="ru-RU" sz="1400" dirty="0">
+                <a:latin typeface="HSE Sans" panose="02000000000000000000" pitchFamily="2" charset="0"/>
+              </a:rPr>
+              <a:t>Предложенная модель достигает следующих метрик качества: </a:t>
+            </a:r>
+            <a:r>
+              <a:rPr lang="en-US" sz="1400" dirty="0">
+                <a:latin typeface="HSE Sans"/>
+              </a:rPr>
+              <a:t>UAR 0,509 </a:t>
+            </a:r>
+            <a:r>
+              <a:rPr lang="ru-RU" sz="1400" dirty="0">
+                <a:latin typeface="HSE Sans" panose="02000000000000000000" pitchFamily="2" charset="0"/>
+              </a:rPr>
+              <a:t>и </a:t>
+            </a:r>
+            <a:r>
+              <a:rPr lang="en-US" sz="1400" dirty="0">
+                <a:latin typeface="HSE Sans"/>
+              </a:rPr>
+              <a:t>Macro-F1 0,494 </a:t>
+            </a:r>
+            <a:r>
+              <a:rPr lang="ru-RU" sz="1400" dirty="0">
+                <a:latin typeface="HSE Sans" panose="02000000000000000000" pitchFamily="2" charset="0"/>
+              </a:rPr>
+              <a:t>при размере всего 37,3 МБ и времени 216 мс. Конкуренты на </a:t>
+            </a:r>
+            <a:r>
+              <a:rPr lang="en-US" sz="1400" dirty="0">
+                <a:latin typeface="HSE Sans"/>
+              </a:rPr>
+              <a:t>Wav2Vec2 — ~379 </a:t>
+            </a:r>
+            <a:r>
+              <a:rPr lang="ru-RU" sz="1400" dirty="0">
+                <a:latin typeface="HSE Sans" panose="02000000000000000000" pitchFamily="2" charset="0"/>
+              </a:rPr>
+              <a:t>МБ и ~610 мс при более низком качестве.</a:t>
+            </a:r>
+            <a:endParaRPr lang="en-US" sz="1400" dirty="0">
               <a:latin typeface="HSE Sans"/>
             </a:endParaRPr>
           </a:p>
         </p:txBody>
       </p:sp>
-      <p:sp>
-        <p:nvSpPr>
-          <p:cNvPr id="3" name="Rounded Rectangle 2">
+      <p:pic>
+        <p:nvPicPr>
+          <p:cNvPr id="3" name="Picture 2">
             <a:extLst>
               <a:ext uri="{FF2B5EF4-FFF2-40B4-BE49-F238E27FC236}">
-                <a16:creationId xmlns:a16="http://schemas.microsoft.com/office/drawing/2014/main" id="{6DFC2F28-8C31-E147-B6D8-7AF9C7E7C503}"/>
+                <a16:creationId xmlns:a16="http://schemas.microsoft.com/office/drawing/2014/main" id="{A01CBF05-3900-DF2B-9B8C-22D06B85B48E}"/>
               </a:ext>
             </a:extLst>
           </p:cNvPr>
-          <p:cNvSpPr/>
+          <p:cNvPicPr>
+            <a:picLocks noChangeAspect="1"/>
+          </p:cNvPicPr>
           <p:nvPr/>
-        </p:nvSpPr>
-        <p:spPr>
-          <a:xfrm>
-            <a:off x="660400" y="2413000"/>
-            <a:ext cx="3454400" cy="2159000"/>
-          </a:xfrm>
-          <a:prstGeom prst="roundRect">
-            <a:avLst/>
-          </a:prstGeom>
-          <a:solidFill>
-            <a:srgbClr val="E8EEF7"/>
-          </a:solidFill>
-          <a:ln w="19050" cap="flat" cmpd="sng" algn="ctr">
-            <a:solidFill>
-              <a:srgbClr val="1F4E9B"/>
-            </a:solidFill>
-            <a:prstDash val="solid"/>
-            <a:miter lim="800000"/>
-          </a:ln>
-        </p:spPr>
-        <p:style>
-          <a:lnRef idx="2">
-            <a:schemeClr val="accent1">
-              <a:shade val="15000"/>
-            </a:schemeClr>
-          </a:lnRef>
-          <a:fillRef idx="1">
-            <a:schemeClr val="accent1"/>
-          </a:fillRef>
-          <a:effectRef idx="0">
-            <a:schemeClr val="accent1"/>
-          </a:effectRef>
-          <a:fontRef idx="minor">
-            <a:schemeClr val="lt1"/>
-          </a:fontRef>
-        </p:style>
-        <p:txBody>
-          <a:bodyPr vertOverflow="clip" horzOverflow="clip" rtlCol="0" anchor="t"/>
-          <a:lstStyle/>
-          <a:p>
-            <a:pPr algn="l"/>
-            <a:endParaRPr lang="en-US"/>
-          </a:p>
-        </p:txBody>
-      </p:sp>
-      <p:sp>
-        <p:nvSpPr>
-          <p:cNvPr id="5" name="Rectangle 4">
-            <a:extLst>
-              <a:ext uri="{FF2B5EF4-FFF2-40B4-BE49-F238E27FC236}">
-                <a16:creationId xmlns:a16="http://schemas.microsoft.com/office/drawing/2014/main" id="{11854243-6D16-CD44-B8E9-C768C3E2D949}"/>
-              </a:ext>
-            </a:extLst>
-          </p:cNvPr>
-          <p:cNvSpPr/>
-          <p:nvPr/>
-        </p:nvSpPr>
-        <p:spPr>
-          <a:xfrm>
-            <a:off x="660400" y="2413000"/>
-            <a:ext cx="3454400" cy="482600"/>
+        </p:nvPicPr>
+        <p:blipFill>
+          <a:blip r:embed="rId2"/>
+          <a:stretch>
+            <a:fillRect/>
+          </a:stretch>
+        </p:blipFill>
+        <p:spPr>
+          <a:xfrm>
+            <a:off x="1700508" y="2119838"/>
+            <a:ext cx="8790984" cy="4336755"/>
           </a:xfrm>
           <a:prstGeom prst="rect">
             <a:avLst/>
           </a:prstGeom>
-          <a:solidFill>
-            <a:srgbClr val="1F4E9B"/>
-          </a:solidFill>
-          <a:ln w="19050" cap="flat" cmpd="sng" algn="ctr">
-            <a:solidFill>
-              <a:srgbClr val="1E4D9B"/>
-            </a:solidFill>
-            <a:prstDash val="solid"/>
-            <a:miter lim="800000"/>
-          </a:ln>
-        </p:spPr>
-        <p:style>
-          <a:lnRef idx="2">
-            <a:schemeClr val="accent1">
-              <a:shade val="15000"/>
-            </a:schemeClr>
-          </a:lnRef>
-          <a:fillRef idx="1">
-            <a:schemeClr val="accent1"/>
-          </a:fillRef>
-          <a:effectRef idx="0">
-            <a:schemeClr val="accent1"/>
-          </a:effectRef>
-          <a:fontRef idx="minor">
-            <a:schemeClr val="lt1"/>
-          </a:fontRef>
-        </p:style>
-        <p:txBody>
-          <a:bodyPr vertOverflow="clip" horzOverflow="clip" wrap="square" lIns="101600" tIns="25400" rIns="101600" bIns="25400" rtlCol="0" anchor="ctr" anchorCtr="0">
-            <a:noAutofit/>
-          </a:bodyPr>
-          <a:lstStyle/>
-          <a:p>
-            <a:pPr algn="ctr"/>
-            <a:r>
-              <a:rPr lang="ru-RU" sz="1600" b="1">
-                <a:solidFill>
-                  <a:srgbClr val="FFFFFF"/>
-                </a:solidFill>
-              </a:rPr>
-              <a:t>Аудио-поток</a:t>
-            </a:r>
-            <a:endParaRPr lang="en-US" sz="1600" b="1">
-              <a:solidFill>
-                <a:srgbClr val="FFFFFF"/>
-              </a:solidFill>
-              <a:latin typeface="HSE Sans"/>
-            </a:endParaRPr>
-          </a:p>
-        </p:txBody>
-      </p:sp>
+        </p:spPr>
+      </p:pic>
       <p:sp>
         <p:nvSpPr>
-          <p:cNvPr id="6" name="TextBox 5">
+          <p:cNvPr id="5" name="TextBox 4">
             <a:extLst>
               <a:ext uri="{FF2B5EF4-FFF2-40B4-BE49-F238E27FC236}">
-                <a16:creationId xmlns:a16="http://schemas.microsoft.com/office/drawing/2014/main" id="{A558DD06-2F4E-1B43-A052-2555203CDFE7}"/>
+                <a16:creationId xmlns:a16="http://schemas.microsoft.com/office/drawing/2014/main" id="{A41AAE11-0972-B3DD-DE62-0A98BFF858AA}"/>
               </a:ext>
             </a:extLst>
           </p:cNvPr>
@@ -18394,8 +18377,8 @@
         </p:nvSpPr>
         <p:spPr>
           <a:xfrm>
-            <a:off x="838200" y="3022600"/>
-            <a:ext cx="3098800" cy="1447800"/>
+            <a:off x="4255543" y="6204313"/>
+            <a:ext cx="3680944" cy="307777"/>
           </a:xfrm>
           <a:prstGeom prst="rect">
             <a:avLst/>
@@ -18403,515 +18386,23 @@
           <a:noFill/>
         </p:spPr>
         <p:txBody>
-          <a:bodyPr vertOverflow="overflow" vert="horz" wrap="square" rtlCol="0" anchor="t">
-            <a:noAutofit/>
+          <a:bodyPr wrap="none" rtlCol="0">
+            <a:spAutoFit/>
           </a:bodyPr>
           <a:lstStyle/>
           <a:p>
-            <a:pPr algn="l"/>
-            <a:r>
-              <a:rPr lang="ru-RU" sz="1300">
-                <a:solidFill>
-                  <a:srgbClr val="1A1A1A"/>
-                </a:solidFill>
-                <a:latin typeface="HSE Sans" panose="02000000000000000000" pitchFamily="2" charset="0"/>
-              </a:rPr>
-              <a:t>•  Непрерывно опрашивает микрофон
-•  </a:t>
-            </a:r>
-            <a:r>
-              <a:rPr lang="en-US" sz="1300">
-                <a:solidFill>
-                  <a:srgbClr val="1A1A1A"/>
-                </a:solidFill>
-                <a:latin typeface="HSE Sans"/>
-              </a:rPr>
-              <a:t>Silero VAD </a:t>
-            </a:r>
-            <a:r>
-              <a:rPr lang="ru-RU" sz="1300">
-                <a:solidFill>
-                  <a:srgbClr val="1A1A1A"/>
-                </a:solidFill>
-                <a:latin typeface="HSE Sans" panose="02000000000000000000" pitchFamily="2" charset="0"/>
-              </a:rPr>
-              <a:t>сегментирует речь на отдельные фразы
-•  Накопление в буфере</a:t>
-            </a:r>
-            <a:endParaRPr lang="en-US" sz="1300" dirty="0">
-              <a:solidFill>
-                <a:srgbClr val="1A1A1A"/>
-              </a:solidFill>
-              <a:latin typeface="HSE Sans"/>
-            </a:endParaRPr>
-          </a:p>
-        </p:txBody>
-      </p:sp>
-      <p:sp>
-        <p:nvSpPr>
-          <p:cNvPr id="7" name="Rounded Rectangle 6">
-            <a:extLst>
-              <a:ext uri="{FF2B5EF4-FFF2-40B4-BE49-F238E27FC236}">
-                <a16:creationId xmlns:a16="http://schemas.microsoft.com/office/drawing/2014/main" id="{6EAFA8D6-A064-9746-8649-2931C68410AD}"/>
-              </a:ext>
-            </a:extLst>
-          </p:cNvPr>
-          <p:cNvSpPr/>
-          <p:nvPr/>
-        </p:nvSpPr>
-        <p:spPr>
-          <a:xfrm>
-            <a:off x="4368800" y="2413000"/>
-            <a:ext cx="3454400" cy="2159000"/>
-          </a:xfrm>
-          <a:prstGeom prst="roundRect">
-            <a:avLst/>
-          </a:prstGeom>
-          <a:solidFill>
-            <a:srgbClr val="E8EEF7"/>
-          </a:solidFill>
-          <a:ln w="19050" cap="flat" cmpd="sng" algn="ctr">
-            <a:solidFill>
-              <a:srgbClr val="2E7D5B"/>
-            </a:solidFill>
-            <a:prstDash val="solid"/>
-            <a:miter lim="800000"/>
-          </a:ln>
-        </p:spPr>
-        <p:style>
-          <a:lnRef idx="2">
-            <a:schemeClr val="accent1">
-              <a:shade val="15000"/>
-            </a:schemeClr>
-          </a:lnRef>
-          <a:fillRef idx="1">
-            <a:schemeClr val="accent1"/>
-          </a:fillRef>
-          <a:effectRef idx="0">
-            <a:schemeClr val="accent1"/>
-          </a:effectRef>
-          <a:fontRef idx="minor">
-            <a:schemeClr val="lt1"/>
-          </a:fontRef>
-        </p:style>
-        <p:txBody>
-          <a:bodyPr vertOverflow="clip" horzOverflow="clip" rtlCol="0" anchor="t"/>
-          <a:lstStyle/>
-          <a:p>
-            <a:pPr algn="l"/>
-            <a:endParaRPr lang="en-US"/>
-          </a:p>
-        </p:txBody>
-      </p:sp>
-      <p:sp>
-        <p:nvSpPr>
-          <p:cNvPr id="8" name="Rectangle 7">
-            <a:extLst>
-              <a:ext uri="{FF2B5EF4-FFF2-40B4-BE49-F238E27FC236}">
-                <a16:creationId xmlns:a16="http://schemas.microsoft.com/office/drawing/2014/main" id="{8EFA7017-7267-ED41-B40E-20A600152EE1}"/>
-              </a:ext>
-            </a:extLst>
-          </p:cNvPr>
-          <p:cNvSpPr/>
-          <p:nvPr/>
-        </p:nvSpPr>
-        <p:spPr>
-          <a:xfrm>
-            <a:off x="4368800" y="2413000"/>
-            <a:ext cx="3454400" cy="482600"/>
-          </a:xfrm>
-          <a:prstGeom prst="rect">
-            <a:avLst/>
-          </a:prstGeom>
-          <a:solidFill>
-            <a:srgbClr val="2F7D5B"/>
-          </a:solidFill>
-          <a:ln w="19050" cap="flat" cmpd="sng" algn="ctr">
-            <a:solidFill>
-              <a:srgbClr val="2F7D5B"/>
-            </a:solidFill>
-            <a:prstDash val="solid"/>
-            <a:miter lim="800000"/>
-          </a:ln>
-        </p:spPr>
-        <p:style>
-          <a:lnRef idx="2">
-            <a:schemeClr val="accent1">
-              <a:shade val="15000"/>
-            </a:schemeClr>
-          </a:lnRef>
-          <a:fillRef idx="1">
-            <a:schemeClr val="accent1"/>
-          </a:fillRef>
-          <a:effectRef idx="0">
-            <a:schemeClr val="accent1"/>
-          </a:effectRef>
-          <a:fontRef idx="minor">
-            <a:schemeClr val="lt1"/>
-          </a:fontRef>
-        </p:style>
-        <p:txBody>
-          <a:bodyPr vertOverflow="clip" horzOverflow="clip" wrap="square" lIns="101600" tIns="25400" rIns="101600" bIns="25400" rtlCol="0" anchor="ctr" anchorCtr="0">
-            <a:noAutofit/>
-          </a:bodyPr>
-          <a:lstStyle/>
-          <a:p>
             <a:pPr algn="ctr"/>
             <a:r>
-              <a:rPr lang="ru-RU" sz="1600" b="1">
-                <a:solidFill>
-                  <a:srgbClr val="FFFFFF"/>
-                </a:solidFill>
-              </a:rPr>
-              <a:t>Видео-поток</a:t>
-            </a:r>
-            <a:endParaRPr lang="en-US" sz="1600" b="1">
-              <a:solidFill>
-                <a:srgbClr val="FFFFFF"/>
-              </a:solidFill>
-              <a:latin typeface="HSE Sans"/>
-            </a:endParaRPr>
-          </a:p>
-        </p:txBody>
-      </p:sp>
-      <p:sp>
-        <p:nvSpPr>
-          <p:cNvPr id="9" name="TextBox 8">
-            <a:extLst>
-              <a:ext uri="{FF2B5EF4-FFF2-40B4-BE49-F238E27FC236}">
-                <a16:creationId xmlns:a16="http://schemas.microsoft.com/office/drawing/2014/main" id="{D1BC6F8F-2363-154C-B13B-33FA73D1EBF5}"/>
-              </a:ext>
-            </a:extLst>
-          </p:cNvPr>
-          <p:cNvSpPr txBox="1"/>
-          <p:nvPr/>
-        </p:nvSpPr>
-        <p:spPr>
-          <a:xfrm>
-            <a:off x="4546600" y="3022600"/>
-            <a:ext cx="3098800" cy="1447800"/>
-          </a:xfrm>
-          <a:prstGeom prst="rect">
-            <a:avLst/>
-          </a:prstGeom>
-          <a:noFill/>
-        </p:spPr>
-        <p:txBody>
-          <a:bodyPr vertOverflow="overflow" vert="horz" wrap="square" rtlCol="0" anchor="t">
-            <a:noAutofit/>
-          </a:bodyPr>
-          <a:lstStyle/>
-          <a:p>
-            <a:pPr algn="l"/>
-            <a:r>
-              <a:rPr lang="ru-RU" sz="1300">
-                <a:solidFill>
-                  <a:srgbClr val="1A1A1A"/>
-                </a:solidFill>
-                <a:latin typeface="HSE Sans" panose="02000000000000000000" pitchFamily="2" charset="0"/>
-              </a:rPr>
-              <a:t>•  Читает кадры с веб-камеры в фоне
-•  Кольцевой буфер ~3 секунды
-•  Готов к выборке 16 кадров</a:t>
-            </a:r>
-            <a:endParaRPr lang="en-US" sz="1300" dirty="0">
-              <a:solidFill>
-                <a:srgbClr val="1A1A1A"/>
-              </a:solidFill>
-              <a:latin typeface="HSE Sans"/>
-            </a:endParaRPr>
-          </a:p>
-        </p:txBody>
-      </p:sp>
-      <p:sp>
-        <p:nvSpPr>
-          <p:cNvPr id="11" name="Rounded Rectangle 10">
-            <a:extLst>
-              <a:ext uri="{FF2B5EF4-FFF2-40B4-BE49-F238E27FC236}">
-                <a16:creationId xmlns:a16="http://schemas.microsoft.com/office/drawing/2014/main" id="{B233FB9B-9223-C84F-B980-75594DF4CEB6}"/>
-              </a:ext>
-            </a:extLst>
-          </p:cNvPr>
-          <p:cNvSpPr/>
-          <p:nvPr/>
-        </p:nvSpPr>
-        <p:spPr>
-          <a:xfrm>
-            <a:off x="8077200" y="2413000"/>
-            <a:ext cx="3454400" cy="2159000"/>
-          </a:xfrm>
-          <a:prstGeom prst="roundRect">
-            <a:avLst/>
-          </a:prstGeom>
-          <a:solidFill>
-            <a:srgbClr val="E8EEF7"/>
-          </a:solidFill>
-          <a:ln w="19050" cap="flat" cmpd="sng" algn="ctr">
-            <a:solidFill>
-              <a:srgbClr val="102E5A"/>
-            </a:solidFill>
-            <a:prstDash val="solid"/>
-            <a:miter lim="800000"/>
-          </a:ln>
-        </p:spPr>
-        <p:style>
-          <a:lnRef idx="2">
-            <a:schemeClr val="accent1">
-              <a:shade val="15000"/>
-            </a:schemeClr>
-          </a:lnRef>
-          <a:fillRef idx="1">
-            <a:schemeClr val="accent1"/>
-          </a:fillRef>
-          <a:effectRef idx="0">
-            <a:schemeClr val="accent1"/>
-          </a:effectRef>
-          <a:fontRef idx="minor">
-            <a:schemeClr val="lt1"/>
-          </a:fontRef>
-        </p:style>
-        <p:txBody>
-          <a:bodyPr vertOverflow="clip" horzOverflow="clip" rtlCol="0" anchor="t"/>
-          <a:lstStyle/>
-          <a:p>
-            <a:pPr algn="l"/>
-            <a:endParaRPr lang="en-US"/>
-          </a:p>
-        </p:txBody>
-      </p:sp>
-      <p:sp>
-        <p:nvSpPr>
-          <p:cNvPr id="12" name="Rectangle 11">
-            <a:extLst>
-              <a:ext uri="{FF2B5EF4-FFF2-40B4-BE49-F238E27FC236}">
-                <a16:creationId xmlns:a16="http://schemas.microsoft.com/office/drawing/2014/main" id="{F8022F8A-915B-BE4A-8405-0AF4C78BFF65}"/>
-              </a:ext>
-            </a:extLst>
-          </p:cNvPr>
-          <p:cNvSpPr/>
-          <p:nvPr/>
-        </p:nvSpPr>
-        <p:spPr>
-          <a:xfrm>
-            <a:off x="8077200" y="2413000"/>
-            <a:ext cx="3454400" cy="482600"/>
-          </a:xfrm>
-          <a:prstGeom prst="rect">
-            <a:avLst/>
-          </a:prstGeom>
-          <a:solidFill>
-            <a:schemeClr val="tx1"/>
-          </a:solidFill>
-          <a:ln w="19050" cap="flat" cmpd="sng" algn="ctr">
-            <a:solidFill>
-              <a:schemeClr val="tx1"/>
-            </a:solidFill>
-            <a:prstDash val="solid"/>
-            <a:miter lim="800000"/>
-          </a:ln>
-        </p:spPr>
-        <p:style>
-          <a:lnRef idx="2">
-            <a:schemeClr val="accent1">
-              <a:shade val="15000"/>
-            </a:schemeClr>
-          </a:lnRef>
-          <a:fillRef idx="1">
-            <a:schemeClr val="accent1"/>
-          </a:fillRef>
-          <a:effectRef idx="0">
-            <a:schemeClr val="accent1"/>
-          </a:effectRef>
-          <a:fontRef idx="minor">
-            <a:schemeClr val="lt1"/>
-          </a:fontRef>
-        </p:style>
-        <p:txBody>
-          <a:bodyPr vertOverflow="clip" horzOverflow="clip" wrap="square" lIns="101600" tIns="25400" rIns="101600" bIns="25400" rtlCol="0" anchor="ctr" anchorCtr="0">
-            <a:noAutofit/>
-          </a:bodyPr>
-          <a:lstStyle/>
-          <a:p>
-            <a:pPr algn="ctr"/>
-            <a:r>
-              <a:rPr lang="ru-RU" sz="1600" b="1">
-                <a:solidFill>
-                  <a:srgbClr val="FFFFFF"/>
-                </a:solidFill>
-              </a:rPr>
-              <a:t>Поток инференса</a:t>
-            </a:r>
-            <a:endParaRPr lang="en-US" sz="1600" b="1">
-              <a:solidFill>
-                <a:srgbClr val="FFFFFF"/>
-              </a:solidFill>
-              <a:latin typeface="HSE Sans"/>
-            </a:endParaRPr>
-          </a:p>
-        </p:txBody>
-      </p:sp>
-      <p:sp>
-        <p:nvSpPr>
-          <p:cNvPr id="13" name="TextBox 12">
-            <a:extLst>
-              <a:ext uri="{FF2B5EF4-FFF2-40B4-BE49-F238E27FC236}">
-                <a16:creationId xmlns:a16="http://schemas.microsoft.com/office/drawing/2014/main" id="{C1FE2D7E-B081-594D-9FAD-9510023008B9}"/>
-              </a:ext>
-            </a:extLst>
-          </p:cNvPr>
-          <p:cNvSpPr txBox="1"/>
-          <p:nvPr/>
-        </p:nvSpPr>
-        <p:spPr>
-          <a:xfrm>
-            <a:off x="8255000" y="3022600"/>
-            <a:ext cx="3098800" cy="1447800"/>
-          </a:xfrm>
-          <a:prstGeom prst="rect">
-            <a:avLst/>
-          </a:prstGeom>
-          <a:noFill/>
-        </p:spPr>
-        <p:txBody>
-          <a:bodyPr vertOverflow="overflow" vert="horz" wrap="square" rtlCol="0" anchor="t">
-            <a:noAutofit/>
-          </a:bodyPr>
-          <a:lstStyle/>
-          <a:p>
-            <a:pPr algn="l"/>
-            <a:r>
-              <a:rPr lang="ru-RU" sz="1300">
-                <a:solidFill>
-                  <a:srgbClr val="1A1A1A"/>
-                </a:solidFill>
-                <a:latin typeface="HSE Sans" panose="02000000000000000000" pitchFamily="2" charset="0"/>
-              </a:rPr>
-              <a:t>•  Запускается при завершении фразы
-•  Каскадный инференс (гейт → голова)
-•  Флаг </a:t>
-            </a:r>
-            <a:r>
-              <a:rPr lang="en-US" sz="1300">
-                <a:solidFill>
-                  <a:srgbClr val="1A1A1A"/>
-                </a:solidFill>
-                <a:latin typeface="HSE Sans"/>
-              </a:rPr>
-              <a:t>processing </a:t>
-            </a:r>
-            <a:r>
-              <a:rPr lang="ru-RU" sz="1300">
-                <a:solidFill>
-                  <a:srgbClr val="1A1A1A"/>
-                </a:solidFill>
-                <a:latin typeface="HSE Sans" panose="02000000000000000000" pitchFamily="2" charset="0"/>
-              </a:rPr>
-              <a:t>против гонок</a:t>
-            </a:r>
-            <a:endParaRPr lang="en-US" sz="1300" dirty="0">
-              <a:solidFill>
-                <a:srgbClr val="1A1A1A"/>
-              </a:solidFill>
-              <a:latin typeface="HSE Sans"/>
-            </a:endParaRPr>
-          </a:p>
-        </p:txBody>
-      </p:sp>
-      <p:sp>
-        <p:nvSpPr>
-          <p:cNvPr id="14" name="Rounded Rectangle 13">
-            <a:extLst>
-              <a:ext uri="{FF2B5EF4-FFF2-40B4-BE49-F238E27FC236}">
-                <a16:creationId xmlns:a16="http://schemas.microsoft.com/office/drawing/2014/main" id="{96B201F6-BB71-0149-93F2-C6C919BCE5F6}"/>
-              </a:ext>
-            </a:extLst>
-          </p:cNvPr>
-          <p:cNvSpPr/>
-          <p:nvPr/>
-        </p:nvSpPr>
-        <p:spPr>
-          <a:xfrm>
-            <a:off x="660400" y="4724400"/>
-            <a:ext cx="10871200" cy="1371600"/>
-          </a:xfrm>
-          <a:prstGeom prst="roundRect">
-            <a:avLst/>
-          </a:prstGeom>
-          <a:solidFill>
-            <a:srgbClr val="F4F7FC"/>
-          </a:solidFill>
-          <a:ln w="12700" cap="flat" cmpd="sng" algn="ctr">
-            <a:solidFill>
-              <a:srgbClr val="102E5A"/>
-            </a:solidFill>
-            <a:prstDash val="solid"/>
-            <a:miter lim="800000"/>
-          </a:ln>
-        </p:spPr>
-        <p:style>
-          <a:lnRef idx="2">
-            <a:schemeClr val="accent1">
-              <a:shade val="15000"/>
-            </a:schemeClr>
-          </a:lnRef>
-          <a:fillRef idx="1">
-            <a:schemeClr val="accent1"/>
-          </a:fillRef>
-          <a:effectRef idx="0">
-            <a:schemeClr val="accent1"/>
-          </a:effectRef>
-          <a:fontRef idx="minor">
-            <a:schemeClr val="lt1"/>
-          </a:fontRef>
-        </p:style>
-        <p:txBody>
-          <a:bodyPr vertOverflow="clip" horzOverflow="clip" wrap="square" rtlCol="0" anchor="t" anchorCtr="0">
-            <a:noAutofit/>
-          </a:bodyPr>
-          <a:lstStyle/>
-          <a:p>
-            <a:pPr>
-              <a:spcAft>
-                <a:spcPts val="600"/>
-              </a:spcAft>
-            </a:pPr>
-            <a:r>
-              <a:rPr lang="ru-RU" sz="1400" b="1" dirty="0">
-                <a:solidFill>
-                  <a:srgbClr val="2E7D5B"/>
-                </a:solidFill>
-                <a:latin typeface="HSE Sans" panose="02000000000000000000" pitchFamily="2" charset="0"/>
-              </a:rPr>
-              <a:t>Производительность: </a:t>
-            </a:r>
-            <a:r>
               <a:rPr lang="ru-RU" sz="1400" dirty="0">
-                <a:solidFill>
-                  <a:srgbClr val="1A1A1A"/>
-                </a:solidFill>
-                <a:latin typeface="HSE Sans" panose="02000000000000000000" pitchFamily="2" charset="0"/>
-              </a:rPr>
-              <a:t>нейтральные фразы — менее 10 мс, эмоциональные — 60–110 мс на Apple M1 Pro (MPS), без потери плавности интерфейса.</a:t>
-            </a:r>
-          </a:p>
-          <a:p>
-            <a:r>
-              <a:rPr lang="ru-RU" sz="1400" b="1" dirty="0">
-                <a:solidFill>
-                  <a:srgbClr val="102E5A"/>
-                </a:solidFill>
-                <a:latin typeface="HSE Sans" panose="02000000000000000000" pitchFamily="2" charset="0"/>
-              </a:rPr>
-              <a:t>Ограничения: </a:t>
-            </a:r>
-            <a:r>
-              <a:rPr lang="ru-RU" sz="1400" dirty="0">
-                <a:solidFill>
-                  <a:srgbClr val="1A1A1A"/>
-                </a:solidFill>
-                <a:latin typeface="HSE Sans" panose="02000000000000000000" pitchFamily="2" charset="0"/>
-              </a:rPr>
-              <a:t>нет очереди фраз; возможное расхождение аудио- и видео-окон; обработка одного лица; упрощённый fallback детекции; чувствительность к освещению.</a:t>
+                <a:latin typeface="HSE Sans" panose="02000000000000000000" pitchFamily="2" charset="0"/>
+              </a:rPr>
+              <a:t>Результаты бенчмарка на датасете </a:t>
+            </a:r>
+            <a:r>
+              <a:rPr lang="en-US" sz="1400" dirty="0">
+                <a:latin typeface="HSE Sans" panose="02000000000000000000" pitchFamily="2" charset="0"/>
+              </a:rPr>
+              <a:t>IEMOCAP</a:t>
             </a:r>
           </a:p>
         </p:txBody>
@@ -18919,7 +18410,7 @@
     </p:spTree>
     <p:extLst>
       <p:ext uri="{BB962C8B-B14F-4D97-AF65-F5344CB8AC3E}">
-        <p14:creationId xmlns:p14="http://schemas.microsoft.com/office/powerpoint/2010/main" val="3272054404"/>
+        <p14:creationId xmlns:p14="http://schemas.microsoft.com/office/powerpoint/2010/main" val="3927182499"/>
       </p:ext>
     </p:extLst>
   </p:cSld>
@@ -18995,7 +18486,7 @@
           <a:p>
             <a:r>
               <a:rPr lang="ru-RU" b="1" dirty="0"/>
-              <a:t>Заключение</a:t>
+              <a:t>Прототип реального времени</a:t>
             </a:r>
           </a:p>
         </p:txBody>
@@ -19680,10 +19171,57 @@
       </p:sp>
       <p:sp>
         <p:nvSpPr>
-          <p:cNvPr id="6" name="Rounded Rectangle 5">
+          <p:cNvPr id="2" name="TextBox 1">
             <a:extLst>
               <a:ext uri="{FF2B5EF4-FFF2-40B4-BE49-F238E27FC236}">
-                <a16:creationId xmlns:a16="http://schemas.microsoft.com/office/drawing/2014/main" id="{8BA1797D-E1C0-1413-7394-3F0A0E2135E1}"/>
+                <a16:creationId xmlns:a16="http://schemas.microsoft.com/office/drawing/2014/main" id="{1D142098-D07C-234B-AD57-80716B005A0E}"/>
+              </a:ext>
+            </a:extLst>
+          </p:cNvPr>
+          <p:cNvSpPr txBox="1"/>
+          <p:nvPr/>
+        </p:nvSpPr>
+        <p:spPr>
+          <a:xfrm>
+            <a:off x="660400" y="1905000"/>
+            <a:ext cx="10871200" cy="381000"/>
+          </a:xfrm>
+          <a:prstGeom prst="rect">
+            <a:avLst/>
+          </a:prstGeom>
+          <a:noFill/>
+        </p:spPr>
+        <p:txBody>
+          <a:bodyPr vertOverflow="overflow" vert="horz" wrap="square" rtlCol="0" anchor="t">
+            <a:noAutofit/>
+          </a:bodyPr>
+          <a:lstStyle/>
+          <a:p>
+            <a:pPr algn="l"/>
+            <a:r>
+              <a:rPr lang="ru-RU" sz="1500">
+                <a:solidFill>
+                  <a:srgbClr val="1A1A1A"/>
+                </a:solidFill>
+                <a:latin typeface="HSE Sans" panose="02000000000000000000" pitchFamily="2" charset="0"/>
+              </a:rPr>
+              <a:t>Прототип повторяет логику финальной модели и работает в три параллельных потока:</a:t>
+            </a:r>
+            <a:endParaRPr lang="en-US" sz="1500" dirty="0">
+              <a:solidFill>
+                <a:srgbClr val="1A1A1A"/>
+              </a:solidFill>
+              <a:latin typeface="HSE Sans"/>
+            </a:endParaRPr>
+          </a:p>
+        </p:txBody>
+      </p:sp>
+      <p:sp>
+        <p:nvSpPr>
+          <p:cNvPr id="3" name="Rounded Rectangle 2">
+            <a:extLst>
+              <a:ext uri="{FF2B5EF4-FFF2-40B4-BE49-F238E27FC236}">
+                <a16:creationId xmlns:a16="http://schemas.microsoft.com/office/drawing/2014/main" id="{6DFC2F28-8C31-E147-B6D8-7AF9C7E7C503}"/>
               </a:ext>
             </a:extLst>
           </p:cNvPr>
@@ -19692,19 +19230,21 @@
         </p:nvSpPr>
         <p:spPr>
           <a:xfrm>
-            <a:off x="4576199" y="4584371"/>
-            <a:ext cx="3039602" cy="1582173"/>
+            <a:off x="660400" y="2413000"/>
+            <a:ext cx="3454400" cy="2159000"/>
           </a:xfrm>
           <a:prstGeom prst="roundRect">
-            <a:avLst>
-              <a:gd name="adj" fmla="val 19569"/>
-            </a:avLst>
+            <a:avLst/>
           </a:prstGeom>
-          <a:noFill/>
-          <a:ln w="38100">
+          <a:solidFill>
+            <a:srgbClr val="E8EEF7"/>
+          </a:solidFill>
+          <a:ln w="19050" cap="flat" cmpd="sng" algn="ctr">
             <a:solidFill>
-              <a:srgbClr val="0F2B69"/>
+              <a:srgbClr val="1F4E9B"/>
             </a:solidFill>
+            <a:prstDash val="solid"/>
+            <a:miter lim="800000"/>
           </a:ln>
         </p:spPr>
         <p:style>
@@ -19724,58 +19264,20 @@
           </a:fontRef>
         </p:style>
         <p:txBody>
-          <a:bodyPr rtlCol="0" anchor="ctr"/>
+          <a:bodyPr vertOverflow="clip" horzOverflow="clip" rtlCol="0" anchor="t"/>
           <a:lstStyle/>
           <a:p>
-            <a:pPr algn="ctr"/>
-            <a:endParaRPr lang="en-RU"/>
+            <a:pPr algn="l"/>
+            <a:endParaRPr lang="en-US"/>
           </a:p>
         </p:txBody>
       </p:sp>
       <p:sp>
         <p:nvSpPr>
-          <p:cNvPr id="8" name="TextBox 7">
+          <p:cNvPr id="5" name="Rectangle 4">
             <a:extLst>
               <a:ext uri="{FF2B5EF4-FFF2-40B4-BE49-F238E27FC236}">
-                <a16:creationId xmlns:a16="http://schemas.microsoft.com/office/drawing/2014/main" id="{F1E435D7-16D5-35BB-B61D-5A76F0935C93}"/>
-              </a:ext>
-            </a:extLst>
-          </p:cNvPr>
-          <p:cNvSpPr txBox="1"/>
-          <p:nvPr/>
-        </p:nvSpPr>
-        <p:spPr>
-          <a:xfrm>
-            <a:off x="4752465" y="4673828"/>
-            <a:ext cx="2671968" cy="1169551"/>
-          </a:xfrm>
-          <a:prstGeom prst="rect">
-            <a:avLst/>
-          </a:prstGeom>
-          <a:noFill/>
-        </p:spPr>
-        <p:txBody>
-          <a:bodyPr wrap="square" rtlCol="0">
-            <a:spAutoFit/>
-          </a:bodyPr>
-          <a:lstStyle/>
-          <a:p>
-            <a:pPr algn="just"/>
-            <a:r>
-              <a:rPr lang="ru-RU" sz="1400" dirty="0">
-                <a:latin typeface="HSE Sans" panose="02000000000000000000" pitchFamily="2" charset="0"/>
-              </a:rPr>
-              <a:t>Реализован потоковый real-time прототип: нейтральные фразы обрабатываются менее чем за 10 мс, эмоциональные — за 60–110 мс.</a:t>
-            </a:r>
-          </a:p>
-        </p:txBody>
-      </p:sp>
-      <p:sp>
-        <p:nvSpPr>
-          <p:cNvPr id="9" name="Rounded Rectangle 8">
-            <a:extLst>
-              <a:ext uri="{FF2B5EF4-FFF2-40B4-BE49-F238E27FC236}">
-                <a16:creationId xmlns:a16="http://schemas.microsoft.com/office/drawing/2014/main" id="{5C2300B5-012E-5A1E-8609-08A14F7A17F1}"/>
+                <a16:creationId xmlns:a16="http://schemas.microsoft.com/office/drawing/2014/main" id="{11854243-6D16-CD44-B8E9-C768C3E2D949}"/>
               </a:ext>
             </a:extLst>
           </p:cNvPr>
@@ -19784,19 +19286,21 @@
         </p:nvSpPr>
         <p:spPr>
           <a:xfrm>
-            <a:off x="4576199" y="2167362"/>
-            <a:ext cx="3039602" cy="1853164"/>
-          </a:xfrm>
-          <a:prstGeom prst="roundRect">
-            <a:avLst>
-              <a:gd name="adj" fmla="val 19569"/>
-            </a:avLst>
+            <a:off x="660400" y="2413000"/>
+            <a:ext cx="3454400" cy="482600"/>
+          </a:xfrm>
+          <a:prstGeom prst="rect">
+            <a:avLst/>
           </a:prstGeom>
-          <a:noFill/>
-          <a:ln w="38100">
+          <a:solidFill>
+            <a:srgbClr val="1F4E9B"/>
+          </a:solidFill>
+          <a:ln w="19050" cap="flat" cmpd="sng" algn="ctr">
             <a:solidFill>
-              <a:srgbClr val="0F2B69"/>
+              <a:srgbClr val="1E4D9B"/>
             </a:solidFill>
+            <a:prstDash val="solid"/>
+            <a:miter lim="800000"/>
           </a:ln>
         </p:spPr>
         <p:style>
@@ -19816,20 +19320,102 @@
           </a:fontRef>
         </p:style>
         <p:txBody>
-          <a:bodyPr rtlCol="0" anchor="ctr"/>
+          <a:bodyPr vertOverflow="clip" horzOverflow="clip" wrap="square" lIns="101600" tIns="25400" rIns="101600" bIns="25400" rtlCol="0" anchor="ctr" anchorCtr="0">
+            <a:noAutofit/>
+          </a:bodyPr>
           <a:lstStyle/>
           <a:p>
             <a:pPr algn="ctr"/>
-            <a:endParaRPr lang="en-RU" dirty="0"/>
+            <a:r>
+              <a:rPr lang="ru-RU" sz="1600" b="1">
+                <a:solidFill>
+                  <a:srgbClr val="FFFFFF"/>
+                </a:solidFill>
+              </a:rPr>
+              <a:t>Аудио-поток</a:t>
+            </a:r>
+            <a:endParaRPr lang="en-US" sz="1600" b="1">
+              <a:solidFill>
+                <a:srgbClr val="FFFFFF"/>
+              </a:solidFill>
+              <a:latin typeface="HSE Sans"/>
+            </a:endParaRPr>
           </a:p>
         </p:txBody>
       </p:sp>
       <p:sp>
         <p:nvSpPr>
-          <p:cNvPr id="11" name="Rounded Rectangle 10">
+          <p:cNvPr id="6" name="TextBox 5">
             <a:extLst>
               <a:ext uri="{FF2B5EF4-FFF2-40B4-BE49-F238E27FC236}">
-                <a16:creationId xmlns:a16="http://schemas.microsoft.com/office/drawing/2014/main" id="{70BBE6F1-86E3-D0C2-4C58-2B6C2C6389F2}"/>
+                <a16:creationId xmlns:a16="http://schemas.microsoft.com/office/drawing/2014/main" id="{A558DD06-2F4E-1B43-A052-2555203CDFE7}"/>
+              </a:ext>
+            </a:extLst>
+          </p:cNvPr>
+          <p:cNvSpPr txBox="1"/>
+          <p:nvPr/>
+        </p:nvSpPr>
+        <p:spPr>
+          <a:xfrm>
+            <a:off x="838200" y="3022600"/>
+            <a:ext cx="3098800" cy="1447800"/>
+          </a:xfrm>
+          <a:prstGeom prst="rect">
+            <a:avLst/>
+          </a:prstGeom>
+          <a:noFill/>
+        </p:spPr>
+        <p:txBody>
+          <a:bodyPr vertOverflow="overflow" vert="horz" wrap="square" rtlCol="0" anchor="t">
+            <a:noAutofit/>
+          </a:bodyPr>
+          <a:lstStyle/>
+          <a:p>
+            <a:pPr algn="l"/>
+            <a:r>
+              <a:rPr lang="ru-RU" sz="1300">
+                <a:solidFill>
+                  <a:srgbClr val="1A1A1A"/>
+                </a:solidFill>
+                <a:latin typeface="HSE Sans" panose="02000000000000000000" pitchFamily="2" charset="0"/>
+              </a:rPr>
+              <a:t>•  Непрерывно опрашивает микрофон
+•  </a:t>
+            </a:r>
+            <a:r>
+              <a:rPr lang="en-US" sz="1300">
+                <a:solidFill>
+                  <a:srgbClr val="1A1A1A"/>
+                </a:solidFill>
+                <a:latin typeface="HSE Sans"/>
+              </a:rPr>
+              <a:t>Silero VAD </a:t>
+            </a:r>
+            <a:r>
+              <a:rPr lang="ru-RU" sz="1300">
+                <a:solidFill>
+                  <a:srgbClr val="1A1A1A"/>
+                </a:solidFill>
+                <a:latin typeface="HSE Sans" panose="02000000000000000000" pitchFamily="2" charset="0"/>
+              </a:rPr>
+              <a:t>сегментирует речь на отдельные фразы
+•  Накопление в буфере</a:t>
+            </a:r>
+            <a:endParaRPr lang="en-US" sz="1300" dirty="0">
+              <a:solidFill>
+                <a:srgbClr val="1A1A1A"/>
+              </a:solidFill>
+              <a:latin typeface="HSE Sans"/>
+            </a:endParaRPr>
+          </a:p>
+        </p:txBody>
+      </p:sp>
+      <p:sp>
+        <p:nvSpPr>
+          <p:cNvPr id="7" name="Rounded Rectangle 6">
+            <a:extLst>
+              <a:ext uri="{FF2B5EF4-FFF2-40B4-BE49-F238E27FC236}">
+                <a16:creationId xmlns:a16="http://schemas.microsoft.com/office/drawing/2014/main" id="{6EAFA8D6-A064-9746-8649-2931C68410AD}"/>
               </a:ext>
             </a:extLst>
           </p:cNvPr>
@@ -19838,19 +19424,21 @@
         </p:nvSpPr>
         <p:spPr>
           <a:xfrm>
-            <a:off x="8238522" y="2167362"/>
-            <a:ext cx="3039602" cy="1853163"/>
+            <a:off x="4368800" y="2413000"/>
+            <a:ext cx="3454400" cy="2159000"/>
           </a:xfrm>
           <a:prstGeom prst="roundRect">
-            <a:avLst>
-              <a:gd name="adj" fmla="val 19569"/>
-            </a:avLst>
+            <a:avLst/>
           </a:prstGeom>
-          <a:noFill/>
-          <a:ln w="38100">
+          <a:solidFill>
+            <a:srgbClr val="E8EEF7"/>
+          </a:solidFill>
+          <a:ln w="19050" cap="flat" cmpd="sng" algn="ctr">
             <a:solidFill>
-              <a:srgbClr val="0F2B69"/>
+              <a:srgbClr val="2E7D5B"/>
             </a:solidFill>
+            <a:prstDash val="solid"/>
+            <a:miter lim="800000"/>
           </a:ln>
         </p:spPr>
         <p:style>
@@ -19870,20 +19458,20 @@
           </a:fontRef>
         </p:style>
         <p:txBody>
-          <a:bodyPr rtlCol="0" anchor="ctr"/>
+          <a:bodyPr vertOverflow="clip" horzOverflow="clip" rtlCol="0" anchor="t"/>
           <a:lstStyle/>
           <a:p>
-            <a:pPr algn="ctr"/>
-            <a:endParaRPr lang="en-RU"/>
+            <a:pPr algn="l"/>
+            <a:endParaRPr lang="en-US"/>
           </a:p>
         </p:txBody>
       </p:sp>
       <p:sp>
         <p:nvSpPr>
-          <p:cNvPr id="12" name="Rounded Rectangle 11">
+          <p:cNvPr id="8" name="Rectangle 7">
             <a:extLst>
               <a:ext uri="{FF2B5EF4-FFF2-40B4-BE49-F238E27FC236}">
-                <a16:creationId xmlns:a16="http://schemas.microsoft.com/office/drawing/2014/main" id="{D27B9441-A64E-62AE-2B59-52F9FDC8C1D2}"/>
+                <a16:creationId xmlns:a16="http://schemas.microsoft.com/office/drawing/2014/main" id="{8EFA7017-7267-ED41-B40E-20A600152EE1}"/>
               </a:ext>
             </a:extLst>
           </p:cNvPr>
@@ -19892,19 +19480,21 @@
         </p:nvSpPr>
         <p:spPr>
           <a:xfrm>
-            <a:off x="913876" y="2167362"/>
-            <a:ext cx="3039602" cy="2509371"/>
-          </a:xfrm>
-          <a:prstGeom prst="roundRect">
-            <a:avLst>
-              <a:gd name="adj" fmla="val 19569"/>
-            </a:avLst>
+            <a:off x="4368800" y="2413000"/>
+            <a:ext cx="3454400" cy="482600"/>
+          </a:xfrm>
+          <a:prstGeom prst="rect">
+            <a:avLst/>
           </a:prstGeom>
-          <a:noFill/>
-          <a:ln w="38100">
+          <a:solidFill>
+            <a:srgbClr val="2F7D5B"/>
+          </a:solidFill>
+          <a:ln w="19050" cap="flat" cmpd="sng" algn="ctr">
             <a:solidFill>
-              <a:srgbClr val="0F2B69"/>
+              <a:srgbClr val="2F7D5B"/>
             </a:solidFill>
+            <a:prstDash val="solid"/>
+            <a:miter lim="800000"/>
           </a:ln>
         </p:spPr>
         <p:style>
@@ -19924,20 +19514,84 @@
           </a:fontRef>
         </p:style>
         <p:txBody>
-          <a:bodyPr rtlCol="0" anchor="ctr"/>
+          <a:bodyPr vertOverflow="clip" horzOverflow="clip" wrap="square" lIns="101600" tIns="25400" rIns="101600" bIns="25400" rtlCol="0" anchor="ctr" anchorCtr="0">
+            <a:noAutofit/>
+          </a:bodyPr>
           <a:lstStyle/>
           <a:p>
             <a:pPr algn="ctr"/>
-            <a:endParaRPr lang="en-RU"/>
+            <a:r>
+              <a:rPr lang="ru-RU" sz="1600" b="1">
+                <a:solidFill>
+                  <a:srgbClr val="FFFFFF"/>
+                </a:solidFill>
+              </a:rPr>
+              <a:t>Видео-поток</a:t>
+            </a:r>
+            <a:endParaRPr lang="en-US" sz="1600" b="1">
+              <a:solidFill>
+                <a:srgbClr val="FFFFFF"/>
+              </a:solidFill>
+              <a:latin typeface="HSE Sans"/>
+            </a:endParaRPr>
           </a:p>
         </p:txBody>
       </p:sp>
       <p:sp>
         <p:nvSpPr>
-          <p:cNvPr id="13" name="Rounded Rectangle 12">
+          <p:cNvPr id="9" name="TextBox 8">
             <a:extLst>
               <a:ext uri="{FF2B5EF4-FFF2-40B4-BE49-F238E27FC236}">
-                <a16:creationId xmlns:a16="http://schemas.microsoft.com/office/drawing/2014/main" id="{80F87565-B390-B77D-C10D-8C5AFEFBACBE}"/>
+                <a16:creationId xmlns:a16="http://schemas.microsoft.com/office/drawing/2014/main" id="{D1BC6F8F-2363-154C-B13B-33FA73D1EBF5}"/>
+              </a:ext>
+            </a:extLst>
+          </p:cNvPr>
+          <p:cNvSpPr txBox="1"/>
+          <p:nvPr/>
+        </p:nvSpPr>
+        <p:spPr>
+          <a:xfrm>
+            <a:off x="4546600" y="3022600"/>
+            <a:ext cx="3098800" cy="1447800"/>
+          </a:xfrm>
+          <a:prstGeom prst="rect">
+            <a:avLst/>
+          </a:prstGeom>
+          <a:noFill/>
+        </p:spPr>
+        <p:txBody>
+          <a:bodyPr vertOverflow="overflow" vert="horz" wrap="square" rtlCol="0" anchor="t">
+            <a:noAutofit/>
+          </a:bodyPr>
+          <a:lstStyle/>
+          <a:p>
+            <a:pPr algn="l"/>
+            <a:r>
+              <a:rPr lang="ru-RU" sz="1300">
+                <a:solidFill>
+                  <a:srgbClr val="1A1A1A"/>
+                </a:solidFill>
+                <a:latin typeface="HSE Sans" panose="02000000000000000000" pitchFamily="2" charset="0"/>
+              </a:rPr>
+              <a:t>•  Читает кадры с веб-камеры в фоне
+•  Кольцевой буфер ~3 секунды
+•  Готов к выборке 16 кадров</a:t>
+            </a:r>
+            <a:endParaRPr lang="en-US" sz="1300" dirty="0">
+              <a:solidFill>
+                <a:srgbClr val="1A1A1A"/>
+              </a:solidFill>
+              <a:latin typeface="HSE Sans"/>
+            </a:endParaRPr>
+          </a:p>
+        </p:txBody>
+      </p:sp>
+      <p:sp>
+        <p:nvSpPr>
+          <p:cNvPr id="11" name="Rounded Rectangle 10">
+            <a:extLst>
+              <a:ext uri="{FF2B5EF4-FFF2-40B4-BE49-F238E27FC236}">
+                <a16:creationId xmlns:a16="http://schemas.microsoft.com/office/drawing/2014/main" id="{B233FB9B-9223-C84F-B980-75594DF4CEB6}"/>
               </a:ext>
             </a:extLst>
           </p:cNvPr>
@@ -19946,19 +19600,21 @@
         </p:nvSpPr>
         <p:spPr>
           <a:xfrm>
-            <a:off x="8238522" y="4367030"/>
-            <a:ext cx="3039602" cy="1799514"/>
+            <a:off x="8077200" y="2413000"/>
+            <a:ext cx="3454400" cy="2159000"/>
           </a:xfrm>
           <a:prstGeom prst="roundRect">
-            <a:avLst>
-              <a:gd name="adj" fmla="val 19569"/>
-            </a:avLst>
+            <a:avLst/>
           </a:prstGeom>
-          <a:noFill/>
-          <a:ln w="38100">
+          <a:solidFill>
+            <a:srgbClr val="E8EEF7"/>
+          </a:solidFill>
+          <a:ln w="19050" cap="flat" cmpd="sng" algn="ctr">
             <a:solidFill>
-              <a:srgbClr val="0F2B69"/>
+              <a:srgbClr val="102E5A"/>
             </a:solidFill>
+            <a:prstDash val="solid"/>
+            <a:miter lim="800000"/>
           </a:ln>
         </p:spPr>
         <p:style>
@@ -19978,20 +19634,20 @@
           </a:fontRef>
         </p:style>
         <p:txBody>
-          <a:bodyPr rtlCol="0" anchor="ctr"/>
+          <a:bodyPr vertOverflow="clip" horzOverflow="clip" rtlCol="0" anchor="t"/>
           <a:lstStyle/>
           <a:p>
-            <a:pPr algn="ctr"/>
-            <a:endParaRPr lang="en-RU"/>
+            <a:pPr algn="l"/>
+            <a:endParaRPr lang="en-US"/>
           </a:p>
         </p:txBody>
       </p:sp>
       <p:sp>
         <p:nvSpPr>
-          <p:cNvPr id="15" name="Rounded Rectangle 14">
+          <p:cNvPr id="12" name="Rectangle 11">
             <a:extLst>
               <a:ext uri="{FF2B5EF4-FFF2-40B4-BE49-F238E27FC236}">
-                <a16:creationId xmlns:a16="http://schemas.microsoft.com/office/drawing/2014/main" id="{D2A2146B-9FEF-8C60-91C4-0E80193D2FF1}"/>
+                <a16:creationId xmlns:a16="http://schemas.microsoft.com/office/drawing/2014/main" id="{F8022F8A-915B-BE4A-8405-0AF4C78BFF65}"/>
               </a:ext>
             </a:extLst>
           </p:cNvPr>
@@ -20000,19 +19656,21 @@
         </p:nvSpPr>
         <p:spPr>
           <a:xfrm>
-            <a:off x="913876" y="4952390"/>
-            <a:ext cx="3039602" cy="1264732"/>
-          </a:xfrm>
-          <a:prstGeom prst="roundRect">
-            <a:avLst>
-              <a:gd name="adj" fmla="val 19569"/>
-            </a:avLst>
+            <a:off x="8077200" y="2413000"/>
+            <a:ext cx="3454400" cy="482600"/>
+          </a:xfrm>
+          <a:prstGeom prst="rect">
+            <a:avLst/>
           </a:prstGeom>
-          <a:noFill/>
-          <a:ln w="38100">
+          <a:solidFill>
+            <a:schemeClr val="tx1"/>
+          </a:solidFill>
+          <a:ln w="19050" cap="flat" cmpd="sng" algn="ctr">
             <a:solidFill>
-              <a:srgbClr val="0F2B69"/>
+              <a:schemeClr val="tx1"/>
             </a:solidFill>
+            <a:prstDash val="solid"/>
+            <a:miter lim="800000"/>
           </a:ln>
         </p:spPr>
         <p:style>
@@ -20032,20 +19690,35 @@
           </a:fontRef>
         </p:style>
         <p:txBody>
-          <a:bodyPr rtlCol="0" anchor="ctr"/>
+          <a:bodyPr vertOverflow="clip" horzOverflow="clip" wrap="square" lIns="101600" tIns="25400" rIns="101600" bIns="25400" rtlCol="0" anchor="ctr" anchorCtr="0">
+            <a:noAutofit/>
+          </a:bodyPr>
           <a:lstStyle/>
           <a:p>
             <a:pPr algn="ctr"/>
-            <a:endParaRPr lang="en-RU"/>
+            <a:r>
+              <a:rPr lang="ru-RU" sz="1600" b="1">
+                <a:solidFill>
+                  <a:srgbClr val="FFFFFF"/>
+                </a:solidFill>
+              </a:rPr>
+              <a:t>Поток инференса</a:t>
+            </a:r>
+            <a:endParaRPr lang="en-US" sz="1600" b="1">
+              <a:solidFill>
+                <a:srgbClr val="FFFFFF"/>
+              </a:solidFill>
+              <a:latin typeface="HSE Sans"/>
+            </a:endParaRPr>
           </a:p>
         </p:txBody>
       </p:sp>
       <p:sp>
         <p:nvSpPr>
-          <p:cNvPr id="21" name="TextBox 20">
+          <p:cNvPr id="13" name="TextBox 12">
             <a:extLst>
               <a:ext uri="{FF2B5EF4-FFF2-40B4-BE49-F238E27FC236}">
-                <a16:creationId xmlns:a16="http://schemas.microsoft.com/office/drawing/2014/main" id="{7F56022D-561F-CD5F-6F84-1173545EDCF3}"/>
+                <a16:creationId xmlns:a16="http://schemas.microsoft.com/office/drawing/2014/main" id="{C1FE2D7E-B081-594D-9FAD-9510023008B9}"/>
               </a:ext>
             </a:extLst>
           </p:cNvPr>
@@ -20054,8 +19727,8 @@
         </p:nvSpPr>
         <p:spPr>
           <a:xfrm>
-            <a:off x="4759540" y="2283917"/>
-            <a:ext cx="2672919" cy="1384995"/>
+            <a:off x="8255000" y="3022600"/>
+            <a:ext cx="3098800" cy="1447800"/>
           </a:xfrm>
           <a:prstGeom prst="rect">
             <a:avLst/>
@@ -20063,202 +19736,145 @@
           <a:noFill/>
         </p:spPr>
         <p:txBody>
-          <a:bodyPr wrap="square">
-            <a:spAutoFit/>
+          <a:bodyPr vertOverflow="overflow" vert="horz" wrap="square" rtlCol="0" anchor="t">
+            <a:noAutofit/>
           </a:bodyPr>
           <a:lstStyle/>
           <a:p>
-            <a:pPr algn="just"/>
-            <a:r>
-              <a:rPr lang="ru-RU" sz="1400" dirty="0">
-                <a:latin typeface="HSE Sans" panose="02000000000000000000" pitchFamily="2" charset="0"/>
-              </a:rPr>
-              <a:t>Разработана оригинальная двухстадийная каскадная архитектура с лёгким аудиогейтом MelCNN, отсеивающим нейтральные реплики.</a:t>
-            </a:r>
+            <a:pPr algn="l"/>
+            <a:r>
+              <a:rPr lang="ru-RU" sz="1300">
+                <a:solidFill>
+                  <a:srgbClr val="1A1A1A"/>
+                </a:solidFill>
+                <a:latin typeface="HSE Sans" panose="02000000000000000000" pitchFamily="2" charset="0"/>
+              </a:rPr>
+              <a:t>•  Запускается при завершении фразы
+•  Каскадный инференс (гейт → голова)
+•  Флаг </a:t>
+            </a:r>
+            <a:r>
+              <a:rPr lang="en-US" sz="1300">
+                <a:solidFill>
+                  <a:srgbClr val="1A1A1A"/>
+                </a:solidFill>
+                <a:latin typeface="HSE Sans"/>
+              </a:rPr>
+              <a:t>processing </a:t>
+            </a:r>
+            <a:r>
+              <a:rPr lang="ru-RU" sz="1300">
+                <a:solidFill>
+                  <a:srgbClr val="1A1A1A"/>
+                </a:solidFill>
+                <a:latin typeface="HSE Sans" panose="02000000000000000000" pitchFamily="2" charset="0"/>
+              </a:rPr>
+              <a:t>против гонок</a:t>
+            </a:r>
+            <a:endParaRPr lang="en-US" sz="1300" dirty="0">
+              <a:solidFill>
+                <a:srgbClr val="1A1A1A"/>
+              </a:solidFill>
+              <a:latin typeface="HSE Sans"/>
+            </a:endParaRPr>
           </a:p>
         </p:txBody>
       </p:sp>
       <p:sp>
         <p:nvSpPr>
-          <p:cNvPr id="22" name="TextBox 21">
+          <p:cNvPr id="14" name="Rounded Rectangle 13">
             <a:extLst>
               <a:ext uri="{FF2B5EF4-FFF2-40B4-BE49-F238E27FC236}">
-                <a16:creationId xmlns:a16="http://schemas.microsoft.com/office/drawing/2014/main" id="{2C2B1BF6-7812-4467-A137-CBD2F2444ADD}"/>
+                <a16:creationId xmlns:a16="http://schemas.microsoft.com/office/drawing/2014/main" id="{96B201F6-BB71-0149-93F2-C6C919BCE5F6}"/>
               </a:ext>
             </a:extLst>
           </p:cNvPr>
-          <p:cNvSpPr txBox="1"/>
+          <p:cNvSpPr/>
           <p:nvPr/>
         </p:nvSpPr>
         <p:spPr>
           <a:xfrm>
-            <a:off x="8367951" y="2293724"/>
-            <a:ext cx="2780740" cy="1169551"/>
-          </a:xfrm>
-          <a:prstGeom prst="rect">
+            <a:off x="660400" y="4724400"/>
+            <a:ext cx="10871200" cy="1371600"/>
+          </a:xfrm>
+          <a:prstGeom prst="roundRect">
             <a:avLst/>
           </a:prstGeom>
-          <a:noFill/>
-        </p:spPr>
+          <a:solidFill>
+            <a:srgbClr val="F4F7FC"/>
+          </a:solidFill>
+          <a:ln w="12700" cap="flat" cmpd="sng" algn="ctr">
+            <a:solidFill>
+              <a:srgbClr val="102E5A"/>
+            </a:solidFill>
+            <a:prstDash val="solid"/>
+            <a:miter lim="800000"/>
+          </a:ln>
+        </p:spPr>
+        <p:style>
+          <a:lnRef idx="2">
+            <a:schemeClr val="accent1">
+              <a:shade val="15000"/>
+            </a:schemeClr>
+          </a:lnRef>
+          <a:fillRef idx="1">
+            <a:schemeClr val="accent1"/>
+          </a:fillRef>
+          <a:effectRef idx="0">
+            <a:schemeClr val="accent1"/>
+          </a:effectRef>
+          <a:fontRef idx="minor">
+            <a:schemeClr val="lt1"/>
+          </a:fontRef>
+        </p:style>
         <p:txBody>
-          <a:bodyPr wrap="square">
-            <a:spAutoFit/>
-          </a:bodyPr>
-          <a:lstStyle>
-            <a:defPPr>
-              <a:defRPr lang="en-RU"/>
-            </a:defPPr>
-            <a:lvl1pPr algn="just">
-              <a:defRPr sz="1400">
-                <a:latin typeface="HSE Sans" panose="02000000000000000000" pitchFamily="2" charset="0"/>
-              </a:defRPr>
-            </a:lvl1pPr>
-          </a:lstStyle>
-          <a:p>
-            <a:pPr algn="just"/>
-            <a:r>
-              <a:rPr lang="ru-RU" sz="1400" dirty="0">
-                <a:latin typeface="HSE Sans" panose="02000000000000000000" pitchFamily="2" charset="0"/>
-              </a:rPr>
-              <a:t>Реализовано переиспользование одной лог-мел спектрограммы в гейте и аудио-ветви — отказ от тяжёлых энкодеров, итоговый размер 37 МБ.</a:t>
-            </a:r>
-          </a:p>
-        </p:txBody>
-      </p:sp>
-      <p:sp>
-        <p:nvSpPr>
-          <p:cNvPr id="23" name="TextBox 22">
-            <a:extLst>
-              <a:ext uri="{FF2B5EF4-FFF2-40B4-BE49-F238E27FC236}">
-                <a16:creationId xmlns:a16="http://schemas.microsoft.com/office/drawing/2014/main" id="{3C33674B-DDFB-B86A-5D67-AEDA5D83B2AE}"/>
-              </a:ext>
-            </a:extLst>
-          </p:cNvPr>
-          <p:cNvSpPr txBox="1"/>
-          <p:nvPr/>
-        </p:nvSpPr>
-        <p:spPr>
-          <a:xfrm>
-            <a:off x="1049851" y="2298662"/>
-            <a:ext cx="2752550" cy="1600438"/>
-          </a:xfrm>
-          <a:prstGeom prst="rect">
-            <a:avLst/>
-          </a:prstGeom>
-          <a:noFill/>
-        </p:spPr>
-        <p:txBody>
-          <a:bodyPr wrap="square">
-            <a:spAutoFit/>
-          </a:bodyPr>
-          <a:lstStyle>
-            <a:defPPr>
-              <a:defRPr lang="en-RU"/>
-            </a:defPPr>
-            <a:lvl1pPr algn="just">
-              <a:defRPr sz="1400">
-                <a:latin typeface="HSE Sans" panose="02000000000000000000" pitchFamily="2" charset="0"/>
-              </a:defRPr>
-            </a:lvl1pPr>
-          </a:lstStyle>
-          <a:p>
-            <a:pPr algn="just"/>
-            <a:r>
-              <a:rPr lang="ru-RU" sz="1400" dirty="0">
-                <a:latin typeface="HSE Sans" panose="02000000000000000000" pitchFamily="2" charset="0"/>
-              </a:rPr>
-              <a:t>Проанализированы современные подходы SER, FER и MER; выявлено их ключевое ограничение — высокая вычислительная сложность при параллельной обработке модальностей.</a:t>
-            </a:r>
-          </a:p>
-        </p:txBody>
-      </p:sp>
-      <p:sp>
-        <p:nvSpPr>
-          <p:cNvPr id="24" name="TextBox 23">
-            <a:extLst>
-              <a:ext uri="{FF2B5EF4-FFF2-40B4-BE49-F238E27FC236}">
-                <a16:creationId xmlns:a16="http://schemas.microsoft.com/office/drawing/2014/main" id="{9C90103E-EBA1-7B2D-9E27-E7BA883003B6}"/>
-              </a:ext>
-            </a:extLst>
-          </p:cNvPr>
-          <p:cNvSpPr txBox="1"/>
-          <p:nvPr/>
-        </p:nvSpPr>
-        <p:spPr>
-          <a:xfrm>
-            <a:off x="8421862" y="4466568"/>
-            <a:ext cx="2672919" cy="1169551"/>
-          </a:xfrm>
-          <a:prstGeom prst="rect">
-            <a:avLst/>
-          </a:prstGeom>
-          <a:noFill/>
-        </p:spPr>
-        <p:txBody>
-          <a:bodyPr wrap="square" rtlCol="0">
-            <a:spAutoFit/>
-          </a:bodyPr>
-          <a:lstStyle>
-            <a:defPPr>
-              <a:defRPr lang="en-RU"/>
-            </a:defPPr>
-            <a:lvl1pPr algn="just">
-              <a:defRPr sz="1400">
-                <a:latin typeface="HSE Sans" panose="02000000000000000000" pitchFamily="2" charset="0"/>
-              </a:defRPr>
-            </a:lvl1pPr>
-          </a:lstStyle>
-          <a:p>
-            <a:pPr algn="just"/>
-            <a:r>
-              <a:rPr lang="ru-RU" sz="1400" dirty="0">
-                <a:latin typeface="HSE Sans" panose="02000000000000000000" pitchFamily="2" charset="0"/>
-              </a:rPr>
-              <a:t>Практическая ценность результатов. Код доступен на GitHub: </a:t>
-            </a:r>
-            <a:r>
-              <a:rPr lang="en-US" sz="1400" b="1" dirty="0">
-                <a:latin typeface="HSE Sans" panose="02000000000000000000" pitchFamily="2" charset="0"/>
-              </a:rPr>
-              <a:t>github.com/Kaparya/Classification-of-Facial-Expressions</a:t>
-            </a:r>
-          </a:p>
-        </p:txBody>
-      </p:sp>
-      <p:sp>
-        <p:nvSpPr>
-          <p:cNvPr id="25" name="TextBox 24">
-            <a:extLst>
-              <a:ext uri="{FF2B5EF4-FFF2-40B4-BE49-F238E27FC236}">
-                <a16:creationId xmlns:a16="http://schemas.microsoft.com/office/drawing/2014/main" id="{01003BFE-0D32-6BE2-8D37-4EE85F449373}"/>
-              </a:ext>
-            </a:extLst>
-          </p:cNvPr>
-          <p:cNvSpPr txBox="1"/>
-          <p:nvPr/>
-        </p:nvSpPr>
-        <p:spPr>
-          <a:xfrm>
-            <a:off x="1097217" y="4996993"/>
-            <a:ext cx="2672919" cy="1169551"/>
-          </a:xfrm>
-          <a:prstGeom prst="rect">
-            <a:avLst/>
-          </a:prstGeom>
-          <a:noFill/>
-        </p:spPr>
-        <p:txBody>
-          <a:bodyPr wrap="square" rtlCol="0">
-            <a:spAutoFit/>
+          <a:bodyPr vertOverflow="clip" horzOverflow="clip" wrap="square" rtlCol="0" anchor="t" anchorCtr="0">
+            <a:noAutofit/>
           </a:bodyPr>
           <a:lstStyle/>
           <a:p>
-            <a:pPr algn="just"/>
+            <a:pPr>
+              <a:spcAft>
+                <a:spcPts val="600"/>
+              </a:spcAft>
+            </a:pPr>
+            <a:r>
+              <a:rPr lang="ru-RU" sz="1400" b="1" dirty="0">
+                <a:solidFill>
+                  <a:srgbClr val="2E7D5B"/>
+                </a:solidFill>
+                <a:latin typeface="HSE Sans" panose="02000000000000000000" pitchFamily="2" charset="0"/>
+              </a:rPr>
+              <a:t>Производительность: </a:t>
+            </a:r>
             <a:r>
               <a:rPr lang="ru-RU" sz="1400" dirty="0">
-                <a:latin typeface="HSE Sans" panose="02000000000000000000" pitchFamily="2" charset="0"/>
-              </a:rPr>
-              <a:t>Построен единый воспроизводимый LOSO-бенчмарк на IEMOCAP: UAR 0,5094 — лучший результат среди 6 моделей.</a:t>
+                <a:solidFill>
+                  <a:srgbClr val="1A1A1A"/>
+                </a:solidFill>
+                <a:latin typeface="HSE Sans" panose="02000000000000000000" pitchFamily="2" charset="0"/>
+              </a:rPr>
+              <a:t>нейтральные фразы — менее 10 мс, эмоциональные — 60–110 мс на Apple M1 Pro (MPS), без потери плавности интерфейса.</a:t>
+            </a:r>
+          </a:p>
+          <a:p>
+            <a:r>
+              <a:rPr lang="ru-RU" sz="1400" b="1" dirty="0">
+                <a:solidFill>
+                  <a:srgbClr val="102E5A"/>
+                </a:solidFill>
+                <a:latin typeface="HSE Sans" panose="02000000000000000000" pitchFamily="2" charset="0"/>
+              </a:rPr>
+              <a:t>Ограничения: </a:t>
+            </a:r>
+            <a:r>
+              <a:rPr lang="ru-RU" sz="1400" dirty="0">
+                <a:solidFill>
+                  <a:srgbClr val="1A1A1A"/>
+                </a:solidFill>
+                <a:latin typeface="HSE Sans" panose="02000000000000000000" pitchFamily="2" charset="0"/>
+              </a:rPr>
+              <a:t>нет очереди фраз; возможное расхождение аудио- и видео-окон; обработка одного лица; упрощённый fallback детекции; чувствительность к освещению.</a:t>
             </a:r>
           </a:p>
         </p:txBody>
@@ -20266,7 +19882,7 @@
     </p:spTree>
     <p:extLst>
       <p:ext uri="{BB962C8B-B14F-4D97-AF65-F5344CB8AC3E}">
-        <p14:creationId xmlns:p14="http://schemas.microsoft.com/office/powerpoint/2010/main" val="3774285090"/>
+        <p14:creationId xmlns:p14="http://schemas.microsoft.com/office/powerpoint/2010/main" val="3272054404"/>
       </p:ext>
     </p:extLst>
   </p:cSld>
@@ -20295,6 +19911,1353 @@
       </p:grpSpPr>
       <p:sp>
         <p:nvSpPr>
+          <p:cNvPr id="10" name="Заголовок 2">
+            <a:extLst>
+              <a:ext uri="{FF2B5EF4-FFF2-40B4-BE49-F238E27FC236}">
+                <a16:creationId xmlns:a16="http://schemas.microsoft.com/office/drawing/2014/main" id="{9BF64647-BA7F-C64D-E3FA-FB6C83CF295F}"/>
+              </a:ext>
+            </a:extLst>
+          </p:cNvPr>
+          <p:cNvSpPr txBox="1">
+            <a:spLocks/>
+          </p:cNvSpPr>
+          <p:nvPr/>
+        </p:nvSpPr>
+        <p:spPr>
+          <a:xfrm>
+            <a:off x="666489" y="1160924"/>
+            <a:ext cx="5094599" cy="802343"/>
+          </a:xfrm>
+          <a:prstGeom prst="rect">
+            <a:avLst/>
+          </a:prstGeom>
+        </p:spPr>
+        <p:txBody>
+          <a:bodyPr vert="horz" lIns="0" tIns="0" rIns="0" bIns="0" rtlCol="0" anchor="t">
+            <a:normAutofit/>
+          </a:bodyPr>
+          <a:lstStyle>
+            <a:lvl1pPr algn="l" defTabSz="914400" rtl="0" eaLnBrk="1" latinLnBrk="0" hangingPunct="1">
+              <a:lnSpc>
+                <a:spcPct val="100000"/>
+              </a:lnSpc>
+              <a:spcBef>
+                <a:spcPct val="0"/>
+              </a:spcBef>
+              <a:buNone/>
+              <a:defRPr sz="2400" b="0" i="0" kern="1200">
+                <a:solidFill>
+                  <a:schemeClr val="tx1"/>
+                </a:solidFill>
+                <a:latin typeface="HSE Sans" panose="02000000000000000000" pitchFamily="2" charset="0"/>
+                <a:ea typeface="+mj-ea"/>
+                <a:cs typeface="+mj-cs"/>
+              </a:defRPr>
+            </a:lvl1pPr>
+          </a:lstStyle>
+          <a:p>
+            <a:r>
+              <a:rPr lang="ru-RU" b="1" dirty="0"/>
+              <a:t>Заключение</a:t>
+            </a:r>
+          </a:p>
+        </p:txBody>
+      </p:sp>
+      <p:sp>
+        <p:nvSpPr>
+          <p:cNvPr id="17" name="Текст 4">
+            <a:extLst>
+              <a:ext uri="{FF2B5EF4-FFF2-40B4-BE49-F238E27FC236}">
+                <a16:creationId xmlns:a16="http://schemas.microsoft.com/office/drawing/2014/main" id="{C6642543-AAFE-405A-C69F-4ADB20EF03A0}"/>
+              </a:ext>
+            </a:extLst>
+          </p:cNvPr>
+          <p:cNvSpPr txBox="1">
+            <a:spLocks/>
+          </p:cNvSpPr>
+          <p:nvPr/>
+        </p:nvSpPr>
+        <p:spPr>
+          <a:xfrm>
+            <a:off x="1143689" y="540904"/>
+            <a:ext cx="2070100" cy="415925"/>
+          </a:xfrm>
+          <a:prstGeom prst="rect">
+            <a:avLst/>
+          </a:prstGeom>
+        </p:spPr>
+        <p:txBody>
+          <a:bodyPr vert="horz" lIns="0" tIns="0" rIns="0" bIns="0" rtlCol="0">
+            <a:noAutofit/>
+          </a:bodyPr>
+          <a:lstStyle>
+            <a:lvl1pPr marL="0" marR="0" indent="0" algn="l" defTabSz="914400" rtl="0" eaLnBrk="1" fontAlgn="auto" latinLnBrk="0" hangingPunct="1">
+              <a:lnSpc>
+                <a:spcPct val="100000"/>
+              </a:lnSpc>
+              <a:spcBef>
+                <a:spcPts val="0"/>
+              </a:spcBef>
+              <a:spcAft>
+                <a:spcPts val="0"/>
+              </a:spcAft>
+              <a:buClrTx/>
+              <a:buSzTx/>
+              <a:buFont typeface="Arial" panose="020B0604020202020204" pitchFamily="34" charset="0"/>
+              <a:buNone/>
+              <a:tabLst/>
+              <a:defRPr sz="1000" b="0" i="0" kern="1200">
+                <a:solidFill>
+                  <a:schemeClr val="tx1"/>
+                </a:solidFill>
+                <a:latin typeface="HSE Sans" panose="02000000000000000000" pitchFamily="2" charset="0"/>
+                <a:ea typeface="+mn-ea"/>
+                <a:cs typeface="+mn-cs"/>
+              </a:defRPr>
+            </a:lvl1pPr>
+            <a:lvl2pPr marL="457200" indent="0" algn="l" defTabSz="914400" rtl="0" eaLnBrk="1" latinLnBrk="0" hangingPunct="1">
+              <a:lnSpc>
+                <a:spcPct val="100000"/>
+              </a:lnSpc>
+              <a:spcBef>
+                <a:spcPts val="500"/>
+              </a:spcBef>
+              <a:buFont typeface="Arial" panose="020B0604020202020204" pitchFamily="34" charset="0"/>
+              <a:buNone/>
+              <a:defRPr sz="1000" b="0" i="0" kern="1200">
+                <a:solidFill>
+                  <a:schemeClr val="tx1"/>
+                </a:solidFill>
+                <a:latin typeface="HSE Sans" panose="02000000000000000000" pitchFamily="2" charset="0"/>
+                <a:ea typeface="+mn-ea"/>
+                <a:cs typeface="+mn-cs"/>
+              </a:defRPr>
+            </a:lvl2pPr>
+            <a:lvl3pPr marL="914400" indent="0" algn="l" defTabSz="914400" rtl="0" eaLnBrk="1" latinLnBrk="0" hangingPunct="1">
+              <a:lnSpc>
+                <a:spcPct val="100000"/>
+              </a:lnSpc>
+              <a:spcBef>
+                <a:spcPts val="500"/>
+              </a:spcBef>
+              <a:buFont typeface="Arial" panose="020B0604020202020204" pitchFamily="34" charset="0"/>
+              <a:buNone/>
+              <a:defRPr sz="1000" b="0" i="0" kern="1200">
+                <a:solidFill>
+                  <a:schemeClr val="tx1"/>
+                </a:solidFill>
+                <a:latin typeface="HSE Sans" panose="02000000000000000000" pitchFamily="2" charset="0"/>
+                <a:ea typeface="+mn-ea"/>
+                <a:cs typeface="+mn-cs"/>
+              </a:defRPr>
+            </a:lvl3pPr>
+            <a:lvl4pPr marL="1371600" indent="0" algn="l" defTabSz="914400" rtl="0" eaLnBrk="1" latinLnBrk="0" hangingPunct="1">
+              <a:lnSpc>
+                <a:spcPct val="100000"/>
+              </a:lnSpc>
+              <a:spcBef>
+                <a:spcPts val="500"/>
+              </a:spcBef>
+              <a:buFont typeface="Arial" panose="020B0604020202020204" pitchFamily="34" charset="0"/>
+              <a:buNone/>
+              <a:defRPr sz="1000" b="0" i="0" kern="1200">
+                <a:solidFill>
+                  <a:schemeClr val="tx1"/>
+                </a:solidFill>
+                <a:latin typeface="HSE Sans" panose="02000000000000000000" pitchFamily="2" charset="0"/>
+                <a:ea typeface="+mn-ea"/>
+                <a:cs typeface="+mn-cs"/>
+              </a:defRPr>
+            </a:lvl4pPr>
+            <a:lvl5pPr marL="1828800" indent="0" algn="l" defTabSz="914400" rtl="0" eaLnBrk="1" latinLnBrk="0" hangingPunct="1">
+              <a:lnSpc>
+                <a:spcPct val="100000"/>
+              </a:lnSpc>
+              <a:spcBef>
+                <a:spcPts val="500"/>
+              </a:spcBef>
+              <a:buFont typeface="Arial" panose="020B0604020202020204" pitchFamily="34" charset="0"/>
+              <a:buNone/>
+              <a:defRPr sz="1000" b="0" i="0" kern="1200">
+                <a:solidFill>
+                  <a:schemeClr val="tx1"/>
+                </a:solidFill>
+                <a:latin typeface="HSE Sans" panose="02000000000000000000" pitchFamily="2" charset="0"/>
+                <a:ea typeface="+mn-ea"/>
+                <a:cs typeface="+mn-cs"/>
+              </a:defRPr>
+            </a:lvl5pPr>
+            <a:lvl6pPr marL="2514600" indent="-228600" algn="l" defTabSz="914400" rtl="0" eaLnBrk="1" latinLnBrk="0" hangingPunct="1">
+              <a:lnSpc>
+                <a:spcPct val="90000"/>
+              </a:lnSpc>
+              <a:spcBef>
+                <a:spcPts val="500"/>
+              </a:spcBef>
+              <a:buFont typeface="Arial" panose="020B0604020202020204" pitchFamily="34" charset="0"/>
+              <a:buChar char="•"/>
+              <a:defRPr sz="1800" kern="1200">
+                <a:solidFill>
+                  <a:schemeClr val="tx1"/>
+                </a:solidFill>
+                <a:latin typeface="+mn-lt"/>
+                <a:ea typeface="+mn-ea"/>
+                <a:cs typeface="+mn-cs"/>
+              </a:defRPr>
+            </a:lvl6pPr>
+            <a:lvl7pPr marL="2971800" indent="-228600" algn="l" defTabSz="914400" rtl="0" eaLnBrk="1" latinLnBrk="0" hangingPunct="1">
+              <a:lnSpc>
+                <a:spcPct val="90000"/>
+              </a:lnSpc>
+              <a:spcBef>
+                <a:spcPts val="500"/>
+              </a:spcBef>
+              <a:buFont typeface="Arial" panose="020B0604020202020204" pitchFamily="34" charset="0"/>
+              <a:buChar char="•"/>
+              <a:defRPr sz="1800" kern="1200">
+                <a:solidFill>
+                  <a:schemeClr val="tx1"/>
+                </a:solidFill>
+                <a:latin typeface="+mn-lt"/>
+                <a:ea typeface="+mn-ea"/>
+                <a:cs typeface="+mn-cs"/>
+              </a:defRPr>
+            </a:lvl7pPr>
+            <a:lvl8pPr marL="3429000" indent="-228600" algn="l" defTabSz="914400" rtl="0" eaLnBrk="1" latinLnBrk="0" hangingPunct="1">
+              <a:lnSpc>
+                <a:spcPct val="90000"/>
+              </a:lnSpc>
+              <a:spcBef>
+                <a:spcPts val="500"/>
+              </a:spcBef>
+              <a:buFont typeface="Arial" panose="020B0604020202020204" pitchFamily="34" charset="0"/>
+              <a:buChar char="•"/>
+              <a:defRPr sz="1800" kern="1200">
+                <a:solidFill>
+                  <a:schemeClr val="tx1"/>
+                </a:solidFill>
+                <a:latin typeface="+mn-lt"/>
+                <a:ea typeface="+mn-ea"/>
+                <a:cs typeface="+mn-cs"/>
+              </a:defRPr>
+            </a:lvl8pPr>
+            <a:lvl9pPr marL="3886200" indent="-228600" algn="l" defTabSz="914400" rtl="0" eaLnBrk="1" latinLnBrk="0" hangingPunct="1">
+              <a:lnSpc>
+                <a:spcPct val="90000"/>
+              </a:lnSpc>
+              <a:spcBef>
+                <a:spcPts val="500"/>
+              </a:spcBef>
+              <a:buFont typeface="Arial" panose="020B0604020202020204" pitchFamily="34" charset="0"/>
+              <a:buChar char="•"/>
+              <a:defRPr sz="1800" kern="1200">
+                <a:solidFill>
+                  <a:schemeClr val="tx1"/>
+                </a:solidFill>
+                <a:latin typeface="+mn-lt"/>
+                <a:ea typeface="+mn-ea"/>
+                <a:cs typeface="+mn-cs"/>
+              </a:defRPr>
+            </a:lvl9pPr>
+          </a:lstStyle>
+          <a:p>
+            <a:r>
+              <a:rPr lang="ru-RU" dirty="0"/>
+              <a:t>Факультет информатики, математики и компьютерных наук</a:t>
+            </a:r>
+          </a:p>
+        </p:txBody>
+      </p:sp>
+      <p:sp>
+        <p:nvSpPr>
+          <p:cNvPr id="18" name="Текст 5">
+            <a:extLst>
+              <a:ext uri="{FF2B5EF4-FFF2-40B4-BE49-F238E27FC236}">
+                <a16:creationId xmlns:a16="http://schemas.microsoft.com/office/drawing/2014/main" id="{4949D8FC-408D-1D67-134C-9A8B217B2D50}"/>
+              </a:ext>
+            </a:extLst>
+          </p:cNvPr>
+          <p:cNvSpPr txBox="1">
+            <a:spLocks/>
+          </p:cNvSpPr>
+          <p:nvPr/>
+        </p:nvSpPr>
+        <p:spPr>
+          <a:xfrm>
+            <a:off x="3459162" y="548720"/>
+            <a:ext cx="2341003" cy="408109"/>
+          </a:xfrm>
+          <a:prstGeom prst="rect">
+            <a:avLst/>
+          </a:prstGeom>
+        </p:spPr>
+        <p:txBody>
+          <a:bodyPr vert="horz" lIns="0" tIns="0" rIns="0" bIns="0" rtlCol="0">
+            <a:noAutofit/>
+          </a:bodyPr>
+          <a:lstStyle>
+            <a:lvl1pPr marL="0" indent="0" algn="l" defTabSz="914400" rtl="0" eaLnBrk="1" latinLnBrk="0" hangingPunct="1">
+              <a:lnSpc>
+                <a:spcPct val="100000"/>
+              </a:lnSpc>
+              <a:spcBef>
+                <a:spcPts val="0"/>
+              </a:spcBef>
+              <a:buFont typeface="Arial" panose="020B0604020202020204" pitchFamily="34" charset="0"/>
+              <a:buNone/>
+              <a:defRPr sz="1000" b="0" i="0" kern="1200">
+                <a:solidFill>
+                  <a:srgbClr val="0E2D69"/>
+                </a:solidFill>
+                <a:latin typeface="HSE Sans" panose="02000000000000000000" pitchFamily="2" charset="0"/>
+                <a:ea typeface="+mn-ea"/>
+                <a:cs typeface="+mn-cs"/>
+              </a:defRPr>
+            </a:lvl1pPr>
+            <a:lvl2pPr marL="457200" indent="0" algn="l" defTabSz="914400" rtl="0" eaLnBrk="1" latinLnBrk="0" hangingPunct="1">
+              <a:lnSpc>
+                <a:spcPct val="90000"/>
+              </a:lnSpc>
+              <a:spcBef>
+                <a:spcPts val="500"/>
+              </a:spcBef>
+              <a:buFont typeface="Arial" panose="020B0604020202020204" pitchFamily="34" charset="0"/>
+              <a:buNone/>
+              <a:defRPr sz="1000" b="0" i="0" kern="1200">
+                <a:solidFill>
+                  <a:srgbClr val="0E2D69"/>
+                </a:solidFill>
+                <a:latin typeface="HSE Sans" panose="02000000000000000000" pitchFamily="2" charset="0"/>
+                <a:ea typeface="+mn-ea"/>
+                <a:cs typeface="+mn-cs"/>
+              </a:defRPr>
+            </a:lvl2pPr>
+            <a:lvl3pPr marL="914400" indent="0" algn="l" defTabSz="914400" rtl="0" eaLnBrk="1" latinLnBrk="0" hangingPunct="1">
+              <a:lnSpc>
+                <a:spcPct val="90000"/>
+              </a:lnSpc>
+              <a:spcBef>
+                <a:spcPts val="500"/>
+              </a:spcBef>
+              <a:buFont typeface="Arial" panose="020B0604020202020204" pitchFamily="34" charset="0"/>
+              <a:buNone/>
+              <a:defRPr sz="1000" b="0" i="0" kern="1200">
+                <a:solidFill>
+                  <a:srgbClr val="0E2D69"/>
+                </a:solidFill>
+                <a:latin typeface="HSE Sans" panose="02000000000000000000" pitchFamily="2" charset="0"/>
+                <a:ea typeface="+mn-ea"/>
+                <a:cs typeface="+mn-cs"/>
+              </a:defRPr>
+            </a:lvl3pPr>
+            <a:lvl4pPr marL="1371600" indent="0" algn="l" defTabSz="914400" rtl="0" eaLnBrk="1" latinLnBrk="0" hangingPunct="1">
+              <a:lnSpc>
+                <a:spcPct val="90000"/>
+              </a:lnSpc>
+              <a:spcBef>
+                <a:spcPts val="500"/>
+              </a:spcBef>
+              <a:buFont typeface="Arial" panose="020B0604020202020204" pitchFamily="34" charset="0"/>
+              <a:buNone/>
+              <a:defRPr sz="1000" b="0" i="0" kern="1200">
+                <a:solidFill>
+                  <a:srgbClr val="0E2D69"/>
+                </a:solidFill>
+                <a:latin typeface="HSE Sans" panose="02000000000000000000" pitchFamily="2" charset="0"/>
+                <a:ea typeface="+mn-ea"/>
+                <a:cs typeface="+mn-cs"/>
+              </a:defRPr>
+            </a:lvl4pPr>
+            <a:lvl5pPr marL="1828800" indent="0" algn="l" defTabSz="914400" rtl="0" eaLnBrk="1" latinLnBrk="0" hangingPunct="1">
+              <a:lnSpc>
+                <a:spcPct val="90000"/>
+              </a:lnSpc>
+              <a:spcBef>
+                <a:spcPts val="500"/>
+              </a:spcBef>
+              <a:buFont typeface="Arial" panose="020B0604020202020204" pitchFamily="34" charset="0"/>
+              <a:buNone/>
+              <a:defRPr sz="1000" b="0" i="0" kern="1200">
+                <a:solidFill>
+                  <a:srgbClr val="0E2D69"/>
+                </a:solidFill>
+                <a:latin typeface="HSE Sans" panose="02000000000000000000" pitchFamily="2" charset="0"/>
+                <a:ea typeface="+mn-ea"/>
+                <a:cs typeface="+mn-cs"/>
+              </a:defRPr>
+            </a:lvl5pPr>
+            <a:lvl6pPr marL="2514600" indent="-228600" algn="l" defTabSz="914400" rtl="0" eaLnBrk="1" latinLnBrk="0" hangingPunct="1">
+              <a:lnSpc>
+                <a:spcPct val="90000"/>
+              </a:lnSpc>
+              <a:spcBef>
+                <a:spcPts val="500"/>
+              </a:spcBef>
+              <a:buFont typeface="Arial" panose="020B0604020202020204" pitchFamily="34" charset="0"/>
+              <a:buChar char="•"/>
+              <a:defRPr sz="1800" kern="1200">
+                <a:solidFill>
+                  <a:schemeClr val="tx1"/>
+                </a:solidFill>
+                <a:latin typeface="+mn-lt"/>
+                <a:ea typeface="+mn-ea"/>
+                <a:cs typeface="+mn-cs"/>
+              </a:defRPr>
+            </a:lvl6pPr>
+            <a:lvl7pPr marL="2971800" indent="-228600" algn="l" defTabSz="914400" rtl="0" eaLnBrk="1" latinLnBrk="0" hangingPunct="1">
+              <a:lnSpc>
+                <a:spcPct val="90000"/>
+              </a:lnSpc>
+              <a:spcBef>
+                <a:spcPts val="500"/>
+              </a:spcBef>
+              <a:buFont typeface="Arial" panose="020B0604020202020204" pitchFamily="34" charset="0"/>
+              <a:buChar char="•"/>
+              <a:defRPr sz="1800" kern="1200">
+                <a:solidFill>
+                  <a:schemeClr val="tx1"/>
+                </a:solidFill>
+                <a:latin typeface="+mn-lt"/>
+                <a:ea typeface="+mn-ea"/>
+                <a:cs typeface="+mn-cs"/>
+              </a:defRPr>
+            </a:lvl7pPr>
+            <a:lvl8pPr marL="3429000" indent="-228600" algn="l" defTabSz="914400" rtl="0" eaLnBrk="1" latinLnBrk="0" hangingPunct="1">
+              <a:lnSpc>
+                <a:spcPct val="90000"/>
+              </a:lnSpc>
+              <a:spcBef>
+                <a:spcPts val="500"/>
+              </a:spcBef>
+              <a:buFont typeface="Arial" panose="020B0604020202020204" pitchFamily="34" charset="0"/>
+              <a:buChar char="•"/>
+              <a:defRPr sz="1800" kern="1200">
+                <a:solidFill>
+                  <a:schemeClr val="tx1"/>
+                </a:solidFill>
+                <a:latin typeface="+mn-lt"/>
+                <a:ea typeface="+mn-ea"/>
+                <a:cs typeface="+mn-cs"/>
+              </a:defRPr>
+            </a:lvl8pPr>
+            <a:lvl9pPr marL="3886200" indent="-228600" algn="l" defTabSz="914400" rtl="0" eaLnBrk="1" latinLnBrk="0" hangingPunct="1">
+              <a:lnSpc>
+                <a:spcPct val="90000"/>
+              </a:lnSpc>
+              <a:spcBef>
+                <a:spcPts val="500"/>
+              </a:spcBef>
+              <a:buFont typeface="Arial" panose="020B0604020202020204" pitchFamily="34" charset="0"/>
+              <a:buChar char="•"/>
+              <a:defRPr sz="1800" kern="1200">
+                <a:solidFill>
+                  <a:schemeClr val="tx1"/>
+                </a:solidFill>
+                <a:latin typeface="+mn-lt"/>
+                <a:ea typeface="+mn-ea"/>
+                <a:cs typeface="+mn-cs"/>
+              </a:defRPr>
+            </a:lvl9pPr>
+          </a:lstStyle>
+          <a:p>
+            <a:r>
+              <a:rPr lang="ru-RU" dirty="0"/>
+              <a:t>Классификация выражений лиц с детектированием эмоций в речи</a:t>
+            </a:r>
+          </a:p>
+        </p:txBody>
+      </p:sp>
+      <p:sp>
+        <p:nvSpPr>
+          <p:cNvPr id="19" name="Текст 6">
+            <a:extLst>
+              <a:ext uri="{FF2B5EF4-FFF2-40B4-BE49-F238E27FC236}">
+                <a16:creationId xmlns:a16="http://schemas.microsoft.com/office/drawing/2014/main" id="{C38E8207-B0A4-013A-867A-665C45ADC6D4}"/>
+              </a:ext>
+            </a:extLst>
+          </p:cNvPr>
+          <p:cNvSpPr txBox="1">
+            <a:spLocks/>
+          </p:cNvSpPr>
+          <p:nvPr/>
+        </p:nvSpPr>
+        <p:spPr>
+          <a:xfrm>
+            <a:off x="6259892" y="548720"/>
+            <a:ext cx="2070100" cy="408109"/>
+          </a:xfrm>
+          <a:prstGeom prst="rect">
+            <a:avLst/>
+          </a:prstGeom>
+        </p:spPr>
+        <p:txBody>
+          <a:bodyPr vert="horz" lIns="0" tIns="0" rIns="0" bIns="0" rtlCol="0">
+            <a:noAutofit/>
+          </a:bodyPr>
+          <a:lstStyle>
+            <a:lvl1pPr marL="0" indent="0" algn="l" defTabSz="914400" rtl="0" eaLnBrk="1" latinLnBrk="0" hangingPunct="1">
+              <a:lnSpc>
+                <a:spcPct val="100000"/>
+              </a:lnSpc>
+              <a:spcBef>
+                <a:spcPts val="0"/>
+              </a:spcBef>
+              <a:buFont typeface="Arial" panose="020B0604020202020204" pitchFamily="34" charset="0"/>
+              <a:buNone/>
+              <a:defRPr sz="1000" b="0" i="0" kern="1200">
+                <a:solidFill>
+                  <a:srgbClr val="0E2D69"/>
+                </a:solidFill>
+                <a:latin typeface="HSE Sans" panose="02000000000000000000" pitchFamily="2" charset="0"/>
+                <a:ea typeface="+mn-ea"/>
+                <a:cs typeface="+mn-cs"/>
+              </a:defRPr>
+            </a:lvl1pPr>
+            <a:lvl2pPr marL="457200" indent="0" algn="l" defTabSz="914400" rtl="0" eaLnBrk="1" latinLnBrk="0" hangingPunct="1">
+              <a:lnSpc>
+                <a:spcPct val="90000"/>
+              </a:lnSpc>
+              <a:spcBef>
+                <a:spcPts val="500"/>
+              </a:spcBef>
+              <a:buFont typeface="Arial" panose="020B0604020202020204" pitchFamily="34" charset="0"/>
+              <a:buNone/>
+              <a:defRPr sz="1000" b="0" i="0" kern="1200">
+                <a:solidFill>
+                  <a:srgbClr val="0E2D69"/>
+                </a:solidFill>
+                <a:latin typeface="HSE Sans" panose="02000000000000000000" pitchFamily="2" charset="0"/>
+                <a:ea typeface="+mn-ea"/>
+                <a:cs typeface="+mn-cs"/>
+              </a:defRPr>
+            </a:lvl2pPr>
+            <a:lvl3pPr marL="914400" indent="0" algn="l" defTabSz="914400" rtl="0" eaLnBrk="1" latinLnBrk="0" hangingPunct="1">
+              <a:lnSpc>
+                <a:spcPct val="90000"/>
+              </a:lnSpc>
+              <a:spcBef>
+                <a:spcPts val="500"/>
+              </a:spcBef>
+              <a:buFont typeface="Arial" panose="020B0604020202020204" pitchFamily="34" charset="0"/>
+              <a:buNone/>
+              <a:defRPr sz="1000" b="0" i="0" kern="1200">
+                <a:solidFill>
+                  <a:srgbClr val="0E2D69"/>
+                </a:solidFill>
+                <a:latin typeface="HSE Sans" panose="02000000000000000000" pitchFamily="2" charset="0"/>
+                <a:ea typeface="+mn-ea"/>
+                <a:cs typeface="+mn-cs"/>
+              </a:defRPr>
+            </a:lvl3pPr>
+            <a:lvl4pPr marL="1371600" indent="0" algn="l" defTabSz="914400" rtl="0" eaLnBrk="1" latinLnBrk="0" hangingPunct="1">
+              <a:lnSpc>
+                <a:spcPct val="90000"/>
+              </a:lnSpc>
+              <a:spcBef>
+                <a:spcPts val="500"/>
+              </a:spcBef>
+              <a:buFont typeface="Arial" panose="020B0604020202020204" pitchFamily="34" charset="0"/>
+              <a:buNone/>
+              <a:defRPr sz="1000" b="0" i="0" kern="1200">
+                <a:solidFill>
+                  <a:srgbClr val="0E2D69"/>
+                </a:solidFill>
+                <a:latin typeface="HSE Sans" panose="02000000000000000000" pitchFamily="2" charset="0"/>
+                <a:ea typeface="+mn-ea"/>
+                <a:cs typeface="+mn-cs"/>
+              </a:defRPr>
+            </a:lvl4pPr>
+            <a:lvl5pPr marL="1828800" indent="0" algn="l" defTabSz="914400" rtl="0" eaLnBrk="1" latinLnBrk="0" hangingPunct="1">
+              <a:lnSpc>
+                <a:spcPct val="90000"/>
+              </a:lnSpc>
+              <a:spcBef>
+                <a:spcPts val="500"/>
+              </a:spcBef>
+              <a:buFont typeface="Arial" panose="020B0604020202020204" pitchFamily="34" charset="0"/>
+              <a:buNone/>
+              <a:defRPr sz="1000" b="0" i="0" kern="1200">
+                <a:solidFill>
+                  <a:srgbClr val="0E2D69"/>
+                </a:solidFill>
+                <a:latin typeface="HSE Sans" panose="02000000000000000000" pitchFamily="2" charset="0"/>
+                <a:ea typeface="+mn-ea"/>
+                <a:cs typeface="+mn-cs"/>
+              </a:defRPr>
+            </a:lvl5pPr>
+            <a:lvl6pPr marL="2514600" indent="-228600" algn="l" defTabSz="914400" rtl="0" eaLnBrk="1" latinLnBrk="0" hangingPunct="1">
+              <a:lnSpc>
+                <a:spcPct val="90000"/>
+              </a:lnSpc>
+              <a:spcBef>
+                <a:spcPts val="500"/>
+              </a:spcBef>
+              <a:buFont typeface="Arial" panose="020B0604020202020204" pitchFamily="34" charset="0"/>
+              <a:buChar char="•"/>
+              <a:defRPr sz="1800" kern="1200">
+                <a:solidFill>
+                  <a:schemeClr val="tx1"/>
+                </a:solidFill>
+                <a:latin typeface="+mn-lt"/>
+                <a:ea typeface="+mn-ea"/>
+                <a:cs typeface="+mn-cs"/>
+              </a:defRPr>
+            </a:lvl6pPr>
+            <a:lvl7pPr marL="2971800" indent="-228600" algn="l" defTabSz="914400" rtl="0" eaLnBrk="1" latinLnBrk="0" hangingPunct="1">
+              <a:lnSpc>
+                <a:spcPct val="90000"/>
+              </a:lnSpc>
+              <a:spcBef>
+                <a:spcPts val="500"/>
+              </a:spcBef>
+              <a:buFont typeface="Arial" panose="020B0604020202020204" pitchFamily="34" charset="0"/>
+              <a:buChar char="•"/>
+              <a:defRPr sz="1800" kern="1200">
+                <a:solidFill>
+                  <a:schemeClr val="tx1"/>
+                </a:solidFill>
+                <a:latin typeface="+mn-lt"/>
+                <a:ea typeface="+mn-ea"/>
+                <a:cs typeface="+mn-cs"/>
+              </a:defRPr>
+            </a:lvl7pPr>
+            <a:lvl8pPr marL="3429000" indent="-228600" algn="l" defTabSz="914400" rtl="0" eaLnBrk="1" latinLnBrk="0" hangingPunct="1">
+              <a:lnSpc>
+                <a:spcPct val="90000"/>
+              </a:lnSpc>
+              <a:spcBef>
+                <a:spcPts val="500"/>
+              </a:spcBef>
+              <a:buFont typeface="Arial" panose="020B0604020202020204" pitchFamily="34" charset="0"/>
+              <a:buChar char="•"/>
+              <a:defRPr sz="1800" kern="1200">
+                <a:solidFill>
+                  <a:schemeClr val="tx1"/>
+                </a:solidFill>
+                <a:latin typeface="+mn-lt"/>
+                <a:ea typeface="+mn-ea"/>
+                <a:cs typeface="+mn-cs"/>
+              </a:defRPr>
+            </a:lvl8pPr>
+            <a:lvl9pPr marL="3886200" indent="-228600" algn="l" defTabSz="914400" rtl="0" eaLnBrk="1" latinLnBrk="0" hangingPunct="1">
+              <a:lnSpc>
+                <a:spcPct val="90000"/>
+              </a:lnSpc>
+              <a:spcBef>
+                <a:spcPts val="500"/>
+              </a:spcBef>
+              <a:buFont typeface="Arial" panose="020B0604020202020204" pitchFamily="34" charset="0"/>
+              <a:buChar char="•"/>
+              <a:defRPr sz="1800" kern="1200">
+                <a:solidFill>
+                  <a:schemeClr val="tx1"/>
+                </a:solidFill>
+                <a:latin typeface="+mn-lt"/>
+                <a:ea typeface="+mn-ea"/>
+                <a:cs typeface="+mn-cs"/>
+              </a:defRPr>
+            </a:lvl9pPr>
+          </a:lstStyle>
+          <a:p>
+            <a:r>
+              <a:rPr lang="ru-RU" dirty="0"/>
+              <a:t>Канделов Дамир Русланович </a:t>
+            </a:r>
+          </a:p>
+          <a:p>
+            <a:r>
+              <a:rPr lang="ru-RU" dirty="0"/>
+              <a:t>Группа: 22ПИ-1</a:t>
+            </a:r>
+          </a:p>
+        </p:txBody>
+      </p:sp>
+      <p:sp>
+        <p:nvSpPr>
+          <p:cNvPr id="4" name="Rectangle 2">
+            <a:extLst>
+              <a:ext uri="{FF2B5EF4-FFF2-40B4-BE49-F238E27FC236}">
+                <a16:creationId xmlns:a16="http://schemas.microsoft.com/office/drawing/2014/main" id="{0F0DA963-E9B5-6F1D-7BB4-EC614E37D956}"/>
+              </a:ext>
+            </a:extLst>
+          </p:cNvPr>
+          <p:cNvSpPr>
+            <a:spLocks noChangeArrowheads="1"/>
+          </p:cNvSpPr>
+          <p:nvPr/>
+        </p:nvSpPr>
+        <p:spPr bwMode="auto">
+          <a:xfrm>
+            <a:off x="0" y="0"/>
+            <a:ext cx="12192000" cy="457200"/>
+          </a:xfrm>
+          <a:prstGeom prst="rect">
+            <a:avLst/>
+          </a:prstGeom>
+          <a:noFill/>
+          <a:ln>
+            <a:noFill/>
+          </a:ln>
+          <a:effectLst/>
+          <a:extLst>
+            <a:ext uri="{909E8E84-426E-40DD-AFC4-6F175D3DCCD1}">
+              <a14:hiddenFill xmlns:a14="http://schemas.microsoft.com/office/drawing/2010/main">
+                <a:solidFill>
+                  <a:schemeClr val="accent1"/>
+                </a:solidFill>
+              </a14:hiddenFill>
+            </a:ext>
+            <a:ext uri="{91240B29-F687-4F45-9708-019B960494DF}">
+              <a14:hiddenLine xmlns:a14="http://schemas.microsoft.com/office/drawing/2010/main" w="9525">
+                <a:solidFill>
+                  <a:schemeClr val="tx1"/>
+                </a:solidFill>
+                <a:miter lim="800000"/>
+                <a:headEnd/>
+                <a:tailEnd/>
+              </a14:hiddenLine>
+            </a:ext>
+            <a:ext uri="{AF507438-7753-43E0-B8FC-AC1667EBCBE1}">
+              <a14:hiddenEffects xmlns:a14="http://schemas.microsoft.com/office/drawing/2010/main">
+                <a:effectLst>
+                  <a:outerShdw dist="35921" dir="2700000" algn="ctr" rotWithShape="0">
+                    <a:schemeClr val="bg2"/>
+                  </a:outerShdw>
+                </a:effectLst>
+              </a14:hiddenEffects>
+            </a:ext>
+          </a:extLst>
+        </p:spPr>
+        <p:txBody>
+          <a:bodyPr vert="horz" wrap="none" lIns="91440" tIns="45720" rIns="91440" bIns="45720" numCol="1" anchor="ctr" anchorCtr="0" compatLnSpc="1">
+            <a:prstTxWarp prst="textNoShape">
+              <a:avLst/>
+            </a:prstTxWarp>
+            <a:spAutoFit/>
+          </a:bodyPr>
+          <a:lstStyle/>
+          <a:p>
+            <a:endParaRPr lang="en-RU"/>
+          </a:p>
+        </p:txBody>
+      </p:sp>
+      <p:sp>
+        <p:nvSpPr>
+          <p:cNvPr id="6" name="Rounded Rectangle 5">
+            <a:extLst>
+              <a:ext uri="{FF2B5EF4-FFF2-40B4-BE49-F238E27FC236}">
+                <a16:creationId xmlns:a16="http://schemas.microsoft.com/office/drawing/2014/main" id="{8BA1797D-E1C0-1413-7394-3F0A0E2135E1}"/>
+              </a:ext>
+            </a:extLst>
+          </p:cNvPr>
+          <p:cNvSpPr/>
+          <p:nvPr/>
+        </p:nvSpPr>
+        <p:spPr>
+          <a:xfrm>
+            <a:off x="4576199" y="4584371"/>
+            <a:ext cx="3039602" cy="1582173"/>
+          </a:xfrm>
+          <a:prstGeom prst="roundRect">
+            <a:avLst>
+              <a:gd name="adj" fmla="val 19569"/>
+            </a:avLst>
+          </a:prstGeom>
+          <a:noFill/>
+          <a:ln w="38100">
+            <a:solidFill>
+              <a:srgbClr val="0F2B69"/>
+            </a:solidFill>
+          </a:ln>
+        </p:spPr>
+        <p:style>
+          <a:lnRef idx="2">
+            <a:schemeClr val="accent1">
+              <a:shade val="15000"/>
+            </a:schemeClr>
+          </a:lnRef>
+          <a:fillRef idx="1">
+            <a:schemeClr val="accent1"/>
+          </a:fillRef>
+          <a:effectRef idx="0">
+            <a:schemeClr val="accent1"/>
+          </a:effectRef>
+          <a:fontRef idx="minor">
+            <a:schemeClr val="lt1"/>
+          </a:fontRef>
+        </p:style>
+        <p:txBody>
+          <a:bodyPr rtlCol="0" anchor="ctr"/>
+          <a:lstStyle/>
+          <a:p>
+            <a:pPr algn="ctr"/>
+            <a:endParaRPr lang="en-RU"/>
+          </a:p>
+        </p:txBody>
+      </p:sp>
+      <p:sp>
+        <p:nvSpPr>
+          <p:cNvPr id="8" name="TextBox 7">
+            <a:extLst>
+              <a:ext uri="{FF2B5EF4-FFF2-40B4-BE49-F238E27FC236}">
+                <a16:creationId xmlns:a16="http://schemas.microsoft.com/office/drawing/2014/main" id="{F1E435D7-16D5-35BB-B61D-5A76F0935C93}"/>
+              </a:ext>
+            </a:extLst>
+          </p:cNvPr>
+          <p:cNvSpPr txBox="1"/>
+          <p:nvPr/>
+        </p:nvSpPr>
+        <p:spPr>
+          <a:xfrm>
+            <a:off x="4752465" y="4673828"/>
+            <a:ext cx="2671968" cy="1169551"/>
+          </a:xfrm>
+          <a:prstGeom prst="rect">
+            <a:avLst/>
+          </a:prstGeom>
+          <a:noFill/>
+        </p:spPr>
+        <p:txBody>
+          <a:bodyPr wrap="square" rtlCol="0">
+            <a:spAutoFit/>
+          </a:bodyPr>
+          <a:lstStyle/>
+          <a:p>
+            <a:pPr algn="just"/>
+            <a:r>
+              <a:rPr lang="ru-RU" sz="1400" dirty="0">
+                <a:latin typeface="HSE Sans" panose="02000000000000000000" pitchFamily="2" charset="0"/>
+              </a:rPr>
+              <a:t>Реализован потоковый real-time прототип: нейтральные фразы обрабатываются менее чем за 10 мс, эмоциональные — за 60–110 мс.</a:t>
+            </a:r>
+          </a:p>
+        </p:txBody>
+      </p:sp>
+      <p:sp>
+        <p:nvSpPr>
+          <p:cNvPr id="9" name="Rounded Rectangle 8">
+            <a:extLst>
+              <a:ext uri="{FF2B5EF4-FFF2-40B4-BE49-F238E27FC236}">
+                <a16:creationId xmlns:a16="http://schemas.microsoft.com/office/drawing/2014/main" id="{5C2300B5-012E-5A1E-8609-08A14F7A17F1}"/>
+              </a:ext>
+            </a:extLst>
+          </p:cNvPr>
+          <p:cNvSpPr/>
+          <p:nvPr/>
+        </p:nvSpPr>
+        <p:spPr>
+          <a:xfrm>
+            <a:off x="4576199" y="2167362"/>
+            <a:ext cx="3039602" cy="1853164"/>
+          </a:xfrm>
+          <a:prstGeom prst="roundRect">
+            <a:avLst>
+              <a:gd name="adj" fmla="val 19569"/>
+            </a:avLst>
+          </a:prstGeom>
+          <a:noFill/>
+          <a:ln w="38100">
+            <a:solidFill>
+              <a:srgbClr val="0F2B69"/>
+            </a:solidFill>
+          </a:ln>
+        </p:spPr>
+        <p:style>
+          <a:lnRef idx="2">
+            <a:schemeClr val="accent1">
+              <a:shade val="15000"/>
+            </a:schemeClr>
+          </a:lnRef>
+          <a:fillRef idx="1">
+            <a:schemeClr val="accent1"/>
+          </a:fillRef>
+          <a:effectRef idx="0">
+            <a:schemeClr val="accent1"/>
+          </a:effectRef>
+          <a:fontRef idx="minor">
+            <a:schemeClr val="lt1"/>
+          </a:fontRef>
+        </p:style>
+        <p:txBody>
+          <a:bodyPr rtlCol="0" anchor="ctr"/>
+          <a:lstStyle/>
+          <a:p>
+            <a:pPr algn="ctr"/>
+            <a:endParaRPr lang="en-RU" dirty="0"/>
+          </a:p>
+        </p:txBody>
+      </p:sp>
+      <p:sp>
+        <p:nvSpPr>
+          <p:cNvPr id="11" name="Rounded Rectangle 10">
+            <a:extLst>
+              <a:ext uri="{FF2B5EF4-FFF2-40B4-BE49-F238E27FC236}">
+                <a16:creationId xmlns:a16="http://schemas.microsoft.com/office/drawing/2014/main" id="{70BBE6F1-86E3-D0C2-4C58-2B6C2C6389F2}"/>
+              </a:ext>
+            </a:extLst>
+          </p:cNvPr>
+          <p:cNvSpPr/>
+          <p:nvPr/>
+        </p:nvSpPr>
+        <p:spPr>
+          <a:xfrm>
+            <a:off x="8238522" y="2167362"/>
+            <a:ext cx="3039602" cy="1853163"/>
+          </a:xfrm>
+          <a:prstGeom prst="roundRect">
+            <a:avLst>
+              <a:gd name="adj" fmla="val 19569"/>
+            </a:avLst>
+          </a:prstGeom>
+          <a:noFill/>
+          <a:ln w="38100">
+            <a:solidFill>
+              <a:srgbClr val="0F2B69"/>
+            </a:solidFill>
+          </a:ln>
+        </p:spPr>
+        <p:style>
+          <a:lnRef idx="2">
+            <a:schemeClr val="accent1">
+              <a:shade val="15000"/>
+            </a:schemeClr>
+          </a:lnRef>
+          <a:fillRef idx="1">
+            <a:schemeClr val="accent1"/>
+          </a:fillRef>
+          <a:effectRef idx="0">
+            <a:schemeClr val="accent1"/>
+          </a:effectRef>
+          <a:fontRef idx="minor">
+            <a:schemeClr val="lt1"/>
+          </a:fontRef>
+        </p:style>
+        <p:txBody>
+          <a:bodyPr rtlCol="0" anchor="ctr"/>
+          <a:lstStyle/>
+          <a:p>
+            <a:pPr algn="ctr"/>
+            <a:endParaRPr lang="en-RU"/>
+          </a:p>
+        </p:txBody>
+      </p:sp>
+      <p:sp>
+        <p:nvSpPr>
+          <p:cNvPr id="12" name="Rounded Rectangle 11">
+            <a:extLst>
+              <a:ext uri="{FF2B5EF4-FFF2-40B4-BE49-F238E27FC236}">
+                <a16:creationId xmlns:a16="http://schemas.microsoft.com/office/drawing/2014/main" id="{D27B9441-A64E-62AE-2B59-52F9FDC8C1D2}"/>
+              </a:ext>
+            </a:extLst>
+          </p:cNvPr>
+          <p:cNvSpPr/>
+          <p:nvPr/>
+        </p:nvSpPr>
+        <p:spPr>
+          <a:xfrm>
+            <a:off x="913876" y="2167362"/>
+            <a:ext cx="3039602" cy="2509371"/>
+          </a:xfrm>
+          <a:prstGeom prst="roundRect">
+            <a:avLst>
+              <a:gd name="adj" fmla="val 19569"/>
+            </a:avLst>
+          </a:prstGeom>
+          <a:noFill/>
+          <a:ln w="38100">
+            <a:solidFill>
+              <a:srgbClr val="0F2B69"/>
+            </a:solidFill>
+          </a:ln>
+        </p:spPr>
+        <p:style>
+          <a:lnRef idx="2">
+            <a:schemeClr val="accent1">
+              <a:shade val="15000"/>
+            </a:schemeClr>
+          </a:lnRef>
+          <a:fillRef idx="1">
+            <a:schemeClr val="accent1"/>
+          </a:fillRef>
+          <a:effectRef idx="0">
+            <a:schemeClr val="accent1"/>
+          </a:effectRef>
+          <a:fontRef idx="minor">
+            <a:schemeClr val="lt1"/>
+          </a:fontRef>
+        </p:style>
+        <p:txBody>
+          <a:bodyPr rtlCol="0" anchor="ctr"/>
+          <a:lstStyle/>
+          <a:p>
+            <a:pPr algn="ctr"/>
+            <a:endParaRPr lang="en-RU"/>
+          </a:p>
+        </p:txBody>
+      </p:sp>
+      <p:sp>
+        <p:nvSpPr>
+          <p:cNvPr id="13" name="Rounded Rectangle 12">
+            <a:extLst>
+              <a:ext uri="{FF2B5EF4-FFF2-40B4-BE49-F238E27FC236}">
+                <a16:creationId xmlns:a16="http://schemas.microsoft.com/office/drawing/2014/main" id="{80F87565-B390-B77D-C10D-8C5AFEFBACBE}"/>
+              </a:ext>
+            </a:extLst>
+          </p:cNvPr>
+          <p:cNvSpPr/>
+          <p:nvPr/>
+        </p:nvSpPr>
+        <p:spPr>
+          <a:xfrm>
+            <a:off x="8238522" y="4367030"/>
+            <a:ext cx="3039602" cy="1799514"/>
+          </a:xfrm>
+          <a:prstGeom prst="roundRect">
+            <a:avLst>
+              <a:gd name="adj" fmla="val 19569"/>
+            </a:avLst>
+          </a:prstGeom>
+          <a:noFill/>
+          <a:ln w="38100">
+            <a:solidFill>
+              <a:srgbClr val="0F2B69"/>
+            </a:solidFill>
+          </a:ln>
+        </p:spPr>
+        <p:style>
+          <a:lnRef idx="2">
+            <a:schemeClr val="accent1">
+              <a:shade val="15000"/>
+            </a:schemeClr>
+          </a:lnRef>
+          <a:fillRef idx="1">
+            <a:schemeClr val="accent1"/>
+          </a:fillRef>
+          <a:effectRef idx="0">
+            <a:schemeClr val="accent1"/>
+          </a:effectRef>
+          <a:fontRef idx="minor">
+            <a:schemeClr val="lt1"/>
+          </a:fontRef>
+        </p:style>
+        <p:txBody>
+          <a:bodyPr rtlCol="0" anchor="ctr"/>
+          <a:lstStyle/>
+          <a:p>
+            <a:pPr algn="ctr"/>
+            <a:endParaRPr lang="en-RU"/>
+          </a:p>
+        </p:txBody>
+      </p:sp>
+      <p:sp>
+        <p:nvSpPr>
+          <p:cNvPr id="15" name="Rounded Rectangle 14">
+            <a:extLst>
+              <a:ext uri="{FF2B5EF4-FFF2-40B4-BE49-F238E27FC236}">
+                <a16:creationId xmlns:a16="http://schemas.microsoft.com/office/drawing/2014/main" id="{D2A2146B-9FEF-8C60-91C4-0E80193D2FF1}"/>
+              </a:ext>
+            </a:extLst>
+          </p:cNvPr>
+          <p:cNvSpPr/>
+          <p:nvPr/>
+        </p:nvSpPr>
+        <p:spPr>
+          <a:xfrm>
+            <a:off x="913876" y="4952390"/>
+            <a:ext cx="3039602" cy="1264732"/>
+          </a:xfrm>
+          <a:prstGeom prst="roundRect">
+            <a:avLst>
+              <a:gd name="adj" fmla="val 19569"/>
+            </a:avLst>
+          </a:prstGeom>
+          <a:noFill/>
+          <a:ln w="38100">
+            <a:solidFill>
+              <a:srgbClr val="0F2B69"/>
+            </a:solidFill>
+          </a:ln>
+        </p:spPr>
+        <p:style>
+          <a:lnRef idx="2">
+            <a:schemeClr val="accent1">
+              <a:shade val="15000"/>
+            </a:schemeClr>
+          </a:lnRef>
+          <a:fillRef idx="1">
+            <a:schemeClr val="accent1"/>
+          </a:fillRef>
+          <a:effectRef idx="0">
+            <a:schemeClr val="accent1"/>
+          </a:effectRef>
+          <a:fontRef idx="minor">
+            <a:schemeClr val="lt1"/>
+          </a:fontRef>
+        </p:style>
+        <p:txBody>
+          <a:bodyPr rtlCol="0" anchor="ctr"/>
+          <a:lstStyle/>
+          <a:p>
+            <a:pPr algn="ctr"/>
+            <a:endParaRPr lang="en-RU"/>
+          </a:p>
+        </p:txBody>
+      </p:sp>
+      <p:sp>
+        <p:nvSpPr>
+          <p:cNvPr id="21" name="TextBox 20">
+            <a:extLst>
+              <a:ext uri="{FF2B5EF4-FFF2-40B4-BE49-F238E27FC236}">
+                <a16:creationId xmlns:a16="http://schemas.microsoft.com/office/drawing/2014/main" id="{7F56022D-561F-CD5F-6F84-1173545EDCF3}"/>
+              </a:ext>
+            </a:extLst>
+          </p:cNvPr>
+          <p:cNvSpPr txBox="1"/>
+          <p:nvPr/>
+        </p:nvSpPr>
+        <p:spPr>
+          <a:xfrm>
+            <a:off x="4759540" y="2283917"/>
+            <a:ext cx="2672919" cy="1384995"/>
+          </a:xfrm>
+          <a:prstGeom prst="rect">
+            <a:avLst/>
+          </a:prstGeom>
+          <a:noFill/>
+        </p:spPr>
+        <p:txBody>
+          <a:bodyPr wrap="square">
+            <a:spAutoFit/>
+          </a:bodyPr>
+          <a:lstStyle/>
+          <a:p>
+            <a:pPr algn="just"/>
+            <a:r>
+              <a:rPr lang="ru-RU" sz="1400" dirty="0">
+                <a:latin typeface="HSE Sans" panose="02000000000000000000" pitchFamily="2" charset="0"/>
+              </a:rPr>
+              <a:t>Разработана оригинальная двухстадийная каскадная архитектура с лёгким аудиогейтом MelCNN, отсеивающим нейтральные реплики.</a:t>
+            </a:r>
+          </a:p>
+        </p:txBody>
+      </p:sp>
+      <p:sp>
+        <p:nvSpPr>
+          <p:cNvPr id="22" name="TextBox 21">
+            <a:extLst>
+              <a:ext uri="{FF2B5EF4-FFF2-40B4-BE49-F238E27FC236}">
+                <a16:creationId xmlns:a16="http://schemas.microsoft.com/office/drawing/2014/main" id="{2C2B1BF6-7812-4467-A137-CBD2F2444ADD}"/>
+              </a:ext>
+            </a:extLst>
+          </p:cNvPr>
+          <p:cNvSpPr txBox="1"/>
+          <p:nvPr/>
+        </p:nvSpPr>
+        <p:spPr>
+          <a:xfrm>
+            <a:off x="8367951" y="2293724"/>
+            <a:ext cx="2780740" cy="1169551"/>
+          </a:xfrm>
+          <a:prstGeom prst="rect">
+            <a:avLst/>
+          </a:prstGeom>
+          <a:noFill/>
+        </p:spPr>
+        <p:txBody>
+          <a:bodyPr wrap="square">
+            <a:spAutoFit/>
+          </a:bodyPr>
+          <a:lstStyle>
+            <a:defPPr>
+              <a:defRPr lang="en-RU"/>
+            </a:defPPr>
+            <a:lvl1pPr algn="just">
+              <a:defRPr sz="1400">
+                <a:latin typeface="HSE Sans" panose="02000000000000000000" pitchFamily="2" charset="0"/>
+              </a:defRPr>
+            </a:lvl1pPr>
+          </a:lstStyle>
+          <a:p>
+            <a:pPr algn="just"/>
+            <a:r>
+              <a:rPr lang="ru-RU" sz="1400" dirty="0">
+                <a:latin typeface="HSE Sans" panose="02000000000000000000" pitchFamily="2" charset="0"/>
+              </a:rPr>
+              <a:t>Реализовано переиспользование одной лог-мел спектрограммы в гейте и аудио-ветви — отказ от тяжёлых энкодеров, итоговый размер 37 МБ.</a:t>
+            </a:r>
+          </a:p>
+        </p:txBody>
+      </p:sp>
+      <p:sp>
+        <p:nvSpPr>
+          <p:cNvPr id="23" name="TextBox 22">
+            <a:extLst>
+              <a:ext uri="{FF2B5EF4-FFF2-40B4-BE49-F238E27FC236}">
+                <a16:creationId xmlns:a16="http://schemas.microsoft.com/office/drawing/2014/main" id="{3C33674B-DDFB-B86A-5D67-AEDA5D83B2AE}"/>
+              </a:ext>
+            </a:extLst>
+          </p:cNvPr>
+          <p:cNvSpPr txBox="1"/>
+          <p:nvPr/>
+        </p:nvSpPr>
+        <p:spPr>
+          <a:xfrm>
+            <a:off x="1049851" y="2298662"/>
+            <a:ext cx="2752550" cy="1600438"/>
+          </a:xfrm>
+          <a:prstGeom prst="rect">
+            <a:avLst/>
+          </a:prstGeom>
+          <a:noFill/>
+        </p:spPr>
+        <p:txBody>
+          <a:bodyPr wrap="square">
+            <a:spAutoFit/>
+          </a:bodyPr>
+          <a:lstStyle>
+            <a:defPPr>
+              <a:defRPr lang="en-RU"/>
+            </a:defPPr>
+            <a:lvl1pPr algn="just">
+              <a:defRPr sz="1400">
+                <a:latin typeface="HSE Sans" panose="02000000000000000000" pitchFamily="2" charset="0"/>
+              </a:defRPr>
+            </a:lvl1pPr>
+          </a:lstStyle>
+          <a:p>
+            <a:pPr algn="just"/>
+            <a:r>
+              <a:rPr lang="ru-RU" sz="1400" dirty="0">
+                <a:latin typeface="HSE Sans" panose="02000000000000000000" pitchFamily="2" charset="0"/>
+              </a:rPr>
+              <a:t>Проанализированы современные подходы SER, FER и MER; выявлено их ключевое ограничение — высокая вычислительная сложность при параллельной обработке модальностей.</a:t>
+            </a:r>
+          </a:p>
+        </p:txBody>
+      </p:sp>
+      <p:sp>
+        <p:nvSpPr>
+          <p:cNvPr id="24" name="TextBox 23">
+            <a:extLst>
+              <a:ext uri="{FF2B5EF4-FFF2-40B4-BE49-F238E27FC236}">
+                <a16:creationId xmlns:a16="http://schemas.microsoft.com/office/drawing/2014/main" id="{9C90103E-EBA1-7B2D-9E27-E7BA883003B6}"/>
+              </a:ext>
+            </a:extLst>
+          </p:cNvPr>
+          <p:cNvSpPr txBox="1"/>
+          <p:nvPr/>
+        </p:nvSpPr>
+        <p:spPr>
+          <a:xfrm>
+            <a:off x="8421862" y="4466568"/>
+            <a:ext cx="2672919" cy="1169551"/>
+          </a:xfrm>
+          <a:prstGeom prst="rect">
+            <a:avLst/>
+          </a:prstGeom>
+          <a:noFill/>
+        </p:spPr>
+        <p:txBody>
+          <a:bodyPr wrap="square" rtlCol="0">
+            <a:spAutoFit/>
+          </a:bodyPr>
+          <a:lstStyle>
+            <a:defPPr>
+              <a:defRPr lang="en-RU"/>
+            </a:defPPr>
+            <a:lvl1pPr algn="just">
+              <a:defRPr sz="1400">
+                <a:latin typeface="HSE Sans" panose="02000000000000000000" pitchFamily="2" charset="0"/>
+              </a:defRPr>
+            </a:lvl1pPr>
+          </a:lstStyle>
+          <a:p>
+            <a:pPr algn="just"/>
+            <a:r>
+              <a:rPr lang="ru-RU" sz="1400" dirty="0">
+                <a:latin typeface="HSE Sans" panose="02000000000000000000" pitchFamily="2" charset="0"/>
+              </a:rPr>
+              <a:t>Практическая ценность результатов. Код доступен на GitHub: </a:t>
+            </a:r>
+            <a:r>
+              <a:rPr lang="en-US" sz="1400" b="1" dirty="0">
+                <a:latin typeface="HSE Sans" panose="02000000000000000000" pitchFamily="2" charset="0"/>
+              </a:rPr>
+              <a:t>github.com/Kaparya/Classification-of-Facial-Expressions</a:t>
+            </a:r>
+          </a:p>
+        </p:txBody>
+      </p:sp>
+      <p:sp>
+        <p:nvSpPr>
+          <p:cNvPr id="25" name="TextBox 24">
+            <a:extLst>
+              <a:ext uri="{FF2B5EF4-FFF2-40B4-BE49-F238E27FC236}">
+                <a16:creationId xmlns:a16="http://schemas.microsoft.com/office/drawing/2014/main" id="{01003BFE-0D32-6BE2-8D37-4EE85F449373}"/>
+              </a:ext>
+            </a:extLst>
+          </p:cNvPr>
+          <p:cNvSpPr txBox="1"/>
+          <p:nvPr/>
+        </p:nvSpPr>
+        <p:spPr>
+          <a:xfrm>
+            <a:off x="1097217" y="4996993"/>
+            <a:ext cx="2672919" cy="1169551"/>
+          </a:xfrm>
+          <a:prstGeom prst="rect">
+            <a:avLst/>
+          </a:prstGeom>
+          <a:noFill/>
+        </p:spPr>
+        <p:txBody>
+          <a:bodyPr wrap="square" rtlCol="0">
+            <a:spAutoFit/>
+          </a:bodyPr>
+          <a:lstStyle/>
+          <a:p>
+            <a:pPr algn="just"/>
+            <a:r>
+              <a:rPr lang="ru-RU" sz="1400" dirty="0">
+                <a:latin typeface="HSE Sans" panose="02000000000000000000" pitchFamily="2" charset="0"/>
+              </a:rPr>
+              <a:t>Построен единый воспроизводимый LOSO-бенчмарк на IEMOCAP: UAR 0,5094 — лучший результат среди 6 моделей.</a:t>
+            </a:r>
+          </a:p>
+        </p:txBody>
+      </p:sp>
+    </p:spTree>
+    <p:extLst>
+      <p:ext uri="{BB962C8B-B14F-4D97-AF65-F5344CB8AC3E}">
+        <p14:creationId xmlns:p14="http://schemas.microsoft.com/office/powerpoint/2010/main" val="3774285090"/>
+      </p:ext>
+    </p:extLst>
+  </p:cSld>
+  <p:clrMapOvr>
+    <a:masterClrMapping/>
+  </p:clrMapOvr>
+</p:sld>
+</file>
+
+<file path=ppt/slides/slide16.xml><?xml version="1.0" encoding="utf-8"?>
+<p:sld xmlns:a="http://schemas.openxmlformats.org/drawingml/2006/main" xmlns:r="http://schemas.openxmlformats.org/officeDocument/2006/relationships" xmlns:p="http://schemas.openxmlformats.org/presentationml/2006/main">
+  <p:cSld>
+    <p:spTree>
+      <p:nvGrpSpPr>
+        <p:cNvPr id="1" name=""/>
+        <p:cNvGrpSpPr/>
+        <p:nvPr/>
+      </p:nvGrpSpPr>
+      <p:grpSpPr>
+        <a:xfrm>
+          <a:off x="0" y="0"/>
+          <a:ext cx="0" cy="0"/>
+          <a:chOff x="0" y="0"/>
+          <a:chExt cx="0" cy="0"/>
+        </a:xfrm>
+      </p:grpSpPr>
+      <p:sp>
+        <p:nvSpPr>
           <p:cNvPr id="5" name="TextBox 4">
             <a:extLst>
               <a:ext uri="{FF2B5EF4-FFF2-40B4-BE49-F238E27FC236}">
@@ -20956,7 +21919,7 @@
 </p:sld>
 </file>
 
-<file path=ppt/slides/slide16.xml><?xml version="1.0" encoding="utf-8"?>
+<file path=ppt/slides/slide17.xml><?xml version="1.0" encoding="utf-8"?>
 <p:sld xmlns:a="http://schemas.openxmlformats.org/drawingml/2006/main" xmlns:r="http://schemas.openxmlformats.org/officeDocument/2006/relationships" xmlns:p="http://schemas.openxmlformats.org/presentationml/2006/main">
   <p:cSld>
     <p:spTree>
@@ -22610,7 +23573,7 @@
               <a:rPr lang="ru-RU" dirty="0">
                 <a:latin typeface="HSE Sans" panose="02000000000000000000" pitchFamily="2" charset="0"/>
               </a:rPr>
-              <a:t>Анализ подходов к распознаванию эмоций по речи (SER), лицу (FER) и по обеим модальностям (MER)</a:t>
+              <a:t>Анализ подходов к распознаванию эмоций по речи (SER), выражениям лиц (FER) и по обеим модальностям (MER)</a:t>
             </a:r>
           </a:p>
           <a:p>
@@ -22708,7 +23671,7 @@
               <a:rPr lang="ru-RU" dirty="0">
                 <a:latin typeface="HSE Sans" panose="02000000000000000000" pitchFamily="2" charset="0"/>
               </a:rPr>
-              <a:t>Бенчмарк для сравнения нашей архитектуры по: качеству, времени и памяти против лучших моделей</a:t>
+              <a:t>Бенчмарк для сравнения нашей архитектуры по: качеству, времени и памяти против лучших современных моделей</a:t>
             </a:r>
           </a:p>
           <a:p>
@@ -22780,7 +23743,7 @@
         </p:spPr>
         <p:txBody>
           <a:bodyPr vert="horz" lIns="0" tIns="0" rIns="0" bIns="0" rtlCol="0" anchor="t">
-            <a:normAutofit fontScale="92500"/>
+            <a:normAutofit/>
           </a:bodyPr>
           <a:lstStyle>
             <a:lvl1pPr algn="l" defTabSz="914400" rtl="0" eaLnBrk="1" latinLnBrk="0" hangingPunct="1">
@@ -22804,12 +23767,12 @@
           <a:p>
             <a:r>
               <a:rPr lang="ru-RU" b="1" dirty="0"/>
-              <a:t>Исследование предметной области</a:t>
+              <a:t>Аналитический обзор литературы</a:t>
             </a:r>
             <a:endParaRPr lang="en-US" b="1" dirty="0"/>
           </a:p>
           <a:p>
-            <a:pPr marL="0" marR="0" lvl="0" indent="0" algn="l" defTabSz="914400" rtl="0" eaLnBrk="1" fontAlgn="auto" latinLnBrk="0" hangingPunct="1">
+            <a:pPr marL="0" indent="0" algn="l">
               <a:lnSpc>
                 <a:spcPct val="100000"/>
               </a:lnSpc>
@@ -22819,12 +23782,7 @@
               <a:spcAft>
                 <a:spcPts val="0"/>
               </a:spcAft>
-              <a:buClrTx/>
-              <a:buSzTx/>
-              <a:buFontTx/>
-              <a:buNone/>
-              <a:tabLst/>
-              <a:defRPr/>
+              <a:buNone/>
             </a:pPr>
             <a:r>
               <a:rPr lang="ru-RU" sz="2000" dirty="0">
@@ -22835,22 +23793,8 @@
                 <a:ea typeface="+mn-ea"/>
                 <a:cs typeface="+mn-cs"/>
               </a:rPr>
-              <a:t>Виды определения эмоций по различным модальностям</a:t>
-            </a:r>
-            <a:endParaRPr kumimoji="0" lang="ru-RU" sz="2000" b="0" i="0" u="none" strike="noStrike" kern="1200" cap="none" spc="0" normalizeH="0" baseline="0" noProof="0" dirty="0">
-              <a:ln>
-                <a:noFill/>
-              </a:ln>
-              <a:solidFill>
-                <a:srgbClr val="0F2C68"/>
-              </a:solidFill>
-              <a:effectLst/>
-              <a:uLnTx/>
-              <a:uFillTx/>
-              <a:latin typeface="Calibri" panose="020F0502020204030204"/>
-              <a:ea typeface="+mn-ea"/>
-              <a:cs typeface="+mn-cs"/>
-            </a:endParaRPr>
+              <a:t>Эволюция подходов к распознаванию эмоций</a:t>
+            </a:r>
           </a:p>
           <a:p>
             <a:endParaRPr lang="ru-RU" b="1" dirty="0"/>
@@ -23537,109 +24481,60 @@
       </p:sp>
       <p:sp>
         <p:nvSpPr>
-          <p:cNvPr id="3" name="Rounded Rectangle 2">
-            <a:extLst>
-              <a:ext uri="{FF2B5EF4-FFF2-40B4-BE49-F238E27FC236}">
-                <a16:creationId xmlns:a16="http://schemas.microsoft.com/office/drawing/2014/main" id="{1B1BC534-618A-0E4F-A8FA-BED4A06AFBCD}"/>
-              </a:ext>
-            </a:extLst>
-          </p:cNvPr>
+          <p:cNvPr id="200" name="stage1"/>
           <p:cNvSpPr/>
           <p:nvPr/>
         </p:nvSpPr>
         <p:spPr>
           <a:xfrm>
             <a:off x="558800" y="2286000"/>
-            <a:ext cx="3581400" cy="3810000"/>
+            <a:ext cx="2578100" cy="3175000"/>
           </a:xfrm>
           <a:prstGeom prst="roundRect">
-            <a:avLst/>
+            <a:avLst>
+              <a:gd name="adj" fmla="val 6000"/>
+            </a:avLst>
           </a:prstGeom>
           <a:solidFill>
-            <a:srgbClr val="E8EEF7"/>
+            <a:srgbClr val="F4F6FA"/>
           </a:solidFill>
-          <a:ln w="19050" cap="flat" cmpd="sng" algn="ctr">
+          <a:ln w="12700">
             <a:solidFill>
-              <a:srgbClr val="1F4E9B"/>
+              <a:srgbClr val="6C7A89"/>
             </a:solidFill>
-            <a:prstDash val="solid"/>
-            <a:miter lim="800000"/>
           </a:ln>
         </p:spPr>
-        <p:style>
-          <a:lnRef idx="2">
-            <a:schemeClr val="accent1">
-              <a:shade val="15000"/>
-            </a:schemeClr>
-          </a:lnRef>
-          <a:fillRef idx="1">
-            <a:schemeClr val="accent1"/>
-          </a:fillRef>
-          <a:effectRef idx="0">
-            <a:schemeClr val="accent1"/>
-          </a:effectRef>
-          <a:fontRef idx="minor">
-            <a:schemeClr val="lt1"/>
-          </a:fontRef>
-        </p:style>
         <p:txBody>
-          <a:bodyPr vertOverflow="clip" horzOverflow="clip" rtlCol="0" anchor="t"/>
+          <a:bodyPr/>
           <a:lstStyle/>
           <a:p>
-            <a:pPr algn="l"/>
-            <a:endParaRPr lang="en-US"/>
+            <a:endParaRPr lang="ru-RU"/>
           </a:p>
         </p:txBody>
       </p:sp>
       <p:sp>
         <p:nvSpPr>
-          <p:cNvPr id="5" name="Rectangle 4">
-            <a:extLst>
-              <a:ext uri="{FF2B5EF4-FFF2-40B4-BE49-F238E27FC236}">
-                <a16:creationId xmlns:a16="http://schemas.microsoft.com/office/drawing/2014/main" id="{221AC2AA-AE36-4744-B185-DFACEA92ACA1}"/>
-              </a:ext>
-            </a:extLst>
-          </p:cNvPr>
+          <p:cNvPr id="201" name="badge1"/>
           <p:cNvSpPr/>
           <p:nvPr/>
         </p:nvSpPr>
         <p:spPr>
           <a:xfrm>
-            <a:off x="558800" y="2286000"/>
-            <a:ext cx="3581400" cy="635000"/>
-          </a:xfrm>
-          <a:prstGeom prst="rect">
+            <a:off x="711200" y="2463800"/>
+            <a:ext cx="431800" cy="431800"/>
+          </a:xfrm>
+          <a:prstGeom prst="ellipse">
             <a:avLst/>
           </a:prstGeom>
           <a:solidFill>
-            <a:srgbClr val="1F4E9B"/>
+            <a:srgbClr val="6C7A89"/>
           </a:solidFill>
-          <a:ln w="19050" cap="flat" cmpd="sng" algn="ctr">
-            <a:solidFill>
-              <a:srgbClr val="1E4D9B"/>
-            </a:solidFill>
-            <a:prstDash val="solid"/>
-            <a:miter lim="800000"/>
+          <a:ln>
+            <a:noFill/>
           </a:ln>
         </p:spPr>
-        <p:style>
-          <a:lnRef idx="2">
-            <a:schemeClr val="accent1">
-              <a:shade val="15000"/>
-            </a:schemeClr>
-          </a:lnRef>
-          <a:fillRef idx="1">
-            <a:schemeClr val="accent1"/>
-          </a:fillRef>
-          <a:effectRef idx="0">
-            <a:schemeClr val="accent1"/>
-          </a:effectRef>
-          <a:fontRef idx="minor">
-            <a:schemeClr val="lt1"/>
-          </a:fontRef>
-        </p:style>
         <p:txBody>
-          <a:bodyPr vertOverflow="clip" horzOverflow="clip" wrap="square" lIns="101600" tIns="25400" rIns="101600" bIns="25400" rtlCol="0" anchor="ctr" anchorCtr="0">
+          <a:bodyPr lIns="0" tIns="0" rIns="0" bIns="0" anchor="ctr">
             <a:noAutofit/>
           </a:bodyPr>
           <a:lstStyle/>
@@ -23652,27 +24547,21 @@
                 </a:solidFill>
                 <a:latin typeface="HSE Sans"/>
               </a:rPr>
-              <a:t>Speech Emotion Recognition (SER)</a:t>
+              <a:t>1</a:t>
             </a:r>
           </a:p>
         </p:txBody>
       </p:sp>
       <p:sp>
         <p:nvSpPr>
-          <p:cNvPr id="6" name="TextBox 5">
-            <a:extLst>
-              <a:ext uri="{FF2B5EF4-FFF2-40B4-BE49-F238E27FC236}">
-                <a16:creationId xmlns:a16="http://schemas.microsoft.com/office/drawing/2014/main" id="{30AE8516-91FB-3949-A256-958854349ABC}"/>
-              </a:ext>
-            </a:extLst>
-          </p:cNvPr>
-          <p:cNvSpPr txBox="1"/>
+          <p:cNvPr id="202" name="title1"/>
+          <p:cNvSpPr/>
           <p:nvPr/>
         </p:nvSpPr>
         <p:spPr>
           <a:xfrm>
-            <a:off x="724487" y="3094125"/>
-            <a:ext cx="3327400" cy="304800"/>
+            <a:off x="1270000" y="2463800"/>
+            <a:ext cx="1739900" cy="431800"/>
           </a:xfrm>
           <a:prstGeom prst="rect">
             <a:avLst/>
@@ -23680,45 +24569,33 @@
           <a:noFill/>
         </p:spPr>
         <p:txBody>
-          <a:bodyPr vertOverflow="overflow" vert="horz" wrap="square" lIns="25400" tIns="0" rIns="25400" bIns="0" rtlCol="0" anchor="t">
-            <a:noAutofit/>
+          <a:bodyPr lIns="0" tIns="0" rIns="0" bIns="0" anchor="ctr">
+            <a:normAutofit lnSpcReduction="10000"/>
           </a:bodyPr>
           <a:lstStyle/>
           <a:p>
-            <a:pPr algn="l"/>
-            <a:r>
-              <a:rPr lang="ru-RU" sz="1400" dirty="0">
-                <a:solidFill>
-                  <a:srgbClr val="1A1A1A"/>
-                </a:solidFill>
-              </a:rPr>
-              <a:t>Определение эмоций по речи</a:t>
-            </a:r>
-            <a:endParaRPr lang="en-US" sz="1400" dirty="0">
-              <a:solidFill>
-                <a:srgbClr val="1A1A1A"/>
-              </a:solidFill>
-              <a:latin typeface="HSE Sans" panose="02000000000000000000" pitchFamily="2" charset="0"/>
-            </a:endParaRPr>
+            <a:r>
+              <a:rPr lang="ru-RU" sz="1500" b="1" dirty="0">
+                <a:solidFill>
+                  <a:srgbClr val="6C7A89"/>
+                </a:solidFill>
+                <a:latin typeface="HSE Sans"/>
+              </a:rPr>
+              <a:t>Классические методы</a:t>
+            </a:r>
           </a:p>
         </p:txBody>
       </p:sp>
       <p:sp>
         <p:nvSpPr>
-          <p:cNvPr id="7" name="TextBox 6">
-            <a:extLst>
-              <a:ext uri="{FF2B5EF4-FFF2-40B4-BE49-F238E27FC236}">
-                <a16:creationId xmlns:a16="http://schemas.microsoft.com/office/drawing/2014/main" id="{3ECEF2E0-0E84-C846-BE7B-C27C284AEB33}"/>
-              </a:ext>
-            </a:extLst>
-          </p:cNvPr>
-          <p:cNvSpPr txBox="1"/>
+          <p:cNvPr id="203" name="body1"/>
+          <p:cNvSpPr/>
           <p:nvPr/>
         </p:nvSpPr>
         <p:spPr>
           <a:xfrm>
-            <a:off x="736600" y="3561076"/>
-            <a:ext cx="3225800" cy="2540000"/>
+            <a:off x="711200" y="3022600"/>
+            <a:ext cx="2273300" cy="2286000"/>
           </a:xfrm>
           <a:prstGeom prst="rect">
             <a:avLst/>
@@ -23726,164 +24603,131 @@
           <a:noFill/>
         </p:spPr>
         <p:txBody>
-          <a:bodyPr vertOverflow="overflow" vert="horz" wrap="square" lIns="0" tIns="0" rIns="0" bIns="0" rtlCol="0" anchor="t">
-            <a:noAutofit/>
+          <a:bodyPr lIns="0" tIns="0" rIns="0" bIns="0" anchor="t">
+            <a:normAutofit/>
           </a:bodyPr>
           <a:lstStyle/>
           <a:p>
-            <a:pPr algn="l"/>
-            <a:r>
-              <a:rPr lang="en-US" sz="1400" dirty="0">
+            <a:pPr marL="142875" indent="-142875">
+              <a:lnSpc>
+                <a:spcPct val="100000"/>
+              </a:lnSpc>
+              <a:spcBef>
+                <a:spcPts val="500"/>
+              </a:spcBef>
+              <a:buFont typeface="Arial"/>
+              <a:buChar char="•"/>
+            </a:pPr>
+            <a:r>
+              <a:rPr lang="ru-RU" sz="1300" dirty="0">
                 <a:solidFill>
                   <a:srgbClr val="1A1A1A"/>
                 </a:solidFill>
-                <a:latin typeface="HSE Sans"/>
-              </a:rPr>
-              <a:t>•  MFCC + SVM, </a:t>
-            </a:r>
-            <a:r>
-              <a:rPr lang="ru-RU" sz="1400" dirty="0">
+                <a:latin typeface="HSE Sans" panose="02000000000000000000" pitchFamily="2" charset="0"/>
+              </a:rPr>
+              <a:t>Ручной подбор признаков</a:t>
+            </a:r>
+          </a:p>
+          <a:p>
+            <a:pPr marL="142875" indent="-142875">
+              <a:lnSpc>
+                <a:spcPct val="100000"/>
+              </a:lnSpc>
+              <a:spcBef>
+                <a:spcPts val="500"/>
+              </a:spcBef>
+              <a:buFont typeface="Arial"/>
+              <a:buChar char="•"/>
+            </a:pPr>
+            <a:r>
+              <a:rPr lang="ru-RU" sz="1300" dirty="0">
                 <a:solidFill>
                   <a:srgbClr val="1A1A1A"/>
                 </a:solidFill>
                 <a:latin typeface="HSE Sans" panose="02000000000000000000" pitchFamily="2" charset="0"/>
               </a:rPr>
-              <a:t>лог-мел спектрограммы
-•  Трансформеры: </a:t>
-            </a:r>
-            <a:r>
-              <a:rPr lang="en-US" sz="1400" dirty="0">
+              <a:t>Просодика и MFCC, SVM</a:t>
+            </a:r>
+          </a:p>
+          <a:p>
+            <a:pPr marL="142875" indent="-142875">
+              <a:lnSpc>
+                <a:spcPct val="100000"/>
+              </a:lnSpc>
+              <a:spcBef>
+                <a:spcPts val="500"/>
+              </a:spcBef>
+              <a:buFont typeface="Arial"/>
+              <a:buChar char="•"/>
+            </a:pPr>
+            <a:r>
+              <a:rPr lang="ru-RU" sz="1300" dirty="0">
                 <a:solidFill>
                   <a:srgbClr val="1A1A1A"/>
                 </a:solidFill>
-                <a:latin typeface="HSE Sans"/>
-              </a:rPr>
-              <a:t>Wav2Vec 2.0, DistilHuBERT
-•  CNN </a:t>
-            </a:r>
-            <a:r>
-              <a:rPr lang="ru-RU" sz="1400" dirty="0">
-                <a:solidFill>
-                  <a:srgbClr val="1A1A1A"/>
-                </a:solidFill>
-                <a:latin typeface="HSE Sans" panose="02000000000000000000" pitchFamily="2" charset="0"/>
-              </a:rPr>
-              <a:t>на спектральных представлениях</a:t>
-            </a:r>
-            <a:endParaRPr lang="en-US" sz="1400" dirty="0">
-              <a:solidFill>
-                <a:srgbClr val="1A1A1A"/>
-              </a:solidFill>
-              <a:latin typeface="HSE Sans"/>
-            </a:endParaRPr>
+                <a:latin typeface="HSE Sans" panose="02000000000000000000" pitchFamily="2" charset="0"/>
+              </a:rPr>
+              <a:t>FER: каскады Хаара, HOG</a:t>
+            </a:r>
           </a:p>
         </p:txBody>
       </p:sp>
       <p:sp>
         <p:nvSpPr>
-          <p:cNvPr id="9" name="Rounded Rectangle 8">
-            <a:extLst>
-              <a:ext uri="{FF2B5EF4-FFF2-40B4-BE49-F238E27FC236}">
-                <a16:creationId xmlns:a16="http://schemas.microsoft.com/office/drawing/2014/main" id="{02C0AA11-27EF-D749-B825-49D92198B864}"/>
-              </a:ext>
-            </a:extLst>
-          </p:cNvPr>
+          <p:cNvPr id="204" name="stage2"/>
           <p:cNvSpPr/>
           <p:nvPr/>
         </p:nvSpPr>
         <p:spPr>
           <a:xfrm>
-            <a:off x="4305300" y="2286000"/>
-            <a:ext cx="3581400" cy="3810000"/>
+            <a:off x="3390900" y="2286000"/>
+            <a:ext cx="2578100" cy="3175000"/>
           </a:xfrm>
           <a:prstGeom prst="roundRect">
-            <a:avLst/>
+            <a:avLst>
+              <a:gd name="adj" fmla="val 6000"/>
+            </a:avLst>
           </a:prstGeom>
           <a:solidFill>
-            <a:srgbClr val="E8EEF7"/>
+            <a:srgbClr val="F4F6FA"/>
           </a:solidFill>
-          <a:ln w="19050" cap="flat" cmpd="sng" algn="ctr">
+          <a:ln w="12700">
             <a:solidFill>
-              <a:srgbClr val="2E7D5B"/>
+              <a:srgbClr val="2E86C1"/>
             </a:solidFill>
-            <a:prstDash val="solid"/>
-            <a:miter lim="800000"/>
           </a:ln>
         </p:spPr>
-        <p:style>
-          <a:lnRef idx="2">
-            <a:schemeClr val="accent1">
-              <a:shade val="15000"/>
-            </a:schemeClr>
-          </a:lnRef>
-          <a:fillRef idx="1">
-            <a:schemeClr val="accent1"/>
-          </a:fillRef>
-          <a:effectRef idx="0">
-            <a:schemeClr val="accent1"/>
-          </a:effectRef>
-          <a:fontRef idx="minor">
-            <a:schemeClr val="lt1"/>
-          </a:fontRef>
-        </p:style>
         <p:txBody>
-          <a:bodyPr vertOverflow="clip" horzOverflow="clip" rtlCol="0" anchor="t"/>
+          <a:bodyPr/>
           <a:lstStyle/>
           <a:p>
-            <a:pPr algn="l"/>
-            <a:endParaRPr lang="en-US"/>
+            <a:endParaRPr lang="ru-RU"/>
           </a:p>
         </p:txBody>
       </p:sp>
       <p:sp>
         <p:nvSpPr>
-          <p:cNvPr id="11" name="Rectangle 10">
-            <a:extLst>
-              <a:ext uri="{FF2B5EF4-FFF2-40B4-BE49-F238E27FC236}">
-                <a16:creationId xmlns:a16="http://schemas.microsoft.com/office/drawing/2014/main" id="{619576DE-F2DC-2048-AF8C-7C9DAABDA50D}"/>
-              </a:ext>
-            </a:extLst>
-          </p:cNvPr>
+          <p:cNvPr id="205" name="badge2"/>
           <p:cNvSpPr/>
           <p:nvPr/>
         </p:nvSpPr>
         <p:spPr>
           <a:xfrm>
-            <a:off x="4305300" y="2286000"/>
-            <a:ext cx="3581400" cy="635000"/>
-          </a:xfrm>
-          <a:prstGeom prst="rect">
+            <a:off x="3543300" y="2463800"/>
+            <a:ext cx="431800" cy="431800"/>
+          </a:xfrm>
+          <a:prstGeom prst="ellipse">
             <a:avLst/>
           </a:prstGeom>
           <a:solidFill>
-            <a:srgbClr val="2F7D5B"/>
+            <a:srgbClr val="2E86C1"/>
           </a:solidFill>
-          <a:ln w="19050" cap="flat" cmpd="sng" algn="ctr">
-            <a:solidFill>
-              <a:srgbClr val="2F7D5B"/>
-            </a:solidFill>
-            <a:prstDash val="solid"/>
-            <a:miter lim="800000"/>
+          <a:ln>
+            <a:noFill/>
           </a:ln>
         </p:spPr>
-        <p:style>
-          <a:lnRef idx="2">
-            <a:schemeClr val="accent1">
-              <a:shade val="15000"/>
-            </a:schemeClr>
-          </a:lnRef>
-          <a:fillRef idx="1">
-            <a:schemeClr val="accent1"/>
-          </a:fillRef>
-          <a:effectRef idx="0">
-            <a:schemeClr val="accent1"/>
-          </a:effectRef>
-          <a:fontRef idx="minor">
-            <a:schemeClr val="lt1"/>
-          </a:fontRef>
-        </p:style>
         <p:txBody>
-          <a:bodyPr vertOverflow="clip" horzOverflow="clip" wrap="square" lIns="101600" tIns="25400" rIns="101600" bIns="25400" rtlCol="0" anchor="ctr" anchorCtr="0">
+          <a:bodyPr lIns="0" tIns="0" rIns="0" bIns="0" anchor="ctr">
             <a:noAutofit/>
           </a:bodyPr>
           <a:lstStyle/>
@@ -23896,27 +24740,21 @@
                 </a:solidFill>
                 <a:latin typeface="HSE Sans"/>
               </a:rPr>
-              <a:t>Facial expression Emotion Recognition (FER)</a:t>
+              <a:t>2</a:t>
             </a:r>
           </a:p>
         </p:txBody>
       </p:sp>
       <p:sp>
         <p:nvSpPr>
-          <p:cNvPr id="12" name="TextBox 11">
-            <a:extLst>
-              <a:ext uri="{FF2B5EF4-FFF2-40B4-BE49-F238E27FC236}">
-                <a16:creationId xmlns:a16="http://schemas.microsoft.com/office/drawing/2014/main" id="{3BC742F3-F422-8C42-B0DF-A02566AD766C}"/>
-              </a:ext>
-            </a:extLst>
-          </p:cNvPr>
-          <p:cNvSpPr txBox="1"/>
+          <p:cNvPr id="206" name="title2"/>
+          <p:cNvSpPr/>
           <p:nvPr/>
         </p:nvSpPr>
         <p:spPr>
           <a:xfrm>
-            <a:off x="4432300" y="3066896"/>
-            <a:ext cx="3327400" cy="304800"/>
+            <a:off x="4102100" y="2463800"/>
+            <a:ext cx="1739900" cy="431800"/>
           </a:xfrm>
           <a:prstGeom prst="rect">
             <a:avLst/>
@@ -23924,46 +24762,33 @@
           <a:noFill/>
         </p:spPr>
         <p:txBody>
-          <a:bodyPr vertOverflow="overflow" vert="horz" wrap="square" lIns="25400" tIns="0" rIns="25400" bIns="0" rtlCol="0" anchor="t">
-            <a:noAutofit/>
+          <a:bodyPr lIns="0" tIns="0" rIns="0" bIns="0" anchor="ctr">
+            <a:normAutofit/>
           </a:bodyPr>
-          <a:lstStyle>
-            <a:defPPr>
-              <a:defRPr lang="en-RU"/>
-            </a:defPPr>
-            <a:lvl1pPr>
-              <a:defRPr sz="1400">
-                <a:solidFill>
-                  <a:srgbClr val="1A1A1A"/>
-                </a:solidFill>
-              </a:defRPr>
-            </a:lvl1pPr>
-          </a:lstStyle>
-          <a:p>
-            <a:r>
-              <a:rPr lang="ru-RU" dirty="0"/>
-              <a:t>Определение эмоций по выражению лиц</a:t>
-            </a:r>
-            <a:endParaRPr lang="en-US" dirty="0"/>
+          <a:lstStyle/>
+          <a:p>
+            <a:r>
+              <a:rPr lang="ru-RU" sz="1500" b="1" dirty="0">
+                <a:solidFill>
+                  <a:srgbClr val="2E86C1"/>
+                </a:solidFill>
+                <a:latin typeface="HSE Sans"/>
+              </a:rPr>
+              <a:t>Глубокое обучение</a:t>
+            </a:r>
           </a:p>
         </p:txBody>
       </p:sp>
       <p:sp>
         <p:nvSpPr>
-          <p:cNvPr id="13" name="TextBox 12">
-            <a:extLst>
-              <a:ext uri="{FF2B5EF4-FFF2-40B4-BE49-F238E27FC236}">
-                <a16:creationId xmlns:a16="http://schemas.microsoft.com/office/drawing/2014/main" id="{1A2BC867-2429-9F40-B79B-AF14B5B51709}"/>
-              </a:ext>
-            </a:extLst>
-          </p:cNvPr>
-          <p:cNvSpPr txBox="1"/>
+          <p:cNvPr id="207" name="body2"/>
+          <p:cNvSpPr/>
           <p:nvPr/>
         </p:nvSpPr>
         <p:spPr>
           <a:xfrm>
-            <a:off x="4483100" y="3561076"/>
-            <a:ext cx="3225800" cy="2540000"/>
+            <a:off x="3543300" y="3022600"/>
+            <a:ext cx="2273300" cy="2286000"/>
           </a:xfrm>
           <a:prstGeom prst="rect">
             <a:avLst/>
@@ -23971,221 +24796,131 @@
           <a:noFill/>
         </p:spPr>
         <p:txBody>
-          <a:bodyPr vertOverflow="overflow" vert="horz" wrap="square" lIns="0" tIns="0" rIns="0" bIns="0" rtlCol="0" anchor="t">
-            <a:noAutofit/>
+          <a:bodyPr lIns="0" tIns="0" rIns="0" bIns="0" anchor="t">
+            <a:normAutofit/>
           </a:bodyPr>
           <a:lstStyle/>
           <a:p>
-            <a:pPr algn="l"/>
-            <a:r>
-              <a:rPr lang="ru-RU" sz="1400" dirty="0">
+            <a:pPr marL="142875" indent="-142875">
+              <a:lnSpc>
+                <a:spcPct val="100000"/>
+              </a:lnSpc>
+              <a:spcBef>
+                <a:spcPts val="500"/>
+              </a:spcBef>
+              <a:buFont typeface="Arial"/>
+              <a:buChar char="•"/>
+            </a:pPr>
+            <a:r>
+              <a:rPr lang="ru-RU" sz="1300" dirty="0">
                 <a:solidFill>
                   <a:srgbClr val="1A1A1A"/>
                 </a:solidFill>
                 <a:latin typeface="HSE Sans" panose="02000000000000000000" pitchFamily="2" charset="0"/>
               </a:rPr>
-              <a:t>•  Детекция лиц: </a:t>
-            </a:r>
-            <a:r>
-              <a:rPr lang="en-US" sz="1400" dirty="0" err="1">
+              <a:t>CNN извлекают признаки автоматически</a:t>
+            </a:r>
+          </a:p>
+          <a:p>
+            <a:pPr marL="142875" indent="-142875">
+              <a:lnSpc>
+                <a:spcPct val="100000"/>
+              </a:lnSpc>
+              <a:spcBef>
+                <a:spcPts val="500"/>
+              </a:spcBef>
+              <a:buFont typeface="Arial"/>
+              <a:buChar char="•"/>
+            </a:pPr>
+            <a:r>
+              <a:rPr lang="ru-RU" sz="1300" dirty="0">
                 <a:solidFill>
                   <a:srgbClr val="1A1A1A"/>
                 </a:solidFill>
-                <a:latin typeface="HSE Sans"/>
-              </a:rPr>
-              <a:t>MediaPipe</a:t>
-            </a:r>
-            <a:r>
-              <a:rPr lang="en-US" sz="1400" dirty="0">
+                <a:latin typeface="HSE Sans" panose="02000000000000000000" pitchFamily="2" charset="0"/>
+              </a:rPr>
+              <a:t>Отказ от ручного проектирования</a:t>
+            </a:r>
+          </a:p>
+          <a:p>
+            <a:pPr marL="142875" indent="-142875">
+              <a:lnSpc>
+                <a:spcPct val="100000"/>
+              </a:lnSpc>
+              <a:spcBef>
+                <a:spcPts val="500"/>
+              </a:spcBef>
+              <a:buFont typeface="Arial"/>
+              <a:buChar char="•"/>
+            </a:pPr>
+            <a:r>
+              <a:rPr lang="ru-RU" sz="1300" dirty="0">
                 <a:solidFill>
                   <a:srgbClr val="1A1A1A"/>
                 </a:solidFill>
-                <a:latin typeface="HSE Sans"/>
-              </a:rPr>
-              <a:t> </a:t>
-            </a:r>
-            <a:r>
-              <a:rPr lang="en-US" sz="1400" dirty="0" err="1">
-                <a:solidFill>
-                  <a:srgbClr val="1A1A1A"/>
-                </a:solidFill>
-                <a:latin typeface="HSE Sans"/>
-              </a:rPr>
-              <a:t>BlazeFace</a:t>
-            </a:r>
-            <a:r>
-              <a:rPr lang="en-US" sz="1400" dirty="0">
-                <a:solidFill>
-                  <a:srgbClr val="1A1A1A"/>
-                </a:solidFill>
-                <a:latin typeface="HSE Sans"/>
-              </a:rPr>
-              <a:t>
-•  </a:t>
-            </a:r>
-            <a:r>
-              <a:rPr lang="ru-RU" sz="1400" dirty="0">
-                <a:solidFill>
-                  <a:srgbClr val="1A1A1A"/>
-                </a:solidFill>
-                <a:latin typeface="HSE Sans" panose="02000000000000000000" pitchFamily="2" charset="0"/>
-              </a:rPr>
-              <a:t>Лёгкие </a:t>
-            </a:r>
-            <a:r>
-              <a:rPr lang="ru-RU" sz="1400" dirty="0" err="1">
-                <a:solidFill>
-                  <a:srgbClr val="1A1A1A"/>
-                </a:solidFill>
-                <a:latin typeface="HSE Sans" panose="02000000000000000000" pitchFamily="2" charset="0"/>
-              </a:rPr>
-              <a:t>бэкбоны</a:t>
-            </a:r>
-            <a:r>
-              <a:rPr lang="ru-RU" sz="1400" dirty="0">
-                <a:solidFill>
-                  <a:srgbClr val="1A1A1A"/>
-                </a:solidFill>
-                <a:latin typeface="HSE Sans" panose="02000000000000000000" pitchFamily="2" charset="0"/>
-              </a:rPr>
-              <a:t>: </a:t>
-            </a:r>
-            <a:r>
-              <a:rPr lang="en-US" sz="1400" dirty="0">
-                <a:solidFill>
-                  <a:srgbClr val="1A1A1A"/>
-                </a:solidFill>
-                <a:latin typeface="HSE Sans"/>
-              </a:rPr>
-              <a:t>MobileNetV3, EmotiEffNet
-•  </a:t>
-            </a:r>
-            <a:r>
-              <a:rPr lang="ru-RU" sz="1400" dirty="0">
-                <a:solidFill>
-                  <a:srgbClr val="1A1A1A"/>
-                </a:solidFill>
-                <a:latin typeface="HSE Sans" panose="02000000000000000000" pitchFamily="2" charset="0"/>
-              </a:rPr>
-              <a:t>Темпоральные агрегаторы: </a:t>
-            </a:r>
-            <a:r>
-              <a:rPr lang="en-US" sz="1400" dirty="0">
-                <a:solidFill>
-                  <a:srgbClr val="1A1A1A"/>
-                </a:solidFill>
-                <a:latin typeface="HSE Sans"/>
-              </a:rPr>
-              <a:t>BiGRU, BiLSTM, TCN</a:t>
+                <a:latin typeface="HSE Sans" panose="02000000000000000000" pitchFamily="2" charset="0"/>
+              </a:rPr>
+              <a:t>Рост точности FER и SER</a:t>
             </a:r>
           </a:p>
         </p:txBody>
       </p:sp>
       <p:sp>
         <p:nvSpPr>
-          <p:cNvPr id="16" name="Rounded Rectangle 15">
-            <a:extLst>
-              <a:ext uri="{FF2B5EF4-FFF2-40B4-BE49-F238E27FC236}">
-                <a16:creationId xmlns:a16="http://schemas.microsoft.com/office/drawing/2014/main" id="{B3366672-C854-8746-BA8D-E6CE3CDC44B8}"/>
-              </a:ext>
-            </a:extLst>
-          </p:cNvPr>
+          <p:cNvPr id="208" name="stage3"/>
           <p:cNvSpPr/>
           <p:nvPr/>
         </p:nvSpPr>
         <p:spPr>
           <a:xfrm>
-            <a:off x="8051800" y="2286000"/>
-            <a:ext cx="3581400" cy="3810000"/>
+            <a:off x="6223000" y="2286000"/>
+            <a:ext cx="2578100" cy="3175000"/>
           </a:xfrm>
           <a:prstGeom prst="roundRect">
-            <a:avLst/>
+            <a:avLst>
+              <a:gd name="adj" fmla="val 6000"/>
+            </a:avLst>
           </a:prstGeom>
           <a:solidFill>
-            <a:srgbClr val="E8EEF7"/>
+            <a:srgbClr val="F4F6FA"/>
           </a:solidFill>
-          <a:ln w="19050" cap="flat" cmpd="sng" algn="ctr">
+          <a:ln w="12700">
             <a:solidFill>
-              <a:srgbClr val="102E5A"/>
+              <a:srgbClr val="8E44AD"/>
             </a:solidFill>
-            <a:prstDash val="solid"/>
-            <a:miter lim="800000"/>
           </a:ln>
         </p:spPr>
-        <p:style>
-          <a:lnRef idx="2">
-            <a:schemeClr val="accent1">
-              <a:shade val="15000"/>
-            </a:schemeClr>
-          </a:lnRef>
-          <a:fillRef idx="1">
-            <a:schemeClr val="accent1"/>
-          </a:fillRef>
-          <a:effectRef idx="0">
-            <a:schemeClr val="accent1"/>
-          </a:effectRef>
-          <a:fontRef idx="minor">
-            <a:schemeClr val="lt1"/>
-          </a:fontRef>
-        </p:style>
         <p:txBody>
-          <a:bodyPr vertOverflow="clip" horzOverflow="clip" rtlCol="0" anchor="t"/>
+          <a:bodyPr/>
           <a:lstStyle/>
           <a:p>
-            <a:pPr algn="l"/>
-            <a:endParaRPr lang="en-US"/>
+            <a:endParaRPr lang="ru-RU"/>
           </a:p>
         </p:txBody>
       </p:sp>
       <p:sp>
         <p:nvSpPr>
-          <p:cNvPr id="20" name="Rectangle 19">
-            <a:extLst>
-              <a:ext uri="{FF2B5EF4-FFF2-40B4-BE49-F238E27FC236}">
-                <a16:creationId xmlns:a16="http://schemas.microsoft.com/office/drawing/2014/main" id="{AE82708D-89D8-AD4C-9ADF-3E7F98B2C29E}"/>
-              </a:ext>
-            </a:extLst>
-          </p:cNvPr>
+          <p:cNvPr id="209" name="badge3"/>
           <p:cNvSpPr/>
           <p:nvPr/>
         </p:nvSpPr>
         <p:spPr>
           <a:xfrm>
-            <a:off x="8051800" y="2286000"/>
-            <a:ext cx="3581400" cy="635000"/>
-          </a:xfrm>
-          <a:prstGeom prst="rect">
+            <a:off x="6375400" y="2463800"/>
+            <a:ext cx="431800" cy="431800"/>
+          </a:xfrm>
+          <a:prstGeom prst="ellipse">
             <a:avLst/>
           </a:prstGeom>
           <a:solidFill>
-            <a:schemeClr val="tx1"/>
+            <a:srgbClr val="8E44AD"/>
           </a:solidFill>
-          <a:ln w="19050" cap="flat" cmpd="sng" algn="ctr">
-            <a:solidFill>
-              <a:schemeClr val="tx1"/>
-            </a:solidFill>
-            <a:prstDash val="solid"/>
-            <a:miter lim="800000"/>
+          <a:ln>
+            <a:noFill/>
           </a:ln>
         </p:spPr>
-        <p:style>
-          <a:lnRef idx="2">
-            <a:schemeClr val="accent1">
-              <a:shade val="15000"/>
-            </a:schemeClr>
-          </a:lnRef>
-          <a:fillRef idx="1">
-            <a:schemeClr val="accent1"/>
-          </a:fillRef>
-          <a:effectRef idx="0">
-            <a:schemeClr val="accent1"/>
-          </a:effectRef>
-          <a:fontRef idx="minor">
-            <a:schemeClr val="lt1"/>
-          </a:fontRef>
-        </p:style>
         <p:txBody>
-          <a:bodyPr vertOverflow="clip" horzOverflow="clip" wrap="square" lIns="101600" tIns="25400" rIns="101600" bIns="25400" rtlCol="0" anchor="ctr" anchorCtr="0">
+          <a:bodyPr lIns="0" tIns="0" rIns="0" bIns="0" anchor="ctr">
             <a:noAutofit/>
           </a:bodyPr>
           <a:lstStyle/>
@@ -24198,27 +24933,21 @@
                 </a:solidFill>
                 <a:latin typeface="HSE Sans"/>
               </a:rPr>
-              <a:t>Multimodal Emotion Recognition (MER)</a:t>
+              <a:t>3</a:t>
             </a:r>
           </a:p>
         </p:txBody>
       </p:sp>
       <p:sp>
         <p:nvSpPr>
-          <p:cNvPr id="21" name="TextBox 20">
-            <a:extLst>
-              <a:ext uri="{FF2B5EF4-FFF2-40B4-BE49-F238E27FC236}">
-                <a16:creationId xmlns:a16="http://schemas.microsoft.com/office/drawing/2014/main" id="{64F8AFC4-AF5F-BD47-920B-E2AB5FC0C112}"/>
-              </a:ext>
-            </a:extLst>
-          </p:cNvPr>
-          <p:cNvSpPr txBox="1"/>
+          <p:cNvPr id="210" name="title3"/>
+          <p:cNvSpPr/>
           <p:nvPr/>
         </p:nvSpPr>
         <p:spPr>
           <a:xfrm>
-            <a:off x="8178800" y="3066896"/>
-            <a:ext cx="3327400" cy="304800"/>
+            <a:off x="6934200" y="2463800"/>
+            <a:ext cx="1739900" cy="431800"/>
           </a:xfrm>
           <a:prstGeom prst="rect">
             <a:avLst/>
@@ -24226,54 +24955,33 @@
           <a:noFill/>
         </p:spPr>
         <p:txBody>
-          <a:bodyPr vertOverflow="overflow" vert="horz" wrap="square" lIns="25400" tIns="0" rIns="25400" bIns="0" rtlCol="0" anchor="t">
-            <a:noAutofit/>
+          <a:bodyPr lIns="0" tIns="0" rIns="0" bIns="0" anchor="ctr">
+            <a:normAutofit/>
           </a:bodyPr>
-          <a:lstStyle>
-            <a:defPPr>
-              <a:defRPr lang="en-RU"/>
-            </a:defPPr>
-            <a:lvl1pPr>
-              <a:defRPr sz="1400">
-                <a:solidFill>
-                  <a:srgbClr val="1A1A1A"/>
-                </a:solidFill>
-              </a:defRPr>
-            </a:lvl1pPr>
-          </a:lstStyle>
-          <a:p>
-            <a:r>
-              <a:rPr lang="ru-RU" dirty="0"/>
-              <a:t>Определение эмоций</a:t>
-            </a:r>
-            <a:r>
-              <a:rPr lang="en-US" dirty="0"/>
-              <a:t> </a:t>
-            </a:r>
-            <a:r>
-              <a:rPr lang="ru-RU" dirty="0"/>
-              <a:t>по двум и более модальностям </a:t>
-            </a:r>
-            <a:endParaRPr lang="en-US" dirty="0"/>
+          <a:lstStyle/>
+          <a:p>
+            <a:r>
+              <a:rPr lang="ru-RU" sz="1500" b="1" dirty="0">
+                <a:solidFill>
+                  <a:srgbClr val="8E44AD"/>
+                </a:solidFill>
+                <a:latin typeface="HSE Sans"/>
+              </a:rPr>
+              <a:t>SSL-трансформеры</a:t>
+            </a:r>
           </a:p>
         </p:txBody>
       </p:sp>
       <p:sp>
         <p:nvSpPr>
-          <p:cNvPr id="22" name="TextBox 21">
-            <a:extLst>
-              <a:ext uri="{FF2B5EF4-FFF2-40B4-BE49-F238E27FC236}">
-                <a16:creationId xmlns:a16="http://schemas.microsoft.com/office/drawing/2014/main" id="{3A0568C2-DBC8-814F-B1F1-615C9C1B2E5A}"/>
-              </a:ext>
-            </a:extLst>
-          </p:cNvPr>
-          <p:cNvSpPr txBox="1"/>
+          <p:cNvPr id="211" name="body3"/>
+          <p:cNvSpPr/>
           <p:nvPr/>
         </p:nvSpPr>
         <p:spPr>
           <a:xfrm>
-            <a:off x="8229600" y="3561076"/>
-            <a:ext cx="3225800" cy="2540000"/>
+            <a:off x="6375400" y="3022600"/>
+            <a:ext cx="2273300" cy="2286000"/>
           </a:xfrm>
           <a:prstGeom prst="rect">
             <a:avLst/>
@@ -24281,54 +24989,409 @@
           <a:noFill/>
         </p:spPr>
         <p:txBody>
-          <a:bodyPr vertOverflow="overflow" vert="horz" wrap="square" lIns="0" tIns="0" rIns="0" bIns="0" rtlCol="0" anchor="t">
+          <a:bodyPr lIns="0" tIns="0" rIns="0" bIns="0" anchor="t">
+            <a:normAutofit/>
+          </a:bodyPr>
+          <a:lstStyle/>
+          <a:p>
+            <a:pPr marL="142875" indent="-142875">
+              <a:lnSpc>
+                <a:spcPct val="100000"/>
+              </a:lnSpc>
+              <a:spcBef>
+                <a:spcPts val="500"/>
+              </a:spcBef>
+              <a:buFont typeface="Arial"/>
+              <a:buChar char="•"/>
+            </a:pPr>
+            <a:r>
+              <a:rPr lang="ru-RU" sz="1300" dirty="0">
+                <a:solidFill>
+                  <a:srgbClr val="1A1A1A"/>
+                </a:solidFill>
+                <a:latin typeface="HSE Sans" panose="02000000000000000000" pitchFamily="2" charset="0"/>
+              </a:rPr>
+              <a:t>Wav2Vec 2.0, DistilHuBERT</a:t>
+            </a:r>
+          </a:p>
+          <a:p>
+            <a:pPr marL="142875" indent="-142875">
+              <a:lnSpc>
+                <a:spcPct val="100000"/>
+              </a:lnSpc>
+              <a:spcBef>
+                <a:spcPts val="500"/>
+              </a:spcBef>
+              <a:buFont typeface="Arial"/>
+              <a:buChar char="•"/>
+            </a:pPr>
+            <a:r>
+              <a:rPr lang="ru-RU" sz="1300" dirty="0">
+                <a:solidFill>
+                  <a:srgbClr val="1A1A1A"/>
+                </a:solidFill>
+                <a:latin typeface="HSE Sans" panose="02000000000000000000" pitchFamily="2" charset="0"/>
+              </a:rPr>
+              <a:t>Предобучение на больших корпусах</a:t>
+            </a:r>
+          </a:p>
+          <a:p>
+            <a:pPr marL="142875" indent="-142875">
+              <a:lnSpc>
+                <a:spcPct val="100000"/>
+              </a:lnSpc>
+              <a:spcBef>
+                <a:spcPts val="500"/>
+              </a:spcBef>
+              <a:buFont typeface="Arial"/>
+              <a:buChar char="•"/>
+            </a:pPr>
+            <a:r>
+              <a:rPr lang="ru-RU" sz="1300" dirty="0">
+                <a:solidFill>
+                  <a:srgbClr val="1A1A1A"/>
+                </a:solidFill>
+                <a:latin typeface="HSE Sans" panose="02000000000000000000" pitchFamily="2" charset="0"/>
+              </a:rPr>
+              <a:t>Высокая точность, но тяжёлые</a:t>
+            </a:r>
+          </a:p>
+        </p:txBody>
+      </p:sp>
+      <p:sp>
+        <p:nvSpPr>
+          <p:cNvPr id="212" name="stage4"/>
+          <p:cNvSpPr/>
+          <p:nvPr/>
+        </p:nvSpPr>
+        <p:spPr>
+          <a:xfrm>
+            <a:off x="9055100" y="2286000"/>
+            <a:ext cx="2578100" cy="3175000"/>
+          </a:xfrm>
+          <a:prstGeom prst="roundRect">
+            <a:avLst>
+              <a:gd name="adj" fmla="val 6000"/>
+            </a:avLst>
+          </a:prstGeom>
+          <a:solidFill>
+            <a:srgbClr val="F4F6FA"/>
+          </a:solidFill>
+          <a:ln w="12700">
+            <a:solidFill>
+              <a:srgbClr val="16A085"/>
+            </a:solidFill>
+          </a:ln>
+        </p:spPr>
+        <p:txBody>
+          <a:bodyPr/>
+          <a:lstStyle/>
+          <a:p>
+            <a:endParaRPr lang="ru-RU"/>
+          </a:p>
+        </p:txBody>
+      </p:sp>
+      <p:sp>
+        <p:nvSpPr>
+          <p:cNvPr id="213" name="badge4"/>
+          <p:cNvSpPr/>
+          <p:nvPr/>
+        </p:nvSpPr>
+        <p:spPr>
+          <a:xfrm>
+            <a:off x="9207500" y="2463800"/>
+            <a:ext cx="431800" cy="431800"/>
+          </a:xfrm>
+          <a:prstGeom prst="ellipse">
+            <a:avLst/>
+          </a:prstGeom>
+          <a:solidFill>
+            <a:srgbClr val="16A085"/>
+          </a:solidFill>
+          <a:ln>
+            <a:noFill/>
+          </a:ln>
+        </p:spPr>
+        <p:txBody>
+          <a:bodyPr lIns="0" tIns="0" rIns="0" bIns="0" anchor="ctr">
             <a:noAutofit/>
           </a:bodyPr>
           <a:lstStyle/>
           <a:p>
-            <a:pPr algn="l"/>
+            <a:pPr algn="ctr"/>
+            <a:r>
+              <a:rPr lang="en-US" sz="1600" b="1" dirty="0">
+                <a:solidFill>
+                  <a:srgbClr val="FFFFFF"/>
+                </a:solidFill>
+                <a:latin typeface="HSE Sans"/>
+              </a:rPr>
+              <a:t>4</a:t>
+            </a:r>
+          </a:p>
+        </p:txBody>
+      </p:sp>
+      <p:sp>
+        <p:nvSpPr>
+          <p:cNvPr id="214" name="title4"/>
+          <p:cNvSpPr/>
+          <p:nvPr/>
+        </p:nvSpPr>
+        <p:spPr>
+          <a:xfrm>
+            <a:off x="9766300" y="2463800"/>
+            <a:ext cx="1739900" cy="431800"/>
+          </a:xfrm>
+          <a:prstGeom prst="rect">
+            <a:avLst/>
+          </a:prstGeom>
+          <a:noFill/>
+        </p:spPr>
+        <p:txBody>
+          <a:bodyPr lIns="0" tIns="0" rIns="0" bIns="0" anchor="ctr">
+            <a:normAutofit/>
+          </a:bodyPr>
+          <a:lstStyle/>
+          <a:p>
+            <a:r>
+              <a:rPr lang="ru-RU" sz="1500" b="1" dirty="0">
+                <a:solidFill>
+                  <a:srgbClr val="16A085"/>
+                </a:solidFill>
+                <a:latin typeface="HSE Sans"/>
+              </a:rPr>
+              <a:t>Мультимодальность</a:t>
+            </a:r>
+          </a:p>
+        </p:txBody>
+      </p:sp>
+      <p:sp>
+        <p:nvSpPr>
+          <p:cNvPr id="215" name="body4"/>
+          <p:cNvSpPr/>
+          <p:nvPr/>
+        </p:nvSpPr>
+        <p:spPr>
+          <a:xfrm>
+            <a:off x="9207500" y="3022600"/>
+            <a:ext cx="2273300" cy="2286000"/>
+          </a:xfrm>
+          <a:prstGeom prst="rect">
+            <a:avLst/>
+          </a:prstGeom>
+          <a:noFill/>
+        </p:spPr>
+        <p:txBody>
+          <a:bodyPr lIns="0" tIns="0" rIns="0" bIns="0" anchor="t">
+            <a:normAutofit/>
+          </a:bodyPr>
+          <a:lstStyle/>
+          <a:p>
+            <a:pPr marL="142875" indent="-142875">
+              <a:lnSpc>
+                <a:spcPct val="100000"/>
+              </a:lnSpc>
+              <a:spcBef>
+                <a:spcPts val="500"/>
+              </a:spcBef>
+              <a:buFont typeface="Arial"/>
+              <a:buChar char="•"/>
+            </a:pPr>
+            <a:r>
+              <a:rPr lang="ru-RU" sz="1300" dirty="0">
+                <a:solidFill>
+                  <a:srgbClr val="1A1A1A"/>
+                </a:solidFill>
+                <a:latin typeface="HSE Sans" panose="02000000000000000000" pitchFamily="2" charset="0"/>
+              </a:rPr>
+              <a:t>Объединение речи, мимики и текста (MER)</a:t>
+            </a:r>
+          </a:p>
+          <a:p>
+            <a:pPr marL="142875" indent="-142875">
+              <a:lnSpc>
+                <a:spcPct val="100000"/>
+              </a:lnSpc>
+              <a:spcBef>
+                <a:spcPts val="500"/>
+              </a:spcBef>
+              <a:buFont typeface="Arial"/>
+              <a:buChar char="•"/>
+            </a:pPr>
+            <a:r>
+              <a:rPr lang="ru-RU" sz="1300" dirty="0">
+                <a:solidFill>
+                  <a:srgbClr val="1A1A1A"/>
+                </a:solidFill>
+                <a:latin typeface="HSE Sans" panose="02000000000000000000" pitchFamily="2" charset="0"/>
+              </a:rPr>
+              <a:t>Стратегии слияния модальностей</a:t>
+            </a:r>
+          </a:p>
+          <a:p>
+            <a:pPr marL="142875" indent="-142875">
+              <a:lnSpc>
+                <a:spcPct val="100000"/>
+              </a:lnSpc>
+              <a:spcBef>
+                <a:spcPts val="500"/>
+              </a:spcBef>
+              <a:buFont typeface="Arial"/>
+              <a:buChar char="•"/>
+            </a:pPr>
+            <a:r>
+              <a:rPr lang="ru-RU" sz="1300" dirty="0">
+                <a:solidFill>
+                  <a:srgbClr val="1A1A1A"/>
+                </a:solidFill>
+                <a:latin typeface="HSE Sans" panose="02000000000000000000" pitchFamily="2" charset="0"/>
+              </a:rPr>
+              <a:t>Устойчивость к шуму одной из них</a:t>
+            </a:r>
+          </a:p>
+        </p:txBody>
+      </p:sp>
+      <p:sp>
+        <p:nvSpPr>
+          <p:cNvPr id="216" name="arr0"/>
+          <p:cNvSpPr/>
+          <p:nvPr/>
+        </p:nvSpPr>
+        <p:spPr>
+          <a:xfrm>
+            <a:off x="3162300" y="3721100"/>
+            <a:ext cx="203200" cy="304800"/>
+          </a:xfrm>
+          <a:prstGeom prst="rightArrow">
+            <a:avLst/>
+          </a:prstGeom>
+          <a:solidFill>
+            <a:srgbClr val="B0BAC9"/>
+          </a:solidFill>
+          <a:ln>
+            <a:noFill/>
+          </a:ln>
+        </p:spPr>
+        <p:txBody>
+          <a:bodyPr/>
+          <a:lstStyle/>
+          <a:p>
+            <a:endParaRPr lang="ru-RU"/>
+          </a:p>
+        </p:txBody>
+      </p:sp>
+      <p:sp>
+        <p:nvSpPr>
+          <p:cNvPr id="217" name="arr1"/>
+          <p:cNvSpPr/>
+          <p:nvPr/>
+        </p:nvSpPr>
+        <p:spPr>
+          <a:xfrm>
+            <a:off x="5994400" y="3721100"/>
+            <a:ext cx="203200" cy="304800"/>
+          </a:xfrm>
+          <a:prstGeom prst="rightArrow">
+            <a:avLst/>
+          </a:prstGeom>
+          <a:solidFill>
+            <a:srgbClr val="B0BAC9"/>
+          </a:solidFill>
+          <a:ln>
+            <a:noFill/>
+          </a:ln>
+        </p:spPr>
+        <p:txBody>
+          <a:bodyPr/>
+          <a:lstStyle/>
+          <a:p>
+            <a:endParaRPr lang="ru-RU"/>
+          </a:p>
+        </p:txBody>
+      </p:sp>
+      <p:sp>
+        <p:nvSpPr>
+          <p:cNvPr id="218" name="arr2"/>
+          <p:cNvSpPr/>
+          <p:nvPr/>
+        </p:nvSpPr>
+        <p:spPr>
+          <a:xfrm>
+            <a:off x="8826500" y="3721100"/>
+            <a:ext cx="203200" cy="304800"/>
+          </a:xfrm>
+          <a:prstGeom prst="rightArrow">
+            <a:avLst/>
+          </a:prstGeom>
+          <a:solidFill>
+            <a:srgbClr val="B0BAC9"/>
+          </a:solidFill>
+          <a:ln>
+            <a:noFill/>
+          </a:ln>
+        </p:spPr>
+        <p:txBody>
+          <a:bodyPr/>
+          <a:lstStyle/>
+          <a:p>
+            <a:endParaRPr lang="ru-RU"/>
+          </a:p>
+        </p:txBody>
+      </p:sp>
+      <p:sp>
+        <p:nvSpPr>
+          <p:cNvPr id="219" name="takeaway"/>
+          <p:cNvSpPr/>
+          <p:nvPr/>
+        </p:nvSpPr>
+        <p:spPr>
+          <a:xfrm>
+            <a:off x="558800" y="5740400"/>
+            <a:ext cx="11074400" cy="736600"/>
+          </a:xfrm>
+          <a:prstGeom prst="roundRect">
+            <a:avLst>
+              <a:gd name="adj" fmla="val 12000"/>
+            </a:avLst>
+          </a:prstGeom>
+          <a:solidFill>
+            <a:srgbClr val="0F2C68"/>
+          </a:solidFill>
+          <a:ln>
+            <a:noFill/>
+          </a:ln>
+        </p:spPr>
+        <p:txBody>
+          <a:bodyPr lIns="144000" tIns="0" rIns="144000" bIns="0" anchor="ctr">
+            <a:normAutofit/>
+          </a:bodyPr>
+          <a:lstStyle/>
+          <a:p>
+            <a:r>
+              <a:rPr lang="ru-RU" sz="1400" b="1" dirty="0">
+                <a:solidFill>
+                  <a:srgbClr val="FFFFFF"/>
+                </a:solidFill>
+                <a:latin typeface="HSE Sans"/>
+              </a:rPr>
+              <a:t>Вывод: </a:t>
+            </a:r>
             <a:r>
               <a:rPr lang="ru-RU" sz="1400" dirty="0">
                 <a:solidFill>
-                  <a:srgbClr val="1A1A1A"/>
-                </a:solidFill>
-                <a:latin typeface="HSE Sans" panose="02000000000000000000" pitchFamily="2" charset="0"/>
-              </a:rPr>
-              <a:t>•  Стратегии слияния модальностей
-•  Современные архитектуры для </a:t>
-            </a:r>
-            <a:r>
-              <a:rPr lang="en-US" sz="1400" dirty="0">
-                <a:solidFill>
-                  <a:srgbClr val="1A1A1A"/>
-                </a:solidFill>
-                <a:latin typeface="HSE Sans"/>
-              </a:rPr>
-              <a:t>IEMOCAP
-•  </a:t>
-            </a:r>
-            <a:r>
-              <a:rPr lang="ru-RU" sz="1400" dirty="0">
-                <a:solidFill>
-                  <a:srgbClr val="1A1A1A"/>
-                </a:solidFill>
-                <a:latin typeface="HSE Sans" panose="02000000000000000000" pitchFamily="2" charset="0"/>
-              </a:rPr>
-              <a:t>Тренд: лёгкие и динамические модели</a:t>
-            </a:r>
-            <a:endParaRPr lang="en-US" sz="1400" dirty="0">
-              <a:solidFill>
-                <a:srgbClr val="1A1A1A"/>
-              </a:solidFill>
-              <a:latin typeface="HSE Sans"/>
-            </a:endParaRPr>
+                  <a:srgbClr val="FFFFFF"/>
+                </a:solidFill>
+                <a:latin typeface="HSE Sans" panose="02000000000000000000" pitchFamily="2" charset="0"/>
+              </a:rPr>
+              <a:t>точные мультимодальные модели вычислительно тяжелы — отсюда потребность в лёгких, каскадных решениях для устройств с ограниченными ресурсами.</a:t>
+            </a:r>
           </a:p>
         </p:txBody>
       </p:sp>
     </p:spTree>
     <p:extLst>
       <p:ext uri="{BB962C8B-B14F-4D97-AF65-F5344CB8AC3E}">
-        <p14:creationId xmlns:p14="http://schemas.microsoft.com/office/powerpoint/2010/main" val="2838494851"/>
+        <p14:creationId xmlns:p14="http://schemas.microsoft.com/office/powerpoint/2010/main" val="3110176320"/>
       </p:ext>
     </p:extLst>
   </p:cSld>
@@ -24372,7 +25435,7 @@
         <p:spPr>
           <a:xfrm>
             <a:off x="666489" y="1160924"/>
-            <a:ext cx="5094599" cy="802343"/>
+            <a:ext cx="6100071" cy="802343"/>
           </a:xfrm>
           <a:prstGeom prst="rect">
             <a:avLst/>
@@ -24380,7 +25443,7 @@
         </p:spPr>
         <p:txBody>
           <a:bodyPr vert="horz" lIns="0" tIns="0" rIns="0" bIns="0" rtlCol="0" anchor="t">
-            <a:normAutofit/>
+            <a:normAutofit fontScale="92500"/>
           </a:bodyPr>
           <a:lstStyle>
             <a:lvl1pPr algn="l" defTabSz="914400" rtl="0" eaLnBrk="1" latinLnBrk="0" hangingPunct="1">
@@ -24404,8 +25467,56 @@
           <a:p>
             <a:r>
               <a:rPr lang="ru-RU" b="1" dirty="0"/>
-              <a:t>Датасеты и аугментация</a:t>
-            </a:r>
+              <a:t>Исследование предметной области</a:t>
+            </a:r>
+            <a:endParaRPr lang="en-US" b="1" dirty="0"/>
+          </a:p>
+          <a:p>
+            <a:pPr marL="0" marR="0" lvl="0" indent="0" algn="l" defTabSz="914400" rtl="0" eaLnBrk="1" fontAlgn="auto" latinLnBrk="0" hangingPunct="1">
+              <a:lnSpc>
+                <a:spcPct val="100000"/>
+              </a:lnSpc>
+              <a:spcBef>
+                <a:spcPts val="0"/>
+              </a:spcBef>
+              <a:spcAft>
+                <a:spcPts val="0"/>
+              </a:spcAft>
+              <a:buClrTx/>
+              <a:buSzTx/>
+              <a:buFontTx/>
+              <a:buNone/>
+              <a:tabLst/>
+              <a:defRPr/>
+            </a:pPr>
+            <a:r>
+              <a:rPr lang="ru-RU" sz="2000" dirty="0">
+                <a:solidFill>
+                  <a:srgbClr val="0F2C68"/>
+                </a:solidFill>
+                <a:latin typeface="Calibri" panose="020F0502020204030204"/>
+                <a:ea typeface="+mn-ea"/>
+                <a:cs typeface="+mn-cs"/>
+              </a:rPr>
+              <a:t>Виды определения эмоций по различным модальностям</a:t>
+            </a:r>
+            <a:endParaRPr kumimoji="0" lang="ru-RU" sz="2000" b="0" i="0" u="none" strike="noStrike" kern="1200" cap="none" spc="0" normalizeH="0" baseline="0" noProof="0" dirty="0">
+              <a:ln>
+                <a:noFill/>
+              </a:ln>
+              <a:solidFill>
+                <a:srgbClr val="0F2C68"/>
+              </a:solidFill>
+              <a:effectLst/>
+              <a:uLnTx/>
+              <a:uFillTx/>
+              <a:latin typeface="Calibri" panose="020F0502020204030204"/>
+              <a:ea typeface="+mn-ea"/>
+              <a:cs typeface="+mn-cs"/>
+            </a:endParaRPr>
+          </a:p>
+          <a:p>
+            <a:endParaRPr lang="ru-RU" b="1" dirty="0"/>
           </a:p>
         </p:txBody>
       </p:sp>
@@ -24807,11 +25918,7 @@
           </a:lstStyle>
           <a:p>
             <a:r>
-              <a:rPr lang="ru-RU" dirty="0">
-                <a:solidFill>
-                  <a:schemeClr val="tx1"/>
-                </a:solidFill>
-              </a:rPr>
+              <a:rPr lang="ru-RU" dirty="0"/>
               <a:t>Классификация выражений лиц с детектированием эмоций в речи</a:t>
             </a:r>
           </a:p>
@@ -25010,21 +26117,13 @@
           </a:lstStyle>
           <a:p>
             <a:r>
-              <a:rPr lang="ru-RU" dirty="0">
-                <a:solidFill>
-                  <a:schemeClr val="tx1"/>
-                </a:solidFill>
-              </a:rPr>
+              <a:rPr lang="ru-RU" dirty="0"/>
               <a:t>Канделов Дамир Русланович </a:t>
             </a:r>
           </a:p>
           <a:p>
             <a:r>
-              <a:rPr lang="ru-RU" dirty="0">
-                <a:solidFill>
-                  <a:schemeClr val="tx1"/>
-                </a:solidFill>
-              </a:rPr>
+              <a:rPr lang="ru-RU" dirty="0"/>
               <a:t>Группа: 22ПИ-1</a:t>
             </a:r>
           </a:p>
@@ -25046,8 +26145,8 @@
         </p:nvSpPr>
         <p:spPr bwMode="auto">
           <a:xfrm>
-            <a:off x="0" y="43934"/>
-            <a:ext cx="184731" cy="369332"/>
+            <a:off x="0" y="0"/>
+            <a:ext cx="12192000" cy="457200"/>
           </a:xfrm>
           <a:prstGeom prst="rect">
             <a:avLst/>
@@ -25101,207 +26200,10 @@
       </p:sp>
       <p:sp>
         <p:nvSpPr>
-          <p:cNvPr id="20" name="TextBox 19">
+          <p:cNvPr id="3" name="Rounded Rectangle 2">
             <a:extLst>
               <a:ext uri="{FF2B5EF4-FFF2-40B4-BE49-F238E27FC236}">
-                <a16:creationId xmlns:a16="http://schemas.microsoft.com/office/drawing/2014/main" id="{76D6BDA7-65B8-7248-A4BC-256B35919C76}"/>
-              </a:ext>
-            </a:extLst>
-          </p:cNvPr>
-          <p:cNvSpPr txBox="1"/>
-          <p:nvPr/>
-        </p:nvSpPr>
-        <p:spPr>
-          <a:xfrm>
-            <a:off x="896620" y="2514564"/>
-            <a:ext cx="3741217" cy="835783"/>
-          </a:xfrm>
-          <a:prstGeom prst="rect">
-            <a:avLst/>
-          </a:prstGeom>
-          <a:noFill/>
-        </p:spPr>
-        <p:txBody>
-          <a:bodyPr vertOverflow="overflow" vert="horz" wrap="square" lIns="0" tIns="0" rIns="0" bIns="0" rtlCol="0" anchor="t">
-            <a:noAutofit/>
-          </a:bodyPr>
-          <a:lstStyle/>
-          <a:p>
-            <a:pPr marL="285750" indent="-285750" algn="l">
-              <a:buFont typeface="Arial" panose="020B0604020202020204" pitchFamily="34" charset="0"/>
-              <a:buChar char="•"/>
-            </a:pPr>
-            <a:r>
-              <a:rPr lang="en-US" sz="1400" dirty="0">
-                <a:latin typeface="HSE Sans" panose="02000000000000000000" pitchFamily="2" charset="0"/>
-              </a:rPr>
-              <a:t>7356 </a:t>
-            </a:r>
-            <a:r>
-              <a:rPr lang="ru-RU" sz="1400" dirty="0">
-                <a:latin typeface="HSE Sans" panose="02000000000000000000" pitchFamily="2" charset="0"/>
-              </a:rPr>
-              <a:t>аудиовизуальных записей</a:t>
-            </a:r>
-            <a:endParaRPr lang="en-US" sz="1400" dirty="0">
-              <a:latin typeface="HSE Sans" panose="02000000000000000000" pitchFamily="2" charset="0"/>
-            </a:endParaRPr>
-          </a:p>
-          <a:p>
-            <a:pPr marL="285750" indent="-285750" algn="l">
-              <a:buFont typeface="Arial" panose="020B0604020202020204" pitchFamily="34" charset="0"/>
-              <a:buChar char="•"/>
-            </a:pPr>
-            <a:r>
-              <a:rPr lang="ru-RU" sz="1400" dirty="0">
-                <a:latin typeface="HSE Sans" panose="02000000000000000000" pitchFamily="2" charset="0"/>
-              </a:rPr>
-              <a:t>24 актёра, профессиональные актеры
-8 эмоций
-Источник для видео-модели и гейта</a:t>
-            </a:r>
-            <a:endParaRPr lang="en-US" sz="1400" dirty="0">
-              <a:latin typeface="HSE Sans"/>
-            </a:endParaRPr>
-          </a:p>
-        </p:txBody>
-      </p:sp>
-      <p:sp>
-        <p:nvSpPr>
-          <p:cNvPr id="26" name="TextBox 25">
-            <a:extLst>
-              <a:ext uri="{FF2B5EF4-FFF2-40B4-BE49-F238E27FC236}">
-                <a16:creationId xmlns:a16="http://schemas.microsoft.com/office/drawing/2014/main" id="{32E1C880-6384-B443-89F8-97AD2D2BE2EA}"/>
-              </a:ext>
-            </a:extLst>
-          </p:cNvPr>
-          <p:cNvSpPr txBox="1"/>
-          <p:nvPr/>
-        </p:nvSpPr>
-        <p:spPr>
-          <a:xfrm>
-            <a:off x="896620" y="3865981"/>
-            <a:ext cx="4684878" cy="786538"/>
-          </a:xfrm>
-          <a:prstGeom prst="rect">
-            <a:avLst/>
-          </a:prstGeom>
-          <a:noFill/>
-        </p:spPr>
-        <p:txBody>
-          <a:bodyPr vertOverflow="overflow" vert="horz" wrap="square" lIns="0" tIns="0" rIns="0" bIns="0" rtlCol="0" anchor="t">
-            <a:noAutofit/>
-          </a:bodyPr>
-          <a:lstStyle/>
-          <a:p>
-            <a:pPr marL="285750" indent="-285750" algn="l">
-              <a:buFont typeface="Arial" panose="020B0604020202020204" pitchFamily="34" charset="0"/>
-              <a:buChar char="•"/>
-            </a:pPr>
-            <a:r>
-              <a:rPr lang="ru-RU" sz="1300" dirty="0">
-                <a:latin typeface="HSE Sans" panose="02000000000000000000" pitchFamily="2" charset="0"/>
-              </a:rPr>
-              <a:t>7442 видео</a:t>
-            </a:r>
-          </a:p>
-          <a:p>
-            <a:pPr marL="285750" indent="-285750" algn="l">
-              <a:buFont typeface="Arial" panose="020B0604020202020204" pitchFamily="34" charset="0"/>
-              <a:buChar char="•"/>
-            </a:pPr>
-            <a:r>
-              <a:rPr lang="ru-RU" sz="1300" dirty="0">
-                <a:latin typeface="HSE Sans" panose="02000000000000000000" pitchFamily="2" charset="0"/>
-              </a:rPr>
-              <a:t>91 актёр, 48 мужчин и 43 женщины, добровольцы
-6 эмоций
-Расширяет аудио-данные для гейта</a:t>
-            </a:r>
-            <a:endParaRPr lang="en-US" sz="1300" dirty="0">
-              <a:latin typeface="HSE Sans"/>
-            </a:endParaRPr>
-          </a:p>
-        </p:txBody>
-      </p:sp>
-      <p:sp>
-        <p:nvSpPr>
-          <p:cNvPr id="30" name="TextBox 29">
-            <a:extLst>
-              <a:ext uri="{FF2B5EF4-FFF2-40B4-BE49-F238E27FC236}">
-                <a16:creationId xmlns:a16="http://schemas.microsoft.com/office/drawing/2014/main" id="{20EE0CBB-FAB3-6E47-A61F-20AA1A910F62}"/>
-              </a:ext>
-            </a:extLst>
-          </p:cNvPr>
-          <p:cNvSpPr txBox="1"/>
-          <p:nvPr/>
-        </p:nvSpPr>
-        <p:spPr>
-          <a:xfrm>
-            <a:off x="896620" y="5213503"/>
-            <a:ext cx="7003943" cy="887374"/>
-          </a:xfrm>
-          <a:prstGeom prst="rect">
-            <a:avLst/>
-          </a:prstGeom>
-          <a:noFill/>
-        </p:spPr>
-        <p:txBody>
-          <a:bodyPr vertOverflow="overflow" vert="horz" wrap="square" lIns="0" tIns="0" rIns="0" bIns="0" rtlCol="0" anchor="t">
-            <a:noAutofit/>
-          </a:bodyPr>
-          <a:lstStyle/>
-          <a:p>
-            <a:pPr marL="285750" indent="-285750" algn="l">
-              <a:buFont typeface="Arial" panose="020B0604020202020204" pitchFamily="34" charset="0"/>
-              <a:buChar char="•"/>
-            </a:pPr>
-            <a:r>
-              <a:rPr lang="ru-RU" sz="1300" dirty="0">
-                <a:latin typeface="HSE Sans" panose="02000000000000000000" pitchFamily="2" charset="0"/>
-              </a:rPr>
-              <a:t>12 часов записанных диалогов (5 сессий)</a:t>
-            </a:r>
-          </a:p>
-          <a:p>
-            <a:pPr marL="285750" indent="-285750" algn="l">
-              <a:buFont typeface="Arial" panose="020B0604020202020204" pitchFamily="34" charset="0"/>
-              <a:buChar char="•"/>
-            </a:pPr>
-            <a:r>
-              <a:rPr lang="ru-RU" sz="1300" dirty="0">
-                <a:latin typeface="HSE Sans" panose="02000000000000000000" pitchFamily="2" charset="0"/>
-              </a:rPr>
-              <a:t>Спонтанные импровизации и диалоги по заранее написанному сценарию</a:t>
-            </a:r>
-          </a:p>
-          <a:p>
-            <a:pPr marL="285750" indent="-285750" algn="l">
-              <a:buFont typeface="Arial" panose="020B0604020202020204" pitchFamily="34" charset="0"/>
-              <a:buChar char="•"/>
-            </a:pPr>
-            <a:r>
-              <a:rPr lang="ru-RU" sz="1300" dirty="0">
-                <a:latin typeface="HSE Sans" panose="02000000000000000000" pitchFamily="2" charset="0"/>
-              </a:rPr>
-              <a:t>10 актеров: 5 мужчин и 5 женщин
-4 класса: </a:t>
-            </a:r>
-            <a:r>
-              <a:rPr lang="en-US" sz="1300" dirty="0">
-                <a:latin typeface="HSE Sans"/>
-              </a:rPr>
-              <a:t>neutral, happy, sad, angry</a:t>
-            </a:r>
-          </a:p>
-        </p:txBody>
-      </p:sp>
-      <p:sp>
-        <p:nvSpPr>
-          <p:cNvPr id="31" name="Rounded Rectangle 30">
-            <a:extLst>
-              <a:ext uri="{FF2B5EF4-FFF2-40B4-BE49-F238E27FC236}">
-                <a16:creationId xmlns:a16="http://schemas.microsoft.com/office/drawing/2014/main" id="{DF8336E1-E670-3446-A244-8019EAFEEE85}"/>
+                <a16:creationId xmlns:a16="http://schemas.microsoft.com/office/drawing/2014/main" id="{1B1BC534-618A-0E4F-A8FA-BED4A06AFBCD}"/>
               </a:ext>
             </a:extLst>
           </p:cNvPr>
@@ -25310,18 +26212,18 @@
         </p:nvSpPr>
         <p:spPr>
           <a:xfrm>
-            <a:off x="7975600" y="1905000"/>
-            <a:ext cx="3810000" cy="4546600"/>
+            <a:off x="558800" y="2286000"/>
+            <a:ext cx="3581400" cy="3810000"/>
           </a:xfrm>
           <a:prstGeom prst="roundRect">
             <a:avLst/>
           </a:prstGeom>
           <a:solidFill>
-            <a:srgbClr val="F4F7FC"/>
+            <a:srgbClr val="E8EEF7"/>
           </a:solidFill>
-          <a:ln w="12700" cap="flat" cmpd="sng" algn="ctr">
+          <a:ln w="19050" cap="flat" cmpd="sng" algn="ctr">
             <a:solidFill>
-              <a:srgbClr val="2E7D5B"/>
+              <a:srgbClr val="1F4E9B"/>
             </a:solidFill>
             <a:prstDash val="solid"/>
             <a:miter lim="800000"/>
@@ -25348,20 +26250,82 @@
           <a:lstStyle/>
           <a:p>
             <a:pPr algn="l"/>
-            <a:endParaRPr lang="en-US">
-              <a:solidFill>
-                <a:schemeClr val="tx1"/>
-              </a:solidFill>
-            </a:endParaRPr>
+            <a:endParaRPr lang="en-US"/>
           </a:p>
         </p:txBody>
       </p:sp>
       <p:sp>
         <p:nvSpPr>
-          <p:cNvPr id="32" name="TextBox 31">
+          <p:cNvPr id="5" name="Rectangle 4">
             <a:extLst>
               <a:ext uri="{FF2B5EF4-FFF2-40B4-BE49-F238E27FC236}">
-                <a16:creationId xmlns:a16="http://schemas.microsoft.com/office/drawing/2014/main" id="{7281090A-D17C-A74C-A759-4648FBD0CA8F}"/>
+                <a16:creationId xmlns:a16="http://schemas.microsoft.com/office/drawing/2014/main" id="{221AC2AA-AE36-4744-B185-DFACEA92ACA1}"/>
+              </a:ext>
+            </a:extLst>
+          </p:cNvPr>
+          <p:cNvSpPr/>
+          <p:nvPr/>
+        </p:nvSpPr>
+        <p:spPr>
+          <a:xfrm>
+            <a:off x="558800" y="2286000"/>
+            <a:ext cx="3581400" cy="635000"/>
+          </a:xfrm>
+          <a:prstGeom prst="rect">
+            <a:avLst/>
+          </a:prstGeom>
+          <a:solidFill>
+            <a:srgbClr val="1F4E9B"/>
+          </a:solidFill>
+          <a:ln w="19050" cap="flat" cmpd="sng" algn="ctr">
+            <a:solidFill>
+              <a:srgbClr val="1E4D9B"/>
+            </a:solidFill>
+            <a:prstDash val="solid"/>
+            <a:miter lim="800000"/>
+          </a:ln>
+        </p:spPr>
+        <p:style>
+          <a:lnRef idx="2">
+            <a:schemeClr val="accent1">
+              <a:shade val="15000"/>
+            </a:schemeClr>
+          </a:lnRef>
+          <a:fillRef idx="1">
+            <a:schemeClr val="accent1"/>
+          </a:fillRef>
+          <a:effectRef idx="0">
+            <a:schemeClr val="accent1"/>
+          </a:effectRef>
+          <a:fontRef idx="minor">
+            <a:schemeClr val="lt1"/>
+          </a:fontRef>
+        </p:style>
+        <p:txBody>
+          <a:bodyPr vertOverflow="clip" horzOverflow="clip" wrap="square" lIns="101600" tIns="25400" rIns="101600" bIns="25400" rtlCol="0" anchor="ctr" anchorCtr="0">
+            <a:noAutofit/>
+          </a:bodyPr>
+          <a:lstStyle/>
+          <a:p>
+            <a:pPr algn="ctr"/>
+            <a:r>
+              <a:rPr lang="en-US" sz="1600" b="1" dirty="0">
+                <a:solidFill>
+                  <a:srgbClr val="FFFFFF"/>
+                </a:solidFill>
+                <a:latin typeface="HSE Sans"/>
+              </a:rPr>
+              <a:t>Speech Emotion Recognition (SER)</a:t>
+            </a:r>
+          </a:p>
+        </p:txBody>
+      </p:sp>
+      <p:sp>
+        <p:nvSpPr>
+          <p:cNvPr id="6" name="TextBox 5">
+            <a:extLst>
+              <a:ext uri="{FF2B5EF4-FFF2-40B4-BE49-F238E27FC236}">
+                <a16:creationId xmlns:a16="http://schemas.microsoft.com/office/drawing/2014/main" id="{30AE8516-91FB-3949-A256-958854349ABC}"/>
               </a:ext>
             </a:extLst>
           </p:cNvPr>
@@ -25370,8 +26334,8 @@
         </p:nvSpPr>
         <p:spPr>
           <a:xfrm>
-            <a:off x="8077200" y="1981200"/>
-            <a:ext cx="3606800" cy="635000"/>
+            <a:off x="724487" y="3094125"/>
+            <a:ext cx="3327400" cy="304800"/>
           </a:xfrm>
           <a:prstGeom prst="rect">
             <a:avLst/>
@@ -25379,486 +26343,26 @@
           <a:noFill/>
         </p:spPr>
         <p:txBody>
-          <a:bodyPr vertOverflow="overflow" vert="horz" wrap="square" lIns="0" tIns="0" rIns="0" bIns="0" rtlCol="0" anchor="ctr" anchorCtr="0">
+          <a:bodyPr vertOverflow="overflow" vert="horz" wrap="square" lIns="25400" tIns="0" rIns="25400" bIns="0" rtlCol="0" anchor="t">
             <a:noAutofit/>
           </a:bodyPr>
           <a:lstStyle/>
           <a:p>
-            <a:pPr algn="ctr"/>
-            <a:r>
-              <a:rPr lang="ru-RU" sz="1300" b="1" dirty="0">
-                <a:latin typeface="HSE Sans" panose="02000000000000000000" pitchFamily="2" charset="0"/>
-              </a:rPr>
-              <a:t>Офлайн-аугментации (</a:t>
-            </a:r>
-            <a:r>
-              <a:rPr lang="en-US" sz="1300" b="1" dirty="0">
-                <a:latin typeface="HSE Sans"/>
-              </a:rPr>
-              <a:t>K=3)</a:t>
-            </a:r>
-          </a:p>
-        </p:txBody>
-      </p:sp>
-      <p:sp>
-        <p:nvSpPr>
-          <p:cNvPr id="33" name="TextBox 32">
-            <a:extLst>
-              <a:ext uri="{FF2B5EF4-FFF2-40B4-BE49-F238E27FC236}">
-                <a16:creationId xmlns:a16="http://schemas.microsoft.com/office/drawing/2014/main" id="{66CF86BB-2374-3B46-91C8-DD23FE574D02}"/>
-              </a:ext>
-            </a:extLst>
-          </p:cNvPr>
-          <p:cNvSpPr txBox="1"/>
-          <p:nvPr/>
-        </p:nvSpPr>
-        <p:spPr>
-          <a:xfrm>
-            <a:off x="8140700" y="2579625"/>
-            <a:ext cx="3479800" cy="1498600"/>
-          </a:xfrm>
-          <a:prstGeom prst="rect">
-            <a:avLst/>
-          </a:prstGeom>
-          <a:noFill/>
-        </p:spPr>
-        <p:txBody>
-          <a:bodyPr vertOverflow="overflow" vert="horz" wrap="square" lIns="0" tIns="0" rIns="0" bIns="0" rtlCol="0" anchor="t">
-            <a:noAutofit/>
-          </a:bodyPr>
-          <a:lstStyle/>
-          <a:p>
-            <a:pPr marL="0" indent="0">
-              <a:buNone/>
-            </a:pPr>
-            <a:r>
-              <a:rPr lang="ru-RU" sz="1300" b="1" dirty="0">
-                <a:solidFill>
-                  <a:srgbClr val="1F4E9B"/>
-                </a:solidFill>
-                <a:latin typeface="HSE Sans" panose="02000000000000000000" pitchFamily="2" charset="0"/>
-              </a:rPr>
-              <a:t>Аудио:</a:t>
-            </a:r>
-          </a:p>
-          <a:p>
-            <a:pPr marL="0" indent="0">
-              <a:buNone/>
-            </a:pPr>
-            <a:endParaRPr lang="ru-RU" sz="800" b="1" dirty="0">
+            <a:pPr algn="l"/>
+            <a:r>
+              <a:rPr lang="ru-RU" sz="1400" dirty="0">
+                <a:solidFill>
+                  <a:srgbClr val="1A1A1A"/>
+                </a:solidFill>
+              </a:rPr>
+              <a:t>Определение эмоций по речи</a:t>
+            </a:r>
+            <a:endParaRPr lang="en-US" sz="1400" dirty="0">
               <a:solidFill>
-                <a:srgbClr val="1F4E9B"/>
+                <a:srgbClr val="1A1A1A"/>
               </a:solidFill>
               <a:latin typeface="HSE Sans" panose="02000000000000000000" pitchFamily="2" charset="0"/>
             </a:endParaRPr>
-          </a:p>
-          <a:p>
-            <a:pPr marL="171450" indent="-171450">
-              <a:lnSpc>
-                <a:spcPts val="1250"/>
-              </a:lnSpc>
-              <a:spcAft>
-                <a:spcPts val="300"/>
-              </a:spcAft>
-              <a:buFont typeface="Arial"/>
-              <a:buChar char="•"/>
-            </a:pPr>
-            <a:r>
-              <a:rPr lang="en-US" sz="1100" b="1" dirty="0">
-                <a:solidFill>
-                  <a:srgbClr val="1A1A1A"/>
-                </a:solidFill>
-                <a:latin typeface="HSE Sans" panose="02000000000000000000" pitchFamily="2" charset="0"/>
-              </a:rPr>
-              <a:t>AddGaussianSNR</a:t>
-            </a:r>
-            <a:r>
-              <a:rPr lang="ru-RU" sz="1100" dirty="0">
-                <a:solidFill>
-                  <a:srgbClr val="1A1A1A"/>
-                </a:solidFill>
-                <a:latin typeface="HSE Sans" panose="02000000000000000000" pitchFamily="2" charset="0"/>
-              </a:rPr>
-              <a:t> — гауссовский шум, SNR 5–25 дБ</a:t>
-            </a:r>
-          </a:p>
-          <a:p>
-            <a:pPr marL="171450" indent="-171450">
-              <a:lnSpc>
-                <a:spcPts val="1250"/>
-              </a:lnSpc>
-              <a:spcAft>
-                <a:spcPts val="300"/>
-              </a:spcAft>
-              <a:buFont typeface="Arial"/>
-              <a:buChar char="•"/>
-            </a:pPr>
-            <a:r>
-              <a:rPr lang="en-US" sz="1100" b="1" dirty="0">
-                <a:solidFill>
-                  <a:srgbClr val="1A1A1A"/>
-                </a:solidFill>
-                <a:latin typeface="HSE Sans" panose="02000000000000000000" pitchFamily="2" charset="0"/>
-              </a:rPr>
-              <a:t>Shift</a:t>
-            </a:r>
-            <a:r>
-              <a:rPr lang="ru-RU" sz="1100" dirty="0">
-                <a:solidFill>
-                  <a:srgbClr val="1A1A1A"/>
-                </a:solidFill>
-                <a:latin typeface="HSE Sans" panose="02000000000000000000" pitchFamily="2" charset="0"/>
-              </a:rPr>
-              <a:t> — временной сдвиг ±1 с</a:t>
-            </a:r>
-          </a:p>
-          <a:p>
-            <a:pPr marL="171450" indent="-171450">
-              <a:lnSpc>
-                <a:spcPts val="1250"/>
-              </a:lnSpc>
-              <a:spcAft>
-                <a:spcPts val="300"/>
-              </a:spcAft>
-              <a:buFont typeface="Arial"/>
-              <a:buChar char="•"/>
-            </a:pPr>
-            <a:r>
-              <a:rPr lang="en-US" sz="1100" b="1" dirty="0">
-                <a:solidFill>
-                  <a:srgbClr val="1A1A1A"/>
-                </a:solidFill>
-                <a:latin typeface="HSE Sans" panose="02000000000000000000" pitchFamily="2" charset="0"/>
-              </a:rPr>
-              <a:t>Gain</a:t>
-            </a:r>
-            <a:r>
-              <a:rPr lang="ru-RU" sz="1100" dirty="0">
-                <a:solidFill>
-                  <a:srgbClr val="1A1A1A"/>
-                </a:solidFill>
-                <a:latin typeface="HSE Sans" panose="02000000000000000000" pitchFamily="2" charset="0"/>
-              </a:rPr>
-              <a:t> — громкость −9…+6 дБ</a:t>
-            </a:r>
-          </a:p>
-          <a:p>
-            <a:pPr marL="171450" indent="-171450">
-              <a:lnSpc>
-                <a:spcPts val="1250"/>
-              </a:lnSpc>
-              <a:spcAft>
-                <a:spcPts val="300"/>
-              </a:spcAft>
-              <a:buFont typeface="Arial"/>
-              <a:buChar char="•"/>
-            </a:pPr>
-            <a:r>
-              <a:rPr lang="en-US" sz="1100" b="1" dirty="0">
-                <a:solidFill>
-                  <a:srgbClr val="1A1A1A"/>
-                </a:solidFill>
-                <a:latin typeface="HSE Sans" panose="02000000000000000000" pitchFamily="2" charset="0"/>
-              </a:rPr>
-              <a:t>TimeStretch</a:t>
-            </a:r>
-            <a:r>
-              <a:rPr lang="ru-RU" sz="1100" dirty="0">
-                <a:solidFill>
-                  <a:srgbClr val="1A1A1A"/>
-                </a:solidFill>
-                <a:latin typeface="HSE Sans" panose="02000000000000000000" pitchFamily="2" charset="0"/>
-              </a:rPr>
-              <a:t> — растяжение/сжатие ×0,9–1,1</a:t>
-            </a:r>
-          </a:p>
-          <a:p>
-            <a:pPr marL="171450" indent="-171450">
-              <a:lnSpc>
-                <a:spcPts val="1250"/>
-              </a:lnSpc>
-              <a:spcAft>
-                <a:spcPts val="300"/>
-              </a:spcAft>
-              <a:buFont typeface="Arial"/>
-              <a:buChar char="•"/>
-            </a:pPr>
-            <a:r>
-              <a:rPr lang="en-US" sz="1100" b="1" dirty="0">
-                <a:solidFill>
-                  <a:srgbClr val="1A1A1A"/>
-                </a:solidFill>
-                <a:latin typeface="HSE Sans" panose="02000000000000000000" pitchFamily="2" charset="0"/>
-              </a:rPr>
-              <a:t>PitchShift</a:t>
-            </a:r>
-            <a:r>
-              <a:rPr lang="ru-RU" sz="1100" dirty="0">
-                <a:solidFill>
-                  <a:srgbClr val="1A1A1A"/>
-                </a:solidFill>
-                <a:latin typeface="HSE Sans" panose="02000000000000000000" pitchFamily="2" charset="0"/>
-              </a:rPr>
-              <a:t> — сдвиг тона ±2 полутона</a:t>
-            </a:r>
-          </a:p>
-        </p:txBody>
-      </p:sp>
-      <p:sp>
-        <p:nvSpPr>
-          <p:cNvPr id="34" name="TextBox 33">
-            <a:extLst>
-              <a:ext uri="{FF2B5EF4-FFF2-40B4-BE49-F238E27FC236}">
-                <a16:creationId xmlns:a16="http://schemas.microsoft.com/office/drawing/2014/main" id="{A6AB03B8-4D23-2041-9F3A-FAD9A5663AF5}"/>
-              </a:ext>
-            </a:extLst>
-          </p:cNvPr>
-          <p:cNvSpPr txBox="1"/>
-          <p:nvPr/>
-        </p:nvSpPr>
-        <p:spPr>
-          <a:xfrm>
-            <a:off x="8153400" y="4279925"/>
-            <a:ext cx="3479800" cy="1905000"/>
-          </a:xfrm>
-          <a:prstGeom prst="rect">
-            <a:avLst/>
-          </a:prstGeom>
-          <a:noFill/>
-        </p:spPr>
-        <p:txBody>
-          <a:bodyPr vertOverflow="overflow" vert="horz" wrap="square" lIns="0" tIns="0" rIns="0" bIns="0" rtlCol="0" anchor="t">
-            <a:noAutofit/>
-          </a:bodyPr>
-          <a:lstStyle/>
-          <a:p>
-            <a:pPr marL="0" indent="0">
-              <a:buNone/>
-            </a:pPr>
-            <a:r>
-              <a:rPr lang="ru-RU" sz="1300" b="1" dirty="0">
-                <a:solidFill>
-                  <a:srgbClr val="2E7D5B"/>
-                </a:solidFill>
-                <a:latin typeface="HSE Sans" panose="02000000000000000000" pitchFamily="2" charset="0"/>
-              </a:rPr>
-              <a:t>Видео:</a:t>
-            </a:r>
-          </a:p>
-          <a:p>
-            <a:pPr marL="0" indent="0">
-              <a:buNone/>
-            </a:pPr>
-            <a:endParaRPr lang="ru-RU" sz="800" b="1" dirty="0">
-              <a:solidFill>
-                <a:srgbClr val="2E7D5B"/>
-              </a:solidFill>
-              <a:latin typeface="HSE Sans" panose="02000000000000000000" pitchFamily="2" charset="0"/>
-            </a:endParaRPr>
-          </a:p>
-          <a:p>
-            <a:pPr marL="171450" indent="-171450">
-              <a:lnSpc>
-                <a:spcPts val="1250"/>
-              </a:lnSpc>
-              <a:spcAft>
-                <a:spcPts val="300"/>
-              </a:spcAft>
-              <a:buFont typeface="Arial"/>
-              <a:buChar char="•"/>
-            </a:pPr>
-            <a:r>
-              <a:rPr lang="en-US" sz="1100" b="1" dirty="0">
-                <a:solidFill>
-                  <a:srgbClr val="1A1A1A"/>
-                </a:solidFill>
-                <a:latin typeface="HSE Sans" panose="02000000000000000000" pitchFamily="2" charset="0"/>
-              </a:rPr>
-              <a:t>RandomResizedCrop</a:t>
-            </a:r>
-            <a:r>
-              <a:rPr lang="ru-RU" sz="1100" dirty="0">
-                <a:solidFill>
-                  <a:srgbClr val="1A1A1A"/>
-                </a:solidFill>
-                <a:latin typeface="HSE Sans" panose="02000000000000000000" pitchFamily="2" charset="0"/>
-              </a:rPr>
-              <a:t> — случайная обрезка, масштаб 0,85–1,0</a:t>
-            </a:r>
-          </a:p>
-          <a:p>
-            <a:pPr marL="171450" indent="-171450">
-              <a:lnSpc>
-                <a:spcPts val="1250"/>
-              </a:lnSpc>
-              <a:spcAft>
-                <a:spcPts val="300"/>
-              </a:spcAft>
-              <a:buFont typeface="Arial"/>
-              <a:buChar char="•"/>
-            </a:pPr>
-            <a:r>
-              <a:rPr lang="en-US" sz="1100" b="1" dirty="0">
-                <a:solidFill>
-                  <a:srgbClr val="1A1A1A"/>
-                </a:solidFill>
-                <a:latin typeface="HSE Sans" panose="02000000000000000000" pitchFamily="2" charset="0"/>
-              </a:rPr>
-              <a:t>HFlip</a:t>
-            </a:r>
-            <a:r>
-              <a:rPr lang="ru-RU" sz="1100" dirty="0">
-                <a:solidFill>
-                  <a:srgbClr val="1A1A1A"/>
-                </a:solidFill>
-                <a:latin typeface="HSE Sans" panose="02000000000000000000" pitchFamily="2" charset="0"/>
-              </a:rPr>
-              <a:t> — зеркальное отражение</a:t>
-            </a:r>
-          </a:p>
-          <a:p>
-            <a:pPr marL="171450" indent="-171450">
-              <a:lnSpc>
-                <a:spcPts val="1250"/>
-              </a:lnSpc>
-              <a:spcAft>
-                <a:spcPts val="300"/>
-              </a:spcAft>
-              <a:buFont typeface="Arial"/>
-              <a:buChar char="•"/>
-            </a:pPr>
-            <a:r>
-              <a:rPr lang="en-US" sz="1100" b="1" dirty="0">
-                <a:solidFill>
-                  <a:srgbClr val="1A1A1A"/>
-                </a:solidFill>
-                <a:latin typeface="HSE Sans" panose="02000000000000000000" pitchFamily="2" charset="0"/>
-              </a:rPr>
-              <a:t>ColorJitter</a:t>
-            </a:r>
-            <a:r>
-              <a:rPr lang="ru-RU" sz="1100" dirty="0">
-                <a:solidFill>
-                  <a:srgbClr val="1A1A1A"/>
-                </a:solidFill>
-                <a:latin typeface="HSE Sans" panose="02000000000000000000" pitchFamily="2" charset="0"/>
-              </a:rPr>
-              <a:t> — яркость / контраст / насыщенность</a:t>
-            </a:r>
-          </a:p>
-          <a:p>
-            <a:pPr marL="171450" indent="-171450">
-              <a:lnSpc>
-                <a:spcPts val="1250"/>
-              </a:lnSpc>
-              <a:spcAft>
-                <a:spcPts val="300"/>
-              </a:spcAft>
-              <a:buFont typeface="Arial"/>
-              <a:buChar char="•"/>
-            </a:pPr>
-            <a:r>
-              <a:rPr lang="en-US" sz="1100" b="1" dirty="0">
-                <a:solidFill>
-                  <a:srgbClr val="1A1A1A"/>
-                </a:solidFill>
-                <a:latin typeface="HSE Sans" panose="02000000000000000000" pitchFamily="2" charset="0"/>
-              </a:rPr>
-              <a:t>GaussianBlur</a:t>
-            </a:r>
-            <a:r>
-              <a:rPr lang="ru-RU" sz="1100" dirty="0">
-                <a:solidFill>
-                  <a:srgbClr val="1A1A1A"/>
-                </a:solidFill>
-                <a:latin typeface="HSE Sans" panose="02000000000000000000" pitchFamily="2" charset="0"/>
-              </a:rPr>
-              <a:t> — размытие по Гауссу</a:t>
-            </a:r>
-          </a:p>
-          <a:p>
-            <a:pPr marL="171450" indent="-171450">
-              <a:lnSpc>
-                <a:spcPts val="1250"/>
-              </a:lnSpc>
-              <a:spcAft>
-                <a:spcPts val="300"/>
-              </a:spcAft>
-              <a:buFont typeface="Arial"/>
-              <a:buChar char="•"/>
-            </a:pPr>
-            <a:r>
-              <a:rPr lang="en-US" sz="1100" b="1" dirty="0">
-                <a:solidFill>
-                  <a:srgbClr val="1A1A1A"/>
-                </a:solidFill>
-                <a:latin typeface="HSE Sans" panose="02000000000000000000" pitchFamily="2" charset="0"/>
-              </a:rPr>
-              <a:t>RandomErasing</a:t>
-            </a:r>
-            <a:r>
-              <a:rPr lang="ru-RU" sz="1100" dirty="0">
-                <a:solidFill>
-                  <a:srgbClr val="1A1A1A"/>
-                </a:solidFill>
-                <a:latin typeface="HSE Sans" panose="02000000000000000000" pitchFamily="2" charset="0"/>
-              </a:rPr>
-              <a:t> — случайное стирание (cutout)</a:t>
-            </a:r>
-          </a:p>
-        </p:txBody>
-      </p:sp>
-      <p:sp>
-        <p:nvSpPr>
-          <p:cNvPr id="6" name="Заголовок 2">
-            <a:extLst>
-              <a:ext uri="{FF2B5EF4-FFF2-40B4-BE49-F238E27FC236}">
-                <a16:creationId xmlns:a16="http://schemas.microsoft.com/office/drawing/2014/main" id="{5D016CD5-829C-2010-254B-20D6B882D503}"/>
-              </a:ext>
-            </a:extLst>
-          </p:cNvPr>
-          <p:cNvSpPr txBox="1">
-            <a:spLocks/>
-          </p:cNvSpPr>
-          <p:nvPr/>
-        </p:nvSpPr>
-        <p:spPr>
-          <a:xfrm>
-            <a:off x="666489" y="1861070"/>
-            <a:ext cx="3525887" cy="415926"/>
-          </a:xfrm>
-          <a:prstGeom prst="rect">
-            <a:avLst/>
-          </a:prstGeom>
-        </p:spPr>
-        <p:txBody>
-          <a:bodyPr vert="horz" lIns="0" tIns="0" rIns="0" bIns="0" rtlCol="0" anchor="t">
-            <a:normAutofit/>
-          </a:bodyPr>
-          <a:lstStyle>
-            <a:lvl1pPr algn="l" defTabSz="914400" rtl="0" eaLnBrk="1" latinLnBrk="0" hangingPunct="1">
-              <a:lnSpc>
-                <a:spcPct val="100000"/>
-              </a:lnSpc>
-              <a:spcBef>
-                <a:spcPct val="0"/>
-              </a:spcBef>
-              <a:buNone/>
-              <a:defRPr sz="2400" b="0" i="0" kern="1200">
-                <a:solidFill>
-                  <a:schemeClr val="tx1"/>
-                </a:solidFill>
-                <a:latin typeface="HSE Sans" panose="02000000000000000000" pitchFamily="2" charset="0"/>
-                <a:ea typeface="+mj-ea"/>
-                <a:cs typeface="+mj-cs"/>
-              </a:defRPr>
-            </a:lvl1pPr>
-          </a:lstStyle>
-          <a:p>
-            <a:r>
-              <a:rPr lang="ru-RU" sz="1800" b="1" dirty="0"/>
-              <a:t>Используемые датасеты </a:t>
-            </a:r>
           </a:p>
         </p:txBody>
       </p:sp>
@@ -25867,7 +26371,7 @@
           <p:cNvPr id="7" name="TextBox 6">
             <a:extLst>
               <a:ext uri="{FF2B5EF4-FFF2-40B4-BE49-F238E27FC236}">
-                <a16:creationId xmlns:a16="http://schemas.microsoft.com/office/drawing/2014/main" id="{6503B039-D87C-7B4E-3028-369F683F91C0}"/>
+                <a16:creationId xmlns:a16="http://schemas.microsoft.com/office/drawing/2014/main" id="{3ECEF2E0-0E84-C846-BE7B-C27C284AEB33}"/>
               </a:ext>
             </a:extLst>
           </p:cNvPr>
@@ -25876,8 +26380,8 @@
         </p:nvSpPr>
         <p:spPr>
           <a:xfrm>
-            <a:off x="604520" y="2145233"/>
-            <a:ext cx="7272866" cy="369332"/>
+            <a:off x="736600" y="3561076"/>
+            <a:ext cx="3225800" cy="2540000"/>
           </a:xfrm>
           <a:prstGeom prst="rect">
             <a:avLst/>
@@ -25885,86 +26389,239 @@
           <a:noFill/>
         </p:spPr>
         <p:txBody>
-          <a:bodyPr wrap="square" rtlCol="0">
-            <a:spAutoFit/>
+          <a:bodyPr vertOverflow="overflow" vert="horz" wrap="square" lIns="0" tIns="0" rIns="0" bIns="0" rtlCol="0" anchor="t">
+            <a:noAutofit/>
           </a:bodyPr>
           <a:lstStyle/>
           <a:p>
-            <a:pPr marL="228600" indent="-228600" algn="just">
-              <a:buAutoNum type="arabicPeriod"/>
+            <a:pPr marL="171450" indent="-171450" algn="l">
+              <a:lnSpc>
+                <a:spcPct val="100000"/>
+              </a:lnSpc>
+              <a:spcBef>
+                <a:spcPts val="600"/>
+              </a:spcBef>
+              <a:buFont typeface="Arial" panose="020B0604020202020204" pitchFamily="34" charset="0"/>
+              <a:buChar char="•"/>
             </a:pPr>
             <a:r>
-              <a:rPr lang="ru-RU" dirty="0" err="1"/>
-              <a:t>Ryerson</a:t>
-            </a:r>
-            <a:r>
-              <a:rPr lang="ru-RU" dirty="0"/>
-              <a:t> Audio-Visual Database </a:t>
-            </a:r>
-            <a:r>
-              <a:rPr lang="ru-RU" dirty="0" err="1"/>
-              <a:t>of</a:t>
-            </a:r>
-            <a:r>
-              <a:rPr lang="ru-RU" dirty="0"/>
-              <a:t> </a:t>
-            </a:r>
-            <a:r>
-              <a:rPr lang="ru-RU" dirty="0" err="1"/>
-              <a:t>Emotional</a:t>
-            </a:r>
-            <a:r>
-              <a:rPr lang="ru-RU" dirty="0"/>
-              <a:t> </a:t>
-            </a:r>
-            <a:r>
-              <a:rPr lang="ru-RU" dirty="0" err="1"/>
-              <a:t>Speech</a:t>
-            </a:r>
-            <a:r>
-              <a:rPr lang="ru-RU" dirty="0"/>
-              <a:t> </a:t>
-            </a:r>
-            <a:r>
-              <a:rPr lang="ru-RU" dirty="0" err="1"/>
-              <a:t>and</a:t>
-            </a:r>
-            <a:r>
-              <a:rPr lang="ru-RU" dirty="0"/>
-              <a:t> </a:t>
-            </a:r>
-            <a:r>
-              <a:rPr lang="ru-RU" dirty="0" err="1"/>
-              <a:t>Song</a:t>
-            </a:r>
-            <a:r>
-              <a:rPr lang="en-US" dirty="0"/>
-              <a:t> (</a:t>
-            </a:r>
-            <a:r>
-              <a:rPr lang="en-US" b="1" dirty="0">
-                <a:latin typeface="HSE Sans" panose="02000000000000000000" pitchFamily="2" charset="0"/>
-              </a:rPr>
-              <a:t>RAVDESS</a:t>
-            </a:r>
-            <a:r>
-              <a:rPr lang="en-US" dirty="0">
-                <a:latin typeface="HSE Sans" panose="02000000000000000000" pitchFamily="2" charset="0"/>
-              </a:rPr>
-              <a:t>)</a:t>
-            </a:r>
-            <a:endParaRPr lang="ru-RU" dirty="0">
-              <a:latin typeface="HSE Sans" panose="02000000000000000000" pitchFamily="2" charset="0"/>
-            </a:endParaRPr>
+              <a:rPr lang="ru-RU" sz="1400" dirty="0">
+                <a:solidFill>
+                  <a:srgbClr val="1A1A1A"/>
+                </a:solidFill>
+                <a:latin typeface="HSE Sans" panose="02000000000000000000" pitchFamily="2" charset="0"/>
+              </a:rPr>
+              <a:t>Классика: </a:t>
+            </a:r>
+            <a:r>
+              <a:rPr lang="en-US" sz="1400" dirty="0">
+                <a:solidFill>
+                  <a:srgbClr val="1A1A1A"/>
+                </a:solidFill>
+                <a:latin typeface="HSE Sans"/>
+              </a:rPr>
+              <a:t>MFCC + SVM</a:t>
+            </a:r>
+            <a:r>
+              <a:rPr lang="ru-RU" sz="1400" dirty="0">
+                <a:solidFill>
+                  <a:srgbClr val="1A1A1A"/>
+                </a:solidFill>
+                <a:latin typeface="HSE Sans" panose="02000000000000000000" pitchFamily="2" charset="0"/>
+              </a:rPr>
+              <a:t>, лог-мел спектрограммы</a:t>
+            </a:r>
+          </a:p>
+          <a:p>
+            <a:pPr marL="171450" indent="-171450" algn="l">
+              <a:lnSpc>
+                <a:spcPct val="100000"/>
+              </a:lnSpc>
+              <a:spcBef>
+                <a:spcPts val="600"/>
+              </a:spcBef>
+              <a:buFont typeface="Arial" panose="020B0604020202020204" pitchFamily="34" charset="0"/>
+              <a:buChar char="•"/>
+            </a:pPr>
+            <a:r>
+              <a:rPr lang="ru-RU" sz="1400" dirty="0">
+                <a:solidFill>
+                  <a:srgbClr val="1A1A1A"/>
+                </a:solidFill>
+                <a:latin typeface="HSE Sans" panose="02000000000000000000" pitchFamily="2" charset="0"/>
+              </a:rPr>
+              <a:t>Трансформеры: </a:t>
+            </a:r>
+            <a:r>
+              <a:rPr lang="en-US" sz="1400" dirty="0">
+                <a:solidFill>
+                  <a:srgbClr val="1A1A1A"/>
+                </a:solidFill>
+                <a:latin typeface="HSE Sans"/>
+              </a:rPr>
+              <a:t>Wav2Vec 2.0, DistilHuBERT</a:t>
+            </a:r>
+          </a:p>
+          <a:p>
+            <a:pPr marL="171450" indent="-171450" algn="l">
+              <a:lnSpc>
+                <a:spcPct val="100000"/>
+              </a:lnSpc>
+              <a:spcBef>
+                <a:spcPts val="600"/>
+              </a:spcBef>
+              <a:buFont typeface="Arial" panose="020B0604020202020204" pitchFamily="34" charset="0"/>
+              <a:buChar char="•"/>
+            </a:pPr>
+            <a:r>
+              <a:rPr lang="en-US" sz="1400" dirty="0">
+                <a:solidFill>
+                  <a:srgbClr val="1A1A1A"/>
+                </a:solidFill>
+                <a:latin typeface="HSE Sans"/>
+              </a:rPr>
+              <a:t>CNN </a:t>
+            </a:r>
+            <a:r>
+              <a:rPr lang="ru-RU" sz="1400" dirty="0">
+                <a:solidFill>
+                  <a:srgbClr val="1A1A1A"/>
+                </a:solidFill>
+                <a:latin typeface="HSE Sans" panose="02000000000000000000" pitchFamily="2" charset="0"/>
+              </a:rPr>
+              <a:t>на спектральных представлениях</a:t>
+            </a:r>
           </a:p>
         </p:txBody>
       </p:sp>
       <p:sp>
         <p:nvSpPr>
-          <p:cNvPr id="8" name="TextBox 7">
+          <p:cNvPr id="9" name="Rounded Rectangle 8">
             <a:extLst>
               <a:ext uri="{FF2B5EF4-FFF2-40B4-BE49-F238E27FC236}">
-                <a16:creationId xmlns:a16="http://schemas.microsoft.com/office/drawing/2014/main" id="{877EEC3B-7375-400B-F2B7-467E7DE6809A}"/>
+                <a16:creationId xmlns:a16="http://schemas.microsoft.com/office/drawing/2014/main" id="{02C0AA11-27EF-D749-B825-49D92198B864}"/>
+              </a:ext>
+            </a:extLst>
+          </p:cNvPr>
+          <p:cNvSpPr/>
+          <p:nvPr/>
+        </p:nvSpPr>
+        <p:spPr>
+          <a:xfrm>
+            <a:off x="4305300" y="2286000"/>
+            <a:ext cx="3581400" cy="3810000"/>
+          </a:xfrm>
+          <a:prstGeom prst="roundRect">
+            <a:avLst/>
+          </a:prstGeom>
+          <a:solidFill>
+            <a:srgbClr val="E8EEF7"/>
+          </a:solidFill>
+          <a:ln w="19050" cap="flat" cmpd="sng" algn="ctr">
+            <a:solidFill>
+              <a:srgbClr val="2E7D5B"/>
+            </a:solidFill>
+            <a:prstDash val="solid"/>
+            <a:miter lim="800000"/>
+          </a:ln>
+        </p:spPr>
+        <p:style>
+          <a:lnRef idx="2">
+            <a:schemeClr val="accent1">
+              <a:shade val="15000"/>
+            </a:schemeClr>
+          </a:lnRef>
+          <a:fillRef idx="1">
+            <a:schemeClr val="accent1"/>
+          </a:fillRef>
+          <a:effectRef idx="0">
+            <a:schemeClr val="accent1"/>
+          </a:effectRef>
+          <a:fontRef idx="minor">
+            <a:schemeClr val="lt1"/>
+          </a:fontRef>
+        </p:style>
+        <p:txBody>
+          <a:bodyPr vertOverflow="clip" horzOverflow="clip" rtlCol="0" anchor="t"/>
+          <a:lstStyle/>
+          <a:p>
+            <a:pPr algn="l"/>
+            <a:endParaRPr lang="en-US"/>
+          </a:p>
+        </p:txBody>
+      </p:sp>
+      <p:sp>
+        <p:nvSpPr>
+          <p:cNvPr id="11" name="Rectangle 10">
+            <a:extLst>
+              <a:ext uri="{FF2B5EF4-FFF2-40B4-BE49-F238E27FC236}">
+                <a16:creationId xmlns:a16="http://schemas.microsoft.com/office/drawing/2014/main" id="{619576DE-F2DC-2048-AF8C-7C9DAABDA50D}"/>
+              </a:ext>
+            </a:extLst>
+          </p:cNvPr>
+          <p:cNvSpPr/>
+          <p:nvPr/>
+        </p:nvSpPr>
+        <p:spPr>
+          <a:xfrm>
+            <a:off x="4305300" y="2286000"/>
+            <a:ext cx="3581400" cy="635000"/>
+          </a:xfrm>
+          <a:prstGeom prst="rect">
+            <a:avLst/>
+          </a:prstGeom>
+          <a:solidFill>
+            <a:srgbClr val="2F7D5B"/>
+          </a:solidFill>
+          <a:ln w="19050" cap="flat" cmpd="sng" algn="ctr">
+            <a:solidFill>
+              <a:srgbClr val="2F7D5B"/>
+            </a:solidFill>
+            <a:prstDash val="solid"/>
+            <a:miter lim="800000"/>
+          </a:ln>
+        </p:spPr>
+        <p:style>
+          <a:lnRef idx="2">
+            <a:schemeClr val="accent1">
+              <a:shade val="15000"/>
+            </a:schemeClr>
+          </a:lnRef>
+          <a:fillRef idx="1">
+            <a:schemeClr val="accent1"/>
+          </a:fillRef>
+          <a:effectRef idx="0">
+            <a:schemeClr val="accent1"/>
+          </a:effectRef>
+          <a:fontRef idx="minor">
+            <a:schemeClr val="lt1"/>
+          </a:fontRef>
+        </p:style>
+        <p:txBody>
+          <a:bodyPr vertOverflow="clip" horzOverflow="clip" wrap="square" lIns="101600" tIns="25400" rIns="101600" bIns="25400" rtlCol="0" anchor="ctr" anchorCtr="0">
+            <a:noAutofit/>
+          </a:bodyPr>
+          <a:lstStyle/>
+          <a:p>
+            <a:pPr algn="ctr"/>
+            <a:r>
+              <a:rPr lang="en-US" sz="1600" b="1" dirty="0">
+                <a:solidFill>
+                  <a:srgbClr val="FFFFFF"/>
+                </a:solidFill>
+                <a:latin typeface="HSE Sans"/>
+              </a:rPr>
+              <a:t>Facial expression Emotion Recognition (FER)</a:t>
+            </a:r>
+          </a:p>
+        </p:txBody>
+      </p:sp>
+      <p:sp>
+        <p:nvSpPr>
+          <p:cNvPr id="12" name="TextBox 11">
+            <a:extLst>
+              <a:ext uri="{FF2B5EF4-FFF2-40B4-BE49-F238E27FC236}">
+                <a16:creationId xmlns:a16="http://schemas.microsoft.com/office/drawing/2014/main" id="{3BC742F3-F422-8C42-B0DF-A02566AD766C}"/>
               </a:ext>
             </a:extLst>
           </p:cNvPr>
@@ -25973,8 +26630,8 @@
         </p:nvSpPr>
         <p:spPr>
           <a:xfrm>
-            <a:off x="604520" y="3496649"/>
-            <a:ext cx="7272866" cy="369332"/>
+            <a:off x="4432300" y="3066896"/>
+            <a:ext cx="3327400" cy="304800"/>
           </a:xfrm>
           <a:prstGeom prst="rect">
             <a:avLst/>
@@ -25982,84 +26639,36 @@
           <a:noFill/>
         </p:spPr>
         <p:txBody>
-          <a:bodyPr wrap="square" rtlCol="0">
-            <a:spAutoFit/>
+          <a:bodyPr vertOverflow="overflow" vert="horz" wrap="square" lIns="25400" tIns="0" rIns="25400" bIns="0" rtlCol="0" anchor="t">
+            <a:noAutofit/>
           </a:bodyPr>
-          <a:lstStyle/>
-          <a:p>
-            <a:pPr algn="just"/>
-            <a:r>
-              <a:rPr lang="en-US" dirty="0"/>
-              <a:t>2. </a:t>
-            </a:r>
+          <a:lstStyle>
+            <a:defPPr>
+              <a:defRPr lang="en-RU"/>
+            </a:defPPr>
+            <a:lvl1pPr>
+              <a:defRPr sz="1400">
+                <a:solidFill>
+                  <a:srgbClr val="1A1A1A"/>
+                </a:solidFill>
+              </a:defRPr>
+            </a:lvl1pPr>
+          </a:lstStyle>
+          <a:p>
             <a:r>
               <a:rPr lang="ru-RU" dirty="0"/>
-              <a:t>Crowd-</a:t>
-            </a:r>
-            <a:r>
-              <a:rPr lang="ru-RU" dirty="0" err="1"/>
-              <a:t>sourced</a:t>
-            </a:r>
-            <a:r>
-              <a:rPr lang="ru-RU" dirty="0"/>
-              <a:t> </a:t>
-            </a:r>
-            <a:r>
-              <a:rPr lang="ru-RU" dirty="0" err="1"/>
-              <a:t>Emotional</a:t>
-            </a:r>
-            <a:r>
-              <a:rPr lang="ru-RU" dirty="0"/>
-              <a:t> </a:t>
-            </a:r>
-            <a:r>
-              <a:rPr lang="ru-RU" dirty="0" err="1"/>
-              <a:t>Multimodal</a:t>
-            </a:r>
-            <a:r>
-              <a:rPr lang="ru-RU" dirty="0"/>
-              <a:t> </a:t>
-            </a:r>
-            <a:r>
-              <a:rPr lang="ru-RU" dirty="0" err="1"/>
-              <a:t>Actors</a:t>
-            </a:r>
-            <a:r>
-              <a:rPr lang="ru-RU" dirty="0"/>
-              <a:t> </a:t>
-            </a:r>
-            <a:r>
-              <a:rPr lang="ru-RU" dirty="0" err="1"/>
-              <a:t>Dataset</a:t>
-            </a:r>
-            <a:r>
-              <a:rPr lang="en-US" dirty="0"/>
-              <a:t> (</a:t>
-            </a:r>
-            <a:r>
-              <a:rPr lang="en-US" b="1" dirty="0">
-                <a:latin typeface="HSE Sans" panose="02000000000000000000" pitchFamily="2" charset="0"/>
-              </a:rPr>
-              <a:t>CREMA-D</a:t>
-            </a:r>
-            <a:r>
-              <a:rPr lang="en-US" dirty="0">
-                <a:latin typeface="HSE Sans" panose="02000000000000000000" pitchFamily="2" charset="0"/>
-              </a:rPr>
-              <a:t>)</a:t>
-            </a:r>
-            <a:endParaRPr lang="ru-RU" dirty="0">
-              <a:latin typeface="HSE Sans" panose="02000000000000000000" pitchFamily="2" charset="0"/>
-            </a:endParaRPr>
+              <a:t>Определение эмоций по выражению лиц</a:t>
+            </a:r>
+            <a:endParaRPr lang="en-US" dirty="0"/>
           </a:p>
         </p:txBody>
       </p:sp>
       <p:sp>
         <p:nvSpPr>
-          <p:cNvPr id="9" name="TextBox 8">
+          <p:cNvPr id="13" name="TextBox 12">
             <a:extLst>
               <a:ext uri="{FF2B5EF4-FFF2-40B4-BE49-F238E27FC236}">
-                <a16:creationId xmlns:a16="http://schemas.microsoft.com/office/drawing/2014/main" id="{D01EEC80-1DB7-4790-AFD5-235F3FC86D11}"/>
+                <a16:creationId xmlns:a16="http://schemas.microsoft.com/office/drawing/2014/main" id="{1A2BC867-2429-9F40-B79B-AF14B5B51709}"/>
               </a:ext>
             </a:extLst>
           </p:cNvPr>
@@ -26068,8 +26677,8 @@
         </p:nvSpPr>
         <p:spPr>
           <a:xfrm>
-            <a:off x="669537" y="4840557"/>
-            <a:ext cx="7272866" cy="369332"/>
+            <a:off x="4483100" y="3561076"/>
+            <a:ext cx="3225800" cy="2540000"/>
           </a:xfrm>
           <a:prstGeom prst="rect">
             <a:avLst/>
@@ -26077,86 +26686,384 @@
           <a:noFill/>
         </p:spPr>
         <p:txBody>
-          <a:bodyPr wrap="square" rtlCol="0">
-            <a:spAutoFit/>
+          <a:bodyPr vertOverflow="overflow" vert="horz" wrap="square" lIns="0" tIns="0" rIns="0" bIns="0" rtlCol="0" anchor="t">
+            <a:noAutofit/>
           </a:bodyPr>
           <a:lstStyle/>
           <a:p>
-            <a:pPr algn="just"/>
+            <a:pPr marL="171450" indent="-171450" algn="l">
+              <a:lnSpc>
+                <a:spcPct val="100000"/>
+              </a:lnSpc>
+              <a:spcBef>
+                <a:spcPts val="600"/>
+              </a:spcBef>
+              <a:buFont typeface="Arial" panose="020B0604020202020204" pitchFamily="34" charset="0"/>
+              <a:buChar char="•"/>
+            </a:pPr>
+            <a:r>
+              <a:rPr lang="ru-RU" sz="1400" dirty="0">
+                <a:solidFill>
+                  <a:srgbClr val="1A1A1A"/>
+                </a:solidFill>
+                <a:latin typeface="HSE Sans" panose="02000000000000000000" pitchFamily="2" charset="0"/>
+              </a:rPr>
+              <a:t>Детекция лиц: </a:t>
+            </a:r>
+            <a:r>
+              <a:rPr lang="en-US" sz="1400" dirty="0">
+                <a:solidFill>
+                  <a:srgbClr val="1A1A1A"/>
+                </a:solidFill>
+                <a:latin typeface="HSE Sans"/>
+              </a:rPr>
+              <a:t>MediaPipe BlazeFace</a:t>
+            </a:r>
+          </a:p>
+          <a:p>
+            <a:pPr marL="171450" indent="-171450" algn="l">
+              <a:lnSpc>
+                <a:spcPct val="100000"/>
+              </a:lnSpc>
+              <a:spcBef>
+                <a:spcPts val="600"/>
+              </a:spcBef>
+              <a:buFont typeface="Arial" panose="020B0604020202020204" pitchFamily="34" charset="0"/>
+              <a:buChar char="•"/>
+            </a:pPr>
+            <a:r>
+              <a:rPr lang="ru-RU" sz="1400" dirty="0">
+                <a:solidFill>
+                  <a:srgbClr val="1A1A1A"/>
+                </a:solidFill>
+                <a:latin typeface="HSE Sans" panose="02000000000000000000" pitchFamily="2" charset="0"/>
+              </a:rPr>
+              <a:t>Лёгкие бэкбоны: </a:t>
+            </a:r>
+            <a:r>
+              <a:rPr lang="en-US" sz="1400" dirty="0">
+                <a:solidFill>
+                  <a:srgbClr val="1A1A1A"/>
+                </a:solidFill>
+                <a:latin typeface="HSE Sans"/>
+              </a:rPr>
+              <a:t>MobileNetV3, EmotiEffNet</a:t>
+            </a:r>
+          </a:p>
+          <a:p>
+            <a:pPr marL="171450" indent="-171450" algn="l">
+              <a:lnSpc>
+                <a:spcPct val="100000"/>
+              </a:lnSpc>
+              <a:spcBef>
+                <a:spcPts val="600"/>
+              </a:spcBef>
+              <a:buFont typeface="Arial" panose="020B0604020202020204" pitchFamily="34" charset="0"/>
+              <a:buChar char="•"/>
+            </a:pPr>
+            <a:r>
+              <a:rPr lang="ru-RU" sz="1400" dirty="0">
+                <a:solidFill>
+                  <a:srgbClr val="1A1A1A"/>
+                </a:solidFill>
+                <a:latin typeface="HSE Sans" panose="02000000000000000000" pitchFamily="2" charset="0"/>
+              </a:rPr>
+              <a:t>Темпоральные агрегаторы: </a:t>
+            </a:r>
+            <a:r>
+              <a:rPr lang="en-US" sz="1400" dirty="0">
+                <a:solidFill>
+                  <a:srgbClr val="1A1A1A"/>
+                </a:solidFill>
+                <a:latin typeface="HSE Sans"/>
+              </a:rPr>
+              <a:t>BiGRU, BiLSTM, TCN</a:t>
+            </a:r>
+          </a:p>
+        </p:txBody>
+      </p:sp>
+      <p:sp>
+        <p:nvSpPr>
+          <p:cNvPr id="16" name="Rounded Rectangle 15">
+            <a:extLst>
+              <a:ext uri="{FF2B5EF4-FFF2-40B4-BE49-F238E27FC236}">
+                <a16:creationId xmlns:a16="http://schemas.microsoft.com/office/drawing/2014/main" id="{B3366672-C854-8746-BA8D-E6CE3CDC44B8}"/>
+              </a:ext>
+            </a:extLst>
+          </p:cNvPr>
+          <p:cNvSpPr/>
+          <p:nvPr/>
+        </p:nvSpPr>
+        <p:spPr>
+          <a:xfrm>
+            <a:off x="8051800" y="2286000"/>
+            <a:ext cx="3581400" cy="3810000"/>
+          </a:xfrm>
+          <a:prstGeom prst="roundRect">
+            <a:avLst/>
+          </a:prstGeom>
+          <a:solidFill>
+            <a:srgbClr val="E8EEF7"/>
+          </a:solidFill>
+          <a:ln w="19050" cap="flat" cmpd="sng" algn="ctr">
+            <a:solidFill>
+              <a:srgbClr val="102E5A"/>
+            </a:solidFill>
+            <a:prstDash val="solid"/>
+            <a:miter lim="800000"/>
+          </a:ln>
+        </p:spPr>
+        <p:style>
+          <a:lnRef idx="2">
+            <a:schemeClr val="accent1">
+              <a:shade val="15000"/>
+            </a:schemeClr>
+          </a:lnRef>
+          <a:fillRef idx="1">
+            <a:schemeClr val="accent1"/>
+          </a:fillRef>
+          <a:effectRef idx="0">
+            <a:schemeClr val="accent1"/>
+          </a:effectRef>
+          <a:fontRef idx="minor">
+            <a:schemeClr val="lt1"/>
+          </a:fontRef>
+        </p:style>
+        <p:txBody>
+          <a:bodyPr vertOverflow="clip" horzOverflow="clip" rtlCol="0" anchor="t"/>
+          <a:lstStyle/>
+          <a:p>
+            <a:pPr algn="l"/>
+            <a:endParaRPr lang="en-US"/>
+          </a:p>
+        </p:txBody>
+      </p:sp>
+      <p:sp>
+        <p:nvSpPr>
+          <p:cNvPr id="20" name="Rectangle 19">
+            <a:extLst>
+              <a:ext uri="{FF2B5EF4-FFF2-40B4-BE49-F238E27FC236}">
+                <a16:creationId xmlns:a16="http://schemas.microsoft.com/office/drawing/2014/main" id="{AE82708D-89D8-AD4C-9ADF-3E7F98B2C29E}"/>
+              </a:ext>
+            </a:extLst>
+          </p:cNvPr>
+          <p:cNvSpPr/>
+          <p:nvPr/>
+        </p:nvSpPr>
+        <p:spPr>
+          <a:xfrm>
+            <a:off x="8051800" y="2286000"/>
+            <a:ext cx="3581400" cy="635000"/>
+          </a:xfrm>
+          <a:prstGeom prst="rect">
+            <a:avLst/>
+          </a:prstGeom>
+          <a:solidFill>
+            <a:schemeClr val="tx1"/>
+          </a:solidFill>
+          <a:ln w="19050" cap="flat" cmpd="sng" algn="ctr">
+            <a:solidFill>
+              <a:schemeClr val="tx1"/>
+            </a:solidFill>
+            <a:prstDash val="solid"/>
+            <a:miter lim="800000"/>
+          </a:ln>
+        </p:spPr>
+        <p:style>
+          <a:lnRef idx="2">
+            <a:schemeClr val="accent1">
+              <a:shade val="15000"/>
+            </a:schemeClr>
+          </a:lnRef>
+          <a:fillRef idx="1">
+            <a:schemeClr val="accent1"/>
+          </a:fillRef>
+          <a:effectRef idx="0">
+            <a:schemeClr val="accent1"/>
+          </a:effectRef>
+          <a:fontRef idx="minor">
+            <a:schemeClr val="lt1"/>
+          </a:fontRef>
+        </p:style>
+        <p:txBody>
+          <a:bodyPr vertOverflow="clip" horzOverflow="clip" wrap="square" lIns="101600" tIns="25400" rIns="101600" bIns="25400" rtlCol="0" anchor="ctr" anchorCtr="0">
+            <a:noAutofit/>
+          </a:bodyPr>
+          <a:lstStyle/>
+          <a:p>
+            <a:pPr algn="ctr"/>
+            <a:r>
+              <a:rPr lang="en-US" sz="1600" b="1" dirty="0">
+                <a:solidFill>
+                  <a:srgbClr val="FFFFFF"/>
+                </a:solidFill>
+                <a:latin typeface="HSE Sans"/>
+              </a:rPr>
+              <a:t>Multimodal Emotion Recognition (MER)</a:t>
+            </a:r>
+          </a:p>
+        </p:txBody>
+      </p:sp>
+      <p:sp>
+        <p:nvSpPr>
+          <p:cNvPr id="21" name="TextBox 20">
+            <a:extLst>
+              <a:ext uri="{FF2B5EF4-FFF2-40B4-BE49-F238E27FC236}">
+                <a16:creationId xmlns:a16="http://schemas.microsoft.com/office/drawing/2014/main" id="{64F8AFC4-AF5F-BD47-920B-E2AB5FC0C112}"/>
+              </a:ext>
+            </a:extLst>
+          </p:cNvPr>
+          <p:cNvSpPr txBox="1"/>
+          <p:nvPr/>
+        </p:nvSpPr>
+        <p:spPr>
+          <a:xfrm>
+            <a:off x="8178800" y="3066896"/>
+            <a:ext cx="3327400" cy="304800"/>
+          </a:xfrm>
+          <a:prstGeom prst="rect">
+            <a:avLst/>
+          </a:prstGeom>
+          <a:noFill/>
+        </p:spPr>
+        <p:txBody>
+          <a:bodyPr vertOverflow="overflow" vert="horz" wrap="square" lIns="25400" tIns="0" rIns="25400" bIns="0" rtlCol="0" anchor="t">
+            <a:noAutofit/>
+          </a:bodyPr>
+          <a:lstStyle>
+            <a:defPPr>
+              <a:defRPr lang="en-RU"/>
+            </a:defPPr>
+            <a:lvl1pPr>
+              <a:defRPr sz="1400">
+                <a:solidFill>
+                  <a:srgbClr val="1A1A1A"/>
+                </a:solidFill>
+              </a:defRPr>
+            </a:lvl1pPr>
+          </a:lstStyle>
+          <a:p>
             <a:r>
               <a:rPr lang="ru-RU" dirty="0"/>
-              <a:t>3</a:t>
+              <a:t>Определение эмоций</a:t>
             </a:r>
             <a:r>
               <a:rPr lang="en-US" dirty="0"/>
-              <a:t>. </a:t>
+              <a:t> </a:t>
             </a:r>
             <a:r>
               <a:rPr lang="ru-RU" dirty="0"/>
-              <a:t>Interactive </a:t>
-            </a:r>
-            <a:r>
-              <a:rPr lang="ru-RU" dirty="0" err="1"/>
-              <a:t>emotional</a:t>
-            </a:r>
-            <a:r>
-              <a:rPr lang="ru-RU" dirty="0"/>
-              <a:t> </a:t>
-            </a:r>
-            <a:r>
-              <a:rPr lang="ru-RU" dirty="0" err="1"/>
-              <a:t>dyadic</a:t>
-            </a:r>
-            <a:r>
-              <a:rPr lang="ru-RU" dirty="0"/>
-              <a:t> </a:t>
-            </a:r>
-            <a:r>
-              <a:rPr lang="ru-RU" dirty="0" err="1"/>
-              <a:t>motion</a:t>
-            </a:r>
-            <a:r>
-              <a:rPr lang="ru-RU" dirty="0"/>
-              <a:t> </a:t>
-            </a:r>
-            <a:r>
-              <a:rPr lang="ru-RU" dirty="0" err="1"/>
-              <a:t>capture</a:t>
-            </a:r>
-            <a:r>
-              <a:rPr lang="ru-RU" dirty="0"/>
-              <a:t> </a:t>
-            </a:r>
-            <a:r>
-              <a:rPr lang="ru-RU" dirty="0" err="1"/>
-              <a:t>database</a:t>
-            </a:r>
-            <a:r>
-              <a:rPr lang="en-US" dirty="0"/>
-              <a:t> (</a:t>
-            </a:r>
-            <a:r>
-              <a:rPr lang="en-US" b="1" dirty="0">
-                <a:latin typeface="HSE Sans" panose="02000000000000000000" pitchFamily="2" charset="0"/>
+              <a:t>по двум и более модальностям </a:t>
+            </a:r>
+            <a:endParaRPr lang="en-US" dirty="0"/>
+          </a:p>
+        </p:txBody>
+      </p:sp>
+      <p:sp>
+        <p:nvSpPr>
+          <p:cNvPr id="22" name="TextBox 21">
+            <a:extLst>
+              <a:ext uri="{FF2B5EF4-FFF2-40B4-BE49-F238E27FC236}">
+                <a16:creationId xmlns:a16="http://schemas.microsoft.com/office/drawing/2014/main" id="{3A0568C2-DBC8-814F-B1F1-615C9C1B2E5A}"/>
+              </a:ext>
+            </a:extLst>
+          </p:cNvPr>
+          <p:cNvSpPr txBox="1"/>
+          <p:nvPr/>
+        </p:nvSpPr>
+        <p:spPr>
+          <a:xfrm>
+            <a:off x="8229600" y="3561076"/>
+            <a:ext cx="3225800" cy="2540000"/>
+          </a:xfrm>
+          <a:prstGeom prst="rect">
+            <a:avLst/>
+          </a:prstGeom>
+          <a:noFill/>
+        </p:spPr>
+        <p:txBody>
+          <a:bodyPr vertOverflow="overflow" vert="horz" wrap="square" lIns="0" tIns="0" rIns="0" bIns="0" rtlCol="0" anchor="t">
+            <a:noAutofit/>
+          </a:bodyPr>
+          <a:lstStyle/>
+          <a:p>
+            <a:pPr marL="171450" indent="-171450" algn="l">
+              <a:lnSpc>
+                <a:spcPct val="100000"/>
+              </a:lnSpc>
+              <a:spcBef>
+                <a:spcPts val="600"/>
+              </a:spcBef>
+              <a:buFont typeface="Arial" panose="020B0604020202020204" pitchFamily="34" charset="0"/>
+              <a:buChar char="•"/>
+            </a:pPr>
+            <a:r>
+              <a:rPr lang="ru-RU" sz="1400" dirty="0">
+                <a:solidFill>
+                  <a:srgbClr val="1A1A1A"/>
+                </a:solidFill>
+                <a:latin typeface="HSE Sans" panose="02000000000000000000" pitchFamily="2" charset="0"/>
+              </a:rPr>
+              <a:t>Стратегии слияния модальностей (early / late / hybrid)</a:t>
+            </a:r>
+          </a:p>
+          <a:p>
+            <a:pPr marL="171450" indent="-171450" algn="l">
+              <a:lnSpc>
+                <a:spcPct val="100000"/>
+              </a:lnSpc>
+              <a:spcBef>
+                <a:spcPts val="600"/>
+              </a:spcBef>
+              <a:buFont typeface="Arial" panose="020B0604020202020204" pitchFamily="34" charset="0"/>
+              <a:buChar char="•"/>
+            </a:pPr>
+            <a:r>
+              <a:rPr lang="ru-RU" sz="1400" dirty="0">
+                <a:solidFill>
+                  <a:srgbClr val="1A1A1A"/>
+                </a:solidFill>
+                <a:latin typeface="HSE Sans" panose="02000000000000000000" pitchFamily="2" charset="0"/>
+              </a:rPr>
+              <a:t>Современные архитектуры для </a:t>
+            </a:r>
+            <a:r>
+              <a:rPr lang="en-US" sz="1400" dirty="0">
+                <a:solidFill>
+                  <a:srgbClr val="1A1A1A"/>
+                </a:solidFill>
+                <a:latin typeface="HSE Sans"/>
               </a:rPr>
               <a:t>IEMOCAP</a:t>
             </a:r>
-            <a:r>
-              <a:rPr lang="en-US" dirty="0">
-                <a:latin typeface="HSE Sans" panose="02000000000000000000" pitchFamily="2" charset="0"/>
-              </a:rPr>
-              <a:t>)</a:t>
-            </a:r>
-            <a:endParaRPr lang="ru-RU" dirty="0">
-              <a:latin typeface="HSE Sans" panose="02000000000000000000" pitchFamily="2" charset="0"/>
-            </a:endParaRPr>
+          </a:p>
+          <a:p>
+            <a:pPr marL="171450" indent="-171450" algn="l">
+              <a:lnSpc>
+                <a:spcPct val="100000"/>
+              </a:lnSpc>
+              <a:spcBef>
+                <a:spcPts val="600"/>
+              </a:spcBef>
+              <a:buFont typeface="Arial" panose="020B0604020202020204" pitchFamily="34" charset="0"/>
+              <a:buChar char="•"/>
+            </a:pPr>
+            <a:r>
+              <a:rPr lang="ru-RU" sz="1400" dirty="0">
+                <a:solidFill>
+                  <a:srgbClr val="1A1A1A"/>
+                </a:solidFill>
+                <a:latin typeface="HSE Sans" panose="02000000000000000000" pitchFamily="2" charset="0"/>
+              </a:rPr>
+              <a:t>Тренд: лёгкие и динамические модели</a:t>
+            </a:r>
           </a:p>
         </p:txBody>
       </p:sp>
     </p:spTree>
     <p:extLst>
       <p:ext uri="{BB962C8B-B14F-4D97-AF65-F5344CB8AC3E}">
-        <p14:creationId xmlns:p14="http://schemas.microsoft.com/office/powerpoint/2010/main" val="89580110"/>
+        <p14:creationId xmlns:p14="http://schemas.microsoft.com/office/powerpoint/2010/main" val="362681415"/>
       </p:ext>
     </p:extLst>
   </p:cSld>
@@ -26200,7 +27107,7 @@
         <p:spPr>
           <a:xfrm>
             <a:off x="666489" y="1160924"/>
-            <a:ext cx="6758439" cy="802343"/>
+            <a:ext cx="5094599" cy="802343"/>
           </a:xfrm>
           <a:prstGeom prst="rect">
             <a:avLst/>
@@ -26232,7 +27139,7 @@
           <a:p>
             <a:r>
               <a:rPr lang="ru-RU" b="1" dirty="0"/>
-              <a:t>Общая архитектура предлагаемого решения</a:t>
+              <a:t>Датасеты и аугментация</a:t>
             </a:r>
           </a:p>
         </p:txBody>
@@ -26635,7 +27542,11 @@
           </a:lstStyle>
           <a:p>
             <a:r>
-              <a:rPr lang="ru-RU" dirty="0"/>
+              <a:rPr lang="ru-RU" dirty="0">
+                <a:solidFill>
+                  <a:schemeClr val="tx1"/>
+                </a:solidFill>
+              </a:rPr>
               <a:t>Классификация выражений лиц с детектированием эмоций в речи</a:t>
             </a:r>
           </a:p>
@@ -26834,13 +27745,21 @@
           </a:lstStyle>
           <a:p>
             <a:r>
-              <a:rPr lang="ru-RU" dirty="0"/>
+              <a:rPr lang="ru-RU" dirty="0">
+                <a:solidFill>
+                  <a:schemeClr val="tx1"/>
+                </a:solidFill>
+              </a:rPr>
               <a:t>Канделов Дамир Русланович </a:t>
             </a:r>
           </a:p>
           <a:p>
             <a:r>
-              <a:rPr lang="ru-RU" dirty="0"/>
+              <a:rPr lang="ru-RU" dirty="0">
+                <a:solidFill>
+                  <a:schemeClr val="tx1"/>
+                </a:solidFill>
+              </a:rPr>
               <a:t>Группа: 22ПИ-1</a:t>
             </a:r>
           </a:p>
@@ -26848,79 +27767,10 @@
       </p:sp>
       <p:sp>
         <p:nvSpPr>
-          <p:cNvPr id="4" name="Rectangle 2">
+          <p:cNvPr id="20" name="TextBox 19">
             <a:extLst>
               <a:ext uri="{FF2B5EF4-FFF2-40B4-BE49-F238E27FC236}">
-                <a16:creationId xmlns:a16="http://schemas.microsoft.com/office/drawing/2014/main" id="{0F0DA963-E9B5-6F1D-7BB4-EC614E37D956}"/>
-              </a:ext>
-            </a:extLst>
-          </p:cNvPr>
-          <p:cNvSpPr>
-            <a:spLocks noChangeArrowheads="1"/>
-          </p:cNvSpPr>
-          <p:nvPr/>
-        </p:nvSpPr>
-        <p:spPr bwMode="auto">
-          <a:xfrm>
-            <a:off x="0" y="0"/>
-            <a:ext cx="12192000" cy="457200"/>
-          </a:xfrm>
-          <a:prstGeom prst="rect">
-            <a:avLst/>
-          </a:prstGeom>
-          <a:noFill/>
-          <a:ln>
-            <a:noFill/>
-          </a:ln>
-          <a:effectLst/>
-          <a:extLst>
-            <a:ext uri="{909E8E84-426E-40DD-AFC4-6F175D3DCCD1}">
-              <a14:hiddenFill xmlns:a14="http://schemas.microsoft.com/office/drawing/2010/main">
-                <a:solidFill>
-                  <a:schemeClr val="accent1"/>
-                </a:solidFill>
-              </a14:hiddenFill>
-            </a:ext>
-            <a:ext uri="{91240B29-F687-4F45-9708-019B960494DF}">
-              <a14:hiddenLine xmlns:a14="http://schemas.microsoft.com/office/drawing/2010/main" w="9525">
-                <a:solidFill>
-                  <a:schemeClr val="tx1"/>
-                </a:solidFill>
-                <a:miter lim="800000"/>
-                <a:headEnd/>
-                <a:tailEnd/>
-              </a14:hiddenLine>
-            </a:ext>
-            <a:ext uri="{AF507438-7753-43E0-B8FC-AC1667EBCBE1}">
-              <a14:hiddenEffects xmlns:a14="http://schemas.microsoft.com/office/drawing/2010/main">
-                <a:effectLst>
-                  <a:outerShdw dist="35921" dir="2700000" algn="ctr" rotWithShape="0">
-                    <a:schemeClr val="bg2"/>
-                  </a:outerShdw>
-                </a:effectLst>
-              </a14:hiddenEffects>
-            </a:ext>
-          </a:extLst>
-        </p:spPr>
-        <p:txBody>
-          <a:bodyPr vert="horz" wrap="none" lIns="91440" tIns="45720" rIns="91440" bIns="45720" numCol="1" anchor="ctr" anchorCtr="0" compatLnSpc="1">
-            <a:prstTxWarp prst="textNoShape">
-              <a:avLst/>
-            </a:prstTxWarp>
-            <a:spAutoFit/>
-          </a:bodyPr>
-          <a:lstStyle/>
-          <a:p>
-            <a:endParaRPr lang="en-RU"/>
-          </a:p>
-        </p:txBody>
-      </p:sp>
-      <p:sp>
-        <p:nvSpPr>
-          <p:cNvPr id="2" name="Thesis">
-            <a:extLst>
-              <a:ext uri="{FF2B5EF4-FFF2-40B4-BE49-F238E27FC236}">
-                <a16:creationId xmlns:a16="http://schemas.microsoft.com/office/drawing/2014/main" id="{EF433B54-F4EC-7146-8C9B-288A38E196AB}"/>
+                <a16:creationId xmlns:a16="http://schemas.microsoft.com/office/drawing/2014/main" id="{76D6BDA7-65B8-7248-A4BC-256B35919C76}"/>
               </a:ext>
             </a:extLst>
           </p:cNvPr>
@@ -26929,8 +27779,8 @@
         </p:nvSpPr>
         <p:spPr>
           <a:xfrm>
-            <a:off x="660400" y="2159000"/>
-            <a:ext cx="4299306" cy="3810000"/>
+            <a:off x="896620" y="2514564"/>
+            <a:ext cx="3741217" cy="835783"/>
           </a:xfrm>
           <a:prstGeom prst="rect">
             <a:avLst/>
@@ -26938,67 +27788,1044 @@
           <a:noFill/>
         </p:spPr>
         <p:txBody>
-          <a:bodyPr vertOverflow="overflow" vert="horz" wrap="square" lIns="50800" tIns="50800" rIns="50800" bIns="50800" rtlCol="0" anchor="t">
+          <a:bodyPr vertOverflow="overflow" vert="horz" wrap="square" lIns="0" tIns="0" rIns="0" bIns="0" rtlCol="0" anchor="t">
             <a:noAutofit/>
           </a:bodyPr>
           <a:lstStyle/>
           <a:p>
-            <a:pPr algn="just"/>
-            <a:r>
-              <a:rPr lang="ru-RU" sz="1500" dirty="0">
-                <a:solidFill>
-                  <a:srgbClr val="1A1A1A"/>
-                </a:solidFill>
-                <a:latin typeface="HSE Sans" panose="02000000000000000000" pitchFamily="2" charset="0"/>
-              </a:rPr>
-              <a:t>•  Жёсткий двухстадийный каскад с ранним решением об активации видео ветви
-•  Лёгкий бинарный классификатор на входе фильтрует нейтральную речь
-•  Обработка видео и бимодальный классификатор запускаются только для эмоциональной речи
-•  Возврат метки «нейтрально» без запуска детектора лиц и видео-ветви</a:t>
-            </a:r>
-            <a:endParaRPr lang="en-US" sz="1500" dirty="0">
-              <a:solidFill>
-                <a:srgbClr val="1A1A1A"/>
-              </a:solidFill>
+            <a:pPr marL="285750" indent="-285750">
+              <a:buFont typeface="Arial" panose="020B0604020202020204" pitchFamily="34" charset="0"/>
+              <a:buChar char="•"/>
+            </a:pPr>
+            <a:r>
+              <a:rPr lang="ru-RU" sz="1400" dirty="0">
+                <a:latin typeface="HSE Sans" panose="02000000000000000000" pitchFamily="2" charset="0"/>
+              </a:rPr>
+              <a:t>1440</a:t>
+            </a:r>
+            <a:r>
+              <a:rPr lang="en-US" sz="1400" dirty="0">
+                <a:latin typeface="HSE Sans" panose="02000000000000000000" pitchFamily="2" charset="0"/>
+              </a:rPr>
+              <a:t> </a:t>
+            </a:r>
+            <a:r>
+              <a:rPr lang="ru-RU" sz="1400" dirty="0">
+                <a:latin typeface="HSE Sans" panose="02000000000000000000" pitchFamily="2" charset="0"/>
+              </a:rPr>
+              <a:t>аудиовизуальных записей </a:t>
+            </a:r>
+            <a:endParaRPr lang="en-US" sz="1400" dirty="0">
+              <a:latin typeface="HSE Sans" panose="02000000000000000000" pitchFamily="2" charset="0"/>
+            </a:endParaRPr>
+          </a:p>
+          <a:p>
+            <a:pPr marL="285750" indent="-285750">
+              <a:buFont typeface="Arial" panose="020B0604020202020204" pitchFamily="34" charset="0"/>
+              <a:buChar char="•"/>
+            </a:pPr>
+            <a:r>
+              <a:rPr lang="ru-RU" sz="1400" dirty="0">
+                <a:latin typeface="HSE Sans" panose="02000000000000000000" pitchFamily="2" charset="0"/>
+              </a:rPr>
+              <a:t>24 профессиональных актера
+8 эмоций
+Источник для видео-модели и гейта</a:t>
+            </a:r>
+            <a:endParaRPr lang="en-US" sz="1400" dirty="0">
               <a:latin typeface="HSE Sans"/>
             </a:endParaRPr>
           </a:p>
         </p:txBody>
       </p:sp>
-      <p:pic>
-        <p:nvPicPr>
-          <p:cNvPr id="3" name="Picture 2">
+      <p:sp>
+        <p:nvSpPr>
+          <p:cNvPr id="26" name="TextBox 25">
             <a:extLst>
               <a:ext uri="{FF2B5EF4-FFF2-40B4-BE49-F238E27FC236}">
-                <a16:creationId xmlns:a16="http://schemas.microsoft.com/office/drawing/2014/main" id="{5B9C7289-3EB8-F165-8A73-667819B43987}"/>
+                <a16:creationId xmlns:a16="http://schemas.microsoft.com/office/drawing/2014/main" id="{32E1C880-6384-B443-89F8-97AD2D2BE2EA}"/>
               </a:ext>
             </a:extLst>
           </p:cNvPr>
-          <p:cNvPicPr>
-            <a:picLocks noChangeAspect="1"/>
-          </p:cNvPicPr>
+          <p:cNvSpPr txBox="1"/>
           <p:nvPr/>
-        </p:nvPicPr>
-        <p:blipFill>
-          <a:blip r:embed="rId2"/>
-          <a:stretch>
-            <a:fillRect/>
-          </a:stretch>
-        </p:blipFill>
-        <p:spPr>
-          <a:xfrm>
-            <a:off x="5207000" y="1905000"/>
-            <a:ext cx="4064000" cy="4282495"/>
+        </p:nvSpPr>
+        <p:spPr>
+          <a:xfrm>
+            <a:off x="896620" y="3865981"/>
+            <a:ext cx="4684878" cy="786538"/>
           </a:xfrm>
           <a:prstGeom prst="rect">
             <a:avLst/>
           </a:prstGeom>
-        </p:spPr>
-      </p:pic>
+          <a:noFill/>
+        </p:spPr>
+        <p:txBody>
+          <a:bodyPr vertOverflow="overflow" vert="horz" wrap="square" lIns="0" tIns="0" rIns="0" bIns="0" rtlCol="0" anchor="t">
+            <a:noAutofit/>
+          </a:bodyPr>
+          <a:lstStyle/>
+          <a:p>
+            <a:pPr marL="285750" indent="-285750" algn="l">
+              <a:buFont typeface="Arial" panose="020B0604020202020204" pitchFamily="34" charset="0"/>
+              <a:buChar char="•"/>
+            </a:pPr>
+            <a:r>
+              <a:rPr lang="ru-RU" sz="1300" dirty="0">
+                <a:latin typeface="HSE Sans" panose="02000000000000000000" pitchFamily="2" charset="0"/>
+              </a:rPr>
+              <a:t>7442 видео</a:t>
+            </a:r>
+          </a:p>
+          <a:p>
+            <a:pPr marL="285750" indent="-285750" algn="l">
+              <a:buFont typeface="Arial" panose="020B0604020202020204" pitchFamily="34" charset="0"/>
+              <a:buChar char="•"/>
+            </a:pPr>
+            <a:r>
+              <a:rPr lang="ru-RU" sz="1300" dirty="0">
+                <a:latin typeface="HSE Sans" panose="02000000000000000000" pitchFamily="2" charset="0"/>
+              </a:rPr>
+              <a:t>91 актёр, 48 мужчин и 43 женщины, добровольцы
+6 эмоций
+Расширяет аудио-данные для гейта</a:t>
+            </a:r>
+            <a:endParaRPr lang="en-US" sz="1300" dirty="0">
+              <a:latin typeface="HSE Sans"/>
+            </a:endParaRPr>
+          </a:p>
+        </p:txBody>
+      </p:sp>
+      <p:sp>
+        <p:nvSpPr>
+          <p:cNvPr id="30" name="TextBox 29">
+            <a:extLst>
+              <a:ext uri="{FF2B5EF4-FFF2-40B4-BE49-F238E27FC236}">
+                <a16:creationId xmlns:a16="http://schemas.microsoft.com/office/drawing/2014/main" id="{20EE0CBB-FAB3-6E47-A61F-20AA1A910F62}"/>
+              </a:ext>
+            </a:extLst>
+          </p:cNvPr>
+          <p:cNvSpPr txBox="1"/>
+          <p:nvPr/>
+        </p:nvSpPr>
+        <p:spPr>
+          <a:xfrm>
+            <a:off x="896620" y="5213503"/>
+            <a:ext cx="7003943" cy="887374"/>
+          </a:xfrm>
+          <a:prstGeom prst="rect">
+            <a:avLst/>
+          </a:prstGeom>
+          <a:noFill/>
+        </p:spPr>
+        <p:txBody>
+          <a:bodyPr vertOverflow="overflow" vert="horz" wrap="square" lIns="0" tIns="0" rIns="0" bIns="0" rtlCol="0" anchor="t">
+            <a:noAutofit/>
+          </a:bodyPr>
+          <a:lstStyle/>
+          <a:p>
+            <a:pPr marL="285750" indent="-285750" algn="l">
+              <a:buFont typeface="Arial" panose="020B0604020202020204" pitchFamily="34" charset="0"/>
+              <a:buChar char="•"/>
+            </a:pPr>
+            <a:r>
+              <a:rPr lang="ru-RU" sz="1300" dirty="0">
+                <a:latin typeface="HSE Sans" panose="02000000000000000000" pitchFamily="2" charset="0"/>
+              </a:rPr>
+              <a:t>12 часов записанных диалогов (5 сессий)</a:t>
+            </a:r>
+          </a:p>
+          <a:p>
+            <a:pPr marL="285750" indent="-285750" algn="l">
+              <a:buFont typeface="Arial" panose="020B0604020202020204" pitchFamily="34" charset="0"/>
+              <a:buChar char="•"/>
+            </a:pPr>
+            <a:r>
+              <a:rPr lang="ru-RU" sz="1300" dirty="0">
+                <a:latin typeface="HSE Sans" panose="02000000000000000000" pitchFamily="2" charset="0"/>
+              </a:rPr>
+              <a:t>Спонтанные импровизации, а также диалоги по заранее написанному сценарию</a:t>
+            </a:r>
+          </a:p>
+          <a:p>
+            <a:pPr marL="285750" indent="-285750" algn="l">
+              <a:buFont typeface="Arial" panose="020B0604020202020204" pitchFamily="34" charset="0"/>
+              <a:buChar char="•"/>
+            </a:pPr>
+            <a:r>
+              <a:rPr lang="ru-RU" sz="1300" dirty="0">
+                <a:latin typeface="HSE Sans" panose="02000000000000000000" pitchFamily="2" charset="0"/>
+              </a:rPr>
+              <a:t>10 актеров: 5 мужчин и 5 женщин
+4 класса: </a:t>
+            </a:r>
+            <a:r>
+              <a:rPr lang="en-US" sz="1300" dirty="0">
+                <a:latin typeface="HSE Sans"/>
+              </a:rPr>
+              <a:t>neutral, happy, sad, angry</a:t>
+            </a:r>
+          </a:p>
+        </p:txBody>
+      </p:sp>
+      <p:sp>
+        <p:nvSpPr>
+          <p:cNvPr id="31" name="Rounded Rectangle 30">
+            <a:extLst>
+              <a:ext uri="{FF2B5EF4-FFF2-40B4-BE49-F238E27FC236}">
+                <a16:creationId xmlns:a16="http://schemas.microsoft.com/office/drawing/2014/main" id="{DF8336E1-E670-3446-A244-8019EAFEEE85}"/>
+              </a:ext>
+            </a:extLst>
+          </p:cNvPr>
+          <p:cNvSpPr/>
+          <p:nvPr/>
+        </p:nvSpPr>
+        <p:spPr>
+          <a:xfrm>
+            <a:off x="7975600" y="1905000"/>
+            <a:ext cx="3810000" cy="4546600"/>
+          </a:xfrm>
+          <a:prstGeom prst="roundRect">
+            <a:avLst/>
+          </a:prstGeom>
+          <a:solidFill>
+            <a:srgbClr val="F4F7FC"/>
+          </a:solidFill>
+          <a:ln w="12700" cap="flat" cmpd="sng" algn="ctr">
+            <a:solidFill>
+              <a:srgbClr val="2E7D5B"/>
+            </a:solidFill>
+            <a:prstDash val="solid"/>
+            <a:miter lim="800000"/>
+          </a:ln>
+        </p:spPr>
+        <p:style>
+          <a:lnRef idx="2">
+            <a:schemeClr val="accent1">
+              <a:shade val="15000"/>
+            </a:schemeClr>
+          </a:lnRef>
+          <a:fillRef idx="1">
+            <a:schemeClr val="accent1"/>
+          </a:fillRef>
+          <a:effectRef idx="0">
+            <a:schemeClr val="accent1"/>
+          </a:effectRef>
+          <a:fontRef idx="minor">
+            <a:schemeClr val="lt1"/>
+          </a:fontRef>
+        </p:style>
+        <p:txBody>
+          <a:bodyPr vertOverflow="clip" horzOverflow="clip" rtlCol="0" anchor="t"/>
+          <a:lstStyle/>
+          <a:p>
+            <a:pPr algn="l"/>
+            <a:endParaRPr lang="en-US">
+              <a:solidFill>
+                <a:schemeClr val="tx1"/>
+              </a:solidFill>
+            </a:endParaRPr>
+          </a:p>
+        </p:txBody>
+      </p:sp>
+      <p:sp>
+        <p:nvSpPr>
+          <p:cNvPr id="32" name="TextBox 31">
+            <a:extLst>
+              <a:ext uri="{FF2B5EF4-FFF2-40B4-BE49-F238E27FC236}">
+                <a16:creationId xmlns:a16="http://schemas.microsoft.com/office/drawing/2014/main" id="{7281090A-D17C-A74C-A759-4648FBD0CA8F}"/>
+              </a:ext>
+            </a:extLst>
+          </p:cNvPr>
+          <p:cNvSpPr txBox="1"/>
+          <p:nvPr/>
+        </p:nvSpPr>
+        <p:spPr>
+          <a:xfrm>
+            <a:off x="8077200" y="1981200"/>
+            <a:ext cx="3606800" cy="635000"/>
+          </a:xfrm>
+          <a:prstGeom prst="rect">
+            <a:avLst/>
+          </a:prstGeom>
+          <a:noFill/>
+        </p:spPr>
+        <p:txBody>
+          <a:bodyPr vertOverflow="overflow" vert="horz" wrap="square" lIns="0" tIns="0" rIns="0" bIns="0" rtlCol="0" anchor="ctr" anchorCtr="0">
+            <a:noAutofit/>
+          </a:bodyPr>
+          <a:lstStyle/>
+          <a:p>
+            <a:pPr algn="ctr"/>
+            <a:r>
+              <a:rPr lang="ru-RU" sz="1300" b="1" dirty="0">
+                <a:latin typeface="HSE Sans" panose="02000000000000000000" pitchFamily="2" charset="0"/>
+              </a:rPr>
+              <a:t>Офлайн-аугментации</a:t>
+            </a:r>
+            <a:endParaRPr lang="en-US" sz="1300" b="1" dirty="0">
+              <a:latin typeface="HSE Sans"/>
+            </a:endParaRPr>
+          </a:p>
+        </p:txBody>
+      </p:sp>
+      <p:sp>
+        <p:nvSpPr>
+          <p:cNvPr id="33" name="TextBox 32">
+            <a:extLst>
+              <a:ext uri="{FF2B5EF4-FFF2-40B4-BE49-F238E27FC236}">
+                <a16:creationId xmlns:a16="http://schemas.microsoft.com/office/drawing/2014/main" id="{66CF86BB-2374-3B46-91C8-DD23FE574D02}"/>
+              </a:ext>
+            </a:extLst>
+          </p:cNvPr>
+          <p:cNvSpPr txBox="1"/>
+          <p:nvPr/>
+        </p:nvSpPr>
+        <p:spPr>
+          <a:xfrm>
+            <a:off x="8140700" y="2579625"/>
+            <a:ext cx="3479800" cy="1498600"/>
+          </a:xfrm>
+          <a:prstGeom prst="rect">
+            <a:avLst/>
+          </a:prstGeom>
+          <a:noFill/>
+        </p:spPr>
+        <p:txBody>
+          <a:bodyPr vertOverflow="overflow" vert="horz" wrap="square" lIns="0" tIns="0" rIns="0" bIns="0" rtlCol="0" anchor="t">
+            <a:noAutofit/>
+          </a:bodyPr>
+          <a:lstStyle/>
+          <a:p>
+            <a:pPr marL="0" indent="0">
+              <a:buNone/>
+            </a:pPr>
+            <a:r>
+              <a:rPr lang="ru-RU" sz="1300" b="1" dirty="0">
+                <a:solidFill>
+                  <a:srgbClr val="1F4E9B"/>
+                </a:solidFill>
+                <a:latin typeface="HSE Sans" panose="02000000000000000000" pitchFamily="2" charset="0"/>
+              </a:rPr>
+              <a:t>Аудио:</a:t>
+            </a:r>
+          </a:p>
+          <a:p>
+            <a:pPr marL="0" indent="0">
+              <a:buNone/>
+            </a:pPr>
+            <a:endParaRPr lang="ru-RU" sz="800" b="1" dirty="0">
+              <a:solidFill>
+                <a:srgbClr val="1F4E9B"/>
+              </a:solidFill>
+              <a:latin typeface="HSE Sans" panose="02000000000000000000" pitchFamily="2" charset="0"/>
+            </a:endParaRPr>
+          </a:p>
+          <a:p>
+            <a:pPr marL="171450" indent="-171450">
+              <a:lnSpc>
+                <a:spcPts val="1250"/>
+              </a:lnSpc>
+              <a:spcAft>
+                <a:spcPts val="300"/>
+              </a:spcAft>
+              <a:buFont typeface="Arial"/>
+              <a:buChar char="•"/>
+            </a:pPr>
+            <a:r>
+              <a:rPr lang="en-US" sz="1100" b="1" dirty="0">
+                <a:solidFill>
+                  <a:srgbClr val="1A1A1A"/>
+                </a:solidFill>
+                <a:latin typeface="HSE Sans" panose="02000000000000000000" pitchFamily="2" charset="0"/>
+              </a:rPr>
+              <a:t>AddGaussianSNR</a:t>
+            </a:r>
+            <a:r>
+              <a:rPr lang="ru-RU" sz="1100" dirty="0">
+                <a:solidFill>
+                  <a:srgbClr val="1A1A1A"/>
+                </a:solidFill>
+                <a:latin typeface="HSE Sans" panose="02000000000000000000" pitchFamily="2" charset="0"/>
+              </a:rPr>
+              <a:t> — гауссовский шум, SNR 5–25 дБ</a:t>
+            </a:r>
+          </a:p>
+          <a:p>
+            <a:pPr marL="171450" indent="-171450">
+              <a:lnSpc>
+                <a:spcPts val="1250"/>
+              </a:lnSpc>
+              <a:spcAft>
+                <a:spcPts val="300"/>
+              </a:spcAft>
+              <a:buFont typeface="Arial"/>
+              <a:buChar char="•"/>
+            </a:pPr>
+            <a:r>
+              <a:rPr lang="en-US" sz="1100" b="1" dirty="0">
+                <a:solidFill>
+                  <a:srgbClr val="1A1A1A"/>
+                </a:solidFill>
+                <a:latin typeface="HSE Sans" panose="02000000000000000000" pitchFamily="2" charset="0"/>
+              </a:rPr>
+              <a:t>Shift</a:t>
+            </a:r>
+            <a:r>
+              <a:rPr lang="ru-RU" sz="1100" dirty="0">
+                <a:solidFill>
+                  <a:srgbClr val="1A1A1A"/>
+                </a:solidFill>
+                <a:latin typeface="HSE Sans" panose="02000000000000000000" pitchFamily="2" charset="0"/>
+              </a:rPr>
+              <a:t> — временной сдвиг ±1 с</a:t>
+            </a:r>
+          </a:p>
+          <a:p>
+            <a:pPr marL="171450" indent="-171450">
+              <a:lnSpc>
+                <a:spcPts val="1250"/>
+              </a:lnSpc>
+              <a:spcAft>
+                <a:spcPts val="300"/>
+              </a:spcAft>
+              <a:buFont typeface="Arial"/>
+              <a:buChar char="•"/>
+            </a:pPr>
+            <a:r>
+              <a:rPr lang="en-US" sz="1100" b="1" dirty="0">
+                <a:solidFill>
+                  <a:srgbClr val="1A1A1A"/>
+                </a:solidFill>
+                <a:latin typeface="HSE Sans" panose="02000000000000000000" pitchFamily="2" charset="0"/>
+              </a:rPr>
+              <a:t>Gain</a:t>
+            </a:r>
+            <a:r>
+              <a:rPr lang="ru-RU" sz="1100" dirty="0">
+                <a:solidFill>
+                  <a:srgbClr val="1A1A1A"/>
+                </a:solidFill>
+                <a:latin typeface="HSE Sans" panose="02000000000000000000" pitchFamily="2" charset="0"/>
+              </a:rPr>
+              <a:t> — громкость −9…+6 дБ</a:t>
+            </a:r>
+          </a:p>
+          <a:p>
+            <a:pPr marL="171450" indent="-171450">
+              <a:lnSpc>
+                <a:spcPts val="1250"/>
+              </a:lnSpc>
+              <a:spcAft>
+                <a:spcPts val="300"/>
+              </a:spcAft>
+              <a:buFont typeface="Arial"/>
+              <a:buChar char="•"/>
+            </a:pPr>
+            <a:r>
+              <a:rPr lang="en-US" sz="1100" b="1" dirty="0">
+                <a:solidFill>
+                  <a:srgbClr val="1A1A1A"/>
+                </a:solidFill>
+                <a:latin typeface="HSE Sans" panose="02000000000000000000" pitchFamily="2" charset="0"/>
+              </a:rPr>
+              <a:t>TimeStretch</a:t>
+            </a:r>
+            <a:r>
+              <a:rPr lang="ru-RU" sz="1100" dirty="0">
+                <a:solidFill>
+                  <a:srgbClr val="1A1A1A"/>
+                </a:solidFill>
+                <a:latin typeface="HSE Sans" panose="02000000000000000000" pitchFamily="2" charset="0"/>
+              </a:rPr>
+              <a:t> — растяжение/сжатие ×0,9–1,1</a:t>
+            </a:r>
+          </a:p>
+          <a:p>
+            <a:pPr marL="171450" indent="-171450">
+              <a:lnSpc>
+                <a:spcPts val="1250"/>
+              </a:lnSpc>
+              <a:spcAft>
+                <a:spcPts val="300"/>
+              </a:spcAft>
+              <a:buFont typeface="Arial"/>
+              <a:buChar char="•"/>
+            </a:pPr>
+            <a:r>
+              <a:rPr lang="en-US" sz="1100" b="1" dirty="0">
+                <a:solidFill>
+                  <a:srgbClr val="1A1A1A"/>
+                </a:solidFill>
+                <a:latin typeface="HSE Sans" panose="02000000000000000000" pitchFamily="2" charset="0"/>
+              </a:rPr>
+              <a:t>PitchShift</a:t>
+            </a:r>
+            <a:r>
+              <a:rPr lang="ru-RU" sz="1100" dirty="0">
+                <a:solidFill>
+                  <a:srgbClr val="1A1A1A"/>
+                </a:solidFill>
+                <a:latin typeface="HSE Sans" panose="02000000000000000000" pitchFamily="2" charset="0"/>
+              </a:rPr>
+              <a:t> — сдвиг тона ±2 полутона</a:t>
+            </a:r>
+          </a:p>
+        </p:txBody>
+      </p:sp>
+      <p:sp>
+        <p:nvSpPr>
+          <p:cNvPr id="34" name="TextBox 33">
+            <a:extLst>
+              <a:ext uri="{FF2B5EF4-FFF2-40B4-BE49-F238E27FC236}">
+                <a16:creationId xmlns:a16="http://schemas.microsoft.com/office/drawing/2014/main" id="{A6AB03B8-4D23-2041-9F3A-FAD9A5663AF5}"/>
+              </a:ext>
+            </a:extLst>
+          </p:cNvPr>
+          <p:cNvSpPr txBox="1"/>
+          <p:nvPr/>
+        </p:nvSpPr>
+        <p:spPr>
+          <a:xfrm>
+            <a:off x="8153400" y="4279925"/>
+            <a:ext cx="3479800" cy="1905000"/>
+          </a:xfrm>
+          <a:prstGeom prst="rect">
+            <a:avLst/>
+          </a:prstGeom>
+          <a:noFill/>
+        </p:spPr>
+        <p:txBody>
+          <a:bodyPr vertOverflow="overflow" vert="horz" wrap="square" lIns="0" tIns="0" rIns="0" bIns="0" rtlCol="0" anchor="t">
+            <a:noAutofit/>
+          </a:bodyPr>
+          <a:lstStyle/>
+          <a:p>
+            <a:pPr marL="0" indent="0">
+              <a:buNone/>
+            </a:pPr>
+            <a:r>
+              <a:rPr lang="ru-RU" sz="1300" b="1" dirty="0">
+                <a:solidFill>
+                  <a:srgbClr val="2E7D5B"/>
+                </a:solidFill>
+                <a:latin typeface="HSE Sans" panose="02000000000000000000" pitchFamily="2" charset="0"/>
+              </a:rPr>
+              <a:t>Видео:</a:t>
+            </a:r>
+          </a:p>
+          <a:p>
+            <a:pPr marL="0" indent="0">
+              <a:buNone/>
+            </a:pPr>
+            <a:endParaRPr lang="ru-RU" sz="800" b="1" dirty="0">
+              <a:solidFill>
+                <a:srgbClr val="2E7D5B"/>
+              </a:solidFill>
+              <a:latin typeface="HSE Sans" panose="02000000000000000000" pitchFamily="2" charset="0"/>
+            </a:endParaRPr>
+          </a:p>
+          <a:p>
+            <a:pPr marL="171450" indent="-171450">
+              <a:lnSpc>
+                <a:spcPts val="1250"/>
+              </a:lnSpc>
+              <a:spcAft>
+                <a:spcPts val="300"/>
+              </a:spcAft>
+              <a:buFont typeface="Arial"/>
+              <a:buChar char="•"/>
+            </a:pPr>
+            <a:r>
+              <a:rPr lang="en-US" sz="1100" b="1" dirty="0">
+                <a:solidFill>
+                  <a:srgbClr val="1A1A1A"/>
+                </a:solidFill>
+                <a:latin typeface="HSE Sans" panose="02000000000000000000" pitchFamily="2" charset="0"/>
+              </a:rPr>
+              <a:t>RandomResizedCrop</a:t>
+            </a:r>
+            <a:r>
+              <a:rPr lang="ru-RU" sz="1100" dirty="0">
+                <a:solidFill>
+                  <a:srgbClr val="1A1A1A"/>
+                </a:solidFill>
+                <a:latin typeface="HSE Sans" panose="02000000000000000000" pitchFamily="2" charset="0"/>
+              </a:rPr>
+              <a:t> — случайная обрезка, масштаб 0,85–1,0</a:t>
+            </a:r>
+          </a:p>
+          <a:p>
+            <a:pPr marL="171450" indent="-171450">
+              <a:lnSpc>
+                <a:spcPts val="1250"/>
+              </a:lnSpc>
+              <a:spcAft>
+                <a:spcPts val="300"/>
+              </a:spcAft>
+              <a:buFont typeface="Arial"/>
+              <a:buChar char="•"/>
+            </a:pPr>
+            <a:r>
+              <a:rPr lang="en-US" sz="1100" b="1" dirty="0">
+                <a:solidFill>
+                  <a:srgbClr val="1A1A1A"/>
+                </a:solidFill>
+                <a:latin typeface="HSE Sans" panose="02000000000000000000" pitchFamily="2" charset="0"/>
+              </a:rPr>
+              <a:t>HFlip</a:t>
+            </a:r>
+            <a:r>
+              <a:rPr lang="ru-RU" sz="1100" dirty="0">
+                <a:solidFill>
+                  <a:srgbClr val="1A1A1A"/>
+                </a:solidFill>
+                <a:latin typeface="HSE Sans" panose="02000000000000000000" pitchFamily="2" charset="0"/>
+              </a:rPr>
+              <a:t> — зеркальное отражение</a:t>
+            </a:r>
+          </a:p>
+          <a:p>
+            <a:pPr marL="171450" indent="-171450">
+              <a:lnSpc>
+                <a:spcPts val="1250"/>
+              </a:lnSpc>
+              <a:spcAft>
+                <a:spcPts val="300"/>
+              </a:spcAft>
+              <a:buFont typeface="Arial"/>
+              <a:buChar char="•"/>
+            </a:pPr>
+            <a:r>
+              <a:rPr lang="en-US" sz="1100" b="1" dirty="0">
+                <a:solidFill>
+                  <a:srgbClr val="1A1A1A"/>
+                </a:solidFill>
+                <a:latin typeface="HSE Sans" panose="02000000000000000000" pitchFamily="2" charset="0"/>
+              </a:rPr>
+              <a:t>ColorJitter</a:t>
+            </a:r>
+            <a:r>
+              <a:rPr lang="ru-RU" sz="1100" dirty="0">
+                <a:solidFill>
+                  <a:srgbClr val="1A1A1A"/>
+                </a:solidFill>
+                <a:latin typeface="HSE Sans" panose="02000000000000000000" pitchFamily="2" charset="0"/>
+              </a:rPr>
+              <a:t> — яркость / контраст / насыщенность</a:t>
+            </a:r>
+          </a:p>
+          <a:p>
+            <a:pPr marL="171450" indent="-171450">
+              <a:lnSpc>
+                <a:spcPts val="1250"/>
+              </a:lnSpc>
+              <a:spcAft>
+                <a:spcPts val="300"/>
+              </a:spcAft>
+              <a:buFont typeface="Arial"/>
+              <a:buChar char="•"/>
+            </a:pPr>
+            <a:r>
+              <a:rPr lang="en-US" sz="1100" b="1" dirty="0">
+                <a:solidFill>
+                  <a:srgbClr val="1A1A1A"/>
+                </a:solidFill>
+                <a:latin typeface="HSE Sans" panose="02000000000000000000" pitchFamily="2" charset="0"/>
+              </a:rPr>
+              <a:t>GaussianBlur</a:t>
+            </a:r>
+            <a:r>
+              <a:rPr lang="ru-RU" sz="1100" dirty="0">
+                <a:solidFill>
+                  <a:srgbClr val="1A1A1A"/>
+                </a:solidFill>
+                <a:latin typeface="HSE Sans" panose="02000000000000000000" pitchFamily="2" charset="0"/>
+              </a:rPr>
+              <a:t> — размытие по Гауссу</a:t>
+            </a:r>
+          </a:p>
+          <a:p>
+            <a:pPr marL="171450" indent="-171450">
+              <a:lnSpc>
+                <a:spcPts val="1250"/>
+              </a:lnSpc>
+              <a:spcAft>
+                <a:spcPts val="300"/>
+              </a:spcAft>
+              <a:buFont typeface="Arial"/>
+              <a:buChar char="•"/>
+            </a:pPr>
+            <a:r>
+              <a:rPr lang="en-US" sz="1100" b="1" dirty="0">
+                <a:solidFill>
+                  <a:srgbClr val="1A1A1A"/>
+                </a:solidFill>
+                <a:latin typeface="HSE Sans" panose="02000000000000000000" pitchFamily="2" charset="0"/>
+              </a:rPr>
+              <a:t>RandomErasing</a:t>
+            </a:r>
+            <a:r>
+              <a:rPr lang="ru-RU" sz="1100" dirty="0">
+                <a:solidFill>
+                  <a:srgbClr val="1A1A1A"/>
+                </a:solidFill>
+                <a:latin typeface="HSE Sans" panose="02000000000000000000" pitchFamily="2" charset="0"/>
+              </a:rPr>
+              <a:t> — случайное стирание (cutout)</a:t>
+            </a:r>
+          </a:p>
+        </p:txBody>
+      </p:sp>
+      <p:sp>
+        <p:nvSpPr>
+          <p:cNvPr id="6" name="Заголовок 2">
+            <a:extLst>
+              <a:ext uri="{FF2B5EF4-FFF2-40B4-BE49-F238E27FC236}">
+                <a16:creationId xmlns:a16="http://schemas.microsoft.com/office/drawing/2014/main" id="{5D016CD5-829C-2010-254B-20D6B882D503}"/>
+              </a:ext>
+            </a:extLst>
+          </p:cNvPr>
+          <p:cNvSpPr txBox="1">
+            <a:spLocks/>
+          </p:cNvSpPr>
+          <p:nvPr/>
+        </p:nvSpPr>
+        <p:spPr>
+          <a:xfrm>
+            <a:off x="666489" y="1861070"/>
+            <a:ext cx="3525887" cy="415926"/>
+          </a:xfrm>
+          <a:prstGeom prst="rect">
+            <a:avLst/>
+          </a:prstGeom>
+        </p:spPr>
+        <p:txBody>
+          <a:bodyPr vert="horz" lIns="0" tIns="0" rIns="0" bIns="0" rtlCol="0" anchor="t">
+            <a:normAutofit/>
+          </a:bodyPr>
+          <a:lstStyle>
+            <a:lvl1pPr algn="l" defTabSz="914400" rtl="0" eaLnBrk="1" latinLnBrk="0" hangingPunct="1">
+              <a:lnSpc>
+                <a:spcPct val="100000"/>
+              </a:lnSpc>
+              <a:spcBef>
+                <a:spcPct val="0"/>
+              </a:spcBef>
+              <a:buNone/>
+              <a:defRPr sz="2400" b="0" i="0" kern="1200">
+                <a:solidFill>
+                  <a:schemeClr val="tx1"/>
+                </a:solidFill>
+                <a:latin typeface="HSE Sans" panose="02000000000000000000" pitchFamily="2" charset="0"/>
+                <a:ea typeface="+mj-ea"/>
+                <a:cs typeface="+mj-cs"/>
+              </a:defRPr>
+            </a:lvl1pPr>
+          </a:lstStyle>
+          <a:p>
+            <a:r>
+              <a:rPr lang="ru-RU" sz="1800" b="1" dirty="0"/>
+              <a:t>Используемые датасеты </a:t>
+            </a:r>
+          </a:p>
+        </p:txBody>
+      </p:sp>
+      <p:sp>
+        <p:nvSpPr>
+          <p:cNvPr id="7" name="TextBox 6">
+            <a:extLst>
+              <a:ext uri="{FF2B5EF4-FFF2-40B4-BE49-F238E27FC236}">
+                <a16:creationId xmlns:a16="http://schemas.microsoft.com/office/drawing/2014/main" id="{6503B039-D87C-7B4E-3028-369F683F91C0}"/>
+              </a:ext>
+            </a:extLst>
+          </p:cNvPr>
+          <p:cNvSpPr txBox="1"/>
+          <p:nvPr/>
+        </p:nvSpPr>
+        <p:spPr>
+          <a:xfrm>
+            <a:off x="604520" y="2145233"/>
+            <a:ext cx="7272866" cy="369332"/>
+          </a:xfrm>
+          <a:prstGeom prst="rect">
+            <a:avLst/>
+          </a:prstGeom>
+          <a:noFill/>
+        </p:spPr>
+        <p:txBody>
+          <a:bodyPr wrap="square" rtlCol="0">
+            <a:spAutoFit/>
+          </a:bodyPr>
+          <a:lstStyle/>
+          <a:p>
+            <a:pPr marL="228600" indent="-228600" algn="just">
+              <a:buAutoNum type="arabicPeriod"/>
+            </a:pPr>
+            <a:r>
+              <a:rPr lang="ru-RU" dirty="0" err="1"/>
+              <a:t>Ryerson</a:t>
+            </a:r>
+            <a:r>
+              <a:rPr lang="ru-RU" dirty="0"/>
+              <a:t> Audio-Visual Database </a:t>
+            </a:r>
+            <a:r>
+              <a:rPr lang="ru-RU" dirty="0" err="1"/>
+              <a:t>of</a:t>
+            </a:r>
+            <a:r>
+              <a:rPr lang="ru-RU" dirty="0"/>
+              <a:t> </a:t>
+            </a:r>
+            <a:r>
+              <a:rPr lang="ru-RU" dirty="0" err="1"/>
+              <a:t>Emotional</a:t>
+            </a:r>
+            <a:r>
+              <a:rPr lang="ru-RU" dirty="0"/>
+              <a:t> </a:t>
+            </a:r>
+            <a:r>
+              <a:rPr lang="ru-RU" dirty="0" err="1"/>
+              <a:t>Speech</a:t>
+            </a:r>
+            <a:r>
+              <a:rPr lang="ru-RU" dirty="0"/>
+              <a:t> </a:t>
+            </a:r>
+            <a:r>
+              <a:rPr lang="ru-RU" dirty="0" err="1"/>
+              <a:t>and</a:t>
+            </a:r>
+            <a:r>
+              <a:rPr lang="ru-RU" dirty="0"/>
+              <a:t> </a:t>
+            </a:r>
+            <a:r>
+              <a:rPr lang="ru-RU" dirty="0" err="1"/>
+              <a:t>Song</a:t>
+            </a:r>
+            <a:r>
+              <a:rPr lang="en-US" dirty="0"/>
+              <a:t> (</a:t>
+            </a:r>
+            <a:r>
+              <a:rPr lang="en-US" b="1" dirty="0">
+                <a:latin typeface="HSE Sans" panose="02000000000000000000" pitchFamily="2" charset="0"/>
+              </a:rPr>
+              <a:t>RAVDESS</a:t>
+            </a:r>
+            <a:r>
+              <a:rPr lang="en-US" dirty="0">
+                <a:latin typeface="HSE Sans" panose="02000000000000000000" pitchFamily="2" charset="0"/>
+              </a:rPr>
+              <a:t>)</a:t>
+            </a:r>
+            <a:endParaRPr lang="ru-RU" dirty="0">
+              <a:latin typeface="HSE Sans" panose="02000000000000000000" pitchFamily="2" charset="0"/>
+            </a:endParaRPr>
+          </a:p>
+        </p:txBody>
+      </p:sp>
+      <p:sp>
+        <p:nvSpPr>
+          <p:cNvPr id="8" name="TextBox 7">
+            <a:extLst>
+              <a:ext uri="{FF2B5EF4-FFF2-40B4-BE49-F238E27FC236}">
+                <a16:creationId xmlns:a16="http://schemas.microsoft.com/office/drawing/2014/main" id="{877EEC3B-7375-400B-F2B7-467E7DE6809A}"/>
+              </a:ext>
+            </a:extLst>
+          </p:cNvPr>
+          <p:cNvSpPr txBox="1"/>
+          <p:nvPr/>
+        </p:nvSpPr>
+        <p:spPr>
+          <a:xfrm>
+            <a:off x="604520" y="3496649"/>
+            <a:ext cx="7272866" cy="369332"/>
+          </a:xfrm>
+          <a:prstGeom prst="rect">
+            <a:avLst/>
+          </a:prstGeom>
+          <a:noFill/>
+        </p:spPr>
+        <p:txBody>
+          <a:bodyPr wrap="square" rtlCol="0">
+            <a:spAutoFit/>
+          </a:bodyPr>
+          <a:lstStyle/>
+          <a:p>
+            <a:pPr algn="just"/>
+            <a:r>
+              <a:rPr lang="en-US" dirty="0"/>
+              <a:t>2. </a:t>
+            </a:r>
+            <a:r>
+              <a:rPr lang="ru-RU" dirty="0"/>
+              <a:t>Crowd-</a:t>
+            </a:r>
+            <a:r>
+              <a:rPr lang="ru-RU" dirty="0" err="1"/>
+              <a:t>sourced</a:t>
+            </a:r>
+            <a:r>
+              <a:rPr lang="ru-RU" dirty="0"/>
+              <a:t> </a:t>
+            </a:r>
+            <a:r>
+              <a:rPr lang="ru-RU" dirty="0" err="1"/>
+              <a:t>Emotional</a:t>
+            </a:r>
+            <a:r>
+              <a:rPr lang="ru-RU" dirty="0"/>
+              <a:t> </a:t>
+            </a:r>
+            <a:r>
+              <a:rPr lang="ru-RU" dirty="0" err="1"/>
+              <a:t>Multimodal</a:t>
+            </a:r>
+            <a:r>
+              <a:rPr lang="ru-RU" dirty="0"/>
+              <a:t> </a:t>
+            </a:r>
+            <a:r>
+              <a:rPr lang="ru-RU" dirty="0" err="1"/>
+              <a:t>Actors</a:t>
+            </a:r>
+            <a:r>
+              <a:rPr lang="ru-RU" dirty="0"/>
+              <a:t> </a:t>
+            </a:r>
+            <a:r>
+              <a:rPr lang="ru-RU" dirty="0" err="1"/>
+              <a:t>Dataset</a:t>
+            </a:r>
+            <a:r>
+              <a:rPr lang="en-US" dirty="0"/>
+              <a:t> (</a:t>
+            </a:r>
+            <a:r>
+              <a:rPr lang="en-US" b="1" dirty="0">
+                <a:latin typeface="HSE Sans" panose="02000000000000000000" pitchFamily="2" charset="0"/>
+              </a:rPr>
+              <a:t>CREMA-D</a:t>
+            </a:r>
+            <a:r>
+              <a:rPr lang="en-US" dirty="0">
+                <a:latin typeface="HSE Sans" panose="02000000000000000000" pitchFamily="2" charset="0"/>
+              </a:rPr>
+              <a:t>)</a:t>
+            </a:r>
+            <a:endParaRPr lang="ru-RU" dirty="0">
+              <a:latin typeface="HSE Sans" panose="02000000000000000000" pitchFamily="2" charset="0"/>
+            </a:endParaRPr>
+          </a:p>
+        </p:txBody>
+      </p:sp>
+      <p:sp>
+        <p:nvSpPr>
+          <p:cNvPr id="9" name="TextBox 8">
+            <a:extLst>
+              <a:ext uri="{FF2B5EF4-FFF2-40B4-BE49-F238E27FC236}">
+                <a16:creationId xmlns:a16="http://schemas.microsoft.com/office/drawing/2014/main" id="{D01EEC80-1DB7-4790-AFD5-235F3FC86D11}"/>
+              </a:ext>
+            </a:extLst>
+          </p:cNvPr>
+          <p:cNvSpPr txBox="1"/>
+          <p:nvPr/>
+        </p:nvSpPr>
+        <p:spPr>
+          <a:xfrm>
+            <a:off x="669537" y="4840557"/>
+            <a:ext cx="7272866" cy="369332"/>
+          </a:xfrm>
+          <a:prstGeom prst="rect">
+            <a:avLst/>
+          </a:prstGeom>
+          <a:noFill/>
+        </p:spPr>
+        <p:txBody>
+          <a:bodyPr wrap="square" rtlCol="0">
+            <a:spAutoFit/>
+          </a:bodyPr>
+          <a:lstStyle/>
+          <a:p>
+            <a:pPr algn="just"/>
+            <a:r>
+              <a:rPr lang="ru-RU" dirty="0"/>
+              <a:t>3</a:t>
+            </a:r>
+            <a:r>
+              <a:rPr lang="en-US" dirty="0"/>
+              <a:t>. </a:t>
+            </a:r>
+            <a:r>
+              <a:rPr lang="ru-RU" dirty="0"/>
+              <a:t>Interactive </a:t>
+            </a:r>
+            <a:r>
+              <a:rPr lang="ru-RU" dirty="0" err="1"/>
+              <a:t>emotional</a:t>
+            </a:r>
+            <a:r>
+              <a:rPr lang="ru-RU" dirty="0"/>
+              <a:t> </a:t>
+            </a:r>
+            <a:r>
+              <a:rPr lang="ru-RU" dirty="0" err="1"/>
+              <a:t>dyadic</a:t>
+            </a:r>
+            <a:r>
+              <a:rPr lang="ru-RU" dirty="0"/>
+              <a:t> </a:t>
+            </a:r>
+            <a:r>
+              <a:rPr lang="ru-RU" dirty="0" err="1"/>
+              <a:t>motion</a:t>
+            </a:r>
+            <a:r>
+              <a:rPr lang="ru-RU" dirty="0"/>
+              <a:t> </a:t>
+            </a:r>
+            <a:r>
+              <a:rPr lang="ru-RU" dirty="0" err="1"/>
+              <a:t>capture</a:t>
+            </a:r>
+            <a:r>
+              <a:rPr lang="ru-RU" dirty="0"/>
+              <a:t> </a:t>
+            </a:r>
+            <a:r>
+              <a:rPr lang="ru-RU" dirty="0" err="1"/>
+              <a:t>database</a:t>
+            </a:r>
+            <a:r>
+              <a:rPr lang="en-US" dirty="0"/>
+              <a:t> (</a:t>
+            </a:r>
+            <a:r>
+              <a:rPr lang="en-US" b="1" dirty="0">
+                <a:latin typeface="HSE Sans" panose="02000000000000000000" pitchFamily="2" charset="0"/>
+              </a:rPr>
+              <a:t>IEMOCAP</a:t>
+            </a:r>
+            <a:r>
+              <a:rPr lang="en-US" dirty="0">
+                <a:latin typeface="HSE Sans" panose="02000000000000000000" pitchFamily="2" charset="0"/>
+              </a:rPr>
+              <a:t>)</a:t>
+            </a:r>
+            <a:endParaRPr lang="ru-RU" dirty="0">
+              <a:latin typeface="HSE Sans" panose="02000000000000000000" pitchFamily="2" charset="0"/>
+            </a:endParaRPr>
+          </a:p>
+        </p:txBody>
+      </p:sp>
     </p:spTree>
     <p:extLst>
       <p:ext uri="{BB962C8B-B14F-4D97-AF65-F5344CB8AC3E}">
-        <p14:creationId xmlns:p14="http://schemas.microsoft.com/office/powerpoint/2010/main" val="3647751657"/>
+        <p14:creationId xmlns:p14="http://schemas.microsoft.com/office/powerpoint/2010/main" val="89580110"/>
       </p:ext>
     </p:extLst>
   </p:cSld>
@@ -27042,7 +28869,7 @@
         <p:spPr>
           <a:xfrm>
             <a:off x="666489" y="1160924"/>
-            <a:ext cx="5094599" cy="802343"/>
+            <a:ext cx="6758439" cy="802343"/>
           </a:xfrm>
           <a:prstGeom prst="rect">
             <a:avLst/>
@@ -27074,7 +28901,7 @@
           <a:p>
             <a:r>
               <a:rPr lang="ru-RU" b="1" dirty="0"/>
-              <a:t>Выбор аудиогейта</a:t>
+              <a:t>Общая архитектура предлагаемого решения</a:t>
             </a:r>
           </a:p>
         </p:txBody>
@@ -27759,10 +29586,10 @@
       </p:sp>
       <p:sp>
         <p:nvSpPr>
-          <p:cNvPr id="2" name="TextBox 1">
+          <p:cNvPr id="2" name="Thesis">
             <a:extLst>
               <a:ext uri="{FF2B5EF4-FFF2-40B4-BE49-F238E27FC236}">
-                <a16:creationId xmlns:a16="http://schemas.microsoft.com/office/drawing/2014/main" id="{076A876C-057E-374C-819B-5ADA3745C017}"/>
+                <a16:creationId xmlns:a16="http://schemas.microsoft.com/office/drawing/2014/main" id="{EF433B54-F4EC-7146-8C9B-288A38E196AB}"/>
               </a:ext>
             </a:extLst>
           </p:cNvPr>
@@ -27771,8 +29598,8 @@
         </p:nvSpPr>
         <p:spPr>
           <a:xfrm>
-            <a:off x="666489" y="2006600"/>
-            <a:ext cx="10708648" cy="762000"/>
+            <a:off x="1033462" y="2167362"/>
+            <a:ext cx="4851400" cy="3810000"/>
           </a:xfrm>
           <a:prstGeom prst="rect">
             <a:avLst/>
@@ -27780,126 +29607,54 @@
           <a:noFill/>
         </p:spPr>
         <p:txBody>
-          <a:bodyPr vertOverflow="overflow" vert="horz" wrap="square" lIns="50800" tIns="50800" rIns="50800" bIns="50800" rtlCol="0" anchor="t">
+          <a:bodyPr vertOverflow="overflow" vert="horz" wrap="square" lIns="0" tIns="0" rIns="0" bIns="0" rtlCol="0" anchor="t">
             <a:noAutofit/>
           </a:bodyPr>
-          <a:lstStyle/>
-          <a:p>
-            <a:pPr algn="l"/>
-            <a:r>
-              <a:rPr lang="ru-RU" sz="1400" dirty="0">
-                <a:solidFill>
-                  <a:srgbClr val="1A1A1A"/>
-                </a:solidFill>
-                <a:latin typeface="HSE Sans" panose="02000000000000000000" pitchFamily="2" charset="0"/>
-              </a:rPr>
-              <a:t>Сравнивались 4 модели. Аудиогейтом выбран </a:t>
-            </a:r>
-            <a:r>
-              <a:rPr lang="en-US" sz="1400" dirty="0" err="1">
-                <a:solidFill>
-                  <a:srgbClr val="1A1A1A"/>
-                </a:solidFill>
-                <a:latin typeface="HSE Sans"/>
-              </a:rPr>
-              <a:t>MelCNN</a:t>
-            </a:r>
-            <a:r>
-              <a:rPr lang="en-US" sz="1400" dirty="0">
-                <a:solidFill>
-                  <a:srgbClr val="1A1A1A"/>
-                </a:solidFill>
-                <a:latin typeface="HSE Sans"/>
-              </a:rPr>
-              <a:t> (Log-Mel + CNN): </a:t>
-            </a:r>
-            <a:r>
-              <a:rPr lang="ru-RU" sz="1400" dirty="0">
-                <a:solidFill>
-                  <a:srgbClr val="1A1A1A"/>
-                </a:solidFill>
-                <a:latin typeface="HSE Sans" panose="02000000000000000000" pitchFamily="2" charset="0"/>
-              </a:rPr>
-              <a:t>лучший баланс качества и стоимости — 0,827 </a:t>
-            </a:r>
-            <a:r>
-              <a:rPr lang="en-US" sz="1400" dirty="0">
-                <a:solidFill>
-                  <a:srgbClr val="1A1A1A"/>
-                </a:solidFill>
-                <a:latin typeface="HSE Sans"/>
-              </a:rPr>
-              <a:t>acc / 0,734 macro F1 </a:t>
-            </a:r>
-            <a:r>
-              <a:rPr lang="ru-RU" sz="1400" dirty="0">
-                <a:solidFill>
-                  <a:srgbClr val="1A1A1A"/>
-                </a:solidFill>
-                <a:latin typeface="HSE Sans" panose="02000000000000000000" pitchFamily="2" charset="0"/>
-              </a:rPr>
-              <a:t>при 3,4 мс и 8,1 МБ. </a:t>
-            </a:r>
-            <a:r>
-              <a:rPr lang="en-US" sz="1400" dirty="0">
-                <a:solidFill>
-                  <a:srgbClr val="1A1A1A"/>
-                </a:solidFill>
-                <a:latin typeface="HSE Sans"/>
-              </a:rPr>
-              <a:t>DistilHuBERT </a:t>
-            </a:r>
-            <a:r>
-              <a:rPr lang="ru-RU" sz="1400" dirty="0">
-                <a:solidFill>
-                  <a:srgbClr val="1A1A1A"/>
-                </a:solidFill>
-                <a:latin typeface="HSE Sans" panose="02000000000000000000" pitchFamily="2" charset="0"/>
-              </a:rPr>
-              <a:t>точнее (0,904), но 89,6 МБ и 15 мс; </a:t>
-            </a:r>
-            <a:r>
-              <a:rPr lang="en-US" sz="1400" dirty="0">
-                <a:solidFill>
-                  <a:srgbClr val="1A1A1A"/>
-                </a:solidFill>
-                <a:latin typeface="HSE Sans"/>
-              </a:rPr>
-              <a:t>Wav2Vec2 — 360 </a:t>
-            </a:r>
-            <a:r>
-              <a:rPr lang="ru-RU" sz="1400" dirty="0">
-                <a:solidFill>
-                  <a:srgbClr val="1A1A1A"/>
-                </a:solidFill>
-                <a:latin typeface="HSE Sans" panose="02000000000000000000" pitchFamily="2" charset="0"/>
-              </a:rPr>
-              <a:t>МБ; </a:t>
-            </a:r>
-            <a:r>
-              <a:rPr lang="en-US" sz="1400" dirty="0">
-                <a:solidFill>
-                  <a:srgbClr val="1A1A1A"/>
-                </a:solidFill>
-                <a:latin typeface="HSE Sans"/>
-              </a:rPr>
-              <a:t>MFCC + SVM </a:t>
-            </a:r>
-            <a:r>
-              <a:rPr lang="ru-RU" sz="1400" dirty="0">
-                <a:solidFill>
-                  <a:srgbClr val="1A1A1A"/>
-                </a:solidFill>
-                <a:latin typeface="HSE Sans" panose="02000000000000000000" pitchFamily="2" charset="0"/>
-              </a:rPr>
-              <a:t>заметно слабее.</a:t>
-            </a:r>
-            <a:endParaRPr lang="en-US" sz="1400" dirty="0">
-              <a:solidFill>
-                <a:srgbClr val="1A1A1A"/>
-              </a:solidFill>
-              <a:latin typeface="HSE Sans"/>
-            </a:endParaRPr>
+          <a:lstStyle>
+            <a:defPPr>
+              <a:defRPr lang="en-RU"/>
+            </a:defPPr>
+            <a:lvl1pPr marL="285750" indent="-285750">
+              <a:buFont typeface="Arial" panose="020B0604020202020204" pitchFamily="34" charset="0"/>
+              <a:buChar char="•"/>
+              <a:defRPr sz="1400">
+                <a:latin typeface="HSE Sans" panose="02000000000000000000" pitchFamily="2" charset="0"/>
+              </a:defRPr>
+            </a:lvl1pPr>
+          </a:lstStyle>
+          <a:p>
+            <a:r>
+              <a:rPr lang="ru-RU" sz="1600" dirty="0"/>
+              <a:t>Двухстадийная каскадная архитектура с ранним решением об активации видео ветви</a:t>
+            </a:r>
+          </a:p>
+          <a:p>
+            <a:endParaRPr lang="ru-RU" sz="1600" dirty="0"/>
+          </a:p>
+          <a:p>
+            <a:r>
+              <a:rPr lang="ru-RU" sz="1600" dirty="0"/>
+              <a:t>Лёгкий бинарный классификатор на входе фильтрует нейтральную речь</a:t>
+            </a:r>
+          </a:p>
+          <a:p>
+            <a:endParaRPr lang="ru-RU" sz="1600" dirty="0"/>
+          </a:p>
+          <a:p>
+            <a:r>
+              <a:rPr lang="ru-RU" sz="1600" dirty="0"/>
+              <a:t>Обработка видео и бимодальный классификатор запускаются только для эмоциональной речи</a:t>
+            </a:r>
+          </a:p>
+          <a:p>
+            <a:endParaRPr lang="ru-RU" sz="1600" dirty="0"/>
+          </a:p>
+          <a:p>
+            <a:r>
+              <a:rPr lang="ru-RU" sz="1600" dirty="0"/>
+              <a:t>Возврат метки «нейтрально» без запуска детектора лиц и видео-ветви</a:t>
+            </a:r>
+            <a:endParaRPr lang="en-US" sz="1600" dirty="0"/>
           </a:p>
         </p:txBody>
       </p:sp>
@@ -27908,7 +29663,7 @@
           <p:cNvPr id="3" name="Picture 2">
             <a:extLst>
               <a:ext uri="{FF2B5EF4-FFF2-40B4-BE49-F238E27FC236}">
-                <a16:creationId xmlns:a16="http://schemas.microsoft.com/office/drawing/2014/main" id="{CF1C56F9-CF95-0B15-9D06-0F2DFDED7283}"/>
+                <a16:creationId xmlns:a16="http://schemas.microsoft.com/office/drawing/2014/main" id="{5B9C7289-3EB8-F165-8A73-667819B43987}"/>
               </a:ext>
             </a:extLst>
           </p:cNvPr>
@@ -27925,18 +29680,59 @@
         </p:blipFill>
         <p:spPr>
           <a:xfrm>
-            <a:off x="432813" y="2932312"/>
-            <a:ext cx="10942324" cy="2713430"/>
+            <a:off x="6674111" y="1160924"/>
+            <a:ext cx="4851400" cy="5112228"/>
           </a:xfrm>
           <a:prstGeom prst="rect">
             <a:avLst/>
           </a:prstGeom>
         </p:spPr>
       </p:pic>
+      <p:sp>
+        <p:nvSpPr>
+          <p:cNvPr id="5" name="TextBox 4">
+            <a:extLst>
+              <a:ext uri="{FF2B5EF4-FFF2-40B4-BE49-F238E27FC236}">
+                <a16:creationId xmlns:a16="http://schemas.microsoft.com/office/drawing/2014/main" id="{A07EF551-942F-6733-AFE0-25699B5ACC45}"/>
+              </a:ext>
+            </a:extLst>
+          </p:cNvPr>
+          <p:cNvSpPr txBox="1"/>
+          <p:nvPr/>
+        </p:nvSpPr>
+        <p:spPr>
+          <a:xfrm>
+            <a:off x="7971649" y="6232322"/>
+            <a:ext cx="2256323" cy="307777"/>
+          </a:xfrm>
+          <a:prstGeom prst="rect">
+            <a:avLst/>
+          </a:prstGeom>
+          <a:noFill/>
+        </p:spPr>
+        <p:txBody>
+          <a:bodyPr wrap="none" rtlCol="0">
+            <a:spAutoFit/>
+          </a:bodyPr>
+          <a:lstStyle/>
+          <a:p>
+            <a:pPr algn="l"/>
+            <a:r>
+              <a:rPr lang="ru-RU" sz="1400" dirty="0">
+                <a:latin typeface="HSE Sans" panose="02000000000000000000" pitchFamily="2" charset="0"/>
+              </a:rPr>
+              <a:t>Предлагаемая архитектура</a:t>
+            </a:r>
+            <a:endParaRPr lang="en-US" sz="1400" dirty="0">
+              <a:latin typeface="HSE Sans" panose="02000000000000000000" pitchFamily="2" charset="0"/>
+            </a:endParaRPr>
+          </a:p>
+        </p:txBody>
+      </p:sp>
     </p:spTree>
     <p:extLst>
       <p:ext uri="{BB962C8B-B14F-4D97-AF65-F5344CB8AC3E}">
-        <p14:creationId xmlns:p14="http://schemas.microsoft.com/office/powerpoint/2010/main" val="1169861596"/>
+        <p14:creationId xmlns:p14="http://schemas.microsoft.com/office/powerpoint/2010/main" val="3647751657"/>
       </p:ext>
     </p:extLst>
   </p:cSld>
@@ -28012,7 +29808,7 @@
           <a:p>
             <a:r>
               <a:rPr lang="ru-RU" b="1" dirty="0"/>
-              <a:t>Выбор видео-модели</a:t>
+              <a:t>Выбор аудиогейта</a:t>
             </a:r>
           </a:p>
         </p:txBody>
@@ -28700,7 +30496,7 @@
           <p:cNvPr id="2" name="TextBox 1">
             <a:extLst>
               <a:ext uri="{FF2B5EF4-FFF2-40B4-BE49-F238E27FC236}">
-                <a16:creationId xmlns:a16="http://schemas.microsoft.com/office/drawing/2014/main" id="{897608D0-359F-3E40-BF29-3346EA0AFAC1}"/>
+                <a16:creationId xmlns:a16="http://schemas.microsoft.com/office/drawing/2014/main" id="{076A876C-057E-374C-819B-5ADA3745C017}"/>
               </a:ext>
             </a:extLst>
           </p:cNvPr>
@@ -28709,8 +30505,8 @@
         </p:nvSpPr>
         <p:spPr>
           <a:xfrm>
-            <a:off x="457200" y="2006600"/>
-            <a:ext cx="11328400" cy="762000"/>
+            <a:off x="666489" y="1609762"/>
+            <a:ext cx="10708648" cy="762000"/>
           </a:xfrm>
           <a:prstGeom prst="rect">
             <a:avLst/>
@@ -28723,76 +30519,17 @@
           </a:bodyPr>
           <a:lstStyle/>
           <a:p>
-            <a:pPr algn="l"/>
-            <a:r>
-              <a:rPr lang="ru-RU" sz="1400">
-                <a:solidFill>
-                  <a:srgbClr val="1A1A1A"/>
-                </a:solidFill>
-                <a:latin typeface="HSE Sans" panose="02000000000000000000" pitchFamily="2" charset="0"/>
-              </a:rPr>
-              <a:t>6 конфигураций «бэкбон × агрегатор» на </a:t>
-            </a:r>
-            <a:r>
-              <a:rPr lang="en-US" sz="1400">
-                <a:solidFill>
-                  <a:srgbClr val="1A1A1A"/>
-                </a:solidFill>
-                <a:latin typeface="HSE Sans"/>
-              </a:rPr>
-              <a:t>RAVDESS (8 </a:t>
-            </a:r>
-            <a:r>
-              <a:rPr lang="ru-RU" sz="1400">
-                <a:solidFill>
-                  <a:srgbClr val="1A1A1A"/>
-                </a:solidFill>
-                <a:latin typeface="HSE Sans" panose="02000000000000000000" pitchFamily="2" charset="0"/>
-              </a:rPr>
-              <a:t>эмоций). Выбран </a:t>
-            </a:r>
-            <a:r>
-              <a:rPr lang="en-US" sz="1400">
-                <a:solidFill>
-                  <a:srgbClr val="1A1A1A"/>
-                </a:solidFill>
-                <a:latin typeface="HSE Sans"/>
-              </a:rPr>
-              <a:t>EmotiEffNet + BiLSTM (0,683 acc / 0,671 F1): EmotiEffNet </a:t>
-            </a:r>
-            <a:r>
-              <a:rPr lang="ru-RU" sz="1400">
-                <a:solidFill>
-                  <a:srgbClr val="1A1A1A"/>
-                </a:solidFill>
-                <a:latin typeface="HSE Sans" panose="02000000000000000000" pitchFamily="2" charset="0"/>
-              </a:rPr>
-              <a:t>существенно превосходит </a:t>
-            </a:r>
-            <a:r>
-              <a:rPr lang="en-US" sz="1400">
-                <a:solidFill>
-                  <a:srgbClr val="1A1A1A"/>
-                </a:solidFill>
-                <a:latin typeface="HSE Sans"/>
-              </a:rPr>
-              <a:t>MobileNetV3-Small </a:t>
-            </a:r>
-            <a:r>
-              <a:rPr lang="ru-RU" sz="1400">
-                <a:solidFill>
-                  <a:srgbClr val="1A1A1A"/>
-                </a:solidFill>
-                <a:latin typeface="HSE Sans" panose="02000000000000000000" pitchFamily="2" charset="0"/>
-              </a:rPr>
-              <a:t>по качеству при сопоставимом времени инференса (~247–276 мс).</a:t>
-            </a:r>
-            <a:endParaRPr lang="en-US" sz="1400" dirty="0">
-              <a:solidFill>
-                <a:srgbClr val="1A1A1A"/>
-              </a:solidFill>
-              <a:latin typeface="HSE Sans"/>
-            </a:endParaRPr>
+            <a:pPr algn="just">
+              <a:lnSpc>
+                <a:spcPct val="100000"/>
+              </a:lnSpc>
+            </a:pPr>
+            <a:r>
+              <a:rPr lang="ru-RU" sz="1400" dirty="0">
+                <a:latin typeface="HSE Sans" panose="02000000000000000000" pitchFamily="2" charset="0"/>
+              </a:rPr>
+              <a:t>Сравнивались 4 бинарных аудио классификатора «нейтрально / не нейтрально». </a:t>
+            </a:r>
           </a:p>
         </p:txBody>
       </p:sp>
@@ -28801,7 +30538,7 @@
           <p:cNvPr id="3" name="Picture 2">
             <a:extLst>
               <a:ext uri="{FF2B5EF4-FFF2-40B4-BE49-F238E27FC236}">
-                <a16:creationId xmlns:a16="http://schemas.microsoft.com/office/drawing/2014/main" id="{7678BCCA-8FC4-B26E-AF90-18FCA4A1AEC6}"/>
+                <a16:creationId xmlns:a16="http://schemas.microsoft.com/office/drawing/2014/main" id="{CF1C56F9-CF95-0B15-9D06-0F2DFDED7283}"/>
               </a:ext>
             </a:extLst>
           </p:cNvPr>
@@ -28818,18 +30555,308 @@
         </p:blipFill>
         <p:spPr>
           <a:xfrm>
-            <a:off x="508000" y="3048000"/>
-            <a:ext cx="11176000" cy="3336963"/>
+            <a:off x="666489" y="3166629"/>
+            <a:ext cx="10893597" cy="2701345"/>
           </a:xfrm>
           <a:prstGeom prst="rect">
             <a:avLst/>
           </a:prstGeom>
         </p:spPr>
       </p:pic>
+      <p:sp>
+        <p:nvSpPr>
+          <p:cNvPr id="240" name="audioList"/>
+          <p:cNvSpPr/>
+          <p:nvPr/>
+        </p:nvSpPr>
+        <p:spPr>
+          <a:xfrm>
+            <a:off x="666489" y="2010034"/>
+            <a:ext cx="5265620" cy="2500709"/>
+          </a:xfrm>
+          <a:prstGeom prst="rect">
+            <a:avLst/>
+          </a:prstGeom>
+          <a:noFill/>
+        </p:spPr>
+        <p:txBody>
+          <a:bodyPr lIns="0" tIns="0" rIns="0" bIns="0" anchor="t">
+            <a:normAutofit/>
+          </a:bodyPr>
+          <a:lstStyle/>
+          <a:p>
+            <a:pPr marL="171450" indent="-171450" algn="just">
+              <a:lnSpc>
+                <a:spcPct val="102000"/>
+              </a:lnSpc>
+              <a:spcBef>
+                <a:spcPts val="700"/>
+              </a:spcBef>
+              <a:buFont typeface="Arial"/>
+              <a:buChar char="•"/>
+            </a:pPr>
+            <a:r>
+              <a:rPr lang="en-US" sz="1400" b="1" dirty="0">
+                <a:latin typeface="HSE Sans"/>
+              </a:rPr>
+              <a:t>MelCNN</a:t>
+            </a:r>
+            <a:r>
+              <a:rPr lang="ru-RU" sz="1400" dirty="0">
+                <a:latin typeface="HSE Sans" panose="02000000000000000000" pitchFamily="2" charset="0"/>
+              </a:rPr>
+              <a:t> — лог-мел </a:t>
+            </a:r>
+            <a:r>
+              <a:rPr lang="ru-RU" sz="1400" dirty="0" err="1">
+                <a:latin typeface="HSE Sans" panose="02000000000000000000" pitchFamily="2" charset="0"/>
+              </a:rPr>
+              <a:t>спектограмма</a:t>
+            </a:r>
+            <a:r>
+              <a:rPr lang="ru-RU" sz="1400" dirty="0">
+                <a:latin typeface="HSE Sans" panose="02000000000000000000" pitchFamily="2" charset="0"/>
+              </a:rPr>
+              <a:t> + сверточная нейронная сеть; лучший баланс, самый лёгкий (8 МБ) и быстрый (3,4 мс)</a:t>
+            </a:r>
+          </a:p>
+          <a:p>
+            <a:pPr marL="171450" indent="-171450" algn="just">
+              <a:lnSpc>
+                <a:spcPct val="102000"/>
+              </a:lnSpc>
+              <a:spcBef>
+                <a:spcPts val="700"/>
+              </a:spcBef>
+              <a:buFont typeface="Arial"/>
+              <a:buChar char="•"/>
+            </a:pPr>
+            <a:r>
+              <a:rPr lang="en-US" sz="1400" b="1" dirty="0">
+                <a:latin typeface="HSE Sans"/>
+              </a:rPr>
+              <a:t>DistilHuBERT + Linear</a:t>
+            </a:r>
+            <a:r>
+              <a:rPr lang="ru-RU" sz="1400" dirty="0">
+                <a:latin typeface="HSE Sans" panose="02000000000000000000" pitchFamily="2" charset="0"/>
+              </a:rPr>
+              <a:t> — замороженный SSL-энкодер; самое высокое качество (0,904), но 90 МБ</a:t>
+            </a:r>
+          </a:p>
+        </p:txBody>
+      </p:sp>
+      <p:sp>
+        <p:nvSpPr>
+          <p:cNvPr id="6" name="TextBox 5">
+            <a:extLst>
+              <a:ext uri="{FF2B5EF4-FFF2-40B4-BE49-F238E27FC236}">
+                <a16:creationId xmlns:a16="http://schemas.microsoft.com/office/drawing/2014/main" id="{9D05ADEF-0DD8-9417-7E13-8B55B14D9F35}"/>
+              </a:ext>
+            </a:extLst>
+          </p:cNvPr>
+          <p:cNvSpPr txBox="1"/>
+          <p:nvPr/>
+        </p:nvSpPr>
+        <p:spPr>
+          <a:xfrm>
+            <a:off x="6259892" y="1990762"/>
+            <a:ext cx="5300194" cy="1053558"/>
+          </a:xfrm>
+          <a:prstGeom prst="rect">
+            <a:avLst/>
+          </a:prstGeom>
+          <a:noFill/>
+        </p:spPr>
+        <p:txBody>
+          <a:bodyPr wrap="square">
+            <a:spAutoFit/>
+          </a:bodyPr>
+          <a:lstStyle/>
+          <a:p>
+            <a:pPr marL="171450" indent="-171450" algn="just">
+              <a:lnSpc>
+                <a:spcPct val="102000"/>
+              </a:lnSpc>
+              <a:spcBef>
+                <a:spcPts val="700"/>
+              </a:spcBef>
+              <a:buFont typeface="Arial"/>
+              <a:buChar char="•"/>
+            </a:pPr>
+            <a:r>
+              <a:rPr lang="en-US" sz="1400" b="1" dirty="0">
+                <a:latin typeface="HSE Sans"/>
+              </a:rPr>
+              <a:t>Wav2Vec 2.0 + MLP</a:t>
+            </a:r>
+            <a:r>
+              <a:rPr lang="ru-RU" sz="1400" dirty="0">
+                <a:latin typeface="HSE Sans" panose="02000000000000000000" pitchFamily="2" charset="0"/>
+              </a:rPr>
+              <a:t> — замороженный wav2vec2; низкий </a:t>
+            </a:r>
+            <a:r>
+              <a:rPr lang="ru-RU" sz="1400" dirty="0" err="1">
+                <a:latin typeface="HSE Sans" panose="02000000000000000000" pitchFamily="2" charset="0"/>
+              </a:rPr>
+              <a:t>recall</a:t>
+            </a:r>
+            <a:r>
+              <a:rPr lang="ru-RU" sz="1400" dirty="0">
+                <a:latin typeface="HSE Sans" panose="02000000000000000000" pitchFamily="2" charset="0"/>
+              </a:rPr>
+              <a:t> (0,51), 360 МБ, медленный</a:t>
+            </a:r>
+          </a:p>
+          <a:p>
+            <a:pPr marL="171450" indent="-171450" algn="just">
+              <a:lnSpc>
+                <a:spcPct val="102000"/>
+              </a:lnSpc>
+              <a:spcBef>
+                <a:spcPts val="700"/>
+              </a:spcBef>
+              <a:buFont typeface="Arial"/>
+              <a:buChar char="•"/>
+            </a:pPr>
+            <a:r>
+              <a:rPr lang="en-US" sz="1400" b="1" dirty="0">
+                <a:latin typeface="HSE Sans"/>
+              </a:rPr>
+              <a:t>MFCC + SVM</a:t>
+            </a:r>
+            <a:r>
+              <a:rPr lang="ru-RU" sz="1400" dirty="0">
+                <a:latin typeface="HSE Sans" panose="02000000000000000000" pitchFamily="2" charset="0"/>
+              </a:rPr>
+              <a:t> — классический </a:t>
+            </a:r>
+            <a:r>
+              <a:rPr lang="ru-RU" sz="1400" dirty="0" err="1">
+                <a:latin typeface="HSE Sans" panose="02000000000000000000" pitchFamily="2" charset="0"/>
+              </a:rPr>
+              <a:t>бейзлайн</a:t>
+            </a:r>
+            <a:r>
+              <a:rPr lang="ru-RU" sz="1400" dirty="0">
+                <a:latin typeface="HSE Sans" panose="02000000000000000000" pitchFamily="2" charset="0"/>
+              </a:rPr>
+              <a:t>; заметно слабее, низкие метрики качества</a:t>
+            </a:r>
+          </a:p>
+        </p:txBody>
+      </p:sp>
+      <p:sp>
+        <p:nvSpPr>
+          <p:cNvPr id="8" name="TextBox 7">
+            <a:extLst>
+              <a:ext uri="{FF2B5EF4-FFF2-40B4-BE49-F238E27FC236}">
+                <a16:creationId xmlns:a16="http://schemas.microsoft.com/office/drawing/2014/main" id="{40F0F4D6-BF8C-4805-08BB-6B848DF2F1DF}"/>
+              </a:ext>
+            </a:extLst>
+          </p:cNvPr>
+          <p:cNvSpPr txBox="1"/>
+          <p:nvPr/>
+        </p:nvSpPr>
+        <p:spPr>
+          <a:xfrm>
+            <a:off x="666488" y="6125819"/>
+            <a:ext cx="10708647" cy="338554"/>
+          </a:xfrm>
+          <a:prstGeom prst="rect">
+            <a:avLst/>
+          </a:prstGeom>
+          <a:noFill/>
+        </p:spPr>
+        <p:txBody>
+          <a:bodyPr wrap="square">
+            <a:spAutoFit/>
+          </a:bodyPr>
+          <a:lstStyle/>
+          <a:p>
+            <a:r>
+              <a:rPr lang="ru-RU" sz="1600" dirty="0">
+                <a:latin typeface="HSE Sans" panose="02000000000000000000" pitchFamily="2" charset="0"/>
+              </a:rPr>
+              <a:t>Выбран </a:t>
+            </a:r>
+            <a:r>
+              <a:rPr lang="en-US" sz="1600" b="1" dirty="0" err="1">
+                <a:latin typeface="HSE Sans"/>
+              </a:rPr>
+              <a:t>MelCNN</a:t>
+            </a:r>
+            <a:r>
+              <a:rPr lang="ru-RU" sz="1600" dirty="0">
+                <a:latin typeface="HSE Sans" panose="02000000000000000000" pitchFamily="2" charset="0"/>
+              </a:rPr>
+              <a:t> — лучший баланс качества и стоимости (0,827 </a:t>
+            </a:r>
+            <a:r>
+              <a:rPr lang="ru-RU" sz="1600" dirty="0" err="1">
+                <a:latin typeface="HSE Sans" panose="02000000000000000000" pitchFamily="2" charset="0"/>
+              </a:rPr>
+              <a:t>acc</a:t>
+            </a:r>
+            <a:r>
+              <a:rPr lang="ru-RU" sz="1600" dirty="0">
+                <a:latin typeface="HSE Sans" panose="02000000000000000000" pitchFamily="2" charset="0"/>
+              </a:rPr>
+              <a:t> / 0,734 F1; 3,4 мс; 8,1 МБ).</a:t>
+            </a:r>
+            <a:endParaRPr lang="en-US" sz="1600" dirty="0"/>
+          </a:p>
+        </p:txBody>
+      </p:sp>
+      <p:sp>
+        <p:nvSpPr>
+          <p:cNvPr id="9" name="TextBox 8">
+            <a:extLst>
+              <a:ext uri="{FF2B5EF4-FFF2-40B4-BE49-F238E27FC236}">
+                <a16:creationId xmlns:a16="http://schemas.microsoft.com/office/drawing/2014/main" id="{B0961ABF-EC6D-0161-F681-77F89133CC20}"/>
+              </a:ext>
+            </a:extLst>
+          </p:cNvPr>
+          <p:cNvSpPr txBox="1"/>
+          <p:nvPr/>
+        </p:nvSpPr>
+        <p:spPr>
+          <a:xfrm>
+            <a:off x="4002869" y="5767873"/>
+            <a:ext cx="4608634" cy="307777"/>
+          </a:xfrm>
+          <a:prstGeom prst="rect">
+            <a:avLst/>
+          </a:prstGeom>
+          <a:noFill/>
+        </p:spPr>
+        <p:txBody>
+          <a:bodyPr wrap="none" rtlCol="0">
+            <a:spAutoFit/>
+          </a:bodyPr>
+          <a:lstStyle/>
+          <a:p>
+            <a:pPr algn="ctr"/>
+            <a:r>
+              <a:rPr lang="ru-RU" sz="1400" dirty="0">
+                <a:latin typeface="HSE Sans" panose="02000000000000000000" pitchFamily="2" charset="0"/>
+              </a:rPr>
+              <a:t>Метрики сравнения аудио моделей</a:t>
+            </a:r>
+            <a:r>
+              <a:rPr lang="en-US" sz="1400" dirty="0">
+                <a:latin typeface="HSE Sans" panose="02000000000000000000" pitchFamily="2" charset="0"/>
+              </a:rPr>
+              <a:t> (RAVDESS + CREMA-D)</a:t>
+            </a:r>
+          </a:p>
+        </p:txBody>
+      </p:sp>
     </p:spTree>
     <p:extLst>
       <p:ext uri="{BB962C8B-B14F-4D97-AF65-F5344CB8AC3E}">
-        <p14:creationId xmlns:p14="http://schemas.microsoft.com/office/powerpoint/2010/main" val="2748530575"/>
+        <p14:creationId xmlns:p14="http://schemas.microsoft.com/office/powerpoint/2010/main" val="2641225567"/>
       </p:ext>
     </p:extLst>
   </p:cSld>
@@ -28905,7 +30932,7 @@
           <a:p>
             <a:r>
               <a:rPr lang="ru-RU" b="1" dirty="0"/>
-              <a:t>Итоговая архитектура системы</a:t>
+              <a:t>Выбор видео-модели</a:t>
             </a:r>
           </a:p>
         </p:txBody>
@@ -29590,10 +31617,10 @@
       </p:sp>
       <p:sp>
         <p:nvSpPr>
-          <p:cNvPr id="2" name="Intro7">
+          <p:cNvPr id="2" name="TextBox 1">
             <a:extLst>
               <a:ext uri="{FF2B5EF4-FFF2-40B4-BE49-F238E27FC236}">
-                <a16:creationId xmlns:a16="http://schemas.microsoft.com/office/drawing/2014/main" id="{186E8000-AD89-7442-A431-F1FCCEFC7CC5}"/>
+                <a16:creationId xmlns:a16="http://schemas.microsoft.com/office/drawing/2014/main" id="{897608D0-359F-3E40-BF29-3346EA0AFAC1}"/>
               </a:ext>
             </a:extLst>
           </p:cNvPr>
@@ -29602,8 +31629,8 @@
         </p:nvSpPr>
         <p:spPr>
           <a:xfrm>
-            <a:off x="666489" y="5165396"/>
-            <a:ext cx="10871200" cy="635000"/>
+            <a:off x="628389" y="1546779"/>
+            <a:ext cx="11328400" cy="415971"/>
           </a:xfrm>
           <a:prstGeom prst="rect">
             <a:avLst/>
@@ -29611,29 +31638,166 @@
           <a:noFill/>
         </p:spPr>
         <p:txBody>
-          <a:bodyPr vertOverflow="overflow" vert="horz" wrap="square" lIns="50800" tIns="25400" rIns="50800" bIns="25400" rtlCol="0" anchor="t">
+          <a:bodyPr vertOverflow="overflow" vert="horz" wrap="square" lIns="50800" tIns="50800" rIns="50800" bIns="50800" rtlCol="0" anchor="t">
             <a:noAutofit/>
           </a:bodyPr>
           <a:lstStyle/>
           <a:p>
-            <a:pPr algn="l"/>
-            <a:r>
-              <a:rPr lang="en-US" sz="1400" dirty="0" err="1">
+            <a:pPr algn="l">
+              <a:lnSpc>
+                <a:spcPct val="100000"/>
+              </a:lnSpc>
+            </a:pPr>
+            <a:r>
+              <a:rPr lang="ru-RU" sz="1400" dirty="0">
                 <a:solidFill>
                   <a:srgbClr val="1A1A1A"/>
                 </a:solidFill>
+                <a:latin typeface="HSE Sans" panose="02000000000000000000" pitchFamily="2" charset="0"/>
+              </a:rPr>
+              <a:t>Сравнивались 6 конфигураций «бэкбон × агрегатор» на RAVDESS. Выбран </a:t>
+            </a:r>
+            <a:r>
+              <a:rPr lang="en-US" sz="1400" b="1" dirty="0">
+                <a:solidFill>
+                  <a:srgbClr val="C0392B"/>
+                </a:solidFill>
                 <a:latin typeface="HSE Sans"/>
               </a:rPr>
-              <a:t>MelCNN</a:t>
-            </a:r>
-            <a:r>
-              <a:rPr lang="en-US" sz="1400" dirty="0">
+              <a:t>EmotiEffNet + BiLSTM</a:t>
+            </a:r>
+            <a:r>
+              <a:rPr lang="ru-RU" sz="1400" dirty="0">
                 <a:solidFill>
                   <a:srgbClr val="1A1A1A"/>
                 </a:solidFill>
+                <a:latin typeface="HSE Sans" panose="02000000000000000000" pitchFamily="2" charset="0"/>
+              </a:rPr>
+              <a:t> (0,683 acc / 0,671 F1).</a:t>
+            </a:r>
+          </a:p>
+        </p:txBody>
+      </p:sp>
+      <p:sp>
+        <p:nvSpPr>
+          <p:cNvPr id="240" name="videoList"/>
+          <p:cNvSpPr/>
+          <p:nvPr/>
+        </p:nvSpPr>
+        <p:spPr>
+          <a:xfrm>
+            <a:off x="666489" y="1962750"/>
+            <a:ext cx="4546600" cy="1264521"/>
+          </a:xfrm>
+          <a:prstGeom prst="rect">
+            <a:avLst/>
+          </a:prstGeom>
+          <a:noFill/>
+        </p:spPr>
+        <p:txBody>
+          <a:bodyPr lIns="0" tIns="0" rIns="0" bIns="0" anchor="t">
+            <a:normAutofit/>
+          </a:bodyPr>
+          <a:lstStyle/>
+          <a:p>
+            <a:pPr marL="0" indent="0">
+              <a:spcBef>
+                <a:spcPts val="600"/>
+              </a:spcBef>
+              <a:buNone/>
+            </a:pPr>
+            <a:r>
+              <a:rPr lang="en-US" sz="1400" b="1" dirty="0" err="1">
+                <a:solidFill>
+                  <a:srgbClr val="2E86C1"/>
+                </a:solidFill>
                 <a:latin typeface="HSE Sans"/>
               </a:rPr>
-              <a:t>-</a:t>
+              <a:t>Бэкбоны</a:t>
+            </a:r>
+            <a:r>
+              <a:rPr lang="en-US" sz="1400" b="1" dirty="0">
+                <a:solidFill>
+                  <a:srgbClr val="2E86C1"/>
+                </a:solidFill>
+                <a:latin typeface="HSE Sans"/>
+              </a:rPr>
+              <a:t> (</a:t>
+            </a:r>
+            <a:r>
+              <a:rPr lang="en-US" sz="1400" b="1" dirty="0" err="1">
+                <a:solidFill>
+                  <a:srgbClr val="2E86C1"/>
+                </a:solidFill>
+                <a:latin typeface="HSE Sans"/>
+              </a:rPr>
+              <a:t>извлечение</a:t>
+            </a:r>
+            <a:r>
+              <a:rPr lang="en-US" sz="1400" b="1" dirty="0">
+                <a:solidFill>
+                  <a:srgbClr val="2E86C1"/>
+                </a:solidFill>
+                <a:latin typeface="HSE Sans"/>
+              </a:rPr>
+              <a:t> </a:t>
+            </a:r>
+            <a:r>
+              <a:rPr lang="en-US" sz="1400" b="1" dirty="0" err="1">
+                <a:solidFill>
+                  <a:srgbClr val="2E86C1"/>
+                </a:solidFill>
+                <a:latin typeface="HSE Sans"/>
+              </a:rPr>
+              <a:t>признаков</a:t>
+            </a:r>
+            <a:r>
+              <a:rPr lang="en-US" sz="1400" b="1" dirty="0">
+                <a:solidFill>
+                  <a:srgbClr val="2E86C1"/>
+                </a:solidFill>
+                <a:latin typeface="HSE Sans"/>
+              </a:rPr>
+              <a:t> </a:t>
+            </a:r>
+            <a:r>
+              <a:rPr lang="en-US" sz="1400" b="1" dirty="0" err="1">
+                <a:solidFill>
+                  <a:srgbClr val="2E86C1"/>
+                </a:solidFill>
+                <a:latin typeface="HSE Sans"/>
+              </a:rPr>
+              <a:t>лица</a:t>
+            </a:r>
+            <a:r>
+              <a:rPr lang="en-US" sz="1400" b="1" dirty="0">
+                <a:solidFill>
+                  <a:srgbClr val="2E86C1"/>
+                </a:solidFill>
+                <a:latin typeface="HSE Sans"/>
+              </a:rPr>
+              <a:t>)</a:t>
+            </a:r>
+          </a:p>
+          <a:p>
+            <a:pPr marL="171450" indent="-171450">
+              <a:lnSpc>
+                <a:spcPct val="102000"/>
+              </a:lnSpc>
+              <a:spcBef>
+                <a:spcPts val="200"/>
+              </a:spcBef>
+              <a:buFont typeface="Arial"/>
+              <a:buChar char="•"/>
+            </a:pPr>
+            <a:r>
+              <a:rPr lang="en-US" sz="1400" b="1" dirty="0">
+                <a:solidFill>
+                  <a:srgbClr val="C0392B"/>
+                </a:solidFill>
+                <a:latin typeface="HSE Sans"/>
+              </a:rPr>
+              <a:t>EmotiEffNet</a:t>
             </a:r>
             <a:r>
               <a:rPr lang="ru-RU" sz="1400" dirty="0">
@@ -29642,25 +31806,149 @@
                 </a:solidFill>
                 <a:latin typeface="HSE Sans" panose="02000000000000000000" pitchFamily="2" charset="0"/>
               </a:rPr>
-              <a:t>гейт отсеивает нейтральные реплики; при эмоциональной речи активируется бимодальная голова </a:t>
-            </a:r>
-            <a:r>
-              <a:rPr lang="en-US" sz="1400" dirty="0" err="1">
+              <a:t> — EfficientNet-B0, дообучен на AffectNet; точнее всех</a:t>
+            </a:r>
+          </a:p>
+          <a:p>
+            <a:pPr marL="171450" indent="-171450">
+              <a:lnSpc>
+                <a:spcPct val="102000"/>
+              </a:lnSpc>
+              <a:spcBef>
+                <a:spcPts val="200"/>
+              </a:spcBef>
+              <a:buFont typeface="Arial"/>
+              <a:buChar char="•"/>
+            </a:pPr>
+            <a:r>
+              <a:rPr lang="en-US" sz="1400" b="1" dirty="0">
                 <a:solidFill>
                   <a:srgbClr val="1A1A1A"/>
                 </a:solidFill>
                 <a:latin typeface="HSE Sans"/>
               </a:rPr>
-              <a:t>BiLSTMBimodal</a:t>
-            </a:r>
-            <a:r>
-              <a:rPr lang="en-US" sz="1400" dirty="0">
+              <a:t>MobileNetV3-Small</a:t>
+            </a:r>
+            <a:r>
+              <a:rPr lang="ru-RU" sz="1400" dirty="0">
                 <a:solidFill>
                   <a:srgbClr val="1A1A1A"/>
                 </a:solidFill>
+                <a:latin typeface="HSE Sans" panose="02000000000000000000" pitchFamily="2" charset="0"/>
+              </a:rPr>
+              <a:t> — лёгкий мобильный </a:t>
+            </a:r>
+            <a:r>
+              <a:rPr lang="ru-RU" sz="1400" dirty="0" err="1">
+                <a:solidFill>
+                  <a:srgbClr val="1A1A1A"/>
+                </a:solidFill>
+                <a:latin typeface="HSE Sans" panose="02000000000000000000" pitchFamily="2" charset="0"/>
+              </a:rPr>
+              <a:t>бэкбон</a:t>
+            </a:r>
+            <a:r>
+              <a:rPr lang="ru-RU" sz="1400" dirty="0">
+                <a:solidFill>
+                  <a:srgbClr val="1A1A1A"/>
+                </a:solidFill>
+                <a:latin typeface="HSE Sans" panose="02000000000000000000" pitchFamily="2" charset="0"/>
+              </a:rPr>
+              <a:t>; заметно слабее</a:t>
+            </a:r>
+          </a:p>
+        </p:txBody>
+      </p:sp>
+      <p:sp>
+        <p:nvSpPr>
+          <p:cNvPr id="6" name="TextBox 5">
+            <a:extLst>
+              <a:ext uri="{FF2B5EF4-FFF2-40B4-BE49-F238E27FC236}">
+                <a16:creationId xmlns:a16="http://schemas.microsoft.com/office/drawing/2014/main" id="{3E591182-48A4-E118-16A0-FA1F74B6FB18}"/>
+              </a:ext>
+            </a:extLst>
+          </p:cNvPr>
+          <p:cNvSpPr txBox="1"/>
+          <p:nvPr/>
+        </p:nvSpPr>
+        <p:spPr>
+          <a:xfrm>
+            <a:off x="5536939" y="1962750"/>
+            <a:ext cx="6096000" cy="1036438"/>
+          </a:xfrm>
+          <a:prstGeom prst="rect">
+            <a:avLst/>
+          </a:prstGeom>
+          <a:noFill/>
+        </p:spPr>
+        <p:txBody>
+          <a:bodyPr wrap="square">
+            <a:spAutoFit/>
+          </a:bodyPr>
+          <a:lstStyle/>
+          <a:p>
+            <a:pPr marL="0" indent="0">
+              <a:spcBef>
+                <a:spcPts val="600"/>
+              </a:spcBef>
+              <a:buNone/>
+            </a:pPr>
+            <a:r>
+              <a:rPr lang="ru-RU" sz="1400" b="1" dirty="0">
+                <a:solidFill>
+                  <a:srgbClr val="2E86C1"/>
+                </a:solidFill>
                 <a:latin typeface="HSE Sans"/>
               </a:rPr>
-              <a:t>. </a:t>
+              <a:t>Модели классификаторы эмоций </a:t>
+            </a:r>
+            <a:r>
+              <a:rPr lang="en-US" sz="1400" b="1" dirty="0">
+                <a:solidFill>
+                  <a:srgbClr val="2E86C1"/>
+                </a:solidFill>
+                <a:latin typeface="HSE Sans"/>
+              </a:rPr>
+              <a:t>(16 </a:t>
+            </a:r>
+            <a:r>
+              <a:rPr lang="en-US" sz="1400" b="1" dirty="0" err="1">
+                <a:solidFill>
+                  <a:srgbClr val="2E86C1"/>
+                </a:solidFill>
+                <a:latin typeface="HSE Sans"/>
+              </a:rPr>
+              <a:t>кадров</a:t>
+            </a:r>
+            <a:r>
+              <a:rPr lang="en-US" sz="1400" b="1" dirty="0">
+                <a:solidFill>
+                  <a:srgbClr val="2E86C1"/>
+                </a:solidFill>
+                <a:latin typeface="HSE Sans"/>
+              </a:rPr>
+              <a:t>)</a:t>
+            </a:r>
+          </a:p>
+          <a:p>
+            <a:pPr marL="171450" indent="-171450">
+              <a:lnSpc>
+                <a:spcPct val="102000"/>
+              </a:lnSpc>
+              <a:spcBef>
+                <a:spcPts val="200"/>
+              </a:spcBef>
+              <a:buFont typeface="Arial"/>
+              <a:buChar char="•"/>
+            </a:pPr>
+            <a:r>
+              <a:rPr lang="en-US" sz="1400" b="1" dirty="0">
+                <a:solidFill>
+                  <a:srgbClr val="C0392B"/>
+                </a:solidFill>
+                <a:latin typeface="HSE Sans"/>
+              </a:rPr>
+              <a:t>BiLSTM</a:t>
             </a:r>
             <a:r>
               <a:rPr lang="ru-RU" sz="1400" dirty="0">
@@ -29669,23 +31957,77 @@
                 </a:solidFill>
                 <a:latin typeface="HSE Sans" panose="02000000000000000000" pitchFamily="2" charset="0"/>
               </a:rPr>
-              <a:t>Лог-мел спектрограмма переиспользуется гейтом и аудио-веткой.</a:t>
-            </a:r>
-            <a:endParaRPr lang="en-US" sz="1400" dirty="0">
-              <a:solidFill>
-                <a:srgbClr val="1A1A1A"/>
-              </a:solidFill>
-              <a:latin typeface="HSE Sans"/>
-            </a:endParaRPr>
+              <a:t> — двунаправленный LSTM; выбран в каскад</a:t>
+            </a:r>
+          </a:p>
+          <a:p>
+            <a:pPr marL="171450" indent="-171450">
+              <a:lnSpc>
+                <a:spcPct val="102000"/>
+              </a:lnSpc>
+              <a:spcBef>
+                <a:spcPts val="200"/>
+              </a:spcBef>
+              <a:buFont typeface="Arial"/>
+              <a:buChar char="•"/>
+            </a:pPr>
+            <a:r>
+              <a:rPr lang="en-US" sz="1400" b="1" dirty="0">
+                <a:solidFill>
+                  <a:srgbClr val="1A1A1A"/>
+                </a:solidFill>
+                <a:latin typeface="HSE Sans"/>
+              </a:rPr>
+              <a:t>BiGRU</a:t>
+            </a:r>
+            <a:r>
+              <a:rPr lang="ru-RU" sz="1400" dirty="0">
+                <a:solidFill>
+                  <a:srgbClr val="1A1A1A"/>
+                </a:solidFill>
+                <a:latin typeface="HSE Sans" panose="02000000000000000000" pitchFamily="2" charset="0"/>
+              </a:rPr>
+              <a:t> — облегчённый аналог; качество сопоставимо</a:t>
+            </a:r>
+          </a:p>
+          <a:p>
+            <a:pPr marL="171450" indent="-171450">
+              <a:lnSpc>
+                <a:spcPct val="102000"/>
+              </a:lnSpc>
+              <a:spcBef>
+                <a:spcPts val="200"/>
+              </a:spcBef>
+              <a:buFont typeface="Arial"/>
+              <a:buChar char="•"/>
+            </a:pPr>
+            <a:r>
+              <a:rPr lang="en-US" sz="1400" b="1" dirty="0">
+                <a:solidFill>
+                  <a:srgbClr val="1A1A1A"/>
+                </a:solidFill>
+                <a:latin typeface="HSE Sans"/>
+              </a:rPr>
+              <a:t>TCN</a:t>
+            </a:r>
+            <a:r>
+              <a:rPr lang="ru-RU" sz="1400" dirty="0">
+                <a:solidFill>
+                  <a:srgbClr val="1A1A1A"/>
+                </a:solidFill>
+                <a:latin typeface="HSE Sans" panose="02000000000000000000" pitchFamily="2" charset="0"/>
+              </a:rPr>
+              <a:t> — временные свёртки; ниже по качеству</a:t>
+            </a:r>
           </a:p>
         </p:txBody>
       </p:sp>
       <p:pic>
         <p:nvPicPr>
-          <p:cNvPr id="3" name="Picture 2">
+          <p:cNvPr id="7" name="Picture 6">
             <a:extLst>
               <a:ext uri="{FF2B5EF4-FFF2-40B4-BE49-F238E27FC236}">
-                <a16:creationId xmlns:a16="http://schemas.microsoft.com/office/drawing/2014/main" id="{D4ACC085-AFBB-EDC2-67B8-EF7CE5FFD458}"/>
+                <a16:creationId xmlns:a16="http://schemas.microsoft.com/office/drawing/2014/main" id="{0F876188-ED90-7B04-1B51-1F1FA9F8C900}"/>
               </a:ext>
             </a:extLst>
           </p:cNvPr>
@@ -29696,25 +32038,68 @@
         </p:nvPicPr>
         <p:blipFill>
           <a:blip r:embed="rId2"/>
-          <a:srcRect l="649" t="2880" r="6791" b="28790"/>
           <a:stretch>
             <a:fillRect/>
           </a:stretch>
         </p:blipFill>
         <p:spPr>
           <a:xfrm>
-            <a:off x="1864156" y="2179928"/>
-            <a:ext cx="8463687" cy="2692847"/>
+            <a:off x="628389" y="3191208"/>
+            <a:ext cx="10761270" cy="3213131"/>
           </a:xfrm>
           <a:prstGeom prst="rect">
             <a:avLst/>
           </a:prstGeom>
         </p:spPr>
       </p:pic>
+      <p:sp>
+        <p:nvSpPr>
+          <p:cNvPr id="8" name="TextBox 7">
+            <a:extLst>
+              <a:ext uri="{FF2B5EF4-FFF2-40B4-BE49-F238E27FC236}">
+                <a16:creationId xmlns:a16="http://schemas.microsoft.com/office/drawing/2014/main" id="{D7243123-3D7A-9165-DDB0-EE71586091DF}"/>
+              </a:ext>
+            </a:extLst>
+          </p:cNvPr>
+          <p:cNvSpPr txBox="1"/>
+          <p:nvPr/>
+        </p:nvSpPr>
+        <p:spPr>
+          <a:xfrm>
+            <a:off x="4221480" y="6353160"/>
+            <a:ext cx="3749040" cy="307777"/>
+          </a:xfrm>
+          <a:prstGeom prst="rect">
+            <a:avLst/>
+          </a:prstGeom>
+          <a:noFill/>
+        </p:spPr>
+        <p:txBody>
+          <a:bodyPr wrap="none" rtlCol="0">
+            <a:spAutoFit/>
+          </a:bodyPr>
+          <a:lstStyle/>
+          <a:p>
+            <a:pPr algn="ctr"/>
+            <a:r>
+              <a:rPr lang="ru-RU" sz="1400" dirty="0">
+                <a:latin typeface="HSE Sans" panose="02000000000000000000" pitchFamily="2" charset="0"/>
+              </a:rPr>
+              <a:t>Метрики сравнения видео моделей</a:t>
+            </a:r>
+            <a:r>
+              <a:rPr lang="en-US" sz="1400" dirty="0">
+                <a:latin typeface="HSE Sans" panose="02000000000000000000" pitchFamily="2" charset="0"/>
+              </a:rPr>
+              <a:t> (RAVDESS)</a:t>
+            </a:r>
+          </a:p>
+        </p:txBody>
+      </p:sp>
     </p:spTree>
     <p:extLst>
       <p:ext uri="{BB962C8B-B14F-4D97-AF65-F5344CB8AC3E}">
-        <p14:creationId xmlns:p14="http://schemas.microsoft.com/office/powerpoint/2010/main" val="997165844"/>
+        <p14:creationId xmlns:p14="http://schemas.microsoft.com/office/powerpoint/2010/main" val="1061531744"/>
       </p:ext>
     </p:extLst>
   </p:cSld>
@@ -30353,6 +32738,15 @@
 </file>
 
 <file path=customXml/item1.xml><?xml version="1.0" encoding="utf-8"?>
+<?mso-contentType ?>
+<FormTemplates xmlns="http://schemas.microsoft.com/sharepoint/v3/contenttype/forms">
+  <Display>DocumentLibraryForm</Display>
+  <Edit>DocumentLibraryForm</Edit>
+  <New>DocumentLibraryForm</New>
+</FormTemplates>
+</file>
+
+<file path=customXml/item2.xml><?xml version="1.0" encoding="utf-8"?>
 <ct:contentTypeSchema xmlns:ct="http://schemas.microsoft.com/office/2006/metadata/contentType" xmlns:ma="http://schemas.microsoft.com/office/2006/metadata/properties/metaAttributes" ct:_="" ma:_="" ma:contentTypeName="Документ" ma:contentTypeID="0x0101002A9C74E6E830D74E9B0FDDB4017A5417" ma:contentTypeVersion="13" ma:contentTypeDescription="Создание документа." ma:contentTypeScope="" ma:versionID="d4e423622451d608a8a05f4da7a1e1a2">
   <xsd:schema xmlns:xsd="http://www.w3.org/2001/XMLSchema" xmlns:xs="http://www.w3.org/2001/XMLSchema" xmlns:p="http://schemas.microsoft.com/office/2006/metadata/properties" xmlns:ns2="9875bd71-cde8-496c-a136-433f55d5e6d0" xmlns:ns3="e96afe77-3acb-4328-97fc-408e1bde3ecd" targetNamespace="http://schemas.microsoft.com/office/2006/metadata/properties" ma:root="true" ma:fieldsID="4831203c63c08b9f52ea6d3ee0d7a96e" ns2:_="" ns3:_="">
     <xsd:import namespace="9875bd71-cde8-496c-a136-433f55d5e6d0"/>
@@ -30575,15 +32969,6 @@
 </ct:contentTypeSchema>
 </file>
 
-<file path=customXml/item2.xml><?xml version="1.0" encoding="utf-8"?>
-<?mso-contentType ?>
-<FormTemplates xmlns="http://schemas.microsoft.com/sharepoint/v3/contenttype/forms">
-  <Display>DocumentLibraryForm</Display>
-  <Edit>DocumentLibraryForm</Edit>
-  <New>DocumentLibraryForm</New>
-</FormTemplates>
-</file>
-
 <file path=customXml/item3.xml><?xml version="1.0" encoding="utf-8"?>
 <p:properties xmlns:p="http://schemas.microsoft.com/office/2006/metadata/properties" xmlns:xsi="http://www.w3.org/2001/XMLSchema-instance" xmlns:pc="http://schemas.microsoft.com/office/infopath/2007/PartnerControls">
   <documentManagement/>
@@ -30591,6 +32976,14 @@
 </file>
 
 <file path=customXml/itemProps1.xml><?xml version="1.0" encoding="utf-8"?>
+<ds:datastoreItem xmlns:ds="http://schemas.openxmlformats.org/officeDocument/2006/customXml" ds:itemID="{B34386AA-1848-4C75-B336-1053927CB025}">
+  <ds:schemaRefs>
+    <ds:schemaRef ds:uri="http://schemas.microsoft.com/sharepoint/v3/contenttype/forms"/>
+  </ds:schemaRefs>
+</ds:datastoreItem>
+</file>
+
+<file path=customXml/itemProps2.xml><?xml version="1.0" encoding="utf-8"?>
 <ds:datastoreItem xmlns:ds="http://schemas.openxmlformats.org/officeDocument/2006/customXml" ds:itemID="{4D4651DD-DCCC-4759-B2F6-7F520BDCC2B9}">
   <ds:schemaRefs>
     <ds:schemaRef ds:uri="http://schemas.microsoft.com/office/2006/metadata/contentType"/>
@@ -30605,14 +32998,6 @@
     <ds:schemaRef ds:uri="http://purl.org/dc/elements/1.1/"/>
     <ds:schemaRef ds:uri="http://purl.org/dc/terms/"/>
     <ds:schemaRef ds:uri="http://schemas.microsoft.com/internal/obd"/>
-  </ds:schemaRefs>
-</ds:datastoreItem>
-</file>
-
-<file path=customXml/itemProps2.xml><?xml version="1.0" encoding="utf-8"?>
-<ds:datastoreItem xmlns:ds="http://schemas.openxmlformats.org/officeDocument/2006/customXml" ds:itemID="{B34386AA-1848-4C75-B336-1053927CB025}">
-  <ds:schemaRefs>
-    <ds:schemaRef ds:uri="http://schemas.microsoft.com/sharepoint/v3/contenttype/forms"/>
   </ds:schemaRefs>
 </ds:datastoreItem>
 </file>

--- a/Diploma_presentation.pptx
+++ b/Diploma_presentation.pptx
@@ -12,19 +12,19 @@
     <p:sldId id="302" r:id="rId6"/>
     <p:sldId id="306" r:id="rId7"/>
     <p:sldId id="335" r:id="rId8"/>
-    <p:sldId id="332" r:id="rId9"/>
-    <p:sldId id="331" r:id="rId10"/>
-    <p:sldId id="318" r:id="rId11"/>
-    <p:sldId id="341" r:id="rId12"/>
-    <p:sldId id="339" r:id="rId13"/>
-    <p:sldId id="319" r:id="rId14"/>
-    <p:sldId id="320" r:id="rId15"/>
-    <p:sldId id="324" r:id="rId16"/>
-    <p:sldId id="327" r:id="rId17"/>
-    <p:sldId id="329" r:id="rId18"/>
-    <p:sldId id="330" r:id="rId19"/>
-    <p:sldId id="285" r:id="rId20"/>
-    <p:sldId id="323" r:id="rId21"/>
+    <p:sldId id="331" r:id="rId9"/>
+    <p:sldId id="318" r:id="rId10"/>
+    <p:sldId id="341" r:id="rId11"/>
+    <p:sldId id="339" r:id="rId12"/>
+    <p:sldId id="319" r:id="rId13"/>
+    <p:sldId id="320" r:id="rId14"/>
+    <p:sldId id="324" r:id="rId15"/>
+    <p:sldId id="327" r:id="rId16"/>
+    <p:sldId id="329" r:id="rId17"/>
+    <p:sldId id="330" r:id="rId18"/>
+    <p:sldId id="285" r:id="rId19"/>
+    <p:sldId id="323" r:id="rId20"/>
+    <p:sldId id="344" r:id="rId21"/>
     <p:sldId id="343" r:id="rId22"/>
     <p:sldId id="342" r:id="rId23"/>
   </p:sldIdLst>
@@ -297,7 +297,7 @@
           <a:p>
             <a:fld id="{73261BF4-8B2C-784B-9959-B59A059012C3}" type="datetimeFigureOut">
               <a:rPr lang="en-RU" smtClean="0"/>
-              <a:t>5/31/26</a:t>
+              <a:t>6/2/26</a:t>
             </a:fld>
             <a:endParaRPr lang="en-RU"/>
           </a:p>
@@ -13701,7 +13701,7 @@
           <a:p>
             <a:fld id="{53063DFB-8595-A44B-9F09-A50FA310E559}" type="datetimeFigureOut">
               <a:rPr lang="en-RU" smtClean="0"/>
-              <a:t>5/31/26</a:t>
+              <a:t>6/2/26</a:t>
             </a:fld>
             <a:endParaRPr lang="en-RU"/>
           </a:p>
@@ -14779,911 +14779,6 @@
         <p:spPr>
           <a:xfrm>
             <a:off x="666489" y="1160924"/>
-            <a:ext cx="5094599" cy="802343"/>
-          </a:xfrm>
-          <a:prstGeom prst="rect">
-            <a:avLst/>
-          </a:prstGeom>
-        </p:spPr>
-        <p:txBody>
-          <a:bodyPr vert="horz" lIns="0" tIns="0" rIns="0" bIns="0" rtlCol="0" anchor="t">
-            <a:normAutofit/>
-          </a:bodyPr>
-          <a:lstStyle>
-            <a:lvl1pPr algn="l" defTabSz="914400" rtl="0" eaLnBrk="1" latinLnBrk="0" hangingPunct="1">
-              <a:lnSpc>
-                <a:spcPct val="100000"/>
-              </a:lnSpc>
-              <a:spcBef>
-                <a:spcPct val="0"/>
-              </a:spcBef>
-              <a:buNone/>
-              <a:defRPr sz="2400" b="0" i="0" kern="1200">
-                <a:solidFill>
-                  <a:schemeClr val="tx1"/>
-                </a:solidFill>
-                <a:latin typeface="HSE Sans" panose="02000000000000000000" pitchFamily="2" charset="0"/>
-                <a:ea typeface="+mj-ea"/>
-                <a:cs typeface="+mj-cs"/>
-              </a:defRPr>
-            </a:lvl1pPr>
-          </a:lstStyle>
-          <a:p>
-            <a:r>
-              <a:rPr lang="ru-RU" b="1" dirty="0"/>
-              <a:t>Итоговая архитектура системы</a:t>
-            </a:r>
-          </a:p>
-        </p:txBody>
-      </p:sp>
-      <p:sp>
-        <p:nvSpPr>
-          <p:cNvPr id="17" name="Текст 4">
-            <a:extLst>
-              <a:ext uri="{FF2B5EF4-FFF2-40B4-BE49-F238E27FC236}">
-                <a16:creationId xmlns:a16="http://schemas.microsoft.com/office/drawing/2014/main" id="{C6642543-AAFE-405A-C69F-4ADB20EF03A0}"/>
-              </a:ext>
-            </a:extLst>
-          </p:cNvPr>
-          <p:cNvSpPr txBox="1">
-            <a:spLocks/>
-          </p:cNvSpPr>
-          <p:nvPr/>
-        </p:nvSpPr>
-        <p:spPr>
-          <a:xfrm>
-            <a:off x="1143689" y="540904"/>
-            <a:ext cx="2070100" cy="415925"/>
-          </a:xfrm>
-          <a:prstGeom prst="rect">
-            <a:avLst/>
-          </a:prstGeom>
-        </p:spPr>
-        <p:txBody>
-          <a:bodyPr vert="horz" lIns="0" tIns="0" rIns="0" bIns="0" rtlCol="0">
-            <a:noAutofit/>
-          </a:bodyPr>
-          <a:lstStyle>
-            <a:lvl1pPr marL="0" marR="0" indent="0" algn="l" defTabSz="914400" rtl="0" eaLnBrk="1" fontAlgn="auto" latinLnBrk="0" hangingPunct="1">
-              <a:lnSpc>
-                <a:spcPct val="100000"/>
-              </a:lnSpc>
-              <a:spcBef>
-                <a:spcPts val="0"/>
-              </a:spcBef>
-              <a:spcAft>
-                <a:spcPts val="0"/>
-              </a:spcAft>
-              <a:buClrTx/>
-              <a:buSzTx/>
-              <a:buFont typeface="Arial" panose="020B0604020202020204" pitchFamily="34" charset="0"/>
-              <a:buNone/>
-              <a:tabLst/>
-              <a:defRPr sz="1000" b="0" i="0" kern="1200">
-                <a:solidFill>
-                  <a:schemeClr val="tx1"/>
-                </a:solidFill>
-                <a:latin typeface="HSE Sans" panose="02000000000000000000" pitchFamily="2" charset="0"/>
-                <a:ea typeface="+mn-ea"/>
-                <a:cs typeface="+mn-cs"/>
-              </a:defRPr>
-            </a:lvl1pPr>
-            <a:lvl2pPr marL="457200" indent="0" algn="l" defTabSz="914400" rtl="0" eaLnBrk="1" latinLnBrk="0" hangingPunct="1">
-              <a:lnSpc>
-                <a:spcPct val="100000"/>
-              </a:lnSpc>
-              <a:spcBef>
-                <a:spcPts val="500"/>
-              </a:spcBef>
-              <a:buFont typeface="Arial" panose="020B0604020202020204" pitchFamily="34" charset="0"/>
-              <a:buNone/>
-              <a:defRPr sz="1000" b="0" i="0" kern="1200">
-                <a:solidFill>
-                  <a:schemeClr val="tx1"/>
-                </a:solidFill>
-                <a:latin typeface="HSE Sans" panose="02000000000000000000" pitchFamily="2" charset="0"/>
-                <a:ea typeface="+mn-ea"/>
-                <a:cs typeface="+mn-cs"/>
-              </a:defRPr>
-            </a:lvl2pPr>
-            <a:lvl3pPr marL="914400" indent="0" algn="l" defTabSz="914400" rtl="0" eaLnBrk="1" latinLnBrk="0" hangingPunct="1">
-              <a:lnSpc>
-                <a:spcPct val="100000"/>
-              </a:lnSpc>
-              <a:spcBef>
-                <a:spcPts val="500"/>
-              </a:spcBef>
-              <a:buFont typeface="Arial" panose="020B0604020202020204" pitchFamily="34" charset="0"/>
-              <a:buNone/>
-              <a:defRPr sz="1000" b="0" i="0" kern="1200">
-                <a:solidFill>
-                  <a:schemeClr val="tx1"/>
-                </a:solidFill>
-                <a:latin typeface="HSE Sans" panose="02000000000000000000" pitchFamily="2" charset="0"/>
-                <a:ea typeface="+mn-ea"/>
-                <a:cs typeface="+mn-cs"/>
-              </a:defRPr>
-            </a:lvl3pPr>
-            <a:lvl4pPr marL="1371600" indent="0" algn="l" defTabSz="914400" rtl="0" eaLnBrk="1" latinLnBrk="0" hangingPunct="1">
-              <a:lnSpc>
-                <a:spcPct val="100000"/>
-              </a:lnSpc>
-              <a:spcBef>
-                <a:spcPts val="500"/>
-              </a:spcBef>
-              <a:buFont typeface="Arial" panose="020B0604020202020204" pitchFamily="34" charset="0"/>
-              <a:buNone/>
-              <a:defRPr sz="1000" b="0" i="0" kern="1200">
-                <a:solidFill>
-                  <a:schemeClr val="tx1"/>
-                </a:solidFill>
-                <a:latin typeface="HSE Sans" panose="02000000000000000000" pitchFamily="2" charset="0"/>
-                <a:ea typeface="+mn-ea"/>
-                <a:cs typeface="+mn-cs"/>
-              </a:defRPr>
-            </a:lvl4pPr>
-            <a:lvl5pPr marL="1828800" indent="0" algn="l" defTabSz="914400" rtl="0" eaLnBrk="1" latinLnBrk="0" hangingPunct="1">
-              <a:lnSpc>
-                <a:spcPct val="100000"/>
-              </a:lnSpc>
-              <a:spcBef>
-                <a:spcPts val="500"/>
-              </a:spcBef>
-              <a:buFont typeface="Arial" panose="020B0604020202020204" pitchFamily="34" charset="0"/>
-              <a:buNone/>
-              <a:defRPr sz="1000" b="0" i="0" kern="1200">
-                <a:solidFill>
-                  <a:schemeClr val="tx1"/>
-                </a:solidFill>
-                <a:latin typeface="HSE Sans" panose="02000000000000000000" pitchFamily="2" charset="0"/>
-                <a:ea typeface="+mn-ea"/>
-                <a:cs typeface="+mn-cs"/>
-              </a:defRPr>
-            </a:lvl5pPr>
-            <a:lvl6pPr marL="2514600" indent="-228600" algn="l" defTabSz="914400" rtl="0" eaLnBrk="1" latinLnBrk="0" hangingPunct="1">
-              <a:lnSpc>
-                <a:spcPct val="90000"/>
-              </a:lnSpc>
-              <a:spcBef>
-                <a:spcPts val="500"/>
-              </a:spcBef>
-              <a:buFont typeface="Arial" panose="020B0604020202020204" pitchFamily="34" charset="0"/>
-              <a:buChar char="•"/>
-              <a:defRPr sz="1800" kern="1200">
-                <a:solidFill>
-                  <a:schemeClr val="tx1"/>
-                </a:solidFill>
-                <a:latin typeface="+mn-lt"/>
-                <a:ea typeface="+mn-ea"/>
-                <a:cs typeface="+mn-cs"/>
-              </a:defRPr>
-            </a:lvl6pPr>
-            <a:lvl7pPr marL="2971800" indent="-228600" algn="l" defTabSz="914400" rtl="0" eaLnBrk="1" latinLnBrk="0" hangingPunct="1">
-              <a:lnSpc>
-                <a:spcPct val="90000"/>
-              </a:lnSpc>
-              <a:spcBef>
-                <a:spcPts val="500"/>
-              </a:spcBef>
-              <a:buFont typeface="Arial" panose="020B0604020202020204" pitchFamily="34" charset="0"/>
-              <a:buChar char="•"/>
-              <a:defRPr sz="1800" kern="1200">
-                <a:solidFill>
-                  <a:schemeClr val="tx1"/>
-                </a:solidFill>
-                <a:latin typeface="+mn-lt"/>
-                <a:ea typeface="+mn-ea"/>
-                <a:cs typeface="+mn-cs"/>
-              </a:defRPr>
-            </a:lvl7pPr>
-            <a:lvl8pPr marL="3429000" indent="-228600" algn="l" defTabSz="914400" rtl="0" eaLnBrk="1" latinLnBrk="0" hangingPunct="1">
-              <a:lnSpc>
-                <a:spcPct val="90000"/>
-              </a:lnSpc>
-              <a:spcBef>
-                <a:spcPts val="500"/>
-              </a:spcBef>
-              <a:buFont typeface="Arial" panose="020B0604020202020204" pitchFamily="34" charset="0"/>
-              <a:buChar char="•"/>
-              <a:defRPr sz="1800" kern="1200">
-                <a:solidFill>
-                  <a:schemeClr val="tx1"/>
-                </a:solidFill>
-                <a:latin typeface="+mn-lt"/>
-                <a:ea typeface="+mn-ea"/>
-                <a:cs typeface="+mn-cs"/>
-              </a:defRPr>
-            </a:lvl8pPr>
-            <a:lvl9pPr marL="3886200" indent="-228600" algn="l" defTabSz="914400" rtl="0" eaLnBrk="1" latinLnBrk="0" hangingPunct="1">
-              <a:lnSpc>
-                <a:spcPct val="90000"/>
-              </a:lnSpc>
-              <a:spcBef>
-                <a:spcPts val="500"/>
-              </a:spcBef>
-              <a:buFont typeface="Arial" panose="020B0604020202020204" pitchFamily="34" charset="0"/>
-              <a:buChar char="•"/>
-              <a:defRPr sz="1800" kern="1200">
-                <a:solidFill>
-                  <a:schemeClr val="tx1"/>
-                </a:solidFill>
-                <a:latin typeface="+mn-lt"/>
-                <a:ea typeface="+mn-ea"/>
-                <a:cs typeface="+mn-cs"/>
-              </a:defRPr>
-            </a:lvl9pPr>
-          </a:lstStyle>
-          <a:p>
-            <a:r>
-              <a:rPr lang="ru-RU" dirty="0"/>
-              <a:t>Факультет информатики, математики и компьютерных наук</a:t>
-            </a:r>
-          </a:p>
-        </p:txBody>
-      </p:sp>
-      <p:sp>
-        <p:nvSpPr>
-          <p:cNvPr id="18" name="Текст 5">
-            <a:extLst>
-              <a:ext uri="{FF2B5EF4-FFF2-40B4-BE49-F238E27FC236}">
-                <a16:creationId xmlns:a16="http://schemas.microsoft.com/office/drawing/2014/main" id="{4949D8FC-408D-1D67-134C-9A8B217B2D50}"/>
-              </a:ext>
-            </a:extLst>
-          </p:cNvPr>
-          <p:cNvSpPr txBox="1">
-            <a:spLocks/>
-          </p:cNvSpPr>
-          <p:nvPr/>
-        </p:nvSpPr>
-        <p:spPr>
-          <a:xfrm>
-            <a:off x="3459162" y="548720"/>
-            <a:ext cx="2341003" cy="408109"/>
-          </a:xfrm>
-          <a:prstGeom prst="rect">
-            <a:avLst/>
-          </a:prstGeom>
-        </p:spPr>
-        <p:txBody>
-          <a:bodyPr vert="horz" lIns="0" tIns="0" rIns="0" bIns="0" rtlCol="0">
-            <a:noAutofit/>
-          </a:bodyPr>
-          <a:lstStyle>
-            <a:lvl1pPr marL="0" indent="0" algn="l" defTabSz="914400" rtl="0" eaLnBrk="1" latinLnBrk="0" hangingPunct="1">
-              <a:lnSpc>
-                <a:spcPct val="100000"/>
-              </a:lnSpc>
-              <a:spcBef>
-                <a:spcPts val="0"/>
-              </a:spcBef>
-              <a:buFont typeface="Arial" panose="020B0604020202020204" pitchFamily="34" charset="0"/>
-              <a:buNone/>
-              <a:defRPr sz="1000" b="0" i="0" kern="1200">
-                <a:solidFill>
-                  <a:srgbClr val="0E2D69"/>
-                </a:solidFill>
-                <a:latin typeface="HSE Sans" panose="02000000000000000000" pitchFamily="2" charset="0"/>
-                <a:ea typeface="+mn-ea"/>
-                <a:cs typeface="+mn-cs"/>
-              </a:defRPr>
-            </a:lvl1pPr>
-            <a:lvl2pPr marL="457200" indent="0" algn="l" defTabSz="914400" rtl="0" eaLnBrk="1" latinLnBrk="0" hangingPunct="1">
-              <a:lnSpc>
-                <a:spcPct val="90000"/>
-              </a:lnSpc>
-              <a:spcBef>
-                <a:spcPts val="500"/>
-              </a:spcBef>
-              <a:buFont typeface="Arial" panose="020B0604020202020204" pitchFamily="34" charset="0"/>
-              <a:buNone/>
-              <a:defRPr sz="1000" b="0" i="0" kern="1200">
-                <a:solidFill>
-                  <a:srgbClr val="0E2D69"/>
-                </a:solidFill>
-                <a:latin typeface="HSE Sans" panose="02000000000000000000" pitchFamily="2" charset="0"/>
-                <a:ea typeface="+mn-ea"/>
-                <a:cs typeface="+mn-cs"/>
-              </a:defRPr>
-            </a:lvl2pPr>
-            <a:lvl3pPr marL="914400" indent="0" algn="l" defTabSz="914400" rtl="0" eaLnBrk="1" latinLnBrk="0" hangingPunct="1">
-              <a:lnSpc>
-                <a:spcPct val="90000"/>
-              </a:lnSpc>
-              <a:spcBef>
-                <a:spcPts val="500"/>
-              </a:spcBef>
-              <a:buFont typeface="Arial" panose="020B0604020202020204" pitchFamily="34" charset="0"/>
-              <a:buNone/>
-              <a:defRPr sz="1000" b="0" i="0" kern="1200">
-                <a:solidFill>
-                  <a:srgbClr val="0E2D69"/>
-                </a:solidFill>
-                <a:latin typeface="HSE Sans" panose="02000000000000000000" pitchFamily="2" charset="0"/>
-                <a:ea typeface="+mn-ea"/>
-                <a:cs typeface="+mn-cs"/>
-              </a:defRPr>
-            </a:lvl3pPr>
-            <a:lvl4pPr marL="1371600" indent="0" algn="l" defTabSz="914400" rtl="0" eaLnBrk="1" latinLnBrk="0" hangingPunct="1">
-              <a:lnSpc>
-                <a:spcPct val="90000"/>
-              </a:lnSpc>
-              <a:spcBef>
-                <a:spcPts val="500"/>
-              </a:spcBef>
-              <a:buFont typeface="Arial" panose="020B0604020202020204" pitchFamily="34" charset="0"/>
-              <a:buNone/>
-              <a:defRPr sz="1000" b="0" i="0" kern="1200">
-                <a:solidFill>
-                  <a:srgbClr val="0E2D69"/>
-                </a:solidFill>
-                <a:latin typeface="HSE Sans" panose="02000000000000000000" pitchFamily="2" charset="0"/>
-                <a:ea typeface="+mn-ea"/>
-                <a:cs typeface="+mn-cs"/>
-              </a:defRPr>
-            </a:lvl4pPr>
-            <a:lvl5pPr marL="1828800" indent="0" algn="l" defTabSz="914400" rtl="0" eaLnBrk="1" latinLnBrk="0" hangingPunct="1">
-              <a:lnSpc>
-                <a:spcPct val="90000"/>
-              </a:lnSpc>
-              <a:spcBef>
-                <a:spcPts val="500"/>
-              </a:spcBef>
-              <a:buFont typeface="Arial" panose="020B0604020202020204" pitchFamily="34" charset="0"/>
-              <a:buNone/>
-              <a:defRPr sz="1000" b="0" i="0" kern="1200">
-                <a:solidFill>
-                  <a:srgbClr val="0E2D69"/>
-                </a:solidFill>
-                <a:latin typeface="HSE Sans" panose="02000000000000000000" pitchFamily="2" charset="0"/>
-                <a:ea typeface="+mn-ea"/>
-                <a:cs typeface="+mn-cs"/>
-              </a:defRPr>
-            </a:lvl5pPr>
-            <a:lvl6pPr marL="2514600" indent="-228600" algn="l" defTabSz="914400" rtl="0" eaLnBrk="1" latinLnBrk="0" hangingPunct="1">
-              <a:lnSpc>
-                <a:spcPct val="90000"/>
-              </a:lnSpc>
-              <a:spcBef>
-                <a:spcPts val="500"/>
-              </a:spcBef>
-              <a:buFont typeface="Arial" panose="020B0604020202020204" pitchFamily="34" charset="0"/>
-              <a:buChar char="•"/>
-              <a:defRPr sz="1800" kern="1200">
-                <a:solidFill>
-                  <a:schemeClr val="tx1"/>
-                </a:solidFill>
-                <a:latin typeface="+mn-lt"/>
-                <a:ea typeface="+mn-ea"/>
-                <a:cs typeface="+mn-cs"/>
-              </a:defRPr>
-            </a:lvl6pPr>
-            <a:lvl7pPr marL="2971800" indent="-228600" algn="l" defTabSz="914400" rtl="0" eaLnBrk="1" latinLnBrk="0" hangingPunct="1">
-              <a:lnSpc>
-                <a:spcPct val="90000"/>
-              </a:lnSpc>
-              <a:spcBef>
-                <a:spcPts val="500"/>
-              </a:spcBef>
-              <a:buFont typeface="Arial" panose="020B0604020202020204" pitchFamily="34" charset="0"/>
-              <a:buChar char="•"/>
-              <a:defRPr sz="1800" kern="1200">
-                <a:solidFill>
-                  <a:schemeClr val="tx1"/>
-                </a:solidFill>
-                <a:latin typeface="+mn-lt"/>
-                <a:ea typeface="+mn-ea"/>
-                <a:cs typeface="+mn-cs"/>
-              </a:defRPr>
-            </a:lvl7pPr>
-            <a:lvl8pPr marL="3429000" indent="-228600" algn="l" defTabSz="914400" rtl="0" eaLnBrk="1" latinLnBrk="0" hangingPunct="1">
-              <a:lnSpc>
-                <a:spcPct val="90000"/>
-              </a:lnSpc>
-              <a:spcBef>
-                <a:spcPts val="500"/>
-              </a:spcBef>
-              <a:buFont typeface="Arial" panose="020B0604020202020204" pitchFamily="34" charset="0"/>
-              <a:buChar char="•"/>
-              <a:defRPr sz="1800" kern="1200">
-                <a:solidFill>
-                  <a:schemeClr val="tx1"/>
-                </a:solidFill>
-                <a:latin typeface="+mn-lt"/>
-                <a:ea typeface="+mn-ea"/>
-                <a:cs typeface="+mn-cs"/>
-              </a:defRPr>
-            </a:lvl8pPr>
-            <a:lvl9pPr marL="3886200" indent="-228600" algn="l" defTabSz="914400" rtl="0" eaLnBrk="1" latinLnBrk="0" hangingPunct="1">
-              <a:lnSpc>
-                <a:spcPct val="90000"/>
-              </a:lnSpc>
-              <a:spcBef>
-                <a:spcPts val="500"/>
-              </a:spcBef>
-              <a:buFont typeface="Arial" panose="020B0604020202020204" pitchFamily="34" charset="0"/>
-              <a:buChar char="•"/>
-              <a:defRPr sz="1800" kern="1200">
-                <a:solidFill>
-                  <a:schemeClr val="tx1"/>
-                </a:solidFill>
-                <a:latin typeface="+mn-lt"/>
-                <a:ea typeface="+mn-ea"/>
-                <a:cs typeface="+mn-cs"/>
-              </a:defRPr>
-            </a:lvl9pPr>
-          </a:lstStyle>
-          <a:p>
-            <a:r>
-              <a:rPr lang="ru-RU" dirty="0"/>
-              <a:t>Классификация выражений лиц с детектированием эмоций в речи</a:t>
-            </a:r>
-          </a:p>
-        </p:txBody>
-      </p:sp>
-      <p:sp>
-        <p:nvSpPr>
-          <p:cNvPr id="19" name="Текст 6">
-            <a:extLst>
-              <a:ext uri="{FF2B5EF4-FFF2-40B4-BE49-F238E27FC236}">
-                <a16:creationId xmlns:a16="http://schemas.microsoft.com/office/drawing/2014/main" id="{C38E8207-B0A4-013A-867A-665C45ADC6D4}"/>
-              </a:ext>
-            </a:extLst>
-          </p:cNvPr>
-          <p:cNvSpPr txBox="1">
-            <a:spLocks/>
-          </p:cNvSpPr>
-          <p:nvPr/>
-        </p:nvSpPr>
-        <p:spPr>
-          <a:xfrm>
-            <a:off x="6259892" y="548720"/>
-            <a:ext cx="2070100" cy="408109"/>
-          </a:xfrm>
-          <a:prstGeom prst="rect">
-            <a:avLst/>
-          </a:prstGeom>
-        </p:spPr>
-        <p:txBody>
-          <a:bodyPr vert="horz" lIns="0" tIns="0" rIns="0" bIns="0" rtlCol="0">
-            <a:noAutofit/>
-          </a:bodyPr>
-          <a:lstStyle>
-            <a:lvl1pPr marL="0" indent="0" algn="l" defTabSz="914400" rtl="0" eaLnBrk="1" latinLnBrk="0" hangingPunct="1">
-              <a:lnSpc>
-                <a:spcPct val="100000"/>
-              </a:lnSpc>
-              <a:spcBef>
-                <a:spcPts val="0"/>
-              </a:spcBef>
-              <a:buFont typeface="Arial" panose="020B0604020202020204" pitchFamily="34" charset="0"/>
-              <a:buNone/>
-              <a:defRPr sz="1000" b="0" i="0" kern="1200">
-                <a:solidFill>
-                  <a:srgbClr val="0E2D69"/>
-                </a:solidFill>
-                <a:latin typeface="HSE Sans" panose="02000000000000000000" pitchFamily="2" charset="0"/>
-                <a:ea typeface="+mn-ea"/>
-                <a:cs typeface="+mn-cs"/>
-              </a:defRPr>
-            </a:lvl1pPr>
-            <a:lvl2pPr marL="457200" indent="0" algn="l" defTabSz="914400" rtl="0" eaLnBrk="1" latinLnBrk="0" hangingPunct="1">
-              <a:lnSpc>
-                <a:spcPct val="90000"/>
-              </a:lnSpc>
-              <a:spcBef>
-                <a:spcPts val="500"/>
-              </a:spcBef>
-              <a:buFont typeface="Arial" panose="020B0604020202020204" pitchFamily="34" charset="0"/>
-              <a:buNone/>
-              <a:defRPr sz="1000" b="0" i="0" kern="1200">
-                <a:solidFill>
-                  <a:srgbClr val="0E2D69"/>
-                </a:solidFill>
-                <a:latin typeface="HSE Sans" panose="02000000000000000000" pitchFamily="2" charset="0"/>
-                <a:ea typeface="+mn-ea"/>
-                <a:cs typeface="+mn-cs"/>
-              </a:defRPr>
-            </a:lvl2pPr>
-            <a:lvl3pPr marL="914400" indent="0" algn="l" defTabSz="914400" rtl="0" eaLnBrk="1" latinLnBrk="0" hangingPunct="1">
-              <a:lnSpc>
-                <a:spcPct val="90000"/>
-              </a:lnSpc>
-              <a:spcBef>
-                <a:spcPts val="500"/>
-              </a:spcBef>
-              <a:buFont typeface="Arial" panose="020B0604020202020204" pitchFamily="34" charset="0"/>
-              <a:buNone/>
-              <a:defRPr sz="1000" b="0" i="0" kern="1200">
-                <a:solidFill>
-                  <a:srgbClr val="0E2D69"/>
-                </a:solidFill>
-                <a:latin typeface="HSE Sans" panose="02000000000000000000" pitchFamily="2" charset="0"/>
-                <a:ea typeface="+mn-ea"/>
-                <a:cs typeface="+mn-cs"/>
-              </a:defRPr>
-            </a:lvl3pPr>
-            <a:lvl4pPr marL="1371600" indent="0" algn="l" defTabSz="914400" rtl="0" eaLnBrk="1" latinLnBrk="0" hangingPunct="1">
-              <a:lnSpc>
-                <a:spcPct val="90000"/>
-              </a:lnSpc>
-              <a:spcBef>
-                <a:spcPts val="500"/>
-              </a:spcBef>
-              <a:buFont typeface="Arial" panose="020B0604020202020204" pitchFamily="34" charset="0"/>
-              <a:buNone/>
-              <a:defRPr sz="1000" b="0" i="0" kern="1200">
-                <a:solidFill>
-                  <a:srgbClr val="0E2D69"/>
-                </a:solidFill>
-                <a:latin typeface="HSE Sans" panose="02000000000000000000" pitchFamily="2" charset="0"/>
-                <a:ea typeface="+mn-ea"/>
-                <a:cs typeface="+mn-cs"/>
-              </a:defRPr>
-            </a:lvl4pPr>
-            <a:lvl5pPr marL="1828800" indent="0" algn="l" defTabSz="914400" rtl="0" eaLnBrk="1" latinLnBrk="0" hangingPunct="1">
-              <a:lnSpc>
-                <a:spcPct val="90000"/>
-              </a:lnSpc>
-              <a:spcBef>
-                <a:spcPts val="500"/>
-              </a:spcBef>
-              <a:buFont typeface="Arial" panose="020B0604020202020204" pitchFamily="34" charset="0"/>
-              <a:buNone/>
-              <a:defRPr sz="1000" b="0" i="0" kern="1200">
-                <a:solidFill>
-                  <a:srgbClr val="0E2D69"/>
-                </a:solidFill>
-                <a:latin typeface="HSE Sans" panose="02000000000000000000" pitchFamily="2" charset="0"/>
-                <a:ea typeface="+mn-ea"/>
-                <a:cs typeface="+mn-cs"/>
-              </a:defRPr>
-            </a:lvl5pPr>
-            <a:lvl6pPr marL="2514600" indent="-228600" algn="l" defTabSz="914400" rtl="0" eaLnBrk="1" latinLnBrk="0" hangingPunct="1">
-              <a:lnSpc>
-                <a:spcPct val="90000"/>
-              </a:lnSpc>
-              <a:spcBef>
-                <a:spcPts val="500"/>
-              </a:spcBef>
-              <a:buFont typeface="Arial" panose="020B0604020202020204" pitchFamily="34" charset="0"/>
-              <a:buChar char="•"/>
-              <a:defRPr sz="1800" kern="1200">
-                <a:solidFill>
-                  <a:schemeClr val="tx1"/>
-                </a:solidFill>
-                <a:latin typeface="+mn-lt"/>
-                <a:ea typeface="+mn-ea"/>
-                <a:cs typeface="+mn-cs"/>
-              </a:defRPr>
-            </a:lvl6pPr>
-            <a:lvl7pPr marL="2971800" indent="-228600" algn="l" defTabSz="914400" rtl="0" eaLnBrk="1" latinLnBrk="0" hangingPunct="1">
-              <a:lnSpc>
-                <a:spcPct val="90000"/>
-              </a:lnSpc>
-              <a:spcBef>
-                <a:spcPts val="500"/>
-              </a:spcBef>
-              <a:buFont typeface="Arial" panose="020B0604020202020204" pitchFamily="34" charset="0"/>
-              <a:buChar char="•"/>
-              <a:defRPr sz="1800" kern="1200">
-                <a:solidFill>
-                  <a:schemeClr val="tx1"/>
-                </a:solidFill>
-                <a:latin typeface="+mn-lt"/>
-                <a:ea typeface="+mn-ea"/>
-                <a:cs typeface="+mn-cs"/>
-              </a:defRPr>
-            </a:lvl7pPr>
-            <a:lvl8pPr marL="3429000" indent="-228600" algn="l" defTabSz="914400" rtl="0" eaLnBrk="1" latinLnBrk="0" hangingPunct="1">
-              <a:lnSpc>
-                <a:spcPct val="90000"/>
-              </a:lnSpc>
-              <a:spcBef>
-                <a:spcPts val="500"/>
-              </a:spcBef>
-              <a:buFont typeface="Arial" panose="020B0604020202020204" pitchFamily="34" charset="0"/>
-              <a:buChar char="•"/>
-              <a:defRPr sz="1800" kern="1200">
-                <a:solidFill>
-                  <a:schemeClr val="tx1"/>
-                </a:solidFill>
-                <a:latin typeface="+mn-lt"/>
-                <a:ea typeface="+mn-ea"/>
-                <a:cs typeface="+mn-cs"/>
-              </a:defRPr>
-            </a:lvl8pPr>
-            <a:lvl9pPr marL="3886200" indent="-228600" algn="l" defTabSz="914400" rtl="0" eaLnBrk="1" latinLnBrk="0" hangingPunct="1">
-              <a:lnSpc>
-                <a:spcPct val="90000"/>
-              </a:lnSpc>
-              <a:spcBef>
-                <a:spcPts val="500"/>
-              </a:spcBef>
-              <a:buFont typeface="Arial" panose="020B0604020202020204" pitchFamily="34" charset="0"/>
-              <a:buChar char="•"/>
-              <a:defRPr sz="1800" kern="1200">
-                <a:solidFill>
-                  <a:schemeClr val="tx1"/>
-                </a:solidFill>
-                <a:latin typeface="+mn-lt"/>
-                <a:ea typeface="+mn-ea"/>
-                <a:cs typeface="+mn-cs"/>
-              </a:defRPr>
-            </a:lvl9pPr>
-          </a:lstStyle>
-          <a:p>
-            <a:r>
-              <a:rPr lang="ru-RU" dirty="0"/>
-              <a:t>Канделов Дамир Русланович </a:t>
-            </a:r>
-          </a:p>
-          <a:p>
-            <a:r>
-              <a:rPr lang="ru-RU" dirty="0"/>
-              <a:t>Группа: 22ПИ-1</a:t>
-            </a:r>
-          </a:p>
-        </p:txBody>
-      </p:sp>
-      <p:sp>
-        <p:nvSpPr>
-          <p:cNvPr id="4" name="Rectangle 2">
-            <a:extLst>
-              <a:ext uri="{FF2B5EF4-FFF2-40B4-BE49-F238E27FC236}">
-                <a16:creationId xmlns:a16="http://schemas.microsoft.com/office/drawing/2014/main" id="{0F0DA963-E9B5-6F1D-7BB4-EC614E37D956}"/>
-              </a:ext>
-            </a:extLst>
-          </p:cNvPr>
-          <p:cNvSpPr>
-            <a:spLocks noChangeArrowheads="1"/>
-          </p:cNvSpPr>
-          <p:nvPr/>
-        </p:nvSpPr>
-        <p:spPr bwMode="auto">
-          <a:xfrm>
-            <a:off x="0" y="0"/>
-            <a:ext cx="12192000" cy="457200"/>
-          </a:xfrm>
-          <a:prstGeom prst="rect">
-            <a:avLst/>
-          </a:prstGeom>
-          <a:noFill/>
-          <a:ln>
-            <a:noFill/>
-          </a:ln>
-          <a:effectLst/>
-          <a:extLst>
-            <a:ext uri="{909E8E84-426E-40DD-AFC4-6F175D3DCCD1}">
-              <a14:hiddenFill xmlns:a14="http://schemas.microsoft.com/office/drawing/2010/main">
-                <a:solidFill>
-                  <a:schemeClr val="accent1"/>
-                </a:solidFill>
-              </a14:hiddenFill>
-            </a:ext>
-            <a:ext uri="{91240B29-F687-4F45-9708-019B960494DF}">
-              <a14:hiddenLine xmlns:a14="http://schemas.microsoft.com/office/drawing/2010/main" w="9525">
-                <a:solidFill>
-                  <a:schemeClr val="tx1"/>
-                </a:solidFill>
-                <a:miter lim="800000"/>
-                <a:headEnd/>
-                <a:tailEnd/>
-              </a14:hiddenLine>
-            </a:ext>
-            <a:ext uri="{AF507438-7753-43E0-B8FC-AC1667EBCBE1}">
-              <a14:hiddenEffects xmlns:a14="http://schemas.microsoft.com/office/drawing/2010/main">
-                <a:effectLst>
-                  <a:outerShdw dist="35921" dir="2700000" algn="ctr" rotWithShape="0">
-                    <a:schemeClr val="bg2"/>
-                  </a:outerShdw>
-                </a:effectLst>
-              </a14:hiddenEffects>
-            </a:ext>
-          </a:extLst>
-        </p:spPr>
-        <p:txBody>
-          <a:bodyPr vert="horz" wrap="none" lIns="91440" tIns="45720" rIns="91440" bIns="45720" numCol="1" anchor="ctr" anchorCtr="0" compatLnSpc="1">
-            <a:prstTxWarp prst="textNoShape">
-              <a:avLst/>
-            </a:prstTxWarp>
-            <a:spAutoFit/>
-          </a:bodyPr>
-          <a:lstStyle/>
-          <a:p>
-            <a:endParaRPr lang="en-RU"/>
-          </a:p>
-        </p:txBody>
-      </p:sp>
-      <p:sp>
-        <p:nvSpPr>
-          <p:cNvPr id="2" name="Intro7">
-            <a:extLst>
-              <a:ext uri="{FF2B5EF4-FFF2-40B4-BE49-F238E27FC236}">
-                <a16:creationId xmlns:a16="http://schemas.microsoft.com/office/drawing/2014/main" id="{186E8000-AD89-7442-A431-F1FCCEFC7CC5}"/>
-              </a:ext>
-            </a:extLst>
-          </p:cNvPr>
-          <p:cNvSpPr txBox="1"/>
-          <p:nvPr/>
-        </p:nvSpPr>
-        <p:spPr>
-          <a:xfrm>
-            <a:off x="666489" y="5460874"/>
-            <a:ext cx="10871200" cy="635000"/>
-          </a:xfrm>
-          <a:prstGeom prst="rect">
-            <a:avLst/>
-          </a:prstGeom>
-          <a:noFill/>
-        </p:spPr>
-        <p:txBody>
-          <a:bodyPr vertOverflow="overflow" vert="horz" wrap="square" lIns="50800" tIns="25400" rIns="50800" bIns="25400" rtlCol="0" anchor="t">
-            <a:noAutofit/>
-          </a:bodyPr>
-          <a:lstStyle/>
-          <a:p>
-            <a:pPr algn="l"/>
-            <a:r>
-              <a:rPr lang="en-US" sz="1600" dirty="0" err="1">
-                <a:latin typeface="HSE Sans"/>
-              </a:rPr>
-              <a:t>MelCNN</a:t>
-            </a:r>
-            <a:r>
-              <a:rPr lang="en-US" sz="1600" dirty="0">
-                <a:latin typeface="HSE Sans"/>
-              </a:rPr>
-              <a:t>-</a:t>
-            </a:r>
-            <a:r>
-              <a:rPr lang="ru-RU" sz="1600" dirty="0">
-                <a:latin typeface="HSE Sans" panose="02000000000000000000" pitchFamily="2" charset="0"/>
-              </a:rPr>
-              <a:t>гейт отсеивает нейтральные реплики; при эмоциональной речи активируется бимодальная голова </a:t>
-            </a:r>
-            <a:r>
-              <a:rPr lang="en-US" sz="1600" dirty="0" err="1">
-                <a:latin typeface="HSE Sans"/>
-              </a:rPr>
-              <a:t>BiLSTMBimodal</a:t>
-            </a:r>
-            <a:r>
-              <a:rPr lang="en-US" sz="1600" dirty="0">
-                <a:latin typeface="HSE Sans"/>
-              </a:rPr>
-              <a:t>. </a:t>
-            </a:r>
-            <a:r>
-              <a:rPr lang="ru-RU" sz="1600" dirty="0">
-                <a:latin typeface="HSE Sans" panose="02000000000000000000" pitchFamily="2" charset="0"/>
-              </a:rPr>
-              <a:t>Лог-мел спектрограмма переиспользуется гейтом и аудио-веткой.</a:t>
-            </a:r>
-            <a:endParaRPr lang="en-US" sz="1600" dirty="0">
-              <a:latin typeface="HSE Sans"/>
-            </a:endParaRPr>
-          </a:p>
-        </p:txBody>
-      </p:sp>
-      <p:pic>
-        <p:nvPicPr>
-          <p:cNvPr id="3" name="Picture 2">
-            <a:extLst>
-              <a:ext uri="{FF2B5EF4-FFF2-40B4-BE49-F238E27FC236}">
-                <a16:creationId xmlns:a16="http://schemas.microsoft.com/office/drawing/2014/main" id="{D4ACC085-AFBB-EDC2-67B8-EF7CE5FFD458}"/>
-              </a:ext>
-            </a:extLst>
-          </p:cNvPr>
-          <p:cNvPicPr>
-            <a:picLocks noChangeAspect="1"/>
-          </p:cNvPicPr>
-          <p:nvPr/>
-        </p:nvPicPr>
-        <p:blipFill>
-          <a:blip r:embed="rId2"/>
-          <a:srcRect l="649" t="2880" r="6791" b="28790"/>
-          <a:stretch>
-            <a:fillRect/>
-          </a:stretch>
-        </p:blipFill>
-        <p:spPr>
-          <a:xfrm>
-            <a:off x="1523671" y="1974246"/>
-            <a:ext cx="9144658" cy="2909508"/>
-          </a:xfrm>
-          <a:prstGeom prst="rect">
-            <a:avLst/>
-          </a:prstGeom>
-        </p:spPr>
-      </p:pic>
-      <p:sp>
-        <p:nvSpPr>
-          <p:cNvPr id="5" name="TextBox 4">
-            <a:extLst>
-              <a:ext uri="{FF2B5EF4-FFF2-40B4-BE49-F238E27FC236}">
-                <a16:creationId xmlns:a16="http://schemas.microsoft.com/office/drawing/2014/main" id="{C213FC0E-B3D7-0636-A3F8-5A3D1DF12920}"/>
-              </a:ext>
-            </a:extLst>
-          </p:cNvPr>
-          <p:cNvSpPr txBox="1"/>
-          <p:nvPr/>
-        </p:nvSpPr>
-        <p:spPr>
-          <a:xfrm>
-            <a:off x="4778781" y="4826714"/>
-            <a:ext cx="2962221" cy="307777"/>
-          </a:xfrm>
-          <a:prstGeom prst="rect">
-            <a:avLst/>
-          </a:prstGeom>
-          <a:noFill/>
-        </p:spPr>
-        <p:txBody>
-          <a:bodyPr wrap="none" rtlCol="0">
-            <a:spAutoFit/>
-          </a:bodyPr>
-          <a:lstStyle/>
-          <a:p>
-            <a:pPr algn="l"/>
-            <a:r>
-              <a:rPr lang="ru-RU" sz="1400" dirty="0">
-                <a:latin typeface="HSE Sans" panose="02000000000000000000" pitchFamily="2" charset="0"/>
-              </a:rPr>
-              <a:t>Архитектура предлагаемой системы</a:t>
-            </a:r>
-            <a:endParaRPr lang="en-US" sz="1400" dirty="0">
-              <a:latin typeface="HSE Sans" panose="02000000000000000000" pitchFamily="2" charset="0"/>
-            </a:endParaRPr>
-          </a:p>
-        </p:txBody>
-      </p:sp>
-    </p:spTree>
-    <p:extLst>
-      <p:ext uri="{BB962C8B-B14F-4D97-AF65-F5344CB8AC3E}">
-        <p14:creationId xmlns:p14="http://schemas.microsoft.com/office/powerpoint/2010/main" val="997165844"/>
-      </p:ext>
-    </p:extLst>
-  </p:cSld>
-  <p:clrMapOvr>
-    <a:masterClrMapping/>
-  </p:clrMapOvr>
-</p:sld>
-</file>
-
-<file path=ppt/slides/slide11.xml><?xml version="1.0" encoding="utf-8"?>
-<p:sld xmlns:a="http://schemas.openxmlformats.org/drawingml/2006/main" xmlns:r="http://schemas.openxmlformats.org/officeDocument/2006/relationships" xmlns:p="http://schemas.openxmlformats.org/presentationml/2006/main">
-  <p:cSld>
-    <p:spTree>
-      <p:nvGrpSpPr>
-        <p:cNvPr id="1" name=""/>
-        <p:cNvGrpSpPr/>
-        <p:nvPr/>
-      </p:nvGrpSpPr>
-      <p:grpSpPr>
-        <a:xfrm>
-          <a:off x="0" y="0"/>
-          <a:ext cx="0" cy="0"/>
-          <a:chOff x="0" y="0"/>
-          <a:chExt cx="0" cy="0"/>
-        </a:xfrm>
-      </p:grpSpPr>
-      <p:sp>
-        <p:nvSpPr>
-          <p:cNvPr id="10" name="Заголовок 2">
-            <a:extLst>
-              <a:ext uri="{FF2B5EF4-FFF2-40B4-BE49-F238E27FC236}">
-                <a16:creationId xmlns:a16="http://schemas.microsoft.com/office/drawing/2014/main" id="{9BF64647-BA7F-C64D-E3FA-FB6C83CF295F}"/>
-              </a:ext>
-            </a:extLst>
-          </p:cNvPr>
-          <p:cNvSpPr txBox="1">
-            <a:spLocks/>
-          </p:cNvSpPr>
-          <p:nvPr/>
-        </p:nvSpPr>
-        <p:spPr>
-          <a:xfrm>
-            <a:off x="666489" y="1160924"/>
             <a:ext cx="7159699" cy="802343"/>
           </a:xfrm>
           <a:prstGeom prst="rect">
@@ -16551,7 +15646,7 @@
 </p:sld>
 </file>
 
-<file path=ppt/slides/slide12.xml><?xml version="1.0" encoding="utf-8"?>
+<file path=ppt/slides/slide11.xml><?xml version="1.0" encoding="utf-8"?>
 <p:sld xmlns:a="http://schemas.openxmlformats.org/drawingml/2006/main" xmlns:r="http://schemas.openxmlformats.org/officeDocument/2006/relationships" xmlns:p="http://schemas.openxmlformats.org/presentationml/2006/main">
   <p:cSld>
     <p:spTree>
@@ -17464,7 +16559,7 @@
 </p:sld>
 </file>
 
-<file path=ppt/slides/slide13.xml><?xml version="1.0" encoding="utf-8"?>
+<file path=ppt/slides/slide12.xml><?xml version="1.0" encoding="utf-8"?>
 <p:sld xmlns:a="http://schemas.openxmlformats.org/drawingml/2006/main" xmlns:r="http://schemas.openxmlformats.org/officeDocument/2006/relationships" xmlns:p="http://schemas.openxmlformats.org/presentationml/2006/main">
   <p:cSld>
     <p:spTree>
@@ -18936,7 +18031,7 @@
 </p:sld>
 </file>
 
-<file path=ppt/slides/slide14.xml><?xml version="1.0" encoding="utf-8"?>
+<file path=ppt/slides/slide13.xml><?xml version="1.0" encoding="utf-8"?>
 <p:sld xmlns:a="http://schemas.openxmlformats.org/drawingml/2006/main" xmlns:r="http://schemas.openxmlformats.org/officeDocument/2006/relationships" xmlns:p="http://schemas.openxmlformats.org/presentationml/2006/main">
   <p:cSld>
     <p:spTree>
@@ -19953,8 +19048,8 @@
         </p:nvSpPr>
         <p:spPr>
           <a:xfrm>
-            <a:off x="8238522" y="4238054"/>
-            <a:ext cx="3039602" cy="1385735"/>
+            <a:off x="8238522" y="3945954"/>
+            <a:ext cx="3039602" cy="1677836"/>
           </a:xfrm>
           <a:prstGeom prst="roundRect">
             <a:avLst>
@@ -20193,8 +19288,8 @@
         </p:nvSpPr>
         <p:spPr>
           <a:xfrm>
-            <a:off x="8421862" y="4337592"/>
-            <a:ext cx="2672919" cy="1169551"/>
+            <a:off x="8421861" y="4071132"/>
+            <a:ext cx="2672919" cy="1384995"/>
           </a:xfrm>
           <a:prstGeom prst="rect">
             <a:avLst/>
@@ -20218,10 +19313,14 @@
           <a:p>
             <a:pPr algn="just"/>
             <a:r>
+              <a:rPr lang="ru-RU" dirty="0"/>
+              <a:t>Полученные результаты имеют как практическую, так и исследовательскую ценность</a:t>
+            </a:r>
+            <a:r>
               <a:rPr lang="ru-RU" sz="1400" dirty="0">
                 <a:latin typeface="HSE Sans" panose="02000000000000000000" pitchFamily="2" charset="0"/>
               </a:rPr>
-              <a:t>Практическая ценность результатов. Код доступен на GitHub: </a:t>
+              <a:t>. Код доступен на GitHub: </a:t>
             </a:r>
             <a:r>
               <a:rPr lang="en-US" sz="1400" b="1" dirty="0">
@@ -20293,7 +19392,7 @@
 </p:sld>
 </file>
 
-<file path=ppt/slides/slide15.xml><?xml version="1.0" encoding="utf-8"?>
+<file path=ppt/slides/slide14.xml><?xml version="1.0" encoding="utf-8"?>
 <p:sld xmlns:a="http://schemas.openxmlformats.org/drawingml/2006/main" xmlns:r="http://schemas.openxmlformats.org/officeDocument/2006/relationships" xmlns:p="http://schemas.openxmlformats.org/presentationml/2006/main">
   <p:cSld>
     <p:spTree>
@@ -20973,7 +20072,7 @@
 </p:sld>
 </file>
 
-<file path=ppt/slides/slide16.xml><?xml version="1.0" encoding="utf-8"?>
+<file path=ppt/slides/slide15.xml><?xml version="1.0" encoding="utf-8"?>
 <p:sld xmlns:a="http://schemas.openxmlformats.org/drawingml/2006/main" xmlns:r="http://schemas.openxmlformats.org/officeDocument/2006/relationships" xmlns:p="http://schemas.openxmlformats.org/presentationml/2006/main">
   <p:cSld>
     <p:spTree>
@@ -21003,7 +20102,7 @@
 </p:sld>
 </file>
 
-<file path=ppt/slides/slide17.xml><?xml version="1.0" encoding="utf-8"?>
+<file path=ppt/slides/slide16.xml><?xml version="1.0" encoding="utf-8"?>
 <p:sld xmlns:a="http://schemas.openxmlformats.org/drawingml/2006/main" xmlns:r="http://schemas.openxmlformats.org/officeDocument/2006/relationships" xmlns:p="http://schemas.openxmlformats.org/presentationml/2006/main">
   <p:cSld>
     <p:spTree>
@@ -21952,6 +21051,1631 @@
     <p:extLst>
       <p:ext uri="{BB962C8B-B14F-4D97-AF65-F5344CB8AC3E}">
         <p14:creationId xmlns:p14="http://schemas.microsoft.com/office/powerpoint/2010/main" val="3851004434"/>
+      </p:ext>
+    </p:extLst>
+  </p:cSld>
+  <p:clrMapOvr>
+    <a:masterClrMapping/>
+  </p:clrMapOvr>
+</p:sld>
+</file>
+
+<file path=ppt/slides/slide17.xml><?xml version="1.0" encoding="utf-8"?>
+<p:sld xmlns:a="http://schemas.openxmlformats.org/drawingml/2006/main" xmlns:r="http://schemas.openxmlformats.org/officeDocument/2006/relationships" xmlns:p="http://schemas.openxmlformats.org/presentationml/2006/main">
+  <p:cSld>
+    <p:spTree>
+      <p:nvGrpSpPr>
+        <p:cNvPr id="1" name="">
+          <a:extLst>
+            <a:ext uri="{FF2B5EF4-FFF2-40B4-BE49-F238E27FC236}">
+              <a16:creationId xmlns:a16="http://schemas.microsoft.com/office/drawing/2014/main" id="{5B70297A-DE05-9808-5481-6B9F792AAE99}"/>
+            </a:ext>
+          </a:extLst>
+        </p:cNvPr>
+        <p:cNvGrpSpPr/>
+        <p:nvPr/>
+      </p:nvGrpSpPr>
+      <p:grpSpPr>
+        <a:xfrm>
+          <a:off x="0" y="0"/>
+          <a:ext cx="0" cy="0"/>
+          <a:chOff x="0" y="0"/>
+          <a:chExt cx="0" cy="0"/>
+        </a:xfrm>
+      </p:grpSpPr>
+      <p:sp>
+        <p:nvSpPr>
+          <p:cNvPr id="10" name="Заголовок 2">
+            <a:extLst>
+              <a:ext uri="{FF2B5EF4-FFF2-40B4-BE49-F238E27FC236}">
+                <a16:creationId xmlns:a16="http://schemas.microsoft.com/office/drawing/2014/main" id="{80447719-7212-728E-00FA-202ABE5C7C3E}"/>
+              </a:ext>
+            </a:extLst>
+          </p:cNvPr>
+          <p:cNvSpPr txBox="1">
+            <a:spLocks/>
+          </p:cNvSpPr>
+          <p:nvPr/>
+        </p:nvSpPr>
+        <p:spPr>
+          <a:xfrm>
+            <a:off x="666489" y="1160924"/>
+            <a:ext cx="9252574" cy="396243"/>
+          </a:xfrm>
+          <a:prstGeom prst="rect">
+            <a:avLst/>
+          </a:prstGeom>
+        </p:spPr>
+        <p:txBody>
+          <a:bodyPr vert="horz" lIns="0" tIns="0" rIns="0" bIns="0" rtlCol="0" anchor="t">
+            <a:normAutofit/>
+          </a:bodyPr>
+          <a:lstStyle>
+            <a:lvl1pPr algn="l" defTabSz="914400" rtl="0" eaLnBrk="1" latinLnBrk="0" hangingPunct="1">
+              <a:lnSpc>
+                <a:spcPct val="100000"/>
+              </a:lnSpc>
+              <a:spcBef>
+                <a:spcPct val="0"/>
+              </a:spcBef>
+              <a:buNone/>
+              <a:defRPr sz="2400" b="0" i="0" kern="1200">
+                <a:solidFill>
+                  <a:schemeClr val="tx1"/>
+                </a:solidFill>
+                <a:latin typeface="HSE Sans" panose="02000000000000000000" pitchFamily="2" charset="0"/>
+                <a:ea typeface="+mj-ea"/>
+                <a:cs typeface="+mj-cs"/>
+              </a:defRPr>
+            </a:lvl1pPr>
+          </a:lstStyle>
+          <a:p>
+            <a:r>
+              <a:rPr lang="ru-RU" b="1" dirty="0"/>
+              <a:t>Используемые метрики качества</a:t>
+            </a:r>
+          </a:p>
+        </p:txBody>
+      </p:sp>
+      <p:sp>
+        <p:nvSpPr>
+          <p:cNvPr id="17" name="Текст 4">
+            <a:extLst>
+              <a:ext uri="{FF2B5EF4-FFF2-40B4-BE49-F238E27FC236}">
+                <a16:creationId xmlns:a16="http://schemas.microsoft.com/office/drawing/2014/main" id="{94B7DA04-5809-1DCA-7D31-24A037705C49}"/>
+              </a:ext>
+            </a:extLst>
+          </p:cNvPr>
+          <p:cNvSpPr txBox="1">
+            <a:spLocks/>
+          </p:cNvSpPr>
+          <p:nvPr/>
+        </p:nvSpPr>
+        <p:spPr>
+          <a:xfrm>
+            <a:off x="1143689" y="540904"/>
+            <a:ext cx="2070100" cy="415925"/>
+          </a:xfrm>
+          <a:prstGeom prst="rect">
+            <a:avLst/>
+          </a:prstGeom>
+        </p:spPr>
+        <p:txBody>
+          <a:bodyPr vert="horz" lIns="0" tIns="0" rIns="0" bIns="0" rtlCol="0">
+            <a:noAutofit/>
+          </a:bodyPr>
+          <a:lstStyle>
+            <a:lvl1pPr marL="0" marR="0" indent="0" algn="l" defTabSz="914400" rtl="0" eaLnBrk="1" fontAlgn="auto" latinLnBrk="0" hangingPunct="1">
+              <a:lnSpc>
+                <a:spcPct val="100000"/>
+              </a:lnSpc>
+              <a:spcBef>
+                <a:spcPts val="0"/>
+              </a:spcBef>
+              <a:spcAft>
+                <a:spcPts val="0"/>
+              </a:spcAft>
+              <a:buClrTx/>
+              <a:buSzTx/>
+              <a:buFont typeface="Arial" panose="020B0604020202020204" pitchFamily="34" charset="0"/>
+              <a:buNone/>
+              <a:tabLst/>
+              <a:defRPr sz="1000" b="0" i="0" kern="1200">
+                <a:solidFill>
+                  <a:schemeClr val="tx1"/>
+                </a:solidFill>
+                <a:latin typeface="HSE Sans" panose="02000000000000000000" pitchFamily="2" charset="0"/>
+                <a:ea typeface="+mn-ea"/>
+                <a:cs typeface="+mn-cs"/>
+              </a:defRPr>
+            </a:lvl1pPr>
+            <a:lvl2pPr marL="457200" indent="0" algn="l" defTabSz="914400" rtl="0" eaLnBrk="1" latinLnBrk="0" hangingPunct="1">
+              <a:lnSpc>
+                <a:spcPct val="100000"/>
+              </a:lnSpc>
+              <a:spcBef>
+                <a:spcPts val="500"/>
+              </a:spcBef>
+              <a:buFont typeface="Arial" panose="020B0604020202020204" pitchFamily="34" charset="0"/>
+              <a:buNone/>
+              <a:defRPr sz="1000" b="0" i="0" kern="1200">
+                <a:solidFill>
+                  <a:schemeClr val="tx1"/>
+                </a:solidFill>
+                <a:latin typeface="HSE Sans" panose="02000000000000000000" pitchFamily="2" charset="0"/>
+                <a:ea typeface="+mn-ea"/>
+                <a:cs typeface="+mn-cs"/>
+              </a:defRPr>
+            </a:lvl2pPr>
+            <a:lvl3pPr marL="914400" indent="0" algn="l" defTabSz="914400" rtl="0" eaLnBrk="1" latinLnBrk="0" hangingPunct="1">
+              <a:lnSpc>
+                <a:spcPct val="100000"/>
+              </a:lnSpc>
+              <a:spcBef>
+                <a:spcPts val="500"/>
+              </a:spcBef>
+              <a:buFont typeface="Arial" panose="020B0604020202020204" pitchFamily="34" charset="0"/>
+              <a:buNone/>
+              <a:defRPr sz="1000" b="0" i="0" kern="1200">
+                <a:solidFill>
+                  <a:schemeClr val="tx1"/>
+                </a:solidFill>
+                <a:latin typeface="HSE Sans" panose="02000000000000000000" pitchFamily="2" charset="0"/>
+                <a:ea typeface="+mn-ea"/>
+                <a:cs typeface="+mn-cs"/>
+              </a:defRPr>
+            </a:lvl3pPr>
+            <a:lvl4pPr marL="1371600" indent="0" algn="l" defTabSz="914400" rtl="0" eaLnBrk="1" latinLnBrk="0" hangingPunct="1">
+              <a:lnSpc>
+                <a:spcPct val="100000"/>
+              </a:lnSpc>
+              <a:spcBef>
+                <a:spcPts val="500"/>
+              </a:spcBef>
+              <a:buFont typeface="Arial" panose="020B0604020202020204" pitchFamily="34" charset="0"/>
+              <a:buNone/>
+              <a:defRPr sz="1000" b="0" i="0" kern="1200">
+                <a:solidFill>
+                  <a:schemeClr val="tx1"/>
+                </a:solidFill>
+                <a:latin typeface="HSE Sans" panose="02000000000000000000" pitchFamily="2" charset="0"/>
+                <a:ea typeface="+mn-ea"/>
+                <a:cs typeface="+mn-cs"/>
+              </a:defRPr>
+            </a:lvl4pPr>
+            <a:lvl5pPr marL="1828800" indent="0" algn="l" defTabSz="914400" rtl="0" eaLnBrk="1" latinLnBrk="0" hangingPunct="1">
+              <a:lnSpc>
+                <a:spcPct val="100000"/>
+              </a:lnSpc>
+              <a:spcBef>
+                <a:spcPts val="500"/>
+              </a:spcBef>
+              <a:buFont typeface="Arial" panose="020B0604020202020204" pitchFamily="34" charset="0"/>
+              <a:buNone/>
+              <a:defRPr sz="1000" b="0" i="0" kern="1200">
+                <a:solidFill>
+                  <a:schemeClr val="tx1"/>
+                </a:solidFill>
+                <a:latin typeface="HSE Sans" panose="02000000000000000000" pitchFamily="2" charset="0"/>
+                <a:ea typeface="+mn-ea"/>
+                <a:cs typeface="+mn-cs"/>
+              </a:defRPr>
+            </a:lvl5pPr>
+            <a:lvl6pPr marL="2514600" indent="-228600" algn="l" defTabSz="914400" rtl="0" eaLnBrk="1" latinLnBrk="0" hangingPunct="1">
+              <a:lnSpc>
+                <a:spcPct val="90000"/>
+              </a:lnSpc>
+              <a:spcBef>
+                <a:spcPts val="500"/>
+              </a:spcBef>
+              <a:buFont typeface="Arial" panose="020B0604020202020204" pitchFamily="34" charset="0"/>
+              <a:buChar char="•"/>
+              <a:defRPr sz="1800" kern="1200">
+                <a:solidFill>
+                  <a:schemeClr val="tx1"/>
+                </a:solidFill>
+                <a:latin typeface="+mn-lt"/>
+                <a:ea typeface="+mn-ea"/>
+                <a:cs typeface="+mn-cs"/>
+              </a:defRPr>
+            </a:lvl6pPr>
+            <a:lvl7pPr marL="2971800" indent="-228600" algn="l" defTabSz="914400" rtl="0" eaLnBrk="1" latinLnBrk="0" hangingPunct="1">
+              <a:lnSpc>
+                <a:spcPct val="90000"/>
+              </a:lnSpc>
+              <a:spcBef>
+                <a:spcPts val="500"/>
+              </a:spcBef>
+              <a:buFont typeface="Arial" panose="020B0604020202020204" pitchFamily="34" charset="0"/>
+              <a:buChar char="•"/>
+              <a:defRPr sz="1800" kern="1200">
+                <a:solidFill>
+                  <a:schemeClr val="tx1"/>
+                </a:solidFill>
+                <a:latin typeface="+mn-lt"/>
+                <a:ea typeface="+mn-ea"/>
+                <a:cs typeface="+mn-cs"/>
+              </a:defRPr>
+            </a:lvl7pPr>
+            <a:lvl8pPr marL="3429000" indent="-228600" algn="l" defTabSz="914400" rtl="0" eaLnBrk="1" latinLnBrk="0" hangingPunct="1">
+              <a:lnSpc>
+                <a:spcPct val="90000"/>
+              </a:lnSpc>
+              <a:spcBef>
+                <a:spcPts val="500"/>
+              </a:spcBef>
+              <a:buFont typeface="Arial" panose="020B0604020202020204" pitchFamily="34" charset="0"/>
+              <a:buChar char="•"/>
+              <a:defRPr sz="1800" kern="1200">
+                <a:solidFill>
+                  <a:schemeClr val="tx1"/>
+                </a:solidFill>
+                <a:latin typeface="+mn-lt"/>
+                <a:ea typeface="+mn-ea"/>
+                <a:cs typeface="+mn-cs"/>
+              </a:defRPr>
+            </a:lvl8pPr>
+            <a:lvl9pPr marL="3886200" indent="-228600" algn="l" defTabSz="914400" rtl="0" eaLnBrk="1" latinLnBrk="0" hangingPunct="1">
+              <a:lnSpc>
+                <a:spcPct val="90000"/>
+              </a:lnSpc>
+              <a:spcBef>
+                <a:spcPts val="500"/>
+              </a:spcBef>
+              <a:buFont typeface="Arial" panose="020B0604020202020204" pitchFamily="34" charset="0"/>
+              <a:buChar char="•"/>
+              <a:defRPr sz="1800" kern="1200">
+                <a:solidFill>
+                  <a:schemeClr val="tx1"/>
+                </a:solidFill>
+                <a:latin typeface="+mn-lt"/>
+                <a:ea typeface="+mn-ea"/>
+                <a:cs typeface="+mn-cs"/>
+              </a:defRPr>
+            </a:lvl9pPr>
+          </a:lstStyle>
+          <a:p>
+            <a:r>
+              <a:rPr lang="ru-RU" dirty="0"/>
+              <a:t>Факультет информатики, математики и компьютерных наук</a:t>
+            </a:r>
+          </a:p>
+        </p:txBody>
+      </p:sp>
+      <p:sp>
+        <p:nvSpPr>
+          <p:cNvPr id="18" name="Текст 5">
+            <a:extLst>
+              <a:ext uri="{FF2B5EF4-FFF2-40B4-BE49-F238E27FC236}">
+                <a16:creationId xmlns:a16="http://schemas.microsoft.com/office/drawing/2014/main" id="{E744E8E8-F2F2-2DC2-572D-32701B96D7D6}"/>
+              </a:ext>
+            </a:extLst>
+          </p:cNvPr>
+          <p:cNvSpPr txBox="1">
+            <a:spLocks/>
+          </p:cNvSpPr>
+          <p:nvPr/>
+        </p:nvSpPr>
+        <p:spPr>
+          <a:xfrm>
+            <a:off x="3459162" y="548720"/>
+            <a:ext cx="2341003" cy="408109"/>
+          </a:xfrm>
+          <a:prstGeom prst="rect">
+            <a:avLst/>
+          </a:prstGeom>
+        </p:spPr>
+        <p:txBody>
+          <a:bodyPr vert="horz" lIns="0" tIns="0" rIns="0" bIns="0" rtlCol="0">
+            <a:noAutofit/>
+          </a:bodyPr>
+          <a:lstStyle>
+            <a:lvl1pPr marL="0" indent="0" algn="l" defTabSz="914400" rtl="0" eaLnBrk="1" latinLnBrk="0" hangingPunct="1">
+              <a:lnSpc>
+                <a:spcPct val="100000"/>
+              </a:lnSpc>
+              <a:spcBef>
+                <a:spcPts val="0"/>
+              </a:spcBef>
+              <a:buFont typeface="Arial" panose="020B0604020202020204" pitchFamily="34" charset="0"/>
+              <a:buNone/>
+              <a:defRPr sz="1000" b="0" i="0" kern="1200">
+                <a:solidFill>
+                  <a:srgbClr val="0E2D69"/>
+                </a:solidFill>
+                <a:latin typeface="HSE Sans" panose="02000000000000000000" pitchFamily="2" charset="0"/>
+                <a:ea typeface="+mn-ea"/>
+                <a:cs typeface="+mn-cs"/>
+              </a:defRPr>
+            </a:lvl1pPr>
+            <a:lvl2pPr marL="457200" indent="0" algn="l" defTabSz="914400" rtl="0" eaLnBrk="1" latinLnBrk="0" hangingPunct="1">
+              <a:lnSpc>
+                <a:spcPct val="90000"/>
+              </a:lnSpc>
+              <a:spcBef>
+                <a:spcPts val="500"/>
+              </a:spcBef>
+              <a:buFont typeface="Arial" panose="020B0604020202020204" pitchFamily="34" charset="0"/>
+              <a:buNone/>
+              <a:defRPr sz="1000" b="0" i="0" kern="1200">
+                <a:solidFill>
+                  <a:srgbClr val="0E2D69"/>
+                </a:solidFill>
+                <a:latin typeface="HSE Sans" panose="02000000000000000000" pitchFamily="2" charset="0"/>
+                <a:ea typeface="+mn-ea"/>
+                <a:cs typeface="+mn-cs"/>
+              </a:defRPr>
+            </a:lvl2pPr>
+            <a:lvl3pPr marL="914400" indent="0" algn="l" defTabSz="914400" rtl="0" eaLnBrk="1" latinLnBrk="0" hangingPunct="1">
+              <a:lnSpc>
+                <a:spcPct val="90000"/>
+              </a:lnSpc>
+              <a:spcBef>
+                <a:spcPts val="500"/>
+              </a:spcBef>
+              <a:buFont typeface="Arial" panose="020B0604020202020204" pitchFamily="34" charset="0"/>
+              <a:buNone/>
+              <a:defRPr sz="1000" b="0" i="0" kern="1200">
+                <a:solidFill>
+                  <a:srgbClr val="0E2D69"/>
+                </a:solidFill>
+                <a:latin typeface="HSE Sans" panose="02000000000000000000" pitchFamily="2" charset="0"/>
+                <a:ea typeface="+mn-ea"/>
+                <a:cs typeface="+mn-cs"/>
+              </a:defRPr>
+            </a:lvl3pPr>
+            <a:lvl4pPr marL="1371600" indent="0" algn="l" defTabSz="914400" rtl="0" eaLnBrk="1" latinLnBrk="0" hangingPunct="1">
+              <a:lnSpc>
+                <a:spcPct val="90000"/>
+              </a:lnSpc>
+              <a:spcBef>
+                <a:spcPts val="500"/>
+              </a:spcBef>
+              <a:buFont typeface="Arial" panose="020B0604020202020204" pitchFamily="34" charset="0"/>
+              <a:buNone/>
+              <a:defRPr sz="1000" b="0" i="0" kern="1200">
+                <a:solidFill>
+                  <a:srgbClr val="0E2D69"/>
+                </a:solidFill>
+                <a:latin typeface="HSE Sans" panose="02000000000000000000" pitchFamily="2" charset="0"/>
+                <a:ea typeface="+mn-ea"/>
+                <a:cs typeface="+mn-cs"/>
+              </a:defRPr>
+            </a:lvl4pPr>
+            <a:lvl5pPr marL="1828800" indent="0" algn="l" defTabSz="914400" rtl="0" eaLnBrk="1" latinLnBrk="0" hangingPunct="1">
+              <a:lnSpc>
+                <a:spcPct val="90000"/>
+              </a:lnSpc>
+              <a:spcBef>
+                <a:spcPts val="500"/>
+              </a:spcBef>
+              <a:buFont typeface="Arial" panose="020B0604020202020204" pitchFamily="34" charset="0"/>
+              <a:buNone/>
+              <a:defRPr sz="1000" b="0" i="0" kern="1200">
+                <a:solidFill>
+                  <a:srgbClr val="0E2D69"/>
+                </a:solidFill>
+                <a:latin typeface="HSE Sans" panose="02000000000000000000" pitchFamily="2" charset="0"/>
+                <a:ea typeface="+mn-ea"/>
+                <a:cs typeface="+mn-cs"/>
+              </a:defRPr>
+            </a:lvl5pPr>
+            <a:lvl6pPr marL="2514600" indent="-228600" algn="l" defTabSz="914400" rtl="0" eaLnBrk="1" latinLnBrk="0" hangingPunct="1">
+              <a:lnSpc>
+                <a:spcPct val="90000"/>
+              </a:lnSpc>
+              <a:spcBef>
+                <a:spcPts val="500"/>
+              </a:spcBef>
+              <a:buFont typeface="Arial" panose="020B0604020202020204" pitchFamily="34" charset="0"/>
+              <a:buChar char="•"/>
+              <a:defRPr sz="1800" kern="1200">
+                <a:solidFill>
+                  <a:schemeClr val="tx1"/>
+                </a:solidFill>
+                <a:latin typeface="+mn-lt"/>
+                <a:ea typeface="+mn-ea"/>
+                <a:cs typeface="+mn-cs"/>
+              </a:defRPr>
+            </a:lvl6pPr>
+            <a:lvl7pPr marL="2971800" indent="-228600" algn="l" defTabSz="914400" rtl="0" eaLnBrk="1" latinLnBrk="0" hangingPunct="1">
+              <a:lnSpc>
+                <a:spcPct val="90000"/>
+              </a:lnSpc>
+              <a:spcBef>
+                <a:spcPts val="500"/>
+              </a:spcBef>
+              <a:buFont typeface="Arial" panose="020B0604020202020204" pitchFamily="34" charset="0"/>
+              <a:buChar char="•"/>
+              <a:defRPr sz="1800" kern="1200">
+                <a:solidFill>
+                  <a:schemeClr val="tx1"/>
+                </a:solidFill>
+                <a:latin typeface="+mn-lt"/>
+                <a:ea typeface="+mn-ea"/>
+                <a:cs typeface="+mn-cs"/>
+              </a:defRPr>
+            </a:lvl7pPr>
+            <a:lvl8pPr marL="3429000" indent="-228600" algn="l" defTabSz="914400" rtl="0" eaLnBrk="1" latinLnBrk="0" hangingPunct="1">
+              <a:lnSpc>
+                <a:spcPct val="90000"/>
+              </a:lnSpc>
+              <a:spcBef>
+                <a:spcPts val="500"/>
+              </a:spcBef>
+              <a:buFont typeface="Arial" panose="020B0604020202020204" pitchFamily="34" charset="0"/>
+              <a:buChar char="•"/>
+              <a:defRPr sz="1800" kern="1200">
+                <a:solidFill>
+                  <a:schemeClr val="tx1"/>
+                </a:solidFill>
+                <a:latin typeface="+mn-lt"/>
+                <a:ea typeface="+mn-ea"/>
+                <a:cs typeface="+mn-cs"/>
+              </a:defRPr>
+            </a:lvl8pPr>
+            <a:lvl9pPr marL="3886200" indent="-228600" algn="l" defTabSz="914400" rtl="0" eaLnBrk="1" latinLnBrk="0" hangingPunct="1">
+              <a:lnSpc>
+                <a:spcPct val="90000"/>
+              </a:lnSpc>
+              <a:spcBef>
+                <a:spcPts val="500"/>
+              </a:spcBef>
+              <a:buFont typeface="Arial" panose="020B0604020202020204" pitchFamily="34" charset="0"/>
+              <a:buChar char="•"/>
+              <a:defRPr sz="1800" kern="1200">
+                <a:solidFill>
+                  <a:schemeClr val="tx1"/>
+                </a:solidFill>
+                <a:latin typeface="+mn-lt"/>
+                <a:ea typeface="+mn-ea"/>
+                <a:cs typeface="+mn-cs"/>
+              </a:defRPr>
+            </a:lvl9pPr>
+          </a:lstStyle>
+          <a:p>
+            <a:r>
+              <a:rPr lang="ru-RU" dirty="0"/>
+              <a:t>Классификация выражений лиц с детектированием эмоций в речи</a:t>
+            </a:r>
+          </a:p>
+        </p:txBody>
+      </p:sp>
+      <p:sp>
+        <p:nvSpPr>
+          <p:cNvPr id="19" name="Текст 6">
+            <a:extLst>
+              <a:ext uri="{FF2B5EF4-FFF2-40B4-BE49-F238E27FC236}">
+                <a16:creationId xmlns:a16="http://schemas.microsoft.com/office/drawing/2014/main" id="{308A7AF0-E616-80CB-2F87-EA9EC4FCE715}"/>
+              </a:ext>
+            </a:extLst>
+          </p:cNvPr>
+          <p:cNvSpPr txBox="1">
+            <a:spLocks/>
+          </p:cNvSpPr>
+          <p:nvPr/>
+        </p:nvSpPr>
+        <p:spPr>
+          <a:xfrm>
+            <a:off x="6259892" y="548720"/>
+            <a:ext cx="2070100" cy="408109"/>
+          </a:xfrm>
+          <a:prstGeom prst="rect">
+            <a:avLst/>
+          </a:prstGeom>
+        </p:spPr>
+        <p:txBody>
+          <a:bodyPr vert="horz" lIns="0" tIns="0" rIns="0" bIns="0" rtlCol="0">
+            <a:noAutofit/>
+          </a:bodyPr>
+          <a:lstStyle>
+            <a:lvl1pPr marL="0" indent="0" algn="l" defTabSz="914400" rtl="0" eaLnBrk="1" latinLnBrk="0" hangingPunct="1">
+              <a:lnSpc>
+                <a:spcPct val="100000"/>
+              </a:lnSpc>
+              <a:spcBef>
+                <a:spcPts val="0"/>
+              </a:spcBef>
+              <a:buFont typeface="Arial" panose="020B0604020202020204" pitchFamily="34" charset="0"/>
+              <a:buNone/>
+              <a:defRPr sz="1000" b="0" i="0" kern="1200">
+                <a:solidFill>
+                  <a:srgbClr val="0E2D69"/>
+                </a:solidFill>
+                <a:latin typeface="HSE Sans" panose="02000000000000000000" pitchFamily="2" charset="0"/>
+                <a:ea typeface="+mn-ea"/>
+                <a:cs typeface="+mn-cs"/>
+              </a:defRPr>
+            </a:lvl1pPr>
+            <a:lvl2pPr marL="457200" indent="0" algn="l" defTabSz="914400" rtl="0" eaLnBrk="1" latinLnBrk="0" hangingPunct="1">
+              <a:lnSpc>
+                <a:spcPct val="90000"/>
+              </a:lnSpc>
+              <a:spcBef>
+                <a:spcPts val="500"/>
+              </a:spcBef>
+              <a:buFont typeface="Arial" panose="020B0604020202020204" pitchFamily="34" charset="0"/>
+              <a:buNone/>
+              <a:defRPr sz="1000" b="0" i="0" kern="1200">
+                <a:solidFill>
+                  <a:srgbClr val="0E2D69"/>
+                </a:solidFill>
+                <a:latin typeface="HSE Sans" panose="02000000000000000000" pitchFamily="2" charset="0"/>
+                <a:ea typeface="+mn-ea"/>
+                <a:cs typeface="+mn-cs"/>
+              </a:defRPr>
+            </a:lvl2pPr>
+            <a:lvl3pPr marL="914400" indent="0" algn="l" defTabSz="914400" rtl="0" eaLnBrk="1" latinLnBrk="0" hangingPunct="1">
+              <a:lnSpc>
+                <a:spcPct val="90000"/>
+              </a:lnSpc>
+              <a:spcBef>
+                <a:spcPts val="500"/>
+              </a:spcBef>
+              <a:buFont typeface="Arial" panose="020B0604020202020204" pitchFamily="34" charset="0"/>
+              <a:buNone/>
+              <a:defRPr sz="1000" b="0" i="0" kern="1200">
+                <a:solidFill>
+                  <a:srgbClr val="0E2D69"/>
+                </a:solidFill>
+                <a:latin typeface="HSE Sans" panose="02000000000000000000" pitchFamily="2" charset="0"/>
+                <a:ea typeface="+mn-ea"/>
+                <a:cs typeface="+mn-cs"/>
+              </a:defRPr>
+            </a:lvl3pPr>
+            <a:lvl4pPr marL="1371600" indent="0" algn="l" defTabSz="914400" rtl="0" eaLnBrk="1" latinLnBrk="0" hangingPunct="1">
+              <a:lnSpc>
+                <a:spcPct val="90000"/>
+              </a:lnSpc>
+              <a:spcBef>
+                <a:spcPts val="500"/>
+              </a:spcBef>
+              <a:buFont typeface="Arial" panose="020B0604020202020204" pitchFamily="34" charset="0"/>
+              <a:buNone/>
+              <a:defRPr sz="1000" b="0" i="0" kern="1200">
+                <a:solidFill>
+                  <a:srgbClr val="0E2D69"/>
+                </a:solidFill>
+                <a:latin typeface="HSE Sans" panose="02000000000000000000" pitchFamily="2" charset="0"/>
+                <a:ea typeface="+mn-ea"/>
+                <a:cs typeface="+mn-cs"/>
+              </a:defRPr>
+            </a:lvl4pPr>
+            <a:lvl5pPr marL="1828800" indent="0" algn="l" defTabSz="914400" rtl="0" eaLnBrk="1" latinLnBrk="0" hangingPunct="1">
+              <a:lnSpc>
+                <a:spcPct val="90000"/>
+              </a:lnSpc>
+              <a:spcBef>
+                <a:spcPts val="500"/>
+              </a:spcBef>
+              <a:buFont typeface="Arial" panose="020B0604020202020204" pitchFamily="34" charset="0"/>
+              <a:buNone/>
+              <a:defRPr sz="1000" b="0" i="0" kern="1200">
+                <a:solidFill>
+                  <a:srgbClr val="0E2D69"/>
+                </a:solidFill>
+                <a:latin typeface="HSE Sans" panose="02000000000000000000" pitchFamily="2" charset="0"/>
+                <a:ea typeface="+mn-ea"/>
+                <a:cs typeface="+mn-cs"/>
+              </a:defRPr>
+            </a:lvl5pPr>
+            <a:lvl6pPr marL="2514600" indent="-228600" algn="l" defTabSz="914400" rtl="0" eaLnBrk="1" latinLnBrk="0" hangingPunct="1">
+              <a:lnSpc>
+                <a:spcPct val="90000"/>
+              </a:lnSpc>
+              <a:spcBef>
+                <a:spcPts val="500"/>
+              </a:spcBef>
+              <a:buFont typeface="Arial" panose="020B0604020202020204" pitchFamily="34" charset="0"/>
+              <a:buChar char="•"/>
+              <a:defRPr sz="1800" kern="1200">
+                <a:solidFill>
+                  <a:schemeClr val="tx1"/>
+                </a:solidFill>
+                <a:latin typeface="+mn-lt"/>
+                <a:ea typeface="+mn-ea"/>
+                <a:cs typeface="+mn-cs"/>
+              </a:defRPr>
+            </a:lvl6pPr>
+            <a:lvl7pPr marL="2971800" indent="-228600" algn="l" defTabSz="914400" rtl="0" eaLnBrk="1" latinLnBrk="0" hangingPunct="1">
+              <a:lnSpc>
+                <a:spcPct val="90000"/>
+              </a:lnSpc>
+              <a:spcBef>
+                <a:spcPts val="500"/>
+              </a:spcBef>
+              <a:buFont typeface="Arial" panose="020B0604020202020204" pitchFamily="34" charset="0"/>
+              <a:buChar char="•"/>
+              <a:defRPr sz="1800" kern="1200">
+                <a:solidFill>
+                  <a:schemeClr val="tx1"/>
+                </a:solidFill>
+                <a:latin typeface="+mn-lt"/>
+                <a:ea typeface="+mn-ea"/>
+                <a:cs typeface="+mn-cs"/>
+              </a:defRPr>
+            </a:lvl7pPr>
+            <a:lvl8pPr marL="3429000" indent="-228600" algn="l" defTabSz="914400" rtl="0" eaLnBrk="1" latinLnBrk="0" hangingPunct="1">
+              <a:lnSpc>
+                <a:spcPct val="90000"/>
+              </a:lnSpc>
+              <a:spcBef>
+                <a:spcPts val="500"/>
+              </a:spcBef>
+              <a:buFont typeface="Arial" panose="020B0604020202020204" pitchFamily="34" charset="0"/>
+              <a:buChar char="•"/>
+              <a:defRPr sz="1800" kern="1200">
+                <a:solidFill>
+                  <a:schemeClr val="tx1"/>
+                </a:solidFill>
+                <a:latin typeface="+mn-lt"/>
+                <a:ea typeface="+mn-ea"/>
+                <a:cs typeface="+mn-cs"/>
+              </a:defRPr>
+            </a:lvl8pPr>
+            <a:lvl9pPr marL="3886200" indent="-228600" algn="l" defTabSz="914400" rtl="0" eaLnBrk="1" latinLnBrk="0" hangingPunct="1">
+              <a:lnSpc>
+                <a:spcPct val="90000"/>
+              </a:lnSpc>
+              <a:spcBef>
+                <a:spcPts val="500"/>
+              </a:spcBef>
+              <a:buFont typeface="Arial" panose="020B0604020202020204" pitchFamily="34" charset="0"/>
+              <a:buChar char="•"/>
+              <a:defRPr sz="1800" kern="1200">
+                <a:solidFill>
+                  <a:schemeClr val="tx1"/>
+                </a:solidFill>
+                <a:latin typeface="+mn-lt"/>
+                <a:ea typeface="+mn-ea"/>
+                <a:cs typeface="+mn-cs"/>
+              </a:defRPr>
+            </a:lvl9pPr>
+          </a:lstStyle>
+          <a:p>
+            <a:r>
+              <a:rPr lang="ru-RU" dirty="0"/>
+              <a:t>Канделов Дамир Русланович </a:t>
+            </a:r>
+          </a:p>
+          <a:p>
+            <a:r>
+              <a:rPr lang="ru-RU" dirty="0"/>
+              <a:t>Группа: 22ПИ-1</a:t>
+            </a:r>
+          </a:p>
+        </p:txBody>
+      </p:sp>
+      <p:sp>
+        <p:nvSpPr>
+          <p:cNvPr id="4" name="Rectangle 2">
+            <a:extLst>
+              <a:ext uri="{FF2B5EF4-FFF2-40B4-BE49-F238E27FC236}">
+                <a16:creationId xmlns:a16="http://schemas.microsoft.com/office/drawing/2014/main" id="{68BEC145-628A-138F-DAAD-D313D1E3EC28}"/>
+              </a:ext>
+            </a:extLst>
+          </p:cNvPr>
+          <p:cNvSpPr>
+            <a:spLocks noChangeArrowheads="1"/>
+          </p:cNvSpPr>
+          <p:nvPr/>
+        </p:nvSpPr>
+        <p:spPr bwMode="auto">
+          <a:xfrm>
+            <a:off x="0" y="0"/>
+            <a:ext cx="12192000" cy="457200"/>
+          </a:xfrm>
+          <a:prstGeom prst="rect">
+            <a:avLst/>
+          </a:prstGeom>
+          <a:noFill/>
+          <a:ln>
+            <a:noFill/>
+          </a:ln>
+          <a:effectLst/>
+          <a:extLst>
+            <a:ext uri="{909E8E84-426E-40DD-AFC4-6F175D3DCCD1}">
+              <a14:hiddenFill xmlns:a14="http://schemas.microsoft.com/office/drawing/2010/main">
+                <a:solidFill>
+                  <a:schemeClr val="accent1"/>
+                </a:solidFill>
+              </a14:hiddenFill>
+            </a:ext>
+            <a:ext uri="{91240B29-F687-4F45-9708-019B960494DF}">
+              <a14:hiddenLine xmlns:a14="http://schemas.microsoft.com/office/drawing/2010/main" w="9525">
+                <a:solidFill>
+                  <a:schemeClr val="tx1"/>
+                </a:solidFill>
+                <a:miter lim="800000"/>
+                <a:headEnd/>
+                <a:tailEnd/>
+              </a14:hiddenLine>
+            </a:ext>
+            <a:ext uri="{AF507438-7753-43E0-B8FC-AC1667EBCBE1}">
+              <a14:hiddenEffects xmlns:a14="http://schemas.microsoft.com/office/drawing/2010/main">
+                <a:effectLst>
+                  <a:outerShdw dist="35921" dir="2700000" algn="ctr" rotWithShape="0">
+                    <a:schemeClr val="bg2"/>
+                  </a:outerShdw>
+                </a:effectLst>
+              </a14:hiddenEffects>
+            </a:ext>
+          </a:extLst>
+        </p:spPr>
+        <p:txBody>
+          <a:bodyPr vert="horz" wrap="none" lIns="91440" tIns="45720" rIns="91440" bIns="45720" numCol="1" anchor="ctr" anchorCtr="0" compatLnSpc="1">
+            <a:prstTxWarp prst="textNoShape">
+              <a:avLst/>
+            </a:prstTxWarp>
+            <a:spAutoFit/>
+          </a:bodyPr>
+          <a:lstStyle/>
+          <a:p>
+            <a:endParaRPr lang="en-RU"/>
+          </a:p>
+        </p:txBody>
+      </p:sp>
+      <mc:AlternateContent xmlns:mc="http://schemas.openxmlformats.org/markup-compatibility/2006" xmlns:a14="http://schemas.microsoft.com/office/drawing/2010/main">
+        <mc:Choice Requires="a14">
+          <p:sp>
+            <p:nvSpPr>
+              <p:cNvPr id="12" name="TextBox 11">
+                <a:extLst>
+                  <a:ext uri="{FF2B5EF4-FFF2-40B4-BE49-F238E27FC236}">
+                    <a16:creationId xmlns:a16="http://schemas.microsoft.com/office/drawing/2014/main" id="{47241897-D23B-59A6-7FEB-3EB93E1F09CE}"/>
+                  </a:ext>
+                </a:extLst>
+              </p:cNvPr>
+              <p:cNvSpPr txBox="1"/>
+              <p:nvPr/>
+            </p:nvSpPr>
+            <p:spPr>
+              <a:xfrm>
+                <a:off x="972417" y="3420515"/>
+                <a:ext cx="3387213" cy="777330"/>
+              </a:xfrm>
+              <a:prstGeom prst="rect">
+                <a:avLst/>
+              </a:prstGeom>
+            </p:spPr>
+            <p:txBody>
+              <a:bodyPr vert="horz" lIns="0" tIns="0" rIns="0" bIns="0" rtlCol="0" anchor="t">
+                <a:normAutofit/>
+              </a:bodyPr>
+              <a:lstStyle>
+                <a:defPPr>
+                  <a:defRPr lang="en-RU"/>
+                </a:defPPr>
+                <a:lvl1pPr>
+                  <a:lnSpc>
+                    <a:spcPct val="100000"/>
+                  </a:lnSpc>
+                  <a:spcBef>
+                    <a:spcPct val="0"/>
+                  </a:spcBef>
+                  <a:buNone/>
+                  <a:defRPr sz="2400" b="1" i="0">
+                    <a:latin typeface="HSE Sans" panose="02000000000000000000" pitchFamily="2" charset="0"/>
+                    <a:ea typeface="+mj-ea"/>
+                    <a:cs typeface="+mj-cs"/>
+                  </a:defRPr>
+                </a:lvl1pPr>
+              </a:lstStyle>
+              <a:p>
+                <a:pPr marL="342900" indent="-342900">
+                  <a:buFont typeface="Arial" panose="020B0604020202020204" pitchFamily="34" charset="0"/>
+                  <a:buChar char="•"/>
+                </a:pPr>
+                <a14:m>
+                  <m:oMath xmlns:m="http://schemas.openxmlformats.org/officeDocument/2006/math">
+                    <m:r>
+                      <m:rPr>
+                        <m:nor/>
+                      </m:rPr>
+                      <a:rPr lang="en-US" sz="2800" b="0"/>
+                      <m:t>UAR</m:t>
+                    </m:r>
+                    <m:r>
+                      <a:rPr lang="en-US" sz="2800" b="0">
+                        <a:latin typeface="Cambria Math" panose="02040503050406030204" pitchFamily="18" charset="0"/>
+                      </a:rPr>
+                      <m:t>=</m:t>
+                    </m:r>
+                    <m:f>
+                      <m:fPr>
+                        <m:ctrlPr>
+                          <a:rPr lang="en-US" sz="2800" b="0" i="1">
+                            <a:latin typeface="Cambria Math" panose="02040503050406030204" pitchFamily="18" charset="0"/>
+                          </a:rPr>
+                        </m:ctrlPr>
+                      </m:fPr>
+                      <m:num>
+                        <m:r>
+                          <a:rPr lang="en-US" sz="2800" b="0" i="1">
+                            <a:latin typeface="Cambria Math" panose="02040503050406030204" pitchFamily="18" charset="0"/>
+                          </a:rPr>
+                          <m:t>1</m:t>
+                        </m:r>
+                      </m:num>
+                      <m:den>
+                        <m:r>
+                          <a:rPr lang="en-US" sz="2800" b="0" i="1">
+                            <a:latin typeface="Cambria Math" panose="02040503050406030204" pitchFamily="18" charset="0"/>
+                          </a:rPr>
+                          <m:t>𝑁</m:t>
+                        </m:r>
+                      </m:den>
+                    </m:f>
+                    <m:nary>
+                      <m:naryPr>
+                        <m:chr m:val="∑"/>
+                        <m:ctrlPr>
+                          <a:rPr lang="en-US" sz="2800" b="0" i="1">
+                            <a:latin typeface="Cambria Math" panose="02040503050406030204" pitchFamily="18" charset="0"/>
+                          </a:rPr>
+                        </m:ctrlPr>
+                      </m:naryPr>
+                      <m:sub>
+                        <m:r>
+                          <a:rPr lang="en-US" sz="2800" b="0" i="1">
+                            <a:latin typeface="Cambria Math" panose="02040503050406030204" pitchFamily="18" charset="0"/>
+                          </a:rPr>
+                          <m:t>𝑖</m:t>
+                        </m:r>
+                        <m:r>
+                          <a:rPr lang="en-US" sz="2800" b="0">
+                            <a:latin typeface="Cambria Math" panose="02040503050406030204" pitchFamily="18" charset="0"/>
+                          </a:rPr>
+                          <m:t>=</m:t>
+                        </m:r>
+                        <m:r>
+                          <a:rPr lang="en-US" sz="2800" b="0" i="1">
+                            <a:latin typeface="Cambria Math" panose="02040503050406030204" pitchFamily="18" charset="0"/>
+                          </a:rPr>
+                          <m:t>1</m:t>
+                        </m:r>
+                      </m:sub>
+                      <m:sup>
+                        <m:r>
+                          <a:rPr lang="en-US" sz="2800" b="0" i="1">
+                            <a:latin typeface="Cambria Math" panose="02040503050406030204" pitchFamily="18" charset="0"/>
+                          </a:rPr>
+                          <m:t>𝑁</m:t>
+                        </m:r>
+                      </m:sup>
+                      <m:e>
+                        <m:r>
+                          <m:rPr>
+                            <m:nor/>
+                          </m:rPr>
+                          <a:rPr lang="en-US" sz="2800" b="0"/>
+                          <m:t>Recal</m:t>
+                        </m:r>
+                        <m:sSub>
+                          <m:sSubPr>
+                            <m:ctrlPr>
+                              <a:rPr lang="en-US" sz="2800" b="0" i="1">
+                                <a:latin typeface="Cambria Math" panose="02040503050406030204" pitchFamily="18" charset="0"/>
+                              </a:rPr>
+                            </m:ctrlPr>
+                          </m:sSubPr>
+                          <m:e>
+                            <m:r>
+                              <m:rPr>
+                                <m:nor/>
+                              </m:rPr>
+                              <a:rPr lang="en-US" sz="2800" b="0"/>
+                              <m:t>l</m:t>
+                            </m:r>
+                          </m:e>
+                          <m:sub>
+                            <m:r>
+                              <m:rPr>
+                                <m:nor/>
+                              </m:rPr>
+                              <a:rPr lang="en-US" sz="2800" b="0"/>
+                              <m:t>i</m:t>
+                            </m:r>
+                          </m:sub>
+                        </m:sSub>
+                      </m:e>
+                    </m:nary>
+                  </m:oMath>
+                </a14:m>
+                <a:endParaRPr lang="en-US" sz="2800" b="0" dirty="0"/>
+              </a:p>
+            </p:txBody>
+          </p:sp>
+        </mc:Choice>
+        <mc:Fallback xmlns="">
+          <p:sp>
+            <p:nvSpPr>
+              <p:cNvPr id="12" name="TextBox 11">
+                <a:extLst>
+                  <a:ext uri="{FF2B5EF4-FFF2-40B4-BE49-F238E27FC236}">
+                    <a16:creationId xmlns:a16="http://schemas.microsoft.com/office/drawing/2014/main" id="{47241897-D23B-59A6-7FEB-3EB93E1F09CE}"/>
+                  </a:ext>
+                </a:extLst>
+              </p:cNvPr>
+              <p:cNvSpPr txBox="1">
+                <a:spLocks noRot="1" noChangeAspect="1" noMove="1" noResize="1" noEditPoints="1" noAdjustHandles="1" noChangeArrowheads="1" noChangeShapeType="1" noTextEdit="1"/>
+              </p:cNvSpPr>
+              <p:nvPr/>
+            </p:nvSpPr>
+            <p:spPr>
+              <a:xfrm>
+                <a:off x="972417" y="3420515"/>
+                <a:ext cx="3387213" cy="777330"/>
+              </a:xfrm>
+              <a:prstGeom prst="rect">
+                <a:avLst/>
+              </a:prstGeom>
+              <a:blipFill>
+                <a:blip r:embed="rId2"/>
+                <a:stretch>
+                  <a:fillRect l="-5970" t="-80645" r="-2239" b="-104839"/>
+                </a:stretch>
+              </a:blipFill>
+            </p:spPr>
+            <p:txBody>
+              <a:bodyPr/>
+              <a:lstStyle/>
+              <a:p>
+                <a:r>
+                  <a:rPr lang="en-US">
+                    <a:noFill/>
+                  </a:rPr>
+                  <a:t> </a:t>
+                </a:r>
+              </a:p>
+            </p:txBody>
+          </p:sp>
+        </mc:Fallback>
+      </mc:AlternateContent>
+      <p:sp>
+        <p:nvSpPr>
+          <p:cNvPr id="13" name="TextBox 12">
+            <a:extLst>
+              <a:ext uri="{FF2B5EF4-FFF2-40B4-BE49-F238E27FC236}">
+                <a16:creationId xmlns:a16="http://schemas.microsoft.com/office/drawing/2014/main" id="{83E6DC30-3236-DF82-39D3-4C81953B4F75}"/>
+              </a:ext>
+            </a:extLst>
+          </p:cNvPr>
+          <p:cNvSpPr txBox="1"/>
+          <p:nvPr/>
+        </p:nvSpPr>
+        <p:spPr>
+          <a:xfrm>
+            <a:off x="4629663" y="3474781"/>
+            <a:ext cx="4388650" cy="523220"/>
+          </a:xfrm>
+          <a:prstGeom prst="rect">
+            <a:avLst/>
+          </a:prstGeom>
+          <a:noFill/>
+        </p:spPr>
+        <p:txBody>
+          <a:bodyPr wrap="square" rtlCol="0">
+            <a:spAutoFit/>
+          </a:bodyPr>
+          <a:lstStyle/>
+          <a:p>
+            <a:pPr algn="just"/>
+            <a:r>
+              <a:rPr lang="en-US" sz="1400" dirty="0">
+                <a:latin typeface="HSE Sans" panose="02000000000000000000" pitchFamily="2" charset="0"/>
+              </a:rPr>
+              <a:t>UAR </a:t>
+            </a:r>
+            <a:r>
+              <a:rPr lang="ru-RU" sz="1400" dirty="0">
+                <a:latin typeface="HSE Sans" panose="02000000000000000000" pitchFamily="2" charset="0"/>
+              </a:rPr>
+              <a:t>позволяет объективно оценить качество модели на несбалансированных данных</a:t>
+            </a:r>
+          </a:p>
+        </p:txBody>
+      </p:sp>
+      <mc:AlternateContent xmlns:mc="http://schemas.openxmlformats.org/markup-compatibility/2006" xmlns:a14="http://schemas.microsoft.com/office/drawing/2010/main">
+        <mc:Choice Requires="a14">
+          <p:sp>
+            <p:nvSpPr>
+              <p:cNvPr id="15" name="TextBox 14">
+                <a:extLst>
+                  <a:ext uri="{FF2B5EF4-FFF2-40B4-BE49-F238E27FC236}">
+                    <a16:creationId xmlns:a16="http://schemas.microsoft.com/office/drawing/2014/main" id="{A0B2E8DD-4D13-8239-065F-D62EF6651291}"/>
+                  </a:ext>
+                </a:extLst>
+              </p:cNvPr>
+              <p:cNvSpPr txBox="1"/>
+              <p:nvPr/>
+            </p:nvSpPr>
+            <p:spPr>
+              <a:xfrm>
+                <a:off x="972417" y="4798183"/>
+                <a:ext cx="4667176" cy="777331"/>
+              </a:xfrm>
+              <a:prstGeom prst="rect">
+                <a:avLst/>
+              </a:prstGeom>
+            </p:spPr>
+            <p:txBody>
+              <a:bodyPr vert="horz" lIns="0" tIns="0" rIns="0" bIns="0" rtlCol="0" anchor="t">
+                <a:normAutofit/>
+              </a:bodyPr>
+              <a:lstStyle>
+                <a:defPPr>
+                  <a:defRPr lang="en-RU"/>
+                </a:defPPr>
+                <a:lvl1pPr>
+                  <a:lnSpc>
+                    <a:spcPct val="100000"/>
+                  </a:lnSpc>
+                  <a:spcBef>
+                    <a:spcPct val="0"/>
+                  </a:spcBef>
+                  <a:buNone/>
+                  <a:defRPr sz="2400" b="1" i="0">
+                    <a:latin typeface="HSE Sans" panose="02000000000000000000" pitchFamily="2" charset="0"/>
+                    <a:ea typeface="+mj-ea"/>
+                    <a:cs typeface="+mj-cs"/>
+                  </a:defRPr>
+                </a:lvl1pPr>
+              </a:lstStyle>
+              <a:p>
+                <a:pPr marL="342900" indent="-342900">
+                  <a:buFont typeface="Arial" panose="020B0604020202020204" pitchFamily="34" charset="0"/>
+                  <a:buChar char="•"/>
+                </a:pPr>
+                <a14:m>
+                  <m:oMath xmlns:m="http://schemas.openxmlformats.org/officeDocument/2006/math">
+                    <m:sSub>
+                      <m:sSubPr>
+                        <m:ctrlPr>
+                          <a:rPr lang="en-US" sz="2800" b="0" i="1" smtClean="0">
+                            <a:latin typeface="Cambria Math" panose="02040503050406030204" pitchFamily="18" charset="0"/>
+                          </a:rPr>
+                        </m:ctrlPr>
+                      </m:sSubPr>
+                      <m:e>
+                        <m:r>
+                          <m:rPr>
+                            <m:sty m:val="p"/>
+                          </m:rPr>
+                          <a:rPr lang="en-US" sz="2800" b="0" i="0" smtClean="0">
+                            <a:latin typeface="Cambria Math" panose="02040503050406030204" pitchFamily="18" charset="0"/>
+                          </a:rPr>
+                          <m:t>F</m:t>
+                        </m:r>
+                        <m:r>
+                          <a:rPr lang="en-US" sz="2800" b="0" i="1" smtClean="0">
+                            <a:latin typeface="Cambria Math" panose="02040503050406030204" pitchFamily="18" charset="0"/>
+                          </a:rPr>
+                          <m:t>1</m:t>
+                        </m:r>
+                      </m:e>
+                      <m:sub>
+                        <m:r>
+                          <m:rPr>
+                            <m:nor/>
+                          </m:rPr>
+                          <a:rPr lang="en-US" sz="2800" b="0" i="0" smtClean="0">
+                            <a:latin typeface="Cambria Math" panose="02040503050406030204" pitchFamily="18" charset="0"/>
+                          </a:rPr>
+                          <m:t>macro</m:t>
+                        </m:r>
+                      </m:sub>
+                    </m:sSub>
+                    <m:r>
+                      <a:rPr lang="en-US" sz="2800" b="0">
+                        <a:latin typeface="Cambria Math" panose="02040503050406030204" pitchFamily="18" charset="0"/>
+                      </a:rPr>
+                      <m:t>=</m:t>
+                    </m:r>
+                    <m:f>
+                      <m:fPr>
+                        <m:ctrlPr>
+                          <a:rPr lang="en-US" sz="2800" b="0" i="1">
+                            <a:latin typeface="Cambria Math" panose="02040503050406030204" pitchFamily="18" charset="0"/>
+                          </a:rPr>
+                        </m:ctrlPr>
+                      </m:fPr>
+                      <m:num>
+                        <m:r>
+                          <a:rPr lang="en-US" sz="2800" b="0" i="1">
+                            <a:latin typeface="Cambria Math" panose="02040503050406030204" pitchFamily="18" charset="0"/>
+                          </a:rPr>
+                          <m:t>1</m:t>
+                        </m:r>
+                      </m:num>
+                      <m:den>
+                        <m:r>
+                          <a:rPr lang="en-US" sz="2800" b="0" i="1">
+                            <a:latin typeface="Cambria Math" panose="02040503050406030204" pitchFamily="18" charset="0"/>
+                          </a:rPr>
+                          <m:t>𝑁</m:t>
+                        </m:r>
+                      </m:den>
+                    </m:f>
+                    <m:nary>
+                      <m:naryPr>
+                        <m:chr m:val="∑"/>
+                        <m:ctrlPr>
+                          <a:rPr lang="en-US" sz="2800" b="0" i="1">
+                            <a:latin typeface="Cambria Math" panose="02040503050406030204" pitchFamily="18" charset="0"/>
+                          </a:rPr>
+                        </m:ctrlPr>
+                      </m:naryPr>
+                      <m:sub>
+                        <m:r>
+                          <a:rPr lang="en-US" sz="2800" b="0" i="1">
+                            <a:latin typeface="Cambria Math" panose="02040503050406030204" pitchFamily="18" charset="0"/>
+                          </a:rPr>
+                          <m:t>𝑖</m:t>
+                        </m:r>
+                        <m:r>
+                          <a:rPr lang="en-US" sz="2800" b="0">
+                            <a:latin typeface="Cambria Math" panose="02040503050406030204" pitchFamily="18" charset="0"/>
+                          </a:rPr>
+                          <m:t>=</m:t>
+                        </m:r>
+                        <m:r>
+                          <a:rPr lang="en-US" sz="2800" b="0" i="1">
+                            <a:latin typeface="Cambria Math" panose="02040503050406030204" pitchFamily="18" charset="0"/>
+                          </a:rPr>
+                          <m:t>1</m:t>
+                        </m:r>
+                      </m:sub>
+                      <m:sup>
+                        <m:r>
+                          <a:rPr lang="en-US" sz="2800" b="0" i="1">
+                            <a:latin typeface="Cambria Math" panose="02040503050406030204" pitchFamily="18" charset="0"/>
+                          </a:rPr>
+                          <m:t>𝑁</m:t>
+                        </m:r>
+                      </m:sup>
+                      <m:e>
+                        <m:sSub>
+                          <m:sSubPr>
+                            <m:ctrlPr>
+                              <a:rPr lang="en-US" sz="2800" b="0" i="1">
+                                <a:latin typeface="Cambria Math" panose="02040503050406030204" pitchFamily="18" charset="0"/>
+                              </a:rPr>
+                            </m:ctrlPr>
+                          </m:sSubPr>
+                          <m:e>
+                            <m:r>
+                              <m:rPr>
+                                <m:nor/>
+                              </m:rPr>
+                              <a:rPr lang="en-US" sz="2800" b="0" i="0" smtClean="0"/>
+                              <m:t>F</m:t>
+                            </m:r>
+                            <m:r>
+                              <m:rPr>
+                                <m:nor/>
+                              </m:rPr>
+                              <a:rPr lang="en-US" sz="2800" b="0" i="0" smtClean="0"/>
+                              <m:t>1</m:t>
+                            </m:r>
+                          </m:e>
+                          <m:sub>
+                            <m:r>
+                              <m:rPr>
+                                <m:nor/>
+                              </m:rPr>
+                              <a:rPr lang="en-US" sz="2800" b="0"/>
+                              <m:t>i</m:t>
+                            </m:r>
+                          </m:sub>
+                        </m:sSub>
+                      </m:e>
+                    </m:nary>
+                  </m:oMath>
+                </a14:m>
+                <a:endParaRPr lang="en-US" sz="2800" b="0" dirty="0"/>
+              </a:p>
+            </p:txBody>
+          </p:sp>
+        </mc:Choice>
+        <mc:Fallback xmlns="">
+          <p:sp>
+            <p:nvSpPr>
+              <p:cNvPr id="15" name="TextBox 14">
+                <a:extLst>
+                  <a:ext uri="{FF2B5EF4-FFF2-40B4-BE49-F238E27FC236}">
+                    <a16:creationId xmlns:a16="http://schemas.microsoft.com/office/drawing/2014/main" id="{A0B2E8DD-4D13-8239-065F-D62EF6651291}"/>
+                  </a:ext>
+                </a:extLst>
+              </p:cNvPr>
+              <p:cNvSpPr txBox="1">
+                <a:spLocks noRot="1" noChangeAspect="1" noMove="1" noResize="1" noEditPoints="1" noAdjustHandles="1" noChangeArrowheads="1" noChangeShapeType="1" noTextEdit="1"/>
+              </p:cNvSpPr>
+              <p:nvPr/>
+            </p:nvSpPr>
+            <p:spPr>
+              <a:xfrm>
+                <a:off x="972417" y="4798183"/>
+                <a:ext cx="4667176" cy="777331"/>
+              </a:xfrm>
+              <a:prstGeom prst="rect">
+                <a:avLst/>
+              </a:prstGeom>
+              <a:blipFill>
+                <a:blip r:embed="rId3"/>
+                <a:stretch>
+                  <a:fillRect l="-4336" t="-77778" b="-103175"/>
+                </a:stretch>
+              </a:blipFill>
+            </p:spPr>
+            <p:txBody>
+              <a:bodyPr/>
+              <a:lstStyle/>
+              <a:p>
+                <a:r>
+                  <a:rPr lang="en-US">
+                    <a:noFill/>
+                  </a:rPr>
+                  <a:t> </a:t>
+                </a:r>
+              </a:p>
+            </p:txBody>
+          </p:sp>
+        </mc:Fallback>
+      </mc:AlternateContent>
+      <mc:AlternateContent xmlns:mc="http://schemas.openxmlformats.org/markup-compatibility/2006" xmlns:a14="http://schemas.microsoft.com/office/drawing/2010/main">
+        <mc:Choice Requires="a14">
+          <p:sp>
+            <p:nvSpPr>
+              <p:cNvPr id="16" name="TextBox 15">
+                <a:extLst>
+                  <a:ext uri="{FF2B5EF4-FFF2-40B4-BE49-F238E27FC236}">
+                    <a16:creationId xmlns:a16="http://schemas.microsoft.com/office/drawing/2014/main" id="{9B34FC6E-1865-0506-4754-1AF91FD2E8AD}"/>
+                  </a:ext>
+                </a:extLst>
+              </p:cNvPr>
+              <p:cNvSpPr txBox="1"/>
+              <p:nvPr/>
+            </p:nvSpPr>
+            <p:spPr>
+              <a:xfrm>
+                <a:off x="972417" y="2042848"/>
+                <a:ext cx="2961836" cy="777329"/>
+              </a:xfrm>
+              <a:prstGeom prst="rect">
+                <a:avLst/>
+              </a:prstGeom>
+            </p:spPr>
+            <p:txBody>
+              <a:bodyPr vert="horz" lIns="0" tIns="0" rIns="0" bIns="0" rtlCol="0" anchor="t">
+                <a:normAutofit/>
+              </a:bodyPr>
+              <a:lstStyle>
+                <a:defPPr>
+                  <a:defRPr lang="en-RU"/>
+                </a:defPPr>
+                <a:lvl1pPr marL="342900" indent="-342900">
+                  <a:lnSpc>
+                    <a:spcPct val="100000"/>
+                  </a:lnSpc>
+                  <a:spcBef>
+                    <a:spcPct val="0"/>
+                  </a:spcBef>
+                  <a:buFont typeface="Arial" panose="020B0604020202020204" pitchFamily="34" charset="0"/>
+                  <a:buChar char="•"/>
+                  <a:defRPr sz="2800" b="0" i="1">
+                    <a:latin typeface="Cambria Math" panose="02040503050406030204" pitchFamily="18" charset="0"/>
+                    <a:ea typeface="+mj-ea"/>
+                    <a:cs typeface="+mj-cs"/>
+                  </a:defRPr>
+                </a:lvl1pPr>
+              </a:lstStyle>
+              <a:p>
+                <a14:m>
+                  <m:oMath xmlns:m="http://schemas.openxmlformats.org/officeDocument/2006/math">
+                    <m:r>
+                      <m:rPr>
+                        <m:nor/>
+                      </m:rPr>
+                      <a:rPr lang="en-US" i="0"/>
+                      <m:t>Recall</m:t>
+                    </m:r>
+                    <m:r>
+                      <a:rPr lang="en-US" i="0">
+                        <a:latin typeface="Cambria Math" panose="02040503050406030204" pitchFamily="18" charset="0"/>
+                      </a:rPr>
+                      <m:t>=</m:t>
+                    </m:r>
+                    <m:f>
+                      <m:fPr>
+                        <m:ctrlPr>
+                          <a:rPr lang="en-US" i="1">
+                            <a:latin typeface="Cambria Math" panose="02040503050406030204" pitchFamily="18" charset="0"/>
+                          </a:rPr>
+                        </m:ctrlPr>
+                      </m:fPr>
+                      <m:num>
+                        <m:r>
+                          <m:rPr>
+                            <m:nor/>
+                          </m:rPr>
+                          <a:rPr lang="en-US" i="0"/>
+                          <m:t>TP</m:t>
+                        </m:r>
+                      </m:num>
+                      <m:den>
+                        <m:r>
+                          <m:rPr>
+                            <m:nor/>
+                          </m:rPr>
+                          <a:rPr lang="en-US" i="0"/>
+                          <m:t>TP</m:t>
+                        </m:r>
+                        <m:r>
+                          <a:rPr lang="en-US" i="0">
+                            <a:latin typeface="Cambria Math" panose="02040503050406030204" pitchFamily="18" charset="0"/>
+                          </a:rPr>
+                          <m:t>+</m:t>
+                        </m:r>
+                        <m:r>
+                          <m:rPr>
+                            <m:nor/>
+                          </m:rPr>
+                          <a:rPr lang="en-US" i="0"/>
+                          <m:t>FN</m:t>
+                        </m:r>
+                      </m:den>
+                    </m:f>
+                  </m:oMath>
+                </a14:m>
+                <a:endParaRPr lang="en-US" i="0" dirty="0"/>
+              </a:p>
+            </p:txBody>
+          </p:sp>
+        </mc:Choice>
+        <mc:Fallback xmlns="">
+          <p:sp>
+            <p:nvSpPr>
+              <p:cNvPr id="16" name="TextBox 15">
+                <a:extLst>
+                  <a:ext uri="{FF2B5EF4-FFF2-40B4-BE49-F238E27FC236}">
+                    <a16:creationId xmlns:a16="http://schemas.microsoft.com/office/drawing/2014/main" id="{9B34FC6E-1865-0506-4754-1AF91FD2E8AD}"/>
+                  </a:ext>
+                </a:extLst>
+              </p:cNvPr>
+              <p:cNvSpPr txBox="1">
+                <a:spLocks noRot="1" noChangeAspect="1" noMove="1" noResize="1" noEditPoints="1" noAdjustHandles="1" noChangeArrowheads="1" noChangeShapeType="1" noTextEdit="1"/>
+              </p:cNvSpPr>
+              <p:nvPr/>
+            </p:nvSpPr>
+            <p:spPr>
+              <a:xfrm>
+                <a:off x="972417" y="2042848"/>
+                <a:ext cx="2961836" cy="777329"/>
+              </a:xfrm>
+              <a:prstGeom prst="rect">
+                <a:avLst/>
+              </a:prstGeom>
+              <a:blipFill>
+                <a:blip r:embed="rId4"/>
+                <a:stretch>
+                  <a:fillRect l="-6838" b="-1587"/>
+                </a:stretch>
+              </a:blipFill>
+            </p:spPr>
+            <p:txBody>
+              <a:bodyPr/>
+              <a:lstStyle/>
+              <a:p>
+                <a:r>
+                  <a:rPr lang="en-US">
+                    <a:noFill/>
+                  </a:rPr>
+                  <a:t> </a:t>
+                </a:r>
+              </a:p>
+            </p:txBody>
+          </p:sp>
+        </mc:Fallback>
+      </mc:AlternateContent>
+      <mc:AlternateContent xmlns:mc="http://schemas.openxmlformats.org/markup-compatibility/2006" xmlns:a14="http://schemas.microsoft.com/office/drawing/2010/main">
+        <mc:Choice Requires="a14">
+          <p:sp>
+            <p:nvSpPr>
+              <p:cNvPr id="21" name="TextBox 20">
+                <a:extLst>
+                  <a:ext uri="{FF2B5EF4-FFF2-40B4-BE49-F238E27FC236}">
+                    <a16:creationId xmlns:a16="http://schemas.microsoft.com/office/drawing/2014/main" id="{3881DF4F-8336-F2C7-7D6D-026154AC1661}"/>
+                  </a:ext>
+                </a:extLst>
+              </p:cNvPr>
+              <p:cNvSpPr txBox="1"/>
+              <p:nvPr/>
+            </p:nvSpPr>
+            <p:spPr>
+              <a:xfrm>
+                <a:off x="5639593" y="2042848"/>
+                <a:ext cx="6096000" cy="777329"/>
+              </a:xfrm>
+              <a:prstGeom prst="rect">
+                <a:avLst/>
+              </a:prstGeom>
+            </p:spPr>
+            <p:txBody>
+              <a:bodyPr vert="horz" lIns="0" tIns="0" rIns="0" bIns="0" rtlCol="0" anchor="t">
+                <a:normAutofit/>
+              </a:bodyPr>
+              <a:lstStyle>
+                <a:defPPr>
+                  <a:defRPr lang="en-RU"/>
+                </a:defPPr>
+                <a:lvl1pPr marL="342900" indent="-342900">
+                  <a:lnSpc>
+                    <a:spcPct val="100000"/>
+                  </a:lnSpc>
+                  <a:spcBef>
+                    <a:spcPct val="0"/>
+                  </a:spcBef>
+                  <a:buFont typeface="Arial" panose="020B0604020202020204" pitchFamily="34" charset="0"/>
+                  <a:buChar char="•"/>
+                  <a:defRPr sz="2800" b="0" i="1">
+                    <a:latin typeface="Cambria Math" panose="02040503050406030204" pitchFamily="18" charset="0"/>
+                    <a:ea typeface="+mj-ea"/>
+                    <a:cs typeface="+mj-cs"/>
+                  </a:defRPr>
+                </a:lvl1pPr>
+              </a:lstStyle>
+              <a:p>
+                <a14:m>
+                  <m:oMath xmlns:m="http://schemas.openxmlformats.org/officeDocument/2006/math">
+                    <m:r>
+                      <m:rPr>
+                        <m:nor/>
+                      </m:rPr>
+                      <a:rPr lang="en-US" i="0"/>
+                      <m:t>Accuracy</m:t>
+                    </m:r>
+                    <m:r>
+                      <a:rPr lang="en-US" i="0">
+                        <a:latin typeface="Cambria Math" panose="02040503050406030204" pitchFamily="18" charset="0"/>
+                      </a:rPr>
+                      <m:t>=</m:t>
+                    </m:r>
+                    <m:f>
+                      <m:fPr>
+                        <m:ctrlPr>
+                          <a:rPr lang="en-US" i="1">
+                            <a:latin typeface="Cambria Math" panose="02040503050406030204" pitchFamily="18" charset="0"/>
+                          </a:rPr>
+                        </m:ctrlPr>
+                      </m:fPr>
+                      <m:num>
+                        <m:r>
+                          <m:rPr>
+                            <m:nor/>
+                          </m:rPr>
+                          <a:rPr lang="en-US" i="0"/>
+                          <m:t>TP</m:t>
+                        </m:r>
+                        <m:r>
+                          <a:rPr lang="en-US" i="0">
+                            <a:latin typeface="Cambria Math" panose="02040503050406030204" pitchFamily="18" charset="0"/>
+                          </a:rPr>
+                          <m:t>+</m:t>
+                        </m:r>
+                        <m:r>
+                          <m:rPr>
+                            <m:nor/>
+                          </m:rPr>
+                          <a:rPr lang="en-US" i="0"/>
+                          <m:t>TN</m:t>
+                        </m:r>
+                      </m:num>
+                      <m:den>
+                        <m:r>
+                          <m:rPr>
+                            <m:nor/>
+                          </m:rPr>
+                          <a:rPr lang="en-US" i="0"/>
+                          <m:t>TP</m:t>
+                        </m:r>
+                        <m:r>
+                          <a:rPr lang="en-US" i="0">
+                            <a:latin typeface="Cambria Math" panose="02040503050406030204" pitchFamily="18" charset="0"/>
+                          </a:rPr>
+                          <m:t>+</m:t>
+                        </m:r>
+                        <m:r>
+                          <m:rPr>
+                            <m:nor/>
+                          </m:rPr>
+                          <a:rPr lang="en-US" i="0"/>
+                          <m:t>TN</m:t>
+                        </m:r>
+                        <m:r>
+                          <a:rPr lang="en-US" i="0">
+                            <a:latin typeface="Cambria Math" panose="02040503050406030204" pitchFamily="18" charset="0"/>
+                          </a:rPr>
+                          <m:t>+</m:t>
+                        </m:r>
+                        <m:r>
+                          <m:rPr>
+                            <m:nor/>
+                          </m:rPr>
+                          <a:rPr lang="en-US" i="0"/>
+                          <m:t>FP</m:t>
+                        </m:r>
+                        <m:r>
+                          <a:rPr lang="en-US" i="0">
+                            <a:latin typeface="Cambria Math" panose="02040503050406030204" pitchFamily="18" charset="0"/>
+                          </a:rPr>
+                          <m:t>+</m:t>
+                        </m:r>
+                        <m:r>
+                          <m:rPr>
+                            <m:nor/>
+                          </m:rPr>
+                          <a:rPr lang="en-US" i="0"/>
+                          <m:t>FN</m:t>
+                        </m:r>
+                      </m:den>
+                    </m:f>
+                  </m:oMath>
+                </a14:m>
+                <a:endParaRPr lang="en-US" i="0" dirty="0"/>
+              </a:p>
+            </p:txBody>
+          </p:sp>
+        </mc:Choice>
+        <mc:Fallback xmlns="">
+          <p:sp>
+            <p:nvSpPr>
+              <p:cNvPr id="21" name="TextBox 20">
+                <a:extLst>
+                  <a:ext uri="{FF2B5EF4-FFF2-40B4-BE49-F238E27FC236}">
+                    <a16:creationId xmlns:a16="http://schemas.microsoft.com/office/drawing/2014/main" id="{3881DF4F-8336-F2C7-7D6D-026154AC1661}"/>
+                  </a:ext>
+                </a:extLst>
+              </p:cNvPr>
+              <p:cNvSpPr txBox="1">
+                <a:spLocks noRot="1" noChangeAspect="1" noMove="1" noResize="1" noEditPoints="1" noAdjustHandles="1" noChangeArrowheads="1" noChangeShapeType="1" noTextEdit="1"/>
+              </p:cNvSpPr>
+              <p:nvPr/>
+            </p:nvSpPr>
+            <p:spPr>
+              <a:xfrm>
+                <a:off x="5639593" y="2042848"/>
+                <a:ext cx="6096000" cy="777329"/>
+              </a:xfrm>
+              <a:prstGeom prst="rect">
+                <a:avLst/>
+              </a:prstGeom>
+              <a:blipFill>
+                <a:blip r:embed="rId5"/>
+                <a:stretch>
+                  <a:fillRect l="-3326" b="-1587"/>
+                </a:stretch>
+              </a:blipFill>
+            </p:spPr>
+            <p:txBody>
+              <a:bodyPr/>
+              <a:lstStyle/>
+              <a:p>
+                <a:r>
+                  <a:rPr lang="en-US">
+                    <a:noFill/>
+                  </a:rPr>
+                  <a:t> </a:t>
+                </a:r>
+              </a:p>
+            </p:txBody>
+          </p:sp>
+        </mc:Fallback>
+      </mc:AlternateContent>
+    </p:spTree>
+    <p:extLst>
+      <p:ext uri="{BB962C8B-B14F-4D97-AF65-F5344CB8AC3E}">
+        <p14:creationId xmlns:p14="http://schemas.microsoft.com/office/powerpoint/2010/main" val="1627131730"/>
       </p:ext>
     </p:extLst>
   </p:cSld>
@@ -27381,7 +28105,7 @@
               <a:rPr lang="ru-RU" dirty="0">
                 <a:latin typeface="HSE Sans" panose="02000000000000000000" pitchFamily="2" charset="0"/>
               </a:rPr>
-              <a:t>Бенчмарк для сравнения нашей архитектуры по: качеству, времени и памяти против лучших современных моделей</a:t>
+              <a:t>Бенчмарк для сравнения нашей архитектуры по качеству, времени и памяти против лучших современных моделей</a:t>
             </a:r>
             <a:r>
               <a:rPr lang="en-US" dirty="0">
@@ -28350,23 +29074,8 @@
                 </a:solidFill>
                 <a:latin typeface="HSE Sans" panose="02000000000000000000" pitchFamily="2" charset="0"/>
               </a:rPr>
-              <a:t>Ручной подбор признаков (Пол Экман и Уоллес Фризен, </a:t>
-            </a:r>
-            <a:r>
-              <a:rPr lang="en-US" sz="1300" dirty="0">
-                <a:solidFill>
-                  <a:srgbClr val="1A1A1A"/>
-                </a:solidFill>
-                <a:latin typeface="HSE Sans" panose="02000000000000000000" pitchFamily="2" charset="0"/>
-              </a:rPr>
-              <a:t>1975)</a:t>
-            </a:r>
-            <a:endParaRPr lang="ru-RU" sz="1300" dirty="0">
-              <a:solidFill>
-                <a:srgbClr val="1A1A1A"/>
-              </a:solidFill>
-              <a:latin typeface="HSE Sans" panose="02000000000000000000" pitchFamily="2" charset="0"/>
-            </a:endParaRPr>
+              <a:t>Ручной подбор признаков</a:t>
+            </a:r>
           </a:p>
           <a:p>
             <a:pPr marL="142875" indent="-142875">
@@ -29238,1693 +29947,6 @@
         <p:spPr>
           <a:xfrm>
             <a:off x="666489" y="1160924"/>
-            <a:ext cx="6100071" cy="802343"/>
-          </a:xfrm>
-          <a:prstGeom prst="rect">
-            <a:avLst/>
-          </a:prstGeom>
-        </p:spPr>
-        <p:txBody>
-          <a:bodyPr vert="horz" lIns="0" tIns="0" rIns="0" bIns="0" rtlCol="0" anchor="t">
-            <a:normAutofit fontScale="92500"/>
-          </a:bodyPr>
-          <a:lstStyle>
-            <a:lvl1pPr algn="l" defTabSz="914400" rtl="0" eaLnBrk="1" latinLnBrk="0" hangingPunct="1">
-              <a:lnSpc>
-                <a:spcPct val="100000"/>
-              </a:lnSpc>
-              <a:spcBef>
-                <a:spcPct val="0"/>
-              </a:spcBef>
-              <a:buNone/>
-              <a:defRPr sz="2400" b="0" i="0" kern="1200">
-                <a:solidFill>
-                  <a:schemeClr val="tx1"/>
-                </a:solidFill>
-                <a:latin typeface="HSE Sans" panose="02000000000000000000" pitchFamily="2" charset="0"/>
-                <a:ea typeface="+mj-ea"/>
-                <a:cs typeface="+mj-cs"/>
-              </a:defRPr>
-            </a:lvl1pPr>
-          </a:lstStyle>
-          <a:p>
-            <a:r>
-              <a:rPr lang="ru-RU" b="1" dirty="0"/>
-              <a:t>Исследование предметной области</a:t>
-            </a:r>
-            <a:endParaRPr lang="en-US" b="1" dirty="0"/>
-          </a:p>
-          <a:p>
-            <a:pPr marL="0" marR="0" lvl="0" indent="0" algn="l" defTabSz="914400" rtl="0" eaLnBrk="1" fontAlgn="auto" latinLnBrk="0" hangingPunct="1">
-              <a:lnSpc>
-                <a:spcPct val="100000"/>
-              </a:lnSpc>
-              <a:spcBef>
-                <a:spcPts val="0"/>
-              </a:spcBef>
-              <a:spcAft>
-                <a:spcPts val="0"/>
-              </a:spcAft>
-              <a:buClrTx/>
-              <a:buSzTx/>
-              <a:buFontTx/>
-              <a:buNone/>
-              <a:tabLst/>
-              <a:defRPr/>
-            </a:pPr>
-            <a:r>
-              <a:rPr lang="ru-RU" sz="2000" dirty="0">
-                <a:solidFill>
-                  <a:srgbClr val="0F2C68"/>
-                </a:solidFill>
-                <a:latin typeface="Calibri" panose="020F0502020204030204"/>
-                <a:ea typeface="+mn-ea"/>
-                <a:cs typeface="+mn-cs"/>
-              </a:rPr>
-              <a:t>Виды определения эмоций по различным модальностям</a:t>
-            </a:r>
-            <a:endParaRPr kumimoji="0" lang="ru-RU" sz="2000" b="0" i="0" u="none" strike="noStrike" kern="1200" cap="none" spc="0" normalizeH="0" baseline="0" noProof="0" dirty="0">
-              <a:ln>
-                <a:noFill/>
-              </a:ln>
-              <a:solidFill>
-                <a:srgbClr val="0F2C68"/>
-              </a:solidFill>
-              <a:effectLst/>
-              <a:uLnTx/>
-              <a:uFillTx/>
-              <a:latin typeface="Calibri" panose="020F0502020204030204"/>
-              <a:ea typeface="+mn-ea"/>
-              <a:cs typeface="+mn-cs"/>
-            </a:endParaRPr>
-          </a:p>
-          <a:p>
-            <a:endParaRPr lang="ru-RU" b="1" dirty="0"/>
-          </a:p>
-        </p:txBody>
-      </p:sp>
-      <p:sp>
-        <p:nvSpPr>
-          <p:cNvPr id="17" name="Текст 4">
-            <a:extLst>
-              <a:ext uri="{FF2B5EF4-FFF2-40B4-BE49-F238E27FC236}">
-                <a16:creationId xmlns:a16="http://schemas.microsoft.com/office/drawing/2014/main" id="{C6642543-AAFE-405A-C69F-4ADB20EF03A0}"/>
-              </a:ext>
-            </a:extLst>
-          </p:cNvPr>
-          <p:cNvSpPr txBox="1">
-            <a:spLocks/>
-          </p:cNvSpPr>
-          <p:nvPr/>
-        </p:nvSpPr>
-        <p:spPr>
-          <a:xfrm>
-            <a:off x="1143689" y="540904"/>
-            <a:ext cx="2070100" cy="415925"/>
-          </a:xfrm>
-          <a:prstGeom prst="rect">
-            <a:avLst/>
-          </a:prstGeom>
-        </p:spPr>
-        <p:txBody>
-          <a:bodyPr vert="horz" lIns="0" tIns="0" rIns="0" bIns="0" rtlCol="0">
-            <a:noAutofit/>
-          </a:bodyPr>
-          <a:lstStyle>
-            <a:lvl1pPr marL="0" marR="0" indent="0" algn="l" defTabSz="914400" rtl="0" eaLnBrk="1" fontAlgn="auto" latinLnBrk="0" hangingPunct="1">
-              <a:lnSpc>
-                <a:spcPct val="100000"/>
-              </a:lnSpc>
-              <a:spcBef>
-                <a:spcPts val="0"/>
-              </a:spcBef>
-              <a:spcAft>
-                <a:spcPts val="0"/>
-              </a:spcAft>
-              <a:buClrTx/>
-              <a:buSzTx/>
-              <a:buFont typeface="Arial" panose="020B0604020202020204" pitchFamily="34" charset="0"/>
-              <a:buNone/>
-              <a:tabLst/>
-              <a:defRPr sz="1000" b="0" i="0" kern="1200">
-                <a:solidFill>
-                  <a:schemeClr val="tx1"/>
-                </a:solidFill>
-                <a:latin typeface="HSE Sans" panose="02000000000000000000" pitchFamily="2" charset="0"/>
-                <a:ea typeface="+mn-ea"/>
-                <a:cs typeface="+mn-cs"/>
-              </a:defRPr>
-            </a:lvl1pPr>
-            <a:lvl2pPr marL="457200" indent="0" algn="l" defTabSz="914400" rtl="0" eaLnBrk="1" latinLnBrk="0" hangingPunct="1">
-              <a:lnSpc>
-                <a:spcPct val="100000"/>
-              </a:lnSpc>
-              <a:spcBef>
-                <a:spcPts val="500"/>
-              </a:spcBef>
-              <a:buFont typeface="Arial" panose="020B0604020202020204" pitchFamily="34" charset="0"/>
-              <a:buNone/>
-              <a:defRPr sz="1000" b="0" i="0" kern="1200">
-                <a:solidFill>
-                  <a:schemeClr val="tx1"/>
-                </a:solidFill>
-                <a:latin typeface="HSE Sans" panose="02000000000000000000" pitchFamily="2" charset="0"/>
-                <a:ea typeface="+mn-ea"/>
-                <a:cs typeface="+mn-cs"/>
-              </a:defRPr>
-            </a:lvl2pPr>
-            <a:lvl3pPr marL="914400" indent="0" algn="l" defTabSz="914400" rtl="0" eaLnBrk="1" latinLnBrk="0" hangingPunct="1">
-              <a:lnSpc>
-                <a:spcPct val="100000"/>
-              </a:lnSpc>
-              <a:spcBef>
-                <a:spcPts val="500"/>
-              </a:spcBef>
-              <a:buFont typeface="Arial" panose="020B0604020202020204" pitchFamily="34" charset="0"/>
-              <a:buNone/>
-              <a:defRPr sz="1000" b="0" i="0" kern="1200">
-                <a:solidFill>
-                  <a:schemeClr val="tx1"/>
-                </a:solidFill>
-                <a:latin typeface="HSE Sans" panose="02000000000000000000" pitchFamily="2" charset="0"/>
-                <a:ea typeface="+mn-ea"/>
-                <a:cs typeface="+mn-cs"/>
-              </a:defRPr>
-            </a:lvl3pPr>
-            <a:lvl4pPr marL="1371600" indent="0" algn="l" defTabSz="914400" rtl="0" eaLnBrk="1" latinLnBrk="0" hangingPunct="1">
-              <a:lnSpc>
-                <a:spcPct val="100000"/>
-              </a:lnSpc>
-              <a:spcBef>
-                <a:spcPts val="500"/>
-              </a:spcBef>
-              <a:buFont typeface="Arial" panose="020B0604020202020204" pitchFamily="34" charset="0"/>
-              <a:buNone/>
-              <a:defRPr sz="1000" b="0" i="0" kern="1200">
-                <a:solidFill>
-                  <a:schemeClr val="tx1"/>
-                </a:solidFill>
-                <a:latin typeface="HSE Sans" panose="02000000000000000000" pitchFamily="2" charset="0"/>
-                <a:ea typeface="+mn-ea"/>
-                <a:cs typeface="+mn-cs"/>
-              </a:defRPr>
-            </a:lvl4pPr>
-            <a:lvl5pPr marL="1828800" indent="0" algn="l" defTabSz="914400" rtl="0" eaLnBrk="1" latinLnBrk="0" hangingPunct="1">
-              <a:lnSpc>
-                <a:spcPct val="100000"/>
-              </a:lnSpc>
-              <a:spcBef>
-                <a:spcPts val="500"/>
-              </a:spcBef>
-              <a:buFont typeface="Arial" panose="020B0604020202020204" pitchFamily="34" charset="0"/>
-              <a:buNone/>
-              <a:defRPr sz="1000" b="0" i="0" kern="1200">
-                <a:solidFill>
-                  <a:schemeClr val="tx1"/>
-                </a:solidFill>
-                <a:latin typeface="HSE Sans" panose="02000000000000000000" pitchFamily="2" charset="0"/>
-                <a:ea typeface="+mn-ea"/>
-                <a:cs typeface="+mn-cs"/>
-              </a:defRPr>
-            </a:lvl5pPr>
-            <a:lvl6pPr marL="2514600" indent="-228600" algn="l" defTabSz="914400" rtl="0" eaLnBrk="1" latinLnBrk="0" hangingPunct="1">
-              <a:lnSpc>
-                <a:spcPct val="90000"/>
-              </a:lnSpc>
-              <a:spcBef>
-                <a:spcPts val="500"/>
-              </a:spcBef>
-              <a:buFont typeface="Arial" panose="020B0604020202020204" pitchFamily="34" charset="0"/>
-              <a:buChar char="•"/>
-              <a:defRPr sz="1800" kern="1200">
-                <a:solidFill>
-                  <a:schemeClr val="tx1"/>
-                </a:solidFill>
-                <a:latin typeface="+mn-lt"/>
-                <a:ea typeface="+mn-ea"/>
-                <a:cs typeface="+mn-cs"/>
-              </a:defRPr>
-            </a:lvl6pPr>
-            <a:lvl7pPr marL="2971800" indent="-228600" algn="l" defTabSz="914400" rtl="0" eaLnBrk="1" latinLnBrk="0" hangingPunct="1">
-              <a:lnSpc>
-                <a:spcPct val="90000"/>
-              </a:lnSpc>
-              <a:spcBef>
-                <a:spcPts val="500"/>
-              </a:spcBef>
-              <a:buFont typeface="Arial" panose="020B0604020202020204" pitchFamily="34" charset="0"/>
-              <a:buChar char="•"/>
-              <a:defRPr sz="1800" kern="1200">
-                <a:solidFill>
-                  <a:schemeClr val="tx1"/>
-                </a:solidFill>
-                <a:latin typeface="+mn-lt"/>
-                <a:ea typeface="+mn-ea"/>
-                <a:cs typeface="+mn-cs"/>
-              </a:defRPr>
-            </a:lvl7pPr>
-            <a:lvl8pPr marL="3429000" indent="-228600" algn="l" defTabSz="914400" rtl="0" eaLnBrk="1" latinLnBrk="0" hangingPunct="1">
-              <a:lnSpc>
-                <a:spcPct val="90000"/>
-              </a:lnSpc>
-              <a:spcBef>
-                <a:spcPts val="500"/>
-              </a:spcBef>
-              <a:buFont typeface="Arial" panose="020B0604020202020204" pitchFamily="34" charset="0"/>
-              <a:buChar char="•"/>
-              <a:defRPr sz="1800" kern="1200">
-                <a:solidFill>
-                  <a:schemeClr val="tx1"/>
-                </a:solidFill>
-                <a:latin typeface="+mn-lt"/>
-                <a:ea typeface="+mn-ea"/>
-                <a:cs typeface="+mn-cs"/>
-              </a:defRPr>
-            </a:lvl8pPr>
-            <a:lvl9pPr marL="3886200" indent="-228600" algn="l" defTabSz="914400" rtl="0" eaLnBrk="1" latinLnBrk="0" hangingPunct="1">
-              <a:lnSpc>
-                <a:spcPct val="90000"/>
-              </a:lnSpc>
-              <a:spcBef>
-                <a:spcPts val="500"/>
-              </a:spcBef>
-              <a:buFont typeface="Arial" panose="020B0604020202020204" pitchFamily="34" charset="0"/>
-              <a:buChar char="•"/>
-              <a:defRPr sz="1800" kern="1200">
-                <a:solidFill>
-                  <a:schemeClr val="tx1"/>
-                </a:solidFill>
-                <a:latin typeface="+mn-lt"/>
-                <a:ea typeface="+mn-ea"/>
-                <a:cs typeface="+mn-cs"/>
-              </a:defRPr>
-            </a:lvl9pPr>
-          </a:lstStyle>
-          <a:p>
-            <a:r>
-              <a:rPr lang="ru-RU" dirty="0"/>
-              <a:t>Факультет информатики, математики и компьютерных наук</a:t>
-            </a:r>
-          </a:p>
-        </p:txBody>
-      </p:sp>
-      <p:sp>
-        <p:nvSpPr>
-          <p:cNvPr id="18" name="Текст 5">
-            <a:extLst>
-              <a:ext uri="{FF2B5EF4-FFF2-40B4-BE49-F238E27FC236}">
-                <a16:creationId xmlns:a16="http://schemas.microsoft.com/office/drawing/2014/main" id="{4949D8FC-408D-1D67-134C-9A8B217B2D50}"/>
-              </a:ext>
-            </a:extLst>
-          </p:cNvPr>
-          <p:cNvSpPr txBox="1">
-            <a:spLocks/>
-          </p:cNvSpPr>
-          <p:nvPr/>
-        </p:nvSpPr>
-        <p:spPr>
-          <a:xfrm>
-            <a:off x="3459162" y="548720"/>
-            <a:ext cx="2341003" cy="408109"/>
-          </a:xfrm>
-          <a:prstGeom prst="rect">
-            <a:avLst/>
-          </a:prstGeom>
-        </p:spPr>
-        <p:txBody>
-          <a:bodyPr vert="horz" lIns="0" tIns="0" rIns="0" bIns="0" rtlCol="0">
-            <a:noAutofit/>
-          </a:bodyPr>
-          <a:lstStyle>
-            <a:lvl1pPr marL="0" indent="0" algn="l" defTabSz="914400" rtl="0" eaLnBrk="1" latinLnBrk="0" hangingPunct="1">
-              <a:lnSpc>
-                <a:spcPct val="100000"/>
-              </a:lnSpc>
-              <a:spcBef>
-                <a:spcPts val="0"/>
-              </a:spcBef>
-              <a:buFont typeface="Arial" panose="020B0604020202020204" pitchFamily="34" charset="0"/>
-              <a:buNone/>
-              <a:defRPr sz="1000" b="0" i="0" kern="1200">
-                <a:solidFill>
-                  <a:srgbClr val="0E2D69"/>
-                </a:solidFill>
-                <a:latin typeface="HSE Sans" panose="02000000000000000000" pitchFamily="2" charset="0"/>
-                <a:ea typeface="+mn-ea"/>
-                <a:cs typeface="+mn-cs"/>
-              </a:defRPr>
-            </a:lvl1pPr>
-            <a:lvl2pPr marL="457200" indent="0" algn="l" defTabSz="914400" rtl="0" eaLnBrk="1" latinLnBrk="0" hangingPunct="1">
-              <a:lnSpc>
-                <a:spcPct val="90000"/>
-              </a:lnSpc>
-              <a:spcBef>
-                <a:spcPts val="500"/>
-              </a:spcBef>
-              <a:buFont typeface="Arial" panose="020B0604020202020204" pitchFamily="34" charset="0"/>
-              <a:buNone/>
-              <a:defRPr sz="1000" b="0" i="0" kern="1200">
-                <a:solidFill>
-                  <a:srgbClr val="0E2D69"/>
-                </a:solidFill>
-                <a:latin typeface="HSE Sans" panose="02000000000000000000" pitchFamily="2" charset="0"/>
-                <a:ea typeface="+mn-ea"/>
-                <a:cs typeface="+mn-cs"/>
-              </a:defRPr>
-            </a:lvl2pPr>
-            <a:lvl3pPr marL="914400" indent="0" algn="l" defTabSz="914400" rtl="0" eaLnBrk="1" latinLnBrk="0" hangingPunct="1">
-              <a:lnSpc>
-                <a:spcPct val="90000"/>
-              </a:lnSpc>
-              <a:spcBef>
-                <a:spcPts val="500"/>
-              </a:spcBef>
-              <a:buFont typeface="Arial" panose="020B0604020202020204" pitchFamily="34" charset="0"/>
-              <a:buNone/>
-              <a:defRPr sz="1000" b="0" i="0" kern="1200">
-                <a:solidFill>
-                  <a:srgbClr val="0E2D69"/>
-                </a:solidFill>
-                <a:latin typeface="HSE Sans" panose="02000000000000000000" pitchFamily="2" charset="0"/>
-                <a:ea typeface="+mn-ea"/>
-                <a:cs typeface="+mn-cs"/>
-              </a:defRPr>
-            </a:lvl3pPr>
-            <a:lvl4pPr marL="1371600" indent="0" algn="l" defTabSz="914400" rtl="0" eaLnBrk="1" latinLnBrk="0" hangingPunct="1">
-              <a:lnSpc>
-                <a:spcPct val="90000"/>
-              </a:lnSpc>
-              <a:spcBef>
-                <a:spcPts val="500"/>
-              </a:spcBef>
-              <a:buFont typeface="Arial" panose="020B0604020202020204" pitchFamily="34" charset="0"/>
-              <a:buNone/>
-              <a:defRPr sz="1000" b="0" i="0" kern="1200">
-                <a:solidFill>
-                  <a:srgbClr val="0E2D69"/>
-                </a:solidFill>
-                <a:latin typeface="HSE Sans" panose="02000000000000000000" pitchFamily="2" charset="0"/>
-                <a:ea typeface="+mn-ea"/>
-                <a:cs typeface="+mn-cs"/>
-              </a:defRPr>
-            </a:lvl4pPr>
-            <a:lvl5pPr marL="1828800" indent="0" algn="l" defTabSz="914400" rtl="0" eaLnBrk="1" latinLnBrk="0" hangingPunct="1">
-              <a:lnSpc>
-                <a:spcPct val="90000"/>
-              </a:lnSpc>
-              <a:spcBef>
-                <a:spcPts val="500"/>
-              </a:spcBef>
-              <a:buFont typeface="Arial" panose="020B0604020202020204" pitchFamily="34" charset="0"/>
-              <a:buNone/>
-              <a:defRPr sz="1000" b="0" i="0" kern="1200">
-                <a:solidFill>
-                  <a:srgbClr val="0E2D69"/>
-                </a:solidFill>
-                <a:latin typeface="HSE Sans" panose="02000000000000000000" pitchFamily="2" charset="0"/>
-                <a:ea typeface="+mn-ea"/>
-                <a:cs typeface="+mn-cs"/>
-              </a:defRPr>
-            </a:lvl5pPr>
-            <a:lvl6pPr marL="2514600" indent="-228600" algn="l" defTabSz="914400" rtl="0" eaLnBrk="1" latinLnBrk="0" hangingPunct="1">
-              <a:lnSpc>
-                <a:spcPct val="90000"/>
-              </a:lnSpc>
-              <a:spcBef>
-                <a:spcPts val="500"/>
-              </a:spcBef>
-              <a:buFont typeface="Arial" panose="020B0604020202020204" pitchFamily="34" charset="0"/>
-              <a:buChar char="•"/>
-              <a:defRPr sz="1800" kern="1200">
-                <a:solidFill>
-                  <a:schemeClr val="tx1"/>
-                </a:solidFill>
-                <a:latin typeface="+mn-lt"/>
-                <a:ea typeface="+mn-ea"/>
-                <a:cs typeface="+mn-cs"/>
-              </a:defRPr>
-            </a:lvl6pPr>
-            <a:lvl7pPr marL="2971800" indent="-228600" algn="l" defTabSz="914400" rtl="0" eaLnBrk="1" latinLnBrk="0" hangingPunct="1">
-              <a:lnSpc>
-                <a:spcPct val="90000"/>
-              </a:lnSpc>
-              <a:spcBef>
-                <a:spcPts val="500"/>
-              </a:spcBef>
-              <a:buFont typeface="Arial" panose="020B0604020202020204" pitchFamily="34" charset="0"/>
-              <a:buChar char="•"/>
-              <a:defRPr sz="1800" kern="1200">
-                <a:solidFill>
-                  <a:schemeClr val="tx1"/>
-                </a:solidFill>
-                <a:latin typeface="+mn-lt"/>
-                <a:ea typeface="+mn-ea"/>
-                <a:cs typeface="+mn-cs"/>
-              </a:defRPr>
-            </a:lvl7pPr>
-            <a:lvl8pPr marL="3429000" indent="-228600" algn="l" defTabSz="914400" rtl="0" eaLnBrk="1" latinLnBrk="0" hangingPunct="1">
-              <a:lnSpc>
-                <a:spcPct val="90000"/>
-              </a:lnSpc>
-              <a:spcBef>
-                <a:spcPts val="500"/>
-              </a:spcBef>
-              <a:buFont typeface="Arial" panose="020B0604020202020204" pitchFamily="34" charset="0"/>
-              <a:buChar char="•"/>
-              <a:defRPr sz="1800" kern="1200">
-                <a:solidFill>
-                  <a:schemeClr val="tx1"/>
-                </a:solidFill>
-                <a:latin typeface="+mn-lt"/>
-                <a:ea typeface="+mn-ea"/>
-                <a:cs typeface="+mn-cs"/>
-              </a:defRPr>
-            </a:lvl8pPr>
-            <a:lvl9pPr marL="3886200" indent="-228600" algn="l" defTabSz="914400" rtl="0" eaLnBrk="1" latinLnBrk="0" hangingPunct="1">
-              <a:lnSpc>
-                <a:spcPct val="90000"/>
-              </a:lnSpc>
-              <a:spcBef>
-                <a:spcPts val="500"/>
-              </a:spcBef>
-              <a:buFont typeface="Arial" panose="020B0604020202020204" pitchFamily="34" charset="0"/>
-              <a:buChar char="•"/>
-              <a:defRPr sz="1800" kern="1200">
-                <a:solidFill>
-                  <a:schemeClr val="tx1"/>
-                </a:solidFill>
-                <a:latin typeface="+mn-lt"/>
-                <a:ea typeface="+mn-ea"/>
-                <a:cs typeface="+mn-cs"/>
-              </a:defRPr>
-            </a:lvl9pPr>
-          </a:lstStyle>
-          <a:p>
-            <a:r>
-              <a:rPr lang="ru-RU" dirty="0"/>
-              <a:t>Классификация выражений лиц с детектированием эмоций в речи</a:t>
-            </a:r>
-          </a:p>
-        </p:txBody>
-      </p:sp>
-      <p:sp>
-        <p:nvSpPr>
-          <p:cNvPr id="19" name="Текст 6">
-            <a:extLst>
-              <a:ext uri="{FF2B5EF4-FFF2-40B4-BE49-F238E27FC236}">
-                <a16:creationId xmlns:a16="http://schemas.microsoft.com/office/drawing/2014/main" id="{C38E8207-B0A4-013A-867A-665C45ADC6D4}"/>
-              </a:ext>
-            </a:extLst>
-          </p:cNvPr>
-          <p:cNvSpPr txBox="1">
-            <a:spLocks/>
-          </p:cNvSpPr>
-          <p:nvPr/>
-        </p:nvSpPr>
-        <p:spPr>
-          <a:xfrm>
-            <a:off x="6259892" y="548720"/>
-            <a:ext cx="2070100" cy="408109"/>
-          </a:xfrm>
-          <a:prstGeom prst="rect">
-            <a:avLst/>
-          </a:prstGeom>
-        </p:spPr>
-        <p:txBody>
-          <a:bodyPr vert="horz" lIns="0" tIns="0" rIns="0" bIns="0" rtlCol="0">
-            <a:noAutofit/>
-          </a:bodyPr>
-          <a:lstStyle>
-            <a:lvl1pPr marL="0" indent="0" algn="l" defTabSz="914400" rtl="0" eaLnBrk="1" latinLnBrk="0" hangingPunct="1">
-              <a:lnSpc>
-                <a:spcPct val="100000"/>
-              </a:lnSpc>
-              <a:spcBef>
-                <a:spcPts val="0"/>
-              </a:spcBef>
-              <a:buFont typeface="Arial" panose="020B0604020202020204" pitchFamily="34" charset="0"/>
-              <a:buNone/>
-              <a:defRPr sz="1000" b="0" i="0" kern="1200">
-                <a:solidFill>
-                  <a:srgbClr val="0E2D69"/>
-                </a:solidFill>
-                <a:latin typeface="HSE Sans" panose="02000000000000000000" pitchFamily="2" charset="0"/>
-                <a:ea typeface="+mn-ea"/>
-                <a:cs typeface="+mn-cs"/>
-              </a:defRPr>
-            </a:lvl1pPr>
-            <a:lvl2pPr marL="457200" indent="0" algn="l" defTabSz="914400" rtl="0" eaLnBrk="1" latinLnBrk="0" hangingPunct="1">
-              <a:lnSpc>
-                <a:spcPct val="90000"/>
-              </a:lnSpc>
-              <a:spcBef>
-                <a:spcPts val="500"/>
-              </a:spcBef>
-              <a:buFont typeface="Arial" panose="020B0604020202020204" pitchFamily="34" charset="0"/>
-              <a:buNone/>
-              <a:defRPr sz="1000" b="0" i="0" kern="1200">
-                <a:solidFill>
-                  <a:srgbClr val="0E2D69"/>
-                </a:solidFill>
-                <a:latin typeface="HSE Sans" panose="02000000000000000000" pitchFamily="2" charset="0"/>
-                <a:ea typeface="+mn-ea"/>
-                <a:cs typeface="+mn-cs"/>
-              </a:defRPr>
-            </a:lvl2pPr>
-            <a:lvl3pPr marL="914400" indent="0" algn="l" defTabSz="914400" rtl="0" eaLnBrk="1" latinLnBrk="0" hangingPunct="1">
-              <a:lnSpc>
-                <a:spcPct val="90000"/>
-              </a:lnSpc>
-              <a:spcBef>
-                <a:spcPts val="500"/>
-              </a:spcBef>
-              <a:buFont typeface="Arial" panose="020B0604020202020204" pitchFamily="34" charset="0"/>
-              <a:buNone/>
-              <a:defRPr sz="1000" b="0" i="0" kern="1200">
-                <a:solidFill>
-                  <a:srgbClr val="0E2D69"/>
-                </a:solidFill>
-                <a:latin typeface="HSE Sans" panose="02000000000000000000" pitchFamily="2" charset="0"/>
-                <a:ea typeface="+mn-ea"/>
-                <a:cs typeface="+mn-cs"/>
-              </a:defRPr>
-            </a:lvl3pPr>
-            <a:lvl4pPr marL="1371600" indent="0" algn="l" defTabSz="914400" rtl="0" eaLnBrk="1" latinLnBrk="0" hangingPunct="1">
-              <a:lnSpc>
-                <a:spcPct val="90000"/>
-              </a:lnSpc>
-              <a:spcBef>
-                <a:spcPts val="500"/>
-              </a:spcBef>
-              <a:buFont typeface="Arial" panose="020B0604020202020204" pitchFamily="34" charset="0"/>
-              <a:buNone/>
-              <a:defRPr sz="1000" b="0" i="0" kern="1200">
-                <a:solidFill>
-                  <a:srgbClr val="0E2D69"/>
-                </a:solidFill>
-                <a:latin typeface="HSE Sans" panose="02000000000000000000" pitchFamily="2" charset="0"/>
-                <a:ea typeface="+mn-ea"/>
-                <a:cs typeface="+mn-cs"/>
-              </a:defRPr>
-            </a:lvl4pPr>
-            <a:lvl5pPr marL="1828800" indent="0" algn="l" defTabSz="914400" rtl="0" eaLnBrk="1" latinLnBrk="0" hangingPunct="1">
-              <a:lnSpc>
-                <a:spcPct val="90000"/>
-              </a:lnSpc>
-              <a:spcBef>
-                <a:spcPts val="500"/>
-              </a:spcBef>
-              <a:buFont typeface="Arial" panose="020B0604020202020204" pitchFamily="34" charset="0"/>
-              <a:buNone/>
-              <a:defRPr sz="1000" b="0" i="0" kern="1200">
-                <a:solidFill>
-                  <a:srgbClr val="0E2D69"/>
-                </a:solidFill>
-                <a:latin typeface="HSE Sans" panose="02000000000000000000" pitchFamily="2" charset="0"/>
-                <a:ea typeface="+mn-ea"/>
-                <a:cs typeface="+mn-cs"/>
-              </a:defRPr>
-            </a:lvl5pPr>
-            <a:lvl6pPr marL="2514600" indent="-228600" algn="l" defTabSz="914400" rtl="0" eaLnBrk="1" latinLnBrk="0" hangingPunct="1">
-              <a:lnSpc>
-                <a:spcPct val="90000"/>
-              </a:lnSpc>
-              <a:spcBef>
-                <a:spcPts val="500"/>
-              </a:spcBef>
-              <a:buFont typeface="Arial" panose="020B0604020202020204" pitchFamily="34" charset="0"/>
-              <a:buChar char="•"/>
-              <a:defRPr sz="1800" kern="1200">
-                <a:solidFill>
-                  <a:schemeClr val="tx1"/>
-                </a:solidFill>
-                <a:latin typeface="+mn-lt"/>
-                <a:ea typeface="+mn-ea"/>
-                <a:cs typeface="+mn-cs"/>
-              </a:defRPr>
-            </a:lvl6pPr>
-            <a:lvl7pPr marL="2971800" indent="-228600" algn="l" defTabSz="914400" rtl="0" eaLnBrk="1" latinLnBrk="0" hangingPunct="1">
-              <a:lnSpc>
-                <a:spcPct val="90000"/>
-              </a:lnSpc>
-              <a:spcBef>
-                <a:spcPts val="500"/>
-              </a:spcBef>
-              <a:buFont typeface="Arial" panose="020B0604020202020204" pitchFamily="34" charset="0"/>
-              <a:buChar char="•"/>
-              <a:defRPr sz="1800" kern="1200">
-                <a:solidFill>
-                  <a:schemeClr val="tx1"/>
-                </a:solidFill>
-                <a:latin typeface="+mn-lt"/>
-                <a:ea typeface="+mn-ea"/>
-                <a:cs typeface="+mn-cs"/>
-              </a:defRPr>
-            </a:lvl7pPr>
-            <a:lvl8pPr marL="3429000" indent="-228600" algn="l" defTabSz="914400" rtl="0" eaLnBrk="1" latinLnBrk="0" hangingPunct="1">
-              <a:lnSpc>
-                <a:spcPct val="90000"/>
-              </a:lnSpc>
-              <a:spcBef>
-                <a:spcPts val="500"/>
-              </a:spcBef>
-              <a:buFont typeface="Arial" panose="020B0604020202020204" pitchFamily="34" charset="0"/>
-              <a:buChar char="•"/>
-              <a:defRPr sz="1800" kern="1200">
-                <a:solidFill>
-                  <a:schemeClr val="tx1"/>
-                </a:solidFill>
-                <a:latin typeface="+mn-lt"/>
-                <a:ea typeface="+mn-ea"/>
-                <a:cs typeface="+mn-cs"/>
-              </a:defRPr>
-            </a:lvl8pPr>
-            <a:lvl9pPr marL="3886200" indent="-228600" algn="l" defTabSz="914400" rtl="0" eaLnBrk="1" latinLnBrk="0" hangingPunct="1">
-              <a:lnSpc>
-                <a:spcPct val="90000"/>
-              </a:lnSpc>
-              <a:spcBef>
-                <a:spcPts val="500"/>
-              </a:spcBef>
-              <a:buFont typeface="Arial" panose="020B0604020202020204" pitchFamily="34" charset="0"/>
-              <a:buChar char="•"/>
-              <a:defRPr sz="1800" kern="1200">
-                <a:solidFill>
-                  <a:schemeClr val="tx1"/>
-                </a:solidFill>
-                <a:latin typeface="+mn-lt"/>
-                <a:ea typeface="+mn-ea"/>
-                <a:cs typeface="+mn-cs"/>
-              </a:defRPr>
-            </a:lvl9pPr>
-          </a:lstStyle>
-          <a:p>
-            <a:r>
-              <a:rPr lang="ru-RU" dirty="0"/>
-              <a:t>Канделов Дамир Русланович </a:t>
-            </a:r>
-          </a:p>
-          <a:p>
-            <a:r>
-              <a:rPr lang="ru-RU" dirty="0"/>
-              <a:t>Группа: 22ПИ-1</a:t>
-            </a:r>
-          </a:p>
-        </p:txBody>
-      </p:sp>
-      <p:sp>
-        <p:nvSpPr>
-          <p:cNvPr id="4" name="Rectangle 2">
-            <a:extLst>
-              <a:ext uri="{FF2B5EF4-FFF2-40B4-BE49-F238E27FC236}">
-                <a16:creationId xmlns:a16="http://schemas.microsoft.com/office/drawing/2014/main" id="{0F0DA963-E9B5-6F1D-7BB4-EC614E37D956}"/>
-              </a:ext>
-            </a:extLst>
-          </p:cNvPr>
-          <p:cNvSpPr>
-            <a:spLocks noChangeArrowheads="1"/>
-          </p:cNvSpPr>
-          <p:nvPr/>
-        </p:nvSpPr>
-        <p:spPr bwMode="auto">
-          <a:xfrm>
-            <a:off x="0" y="0"/>
-            <a:ext cx="12192000" cy="457200"/>
-          </a:xfrm>
-          <a:prstGeom prst="rect">
-            <a:avLst/>
-          </a:prstGeom>
-          <a:noFill/>
-          <a:ln>
-            <a:noFill/>
-          </a:ln>
-          <a:effectLst/>
-          <a:extLst>
-            <a:ext uri="{909E8E84-426E-40DD-AFC4-6F175D3DCCD1}">
-              <a14:hiddenFill xmlns:a14="http://schemas.microsoft.com/office/drawing/2010/main">
-                <a:solidFill>
-                  <a:schemeClr val="accent1"/>
-                </a:solidFill>
-              </a14:hiddenFill>
-            </a:ext>
-            <a:ext uri="{91240B29-F687-4F45-9708-019B960494DF}">
-              <a14:hiddenLine xmlns:a14="http://schemas.microsoft.com/office/drawing/2010/main" w="9525">
-                <a:solidFill>
-                  <a:schemeClr val="tx1"/>
-                </a:solidFill>
-                <a:miter lim="800000"/>
-                <a:headEnd/>
-                <a:tailEnd/>
-              </a14:hiddenLine>
-            </a:ext>
-            <a:ext uri="{AF507438-7753-43E0-B8FC-AC1667EBCBE1}">
-              <a14:hiddenEffects xmlns:a14="http://schemas.microsoft.com/office/drawing/2010/main">
-                <a:effectLst>
-                  <a:outerShdw dist="35921" dir="2700000" algn="ctr" rotWithShape="0">
-                    <a:schemeClr val="bg2"/>
-                  </a:outerShdw>
-                </a:effectLst>
-              </a14:hiddenEffects>
-            </a:ext>
-          </a:extLst>
-        </p:spPr>
-        <p:txBody>
-          <a:bodyPr vert="horz" wrap="none" lIns="91440" tIns="45720" rIns="91440" bIns="45720" numCol="1" anchor="ctr" anchorCtr="0" compatLnSpc="1">
-            <a:prstTxWarp prst="textNoShape">
-              <a:avLst/>
-            </a:prstTxWarp>
-            <a:spAutoFit/>
-          </a:bodyPr>
-          <a:lstStyle/>
-          <a:p>
-            <a:endParaRPr lang="en-RU"/>
-          </a:p>
-        </p:txBody>
-      </p:sp>
-      <p:sp>
-        <p:nvSpPr>
-          <p:cNvPr id="3" name="Rounded Rectangle 2">
-            <a:extLst>
-              <a:ext uri="{FF2B5EF4-FFF2-40B4-BE49-F238E27FC236}">
-                <a16:creationId xmlns:a16="http://schemas.microsoft.com/office/drawing/2014/main" id="{1B1BC534-618A-0E4F-A8FA-BED4A06AFBCD}"/>
-              </a:ext>
-            </a:extLst>
-          </p:cNvPr>
-          <p:cNvSpPr/>
-          <p:nvPr/>
-        </p:nvSpPr>
-        <p:spPr>
-          <a:xfrm>
-            <a:off x="558800" y="2286000"/>
-            <a:ext cx="3581400" cy="3810000"/>
-          </a:xfrm>
-          <a:prstGeom prst="roundRect">
-            <a:avLst/>
-          </a:prstGeom>
-          <a:solidFill>
-            <a:srgbClr val="E8EEF7"/>
-          </a:solidFill>
-          <a:ln w="19050" cap="flat" cmpd="sng" algn="ctr">
-            <a:solidFill>
-              <a:srgbClr val="1F4E9B"/>
-            </a:solidFill>
-            <a:prstDash val="solid"/>
-            <a:miter lim="800000"/>
-          </a:ln>
-        </p:spPr>
-        <p:style>
-          <a:lnRef idx="2">
-            <a:schemeClr val="accent1">
-              <a:shade val="15000"/>
-            </a:schemeClr>
-          </a:lnRef>
-          <a:fillRef idx="1">
-            <a:schemeClr val="accent1"/>
-          </a:fillRef>
-          <a:effectRef idx="0">
-            <a:schemeClr val="accent1"/>
-          </a:effectRef>
-          <a:fontRef idx="minor">
-            <a:schemeClr val="lt1"/>
-          </a:fontRef>
-        </p:style>
-        <p:txBody>
-          <a:bodyPr vertOverflow="clip" horzOverflow="clip" rtlCol="0" anchor="t"/>
-          <a:lstStyle/>
-          <a:p>
-            <a:pPr algn="l"/>
-            <a:endParaRPr lang="en-US"/>
-          </a:p>
-        </p:txBody>
-      </p:sp>
-      <p:sp>
-        <p:nvSpPr>
-          <p:cNvPr id="5" name="Rectangle 4">
-            <a:extLst>
-              <a:ext uri="{FF2B5EF4-FFF2-40B4-BE49-F238E27FC236}">
-                <a16:creationId xmlns:a16="http://schemas.microsoft.com/office/drawing/2014/main" id="{221AC2AA-AE36-4744-B185-DFACEA92ACA1}"/>
-              </a:ext>
-            </a:extLst>
-          </p:cNvPr>
-          <p:cNvSpPr/>
-          <p:nvPr/>
-        </p:nvSpPr>
-        <p:spPr>
-          <a:xfrm>
-            <a:off x="558800" y="2286000"/>
-            <a:ext cx="3581400" cy="635000"/>
-          </a:xfrm>
-          <a:prstGeom prst="rect">
-            <a:avLst/>
-          </a:prstGeom>
-          <a:solidFill>
-            <a:srgbClr val="1F4E9B"/>
-          </a:solidFill>
-          <a:ln w="19050" cap="flat" cmpd="sng" algn="ctr">
-            <a:solidFill>
-              <a:srgbClr val="1E4D9B"/>
-            </a:solidFill>
-            <a:prstDash val="solid"/>
-            <a:miter lim="800000"/>
-          </a:ln>
-        </p:spPr>
-        <p:style>
-          <a:lnRef idx="2">
-            <a:schemeClr val="accent1">
-              <a:shade val="15000"/>
-            </a:schemeClr>
-          </a:lnRef>
-          <a:fillRef idx="1">
-            <a:schemeClr val="accent1"/>
-          </a:fillRef>
-          <a:effectRef idx="0">
-            <a:schemeClr val="accent1"/>
-          </a:effectRef>
-          <a:fontRef idx="minor">
-            <a:schemeClr val="lt1"/>
-          </a:fontRef>
-        </p:style>
-        <p:txBody>
-          <a:bodyPr vertOverflow="clip" horzOverflow="clip" wrap="square" lIns="101600" tIns="25400" rIns="101600" bIns="25400" rtlCol="0" anchor="ctr" anchorCtr="0">
-            <a:noAutofit/>
-          </a:bodyPr>
-          <a:lstStyle/>
-          <a:p>
-            <a:pPr algn="ctr"/>
-            <a:r>
-              <a:rPr lang="en-US" sz="1600" b="1" dirty="0">
-                <a:solidFill>
-                  <a:srgbClr val="FFFFFF"/>
-                </a:solidFill>
-                <a:latin typeface="HSE Sans"/>
-              </a:rPr>
-              <a:t>Speech Emotion Recognition (SER)</a:t>
-            </a:r>
-          </a:p>
-        </p:txBody>
-      </p:sp>
-      <p:sp>
-        <p:nvSpPr>
-          <p:cNvPr id="6" name="TextBox 5">
-            <a:extLst>
-              <a:ext uri="{FF2B5EF4-FFF2-40B4-BE49-F238E27FC236}">
-                <a16:creationId xmlns:a16="http://schemas.microsoft.com/office/drawing/2014/main" id="{30AE8516-91FB-3949-A256-958854349ABC}"/>
-              </a:ext>
-            </a:extLst>
-          </p:cNvPr>
-          <p:cNvSpPr txBox="1"/>
-          <p:nvPr/>
-        </p:nvSpPr>
-        <p:spPr>
-          <a:xfrm>
-            <a:off x="724487" y="3094125"/>
-            <a:ext cx="3327400" cy="304800"/>
-          </a:xfrm>
-          <a:prstGeom prst="rect">
-            <a:avLst/>
-          </a:prstGeom>
-          <a:noFill/>
-        </p:spPr>
-        <p:txBody>
-          <a:bodyPr vertOverflow="overflow" vert="horz" wrap="square" lIns="25400" tIns="0" rIns="25400" bIns="0" rtlCol="0" anchor="t">
-            <a:noAutofit/>
-          </a:bodyPr>
-          <a:lstStyle/>
-          <a:p>
-            <a:pPr algn="l"/>
-            <a:r>
-              <a:rPr lang="ru-RU" sz="1400" dirty="0">
-                <a:solidFill>
-                  <a:srgbClr val="1A1A1A"/>
-                </a:solidFill>
-              </a:rPr>
-              <a:t>Определение эмоций по речи</a:t>
-            </a:r>
-            <a:endParaRPr lang="en-US" sz="1400" dirty="0">
-              <a:solidFill>
-                <a:srgbClr val="1A1A1A"/>
-              </a:solidFill>
-              <a:latin typeface="HSE Sans" panose="02000000000000000000" pitchFamily="2" charset="0"/>
-            </a:endParaRPr>
-          </a:p>
-        </p:txBody>
-      </p:sp>
-      <p:sp>
-        <p:nvSpPr>
-          <p:cNvPr id="7" name="TextBox 6">
-            <a:extLst>
-              <a:ext uri="{FF2B5EF4-FFF2-40B4-BE49-F238E27FC236}">
-                <a16:creationId xmlns:a16="http://schemas.microsoft.com/office/drawing/2014/main" id="{3ECEF2E0-0E84-C846-BE7B-C27C284AEB33}"/>
-              </a:ext>
-            </a:extLst>
-          </p:cNvPr>
-          <p:cNvSpPr txBox="1"/>
-          <p:nvPr/>
-        </p:nvSpPr>
-        <p:spPr>
-          <a:xfrm>
-            <a:off x="736600" y="3561076"/>
-            <a:ext cx="3225800" cy="2540000"/>
-          </a:xfrm>
-          <a:prstGeom prst="rect">
-            <a:avLst/>
-          </a:prstGeom>
-          <a:noFill/>
-        </p:spPr>
-        <p:txBody>
-          <a:bodyPr vertOverflow="overflow" vert="horz" wrap="square" lIns="0" tIns="0" rIns="0" bIns="0" rtlCol="0" anchor="t">
-            <a:noAutofit/>
-          </a:bodyPr>
-          <a:lstStyle/>
-          <a:p>
-            <a:pPr marL="171450" indent="-171450" algn="l">
-              <a:lnSpc>
-                <a:spcPct val="100000"/>
-              </a:lnSpc>
-              <a:spcBef>
-                <a:spcPts val="600"/>
-              </a:spcBef>
-              <a:buFont typeface="Arial" panose="020B0604020202020204" pitchFamily="34" charset="0"/>
-              <a:buChar char="•"/>
-            </a:pPr>
-            <a:r>
-              <a:rPr lang="ru-RU" sz="1400" dirty="0">
-                <a:solidFill>
-                  <a:srgbClr val="1A1A1A"/>
-                </a:solidFill>
-                <a:latin typeface="HSE Sans" panose="02000000000000000000" pitchFamily="2" charset="0"/>
-              </a:rPr>
-              <a:t>Классика: </a:t>
-            </a:r>
-            <a:r>
-              <a:rPr lang="en-US" sz="1400" dirty="0">
-                <a:solidFill>
-                  <a:srgbClr val="1A1A1A"/>
-                </a:solidFill>
-                <a:latin typeface="HSE Sans"/>
-              </a:rPr>
-              <a:t>MFCC + SVM</a:t>
-            </a:r>
-            <a:r>
-              <a:rPr lang="ru-RU" sz="1400" dirty="0">
-                <a:solidFill>
-                  <a:srgbClr val="1A1A1A"/>
-                </a:solidFill>
-                <a:latin typeface="HSE Sans" panose="02000000000000000000" pitchFamily="2" charset="0"/>
-              </a:rPr>
-              <a:t>, лог-мел спектрограммы</a:t>
-            </a:r>
-          </a:p>
-          <a:p>
-            <a:pPr marL="171450" indent="-171450" algn="l">
-              <a:lnSpc>
-                <a:spcPct val="100000"/>
-              </a:lnSpc>
-              <a:spcBef>
-                <a:spcPts val="600"/>
-              </a:spcBef>
-              <a:buFont typeface="Arial" panose="020B0604020202020204" pitchFamily="34" charset="0"/>
-              <a:buChar char="•"/>
-            </a:pPr>
-            <a:r>
-              <a:rPr lang="ru-RU" sz="1400" dirty="0">
-                <a:solidFill>
-                  <a:srgbClr val="1A1A1A"/>
-                </a:solidFill>
-                <a:latin typeface="HSE Sans" panose="02000000000000000000" pitchFamily="2" charset="0"/>
-              </a:rPr>
-              <a:t>Трансформеры: </a:t>
-            </a:r>
-            <a:r>
-              <a:rPr lang="en-US" sz="1400" dirty="0">
-                <a:solidFill>
-                  <a:srgbClr val="1A1A1A"/>
-                </a:solidFill>
-                <a:latin typeface="HSE Sans"/>
-              </a:rPr>
-              <a:t>Wav2Vec 2.0, DistilHuBERT</a:t>
-            </a:r>
-          </a:p>
-          <a:p>
-            <a:pPr marL="171450" indent="-171450" algn="l">
-              <a:lnSpc>
-                <a:spcPct val="100000"/>
-              </a:lnSpc>
-              <a:spcBef>
-                <a:spcPts val="600"/>
-              </a:spcBef>
-              <a:buFont typeface="Arial" panose="020B0604020202020204" pitchFamily="34" charset="0"/>
-              <a:buChar char="•"/>
-            </a:pPr>
-            <a:r>
-              <a:rPr lang="en-US" sz="1400" dirty="0">
-                <a:solidFill>
-                  <a:srgbClr val="1A1A1A"/>
-                </a:solidFill>
-                <a:latin typeface="HSE Sans"/>
-              </a:rPr>
-              <a:t>CNN </a:t>
-            </a:r>
-            <a:r>
-              <a:rPr lang="ru-RU" sz="1400" dirty="0">
-                <a:solidFill>
-                  <a:srgbClr val="1A1A1A"/>
-                </a:solidFill>
-                <a:latin typeface="HSE Sans" panose="02000000000000000000" pitchFamily="2" charset="0"/>
-              </a:rPr>
-              <a:t>на спектральных представлениях</a:t>
-            </a:r>
-          </a:p>
-        </p:txBody>
-      </p:sp>
-      <p:sp>
-        <p:nvSpPr>
-          <p:cNvPr id="9" name="Rounded Rectangle 8">
-            <a:extLst>
-              <a:ext uri="{FF2B5EF4-FFF2-40B4-BE49-F238E27FC236}">
-                <a16:creationId xmlns:a16="http://schemas.microsoft.com/office/drawing/2014/main" id="{02C0AA11-27EF-D749-B825-49D92198B864}"/>
-              </a:ext>
-            </a:extLst>
-          </p:cNvPr>
-          <p:cNvSpPr/>
-          <p:nvPr/>
-        </p:nvSpPr>
-        <p:spPr>
-          <a:xfrm>
-            <a:off x="4305300" y="2286000"/>
-            <a:ext cx="3581400" cy="3810000"/>
-          </a:xfrm>
-          <a:prstGeom prst="roundRect">
-            <a:avLst/>
-          </a:prstGeom>
-          <a:solidFill>
-            <a:srgbClr val="E8EEF7"/>
-          </a:solidFill>
-          <a:ln w="19050" cap="flat" cmpd="sng" algn="ctr">
-            <a:solidFill>
-              <a:srgbClr val="2E7D5B"/>
-            </a:solidFill>
-            <a:prstDash val="solid"/>
-            <a:miter lim="800000"/>
-          </a:ln>
-        </p:spPr>
-        <p:style>
-          <a:lnRef idx="2">
-            <a:schemeClr val="accent1">
-              <a:shade val="15000"/>
-            </a:schemeClr>
-          </a:lnRef>
-          <a:fillRef idx="1">
-            <a:schemeClr val="accent1"/>
-          </a:fillRef>
-          <a:effectRef idx="0">
-            <a:schemeClr val="accent1"/>
-          </a:effectRef>
-          <a:fontRef idx="minor">
-            <a:schemeClr val="lt1"/>
-          </a:fontRef>
-        </p:style>
-        <p:txBody>
-          <a:bodyPr vertOverflow="clip" horzOverflow="clip" rtlCol="0" anchor="t"/>
-          <a:lstStyle/>
-          <a:p>
-            <a:pPr algn="l"/>
-            <a:endParaRPr lang="en-US"/>
-          </a:p>
-        </p:txBody>
-      </p:sp>
-      <p:sp>
-        <p:nvSpPr>
-          <p:cNvPr id="11" name="Rectangle 10">
-            <a:extLst>
-              <a:ext uri="{FF2B5EF4-FFF2-40B4-BE49-F238E27FC236}">
-                <a16:creationId xmlns:a16="http://schemas.microsoft.com/office/drawing/2014/main" id="{619576DE-F2DC-2048-AF8C-7C9DAABDA50D}"/>
-              </a:ext>
-            </a:extLst>
-          </p:cNvPr>
-          <p:cNvSpPr/>
-          <p:nvPr/>
-        </p:nvSpPr>
-        <p:spPr>
-          <a:xfrm>
-            <a:off x="4305300" y="2286000"/>
-            <a:ext cx="3581400" cy="635000"/>
-          </a:xfrm>
-          <a:prstGeom prst="rect">
-            <a:avLst/>
-          </a:prstGeom>
-          <a:solidFill>
-            <a:srgbClr val="2F7D5B"/>
-          </a:solidFill>
-          <a:ln w="19050" cap="flat" cmpd="sng" algn="ctr">
-            <a:solidFill>
-              <a:srgbClr val="2F7D5B"/>
-            </a:solidFill>
-            <a:prstDash val="solid"/>
-            <a:miter lim="800000"/>
-          </a:ln>
-        </p:spPr>
-        <p:style>
-          <a:lnRef idx="2">
-            <a:schemeClr val="accent1">
-              <a:shade val="15000"/>
-            </a:schemeClr>
-          </a:lnRef>
-          <a:fillRef idx="1">
-            <a:schemeClr val="accent1"/>
-          </a:fillRef>
-          <a:effectRef idx="0">
-            <a:schemeClr val="accent1"/>
-          </a:effectRef>
-          <a:fontRef idx="minor">
-            <a:schemeClr val="lt1"/>
-          </a:fontRef>
-        </p:style>
-        <p:txBody>
-          <a:bodyPr vertOverflow="clip" horzOverflow="clip" wrap="square" lIns="101600" tIns="25400" rIns="101600" bIns="25400" rtlCol="0" anchor="ctr" anchorCtr="0">
-            <a:noAutofit/>
-          </a:bodyPr>
-          <a:lstStyle/>
-          <a:p>
-            <a:pPr algn="ctr"/>
-            <a:r>
-              <a:rPr lang="en-US" sz="1600" b="1" dirty="0">
-                <a:solidFill>
-                  <a:srgbClr val="FFFFFF"/>
-                </a:solidFill>
-                <a:latin typeface="HSE Sans"/>
-              </a:rPr>
-              <a:t>Facial expression Emotion Recognition (FER)</a:t>
-            </a:r>
-          </a:p>
-        </p:txBody>
-      </p:sp>
-      <p:sp>
-        <p:nvSpPr>
-          <p:cNvPr id="12" name="TextBox 11">
-            <a:extLst>
-              <a:ext uri="{FF2B5EF4-FFF2-40B4-BE49-F238E27FC236}">
-                <a16:creationId xmlns:a16="http://schemas.microsoft.com/office/drawing/2014/main" id="{3BC742F3-F422-8C42-B0DF-A02566AD766C}"/>
-              </a:ext>
-            </a:extLst>
-          </p:cNvPr>
-          <p:cNvSpPr txBox="1"/>
-          <p:nvPr/>
-        </p:nvSpPr>
-        <p:spPr>
-          <a:xfrm>
-            <a:off x="4432300" y="3066896"/>
-            <a:ext cx="3327400" cy="304800"/>
-          </a:xfrm>
-          <a:prstGeom prst="rect">
-            <a:avLst/>
-          </a:prstGeom>
-          <a:noFill/>
-        </p:spPr>
-        <p:txBody>
-          <a:bodyPr vertOverflow="overflow" vert="horz" wrap="square" lIns="25400" tIns="0" rIns="25400" bIns="0" rtlCol="0" anchor="t">
-            <a:noAutofit/>
-          </a:bodyPr>
-          <a:lstStyle>
-            <a:defPPr>
-              <a:defRPr lang="en-RU"/>
-            </a:defPPr>
-            <a:lvl1pPr>
-              <a:defRPr sz="1400">
-                <a:solidFill>
-                  <a:srgbClr val="1A1A1A"/>
-                </a:solidFill>
-              </a:defRPr>
-            </a:lvl1pPr>
-          </a:lstStyle>
-          <a:p>
-            <a:r>
-              <a:rPr lang="ru-RU" dirty="0"/>
-              <a:t>Определение эмоций по выражению лиц</a:t>
-            </a:r>
-            <a:endParaRPr lang="en-US" dirty="0"/>
-          </a:p>
-        </p:txBody>
-      </p:sp>
-      <p:sp>
-        <p:nvSpPr>
-          <p:cNvPr id="13" name="TextBox 12">
-            <a:extLst>
-              <a:ext uri="{FF2B5EF4-FFF2-40B4-BE49-F238E27FC236}">
-                <a16:creationId xmlns:a16="http://schemas.microsoft.com/office/drawing/2014/main" id="{1A2BC867-2429-9F40-B79B-AF14B5B51709}"/>
-              </a:ext>
-            </a:extLst>
-          </p:cNvPr>
-          <p:cNvSpPr txBox="1"/>
-          <p:nvPr/>
-        </p:nvSpPr>
-        <p:spPr>
-          <a:xfrm>
-            <a:off x="4483100" y="3561076"/>
-            <a:ext cx="3225800" cy="2540000"/>
-          </a:xfrm>
-          <a:prstGeom prst="rect">
-            <a:avLst/>
-          </a:prstGeom>
-          <a:noFill/>
-        </p:spPr>
-        <p:txBody>
-          <a:bodyPr vertOverflow="overflow" vert="horz" wrap="square" lIns="0" tIns="0" rIns="0" bIns="0" rtlCol="0" anchor="t">
-            <a:noAutofit/>
-          </a:bodyPr>
-          <a:lstStyle/>
-          <a:p>
-            <a:pPr marL="171450" indent="-171450" algn="l">
-              <a:lnSpc>
-                <a:spcPct val="100000"/>
-              </a:lnSpc>
-              <a:spcBef>
-                <a:spcPts val="600"/>
-              </a:spcBef>
-              <a:buFont typeface="Arial" panose="020B0604020202020204" pitchFamily="34" charset="0"/>
-              <a:buChar char="•"/>
-            </a:pPr>
-            <a:r>
-              <a:rPr lang="ru-RU" sz="1400" dirty="0">
-                <a:solidFill>
-                  <a:srgbClr val="1A1A1A"/>
-                </a:solidFill>
-                <a:latin typeface="HSE Sans" panose="02000000000000000000" pitchFamily="2" charset="0"/>
-              </a:rPr>
-              <a:t>Детекция лиц: </a:t>
-            </a:r>
-            <a:r>
-              <a:rPr lang="en-US" sz="1400" dirty="0">
-                <a:solidFill>
-                  <a:srgbClr val="1A1A1A"/>
-                </a:solidFill>
-                <a:latin typeface="HSE Sans"/>
-              </a:rPr>
-              <a:t>MediaPipe BlazeFace</a:t>
-            </a:r>
-          </a:p>
-          <a:p>
-            <a:pPr marL="171450" indent="-171450" algn="l">
-              <a:lnSpc>
-                <a:spcPct val="100000"/>
-              </a:lnSpc>
-              <a:spcBef>
-                <a:spcPts val="600"/>
-              </a:spcBef>
-              <a:buFont typeface="Arial" panose="020B0604020202020204" pitchFamily="34" charset="0"/>
-              <a:buChar char="•"/>
-            </a:pPr>
-            <a:r>
-              <a:rPr lang="ru-RU" sz="1400" dirty="0">
-                <a:solidFill>
-                  <a:srgbClr val="1A1A1A"/>
-                </a:solidFill>
-                <a:latin typeface="HSE Sans" panose="02000000000000000000" pitchFamily="2" charset="0"/>
-              </a:rPr>
-              <a:t>Лёгкие бэкбоны: </a:t>
-            </a:r>
-            <a:r>
-              <a:rPr lang="en-US" sz="1400" dirty="0">
-                <a:solidFill>
-                  <a:srgbClr val="1A1A1A"/>
-                </a:solidFill>
-                <a:latin typeface="HSE Sans"/>
-              </a:rPr>
-              <a:t>MobileNetV3, EmotiEffNet</a:t>
-            </a:r>
-          </a:p>
-          <a:p>
-            <a:pPr marL="171450" indent="-171450" algn="l">
-              <a:lnSpc>
-                <a:spcPct val="100000"/>
-              </a:lnSpc>
-              <a:spcBef>
-                <a:spcPts val="600"/>
-              </a:spcBef>
-              <a:buFont typeface="Arial" panose="020B0604020202020204" pitchFamily="34" charset="0"/>
-              <a:buChar char="•"/>
-            </a:pPr>
-            <a:r>
-              <a:rPr lang="ru-RU" sz="1400" dirty="0">
-                <a:solidFill>
-                  <a:srgbClr val="1A1A1A"/>
-                </a:solidFill>
-                <a:latin typeface="HSE Sans" panose="02000000000000000000" pitchFamily="2" charset="0"/>
-              </a:rPr>
-              <a:t>Темпоральные агрегаторы: </a:t>
-            </a:r>
-            <a:r>
-              <a:rPr lang="en-US" sz="1400" dirty="0">
-                <a:solidFill>
-                  <a:srgbClr val="1A1A1A"/>
-                </a:solidFill>
-                <a:latin typeface="HSE Sans"/>
-              </a:rPr>
-              <a:t>BiGRU, BiLSTM, TCN</a:t>
-            </a:r>
-          </a:p>
-        </p:txBody>
-      </p:sp>
-      <p:sp>
-        <p:nvSpPr>
-          <p:cNvPr id="16" name="Rounded Rectangle 15">
-            <a:extLst>
-              <a:ext uri="{FF2B5EF4-FFF2-40B4-BE49-F238E27FC236}">
-                <a16:creationId xmlns:a16="http://schemas.microsoft.com/office/drawing/2014/main" id="{B3366672-C854-8746-BA8D-E6CE3CDC44B8}"/>
-              </a:ext>
-            </a:extLst>
-          </p:cNvPr>
-          <p:cNvSpPr/>
-          <p:nvPr/>
-        </p:nvSpPr>
-        <p:spPr>
-          <a:xfrm>
-            <a:off x="8051800" y="2286000"/>
-            <a:ext cx="3581400" cy="3810000"/>
-          </a:xfrm>
-          <a:prstGeom prst="roundRect">
-            <a:avLst/>
-          </a:prstGeom>
-          <a:solidFill>
-            <a:srgbClr val="E8EEF7"/>
-          </a:solidFill>
-          <a:ln w="19050" cap="flat" cmpd="sng" algn="ctr">
-            <a:solidFill>
-              <a:srgbClr val="102E5A"/>
-            </a:solidFill>
-            <a:prstDash val="solid"/>
-            <a:miter lim="800000"/>
-          </a:ln>
-        </p:spPr>
-        <p:style>
-          <a:lnRef idx="2">
-            <a:schemeClr val="accent1">
-              <a:shade val="15000"/>
-            </a:schemeClr>
-          </a:lnRef>
-          <a:fillRef idx="1">
-            <a:schemeClr val="accent1"/>
-          </a:fillRef>
-          <a:effectRef idx="0">
-            <a:schemeClr val="accent1"/>
-          </a:effectRef>
-          <a:fontRef idx="minor">
-            <a:schemeClr val="lt1"/>
-          </a:fontRef>
-        </p:style>
-        <p:txBody>
-          <a:bodyPr vertOverflow="clip" horzOverflow="clip" rtlCol="0" anchor="t"/>
-          <a:lstStyle/>
-          <a:p>
-            <a:pPr algn="l"/>
-            <a:endParaRPr lang="en-US"/>
-          </a:p>
-        </p:txBody>
-      </p:sp>
-      <p:sp>
-        <p:nvSpPr>
-          <p:cNvPr id="20" name="Rectangle 19">
-            <a:extLst>
-              <a:ext uri="{FF2B5EF4-FFF2-40B4-BE49-F238E27FC236}">
-                <a16:creationId xmlns:a16="http://schemas.microsoft.com/office/drawing/2014/main" id="{AE82708D-89D8-AD4C-9ADF-3E7F98B2C29E}"/>
-              </a:ext>
-            </a:extLst>
-          </p:cNvPr>
-          <p:cNvSpPr/>
-          <p:nvPr/>
-        </p:nvSpPr>
-        <p:spPr>
-          <a:xfrm>
-            <a:off x="8051800" y="2286000"/>
-            <a:ext cx="3581400" cy="635000"/>
-          </a:xfrm>
-          <a:prstGeom prst="rect">
-            <a:avLst/>
-          </a:prstGeom>
-          <a:solidFill>
-            <a:schemeClr val="tx1"/>
-          </a:solidFill>
-          <a:ln w="19050" cap="flat" cmpd="sng" algn="ctr">
-            <a:solidFill>
-              <a:schemeClr val="tx1"/>
-            </a:solidFill>
-            <a:prstDash val="solid"/>
-            <a:miter lim="800000"/>
-          </a:ln>
-        </p:spPr>
-        <p:style>
-          <a:lnRef idx="2">
-            <a:schemeClr val="accent1">
-              <a:shade val="15000"/>
-            </a:schemeClr>
-          </a:lnRef>
-          <a:fillRef idx="1">
-            <a:schemeClr val="accent1"/>
-          </a:fillRef>
-          <a:effectRef idx="0">
-            <a:schemeClr val="accent1"/>
-          </a:effectRef>
-          <a:fontRef idx="minor">
-            <a:schemeClr val="lt1"/>
-          </a:fontRef>
-        </p:style>
-        <p:txBody>
-          <a:bodyPr vertOverflow="clip" horzOverflow="clip" wrap="square" lIns="101600" tIns="25400" rIns="101600" bIns="25400" rtlCol="0" anchor="ctr" anchorCtr="0">
-            <a:noAutofit/>
-          </a:bodyPr>
-          <a:lstStyle/>
-          <a:p>
-            <a:pPr algn="ctr"/>
-            <a:r>
-              <a:rPr lang="en-US" sz="1600" b="1" dirty="0">
-                <a:solidFill>
-                  <a:srgbClr val="FFFFFF"/>
-                </a:solidFill>
-                <a:latin typeface="HSE Sans"/>
-              </a:rPr>
-              <a:t>Multimodal Emotion Recognition (MER)</a:t>
-            </a:r>
-          </a:p>
-        </p:txBody>
-      </p:sp>
-      <p:sp>
-        <p:nvSpPr>
-          <p:cNvPr id="21" name="TextBox 20">
-            <a:extLst>
-              <a:ext uri="{FF2B5EF4-FFF2-40B4-BE49-F238E27FC236}">
-                <a16:creationId xmlns:a16="http://schemas.microsoft.com/office/drawing/2014/main" id="{64F8AFC4-AF5F-BD47-920B-E2AB5FC0C112}"/>
-              </a:ext>
-            </a:extLst>
-          </p:cNvPr>
-          <p:cNvSpPr txBox="1"/>
-          <p:nvPr/>
-        </p:nvSpPr>
-        <p:spPr>
-          <a:xfrm>
-            <a:off x="8178800" y="3066896"/>
-            <a:ext cx="3327400" cy="304800"/>
-          </a:xfrm>
-          <a:prstGeom prst="rect">
-            <a:avLst/>
-          </a:prstGeom>
-          <a:noFill/>
-        </p:spPr>
-        <p:txBody>
-          <a:bodyPr vertOverflow="overflow" vert="horz" wrap="square" lIns="25400" tIns="0" rIns="25400" bIns="0" rtlCol="0" anchor="t">
-            <a:noAutofit/>
-          </a:bodyPr>
-          <a:lstStyle>
-            <a:defPPr>
-              <a:defRPr lang="en-RU"/>
-            </a:defPPr>
-            <a:lvl1pPr>
-              <a:defRPr sz="1400">
-                <a:solidFill>
-                  <a:srgbClr val="1A1A1A"/>
-                </a:solidFill>
-              </a:defRPr>
-            </a:lvl1pPr>
-          </a:lstStyle>
-          <a:p>
-            <a:r>
-              <a:rPr lang="ru-RU" dirty="0"/>
-              <a:t>Определение эмоций</a:t>
-            </a:r>
-            <a:r>
-              <a:rPr lang="en-US" dirty="0"/>
-              <a:t> </a:t>
-            </a:r>
-            <a:r>
-              <a:rPr lang="ru-RU" dirty="0"/>
-              <a:t>по двум и более модальностям </a:t>
-            </a:r>
-            <a:endParaRPr lang="en-US" dirty="0"/>
-          </a:p>
-        </p:txBody>
-      </p:sp>
-      <p:sp>
-        <p:nvSpPr>
-          <p:cNvPr id="22" name="TextBox 21">
-            <a:extLst>
-              <a:ext uri="{FF2B5EF4-FFF2-40B4-BE49-F238E27FC236}">
-                <a16:creationId xmlns:a16="http://schemas.microsoft.com/office/drawing/2014/main" id="{3A0568C2-DBC8-814F-B1F1-615C9C1B2E5A}"/>
-              </a:ext>
-            </a:extLst>
-          </p:cNvPr>
-          <p:cNvSpPr txBox="1"/>
-          <p:nvPr/>
-        </p:nvSpPr>
-        <p:spPr>
-          <a:xfrm>
-            <a:off x="8229600" y="3561076"/>
-            <a:ext cx="3225800" cy="2540000"/>
-          </a:xfrm>
-          <a:prstGeom prst="rect">
-            <a:avLst/>
-          </a:prstGeom>
-          <a:noFill/>
-        </p:spPr>
-        <p:txBody>
-          <a:bodyPr vertOverflow="overflow" vert="horz" wrap="square" lIns="0" tIns="0" rIns="0" bIns="0" rtlCol="0" anchor="t">
-            <a:noAutofit/>
-          </a:bodyPr>
-          <a:lstStyle/>
-          <a:p>
-            <a:pPr marL="171450" indent="-171450" algn="l">
-              <a:lnSpc>
-                <a:spcPct val="100000"/>
-              </a:lnSpc>
-              <a:spcBef>
-                <a:spcPts val="600"/>
-              </a:spcBef>
-              <a:buFont typeface="Arial" panose="020B0604020202020204" pitchFamily="34" charset="0"/>
-              <a:buChar char="•"/>
-            </a:pPr>
-            <a:r>
-              <a:rPr lang="ru-RU" sz="1400" dirty="0">
-                <a:solidFill>
-                  <a:srgbClr val="1A1A1A"/>
-                </a:solidFill>
-                <a:latin typeface="HSE Sans" panose="02000000000000000000" pitchFamily="2" charset="0"/>
-              </a:rPr>
-              <a:t>Стратегии слияния модальностей (early / late / hybrid)</a:t>
-            </a:r>
-          </a:p>
-          <a:p>
-            <a:pPr marL="171450" indent="-171450" algn="l">
-              <a:lnSpc>
-                <a:spcPct val="100000"/>
-              </a:lnSpc>
-              <a:spcBef>
-                <a:spcPts val="600"/>
-              </a:spcBef>
-              <a:buFont typeface="Arial" panose="020B0604020202020204" pitchFamily="34" charset="0"/>
-              <a:buChar char="•"/>
-            </a:pPr>
-            <a:r>
-              <a:rPr lang="ru-RU" sz="1400" dirty="0">
-                <a:solidFill>
-                  <a:srgbClr val="1A1A1A"/>
-                </a:solidFill>
-                <a:latin typeface="HSE Sans" panose="02000000000000000000" pitchFamily="2" charset="0"/>
-              </a:rPr>
-              <a:t>Современные архитектуры для </a:t>
-            </a:r>
-            <a:r>
-              <a:rPr lang="en-US" sz="1400" dirty="0">
-                <a:solidFill>
-                  <a:srgbClr val="1A1A1A"/>
-                </a:solidFill>
-                <a:latin typeface="HSE Sans"/>
-              </a:rPr>
-              <a:t>IEMOCAP</a:t>
-            </a:r>
-            <a:r>
-              <a:rPr lang="ru-RU" sz="1400" dirty="0">
-                <a:solidFill>
-                  <a:srgbClr val="1A1A1A"/>
-                </a:solidFill>
-                <a:latin typeface="HSE Sans"/>
-              </a:rPr>
-              <a:t> (</a:t>
-            </a:r>
-            <a:r>
-              <a:rPr lang="en-US" sz="1400" dirty="0">
-                <a:solidFill>
-                  <a:srgbClr val="1A1A1A"/>
-                </a:solidFill>
-                <a:latin typeface="HSE Sans"/>
-              </a:rPr>
-              <a:t>GIA-MIC, MM-</a:t>
-            </a:r>
-            <a:r>
-              <a:rPr lang="en-US" sz="1400" dirty="0" err="1">
-                <a:solidFill>
-                  <a:srgbClr val="1A1A1A"/>
-                </a:solidFill>
-                <a:latin typeface="HSE Sans"/>
-              </a:rPr>
-              <a:t>NodeFormer</a:t>
-            </a:r>
-            <a:r>
-              <a:rPr lang="en-US" sz="1400" dirty="0">
-                <a:solidFill>
-                  <a:srgbClr val="1A1A1A"/>
-                </a:solidFill>
-                <a:latin typeface="HSE Sans"/>
-              </a:rPr>
-              <a:t>, SCME+GF)</a:t>
-            </a:r>
-          </a:p>
-        </p:txBody>
-      </p:sp>
-    </p:spTree>
-    <p:extLst>
-      <p:ext uri="{BB962C8B-B14F-4D97-AF65-F5344CB8AC3E}">
-        <p14:creationId xmlns:p14="http://schemas.microsoft.com/office/powerpoint/2010/main" val="362681415"/>
-      </p:ext>
-    </p:extLst>
-  </p:cSld>
-  <p:clrMapOvr>
-    <a:masterClrMapping/>
-  </p:clrMapOvr>
-</p:sld>
-</file>
-
-<file path=ppt/slides/slide6.xml><?xml version="1.0" encoding="utf-8"?>
-<p:sld xmlns:a="http://schemas.openxmlformats.org/drawingml/2006/main" xmlns:r="http://schemas.openxmlformats.org/officeDocument/2006/relationships" xmlns:p="http://schemas.openxmlformats.org/presentationml/2006/main">
-  <p:cSld>
-    <p:spTree>
-      <p:nvGrpSpPr>
-        <p:cNvPr id="1" name=""/>
-        <p:cNvGrpSpPr/>
-        <p:nvPr/>
-      </p:nvGrpSpPr>
-      <p:grpSpPr>
-        <a:xfrm>
-          <a:off x="0" y="0"/>
-          <a:ext cx="0" cy="0"/>
-          <a:chOff x="0" y="0"/>
-          <a:chExt cx="0" cy="0"/>
-        </a:xfrm>
-      </p:grpSpPr>
-      <p:sp>
-        <p:nvSpPr>
-          <p:cNvPr id="10" name="Заголовок 2">
-            <a:extLst>
-              <a:ext uri="{FF2B5EF4-FFF2-40B4-BE49-F238E27FC236}">
-                <a16:creationId xmlns:a16="http://schemas.microsoft.com/office/drawing/2014/main" id="{9BF64647-BA7F-C64D-E3FA-FB6C83CF295F}"/>
-              </a:ext>
-            </a:extLst>
-          </p:cNvPr>
-          <p:cNvSpPr txBox="1">
-            <a:spLocks/>
-          </p:cNvSpPr>
-          <p:nvPr/>
-        </p:nvSpPr>
-        <p:spPr>
-          <a:xfrm>
-            <a:off x="666489" y="1160924"/>
             <a:ext cx="5094599" cy="802343"/>
           </a:xfrm>
           <a:prstGeom prst="rect">
@@ -32653,7 +31675,7 @@
 </p:sld>
 </file>
 
-<file path=ppt/slides/slide7.xml><?xml version="1.0" encoding="utf-8"?>
+<file path=ppt/slides/slide6.xml><?xml version="1.0" encoding="utf-8"?>
 <p:sld xmlns:a="http://schemas.openxmlformats.org/drawingml/2006/main" xmlns:r="http://schemas.openxmlformats.org/officeDocument/2006/relationships" xmlns:p="http://schemas.openxmlformats.org/presentationml/2006/main">
   <p:cSld>
     <p:spTree>
@@ -33560,7 +32582,7 @@
 </p:sld>
 </file>
 
-<file path=ppt/slides/slide8.xml><?xml version="1.0" encoding="utf-8"?>
+<file path=ppt/slides/slide7.xml><?xml version="1.0" encoding="utf-8"?>
 <p:sld xmlns:a="http://schemas.openxmlformats.org/drawingml/2006/main" xmlns:r="http://schemas.openxmlformats.org/officeDocument/2006/relationships" xmlns:p="http://schemas.openxmlformats.org/presentationml/2006/main">
   <p:cSld>
     <p:spTree>
@@ -34633,7 +33655,7 @@
               <a:rPr lang="ru-RU" sz="1600" dirty="0">
                 <a:latin typeface="HSE Sans" panose="02000000000000000000" pitchFamily="2" charset="0"/>
               </a:rPr>
-              <a:t> — лучший баланс качества и стоимости (0,827 </a:t>
+              <a:t> — лучший баланс качества и скорости (0,827 </a:t>
             </a:r>
             <a:r>
               <a:rPr lang="ru-RU" sz="1600" dirty="0" err="1">
@@ -34708,7 +33730,7 @@
 </p:sld>
 </file>
 
-<file path=ppt/slides/slide9.xml><?xml version="1.0" encoding="utf-8"?>
+<file path=ppt/slides/slide8.xml><?xml version="1.0" encoding="utf-8"?>
 <p:sld xmlns:a="http://schemas.openxmlformats.org/drawingml/2006/main" xmlns:r="http://schemas.openxmlformats.org/officeDocument/2006/relationships" xmlns:p="http://schemas.openxmlformats.org/presentationml/2006/main">
   <p:cSld>
     <p:spTree>
@@ -35492,27 +34514,18 @@
             </a:pPr>
             <a:r>
               <a:rPr lang="ru-RU" sz="1400" dirty="0">
-                <a:solidFill>
-                  <a:srgbClr val="1A1A1A"/>
-                </a:solidFill>
                 <a:latin typeface="HSE Sans" panose="02000000000000000000" pitchFamily="2" charset="0"/>
               </a:rPr>
               <a:t>Сравнивались 6 конфигураций «бэкбон × агрегатор» на RAVDESS. Выбран </a:t>
             </a:r>
             <a:r>
               <a:rPr lang="en-US" sz="1400" b="1" dirty="0">
-                <a:solidFill>
-                  <a:srgbClr val="C0392B"/>
-                </a:solidFill>
                 <a:latin typeface="HSE Sans"/>
               </a:rPr>
               <a:t>EmotiEffNet + BiLSTM</a:t>
             </a:r>
             <a:r>
               <a:rPr lang="ru-RU" sz="1400" dirty="0">
-                <a:solidFill>
-                  <a:srgbClr val="1A1A1A"/>
-                </a:solidFill>
                 <a:latin typeface="HSE Sans" panose="02000000000000000000" pitchFamily="2" charset="0"/>
               </a:rPr>
               <a:t> (0,683 acc / 0,671 F1).</a:t>
@@ -35551,7 +34564,7 @@
             <a:r>
               <a:rPr lang="en-US" sz="1400" b="1" dirty="0" err="1">
                 <a:solidFill>
-                  <a:srgbClr val="2E86C1"/>
+                  <a:srgbClr val="00B0F0"/>
                 </a:solidFill>
                 <a:latin typeface="HSE Sans"/>
               </a:rPr>
@@ -35560,7 +34573,7 @@
             <a:r>
               <a:rPr lang="en-US" sz="1400" b="1" dirty="0">
                 <a:solidFill>
-                  <a:srgbClr val="2E86C1"/>
+                  <a:srgbClr val="00B0F0"/>
                 </a:solidFill>
                 <a:latin typeface="HSE Sans"/>
               </a:rPr>
@@ -35569,7 +34582,7 @@
             <a:r>
               <a:rPr lang="en-US" sz="1400" b="1" dirty="0" err="1">
                 <a:solidFill>
-                  <a:srgbClr val="2E86C1"/>
+                  <a:srgbClr val="00B0F0"/>
                 </a:solidFill>
                 <a:latin typeface="HSE Sans"/>
               </a:rPr>
@@ -35578,7 +34591,7 @@
             <a:r>
               <a:rPr lang="en-US" sz="1400" b="1" dirty="0">
                 <a:solidFill>
-                  <a:srgbClr val="2E86C1"/>
+                  <a:srgbClr val="00B0F0"/>
                 </a:solidFill>
                 <a:latin typeface="HSE Sans"/>
               </a:rPr>
@@ -35587,7 +34600,7 @@
             <a:r>
               <a:rPr lang="en-US" sz="1400" b="1" dirty="0" err="1">
                 <a:solidFill>
-                  <a:srgbClr val="2E86C1"/>
+                  <a:srgbClr val="00B0F0"/>
                 </a:solidFill>
                 <a:latin typeface="HSE Sans"/>
               </a:rPr>
@@ -35596,7 +34609,7 @@
             <a:r>
               <a:rPr lang="en-US" sz="1400" b="1" dirty="0">
                 <a:solidFill>
-                  <a:srgbClr val="2E86C1"/>
+                  <a:srgbClr val="00B0F0"/>
                 </a:solidFill>
                 <a:latin typeface="HSE Sans"/>
               </a:rPr>
@@ -35605,7 +34618,7 @@
             <a:r>
               <a:rPr lang="en-US" sz="1400" b="1" dirty="0" err="1">
                 <a:solidFill>
-                  <a:srgbClr val="2E86C1"/>
+                  <a:srgbClr val="00B0F0"/>
                 </a:solidFill>
                 <a:latin typeface="HSE Sans"/>
               </a:rPr>
@@ -35614,7 +34627,7 @@
             <a:r>
               <a:rPr lang="en-US" sz="1400" b="1" dirty="0">
                 <a:solidFill>
-                  <a:srgbClr val="2E86C1"/>
+                  <a:srgbClr val="00B0F0"/>
                 </a:solidFill>
                 <a:latin typeface="HSE Sans"/>
               </a:rPr>
@@ -35634,44 +34647,29 @@
             </a:pPr>
             <a:r>
               <a:rPr lang="en-US" sz="1400" b="1" dirty="0">
-                <a:solidFill>
-                  <a:srgbClr val="1A1A1A"/>
-                </a:solidFill>
                 <a:latin typeface="HSE Sans"/>
               </a:rPr>
               <a:t>MobileNetV3-Small</a:t>
             </a:r>
             <a:r>
               <a:rPr lang="ru-RU" sz="1400" dirty="0">
-                <a:solidFill>
-                  <a:srgbClr val="1A1A1A"/>
-                </a:solidFill>
                 <a:latin typeface="HSE Sans" panose="02000000000000000000" pitchFamily="2" charset="0"/>
               </a:rPr>
               <a:t> — лёгкий мобильный </a:t>
             </a:r>
             <a:r>
               <a:rPr lang="ru-RU" sz="1400" dirty="0" err="1">
-                <a:solidFill>
-                  <a:srgbClr val="1A1A1A"/>
-                </a:solidFill>
                 <a:latin typeface="HSE Sans" panose="02000000000000000000" pitchFamily="2" charset="0"/>
               </a:rPr>
               <a:t>бэкбон</a:t>
             </a:r>
             <a:r>
               <a:rPr lang="ru-RU" sz="1400" dirty="0">
-                <a:solidFill>
-                  <a:srgbClr val="1A1A1A"/>
-                </a:solidFill>
                 <a:latin typeface="HSE Sans" panose="02000000000000000000" pitchFamily="2" charset="0"/>
               </a:rPr>
               <a:t>; заметно слабее</a:t>
             </a:r>
             <a:endParaRPr lang="en-US" sz="1400" b="1" dirty="0">
-              <a:solidFill>
-                <a:srgbClr val="C0392B"/>
-              </a:solidFill>
               <a:latin typeface="HSE Sans"/>
             </a:endParaRPr>
           </a:p>
@@ -35688,18 +34686,12 @@
             </a:pPr>
             <a:r>
               <a:rPr lang="en-US" sz="1400" b="1" dirty="0">
-                <a:solidFill>
-                  <a:srgbClr val="C0392B"/>
-                </a:solidFill>
                 <a:latin typeface="HSE Sans"/>
               </a:rPr>
               <a:t>EmotiEffNet</a:t>
             </a:r>
             <a:r>
               <a:rPr lang="ru-RU" sz="1400" dirty="0">
-                <a:solidFill>
-                  <a:srgbClr val="1A1A1A"/>
-                </a:solidFill>
                 <a:latin typeface="HSE Sans" panose="02000000000000000000" pitchFamily="2" charset="0"/>
               </a:rPr>
               <a:t> — EfficientNet-B0, дообучен на AffectNet; точнее всех</a:t>
@@ -35744,7 +34736,7 @@
             <a:r>
               <a:rPr lang="ru-RU" sz="1400" b="1" dirty="0">
                 <a:solidFill>
-                  <a:srgbClr val="2E86C1"/>
+                  <a:srgbClr val="00B0F0"/>
                 </a:solidFill>
                 <a:latin typeface="HSE Sans"/>
               </a:rPr>
@@ -35753,7 +34745,7 @@
             <a:r>
               <a:rPr lang="en-US" sz="1400" b="1" dirty="0">
                 <a:solidFill>
-                  <a:srgbClr val="2E86C1"/>
+                  <a:srgbClr val="00B0F0"/>
                 </a:solidFill>
                 <a:latin typeface="HSE Sans"/>
               </a:rPr>
@@ -35762,7 +34754,7 @@
             <a:r>
               <a:rPr lang="en-US" sz="1400" b="1" dirty="0" err="1">
                 <a:solidFill>
-                  <a:srgbClr val="2E86C1"/>
+                  <a:srgbClr val="00B0F0"/>
                 </a:solidFill>
                 <a:latin typeface="HSE Sans"/>
               </a:rPr>
@@ -35771,7 +34763,7 @@
             <a:r>
               <a:rPr lang="en-US" sz="1400" b="1" dirty="0">
                 <a:solidFill>
-                  <a:srgbClr val="2E86C1"/>
+                  <a:srgbClr val="00B0F0"/>
                 </a:solidFill>
                 <a:latin typeface="HSE Sans"/>
               </a:rPr>
@@ -35791,18 +34783,12 @@
             </a:pPr>
             <a:r>
               <a:rPr lang="en-US" sz="1400" b="1" dirty="0">
-                <a:solidFill>
-                  <a:srgbClr val="C0392B"/>
-                </a:solidFill>
                 <a:latin typeface="HSE Sans"/>
               </a:rPr>
               <a:t>BiLSTM</a:t>
             </a:r>
             <a:r>
               <a:rPr lang="ru-RU" sz="1400" dirty="0">
-                <a:solidFill>
-                  <a:srgbClr val="1A1A1A"/>
-                </a:solidFill>
                 <a:latin typeface="HSE Sans" panose="02000000000000000000" pitchFamily="2" charset="0"/>
               </a:rPr>
               <a:t> — двунаправленный LSTM; выбран в каскад</a:t>
@@ -35821,18 +34807,12 @@
             </a:pPr>
             <a:r>
               <a:rPr lang="en-US" sz="1400" b="1" dirty="0">
-                <a:solidFill>
-                  <a:srgbClr val="1A1A1A"/>
-                </a:solidFill>
                 <a:latin typeface="HSE Sans"/>
               </a:rPr>
               <a:t>BiGRU</a:t>
             </a:r>
             <a:r>
               <a:rPr lang="ru-RU" sz="1400" dirty="0">
-                <a:solidFill>
-                  <a:srgbClr val="1A1A1A"/>
-                </a:solidFill>
                 <a:latin typeface="HSE Sans" panose="02000000000000000000" pitchFamily="2" charset="0"/>
               </a:rPr>
               <a:t> — облегчённый аналог; качество сопоставимо</a:t>
@@ -35851,18 +34831,12 @@
             </a:pPr>
             <a:r>
               <a:rPr lang="en-US" sz="1400" b="1" dirty="0">
-                <a:solidFill>
-                  <a:srgbClr val="1A1A1A"/>
-                </a:solidFill>
                 <a:latin typeface="HSE Sans"/>
               </a:rPr>
               <a:t>TCN</a:t>
             </a:r>
             <a:r>
               <a:rPr lang="ru-RU" sz="1400" dirty="0">
-                <a:solidFill>
-                  <a:srgbClr val="1A1A1A"/>
-                </a:solidFill>
                 <a:latin typeface="HSE Sans" panose="02000000000000000000" pitchFamily="2" charset="0"/>
               </a:rPr>
               <a:t> — временные свёртки; ниже по качеству</a:t>
@@ -35948,6 +34922,911 @@
     <p:extLst>
       <p:ext uri="{BB962C8B-B14F-4D97-AF65-F5344CB8AC3E}">
         <p14:creationId xmlns:p14="http://schemas.microsoft.com/office/powerpoint/2010/main" val="1061531744"/>
+      </p:ext>
+    </p:extLst>
+  </p:cSld>
+  <p:clrMapOvr>
+    <a:masterClrMapping/>
+  </p:clrMapOvr>
+</p:sld>
+</file>
+
+<file path=ppt/slides/slide9.xml><?xml version="1.0" encoding="utf-8"?>
+<p:sld xmlns:a="http://schemas.openxmlformats.org/drawingml/2006/main" xmlns:r="http://schemas.openxmlformats.org/officeDocument/2006/relationships" xmlns:p="http://schemas.openxmlformats.org/presentationml/2006/main">
+  <p:cSld>
+    <p:spTree>
+      <p:nvGrpSpPr>
+        <p:cNvPr id="1" name=""/>
+        <p:cNvGrpSpPr/>
+        <p:nvPr/>
+      </p:nvGrpSpPr>
+      <p:grpSpPr>
+        <a:xfrm>
+          <a:off x="0" y="0"/>
+          <a:ext cx="0" cy="0"/>
+          <a:chOff x="0" y="0"/>
+          <a:chExt cx="0" cy="0"/>
+        </a:xfrm>
+      </p:grpSpPr>
+      <p:sp>
+        <p:nvSpPr>
+          <p:cNvPr id="10" name="Заголовок 2">
+            <a:extLst>
+              <a:ext uri="{FF2B5EF4-FFF2-40B4-BE49-F238E27FC236}">
+                <a16:creationId xmlns:a16="http://schemas.microsoft.com/office/drawing/2014/main" id="{9BF64647-BA7F-C64D-E3FA-FB6C83CF295F}"/>
+              </a:ext>
+            </a:extLst>
+          </p:cNvPr>
+          <p:cNvSpPr txBox="1">
+            <a:spLocks/>
+          </p:cNvSpPr>
+          <p:nvPr/>
+        </p:nvSpPr>
+        <p:spPr>
+          <a:xfrm>
+            <a:off x="666489" y="1160924"/>
+            <a:ext cx="5094599" cy="802343"/>
+          </a:xfrm>
+          <a:prstGeom prst="rect">
+            <a:avLst/>
+          </a:prstGeom>
+        </p:spPr>
+        <p:txBody>
+          <a:bodyPr vert="horz" lIns="0" tIns="0" rIns="0" bIns="0" rtlCol="0" anchor="t">
+            <a:normAutofit/>
+          </a:bodyPr>
+          <a:lstStyle>
+            <a:lvl1pPr algn="l" defTabSz="914400" rtl="0" eaLnBrk="1" latinLnBrk="0" hangingPunct="1">
+              <a:lnSpc>
+                <a:spcPct val="100000"/>
+              </a:lnSpc>
+              <a:spcBef>
+                <a:spcPct val="0"/>
+              </a:spcBef>
+              <a:buNone/>
+              <a:defRPr sz="2400" b="0" i="0" kern="1200">
+                <a:solidFill>
+                  <a:schemeClr val="tx1"/>
+                </a:solidFill>
+                <a:latin typeface="HSE Sans" panose="02000000000000000000" pitchFamily="2" charset="0"/>
+                <a:ea typeface="+mj-ea"/>
+                <a:cs typeface="+mj-cs"/>
+              </a:defRPr>
+            </a:lvl1pPr>
+          </a:lstStyle>
+          <a:p>
+            <a:r>
+              <a:rPr lang="ru-RU" b="1" dirty="0"/>
+              <a:t>Итоговая архитектура системы</a:t>
+            </a:r>
+          </a:p>
+        </p:txBody>
+      </p:sp>
+      <p:sp>
+        <p:nvSpPr>
+          <p:cNvPr id="17" name="Текст 4">
+            <a:extLst>
+              <a:ext uri="{FF2B5EF4-FFF2-40B4-BE49-F238E27FC236}">
+                <a16:creationId xmlns:a16="http://schemas.microsoft.com/office/drawing/2014/main" id="{C6642543-AAFE-405A-C69F-4ADB20EF03A0}"/>
+              </a:ext>
+            </a:extLst>
+          </p:cNvPr>
+          <p:cNvSpPr txBox="1">
+            <a:spLocks/>
+          </p:cNvSpPr>
+          <p:nvPr/>
+        </p:nvSpPr>
+        <p:spPr>
+          <a:xfrm>
+            <a:off x="1143689" y="540904"/>
+            <a:ext cx="2070100" cy="415925"/>
+          </a:xfrm>
+          <a:prstGeom prst="rect">
+            <a:avLst/>
+          </a:prstGeom>
+        </p:spPr>
+        <p:txBody>
+          <a:bodyPr vert="horz" lIns="0" tIns="0" rIns="0" bIns="0" rtlCol="0">
+            <a:noAutofit/>
+          </a:bodyPr>
+          <a:lstStyle>
+            <a:lvl1pPr marL="0" marR="0" indent="0" algn="l" defTabSz="914400" rtl="0" eaLnBrk="1" fontAlgn="auto" latinLnBrk="0" hangingPunct="1">
+              <a:lnSpc>
+                <a:spcPct val="100000"/>
+              </a:lnSpc>
+              <a:spcBef>
+                <a:spcPts val="0"/>
+              </a:spcBef>
+              <a:spcAft>
+                <a:spcPts val="0"/>
+              </a:spcAft>
+              <a:buClrTx/>
+              <a:buSzTx/>
+              <a:buFont typeface="Arial" panose="020B0604020202020204" pitchFamily="34" charset="0"/>
+              <a:buNone/>
+              <a:tabLst/>
+              <a:defRPr sz="1000" b="0" i="0" kern="1200">
+                <a:solidFill>
+                  <a:schemeClr val="tx1"/>
+                </a:solidFill>
+                <a:latin typeface="HSE Sans" panose="02000000000000000000" pitchFamily="2" charset="0"/>
+                <a:ea typeface="+mn-ea"/>
+                <a:cs typeface="+mn-cs"/>
+              </a:defRPr>
+            </a:lvl1pPr>
+            <a:lvl2pPr marL="457200" indent="0" algn="l" defTabSz="914400" rtl="0" eaLnBrk="1" latinLnBrk="0" hangingPunct="1">
+              <a:lnSpc>
+                <a:spcPct val="100000"/>
+              </a:lnSpc>
+              <a:spcBef>
+                <a:spcPts val="500"/>
+              </a:spcBef>
+              <a:buFont typeface="Arial" panose="020B0604020202020204" pitchFamily="34" charset="0"/>
+              <a:buNone/>
+              <a:defRPr sz="1000" b="0" i="0" kern="1200">
+                <a:solidFill>
+                  <a:schemeClr val="tx1"/>
+                </a:solidFill>
+                <a:latin typeface="HSE Sans" panose="02000000000000000000" pitchFamily="2" charset="0"/>
+                <a:ea typeface="+mn-ea"/>
+                <a:cs typeface="+mn-cs"/>
+              </a:defRPr>
+            </a:lvl2pPr>
+            <a:lvl3pPr marL="914400" indent="0" algn="l" defTabSz="914400" rtl="0" eaLnBrk="1" latinLnBrk="0" hangingPunct="1">
+              <a:lnSpc>
+                <a:spcPct val="100000"/>
+              </a:lnSpc>
+              <a:spcBef>
+                <a:spcPts val="500"/>
+              </a:spcBef>
+              <a:buFont typeface="Arial" panose="020B0604020202020204" pitchFamily="34" charset="0"/>
+              <a:buNone/>
+              <a:defRPr sz="1000" b="0" i="0" kern="1200">
+                <a:solidFill>
+                  <a:schemeClr val="tx1"/>
+                </a:solidFill>
+                <a:latin typeface="HSE Sans" panose="02000000000000000000" pitchFamily="2" charset="0"/>
+                <a:ea typeface="+mn-ea"/>
+                <a:cs typeface="+mn-cs"/>
+              </a:defRPr>
+            </a:lvl3pPr>
+            <a:lvl4pPr marL="1371600" indent="0" algn="l" defTabSz="914400" rtl="0" eaLnBrk="1" latinLnBrk="0" hangingPunct="1">
+              <a:lnSpc>
+                <a:spcPct val="100000"/>
+              </a:lnSpc>
+              <a:spcBef>
+                <a:spcPts val="500"/>
+              </a:spcBef>
+              <a:buFont typeface="Arial" panose="020B0604020202020204" pitchFamily="34" charset="0"/>
+              <a:buNone/>
+              <a:defRPr sz="1000" b="0" i="0" kern="1200">
+                <a:solidFill>
+                  <a:schemeClr val="tx1"/>
+                </a:solidFill>
+                <a:latin typeface="HSE Sans" panose="02000000000000000000" pitchFamily="2" charset="0"/>
+                <a:ea typeface="+mn-ea"/>
+                <a:cs typeface="+mn-cs"/>
+              </a:defRPr>
+            </a:lvl4pPr>
+            <a:lvl5pPr marL="1828800" indent="0" algn="l" defTabSz="914400" rtl="0" eaLnBrk="1" latinLnBrk="0" hangingPunct="1">
+              <a:lnSpc>
+                <a:spcPct val="100000"/>
+              </a:lnSpc>
+              <a:spcBef>
+                <a:spcPts val="500"/>
+              </a:spcBef>
+              <a:buFont typeface="Arial" panose="020B0604020202020204" pitchFamily="34" charset="0"/>
+              <a:buNone/>
+              <a:defRPr sz="1000" b="0" i="0" kern="1200">
+                <a:solidFill>
+                  <a:schemeClr val="tx1"/>
+                </a:solidFill>
+                <a:latin typeface="HSE Sans" panose="02000000000000000000" pitchFamily="2" charset="0"/>
+                <a:ea typeface="+mn-ea"/>
+                <a:cs typeface="+mn-cs"/>
+              </a:defRPr>
+            </a:lvl5pPr>
+            <a:lvl6pPr marL="2514600" indent="-228600" algn="l" defTabSz="914400" rtl="0" eaLnBrk="1" latinLnBrk="0" hangingPunct="1">
+              <a:lnSpc>
+                <a:spcPct val="90000"/>
+              </a:lnSpc>
+              <a:spcBef>
+                <a:spcPts val="500"/>
+              </a:spcBef>
+              <a:buFont typeface="Arial" panose="020B0604020202020204" pitchFamily="34" charset="0"/>
+              <a:buChar char="•"/>
+              <a:defRPr sz="1800" kern="1200">
+                <a:solidFill>
+                  <a:schemeClr val="tx1"/>
+                </a:solidFill>
+                <a:latin typeface="+mn-lt"/>
+                <a:ea typeface="+mn-ea"/>
+                <a:cs typeface="+mn-cs"/>
+              </a:defRPr>
+            </a:lvl6pPr>
+            <a:lvl7pPr marL="2971800" indent="-228600" algn="l" defTabSz="914400" rtl="0" eaLnBrk="1" latinLnBrk="0" hangingPunct="1">
+              <a:lnSpc>
+                <a:spcPct val="90000"/>
+              </a:lnSpc>
+              <a:spcBef>
+                <a:spcPts val="500"/>
+              </a:spcBef>
+              <a:buFont typeface="Arial" panose="020B0604020202020204" pitchFamily="34" charset="0"/>
+              <a:buChar char="•"/>
+              <a:defRPr sz="1800" kern="1200">
+                <a:solidFill>
+                  <a:schemeClr val="tx1"/>
+                </a:solidFill>
+                <a:latin typeface="+mn-lt"/>
+                <a:ea typeface="+mn-ea"/>
+                <a:cs typeface="+mn-cs"/>
+              </a:defRPr>
+            </a:lvl7pPr>
+            <a:lvl8pPr marL="3429000" indent="-228600" algn="l" defTabSz="914400" rtl="0" eaLnBrk="1" latinLnBrk="0" hangingPunct="1">
+              <a:lnSpc>
+                <a:spcPct val="90000"/>
+              </a:lnSpc>
+              <a:spcBef>
+                <a:spcPts val="500"/>
+              </a:spcBef>
+              <a:buFont typeface="Arial" panose="020B0604020202020204" pitchFamily="34" charset="0"/>
+              <a:buChar char="•"/>
+              <a:defRPr sz="1800" kern="1200">
+                <a:solidFill>
+                  <a:schemeClr val="tx1"/>
+                </a:solidFill>
+                <a:latin typeface="+mn-lt"/>
+                <a:ea typeface="+mn-ea"/>
+                <a:cs typeface="+mn-cs"/>
+              </a:defRPr>
+            </a:lvl8pPr>
+            <a:lvl9pPr marL="3886200" indent="-228600" algn="l" defTabSz="914400" rtl="0" eaLnBrk="1" latinLnBrk="0" hangingPunct="1">
+              <a:lnSpc>
+                <a:spcPct val="90000"/>
+              </a:lnSpc>
+              <a:spcBef>
+                <a:spcPts val="500"/>
+              </a:spcBef>
+              <a:buFont typeface="Arial" panose="020B0604020202020204" pitchFamily="34" charset="0"/>
+              <a:buChar char="•"/>
+              <a:defRPr sz="1800" kern="1200">
+                <a:solidFill>
+                  <a:schemeClr val="tx1"/>
+                </a:solidFill>
+                <a:latin typeface="+mn-lt"/>
+                <a:ea typeface="+mn-ea"/>
+                <a:cs typeface="+mn-cs"/>
+              </a:defRPr>
+            </a:lvl9pPr>
+          </a:lstStyle>
+          <a:p>
+            <a:r>
+              <a:rPr lang="ru-RU" dirty="0"/>
+              <a:t>Факультет информатики, математики и компьютерных наук</a:t>
+            </a:r>
+          </a:p>
+        </p:txBody>
+      </p:sp>
+      <p:sp>
+        <p:nvSpPr>
+          <p:cNvPr id="18" name="Текст 5">
+            <a:extLst>
+              <a:ext uri="{FF2B5EF4-FFF2-40B4-BE49-F238E27FC236}">
+                <a16:creationId xmlns:a16="http://schemas.microsoft.com/office/drawing/2014/main" id="{4949D8FC-408D-1D67-134C-9A8B217B2D50}"/>
+              </a:ext>
+            </a:extLst>
+          </p:cNvPr>
+          <p:cNvSpPr txBox="1">
+            <a:spLocks/>
+          </p:cNvSpPr>
+          <p:nvPr/>
+        </p:nvSpPr>
+        <p:spPr>
+          <a:xfrm>
+            <a:off x="3459162" y="548720"/>
+            <a:ext cx="2341003" cy="408109"/>
+          </a:xfrm>
+          <a:prstGeom prst="rect">
+            <a:avLst/>
+          </a:prstGeom>
+        </p:spPr>
+        <p:txBody>
+          <a:bodyPr vert="horz" lIns="0" tIns="0" rIns="0" bIns="0" rtlCol="0">
+            <a:noAutofit/>
+          </a:bodyPr>
+          <a:lstStyle>
+            <a:lvl1pPr marL="0" indent="0" algn="l" defTabSz="914400" rtl="0" eaLnBrk="1" latinLnBrk="0" hangingPunct="1">
+              <a:lnSpc>
+                <a:spcPct val="100000"/>
+              </a:lnSpc>
+              <a:spcBef>
+                <a:spcPts val="0"/>
+              </a:spcBef>
+              <a:buFont typeface="Arial" panose="020B0604020202020204" pitchFamily="34" charset="0"/>
+              <a:buNone/>
+              <a:defRPr sz="1000" b="0" i="0" kern="1200">
+                <a:solidFill>
+                  <a:srgbClr val="0E2D69"/>
+                </a:solidFill>
+                <a:latin typeface="HSE Sans" panose="02000000000000000000" pitchFamily="2" charset="0"/>
+                <a:ea typeface="+mn-ea"/>
+                <a:cs typeface="+mn-cs"/>
+              </a:defRPr>
+            </a:lvl1pPr>
+            <a:lvl2pPr marL="457200" indent="0" algn="l" defTabSz="914400" rtl="0" eaLnBrk="1" latinLnBrk="0" hangingPunct="1">
+              <a:lnSpc>
+                <a:spcPct val="90000"/>
+              </a:lnSpc>
+              <a:spcBef>
+                <a:spcPts val="500"/>
+              </a:spcBef>
+              <a:buFont typeface="Arial" panose="020B0604020202020204" pitchFamily="34" charset="0"/>
+              <a:buNone/>
+              <a:defRPr sz="1000" b="0" i="0" kern="1200">
+                <a:solidFill>
+                  <a:srgbClr val="0E2D69"/>
+                </a:solidFill>
+                <a:latin typeface="HSE Sans" panose="02000000000000000000" pitchFamily="2" charset="0"/>
+                <a:ea typeface="+mn-ea"/>
+                <a:cs typeface="+mn-cs"/>
+              </a:defRPr>
+            </a:lvl2pPr>
+            <a:lvl3pPr marL="914400" indent="0" algn="l" defTabSz="914400" rtl="0" eaLnBrk="1" latinLnBrk="0" hangingPunct="1">
+              <a:lnSpc>
+                <a:spcPct val="90000"/>
+              </a:lnSpc>
+              <a:spcBef>
+                <a:spcPts val="500"/>
+              </a:spcBef>
+              <a:buFont typeface="Arial" panose="020B0604020202020204" pitchFamily="34" charset="0"/>
+              <a:buNone/>
+              <a:defRPr sz="1000" b="0" i="0" kern="1200">
+                <a:solidFill>
+                  <a:srgbClr val="0E2D69"/>
+                </a:solidFill>
+                <a:latin typeface="HSE Sans" panose="02000000000000000000" pitchFamily="2" charset="0"/>
+                <a:ea typeface="+mn-ea"/>
+                <a:cs typeface="+mn-cs"/>
+              </a:defRPr>
+            </a:lvl3pPr>
+            <a:lvl4pPr marL="1371600" indent="0" algn="l" defTabSz="914400" rtl="0" eaLnBrk="1" latinLnBrk="0" hangingPunct="1">
+              <a:lnSpc>
+                <a:spcPct val="90000"/>
+              </a:lnSpc>
+              <a:spcBef>
+                <a:spcPts val="500"/>
+              </a:spcBef>
+              <a:buFont typeface="Arial" panose="020B0604020202020204" pitchFamily="34" charset="0"/>
+              <a:buNone/>
+              <a:defRPr sz="1000" b="0" i="0" kern="1200">
+                <a:solidFill>
+                  <a:srgbClr val="0E2D69"/>
+                </a:solidFill>
+                <a:latin typeface="HSE Sans" panose="02000000000000000000" pitchFamily="2" charset="0"/>
+                <a:ea typeface="+mn-ea"/>
+                <a:cs typeface="+mn-cs"/>
+              </a:defRPr>
+            </a:lvl4pPr>
+            <a:lvl5pPr marL="1828800" indent="0" algn="l" defTabSz="914400" rtl="0" eaLnBrk="1" latinLnBrk="0" hangingPunct="1">
+              <a:lnSpc>
+                <a:spcPct val="90000"/>
+              </a:lnSpc>
+              <a:spcBef>
+                <a:spcPts val="500"/>
+              </a:spcBef>
+              <a:buFont typeface="Arial" panose="020B0604020202020204" pitchFamily="34" charset="0"/>
+              <a:buNone/>
+              <a:defRPr sz="1000" b="0" i="0" kern="1200">
+                <a:solidFill>
+                  <a:srgbClr val="0E2D69"/>
+                </a:solidFill>
+                <a:latin typeface="HSE Sans" panose="02000000000000000000" pitchFamily="2" charset="0"/>
+                <a:ea typeface="+mn-ea"/>
+                <a:cs typeface="+mn-cs"/>
+              </a:defRPr>
+            </a:lvl5pPr>
+            <a:lvl6pPr marL="2514600" indent="-228600" algn="l" defTabSz="914400" rtl="0" eaLnBrk="1" latinLnBrk="0" hangingPunct="1">
+              <a:lnSpc>
+                <a:spcPct val="90000"/>
+              </a:lnSpc>
+              <a:spcBef>
+                <a:spcPts val="500"/>
+              </a:spcBef>
+              <a:buFont typeface="Arial" panose="020B0604020202020204" pitchFamily="34" charset="0"/>
+              <a:buChar char="•"/>
+              <a:defRPr sz="1800" kern="1200">
+                <a:solidFill>
+                  <a:schemeClr val="tx1"/>
+                </a:solidFill>
+                <a:latin typeface="+mn-lt"/>
+                <a:ea typeface="+mn-ea"/>
+                <a:cs typeface="+mn-cs"/>
+              </a:defRPr>
+            </a:lvl6pPr>
+            <a:lvl7pPr marL="2971800" indent="-228600" algn="l" defTabSz="914400" rtl="0" eaLnBrk="1" latinLnBrk="0" hangingPunct="1">
+              <a:lnSpc>
+                <a:spcPct val="90000"/>
+              </a:lnSpc>
+              <a:spcBef>
+                <a:spcPts val="500"/>
+              </a:spcBef>
+              <a:buFont typeface="Arial" panose="020B0604020202020204" pitchFamily="34" charset="0"/>
+              <a:buChar char="•"/>
+              <a:defRPr sz="1800" kern="1200">
+                <a:solidFill>
+                  <a:schemeClr val="tx1"/>
+                </a:solidFill>
+                <a:latin typeface="+mn-lt"/>
+                <a:ea typeface="+mn-ea"/>
+                <a:cs typeface="+mn-cs"/>
+              </a:defRPr>
+            </a:lvl7pPr>
+            <a:lvl8pPr marL="3429000" indent="-228600" algn="l" defTabSz="914400" rtl="0" eaLnBrk="1" latinLnBrk="0" hangingPunct="1">
+              <a:lnSpc>
+                <a:spcPct val="90000"/>
+              </a:lnSpc>
+              <a:spcBef>
+                <a:spcPts val="500"/>
+              </a:spcBef>
+              <a:buFont typeface="Arial" panose="020B0604020202020204" pitchFamily="34" charset="0"/>
+              <a:buChar char="•"/>
+              <a:defRPr sz="1800" kern="1200">
+                <a:solidFill>
+                  <a:schemeClr val="tx1"/>
+                </a:solidFill>
+                <a:latin typeface="+mn-lt"/>
+                <a:ea typeface="+mn-ea"/>
+                <a:cs typeface="+mn-cs"/>
+              </a:defRPr>
+            </a:lvl8pPr>
+            <a:lvl9pPr marL="3886200" indent="-228600" algn="l" defTabSz="914400" rtl="0" eaLnBrk="1" latinLnBrk="0" hangingPunct="1">
+              <a:lnSpc>
+                <a:spcPct val="90000"/>
+              </a:lnSpc>
+              <a:spcBef>
+                <a:spcPts val="500"/>
+              </a:spcBef>
+              <a:buFont typeface="Arial" panose="020B0604020202020204" pitchFamily="34" charset="0"/>
+              <a:buChar char="•"/>
+              <a:defRPr sz="1800" kern="1200">
+                <a:solidFill>
+                  <a:schemeClr val="tx1"/>
+                </a:solidFill>
+                <a:latin typeface="+mn-lt"/>
+                <a:ea typeface="+mn-ea"/>
+                <a:cs typeface="+mn-cs"/>
+              </a:defRPr>
+            </a:lvl9pPr>
+          </a:lstStyle>
+          <a:p>
+            <a:r>
+              <a:rPr lang="ru-RU" dirty="0"/>
+              <a:t>Классификация выражений лиц с детектированием эмоций в речи</a:t>
+            </a:r>
+          </a:p>
+        </p:txBody>
+      </p:sp>
+      <p:sp>
+        <p:nvSpPr>
+          <p:cNvPr id="19" name="Текст 6">
+            <a:extLst>
+              <a:ext uri="{FF2B5EF4-FFF2-40B4-BE49-F238E27FC236}">
+                <a16:creationId xmlns:a16="http://schemas.microsoft.com/office/drawing/2014/main" id="{C38E8207-B0A4-013A-867A-665C45ADC6D4}"/>
+              </a:ext>
+            </a:extLst>
+          </p:cNvPr>
+          <p:cNvSpPr txBox="1">
+            <a:spLocks/>
+          </p:cNvSpPr>
+          <p:nvPr/>
+        </p:nvSpPr>
+        <p:spPr>
+          <a:xfrm>
+            <a:off x="6259892" y="548720"/>
+            <a:ext cx="2070100" cy="408109"/>
+          </a:xfrm>
+          <a:prstGeom prst="rect">
+            <a:avLst/>
+          </a:prstGeom>
+        </p:spPr>
+        <p:txBody>
+          <a:bodyPr vert="horz" lIns="0" tIns="0" rIns="0" bIns="0" rtlCol="0">
+            <a:noAutofit/>
+          </a:bodyPr>
+          <a:lstStyle>
+            <a:lvl1pPr marL="0" indent="0" algn="l" defTabSz="914400" rtl="0" eaLnBrk="1" latinLnBrk="0" hangingPunct="1">
+              <a:lnSpc>
+                <a:spcPct val="100000"/>
+              </a:lnSpc>
+              <a:spcBef>
+                <a:spcPts val="0"/>
+              </a:spcBef>
+              <a:buFont typeface="Arial" panose="020B0604020202020204" pitchFamily="34" charset="0"/>
+              <a:buNone/>
+              <a:defRPr sz="1000" b="0" i="0" kern="1200">
+                <a:solidFill>
+                  <a:srgbClr val="0E2D69"/>
+                </a:solidFill>
+                <a:latin typeface="HSE Sans" panose="02000000000000000000" pitchFamily="2" charset="0"/>
+                <a:ea typeface="+mn-ea"/>
+                <a:cs typeface="+mn-cs"/>
+              </a:defRPr>
+            </a:lvl1pPr>
+            <a:lvl2pPr marL="457200" indent="0" algn="l" defTabSz="914400" rtl="0" eaLnBrk="1" latinLnBrk="0" hangingPunct="1">
+              <a:lnSpc>
+                <a:spcPct val="90000"/>
+              </a:lnSpc>
+              <a:spcBef>
+                <a:spcPts val="500"/>
+              </a:spcBef>
+              <a:buFont typeface="Arial" panose="020B0604020202020204" pitchFamily="34" charset="0"/>
+              <a:buNone/>
+              <a:defRPr sz="1000" b="0" i="0" kern="1200">
+                <a:solidFill>
+                  <a:srgbClr val="0E2D69"/>
+                </a:solidFill>
+                <a:latin typeface="HSE Sans" panose="02000000000000000000" pitchFamily="2" charset="0"/>
+                <a:ea typeface="+mn-ea"/>
+                <a:cs typeface="+mn-cs"/>
+              </a:defRPr>
+            </a:lvl2pPr>
+            <a:lvl3pPr marL="914400" indent="0" algn="l" defTabSz="914400" rtl="0" eaLnBrk="1" latinLnBrk="0" hangingPunct="1">
+              <a:lnSpc>
+                <a:spcPct val="90000"/>
+              </a:lnSpc>
+              <a:spcBef>
+                <a:spcPts val="500"/>
+              </a:spcBef>
+              <a:buFont typeface="Arial" panose="020B0604020202020204" pitchFamily="34" charset="0"/>
+              <a:buNone/>
+              <a:defRPr sz="1000" b="0" i="0" kern="1200">
+                <a:solidFill>
+                  <a:srgbClr val="0E2D69"/>
+                </a:solidFill>
+                <a:latin typeface="HSE Sans" panose="02000000000000000000" pitchFamily="2" charset="0"/>
+                <a:ea typeface="+mn-ea"/>
+                <a:cs typeface="+mn-cs"/>
+              </a:defRPr>
+            </a:lvl3pPr>
+            <a:lvl4pPr marL="1371600" indent="0" algn="l" defTabSz="914400" rtl="0" eaLnBrk="1" latinLnBrk="0" hangingPunct="1">
+              <a:lnSpc>
+                <a:spcPct val="90000"/>
+              </a:lnSpc>
+              <a:spcBef>
+                <a:spcPts val="500"/>
+              </a:spcBef>
+              <a:buFont typeface="Arial" panose="020B0604020202020204" pitchFamily="34" charset="0"/>
+              <a:buNone/>
+              <a:defRPr sz="1000" b="0" i="0" kern="1200">
+                <a:solidFill>
+                  <a:srgbClr val="0E2D69"/>
+                </a:solidFill>
+                <a:latin typeface="HSE Sans" panose="02000000000000000000" pitchFamily="2" charset="0"/>
+                <a:ea typeface="+mn-ea"/>
+                <a:cs typeface="+mn-cs"/>
+              </a:defRPr>
+            </a:lvl4pPr>
+            <a:lvl5pPr marL="1828800" indent="0" algn="l" defTabSz="914400" rtl="0" eaLnBrk="1" latinLnBrk="0" hangingPunct="1">
+              <a:lnSpc>
+                <a:spcPct val="90000"/>
+              </a:lnSpc>
+              <a:spcBef>
+                <a:spcPts val="500"/>
+              </a:spcBef>
+              <a:buFont typeface="Arial" panose="020B0604020202020204" pitchFamily="34" charset="0"/>
+              <a:buNone/>
+              <a:defRPr sz="1000" b="0" i="0" kern="1200">
+                <a:solidFill>
+                  <a:srgbClr val="0E2D69"/>
+                </a:solidFill>
+                <a:latin typeface="HSE Sans" panose="02000000000000000000" pitchFamily="2" charset="0"/>
+                <a:ea typeface="+mn-ea"/>
+                <a:cs typeface="+mn-cs"/>
+              </a:defRPr>
+            </a:lvl5pPr>
+            <a:lvl6pPr marL="2514600" indent="-228600" algn="l" defTabSz="914400" rtl="0" eaLnBrk="1" latinLnBrk="0" hangingPunct="1">
+              <a:lnSpc>
+                <a:spcPct val="90000"/>
+              </a:lnSpc>
+              <a:spcBef>
+                <a:spcPts val="500"/>
+              </a:spcBef>
+              <a:buFont typeface="Arial" panose="020B0604020202020204" pitchFamily="34" charset="0"/>
+              <a:buChar char="•"/>
+              <a:defRPr sz="1800" kern="1200">
+                <a:solidFill>
+                  <a:schemeClr val="tx1"/>
+                </a:solidFill>
+                <a:latin typeface="+mn-lt"/>
+                <a:ea typeface="+mn-ea"/>
+                <a:cs typeface="+mn-cs"/>
+              </a:defRPr>
+            </a:lvl6pPr>
+            <a:lvl7pPr marL="2971800" indent="-228600" algn="l" defTabSz="914400" rtl="0" eaLnBrk="1" latinLnBrk="0" hangingPunct="1">
+              <a:lnSpc>
+                <a:spcPct val="90000"/>
+              </a:lnSpc>
+              <a:spcBef>
+                <a:spcPts val="500"/>
+              </a:spcBef>
+              <a:buFont typeface="Arial" panose="020B0604020202020204" pitchFamily="34" charset="0"/>
+              <a:buChar char="•"/>
+              <a:defRPr sz="1800" kern="1200">
+                <a:solidFill>
+                  <a:schemeClr val="tx1"/>
+                </a:solidFill>
+                <a:latin typeface="+mn-lt"/>
+                <a:ea typeface="+mn-ea"/>
+                <a:cs typeface="+mn-cs"/>
+              </a:defRPr>
+            </a:lvl7pPr>
+            <a:lvl8pPr marL="3429000" indent="-228600" algn="l" defTabSz="914400" rtl="0" eaLnBrk="1" latinLnBrk="0" hangingPunct="1">
+              <a:lnSpc>
+                <a:spcPct val="90000"/>
+              </a:lnSpc>
+              <a:spcBef>
+                <a:spcPts val="500"/>
+              </a:spcBef>
+              <a:buFont typeface="Arial" panose="020B0604020202020204" pitchFamily="34" charset="0"/>
+              <a:buChar char="•"/>
+              <a:defRPr sz="1800" kern="1200">
+                <a:solidFill>
+                  <a:schemeClr val="tx1"/>
+                </a:solidFill>
+                <a:latin typeface="+mn-lt"/>
+                <a:ea typeface="+mn-ea"/>
+                <a:cs typeface="+mn-cs"/>
+              </a:defRPr>
+            </a:lvl8pPr>
+            <a:lvl9pPr marL="3886200" indent="-228600" algn="l" defTabSz="914400" rtl="0" eaLnBrk="1" latinLnBrk="0" hangingPunct="1">
+              <a:lnSpc>
+                <a:spcPct val="90000"/>
+              </a:lnSpc>
+              <a:spcBef>
+                <a:spcPts val="500"/>
+              </a:spcBef>
+              <a:buFont typeface="Arial" panose="020B0604020202020204" pitchFamily="34" charset="0"/>
+              <a:buChar char="•"/>
+              <a:defRPr sz="1800" kern="1200">
+                <a:solidFill>
+                  <a:schemeClr val="tx1"/>
+                </a:solidFill>
+                <a:latin typeface="+mn-lt"/>
+                <a:ea typeface="+mn-ea"/>
+                <a:cs typeface="+mn-cs"/>
+              </a:defRPr>
+            </a:lvl9pPr>
+          </a:lstStyle>
+          <a:p>
+            <a:r>
+              <a:rPr lang="ru-RU" dirty="0"/>
+              <a:t>Канделов Дамир Русланович </a:t>
+            </a:r>
+          </a:p>
+          <a:p>
+            <a:r>
+              <a:rPr lang="ru-RU" dirty="0"/>
+              <a:t>Группа: 22ПИ-1</a:t>
+            </a:r>
+          </a:p>
+        </p:txBody>
+      </p:sp>
+      <p:sp>
+        <p:nvSpPr>
+          <p:cNvPr id="4" name="Rectangle 2">
+            <a:extLst>
+              <a:ext uri="{FF2B5EF4-FFF2-40B4-BE49-F238E27FC236}">
+                <a16:creationId xmlns:a16="http://schemas.microsoft.com/office/drawing/2014/main" id="{0F0DA963-E9B5-6F1D-7BB4-EC614E37D956}"/>
+              </a:ext>
+            </a:extLst>
+          </p:cNvPr>
+          <p:cNvSpPr>
+            <a:spLocks noChangeArrowheads="1"/>
+          </p:cNvSpPr>
+          <p:nvPr/>
+        </p:nvSpPr>
+        <p:spPr bwMode="auto">
+          <a:xfrm>
+            <a:off x="0" y="0"/>
+            <a:ext cx="12192000" cy="457200"/>
+          </a:xfrm>
+          <a:prstGeom prst="rect">
+            <a:avLst/>
+          </a:prstGeom>
+          <a:noFill/>
+          <a:ln>
+            <a:noFill/>
+          </a:ln>
+          <a:effectLst/>
+          <a:extLst>
+            <a:ext uri="{909E8E84-426E-40DD-AFC4-6F175D3DCCD1}">
+              <a14:hiddenFill xmlns:a14="http://schemas.microsoft.com/office/drawing/2010/main">
+                <a:solidFill>
+                  <a:schemeClr val="accent1"/>
+                </a:solidFill>
+              </a14:hiddenFill>
+            </a:ext>
+            <a:ext uri="{91240B29-F687-4F45-9708-019B960494DF}">
+              <a14:hiddenLine xmlns:a14="http://schemas.microsoft.com/office/drawing/2010/main" w="9525">
+                <a:solidFill>
+                  <a:schemeClr val="tx1"/>
+                </a:solidFill>
+                <a:miter lim="800000"/>
+                <a:headEnd/>
+                <a:tailEnd/>
+              </a14:hiddenLine>
+            </a:ext>
+            <a:ext uri="{AF507438-7753-43E0-B8FC-AC1667EBCBE1}">
+              <a14:hiddenEffects xmlns:a14="http://schemas.microsoft.com/office/drawing/2010/main">
+                <a:effectLst>
+                  <a:outerShdw dist="35921" dir="2700000" algn="ctr" rotWithShape="0">
+                    <a:schemeClr val="bg2"/>
+                  </a:outerShdw>
+                </a:effectLst>
+              </a14:hiddenEffects>
+            </a:ext>
+          </a:extLst>
+        </p:spPr>
+        <p:txBody>
+          <a:bodyPr vert="horz" wrap="none" lIns="91440" tIns="45720" rIns="91440" bIns="45720" numCol="1" anchor="ctr" anchorCtr="0" compatLnSpc="1">
+            <a:prstTxWarp prst="textNoShape">
+              <a:avLst/>
+            </a:prstTxWarp>
+            <a:spAutoFit/>
+          </a:bodyPr>
+          <a:lstStyle/>
+          <a:p>
+            <a:endParaRPr lang="en-RU"/>
+          </a:p>
+        </p:txBody>
+      </p:sp>
+      <p:sp>
+        <p:nvSpPr>
+          <p:cNvPr id="2" name="Intro7">
+            <a:extLst>
+              <a:ext uri="{FF2B5EF4-FFF2-40B4-BE49-F238E27FC236}">
+                <a16:creationId xmlns:a16="http://schemas.microsoft.com/office/drawing/2014/main" id="{186E8000-AD89-7442-A431-F1FCCEFC7CC5}"/>
+              </a:ext>
+            </a:extLst>
+          </p:cNvPr>
+          <p:cNvSpPr txBox="1"/>
+          <p:nvPr/>
+        </p:nvSpPr>
+        <p:spPr>
+          <a:xfrm>
+            <a:off x="666489" y="5460874"/>
+            <a:ext cx="10871200" cy="635000"/>
+          </a:xfrm>
+          <a:prstGeom prst="rect">
+            <a:avLst/>
+          </a:prstGeom>
+          <a:noFill/>
+        </p:spPr>
+        <p:txBody>
+          <a:bodyPr vertOverflow="overflow" vert="horz" wrap="square" lIns="50800" tIns="25400" rIns="50800" bIns="25400" rtlCol="0" anchor="t">
+            <a:noAutofit/>
+          </a:bodyPr>
+          <a:lstStyle/>
+          <a:p>
+            <a:pPr algn="l"/>
+            <a:r>
+              <a:rPr lang="en-US" sz="1600" dirty="0" err="1">
+                <a:latin typeface="HSE Sans"/>
+              </a:rPr>
+              <a:t>MelCNN</a:t>
+            </a:r>
+            <a:r>
+              <a:rPr lang="en-US" sz="1600" dirty="0">
+                <a:latin typeface="HSE Sans"/>
+              </a:rPr>
+              <a:t>-</a:t>
+            </a:r>
+            <a:r>
+              <a:rPr lang="ru-RU" sz="1600" dirty="0">
+                <a:latin typeface="HSE Sans" panose="02000000000000000000" pitchFamily="2" charset="0"/>
+              </a:rPr>
+              <a:t>гейт отсеивает нейтральные реплики; при эмоциональной речи активируется бимодальная голова </a:t>
+            </a:r>
+            <a:r>
+              <a:rPr lang="en-US" sz="1600" dirty="0" err="1">
+                <a:latin typeface="HSE Sans"/>
+              </a:rPr>
+              <a:t>BiLSTMBimodal</a:t>
+            </a:r>
+            <a:r>
+              <a:rPr lang="en-US" sz="1600" dirty="0">
+                <a:latin typeface="HSE Sans"/>
+              </a:rPr>
+              <a:t>. </a:t>
+            </a:r>
+            <a:r>
+              <a:rPr lang="ru-RU" sz="1600" dirty="0">
+                <a:latin typeface="HSE Sans" panose="02000000000000000000" pitchFamily="2" charset="0"/>
+              </a:rPr>
+              <a:t>Лог-мел спектрограмма переиспользуется гейтом и аудио-веткой.</a:t>
+            </a:r>
+            <a:endParaRPr lang="en-US" sz="1600" dirty="0">
+              <a:latin typeface="HSE Sans"/>
+            </a:endParaRPr>
+          </a:p>
+        </p:txBody>
+      </p:sp>
+      <p:pic>
+        <p:nvPicPr>
+          <p:cNvPr id="3" name="Picture 2">
+            <a:extLst>
+              <a:ext uri="{FF2B5EF4-FFF2-40B4-BE49-F238E27FC236}">
+                <a16:creationId xmlns:a16="http://schemas.microsoft.com/office/drawing/2014/main" id="{D4ACC085-AFBB-EDC2-67B8-EF7CE5FFD458}"/>
+              </a:ext>
+            </a:extLst>
+          </p:cNvPr>
+          <p:cNvPicPr>
+            <a:picLocks noChangeAspect="1"/>
+          </p:cNvPicPr>
+          <p:nvPr/>
+        </p:nvPicPr>
+        <p:blipFill>
+          <a:blip r:embed="rId2"/>
+          <a:srcRect l="649" t="2880" r="6791" b="28790"/>
+          <a:stretch>
+            <a:fillRect/>
+          </a:stretch>
+        </p:blipFill>
+        <p:spPr>
+          <a:xfrm>
+            <a:off x="1523671" y="1974246"/>
+            <a:ext cx="9144658" cy="2909508"/>
+          </a:xfrm>
+          <a:prstGeom prst="rect">
+            <a:avLst/>
+          </a:prstGeom>
+        </p:spPr>
+      </p:pic>
+      <p:sp>
+        <p:nvSpPr>
+          <p:cNvPr id="5" name="TextBox 4">
+            <a:extLst>
+              <a:ext uri="{FF2B5EF4-FFF2-40B4-BE49-F238E27FC236}">
+                <a16:creationId xmlns:a16="http://schemas.microsoft.com/office/drawing/2014/main" id="{C213FC0E-B3D7-0636-A3F8-5A3D1DF12920}"/>
+              </a:ext>
+            </a:extLst>
+          </p:cNvPr>
+          <p:cNvSpPr txBox="1"/>
+          <p:nvPr/>
+        </p:nvSpPr>
+        <p:spPr>
+          <a:xfrm>
+            <a:off x="4778781" y="4826714"/>
+            <a:ext cx="2962221" cy="307777"/>
+          </a:xfrm>
+          <a:prstGeom prst="rect">
+            <a:avLst/>
+          </a:prstGeom>
+          <a:noFill/>
+        </p:spPr>
+        <p:txBody>
+          <a:bodyPr wrap="none" rtlCol="0">
+            <a:spAutoFit/>
+          </a:bodyPr>
+          <a:lstStyle/>
+          <a:p>
+            <a:pPr algn="l"/>
+            <a:r>
+              <a:rPr lang="ru-RU" sz="1400" dirty="0">
+                <a:latin typeface="HSE Sans" panose="02000000000000000000" pitchFamily="2" charset="0"/>
+              </a:rPr>
+              <a:t>Архитектура предлагаемой системы</a:t>
+            </a:r>
+            <a:endParaRPr lang="en-US" sz="1400" dirty="0">
+              <a:latin typeface="HSE Sans" panose="02000000000000000000" pitchFamily="2" charset="0"/>
+            </a:endParaRPr>
+          </a:p>
+        </p:txBody>
+      </p:sp>
+    </p:spTree>
+    <p:extLst>
+      <p:ext uri="{BB962C8B-B14F-4D97-AF65-F5344CB8AC3E}">
+        <p14:creationId xmlns:p14="http://schemas.microsoft.com/office/powerpoint/2010/main" val="997165844"/>
       </p:ext>
     </p:extLst>
   </p:cSld>
@@ -36586,6 +36465,15 @@
 </file>
 
 <file path=customXml/item1.xml><?xml version="1.0" encoding="utf-8"?>
+<?mso-contentType ?>
+<FormTemplates xmlns="http://schemas.microsoft.com/sharepoint/v3/contenttype/forms">
+  <Display>DocumentLibraryForm</Display>
+  <Edit>DocumentLibraryForm</Edit>
+  <New>DocumentLibraryForm</New>
+</FormTemplates>
+</file>
+
+<file path=customXml/item2.xml><?xml version="1.0" encoding="utf-8"?>
 <ct:contentTypeSchema xmlns:ct="http://schemas.microsoft.com/office/2006/metadata/contentType" xmlns:ma="http://schemas.microsoft.com/office/2006/metadata/properties/metaAttributes" ct:_="" ma:_="" ma:contentTypeName="Документ" ma:contentTypeID="0x0101002A9C74E6E830D74E9B0FDDB4017A5417" ma:contentTypeVersion="13" ma:contentTypeDescription="Создание документа." ma:contentTypeScope="" ma:versionID="d4e423622451d608a8a05f4da7a1e1a2">
   <xsd:schema xmlns:xsd="http://www.w3.org/2001/XMLSchema" xmlns:xs="http://www.w3.org/2001/XMLSchema" xmlns:p="http://schemas.microsoft.com/office/2006/metadata/properties" xmlns:ns2="9875bd71-cde8-496c-a136-433f55d5e6d0" xmlns:ns3="e96afe77-3acb-4328-97fc-408e1bde3ecd" targetNamespace="http://schemas.microsoft.com/office/2006/metadata/properties" ma:root="true" ma:fieldsID="4831203c63c08b9f52ea6d3ee0d7a96e" ns2:_="" ns3:_="">
     <xsd:import namespace="9875bd71-cde8-496c-a136-433f55d5e6d0"/>
@@ -36808,15 +36696,6 @@
 </ct:contentTypeSchema>
 </file>
 
-<file path=customXml/item2.xml><?xml version="1.0" encoding="utf-8"?>
-<?mso-contentType ?>
-<FormTemplates xmlns="http://schemas.microsoft.com/sharepoint/v3/contenttype/forms">
-  <Display>DocumentLibraryForm</Display>
-  <Edit>DocumentLibraryForm</Edit>
-  <New>DocumentLibraryForm</New>
-</FormTemplates>
-</file>
-
 <file path=customXml/item3.xml><?xml version="1.0" encoding="utf-8"?>
 <p:properties xmlns:p="http://schemas.microsoft.com/office/2006/metadata/properties" xmlns:xsi="http://www.w3.org/2001/XMLSchema-instance" xmlns:pc="http://schemas.microsoft.com/office/infopath/2007/PartnerControls">
   <documentManagement/>
@@ -36824,6 +36703,14 @@
 </file>
 
 <file path=customXml/itemProps1.xml><?xml version="1.0" encoding="utf-8"?>
+<ds:datastoreItem xmlns:ds="http://schemas.openxmlformats.org/officeDocument/2006/customXml" ds:itemID="{B34386AA-1848-4C75-B336-1053927CB025}">
+  <ds:schemaRefs>
+    <ds:schemaRef ds:uri="http://schemas.microsoft.com/sharepoint/v3/contenttype/forms"/>
+  </ds:schemaRefs>
+</ds:datastoreItem>
+</file>
+
+<file path=customXml/itemProps2.xml><?xml version="1.0" encoding="utf-8"?>
 <ds:datastoreItem xmlns:ds="http://schemas.openxmlformats.org/officeDocument/2006/customXml" ds:itemID="{4D4651DD-DCCC-4759-B2F6-7F520BDCC2B9}">
   <ds:schemaRefs>
     <ds:schemaRef ds:uri="http://schemas.microsoft.com/office/2006/metadata/contentType"/>
@@ -36838,14 +36725,6 @@
     <ds:schemaRef ds:uri="http://purl.org/dc/elements/1.1/"/>
     <ds:schemaRef ds:uri="http://purl.org/dc/terms/"/>
     <ds:schemaRef ds:uri="http://schemas.microsoft.com/internal/obd"/>
-  </ds:schemaRefs>
-</ds:datastoreItem>
-</file>
-
-<file path=customXml/itemProps2.xml><?xml version="1.0" encoding="utf-8"?>
-<ds:datastoreItem xmlns:ds="http://schemas.openxmlformats.org/officeDocument/2006/customXml" ds:itemID="{B34386AA-1848-4C75-B336-1053927CB025}">
-  <ds:schemaRefs>
-    <ds:schemaRef ds:uri="http://schemas.microsoft.com/sharepoint/v3/contenttype/forms"/>
   </ds:schemaRefs>
 </ds:datastoreItem>
 </file>
